--- a/deliverables/REOAGMS-Team-Presentation.pptx
+++ b/deliverables/REOAGMS-Team-Presentation.pptx
@@ -599,7 +599,7 @@
           <a:p>
             <a:r>
               <a:rPr lang="en-US" dirty="0"/>
-              <a:t>All members (4:50–5:00): ALL: Thank you. We are happy to take your questions.</a:t>
+              <a:t>All members (4:50–5:00): Thank you. We are happy to take your questions.</a:t>
             </a:r>
             <a:endParaRPr lang="en-US" dirty="0"/>
           </a:p>
@@ -1303,7 +1303,7 @@
           <a:p>
             <a:r>
               <a:rPr lang="en-US" dirty="0"/>
-              <a:t>All members (4:15–4:50): CHARITH: Operations are visible in Grafana, where Prometheus scrapes all seven services. NEMAL: Validation and tests protect every API. GOVINDU: Rules are data, so thresholds change without code. THURUNU: Every fault ends as recorded maintenance. YASIRU: Every notification is stored and can be retried. SACHINTHANA: Reports turn operations into decisions.</a:t>
+              <a:t>Charith (4:15–4:50): Operations are visible in Grafana, where Prometheus scrapes all seven services and shows platform health. Behind the demo are sixty test methods, validation and error handling in every service, and a versioned event contract that keeps the services compatible. The whole system starts with one docker compose command.</a:t>
             </a:r>
             <a:endParaRPr lang="en-US" dirty="0"/>
           </a:p>
@@ -9370,7 +9370,7 @@
                 <a:ea typeface="Segoe UI Semibold" pitchFamily="34" charset="-122"/>
                 <a:cs typeface="Segoe UI Semibold" pitchFamily="34" charset="-120"/>
               </a:rPr>
-              <a:t>09 · ALL MEMBERS · OPERATIONS AND QUALITY</a:t>
+              <a:t>09 · CHARITH · OPERATIONS AND QUALITY</a:t>
             </a:r>
             <a:endParaRPr lang="en-US" sz="1100" dirty="0"/>
           </a:p>

--- a/deliverables/REOAGMS-Team-Presentation.pptx
+++ b/deliverables/REOAGMS-Team-Presentation.pptx
@@ -511,7 +511,7 @@
           <a:p>
             <a:r>
               <a:rPr lang="en-US" dirty="0"/>
-              <a:t>Charith (0:00–0:10): Good morning. We are presenting REOAGMS, a platform that monitors and maintains renewable energy assets in real time.</a:t>
+              <a:t>Charith (0:00–0:08): Good morning. We are presenting REOAGMS, a platform that monitors and maintains renewable energy assets in real time.</a:t>
             </a:r>
             <a:endParaRPr lang="en-US" dirty="0"/>
           </a:p>
@@ -599,7 +599,7 @@
           <a:p>
             <a:r>
               <a:rPr lang="en-US" dirty="0"/>
-              <a:t>All members (4:50–5:00): Thank you. We are happy to take your questions.</a:t>
+              <a:t>All members (4:54–5:00): Thank you. We are happy to take your questions.</a:t>
             </a:r>
             <a:endParaRPr lang="en-US" dirty="0"/>
           </a:p>
@@ -687,7 +687,7 @@
           <a:p>
             <a:r>
               <a:rPr lang="en-US" dirty="0"/>
-              <a:t>Charith (0:10–0:45): REOAGMS is six Spring Boot microservices behind one API gateway, connected by RabbitMQ events, each with its own PostgreSQL database. I sign in as the administrator; the gateway validates my token and role. This is the control room: live generation, open alerts, device health and an hourly energy curve. Nemal will show where this data comes from.</a:t>
+              <a:t>Charith (0:08–0:33): REOAGMS is six Spring Boot microservices behind one API gateway, connected by RabbitMQ events, each with its own PostgreSQL database. I sign in as the administrator, and this is the control room with live data. Nemal will show where it comes from.</a:t>
             </a:r>
             <a:endParaRPr lang="en-US" dirty="0"/>
           </a:p>
@@ -775,7 +775,7 @@
           <a:p>
             <a:r>
               <a:rPr lang="en-US" dirty="0"/>
-              <a:t>Nemal (0:45–1:15): Thank you, Charith. The Asset Service owns the registry: five facilities, eleven assets and thirty-two sensors across solar, wind, hydro, battery and tidal. Lists are searched and paged on the server, and every form is validated, so a blank name is rejected. Only administrators and managers can change data. Every other service refers to these assets by ID. Govindu will show them producing live data.</a:t>
+              <a:t>Nemal (0:33–1:00): Thank you, Charith. The Asset Service owns the registry: five facilities, eleven assets and thirty-two sensors. Lists are searched and paged on the server, and every form is validated, so a blank name is rejected. Govindu will show these assets producing live data.</a:t>
             </a:r>
             <a:endParaRPr lang="en-US" dirty="0"/>
           </a:p>
@@ -863,7 +863,7 @@
           <a:p>
             <a:r>
               <a:rPr lang="en-US" dirty="0"/>
-              <a:t>Govindu (1:15–2:00): Thanks, Nemal. The Monitoring Service receives a reading from every sensor and checks it against our alert rules. This tile is a live sensor and the dashed line is its threshold. The simulator has just injected a fault, and here is the alert, instantly. One alert is stored, one event goes to RabbitMQ, and the browser is updated over WebSocket. That same event is now reaching Thurunu.</a:t>
+              <a:t>Govindu (1:00–1:49): Thanks, Nemal. The Monitoring Service receives a reading from every sensor and checks it against our alert rules. This tile is a live sensor and the dashed line is its threshold. The simulator has just injected a fault, and here is the alert, instantly. One alert is stored, one event goes to RabbitMQ, and the browser is updated over WebSocket. That same event is now reaching Thurunu.</a:t>
             </a:r>
             <a:endParaRPr lang="en-US" dirty="0"/>
           </a:p>
@@ -951,7 +951,7 @@
           <a:p>
             <a:r>
               <a:rPr lang="en-US" dirty="0"/>
-              <a:t>Thurunu (2:00–2:35): Yes. The Maintenance Service received the same event and, because the severity is high, it opened a corrective work order by itself. Here it is on the board. I assign a technician, start the work and complete it. Each step is its own endpoint, and the finished job is saved to the maintenance history. Yasiru will show how people are informed.</a:t>
+              <a:t>Thurunu (1:49–2:38): Yes. The Maintenance Service received the same event and, because the severity is high, it opened a corrective work order by itself. Here it is on the board. I assign a technician, start the work and complete it. Each step is its own endpoint, and the finished job is saved to the maintenance history. Yasiru will show how people are informed.</a:t>
             </a:r>
             <a:endParaRPr lang="en-US" dirty="0"/>
           </a:p>
@@ -1039,7 +1039,7 @@
           <a:p>
             <a:r>
               <a:rPr lang="en-US" dirty="0"/>
-              <a:t>Yasiru (2:35–3:05): The Notification Service read the same alert from its own RabbitMQ queue. In this history, the in-app push was delivered instantly, and every email attempt is stored with its status, retry count and reason. A scheduler retries up to three times, I can retry any message here, and failing messages go to a dead-letter queue, so nothing is lost. Sachinthana will turn all this into reports.</a:t>
+              <a:t>Yasiru (2:38–3:27): The Notification Service read the same alert from its own RabbitMQ queue. In this history, the in-app push was delivered instantly, and every email attempt is stored with its status, retry count and reason. A scheduler retries up to three times, I can retry any message here, and failing messages go to a dead-letter queue, so nothing is lost. Sachinthana will turn all this into reports.</a:t>
             </a:r>
             <a:endParaRPr lang="en-US" dirty="0"/>
           </a:p>
@@ -1127,7 +1127,7 @@
           <a:p>
             <a:r>
               <a:rPr lang="en-US" dirty="0"/>
-              <a:t>Sachinthana (3:05–3:45): The Analytics Service calls the other services over REST and never touches their databases. For this facility it integrates average power into kilowatt-hours for each hour, and calculates availability, efficiency and capacity factor. I generate an energy report for the last day and export it as CSV for management. Executives see all of this read-only. Charith will close with security.</a:t>
+              <a:t>Sachinthana (3:27–4:16): The Analytics Service calls the other services over REST and never touches their databases. For this facility it integrates average power into kilowatt-hours for each hour, and calculates availability, efficiency and capacity factor. I generate an energy report for the last day and export it as CSV for management. Nemal will show who is allowed to see it.</a:t>
             </a:r>
             <a:endParaRPr lang="en-US" dirty="0"/>
           </a:p>
@@ -1215,7 +1215,7 @@
           <a:p>
             <a:r>
               <a:rPr lang="en-US" dirty="0"/>
-              <a:t>Charith (3:45–4:15): Security is enforced at the gateway. Five roles carry different rights. I sign in as the executive: there are no action buttons, and the API itself answers 403 for any write. Every login and user change is recorded in the audit log. Quality is built in as well, with sixty test methods across the services.</a:t>
+              <a:t>Nemal (4:16–4:38): Access is enforced at the gateway, and five roles carry different rights. I sign in as the executive: there are no action buttons, and the API itself refuses any write. Charith will close.</a:t>
             </a:r>
             <a:endParaRPr lang="en-US" dirty="0"/>
           </a:p>
@@ -1303,7 +1303,7 @@
           <a:p>
             <a:r>
               <a:rPr lang="en-US" dirty="0"/>
-              <a:t>Charith (4:15–4:50): Operations are visible in Grafana, where Prometheus scrapes all seven services and shows platform health. Behind the demo are sixty test methods, validation and error handling in every service, and a versioned event contract that keeps the services compatible. The whole system starts with one docker compose command.</a:t>
+              <a:t>Charith (4:38–4:54): Grafana shows platform health from Prometheus across all seven services. Sixty tests protect the services, and one docker compose command starts everything.</a:t>
             </a:r>
             <a:endParaRPr lang="en-US" dirty="0"/>
           </a:p>
@@ -2202,7 +2202,7 @@
                 <a:ea typeface="Segoe UI" pitchFamily="34" charset="-122"/>
                 <a:cs typeface="Segoe UI" pitchFamily="34" charset="-120"/>
               </a:rPr>
-              <a:t>02  ·  0:10–0:45</a:t>
+              <a:t>02  ·  0:08–0:33</a:t>
             </a:r>
             <a:endParaRPr lang="en-US" sz="900" dirty="0"/>
           </a:p>
@@ -3298,7 +3298,7 @@
                 <a:ea typeface="Segoe UI" pitchFamily="34" charset="-122"/>
                 <a:cs typeface="Segoe UI" pitchFamily="34" charset="-120"/>
               </a:rPr>
-              <a:t>03  ·  0:45–1:15</a:t>
+              <a:t>03  ·  0:33–1:00</a:t>
             </a:r>
             <a:endParaRPr lang="en-US" sz="900" dirty="0"/>
           </a:p>
@@ -4262,7 +4262,7 @@
                 <a:ea typeface="Segoe UI" pitchFamily="34" charset="-122"/>
                 <a:cs typeface="Segoe UI" pitchFamily="34" charset="-120"/>
               </a:rPr>
-              <a:t>04  ·  1:15–2:00</a:t>
+              <a:t>04  ·  1:00–1:49</a:t>
             </a:r>
             <a:endParaRPr lang="en-US" sz="900" dirty="0"/>
           </a:p>
@@ -5370,7 +5370,7 @@
                 <a:ea typeface="Segoe UI" pitchFamily="34" charset="-122"/>
                 <a:cs typeface="Segoe UI" pitchFamily="34" charset="-120"/>
               </a:rPr>
-              <a:t>05  ·  2:00–2:35</a:t>
+              <a:t>05  ·  1:49–2:38</a:t>
             </a:r>
             <a:endParaRPr lang="en-US" sz="900" dirty="0"/>
           </a:p>
@@ -6478,7 +6478,7 @@
                 <a:ea typeface="Segoe UI" pitchFamily="34" charset="-122"/>
                 <a:cs typeface="Segoe UI" pitchFamily="34" charset="-120"/>
               </a:rPr>
-              <a:t>06  ·  2:35–3:05</a:t>
+              <a:t>06  ·  2:38–3:27</a:t>
             </a:r>
             <a:endParaRPr lang="en-US" sz="900" dirty="0"/>
           </a:p>
@@ -7586,7 +7586,7 @@
                 <a:ea typeface="Segoe UI" pitchFamily="34" charset="-122"/>
                 <a:cs typeface="Segoe UI" pitchFamily="34" charset="-120"/>
               </a:rPr>
-              <a:t>07  ·  3:05–3:45</a:t>
+              <a:t>07  ·  3:27–4:16</a:t>
             </a:r>
             <a:endParaRPr lang="en-US" sz="900" dirty="0"/>
           </a:p>
@@ -8577,7 +8577,7 @@
                 <a:ea typeface="Segoe UI Semibold" pitchFamily="34" charset="-122"/>
                 <a:cs typeface="Segoe UI Semibold" pitchFamily="34" charset="-120"/>
               </a:rPr>
-              <a:t>08 · CHARITH · SECURITY</a:t>
+              <a:t>08 · NEMAL · SECURITY</a:t>
             </a:r>
             <a:endParaRPr lang="en-US" sz="1100" dirty="0"/>
           </a:p>
@@ -8694,7 +8694,7 @@
                 <a:ea typeface="Segoe UI" pitchFamily="34" charset="-122"/>
                 <a:cs typeface="Segoe UI" pitchFamily="34" charset="-120"/>
               </a:rPr>
-              <a:t>08  ·  3:45–4:15</a:t>
+              <a:t>08  ·  4:16–4:38</a:t>
             </a:r>
             <a:endParaRPr lang="en-US" sz="900" dirty="0"/>
           </a:p>
@@ -9487,7 +9487,7 @@
                 <a:ea typeface="Segoe UI" pitchFamily="34" charset="-122"/>
                 <a:cs typeface="Segoe UI" pitchFamily="34" charset="-120"/>
               </a:rPr>
-              <a:t>09  ·  4:15–4:50</a:t>
+              <a:t>09  ·  4:38–4:54</a:t>
             </a:r>
             <a:endParaRPr lang="en-US" sz="900" dirty="0"/>
           </a:p>

--- a/deliverables/REOAGMS-Team-Presentation.pptx
+++ b/deliverables/REOAGMS-Team-Presentation.pptx
@@ -1,24 +1,24 @@
 
 <file path=ppt/presentation.xml><?xml version="1.0" encoding="utf-8"?>
-<p:presentation xmlns:a="http://schemas.openxmlformats.org/drawingml/2006/main" xmlns:r="http://schemas.openxmlformats.org/officeDocument/2006/relationships" xmlns:p="http://schemas.openxmlformats.org/presentationml/2006/main" saveSubsetFonts="1" autoCompressPictures="0">
+<p:presentation xmlns:a="http://schemas.openxmlformats.org/drawingml/2006/main" xmlns:r="http://schemas.openxmlformats.org/officeDocument/2006/relationships" xmlns:p="http://schemas.openxmlformats.org/presentationml/2006/main" autoCompressPictures="0">
   <p:sldMasterIdLst>
     <p:sldMasterId id="2147483648" r:id="rId1"/>
   </p:sldMasterIdLst>
+  <p:notesMasterIdLst>
+    <p:notesMasterId r:id="rId4"/>
+  </p:notesMasterIdLst>
   <p:sldIdLst>
-    <p:sldId id="256" r:id="rId2"/>
-    <p:sldId id="257" r:id="rId3"/>
-    <p:sldId id="258" r:id="rId4"/>
-    <p:sldId id="259" r:id="rId5"/>
-    <p:sldId id="260" r:id="rId6"/>
-    <p:sldId id="261" r:id="rId7"/>
-    <p:sldId id="262" r:id="rId8"/>
-    <p:sldId id="263" r:id="rId9"/>
-    <p:sldId id="264" r:id="rId10"/>
-    <p:sldId id="265" r:id="rId11"/>
+    <p:sldId id="256" r:id="rId3"/>
+    <p:sldId id="257" r:id="rId5"/>
+    <p:sldId id="258" r:id="rId6"/>
+    <p:sldId id="259" r:id="rId7"/>
+    <p:sldId id="260" r:id="rId8"/>
+    <p:sldId id="261" r:id="rId9"/>
+    <p:sldId id="262" r:id="rId10"/>
+    <p:sldId id="263" r:id="rId11"/>
+    <p:sldId id="264" r:id="rId12"/>
+    <p:sldId id="265" r:id="rId13"/>
   </p:sldIdLst>
-  <p:notesMasterIdLst>
-    <p:notesMasterId r:id="rId12"/>
-  </p:notesMasterIdLst>
   <p:sldSz cx="9144000" cy="5143500"/>
   <p:notesSz cx="5143500" cy="9144000"/>
   <p:defaultTextStyle>
@@ -198,7 +198,6 @@
           <a:p>
             <a:fld id="{5282F153-3F37-0F45-9E97-73ACFA13230C}" type="datetimeFigureOut">
               <a:rPr lang="en-US"/>
-              <a:t>7/23/19</a:t>
             </a:fld>
             <a:endParaRPr lang="en-US"/>
           </a:p>
@@ -265,6 +264,7 @@
               <a:rPr lang="en-US"/>
               <a:t>Click to edit Master text styles</a:t>
             </a:r>
+            <a:endParaRPr lang="en-US"/>
           </a:p>
           <a:p>
             <a:pPr lvl="1"/>
@@ -272,6 +272,7 @@
               <a:rPr lang="en-US"/>
               <a:t>Second level</a:t>
             </a:r>
+            <a:endParaRPr lang="en-US"/>
           </a:p>
           <a:p>
             <a:pPr lvl="2"/>
@@ -279,6 +280,7 @@
               <a:rPr lang="en-US"/>
               <a:t>Third level</a:t>
             </a:r>
+            <a:endParaRPr lang="en-US"/>
           </a:p>
           <a:p>
             <a:pPr lvl="3"/>
@@ -286,6 +288,7 @@
               <a:rPr lang="en-US"/>
               <a:t>Fourth level</a:t>
             </a:r>
+            <a:endParaRPr lang="en-US"/>
           </a:p>
           <a:p>
             <a:pPr lvl="4"/>
@@ -293,6 +296,7 @@
               <a:rPr lang="en-US"/>
               <a:t>Fifth level</a:t>
             </a:r>
+            <a:endParaRPr lang="en-US"/>
           </a:p>
         </p:txBody>
       </p:sp>
@@ -356,18 +360,12 @@
           <a:p>
             <a:fld id="{CE5E9CC1-C706-0F49-92D6-E571CC5EEA8F}" type="slidenum">
               <a:rPr lang="en-US"/>
-              <a:t>‹#›</a:t>
             </a:fld>
             <a:endParaRPr lang="en-US"/>
           </a:p>
         </p:txBody>
       </p:sp>
     </p:spTree>
-    <p:extLst>
-      <p:ext uri="{BB962C8B-B14F-4D97-AF65-F5344CB8AC3E}">
-        <p14:creationId xmlns:p14="http://schemas.microsoft.com/office/powerpoint/2010/main" val="1024086991"/>
-      </p:ext>
-    </p:extLst>
   </p:cSld>
   <p:clrMap bg1="lt1" tx1="dk1" bg2="lt2" tx2="dk2" accent1="accent1" accent2="accent2" accent3="accent3" accent4="accent4" accent5="accent5" accent6="accent6" hlink="hlink" folHlink="folHlink"/>
   <p:notesStyle>
@@ -534,18 +532,12 @@
           <a:p>
             <a:fld id="{F7021451-1387-4CA6-816F-3879F97B5CBC}" type="slidenum">
               <a:rPr lang="en-US"/>
-              <a:t>1</a:t>
             </a:fld>
             <a:endParaRPr lang="en-US"/>
           </a:p>
         </p:txBody>
       </p:sp>
     </p:spTree>
-    <p:extLst>
-      <p:ext uri="{BB962C8B-B14F-4D97-AF65-F5344CB8AC3E}">
-        <p14:creationId xmlns:p14="http://schemas.microsoft.com/office/powerpoint/2010/main" val="1024086991"/>
-      </p:ext>
-    </p:extLst>
   </p:cSld>
   <p:clrMapOvr>
     <a:masterClrMapping/>
@@ -622,18 +614,12 @@
           <a:p>
             <a:fld id="{F7021451-1387-4CA6-816F-3879F97B5CBC}" type="slidenum">
               <a:rPr lang="en-US"/>
-              <a:t>10</a:t>
             </a:fld>
             <a:endParaRPr lang="en-US"/>
           </a:p>
         </p:txBody>
       </p:sp>
     </p:spTree>
-    <p:extLst>
-      <p:ext uri="{BB962C8B-B14F-4D97-AF65-F5344CB8AC3E}">
-        <p14:creationId xmlns:p14="http://schemas.microsoft.com/office/powerpoint/2010/main" val="1024086991"/>
-      </p:ext>
-    </p:extLst>
   </p:cSld>
   <p:clrMapOvr>
     <a:masterClrMapping/>
@@ -710,18 +696,12 @@
           <a:p>
             <a:fld id="{F7021451-1387-4CA6-816F-3879F97B5CBC}" type="slidenum">
               <a:rPr lang="en-US"/>
-              <a:t>2</a:t>
             </a:fld>
             <a:endParaRPr lang="en-US"/>
           </a:p>
         </p:txBody>
       </p:sp>
     </p:spTree>
-    <p:extLst>
-      <p:ext uri="{BB962C8B-B14F-4D97-AF65-F5344CB8AC3E}">
-        <p14:creationId xmlns:p14="http://schemas.microsoft.com/office/powerpoint/2010/main" val="1024086991"/>
-      </p:ext>
-    </p:extLst>
   </p:cSld>
   <p:clrMapOvr>
     <a:masterClrMapping/>
@@ -798,18 +778,12 @@
           <a:p>
             <a:fld id="{F7021451-1387-4CA6-816F-3879F97B5CBC}" type="slidenum">
               <a:rPr lang="en-US"/>
-              <a:t>3</a:t>
             </a:fld>
             <a:endParaRPr lang="en-US"/>
           </a:p>
         </p:txBody>
       </p:sp>
     </p:spTree>
-    <p:extLst>
-      <p:ext uri="{BB962C8B-B14F-4D97-AF65-F5344CB8AC3E}">
-        <p14:creationId xmlns:p14="http://schemas.microsoft.com/office/powerpoint/2010/main" val="1024086991"/>
-      </p:ext>
-    </p:extLst>
   </p:cSld>
   <p:clrMapOvr>
     <a:masterClrMapping/>
@@ -886,18 +860,12 @@
           <a:p>
             <a:fld id="{F7021451-1387-4CA6-816F-3879F97B5CBC}" type="slidenum">
               <a:rPr lang="en-US"/>
-              <a:t>4</a:t>
             </a:fld>
             <a:endParaRPr lang="en-US"/>
           </a:p>
         </p:txBody>
       </p:sp>
     </p:spTree>
-    <p:extLst>
-      <p:ext uri="{BB962C8B-B14F-4D97-AF65-F5344CB8AC3E}">
-        <p14:creationId xmlns:p14="http://schemas.microsoft.com/office/powerpoint/2010/main" val="1024086991"/>
-      </p:ext>
-    </p:extLst>
   </p:cSld>
   <p:clrMapOvr>
     <a:masterClrMapping/>
@@ -974,18 +942,12 @@
           <a:p>
             <a:fld id="{F7021451-1387-4CA6-816F-3879F97B5CBC}" type="slidenum">
               <a:rPr lang="en-US"/>
-              <a:t>5</a:t>
             </a:fld>
             <a:endParaRPr lang="en-US"/>
           </a:p>
         </p:txBody>
       </p:sp>
     </p:spTree>
-    <p:extLst>
-      <p:ext uri="{BB962C8B-B14F-4D97-AF65-F5344CB8AC3E}">
-        <p14:creationId xmlns:p14="http://schemas.microsoft.com/office/powerpoint/2010/main" val="1024086991"/>
-      </p:ext>
-    </p:extLst>
   </p:cSld>
   <p:clrMapOvr>
     <a:masterClrMapping/>
@@ -1062,18 +1024,12 @@
           <a:p>
             <a:fld id="{F7021451-1387-4CA6-816F-3879F97B5CBC}" type="slidenum">
               <a:rPr lang="en-US"/>
-              <a:t>6</a:t>
             </a:fld>
             <a:endParaRPr lang="en-US"/>
           </a:p>
         </p:txBody>
       </p:sp>
     </p:spTree>
-    <p:extLst>
-      <p:ext uri="{BB962C8B-B14F-4D97-AF65-F5344CB8AC3E}">
-        <p14:creationId xmlns:p14="http://schemas.microsoft.com/office/powerpoint/2010/main" val="1024086991"/>
-      </p:ext>
-    </p:extLst>
   </p:cSld>
   <p:clrMapOvr>
     <a:masterClrMapping/>
@@ -1150,18 +1106,12 @@
           <a:p>
             <a:fld id="{F7021451-1387-4CA6-816F-3879F97B5CBC}" type="slidenum">
               <a:rPr lang="en-US"/>
-              <a:t>7</a:t>
             </a:fld>
             <a:endParaRPr lang="en-US"/>
           </a:p>
         </p:txBody>
       </p:sp>
     </p:spTree>
-    <p:extLst>
-      <p:ext uri="{BB962C8B-B14F-4D97-AF65-F5344CB8AC3E}">
-        <p14:creationId xmlns:p14="http://schemas.microsoft.com/office/powerpoint/2010/main" val="1024086991"/>
-      </p:ext>
-    </p:extLst>
   </p:cSld>
   <p:clrMapOvr>
     <a:masterClrMapping/>
@@ -1238,18 +1188,12 @@
           <a:p>
             <a:fld id="{F7021451-1387-4CA6-816F-3879F97B5CBC}" type="slidenum">
               <a:rPr lang="en-US"/>
-              <a:t>8</a:t>
             </a:fld>
             <a:endParaRPr lang="en-US"/>
           </a:p>
         </p:txBody>
       </p:sp>
     </p:spTree>
-    <p:extLst>
-      <p:ext uri="{BB962C8B-B14F-4D97-AF65-F5344CB8AC3E}">
-        <p14:creationId xmlns:p14="http://schemas.microsoft.com/office/powerpoint/2010/main" val="1024086991"/>
-      </p:ext>
-    </p:extLst>
   </p:cSld>
   <p:clrMapOvr>
     <a:masterClrMapping/>
@@ -1326,18 +1270,12 @@
           <a:p>
             <a:fld id="{F7021451-1387-4CA6-816F-3879F97B5CBC}" type="slidenum">
               <a:rPr lang="en-US"/>
-              <a:t>9</a:t>
             </a:fld>
             <a:endParaRPr lang="en-US"/>
           </a:p>
         </p:txBody>
       </p:sp>
     </p:spTree>
-    <p:extLst>
-      <p:ext uri="{BB962C8B-B14F-4D97-AF65-F5344CB8AC3E}">
-        <p14:creationId xmlns:p14="http://schemas.microsoft.com/office/powerpoint/2010/main" val="1024086991"/>
-      </p:ext>
-    </p:extLst>
   </p:cSld>
   <p:clrMapOvr>
     <a:masterClrMapping/>
@@ -1378,6 +1316,11 @@
 <file path=ppt/slideMasters/slideMaster1.xml><?xml version="1.0" encoding="utf-8"?>
 <p:sldMaster xmlns:a="http://schemas.openxmlformats.org/drawingml/2006/main" xmlns:r="http://schemas.openxmlformats.org/officeDocument/2006/relationships" xmlns:p="http://schemas.openxmlformats.org/presentationml/2006/main">
   <p:cSld>
+    <p:bg>
+      <p:bgRef idx="1001">
+        <a:schemeClr val="bg1"/>
+      </p:bgRef>
+    </p:bg>
     <p:spTree>
       <p:nvGrpSpPr>
         <p:cNvPr id="1" name=""/>
@@ -1421,7 +1364,7 @@
         <a:spcBef>
           <a:spcPct val="20000"/>
         </a:spcBef>
-        <a:buFont typeface="Arial" pitchFamily="34" charset="0"/>
+        <a:buFont typeface="Arial" panose="020B0604020202020204" pitchFamily="34" charset="0"/>
         <a:buChar char="•"/>
         <a:defRPr sz="3200" kern="1200">
           <a:solidFill>
@@ -1436,7 +1379,7 @@
         <a:spcBef>
           <a:spcPct val="20000"/>
         </a:spcBef>
-        <a:buFont typeface="Arial" pitchFamily="34" charset="0"/>
+        <a:buFont typeface="Arial" panose="020B0604020202020204" pitchFamily="34" charset="0"/>
         <a:buChar char="–"/>
         <a:defRPr sz="2800" kern="1200">
           <a:solidFill>
@@ -1451,7 +1394,7 @@
         <a:spcBef>
           <a:spcPct val="20000"/>
         </a:spcBef>
-        <a:buFont typeface="Arial" pitchFamily="34" charset="0"/>
+        <a:buFont typeface="Arial" panose="020B0604020202020204" pitchFamily="34" charset="0"/>
         <a:buChar char="•"/>
         <a:defRPr sz="2400" kern="1200">
           <a:solidFill>
@@ -1466,7 +1409,7 @@
         <a:spcBef>
           <a:spcPct val="20000"/>
         </a:spcBef>
-        <a:buFont typeface="Arial" pitchFamily="34" charset="0"/>
+        <a:buFont typeface="Arial" panose="020B0604020202020204" pitchFamily="34" charset="0"/>
         <a:buChar char="–"/>
         <a:defRPr sz="2000" kern="1200">
           <a:solidFill>
@@ -1481,7 +1424,7 @@
         <a:spcBef>
           <a:spcPct val="20000"/>
         </a:spcBef>
-        <a:buFont typeface="Arial" pitchFamily="34" charset="0"/>
+        <a:buFont typeface="Arial" panose="020B0604020202020204" pitchFamily="34" charset="0"/>
         <a:buChar char="»"/>
         <a:defRPr sz="2000" kern="1200">
           <a:solidFill>
@@ -1496,7 +1439,7 @@
         <a:spcBef>
           <a:spcPct val="20000"/>
         </a:spcBef>
-        <a:buFont typeface="Arial" pitchFamily="34" charset="0"/>
+        <a:buFont typeface="Arial" panose="020B0604020202020204" pitchFamily="34" charset="0"/>
         <a:buChar char="•"/>
         <a:defRPr sz="2000" kern="1200">
           <a:solidFill>
@@ -1511,7 +1454,7 @@
         <a:spcBef>
           <a:spcPct val="20000"/>
         </a:spcBef>
-        <a:buFont typeface="Arial" pitchFamily="34" charset="0"/>
+        <a:buFont typeface="Arial" panose="020B0604020202020204" pitchFamily="34" charset="0"/>
         <a:buChar char="•"/>
         <a:defRPr sz="2000" kern="1200">
           <a:solidFill>
@@ -1526,7 +1469,7 @@
         <a:spcBef>
           <a:spcPct val="20000"/>
         </a:spcBef>
-        <a:buFont typeface="Arial" pitchFamily="34" charset="0"/>
+        <a:buFont typeface="Arial" panose="020B0604020202020204" pitchFamily="34" charset="0"/>
         <a:buChar char="•"/>
         <a:defRPr sz="2000" kern="1200">
           <a:solidFill>
@@ -1541,7 +1484,7 @@
         <a:spcBef>
           <a:spcPct val="20000"/>
         </a:spcBef>
-        <a:buFont typeface="Arial" pitchFamily="34" charset="0"/>
+        <a:buFont typeface="Arial" panose="020B0604020202020204" pitchFamily="34" charset="0"/>
         <a:buChar char="•"/>
         <a:defRPr sz="2000" kern="1200">
           <a:solidFill>
@@ -1654,12 +1597,13 @@
 
 <file path=ppt/slides/slide1.xml><?xml version="1.0" encoding="utf-8"?>
 <p:sld xmlns:a="http://schemas.openxmlformats.org/drawingml/2006/main" xmlns:r="http://schemas.openxmlformats.org/officeDocument/2006/relationships" xmlns:p="http://schemas.openxmlformats.org/presentationml/2006/main">
-  <p:cSld name="Slide 1">
+  <p:cSld>
     <p:bg>
       <p:bgPr>
         <a:solidFill>
           <a:srgbClr val="0A1020"/>
         </a:solidFill>
+        <a:effectLst/>
       </p:bgPr>
     </p:bg>
     <p:spTree>
@@ -1691,23 +1635,22 @@
             <a:avLst/>
           </a:prstGeom>
           <a:noFill/>
-          <a:ln/>
-        </p:spPr>
-        <p:txBody>
-          <a:bodyPr wrap="square" lIns="0" tIns="0" rIns="0" bIns="0" rtlCol="0" anchor="ctr"/>
-          <a:lstStyle/>
-          <a:p>
-            <a:pPr indent="0" marL="0">
-              <a:buNone/>
-            </a:pPr>
-            <a:r>
-              <a:rPr lang="en-US" sz="1200" spc="500" kern="0" dirty="0">
+        </p:spPr>
+        <p:txBody>
+          <a:bodyPr wrap="square" lIns="0" tIns="0" rIns="0" bIns="0" rtlCol="0" anchor="ctr"/>
+          <a:lstStyle/>
+          <a:p>
+            <a:pPr marL="0" indent="0">
+              <a:buNone/>
+            </a:pPr>
+            <a:r>
+              <a:rPr lang="en-US" sz="1200" kern="0" spc="500" dirty="0">
                 <a:solidFill>
                   <a:srgbClr val="22D3EE"/>
                 </a:solidFill>
-                <a:latin typeface="Segoe UI Semibold" pitchFamily="34" charset="0"/>
-                <a:ea typeface="Segoe UI Semibold" pitchFamily="34" charset="-122"/>
-                <a:cs typeface="Segoe UI Semibold" pitchFamily="34" charset="-120"/>
+                <a:latin typeface="Segoe UI Semibold" panose="020B0702040204020203" pitchFamily="34" charset="0"/>
+                <a:ea typeface="Segoe UI Semibold" panose="020B0702040204020203" pitchFamily="34" charset="-122"/>
+                <a:cs typeface="Segoe UI Semibold" panose="020B0702040204020203" pitchFamily="34" charset="-120"/>
               </a:rPr>
               <a:t>EC8208  ·  SOFTWARE ARCHITECTURE</a:t>
             </a:r>
@@ -1730,13 +1673,12 @@
             <a:avLst/>
           </a:prstGeom>
           <a:noFill/>
-          <a:ln/>
-        </p:spPr>
-        <p:txBody>
-          <a:bodyPr wrap="square" lIns="0" tIns="0" rIns="0" bIns="0" rtlCol="0" anchor="ctr"/>
-          <a:lstStyle/>
-          <a:p>
-            <a:pPr indent="0" marL="0">
+        </p:spPr>
+        <p:txBody>
+          <a:bodyPr wrap="square" lIns="0" tIns="0" rIns="0" bIns="0" rtlCol="0" anchor="ctr"/>
+          <a:lstStyle/>
+          <a:p>
+            <a:pPr marL="0" indent="0">
               <a:buNone/>
             </a:pPr>
             <a:r>
@@ -1744,9 +1686,9 @@
                 <a:solidFill>
                   <a:srgbClr val="F1F5FB"/>
                 </a:solidFill>
-                <a:latin typeface="Segoe UI Semibold" pitchFamily="34" charset="0"/>
-                <a:ea typeface="Segoe UI Semibold" pitchFamily="34" charset="-122"/>
-                <a:cs typeface="Segoe UI Semibold" pitchFamily="34" charset="-120"/>
+                <a:latin typeface="Segoe UI Semibold" panose="020B0702040204020203" pitchFamily="34" charset="0"/>
+                <a:ea typeface="Segoe UI Semibold" panose="020B0702040204020203" pitchFamily="34" charset="-122"/>
+                <a:cs typeface="Segoe UI Semibold" panose="020B0702040204020203" pitchFamily="34" charset="-120"/>
               </a:rPr>
               <a:t>REOAGMS</a:t>
             </a:r>
@@ -1769,13 +1711,12 @@
             <a:avLst/>
           </a:prstGeom>
           <a:noFill/>
-          <a:ln/>
-        </p:spPr>
-        <p:txBody>
-          <a:bodyPr wrap="square" lIns="0" tIns="0" rIns="0" bIns="0" rtlCol="0" anchor="ctr"/>
-          <a:lstStyle/>
-          <a:p>
-            <a:pPr indent="0" marL="0">
+        </p:spPr>
+        <p:txBody>
+          <a:bodyPr wrap="square" lIns="0" tIns="0" rIns="0" bIns="0" rtlCol="0" anchor="ctr"/>
+          <a:lstStyle/>
+          <a:p>
+            <a:pPr marL="0" indent="0">
               <a:buNone/>
             </a:pPr>
             <a:r>
@@ -1783,52 +1724,13 @@
                 <a:solidFill>
                   <a:srgbClr val="8C9BB8"/>
                 </a:solidFill>
-                <a:latin typeface="Segoe UI" pitchFamily="34" charset="0"/>
-                <a:ea typeface="Segoe UI" pitchFamily="34" charset="-122"/>
-                <a:cs typeface="Segoe UI" pitchFamily="34" charset="-120"/>
+                <a:latin typeface="Segoe UI" panose="020B0502040204020203" pitchFamily="34" charset="0"/>
+                <a:ea typeface="Segoe UI" panose="020B0502040204020203" pitchFamily="34" charset="-122"/>
+                <a:cs typeface="Segoe UI" panose="020B0502040204020203" pitchFamily="34" charset="-120"/>
               </a:rPr>
               <a:t>Renewable Energy Operations, Asset and Grid Management System</a:t>
             </a:r>
             <a:endParaRPr lang="en-US" sz="2000" dirty="0"/>
-          </a:p>
-        </p:txBody>
-      </p:sp>
-      <p:sp>
-        <p:nvSpPr>
-          <p:cNvPr id="6" name="Text 3"/>
-          <p:cNvSpPr txBox="1"/>
-          <p:nvPr/>
-        </p:nvSpPr>
-        <p:spPr>
-          <a:xfrm>
-            <a:off x="640080" y="3977640"/>
-            <a:ext cx="7863840" cy="320040"/>
-          </a:xfrm>
-          <a:prstGeom prst="rect">
-            <a:avLst/>
-          </a:prstGeom>
-          <a:noFill/>
-          <a:ln/>
-        </p:spPr>
-        <p:txBody>
-          <a:bodyPr wrap="square" lIns="0" tIns="0" rIns="0" bIns="0" rtlCol="0" anchor="ctr"/>
-          <a:lstStyle/>
-          <a:p>
-            <a:pPr indent="0" marL="0">
-              <a:buNone/>
-            </a:pPr>
-            <a:r>
-              <a:rPr lang="en-US" sz="1400" dirty="0">
-                <a:solidFill>
-                  <a:srgbClr val="F1F5FB"/>
-                </a:solidFill>
-                <a:latin typeface="Segoe UI Semibold" pitchFamily="34" charset="0"/>
-                <a:ea typeface="Segoe UI Semibold" pitchFamily="34" charset="-122"/>
-                <a:cs typeface="Segoe UI Semibold" pitchFamily="34" charset="-120"/>
-              </a:rPr>
-              <a:t>Charith  ·  Nemal  ·  Govindu  ·  Thurunu  ·  Yasiru  ·  Sachinthana</a:t>
-            </a:r>
-            <a:endParaRPr lang="en-US" sz="1400" dirty="0"/>
           </a:p>
         </p:txBody>
       </p:sp>
@@ -1847,13 +1749,12 @@
             <a:avLst/>
           </a:prstGeom>
           <a:noFill/>
-          <a:ln/>
-        </p:spPr>
-        <p:txBody>
-          <a:bodyPr wrap="square" lIns="0" tIns="0" rIns="0" bIns="0" rtlCol="0" anchor="ctr"/>
-          <a:lstStyle/>
-          <a:p>
-            <a:pPr indent="0" marL="0">
+        </p:spPr>
+        <p:txBody>
+          <a:bodyPr wrap="square" lIns="0" tIns="0" rIns="0" bIns="0" rtlCol="0" anchor="ctr"/>
+          <a:lstStyle/>
+          <a:p>
+            <a:pPr marL="0" indent="0">
               <a:buNone/>
             </a:pPr>
             <a:r>
@@ -1861,9 +1762,9 @@
                 <a:solidFill>
                   <a:srgbClr val="8C9BB8"/>
                 </a:solidFill>
-                <a:latin typeface="Segoe UI" pitchFamily="34" charset="0"/>
-                <a:ea typeface="Segoe UI" pitchFamily="34" charset="-122"/>
-                <a:cs typeface="Segoe UI" pitchFamily="34" charset="-120"/>
+                <a:latin typeface="Segoe UI" panose="020B0502040204020203" pitchFamily="34" charset="0"/>
+                <a:ea typeface="Segoe UI" panose="020B0502040204020203" pitchFamily="34" charset="-122"/>
+                <a:cs typeface="Segoe UI" panose="020B0502040204020203" pitchFamily="34" charset="-120"/>
               </a:rPr>
               <a:t>Department of Electrical and Information Engineering  ·  University of Ruhuna</a:t>
             </a:r>
@@ -1881,12 +1782,13 @@
 
 <file path=ppt/slides/slide10.xml><?xml version="1.0" encoding="utf-8"?>
 <p:sld xmlns:a="http://schemas.openxmlformats.org/drawingml/2006/main" xmlns:r="http://schemas.openxmlformats.org/officeDocument/2006/relationships" xmlns:p="http://schemas.openxmlformats.org/presentationml/2006/main">
-  <p:cSld name="Slide 10">
+  <p:cSld>
     <p:bg>
       <p:bgPr>
         <a:solidFill>
           <a:srgbClr val="0A1020"/>
         </a:solidFill>
+        <a:effectLst/>
       </p:bgPr>
     </p:bg>
     <p:spTree>
@@ -1918,13 +1820,12 @@
             <a:avLst/>
           </a:prstGeom>
           <a:noFill/>
-          <a:ln/>
-        </p:spPr>
-        <p:txBody>
-          <a:bodyPr wrap="square" lIns="0" tIns="0" rIns="0" bIns="0" rtlCol="0" anchor="ctr"/>
-          <a:lstStyle/>
-          <a:p>
-            <a:pPr indent="0" marL="0">
+        </p:spPr>
+        <p:txBody>
+          <a:bodyPr wrap="square" lIns="0" tIns="0" rIns="0" bIns="0" rtlCol="0" anchor="ctr"/>
+          <a:lstStyle/>
+          <a:p>
+            <a:pPr marL="0" indent="0">
               <a:buNone/>
             </a:pPr>
             <a:r>
@@ -1932,9 +1833,9 @@
                 <a:solidFill>
                   <a:srgbClr val="F1F5FB"/>
                 </a:solidFill>
-                <a:latin typeface="Segoe UI Semibold" pitchFamily="34" charset="0"/>
-                <a:ea typeface="Segoe UI Semibold" pitchFamily="34" charset="-122"/>
-                <a:cs typeface="Segoe UI Semibold" pitchFamily="34" charset="-120"/>
+                <a:latin typeface="Segoe UI Semibold" panose="020B0702040204020203" pitchFamily="34" charset="0"/>
+                <a:ea typeface="Segoe UI Semibold" panose="020B0702040204020203" pitchFamily="34" charset="-122"/>
+                <a:cs typeface="Segoe UI Semibold" panose="020B0702040204020203" pitchFamily="34" charset="-120"/>
               </a:rPr>
               <a:t>Thank you</a:t>
             </a:r>
@@ -1957,13 +1858,12 @@
             <a:avLst/>
           </a:prstGeom>
           <a:noFill/>
-          <a:ln/>
-        </p:spPr>
-        <p:txBody>
-          <a:bodyPr wrap="square" lIns="0" tIns="0" rIns="0" bIns="0" rtlCol="0" anchor="ctr"/>
-          <a:lstStyle/>
-          <a:p>
-            <a:pPr indent="0" marL="0">
+        </p:spPr>
+        <p:txBody>
+          <a:bodyPr wrap="square" lIns="0" tIns="0" rIns="0" bIns="0" rtlCol="0" anchor="ctr"/>
+          <a:lstStyle/>
+          <a:p>
+            <a:pPr marL="0" indent="0">
               <a:buNone/>
             </a:pPr>
             <a:r>
@@ -1971,9 +1871,9 @@
                 <a:solidFill>
                   <a:srgbClr val="22D3EE"/>
                 </a:solidFill>
-                <a:latin typeface="Segoe UI" pitchFamily="34" charset="0"/>
-                <a:ea typeface="Segoe UI" pitchFamily="34" charset="-122"/>
-                <a:cs typeface="Segoe UI" pitchFamily="34" charset="-120"/>
+                <a:latin typeface="Segoe UI" panose="020B0502040204020203" pitchFamily="34" charset="0"/>
+                <a:ea typeface="Segoe UI" panose="020B0502040204020203" pitchFamily="34" charset="-122"/>
+                <a:cs typeface="Segoe UI" panose="020B0502040204020203" pitchFamily="34" charset="-120"/>
               </a:rPr>
               <a:t>Questions and discussion</a:t>
             </a:r>
@@ -1996,13 +1896,12 @@
             <a:avLst/>
           </a:prstGeom>
           <a:noFill/>
-          <a:ln/>
-        </p:spPr>
-        <p:txBody>
-          <a:bodyPr wrap="square" lIns="0" tIns="0" rIns="0" bIns="0" rtlCol="0" anchor="ctr"/>
-          <a:lstStyle/>
-          <a:p>
-            <a:pPr indent="0" marL="0">
+        </p:spPr>
+        <p:txBody>
+          <a:bodyPr wrap="square" lIns="0" tIns="0" rIns="0" bIns="0" rtlCol="0" anchor="ctr"/>
+          <a:lstStyle/>
+          <a:p>
+            <a:pPr marL="0" indent="0">
               <a:buNone/>
             </a:pPr>
             <a:r>
@@ -2010,9 +1909,9 @@
                 <a:solidFill>
                   <a:srgbClr val="8C9BB8"/>
                 </a:solidFill>
-                <a:latin typeface="Segoe UI" pitchFamily="34" charset="0"/>
-                <a:ea typeface="Segoe UI" pitchFamily="34" charset="-122"/>
-                <a:cs typeface="Segoe UI" pitchFamily="34" charset="-120"/>
+                <a:latin typeface="Segoe UI" panose="020B0502040204020203" pitchFamily="34" charset="0"/>
+                <a:ea typeface="Segoe UI" panose="020B0502040204020203" pitchFamily="34" charset="-122"/>
+                <a:cs typeface="Segoe UI" panose="020B0502040204020203" pitchFamily="34" charset="-120"/>
               </a:rPr>
               <a:t>REOAGMS  ·  EC8208 Software Architecture  ·  University of Ruhuna</a:t>
             </a:r>
@@ -2030,12 +1929,13 @@
 
 <file path=ppt/slides/slide2.xml><?xml version="1.0" encoding="utf-8"?>
 <p:sld xmlns:a="http://schemas.openxmlformats.org/drawingml/2006/main" xmlns:r="http://schemas.openxmlformats.org/officeDocument/2006/relationships" xmlns:p="http://schemas.openxmlformats.org/presentationml/2006/main">
-  <p:cSld name="Slide 2">
+  <p:cSld>
     <p:bg>
       <p:bgPr>
         <a:solidFill>
           <a:srgbClr val="0A1020"/>
         </a:solidFill>
+        <a:effectLst/>
       </p:bgPr>
     </p:bg>
     <p:spTree>
@@ -2067,25 +1967,24 @@
             <a:avLst/>
           </a:prstGeom>
           <a:noFill/>
-          <a:ln/>
-        </p:spPr>
-        <p:txBody>
-          <a:bodyPr wrap="square" lIns="0" tIns="0" rIns="0" bIns="0" rtlCol="0" anchor="ctr"/>
-          <a:lstStyle/>
-          <a:p>
-            <a:pPr indent="0" marL="0">
-              <a:buNone/>
-            </a:pPr>
-            <a:r>
-              <a:rPr lang="en-US" sz="1100" spc="400" kern="0" dirty="0">
+        </p:spPr>
+        <p:txBody>
+          <a:bodyPr wrap="square" lIns="0" tIns="0" rIns="0" bIns="0" rtlCol="0" anchor="ctr"/>
+          <a:lstStyle/>
+          <a:p>
+            <a:pPr marL="0" indent="0">
+              <a:buNone/>
+            </a:pPr>
+            <a:r>
+              <a:rPr lang="en-US" sz="1100" kern="0" spc="400" dirty="0">
                 <a:solidFill>
                   <a:srgbClr val="22D3EE"/>
                 </a:solidFill>
-                <a:latin typeface="Segoe UI Semibold" pitchFamily="34" charset="0"/>
-                <a:ea typeface="Segoe UI Semibold" pitchFamily="34" charset="-122"/>
-                <a:cs typeface="Segoe UI Semibold" pitchFamily="34" charset="-120"/>
-              </a:rPr>
-              <a:t>02 · CHARITH · ARCHITECTURE</a:t>
+                <a:latin typeface="Segoe UI Semibold" panose="020B0702040204020203" pitchFamily="34" charset="0"/>
+                <a:ea typeface="Segoe UI Semibold" panose="020B0702040204020203" pitchFamily="34" charset="-122"/>
+                <a:cs typeface="Segoe UI Semibold" panose="020B0702040204020203" pitchFamily="34" charset="-120"/>
+              </a:rPr>
+              <a:t>02 · ARCHITECTURE</a:t>
             </a:r>
             <a:endParaRPr lang="en-US" sz="1100" dirty="0"/>
           </a:p>
@@ -2106,13 +2005,12 @@
             <a:avLst/>
           </a:prstGeom>
           <a:noFill/>
-          <a:ln/>
-        </p:spPr>
-        <p:txBody>
-          <a:bodyPr wrap="square" lIns="0" tIns="0" rIns="0" bIns="0" rtlCol="0" anchor="ctr"/>
-          <a:lstStyle/>
-          <a:p>
-            <a:pPr indent="0" marL="0">
+        </p:spPr>
+        <p:txBody>
+          <a:bodyPr wrap="square" lIns="0" tIns="0" rIns="0" bIns="0" rtlCol="0" anchor="ctr"/>
+          <a:lstStyle/>
+          <a:p>
+            <a:pPr marL="0" indent="0">
               <a:buNone/>
             </a:pPr>
             <a:r>
@@ -2120,9 +2018,9 @@
                 <a:solidFill>
                   <a:srgbClr val="F1F5FB"/>
                 </a:solidFill>
-                <a:latin typeface="Segoe UI Semibold" pitchFamily="34" charset="0"/>
-                <a:ea typeface="Segoe UI Semibold" pitchFamily="34" charset="-122"/>
-                <a:cs typeface="Segoe UI Semibold" pitchFamily="34" charset="-120"/>
+                <a:latin typeface="Segoe UI Semibold" panose="020B0702040204020203" pitchFamily="34" charset="0"/>
+                <a:ea typeface="Segoe UI Semibold" panose="020B0702040204020203" pitchFamily="34" charset="-122"/>
+                <a:cs typeface="Segoe UI Semibold" panose="020B0702040204020203" pitchFamily="34" charset="-120"/>
               </a:rPr>
               <a:t>One gateway, six independent services</a:t>
             </a:r>
@@ -2145,13 +2043,12 @@
             <a:avLst/>
           </a:prstGeom>
           <a:noFill/>
-          <a:ln/>
-        </p:spPr>
-        <p:txBody>
-          <a:bodyPr wrap="square" lIns="0" tIns="0" rIns="0" bIns="0" rtlCol="0" anchor="ctr"/>
-          <a:lstStyle/>
-          <a:p>
-            <a:pPr indent="0" marL="0">
+        </p:spPr>
+        <p:txBody>
+          <a:bodyPr wrap="square" lIns="0" tIns="0" rIns="0" bIns="0" rtlCol="0" anchor="ctr"/>
+          <a:lstStyle/>
+          <a:p>
+            <a:pPr marL="0" indent="0">
               <a:buNone/>
             </a:pPr>
             <a:r>
@@ -2159,9 +2056,9 @@
                 <a:solidFill>
                   <a:srgbClr val="8C9BB8"/>
                 </a:solidFill>
-                <a:latin typeface="Segoe UI" pitchFamily="34" charset="0"/>
-                <a:ea typeface="Segoe UI" pitchFamily="34" charset="-122"/>
-                <a:cs typeface="Segoe UI" pitchFamily="34" charset="-120"/>
+                <a:latin typeface="Segoe UI" panose="020B0502040204020203" pitchFamily="34" charset="0"/>
+                <a:ea typeface="Segoe UI" panose="020B0502040204020203" pitchFamily="34" charset="-122"/>
+                <a:cs typeface="Segoe UI" panose="020B0502040204020203" pitchFamily="34" charset="-120"/>
               </a:rPr>
               <a:t>EC8208 Software Architecture  ·  University of Ruhuna</a:t>
             </a:r>
@@ -2184,13 +2081,12 @@
             <a:avLst/>
           </a:prstGeom>
           <a:noFill/>
-          <a:ln/>
-        </p:spPr>
-        <p:txBody>
-          <a:bodyPr wrap="square" lIns="0" tIns="0" rIns="0" bIns="0" rtlCol="0" anchor="ctr"/>
-          <a:lstStyle/>
-          <a:p>
-            <a:pPr algn="r" indent="0" marL="0">
+        </p:spPr>
+        <p:txBody>
+          <a:bodyPr wrap="square" lIns="0" tIns="0" rIns="0" bIns="0" rtlCol="0" anchor="ctr"/>
+          <a:lstStyle/>
+          <a:p>
+            <a:pPr marL="0" indent="0" algn="r">
               <a:buNone/>
             </a:pPr>
             <a:r>
@@ -2198,9 +2094,9 @@
                 <a:solidFill>
                   <a:srgbClr val="8C9BB8"/>
                 </a:solidFill>
-                <a:latin typeface="Segoe UI" pitchFamily="34" charset="0"/>
-                <a:ea typeface="Segoe UI" pitchFamily="34" charset="-122"/>
-                <a:cs typeface="Segoe UI" pitchFamily="34" charset="-120"/>
+                <a:latin typeface="Segoe UI" panose="020B0502040204020203" pitchFamily="34" charset="0"/>
+                <a:ea typeface="Segoe UI" panose="020B0502040204020203" pitchFamily="34" charset="-122"/>
+                <a:cs typeface="Segoe UI" panose="020B0502040204020203" pitchFamily="34" charset="-120"/>
               </a:rPr>
               <a:t>02  ·  0:08–0:33</a:t>
             </a:r>
@@ -2250,13 +2146,12 @@
             <a:avLst/>
           </a:prstGeom>
           <a:noFill/>
-          <a:ln/>
-        </p:spPr>
-        <p:txBody>
-          <a:bodyPr wrap="square" lIns="0" tIns="0" rIns="0" bIns="0" rtlCol="0" anchor="ctr"/>
-          <a:lstStyle/>
-          <a:p>
-            <a:pPr algn="ctr" indent="0" marL="0">
+        </p:spPr>
+        <p:txBody>
+          <a:bodyPr wrap="square" lIns="0" tIns="0" rIns="0" bIns="0" rtlCol="0" anchor="ctr"/>
+          <a:lstStyle/>
+          <a:p>
+            <a:pPr marL="0" indent="0" algn="ctr">
               <a:buNone/>
             </a:pPr>
             <a:r>
@@ -2264,9 +2159,9 @@
                 <a:solidFill>
                   <a:srgbClr val="F1F5FB"/>
                 </a:solidFill>
-                <a:latin typeface="Segoe UI" pitchFamily="34" charset="0"/>
-                <a:ea typeface="Segoe UI" pitchFamily="34" charset="-122"/>
-                <a:cs typeface="Segoe UI" pitchFamily="34" charset="-120"/>
+                <a:latin typeface="Segoe UI" panose="020B0502040204020203" pitchFamily="34" charset="0"/>
+                <a:ea typeface="Segoe UI" panose="020B0502040204020203" pitchFamily="34" charset="-122"/>
+                <a:cs typeface="Segoe UI" panose="020B0502040204020203" pitchFamily="34" charset="-120"/>
               </a:rPr>
               <a:t>React console  ·  nginx  ·  live updates over WebSocket</a:t>
             </a:r>
@@ -2316,13 +2211,12 @@
             <a:avLst/>
           </a:prstGeom>
           <a:noFill/>
-          <a:ln/>
-        </p:spPr>
-        <p:txBody>
-          <a:bodyPr wrap="square" lIns="0" tIns="0" rIns="0" bIns="0" rtlCol="0" anchor="ctr"/>
-          <a:lstStyle/>
-          <a:p>
-            <a:pPr algn="ctr" indent="0" marL="0">
+        </p:spPr>
+        <p:txBody>
+          <a:bodyPr wrap="square" lIns="0" tIns="0" rIns="0" bIns="0" rtlCol="0" anchor="ctr"/>
+          <a:lstStyle/>
+          <a:p>
+            <a:pPr marL="0" indent="0" algn="ctr">
               <a:buNone/>
             </a:pPr>
             <a:r>
@@ -2330,9 +2224,9 @@
                 <a:solidFill>
                   <a:srgbClr val="0A1020"/>
                 </a:solidFill>
-                <a:latin typeface="Segoe UI Semibold" pitchFamily="34" charset="0"/>
-                <a:ea typeface="Segoe UI Semibold" pitchFamily="34" charset="-122"/>
-                <a:cs typeface="Segoe UI Semibold" pitchFamily="34" charset="-120"/>
+                <a:latin typeface="Segoe UI Semibold" panose="020B0702040204020203" pitchFamily="34" charset="0"/>
+                <a:ea typeface="Segoe UI Semibold" panose="020B0702040204020203" pitchFamily="34" charset="-122"/>
+                <a:cs typeface="Segoe UI Semibold" panose="020B0702040204020203" pitchFamily="34" charset="-120"/>
               </a:rPr>
               <a:t>API Gateway  ·  JWT validation  ·  role policy</a:t>
             </a:r>
@@ -2382,13 +2276,12 @@
             <a:avLst/>
           </a:prstGeom>
           <a:noFill/>
-          <a:ln/>
-        </p:spPr>
-        <p:txBody>
-          <a:bodyPr wrap="square" lIns="0" tIns="0" rIns="0" bIns="0" rtlCol="0" anchor="ctr"/>
-          <a:lstStyle/>
-          <a:p>
-            <a:pPr algn="ctr" indent="0" marL="0">
+        </p:spPr>
+        <p:txBody>
+          <a:bodyPr wrap="square" lIns="0" tIns="0" rIns="0" bIns="0" rtlCol="0" anchor="ctr"/>
+          <a:lstStyle/>
+          <a:p>
+            <a:pPr marL="0" indent="0" algn="ctr">
               <a:buNone/>
             </a:pPr>
             <a:r>
@@ -2396,9 +2289,9 @@
                 <a:solidFill>
                   <a:srgbClr val="F1F5FB"/>
                 </a:solidFill>
-                <a:latin typeface="Segoe UI Semibold" pitchFamily="34" charset="0"/>
-                <a:ea typeface="Segoe UI Semibold" pitchFamily="34" charset="-122"/>
-                <a:cs typeface="Segoe UI Semibold" pitchFamily="34" charset="-120"/>
+                <a:latin typeface="Segoe UI Semibold" panose="020B0702040204020203" pitchFamily="34" charset="0"/>
+                <a:ea typeface="Segoe UI Semibold" panose="020B0702040204020203" pitchFamily="34" charset="-122"/>
+                <a:cs typeface="Segoe UI Semibold" panose="020B0702040204020203" pitchFamily="34" charset="-120"/>
               </a:rPr>
               <a:t>Identity</a:t>
             </a:r>
@@ -2421,13 +2314,12 @@
             <a:avLst/>
           </a:prstGeom>
           <a:noFill/>
-          <a:ln/>
-        </p:spPr>
-        <p:txBody>
-          <a:bodyPr wrap="square" lIns="0" tIns="0" rIns="0" bIns="0" rtlCol="0" anchor="ctr"/>
-          <a:lstStyle/>
-          <a:p>
-            <a:pPr algn="ctr" indent="0" marL="0">
+        </p:spPr>
+        <p:txBody>
+          <a:bodyPr wrap="square" lIns="0" tIns="0" rIns="0" bIns="0" rtlCol="0" anchor="ctr"/>
+          <a:lstStyle/>
+          <a:p>
+            <a:pPr marL="0" indent="0" algn="ctr">
               <a:buNone/>
             </a:pPr>
             <a:r>
@@ -2435,9 +2327,9 @@
                 <a:solidFill>
                   <a:srgbClr val="8C9BB8"/>
                 </a:solidFill>
-                <a:latin typeface="Segoe UI" pitchFamily="34" charset="0"/>
-                <a:ea typeface="Segoe UI" pitchFamily="34" charset="-122"/>
-                <a:cs typeface="Segoe UI" pitchFamily="34" charset="-120"/>
+                <a:latin typeface="Segoe UI" panose="020B0502040204020203" pitchFamily="34" charset="0"/>
+                <a:ea typeface="Segoe UI" panose="020B0502040204020203" pitchFamily="34" charset="-122"/>
+                <a:cs typeface="Segoe UI" panose="020B0502040204020203" pitchFamily="34" charset="-120"/>
               </a:rPr>
               <a:t>PostgreSQL</a:t>
             </a:r>
@@ -2487,13 +2379,12 @@
             <a:avLst/>
           </a:prstGeom>
           <a:noFill/>
-          <a:ln/>
-        </p:spPr>
-        <p:txBody>
-          <a:bodyPr wrap="square" lIns="0" tIns="0" rIns="0" bIns="0" rtlCol="0" anchor="ctr"/>
-          <a:lstStyle/>
-          <a:p>
-            <a:pPr algn="ctr" indent="0" marL="0">
+        </p:spPr>
+        <p:txBody>
+          <a:bodyPr wrap="square" lIns="0" tIns="0" rIns="0" bIns="0" rtlCol="0" anchor="ctr"/>
+          <a:lstStyle/>
+          <a:p>
+            <a:pPr marL="0" indent="0" algn="ctr">
               <a:buNone/>
             </a:pPr>
             <a:r>
@@ -2501,9 +2392,9 @@
                 <a:solidFill>
                   <a:srgbClr val="F1F5FB"/>
                 </a:solidFill>
-                <a:latin typeface="Segoe UI Semibold" pitchFamily="34" charset="0"/>
-                <a:ea typeface="Segoe UI Semibold" pitchFamily="34" charset="-122"/>
-                <a:cs typeface="Segoe UI Semibold" pitchFamily="34" charset="-120"/>
+                <a:latin typeface="Segoe UI Semibold" panose="020B0702040204020203" pitchFamily="34" charset="0"/>
+                <a:ea typeface="Segoe UI Semibold" panose="020B0702040204020203" pitchFamily="34" charset="-122"/>
+                <a:cs typeface="Segoe UI Semibold" panose="020B0702040204020203" pitchFamily="34" charset="-120"/>
               </a:rPr>
               <a:t>Asset</a:t>
             </a:r>
@@ -2526,13 +2417,12 @@
             <a:avLst/>
           </a:prstGeom>
           <a:noFill/>
-          <a:ln/>
-        </p:spPr>
-        <p:txBody>
-          <a:bodyPr wrap="square" lIns="0" tIns="0" rIns="0" bIns="0" rtlCol="0" anchor="ctr"/>
-          <a:lstStyle/>
-          <a:p>
-            <a:pPr algn="ctr" indent="0" marL="0">
+        </p:spPr>
+        <p:txBody>
+          <a:bodyPr wrap="square" lIns="0" tIns="0" rIns="0" bIns="0" rtlCol="0" anchor="ctr"/>
+          <a:lstStyle/>
+          <a:p>
+            <a:pPr marL="0" indent="0" algn="ctr">
               <a:buNone/>
             </a:pPr>
             <a:r>
@@ -2540,9 +2430,9 @@
                 <a:solidFill>
                   <a:srgbClr val="8C9BB8"/>
                 </a:solidFill>
-                <a:latin typeface="Segoe UI" pitchFamily="34" charset="0"/>
-                <a:ea typeface="Segoe UI" pitchFamily="34" charset="-122"/>
-                <a:cs typeface="Segoe UI" pitchFamily="34" charset="-120"/>
+                <a:latin typeface="Segoe UI" panose="020B0502040204020203" pitchFamily="34" charset="0"/>
+                <a:ea typeface="Segoe UI" panose="020B0502040204020203" pitchFamily="34" charset="-122"/>
+                <a:cs typeface="Segoe UI" panose="020B0502040204020203" pitchFamily="34" charset="-120"/>
               </a:rPr>
               <a:t>PostgreSQL</a:t>
             </a:r>
@@ -2592,13 +2482,12 @@
             <a:avLst/>
           </a:prstGeom>
           <a:noFill/>
-          <a:ln/>
-        </p:spPr>
-        <p:txBody>
-          <a:bodyPr wrap="square" lIns="0" tIns="0" rIns="0" bIns="0" rtlCol="0" anchor="ctr"/>
-          <a:lstStyle/>
-          <a:p>
-            <a:pPr algn="ctr" indent="0" marL="0">
+        </p:spPr>
+        <p:txBody>
+          <a:bodyPr wrap="square" lIns="0" tIns="0" rIns="0" bIns="0" rtlCol="0" anchor="ctr"/>
+          <a:lstStyle/>
+          <a:p>
+            <a:pPr marL="0" indent="0" algn="ctr">
               <a:buNone/>
             </a:pPr>
             <a:r>
@@ -2606,9 +2495,9 @@
                 <a:solidFill>
                   <a:srgbClr val="F1F5FB"/>
                 </a:solidFill>
-                <a:latin typeface="Segoe UI Semibold" pitchFamily="34" charset="0"/>
-                <a:ea typeface="Segoe UI Semibold" pitchFamily="34" charset="-122"/>
-                <a:cs typeface="Segoe UI Semibold" pitchFamily="34" charset="-120"/>
+                <a:latin typeface="Segoe UI Semibold" panose="020B0702040204020203" pitchFamily="34" charset="0"/>
+                <a:ea typeface="Segoe UI Semibold" panose="020B0702040204020203" pitchFamily="34" charset="-122"/>
+                <a:cs typeface="Segoe UI Semibold" panose="020B0702040204020203" pitchFamily="34" charset="-120"/>
               </a:rPr>
               <a:t>Monitoring</a:t>
             </a:r>
@@ -2631,13 +2520,12 @@
             <a:avLst/>
           </a:prstGeom>
           <a:noFill/>
-          <a:ln/>
-        </p:spPr>
-        <p:txBody>
-          <a:bodyPr wrap="square" lIns="0" tIns="0" rIns="0" bIns="0" rtlCol="0" anchor="ctr"/>
-          <a:lstStyle/>
-          <a:p>
-            <a:pPr algn="ctr" indent="0" marL="0">
+        </p:spPr>
+        <p:txBody>
+          <a:bodyPr wrap="square" lIns="0" tIns="0" rIns="0" bIns="0" rtlCol="0" anchor="ctr"/>
+          <a:lstStyle/>
+          <a:p>
+            <a:pPr marL="0" indent="0" algn="ctr">
               <a:buNone/>
             </a:pPr>
             <a:r>
@@ -2645,9 +2533,9 @@
                 <a:solidFill>
                   <a:srgbClr val="8C9BB8"/>
                 </a:solidFill>
-                <a:latin typeface="Segoe UI" pitchFamily="34" charset="0"/>
-                <a:ea typeface="Segoe UI" pitchFamily="34" charset="-122"/>
-                <a:cs typeface="Segoe UI" pitchFamily="34" charset="-120"/>
+                <a:latin typeface="Segoe UI" panose="020B0502040204020203" pitchFamily="34" charset="0"/>
+                <a:ea typeface="Segoe UI" panose="020B0502040204020203" pitchFamily="34" charset="-122"/>
+                <a:cs typeface="Segoe UI" panose="020B0502040204020203" pitchFamily="34" charset="-120"/>
               </a:rPr>
               <a:t>PostgreSQL</a:t>
             </a:r>
@@ -2697,13 +2585,12 @@
             <a:avLst/>
           </a:prstGeom>
           <a:noFill/>
-          <a:ln/>
-        </p:spPr>
-        <p:txBody>
-          <a:bodyPr wrap="square" lIns="0" tIns="0" rIns="0" bIns="0" rtlCol="0" anchor="ctr"/>
-          <a:lstStyle/>
-          <a:p>
-            <a:pPr algn="ctr" indent="0" marL="0">
+        </p:spPr>
+        <p:txBody>
+          <a:bodyPr wrap="square" lIns="0" tIns="0" rIns="0" bIns="0" rtlCol="0" anchor="ctr"/>
+          <a:lstStyle/>
+          <a:p>
+            <a:pPr marL="0" indent="0" algn="ctr">
               <a:buNone/>
             </a:pPr>
             <a:r>
@@ -2711,9 +2598,9 @@
                 <a:solidFill>
                   <a:srgbClr val="F1F5FB"/>
                 </a:solidFill>
-                <a:latin typeface="Segoe UI Semibold" pitchFamily="34" charset="0"/>
-                <a:ea typeface="Segoe UI Semibold" pitchFamily="34" charset="-122"/>
-                <a:cs typeface="Segoe UI Semibold" pitchFamily="34" charset="-120"/>
+                <a:latin typeface="Segoe UI Semibold" panose="020B0702040204020203" pitchFamily="34" charset="0"/>
+                <a:ea typeface="Segoe UI Semibold" panose="020B0702040204020203" pitchFamily="34" charset="-122"/>
+                <a:cs typeface="Segoe UI Semibold" panose="020B0702040204020203" pitchFamily="34" charset="-120"/>
               </a:rPr>
               <a:t>Maintenance</a:t>
             </a:r>
@@ -2736,13 +2623,12 @@
             <a:avLst/>
           </a:prstGeom>
           <a:noFill/>
-          <a:ln/>
-        </p:spPr>
-        <p:txBody>
-          <a:bodyPr wrap="square" lIns="0" tIns="0" rIns="0" bIns="0" rtlCol="0" anchor="ctr"/>
-          <a:lstStyle/>
-          <a:p>
-            <a:pPr algn="ctr" indent="0" marL="0">
+        </p:spPr>
+        <p:txBody>
+          <a:bodyPr wrap="square" lIns="0" tIns="0" rIns="0" bIns="0" rtlCol="0" anchor="ctr"/>
+          <a:lstStyle/>
+          <a:p>
+            <a:pPr marL="0" indent="0" algn="ctr">
               <a:buNone/>
             </a:pPr>
             <a:r>
@@ -2750,9 +2636,9 @@
                 <a:solidFill>
                   <a:srgbClr val="8C9BB8"/>
                 </a:solidFill>
-                <a:latin typeface="Segoe UI" pitchFamily="34" charset="0"/>
-                <a:ea typeface="Segoe UI" pitchFamily="34" charset="-122"/>
-                <a:cs typeface="Segoe UI" pitchFamily="34" charset="-120"/>
+                <a:latin typeface="Segoe UI" panose="020B0502040204020203" pitchFamily="34" charset="0"/>
+                <a:ea typeface="Segoe UI" panose="020B0502040204020203" pitchFamily="34" charset="-122"/>
+                <a:cs typeface="Segoe UI" panose="020B0502040204020203" pitchFamily="34" charset="-120"/>
               </a:rPr>
               <a:t>PostgreSQL</a:t>
             </a:r>
@@ -2802,13 +2688,12 @@
             <a:avLst/>
           </a:prstGeom>
           <a:noFill/>
-          <a:ln/>
-        </p:spPr>
-        <p:txBody>
-          <a:bodyPr wrap="square" lIns="0" tIns="0" rIns="0" bIns="0" rtlCol="0" anchor="ctr"/>
-          <a:lstStyle/>
-          <a:p>
-            <a:pPr algn="ctr" indent="0" marL="0">
+        </p:spPr>
+        <p:txBody>
+          <a:bodyPr wrap="square" lIns="0" tIns="0" rIns="0" bIns="0" rtlCol="0" anchor="ctr"/>
+          <a:lstStyle/>
+          <a:p>
+            <a:pPr marL="0" indent="0" algn="ctr">
               <a:buNone/>
             </a:pPr>
             <a:r>
@@ -2816,9 +2701,9 @@
                 <a:solidFill>
                   <a:srgbClr val="F1F5FB"/>
                 </a:solidFill>
-                <a:latin typeface="Segoe UI Semibold" pitchFamily="34" charset="0"/>
-                <a:ea typeface="Segoe UI Semibold" pitchFamily="34" charset="-122"/>
-                <a:cs typeface="Segoe UI Semibold" pitchFamily="34" charset="-120"/>
+                <a:latin typeface="Segoe UI Semibold" panose="020B0702040204020203" pitchFamily="34" charset="0"/>
+                <a:ea typeface="Segoe UI Semibold" panose="020B0702040204020203" pitchFamily="34" charset="-122"/>
+                <a:cs typeface="Segoe UI Semibold" panose="020B0702040204020203" pitchFamily="34" charset="-120"/>
               </a:rPr>
               <a:t>Notification</a:t>
             </a:r>
@@ -2841,13 +2726,12 @@
             <a:avLst/>
           </a:prstGeom>
           <a:noFill/>
-          <a:ln/>
-        </p:spPr>
-        <p:txBody>
-          <a:bodyPr wrap="square" lIns="0" tIns="0" rIns="0" bIns="0" rtlCol="0" anchor="ctr"/>
-          <a:lstStyle/>
-          <a:p>
-            <a:pPr algn="ctr" indent="0" marL="0">
+        </p:spPr>
+        <p:txBody>
+          <a:bodyPr wrap="square" lIns="0" tIns="0" rIns="0" bIns="0" rtlCol="0" anchor="ctr"/>
+          <a:lstStyle/>
+          <a:p>
+            <a:pPr marL="0" indent="0" algn="ctr">
               <a:buNone/>
             </a:pPr>
             <a:r>
@@ -2855,9 +2739,9 @@
                 <a:solidFill>
                   <a:srgbClr val="8C9BB8"/>
                 </a:solidFill>
-                <a:latin typeface="Segoe UI" pitchFamily="34" charset="0"/>
-                <a:ea typeface="Segoe UI" pitchFamily="34" charset="-122"/>
-                <a:cs typeface="Segoe UI" pitchFamily="34" charset="-120"/>
+                <a:latin typeface="Segoe UI" panose="020B0502040204020203" pitchFamily="34" charset="0"/>
+                <a:ea typeface="Segoe UI" panose="020B0502040204020203" pitchFamily="34" charset="-122"/>
+                <a:cs typeface="Segoe UI" panose="020B0502040204020203" pitchFamily="34" charset="-120"/>
               </a:rPr>
               <a:t>PostgreSQL</a:t>
             </a:r>
@@ -2907,13 +2791,12 @@
             <a:avLst/>
           </a:prstGeom>
           <a:noFill/>
-          <a:ln/>
-        </p:spPr>
-        <p:txBody>
-          <a:bodyPr wrap="square" lIns="0" tIns="0" rIns="0" bIns="0" rtlCol="0" anchor="ctr"/>
-          <a:lstStyle/>
-          <a:p>
-            <a:pPr algn="ctr" indent="0" marL="0">
+        </p:spPr>
+        <p:txBody>
+          <a:bodyPr wrap="square" lIns="0" tIns="0" rIns="0" bIns="0" rtlCol="0" anchor="ctr"/>
+          <a:lstStyle/>
+          <a:p>
+            <a:pPr marL="0" indent="0" algn="ctr">
               <a:buNone/>
             </a:pPr>
             <a:r>
@@ -2921,9 +2804,9 @@
                 <a:solidFill>
                   <a:srgbClr val="F1F5FB"/>
                 </a:solidFill>
-                <a:latin typeface="Segoe UI Semibold" pitchFamily="34" charset="0"/>
-                <a:ea typeface="Segoe UI Semibold" pitchFamily="34" charset="-122"/>
-                <a:cs typeface="Segoe UI Semibold" pitchFamily="34" charset="-120"/>
+                <a:latin typeface="Segoe UI Semibold" panose="020B0702040204020203" pitchFamily="34" charset="0"/>
+                <a:ea typeface="Segoe UI Semibold" panose="020B0702040204020203" pitchFamily="34" charset="-122"/>
+                <a:cs typeface="Segoe UI Semibold" panose="020B0702040204020203" pitchFamily="34" charset="-120"/>
               </a:rPr>
               <a:t>Analytics</a:t>
             </a:r>
@@ -2946,13 +2829,12 @@
             <a:avLst/>
           </a:prstGeom>
           <a:noFill/>
-          <a:ln/>
-        </p:spPr>
-        <p:txBody>
-          <a:bodyPr wrap="square" lIns="0" tIns="0" rIns="0" bIns="0" rtlCol="0" anchor="ctr"/>
-          <a:lstStyle/>
-          <a:p>
-            <a:pPr algn="ctr" indent="0" marL="0">
+        </p:spPr>
+        <p:txBody>
+          <a:bodyPr wrap="square" lIns="0" tIns="0" rIns="0" bIns="0" rtlCol="0" anchor="ctr"/>
+          <a:lstStyle/>
+          <a:p>
+            <a:pPr marL="0" indent="0" algn="ctr">
               <a:buNone/>
             </a:pPr>
             <a:r>
@@ -2960,9 +2842,9 @@
                 <a:solidFill>
                   <a:srgbClr val="8C9BB8"/>
                 </a:solidFill>
-                <a:latin typeface="Segoe UI" pitchFamily="34" charset="0"/>
-                <a:ea typeface="Segoe UI" pitchFamily="34" charset="-122"/>
-                <a:cs typeface="Segoe UI" pitchFamily="34" charset="-120"/>
+                <a:latin typeface="Segoe UI" panose="020B0502040204020203" pitchFamily="34" charset="0"/>
+                <a:ea typeface="Segoe UI" panose="020B0502040204020203" pitchFamily="34" charset="-122"/>
+                <a:cs typeface="Segoe UI" panose="020B0502040204020203" pitchFamily="34" charset="-120"/>
               </a:rPr>
               <a:t>PostgreSQL</a:t>
             </a:r>
@@ -3012,13 +2894,12 @@
             <a:avLst/>
           </a:prstGeom>
           <a:noFill/>
-          <a:ln/>
-        </p:spPr>
-        <p:txBody>
-          <a:bodyPr wrap="square" lIns="0" tIns="0" rIns="0" bIns="0" rtlCol="0" anchor="ctr"/>
-          <a:lstStyle/>
-          <a:p>
-            <a:pPr algn="ctr" indent="0" marL="0">
+        </p:spPr>
+        <p:txBody>
+          <a:bodyPr wrap="square" lIns="0" tIns="0" rIns="0" bIns="0" rtlCol="0" anchor="ctr"/>
+          <a:lstStyle/>
+          <a:p>
+            <a:pPr marL="0" indent="0" algn="ctr">
               <a:buNone/>
             </a:pPr>
             <a:r>
@@ -3026,9 +2907,9 @@
                 <a:solidFill>
                   <a:srgbClr val="F1F5FB"/>
                 </a:solidFill>
-                <a:latin typeface="Segoe UI" pitchFamily="34" charset="0"/>
-                <a:ea typeface="Segoe UI" pitchFamily="34" charset="-122"/>
-                <a:cs typeface="Segoe UI" pitchFamily="34" charset="-120"/>
+                <a:latin typeface="Segoe UI" panose="020B0502040204020203" pitchFamily="34" charset="0"/>
+                <a:ea typeface="Segoe UI" panose="020B0502040204020203" pitchFamily="34" charset="-122"/>
+                <a:cs typeface="Segoe UI" panose="020B0502040204020203" pitchFamily="34" charset="-120"/>
               </a:rPr>
               <a:t>RabbitMQ events  ·  Redis cache  ·  Prometheus and Grafana</a:t>
             </a:r>
@@ -3078,13 +2959,12 @@
             <a:avLst/>
           </a:prstGeom>
           <a:noFill/>
-          <a:ln/>
-        </p:spPr>
-        <p:txBody>
-          <a:bodyPr wrap="square" lIns="0" tIns="0" rIns="0" bIns="0" rtlCol="0" anchor="ctr"/>
-          <a:lstStyle/>
-          <a:p>
-            <a:pPr indent="0" marL="0">
+        </p:spPr>
+        <p:txBody>
+          <a:bodyPr wrap="square" lIns="0" tIns="0" rIns="0" bIns="0" rtlCol="0" anchor="ctr"/>
+          <a:lstStyle/>
+          <a:p>
+            <a:pPr marL="0" indent="0">
               <a:buNone/>
             </a:pPr>
             <a:r>
@@ -3092,23 +2972,20 @@
                 <a:solidFill>
                   <a:srgbClr val="22D3EE"/>
                 </a:solidFill>
-                <a:latin typeface="Segoe UI" pitchFamily="34" charset="0"/>
-                <a:ea typeface="Segoe UI" pitchFamily="34" charset="-122"/>
-                <a:cs typeface="Segoe UI" pitchFamily="34" charset="-120"/>
+                <a:latin typeface="Segoe UI" panose="020B0502040204020203" pitchFamily="34" charset="0"/>
+                <a:ea typeface="Segoe UI" panose="020B0502040204020203" pitchFamily="34" charset="-122"/>
+                <a:cs typeface="Segoe UI" panose="020B0502040204020203" pitchFamily="34" charset="-120"/>
               </a:rPr>
               <a:t>LIVE  </a:t>
             </a:r>
-            <a:pPr indent="0" marL="0">
-              <a:buNone/>
-            </a:pPr>
             <a:r>
               <a:rPr lang="en-US" sz="1100" dirty="0">
                 <a:solidFill>
                   <a:srgbClr val="F1F5FB"/>
                 </a:solidFill>
-                <a:latin typeface="Segoe UI" pitchFamily="34" charset="0"/>
-                <a:ea typeface="Segoe UI" pitchFamily="34" charset="-122"/>
-                <a:cs typeface="Segoe UI" pitchFamily="34" charset="-120"/>
+                <a:latin typeface="Segoe UI" panose="020B0502040204020203" pitchFamily="34" charset="0"/>
+                <a:ea typeface="Segoe UI" panose="020B0502040204020203" pitchFamily="34" charset="-122"/>
+                <a:cs typeface="Segoe UI" panose="020B0502040204020203" pitchFamily="34" charset="-120"/>
               </a:rPr>
               <a:t>Console: sign in, Control room</a:t>
             </a:r>
@@ -3126,12 +3003,13 @@
 
 <file path=ppt/slides/slide3.xml><?xml version="1.0" encoding="utf-8"?>
 <p:sld xmlns:a="http://schemas.openxmlformats.org/drawingml/2006/main" xmlns:r="http://schemas.openxmlformats.org/officeDocument/2006/relationships" xmlns:p="http://schemas.openxmlformats.org/presentationml/2006/main">
-  <p:cSld name="Slide 3">
+  <p:cSld>
     <p:bg>
       <p:bgPr>
         <a:solidFill>
           <a:srgbClr val="0A1020"/>
         </a:solidFill>
+        <a:effectLst/>
       </p:bgPr>
     </p:bg>
     <p:spTree>
@@ -3163,25 +3041,24 @@
             <a:avLst/>
           </a:prstGeom>
           <a:noFill/>
-          <a:ln/>
-        </p:spPr>
-        <p:txBody>
-          <a:bodyPr wrap="square" lIns="0" tIns="0" rIns="0" bIns="0" rtlCol="0" anchor="ctr"/>
-          <a:lstStyle/>
-          <a:p>
-            <a:pPr indent="0" marL="0">
-              <a:buNone/>
-            </a:pPr>
-            <a:r>
-              <a:rPr lang="en-US" sz="1100" spc="400" kern="0" dirty="0">
+        </p:spPr>
+        <p:txBody>
+          <a:bodyPr wrap="square" lIns="0" tIns="0" rIns="0" bIns="0" rtlCol="0" anchor="ctr"/>
+          <a:lstStyle/>
+          <a:p>
+            <a:pPr marL="0" indent="0">
+              <a:buNone/>
+            </a:pPr>
+            <a:r>
+              <a:rPr lang="en-US" sz="1100" kern="0" spc="400" dirty="0">
                 <a:solidFill>
                   <a:srgbClr val="22D3EE"/>
                 </a:solidFill>
-                <a:latin typeface="Segoe UI Semibold" pitchFamily="34" charset="0"/>
-                <a:ea typeface="Segoe UI Semibold" pitchFamily="34" charset="-122"/>
-                <a:cs typeface="Segoe UI Semibold" pitchFamily="34" charset="-120"/>
-              </a:rPr>
-              <a:t>03 · NEMAL · ASSET SERVICE</a:t>
+                <a:latin typeface="Segoe UI Semibold" panose="020B0702040204020203" pitchFamily="34" charset="0"/>
+                <a:ea typeface="Segoe UI Semibold" panose="020B0702040204020203" pitchFamily="34" charset="-122"/>
+                <a:cs typeface="Segoe UI Semibold" panose="020B0702040204020203" pitchFamily="34" charset="-120"/>
+              </a:rPr>
+              <a:t>03 · ASSET SERVICE</a:t>
             </a:r>
             <a:endParaRPr lang="en-US" sz="1100" dirty="0"/>
           </a:p>
@@ -3202,13 +3079,12 @@
             <a:avLst/>
           </a:prstGeom>
           <a:noFill/>
-          <a:ln/>
-        </p:spPr>
-        <p:txBody>
-          <a:bodyPr wrap="square" lIns="0" tIns="0" rIns="0" bIns="0" rtlCol="0" anchor="ctr"/>
-          <a:lstStyle/>
-          <a:p>
-            <a:pPr indent="0" marL="0">
+        </p:spPr>
+        <p:txBody>
+          <a:bodyPr wrap="square" lIns="0" tIns="0" rIns="0" bIns="0" rtlCol="0" anchor="ctr"/>
+          <a:lstStyle/>
+          <a:p>
+            <a:pPr marL="0" indent="0">
               <a:buNone/>
             </a:pPr>
             <a:r>
@@ -3216,9 +3092,9 @@
                 <a:solidFill>
                   <a:srgbClr val="F1F5FB"/>
                 </a:solidFill>
-                <a:latin typeface="Segoe UI Semibold" pitchFamily="34" charset="0"/>
-                <a:ea typeface="Segoe UI Semibold" pitchFamily="34" charset="-122"/>
-                <a:cs typeface="Segoe UI Semibold" pitchFamily="34" charset="-120"/>
+                <a:latin typeface="Segoe UI Semibold" panose="020B0702040204020203" pitchFamily="34" charset="0"/>
+                <a:ea typeface="Segoe UI Semibold" panose="020B0702040204020203" pitchFamily="34" charset="-122"/>
+                <a:cs typeface="Segoe UI Semibold" panose="020B0702040204020203" pitchFamily="34" charset="-120"/>
               </a:rPr>
               <a:t>The registry every service relies on</a:t>
             </a:r>
@@ -3241,13 +3117,12 @@
             <a:avLst/>
           </a:prstGeom>
           <a:noFill/>
-          <a:ln/>
-        </p:spPr>
-        <p:txBody>
-          <a:bodyPr wrap="square" lIns="0" tIns="0" rIns="0" bIns="0" rtlCol="0" anchor="ctr"/>
-          <a:lstStyle/>
-          <a:p>
-            <a:pPr indent="0" marL="0">
+        </p:spPr>
+        <p:txBody>
+          <a:bodyPr wrap="square" lIns="0" tIns="0" rIns="0" bIns="0" rtlCol="0" anchor="ctr"/>
+          <a:lstStyle/>
+          <a:p>
+            <a:pPr marL="0" indent="0">
               <a:buNone/>
             </a:pPr>
             <a:r>
@@ -3255,9 +3130,9 @@
                 <a:solidFill>
                   <a:srgbClr val="8C9BB8"/>
                 </a:solidFill>
-                <a:latin typeface="Segoe UI" pitchFamily="34" charset="0"/>
-                <a:ea typeface="Segoe UI" pitchFamily="34" charset="-122"/>
-                <a:cs typeface="Segoe UI" pitchFamily="34" charset="-120"/>
+                <a:latin typeface="Segoe UI" panose="020B0502040204020203" pitchFamily="34" charset="0"/>
+                <a:ea typeface="Segoe UI" panose="020B0502040204020203" pitchFamily="34" charset="-122"/>
+                <a:cs typeface="Segoe UI" panose="020B0502040204020203" pitchFamily="34" charset="-120"/>
               </a:rPr>
               <a:t>EC8208 Software Architecture  ·  University of Ruhuna</a:t>
             </a:r>
@@ -3280,13 +3155,12 @@
             <a:avLst/>
           </a:prstGeom>
           <a:noFill/>
-          <a:ln/>
-        </p:spPr>
-        <p:txBody>
-          <a:bodyPr wrap="square" lIns="0" tIns="0" rIns="0" bIns="0" rtlCol="0" anchor="ctr"/>
-          <a:lstStyle/>
-          <a:p>
-            <a:pPr algn="r" indent="0" marL="0">
+        </p:spPr>
+        <p:txBody>
+          <a:bodyPr wrap="square" lIns="0" tIns="0" rIns="0" bIns="0" rtlCol="0" anchor="ctr"/>
+          <a:lstStyle/>
+          <a:p>
+            <a:pPr marL="0" indent="0" algn="r">
               <a:buNone/>
             </a:pPr>
             <a:r>
@@ -3294,9 +3168,9 @@
                 <a:solidFill>
                   <a:srgbClr val="8C9BB8"/>
                 </a:solidFill>
-                <a:latin typeface="Segoe UI" pitchFamily="34" charset="0"/>
-                <a:ea typeface="Segoe UI" pitchFamily="34" charset="-122"/>
-                <a:cs typeface="Segoe UI" pitchFamily="34" charset="-120"/>
+                <a:latin typeface="Segoe UI" panose="020B0502040204020203" pitchFamily="34" charset="0"/>
+                <a:ea typeface="Segoe UI" panose="020B0502040204020203" pitchFamily="34" charset="-122"/>
+                <a:cs typeface="Segoe UI" panose="020B0502040204020203" pitchFamily="34" charset="-120"/>
               </a:rPr>
               <a:t>03  ·  0:33–1:00</a:t>
             </a:r>
@@ -3346,13 +3220,12 @@
             <a:avLst/>
           </a:prstGeom>
           <a:noFill/>
-          <a:ln/>
-        </p:spPr>
-        <p:txBody>
-          <a:bodyPr wrap="square" lIns="0" tIns="0" rIns="0" bIns="0" rtlCol="0" anchor="ctr"/>
-          <a:lstStyle/>
-          <a:p>
-            <a:pPr algn="ctr" indent="0" marL="0">
+        </p:spPr>
+        <p:txBody>
+          <a:bodyPr wrap="square" lIns="0" tIns="0" rIns="0" bIns="0" rtlCol="0" anchor="ctr"/>
+          <a:lstStyle/>
+          <a:p>
+            <a:pPr marL="0" indent="0" algn="ctr">
               <a:buNone/>
             </a:pPr>
             <a:r>
@@ -3360,9 +3233,9 @@
                 <a:solidFill>
                   <a:srgbClr val="0A1020"/>
                 </a:solidFill>
-                <a:latin typeface="Segoe UI Semibold" pitchFamily="34" charset="0"/>
-                <a:ea typeface="Segoe UI Semibold" pitchFamily="34" charset="-122"/>
-                <a:cs typeface="Segoe UI Semibold" pitchFamily="34" charset="-120"/>
+                <a:latin typeface="Segoe UI Semibold" panose="020B0702040204020203" pitchFamily="34" charset="0"/>
+                <a:ea typeface="Segoe UI Semibold" panose="020B0702040204020203" pitchFamily="34" charset="-122"/>
+                <a:cs typeface="Segoe UI Semibold" panose="020B0702040204020203" pitchFamily="34" charset="-120"/>
               </a:rPr>
               <a:t>Facility</a:t>
             </a:r>
@@ -3385,13 +3258,12 @@
             <a:avLst/>
           </a:prstGeom>
           <a:noFill/>
-          <a:ln/>
-        </p:spPr>
-        <p:txBody>
-          <a:bodyPr wrap="square" lIns="0" tIns="0" rIns="0" bIns="0" rtlCol="0" anchor="ctr"/>
-          <a:lstStyle/>
-          <a:p>
-            <a:pPr algn="ctr" indent="0" marL="0">
+        </p:spPr>
+        <p:txBody>
+          <a:bodyPr wrap="square" lIns="0" tIns="0" rIns="0" bIns="0" rtlCol="0" anchor="ctr"/>
+          <a:lstStyle/>
+          <a:p>
+            <a:pPr marL="0" indent="0" algn="ctr">
               <a:buNone/>
             </a:pPr>
             <a:r>
@@ -3399,9 +3271,9 @@
                 <a:solidFill>
                   <a:srgbClr val="0A1020"/>
                 </a:solidFill>
-                <a:latin typeface="Segoe UI" pitchFamily="34" charset="0"/>
-                <a:ea typeface="Segoe UI" pitchFamily="34" charset="-122"/>
-                <a:cs typeface="Segoe UI" pitchFamily="34" charset="-120"/>
+                <a:latin typeface="Segoe UI" panose="020B0502040204020203" pitchFamily="34" charset="0"/>
+                <a:ea typeface="Segoe UI" panose="020B0502040204020203" pitchFamily="34" charset="-122"/>
+                <a:cs typeface="Segoe UI" panose="020B0502040204020203" pitchFamily="34" charset="-120"/>
               </a:rPr>
               <a:t>5 types</a:t>
             </a:r>
@@ -3424,13 +3296,12 @@
             <a:avLst/>
           </a:prstGeom>
           <a:noFill/>
-          <a:ln/>
-        </p:spPr>
-        <p:txBody>
-          <a:bodyPr wrap="square" lIns="0" tIns="0" rIns="0" bIns="0" rtlCol="0" anchor="ctr"/>
-          <a:lstStyle/>
-          <a:p>
-            <a:pPr algn="ctr" indent="0" marL="0">
+        </p:spPr>
+        <p:txBody>
+          <a:bodyPr wrap="square" lIns="0" tIns="0" rIns="0" bIns="0" rtlCol="0" anchor="ctr"/>
+          <a:lstStyle/>
+          <a:p>
+            <a:pPr marL="0" indent="0" algn="ctr">
               <a:buNone/>
             </a:pPr>
             <a:r>
@@ -3438,9 +3309,9 @@
                 <a:solidFill>
                   <a:srgbClr val="22D3EE"/>
                 </a:solidFill>
-                <a:latin typeface="Segoe UI Semibold" pitchFamily="34" charset="0"/>
-                <a:ea typeface="Segoe UI Semibold" pitchFamily="34" charset="-122"/>
-                <a:cs typeface="Segoe UI Semibold" pitchFamily="34" charset="-120"/>
+                <a:latin typeface="Segoe UI Semibold" panose="020B0702040204020203" pitchFamily="34" charset="0"/>
+                <a:ea typeface="Segoe UI Semibold" panose="020B0702040204020203" pitchFamily="34" charset="-122"/>
+                <a:cs typeface="Segoe UI Semibold" panose="020B0702040204020203" pitchFamily="34" charset="-120"/>
               </a:rPr>
               <a:t>›</a:t>
             </a:r>
@@ -3490,13 +3361,12 @@
             <a:avLst/>
           </a:prstGeom>
           <a:noFill/>
-          <a:ln/>
-        </p:spPr>
-        <p:txBody>
-          <a:bodyPr wrap="square" lIns="0" tIns="0" rIns="0" bIns="0" rtlCol="0" anchor="ctr"/>
-          <a:lstStyle/>
-          <a:p>
-            <a:pPr algn="ctr" indent="0" marL="0">
+        </p:spPr>
+        <p:txBody>
+          <a:bodyPr wrap="square" lIns="0" tIns="0" rIns="0" bIns="0" rtlCol="0" anchor="ctr"/>
+          <a:lstStyle/>
+          <a:p>
+            <a:pPr marL="0" indent="0" algn="ctr">
               <a:buNone/>
             </a:pPr>
             <a:r>
@@ -3504,9 +3374,9 @@
                 <a:solidFill>
                   <a:srgbClr val="F1F5FB"/>
                 </a:solidFill>
-                <a:latin typeface="Segoe UI Semibold" pitchFamily="34" charset="0"/>
-                <a:ea typeface="Segoe UI Semibold" pitchFamily="34" charset="-122"/>
-                <a:cs typeface="Segoe UI Semibold" pitchFamily="34" charset="-120"/>
+                <a:latin typeface="Segoe UI Semibold" panose="020B0702040204020203" pitchFamily="34" charset="0"/>
+                <a:ea typeface="Segoe UI Semibold" panose="020B0702040204020203" pitchFamily="34" charset="-122"/>
+                <a:cs typeface="Segoe UI Semibold" panose="020B0702040204020203" pitchFamily="34" charset="-120"/>
               </a:rPr>
               <a:t>Asset</a:t>
             </a:r>
@@ -3529,13 +3399,12 @@
             <a:avLst/>
           </a:prstGeom>
           <a:noFill/>
-          <a:ln/>
-        </p:spPr>
-        <p:txBody>
-          <a:bodyPr wrap="square" lIns="0" tIns="0" rIns="0" bIns="0" rtlCol="0" anchor="ctr"/>
-          <a:lstStyle/>
-          <a:p>
-            <a:pPr algn="ctr" indent="0" marL="0">
+        </p:spPr>
+        <p:txBody>
+          <a:bodyPr wrap="square" lIns="0" tIns="0" rIns="0" bIns="0" rtlCol="0" anchor="ctr"/>
+          <a:lstStyle/>
+          <a:p>
+            <a:pPr marL="0" indent="0" algn="ctr">
               <a:buNone/>
             </a:pPr>
             <a:r>
@@ -3543,9 +3412,9 @@
                 <a:solidFill>
                   <a:srgbClr val="8C9BB8"/>
                 </a:solidFill>
-                <a:latin typeface="Segoe UI" pitchFamily="34" charset="0"/>
-                <a:ea typeface="Segoe UI" pitchFamily="34" charset="-122"/>
-                <a:cs typeface="Segoe UI" pitchFamily="34" charset="-120"/>
+                <a:latin typeface="Segoe UI" panose="020B0502040204020203" pitchFamily="34" charset="0"/>
+                <a:ea typeface="Segoe UI" panose="020B0502040204020203" pitchFamily="34" charset="-122"/>
+                <a:cs typeface="Segoe UI" panose="020B0502040204020203" pitchFamily="34" charset="-120"/>
               </a:rPr>
               <a:t>7 types</a:t>
             </a:r>
@@ -3568,13 +3437,12 @@
             <a:avLst/>
           </a:prstGeom>
           <a:noFill/>
-          <a:ln/>
-        </p:spPr>
-        <p:txBody>
-          <a:bodyPr wrap="square" lIns="0" tIns="0" rIns="0" bIns="0" rtlCol="0" anchor="ctr"/>
-          <a:lstStyle/>
-          <a:p>
-            <a:pPr algn="ctr" indent="0" marL="0">
+        </p:spPr>
+        <p:txBody>
+          <a:bodyPr wrap="square" lIns="0" tIns="0" rIns="0" bIns="0" rtlCol="0" anchor="ctr"/>
+          <a:lstStyle/>
+          <a:p>
+            <a:pPr marL="0" indent="0" algn="ctr">
               <a:buNone/>
             </a:pPr>
             <a:r>
@@ -3582,9 +3450,9 @@
                 <a:solidFill>
                   <a:srgbClr val="22D3EE"/>
                 </a:solidFill>
-                <a:latin typeface="Segoe UI Semibold" pitchFamily="34" charset="0"/>
-                <a:ea typeface="Segoe UI Semibold" pitchFamily="34" charset="-122"/>
-                <a:cs typeface="Segoe UI Semibold" pitchFamily="34" charset="-120"/>
+                <a:latin typeface="Segoe UI Semibold" panose="020B0702040204020203" pitchFamily="34" charset="0"/>
+                <a:ea typeface="Segoe UI Semibold" panose="020B0702040204020203" pitchFamily="34" charset="-122"/>
+                <a:cs typeface="Segoe UI Semibold" panose="020B0702040204020203" pitchFamily="34" charset="-120"/>
               </a:rPr>
               <a:t>›</a:t>
             </a:r>
@@ -3634,13 +3502,12 @@
             <a:avLst/>
           </a:prstGeom>
           <a:noFill/>
-          <a:ln/>
-        </p:spPr>
-        <p:txBody>
-          <a:bodyPr wrap="square" lIns="0" tIns="0" rIns="0" bIns="0" rtlCol="0" anchor="ctr"/>
-          <a:lstStyle/>
-          <a:p>
-            <a:pPr algn="ctr" indent="0" marL="0">
+        </p:spPr>
+        <p:txBody>
+          <a:bodyPr wrap="square" lIns="0" tIns="0" rIns="0" bIns="0" rtlCol="0" anchor="ctr"/>
+          <a:lstStyle/>
+          <a:p>
+            <a:pPr marL="0" indent="0" algn="ctr">
               <a:buNone/>
             </a:pPr>
             <a:r>
@@ -3648,9 +3515,9 @@
                 <a:solidFill>
                   <a:srgbClr val="F1F5FB"/>
                 </a:solidFill>
-                <a:latin typeface="Segoe UI Semibold" pitchFamily="34" charset="0"/>
-                <a:ea typeface="Segoe UI Semibold" pitchFamily="34" charset="-122"/>
-                <a:cs typeface="Segoe UI Semibold" pitchFamily="34" charset="-120"/>
+                <a:latin typeface="Segoe UI Semibold" panose="020B0702040204020203" pitchFamily="34" charset="0"/>
+                <a:ea typeface="Segoe UI Semibold" panose="020B0702040204020203" pitchFamily="34" charset="-122"/>
+                <a:cs typeface="Segoe UI Semibold" panose="020B0702040204020203" pitchFamily="34" charset="-120"/>
               </a:rPr>
               <a:t>Sensor</a:t>
             </a:r>
@@ -3673,13 +3540,12 @@
             <a:avLst/>
           </a:prstGeom>
           <a:noFill/>
-          <a:ln/>
-        </p:spPr>
-        <p:txBody>
-          <a:bodyPr wrap="square" lIns="0" tIns="0" rIns="0" bIns="0" rtlCol="0" anchor="ctr"/>
-          <a:lstStyle/>
-          <a:p>
-            <a:pPr algn="ctr" indent="0" marL="0">
+        </p:spPr>
+        <p:txBody>
+          <a:bodyPr wrap="square" lIns="0" tIns="0" rIns="0" bIns="0" rtlCol="0" anchor="ctr"/>
+          <a:lstStyle/>
+          <a:p>
+            <a:pPr marL="0" indent="0" algn="ctr">
               <a:buNone/>
             </a:pPr>
             <a:r>
@@ -3687,9 +3553,9 @@
                 <a:solidFill>
                   <a:srgbClr val="8C9BB8"/>
                 </a:solidFill>
-                <a:latin typeface="Segoe UI" pitchFamily="34" charset="0"/>
-                <a:ea typeface="Segoe UI" pitchFamily="34" charset="-122"/>
-                <a:cs typeface="Segoe UI" pitchFamily="34" charset="-120"/>
+                <a:latin typeface="Segoe UI" panose="020B0502040204020203" pitchFamily="34" charset="0"/>
+                <a:ea typeface="Segoe UI" panose="020B0502040204020203" pitchFamily="34" charset="-122"/>
+                <a:cs typeface="Segoe UI" panose="020B0502040204020203" pitchFamily="34" charset="-120"/>
               </a:rPr>
               <a:t>9 metrics</a:t>
             </a:r>
@@ -3735,13 +3601,12 @@
             <a:avLst/>
           </a:prstGeom>
           <a:noFill/>
-          <a:ln/>
-        </p:spPr>
-        <p:txBody>
-          <a:bodyPr wrap="square" lIns="0" tIns="0" rIns="0" bIns="0" rtlCol="0" anchor="ctr"/>
-          <a:lstStyle/>
-          <a:p>
-            <a:pPr indent="0" marL="0">
+        </p:spPr>
+        <p:txBody>
+          <a:bodyPr wrap="square" lIns="0" tIns="0" rIns="0" bIns="0" rtlCol="0" anchor="ctr"/>
+          <a:lstStyle/>
+          <a:p>
+            <a:pPr marL="0" indent="0">
               <a:buNone/>
             </a:pPr>
             <a:r>
@@ -3749,9 +3614,9 @@
                 <a:solidFill>
                   <a:srgbClr val="22D3EE"/>
                 </a:solidFill>
-                <a:latin typeface="Segoe UI Semibold" pitchFamily="34" charset="0"/>
-                <a:ea typeface="Segoe UI Semibold" pitchFamily="34" charset="-122"/>
-                <a:cs typeface="Segoe UI Semibold" pitchFamily="34" charset="-120"/>
+                <a:latin typeface="Segoe UI Semibold" panose="020B0702040204020203" pitchFamily="34" charset="0"/>
+                <a:ea typeface="Segoe UI Semibold" panose="020B0702040204020203" pitchFamily="34" charset="-122"/>
+                <a:cs typeface="Segoe UI Semibold" panose="020B0702040204020203" pitchFamily="34" charset="-120"/>
               </a:rPr>
               <a:t>5 · 11 · 32</a:t>
             </a:r>
@@ -3774,13 +3639,12 @@
             <a:avLst/>
           </a:prstGeom>
           <a:noFill/>
-          <a:ln/>
         </p:spPr>
         <p:txBody>
           <a:bodyPr wrap="square" lIns="0" tIns="0" rIns="0" bIns="0" rtlCol="0" anchor="t"/>
           <a:lstStyle/>
           <a:p>
-            <a:pPr indent="0" marL="0">
+            <a:pPr marL="0" indent="0">
               <a:buNone/>
             </a:pPr>
             <a:r>
@@ -3788,9 +3652,9 @@
                 <a:solidFill>
                   <a:srgbClr val="8C9BB8"/>
                 </a:solidFill>
-                <a:latin typeface="Segoe UI" pitchFamily="34" charset="0"/>
-                <a:ea typeface="Segoe UI" pitchFamily="34" charset="-122"/>
-                <a:cs typeface="Segoe UI" pitchFamily="34" charset="-120"/>
+                <a:latin typeface="Segoe UI" panose="020B0502040204020203" pitchFamily="34" charset="0"/>
+                <a:ea typeface="Segoe UI" panose="020B0502040204020203" pitchFamily="34" charset="-122"/>
+                <a:cs typeface="Segoe UI" panose="020B0502040204020203" pitchFamily="34" charset="-120"/>
               </a:rPr>
               <a:t>facilities · assets · sensors</a:t>
             </a:r>
@@ -3836,13 +3700,12 @@
             <a:avLst/>
           </a:prstGeom>
           <a:noFill/>
-          <a:ln/>
-        </p:spPr>
-        <p:txBody>
-          <a:bodyPr wrap="square" lIns="0" tIns="0" rIns="0" bIns="0" rtlCol="0" anchor="ctr"/>
-          <a:lstStyle/>
-          <a:p>
-            <a:pPr indent="0" marL="0">
+        </p:spPr>
+        <p:txBody>
+          <a:bodyPr wrap="square" lIns="0" tIns="0" rIns="0" bIns="0" rtlCol="0" anchor="ctr"/>
+          <a:lstStyle/>
+          <a:p>
+            <a:pPr marL="0" indent="0">
               <a:buNone/>
             </a:pPr>
             <a:r>
@@ -3850,9 +3713,9 @@
                 <a:solidFill>
                   <a:srgbClr val="22D3EE"/>
                 </a:solidFill>
-                <a:latin typeface="Segoe UI Semibold" pitchFamily="34" charset="0"/>
-                <a:ea typeface="Segoe UI Semibold" pitchFamily="34" charset="-122"/>
-                <a:cs typeface="Segoe UI Semibold" pitchFamily="34" charset="-120"/>
+                <a:latin typeface="Segoe UI Semibold" panose="020B0702040204020203" pitchFamily="34" charset="0"/>
+                <a:ea typeface="Segoe UI Semibold" panose="020B0702040204020203" pitchFamily="34" charset="-122"/>
+                <a:cs typeface="Segoe UI Semibold" panose="020B0702040204020203" pitchFamily="34" charset="-120"/>
               </a:rPr>
               <a:t>Server-side</a:t>
             </a:r>
@@ -3875,13 +3738,12 @@
             <a:avLst/>
           </a:prstGeom>
           <a:noFill/>
-          <a:ln/>
         </p:spPr>
         <p:txBody>
           <a:bodyPr wrap="square" lIns="0" tIns="0" rIns="0" bIns="0" rtlCol="0" anchor="t"/>
           <a:lstStyle/>
           <a:p>
-            <a:pPr indent="0" marL="0">
+            <a:pPr marL="0" indent="0">
               <a:buNone/>
             </a:pPr>
             <a:r>
@@ -3889,9 +3751,9 @@
                 <a:solidFill>
                   <a:srgbClr val="8C9BB8"/>
                 </a:solidFill>
-                <a:latin typeface="Segoe UI" pitchFamily="34" charset="0"/>
-                <a:ea typeface="Segoe UI" pitchFamily="34" charset="-122"/>
-                <a:cs typeface="Segoe UI" pitchFamily="34" charset="-120"/>
+                <a:latin typeface="Segoe UI" panose="020B0502040204020203" pitchFamily="34" charset="0"/>
+                <a:ea typeface="Segoe UI" panose="020B0502040204020203" pitchFamily="34" charset="-122"/>
+                <a:cs typeface="Segoe UI" panose="020B0502040204020203" pitchFamily="34" charset="-120"/>
               </a:rPr>
               <a:t>search and paging</a:t>
             </a:r>
@@ -3937,13 +3799,12 @@
             <a:avLst/>
           </a:prstGeom>
           <a:noFill/>
-          <a:ln/>
-        </p:spPr>
-        <p:txBody>
-          <a:bodyPr wrap="square" lIns="0" tIns="0" rIns="0" bIns="0" rtlCol="0" anchor="ctr"/>
-          <a:lstStyle/>
-          <a:p>
-            <a:pPr indent="0" marL="0">
+        </p:spPr>
+        <p:txBody>
+          <a:bodyPr wrap="square" lIns="0" tIns="0" rIns="0" bIns="0" rtlCol="0" anchor="ctr"/>
+          <a:lstStyle/>
+          <a:p>
+            <a:pPr marL="0" indent="0">
               <a:buNone/>
             </a:pPr>
             <a:r>
@@ -3951,9 +3812,9 @@
                 <a:solidFill>
                   <a:srgbClr val="22D3EE"/>
                 </a:solidFill>
-                <a:latin typeface="Segoe UI Semibold" pitchFamily="34" charset="0"/>
-                <a:ea typeface="Segoe UI Semibold" pitchFamily="34" charset="-122"/>
-                <a:cs typeface="Segoe UI Semibold" pitchFamily="34" charset="-120"/>
+                <a:latin typeface="Segoe UI Semibold" panose="020B0702040204020203" pitchFamily="34" charset="0"/>
+                <a:ea typeface="Segoe UI Semibold" panose="020B0702040204020203" pitchFamily="34" charset="-122"/>
+                <a:cs typeface="Segoe UI Semibold" panose="020B0702040204020203" pitchFamily="34" charset="-120"/>
               </a:rPr>
               <a:t>Validated</a:t>
             </a:r>
@@ -3976,13 +3837,12 @@
             <a:avLst/>
           </a:prstGeom>
           <a:noFill/>
-          <a:ln/>
         </p:spPr>
         <p:txBody>
           <a:bodyPr wrap="square" lIns="0" tIns="0" rIns="0" bIns="0" rtlCol="0" anchor="t"/>
           <a:lstStyle/>
           <a:p>
-            <a:pPr indent="0" marL="0">
+            <a:pPr marL="0" indent="0">
               <a:buNone/>
             </a:pPr>
             <a:r>
@@ -3990,9 +3850,9 @@
                 <a:solidFill>
                   <a:srgbClr val="8C9BB8"/>
                 </a:solidFill>
-                <a:latin typeface="Segoe UI" pitchFamily="34" charset="0"/>
-                <a:ea typeface="Segoe UI" pitchFamily="34" charset="-122"/>
-                <a:cs typeface="Segoe UI" pitchFamily="34" charset="-120"/>
+                <a:latin typeface="Segoe UI" panose="020B0502040204020203" pitchFamily="34" charset="0"/>
+                <a:ea typeface="Segoe UI" panose="020B0502040204020203" pitchFamily="34" charset="-122"/>
+                <a:cs typeface="Segoe UI" panose="020B0502040204020203" pitchFamily="34" charset="-120"/>
               </a:rPr>
               <a:t>every form</a:t>
             </a:r>
@@ -4042,13 +3902,12 @@
             <a:avLst/>
           </a:prstGeom>
           <a:noFill/>
-          <a:ln/>
-        </p:spPr>
-        <p:txBody>
-          <a:bodyPr wrap="square" lIns="0" tIns="0" rIns="0" bIns="0" rtlCol="0" anchor="ctr"/>
-          <a:lstStyle/>
-          <a:p>
-            <a:pPr indent="0" marL="0">
+        </p:spPr>
+        <p:txBody>
+          <a:bodyPr wrap="square" lIns="0" tIns="0" rIns="0" bIns="0" rtlCol="0" anchor="ctr"/>
+          <a:lstStyle/>
+          <a:p>
+            <a:pPr marL="0" indent="0">
               <a:buNone/>
             </a:pPr>
             <a:r>
@@ -4056,23 +3915,20 @@
                 <a:solidFill>
                   <a:srgbClr val="22D3EE"/>
                 </a:solidFill>
-                <a:latin typeface="Segoe UI" pitchFamily="34" charset="0"/>
-                <a:ea typeface="Segoe UI" pitchFamily="34" charset="-122"/>
-                <a:cs typeface="Segoe UI" pitchFamily="34" charset="-120"/>
+                <a:latin typeface="Segoe UI" panose="020B0502040204020203" pitchFamily="34" charset="0"/>
+                <a:ea typeface="Segoe UI" panose="020B0502040204020203" pitchFamily="34" charset="-122"/>
+                <a:cs typeface="Segoe UI" panose="020B0502040204020203" pitchFamily="34" charset="-120"/>
               </a:rPr>
               <a:t>LIVE  </a:t>
             </a:r>
-            <a:pPr indent="0" marL="0">
-              <a:buNone/>
-            </a:pPr>
             <a:r>
               <a:rPr lang="en-US" sz="1100" dirty="0">
                 <a:solidFill>
                   <a:srgbClr val="F1F5FB"/>
                 </a:solidFill>
-                <a:latin typeface="Segoe UI" pitchFamily="34" charset="0"/>
-                <a:ea typeface="Segoe UI" pitchFamily="34" charset="-122"/>
-                <a:cs typeface="Segoe UI" pitchFamily="34" charset="-120"/>
+                <a:latin typeface="Segoe UI" panose="020B0502040204020203" pitchFamily="34" charset="0"/>
+                <a:ea typeface="Segoe UI" panose="020B0502040204020203" pitchFamily="34" charset="-122"/>
+                <a:cs typeface="Segoe UI" panose="020B0502040204020203" pitchFamily="34" charset="-120"/>
               </a:rPr>
               <a:t>Assets page</a:t>
             </a:r>
@@ -4090,12 +3946,13 @@
 
 <file path=ppt/slides/slide4.xml><?xml version="1.0" encoding="utf-8"?>
 <p:sld xmlns:a="http://schemas.openxmlformats.org/drawingml/2006/main" xmlns:r="http://schemas.openxmlformats.org/officeDocument/2006/relationships" xmlns:p="http://schemas.openxmlformats.org/presentationml/2006/main">
-  <p:cSld name="Slide 4">
+  <p:cSld>
     <p:bg>
       <p:bgPr>
         <a:solidFill>
           <a:srgbClr val="0A1020"/>
         </a:solidFill>
+        <a:effectLst/>
       </p:bgPr>
     </p:bg>
     <p:spTree>
@@ -4127,25 +3984,24 @@
             <a:avLst/>
           </a:prstGeom>
           <a:noFill/>
-          <a:ln/>
-        </p:spPr>
-        <p:txBody>
-          <a:bodyPr wrap="square" lIns="0" tIns="0" rIns="0" bIns="0" rtlCol="0" anchor="ctr"/>
-          <a:lstStyle/>
-          <a:p>
-            <a:pPr indent="0" marL="0">
-              <a:buNone/>
-            </a:pPr>
-            <a:r>
-              <a:rPr lang="en-US" sz="1100" spc="400" kern="0" dirty="0">
+        </p:spPr>
+        <p:txBody>
+          <a:bodyPr wrap="square" lIns="0" tIns="0" rIns="0" bIns="0" rtlCol="0" anchor="ctr"/>
+          <a:lstStyle/>
+          <a:p>
+            <a:pPr marL="0" indent="0">
+              <a:buNone/>
+            </a:pPr>
+            <a:r>
+              <a:rPr lang="en-US" sz="1100" kern="0" spc="400" dirty="0">
                 <a:solidFill>
                   <a:srgbClr val="22D3EE"/>
                 </a:solidFill>
-                <a:latin typeface="Segoe UI Semibold" pitchFamily="34" charset="0"/>
-                <a:ea typeface="Segoe UI Semibold" pitchFamily="34" charset="-122"/>
-                <a:cs typeface="Segoe UI Semibold" pitchFamily="34" charset="-120"/>
-              </a:rPr>
-              <a:t>04 · GOVINDU · MONITORING SERVICE</a:t>
+                <a:latin typeface="Segoe UI Semibold" panose="020B0702040204020203" pitchFamily="34" charset="0"/>
+                <a:ea typeface="Segoe UI Semibold" panose="020B0702040204020203" pitchFamily="34" charset="-122"/>
+                <a:cs typeface="Segoe UI Semibold" panose="020B0702040204020203" pitchFamily="34" charset="-120"/>
+              </a:rPr>
+              <a:t>04 · MONITORING SERVICE</a:t>
             </a:r>
             <a:endParaRPr lang="en-US" sz="1100" dirty="0"/>
           </a:p>
@@ -4166,13 +4022,12 @@
             <a:avLst/>
           </a:prstGeom>
           <a:noFill/>
-          <a:ln/>
-        </p:spPr>
-        <p:txBody>
-          <a:bodyPr wrap="square" lIns="0" tIns="0" rIns="0" bIns="0" rtlCol="0" anchor="ctr"/>
-          <a:lstStyle/>
-          <a:p>
-            <a:pPr indent="0" marL="0">
+        </p:spPr>
+        <p:txBody>
+          <a:bodyPr wrap="square" lIns="0" tIns="0" rIns="0" bIns="0" rtlCol="0" anchor="ctr"/>
+          <a:lstStyle/>
+          <a:p>
+            <a:pPr marL="0" indent="0">
               <a:buNone/>
             </a:pPr>
             <a:r>
@@ -4180,9 +4035,9 @@
                 <a:solidFill>
                   <a:srgbClr val="F1F5FB"/>
                 </a:solidFill>
-                <a:latin typeface="Segoe UI Semibold" pitchFamily="34" charset="0"/>
-                <a:ea typeface="Segoe UI Semibold" pitchFamily="34" charset="-122"/>
-                <a:cs typeface="Segoe UI Semibold" pitchFamily="34" charset="-120"/>
+                <a:latin typeface="Segoe UI Semibold" panose="020B0702040204020203" pitchFamily="34" charset="0"/>
+                <a:ea typeface="Segoe UI Semibold" panose="020B0702040204020203" pitchFamily="34" charset="-122"/>
+                <a:cs typeface="Segoe UI Semibold" panose="020B0702040204020203" pitchFamily="34" charset="-120"/>
               </a:rPr>
               <a:t>From a sensor reading to an instant alert</a:t>
             </a:r>
@@ -4205,13 +4060,12 @@
             <a:avLst/>
           </a:prstGeom>
           <a:noFill/>
-          <a:ln/>
-        </p:spPr>
-        <p:txBody>
-          <a:bodyPr wrap="square" lIns="0" tIns="0" rIns="0" bIns="0" rtlCol="0" anchor="ctr"/>
-          <a:lstStyle/>
-          <a:p>
-            <a:pPr indent="0" marL="0">
+        </p:spPr>
+        <p:txBody>
+          <a:bodyPr wrap="square" lIns="0" tIns="0" rIns="0" bIns="0" rtlCol="0" anchor="ctr"/>
+          <a:lstStyle/>
+          <a:p>
+            <a:pPr marL="0" indent="0">
               <a:buNone/>
             </a:pPr>
             <a:r>
@@ -4219,9 +4073,9 @@
                 <a:solidFill>
                   <a:srgbClr val="8C9BB8"/>
                 </a:solidFill>
-                <a:latin typeface="Segoe UI" pitchFamily="34" charset="0"/>
-                <a:ea typeface="Segoe UI" pitchFamily="34" charset="-122"/>
-                <a:cs typeface="Segoe UI" pitchFamily="34" charset="-120"/>
+                <a:latin typeface="Segoe UI" panose="020B0502040204020203" pitchFamily="34" charset="0"/>
+                <a:ea typeface="Segoe UI" panose="020B0502040204020203" pitchFamily="34" charset="-122"/>
+                <a:cs typeface="Segoe UI" panose="020B0502040204020203" pitchFamily="34" charset="-120"/>
               </a:rPr>
               <a:t>EC8208 Software Architecture  ·  University of Ruhuna</a:t>
             </a:r>
@@ -4244,13 +4098,12 @@
             <a:avLst/>
           </a:prstGeom>
           <a:noFill/>
-          <a:ln/>
-        </p:spPr>
-        <p:txBody>
-          <a:bodyPr wrap="square" lIns="0" tIns="0" rIns="0" bIns="0" rtlCol="0" anchor="ctr"/>
-          <a:lstStyle/>
-          <a:p>
-            <a:pPr algn="r" indent="0" marL="0">
+        </p:spPr>
+        <p:txBody>
+          <a:bodyPr wrap="square" lIns="0" tIns="0" rIns="0" bIns="0" rtlCol="0" anchor="ctr"/>
+          <a:lstStyle/>
+          <a:p>
+            <a:pPr marL="0" indent="0" algn="r">
               <a:buNone/>
             </a:pPr>
             <a:r>
@@ -4258,9 +4111,9 @@
                 <a:solidFill>
                   <a:srgbClr val="8C9BB8"/>
                 </a:solidFill>
-                <a:latin typeface="Segoe UI" pitchFamily="34" charset="0"/>
-                <a:ea typeface="Segoe UI" pitchFamily="34" charset="-122"/>
-                <a:cs typeface="Segoe UI" pitchFamily="34" charset="-120"/>
+                <a:latin typeface="Segoe UI" panose="020B0502040204020203" pitchFamily="34" charset="0"/>
+                <a:ea typeface="Segoe UI" panose="020B0502040204020203" pitchFamily="34" charset="-122"/>
+                <a:cs typeface="Segoe UI" panose="020B0502040204020203" pitchFamily="34" charset="-120"/>
               </a:rPr>
               <a:t>04  ·  1:00–1:49</a:t>
             </a:r>
@@ -4310,13 +4163,12 @@
             <a:avLst/>
           </a:prstGeom>
           <a:noFill/>
-          <a:ln/>
-        </p:spPr>
-        <p:txBody>
-          <a:bodyPr wrap="square" lIns="0" tIns="0" rIns="0" bIns="0" rtlCol="0" anchor="ctr"/>
-          <a:lstStyle/>
-          <a:p>
-            <a:pPr algn="ctr" indent="0" marL="0">
+        </p:spPr>
+        <p:txBody>
+          <a:bodyPr wrap="square" lIns="0" tIns="0" rIns="0" bIns="0" rtlCol="0" anchor="ctr"/>
+          <a:lstStyle/>
+          <a:p>
+            <a:pPr marL="0" indent="0" algn="ctr">
               <a:buNone/>
             </a:pPr>
             <a:r>
@@ -4324,9 +4176,9 @@
                 <a:solidFill>
                   <a:srgbClr val="0A1020"/>
                 </a:solidFill>
-                <a:latin typeface="Segoe UI Semibold" pitchFamily="34" charset="0"/>
-                <a:ea typeface="Segoe UI Semibold" pitchFamily="34" charset="-122"/>
-                <a:cs typeface="Segoe UI Semibold" pitchFamily="34" charset="-120"/>
+                <a:latin typeface="Segoe UI Semibold" panose="020B0702040204020203" pitchFamily="34" charset="0"/>
+                <a:ea typeface="Segoe UI Semibold" panose="020B0702040204020203" pitchFamily="34" charset="-122"/>
+                <a:cs typeface="Segoe UI Semibold" panose="020B0702040204020203" pitchFamily="34" charset="-120"/>
               </a:rPr>
               <a:t>Reading</a:t>
             </a:r>
@@ -4349,13 +4201,12 @@
             <a:avLst/>
           </a:prstGeom>
           <a:noFill/>
-          <a:ln/>
-        </p:spPr>
-        <p:txBody>
-          <a:bodyPr wrap="square" lIns="0" tIns="0" rIns="0" bIns="0" rtlCol="0" anchor="ctr"/>
-          <a:lstStyle/>
-          <a:p>
-            <a:pPr algn="ctr" indent="0" marL="0">
+        </p:spPr>
+        <p:txBody>
+          <a:bodyPr wrap="square" lIns="0" tIns="0" rIns="0" bIns="0" rtlCol="0" anchor="ctr"/>
+          <a:lstStyle/>
+          <a:p>
+            <a:pPr marL="0" indent="0" algn="ctr">
               <a:buNone/>
             </a:pPr>
             <a:r>
@@ -4363,9 +4214,9 @@
                 <a:solidFill>
                   <a:srgbClr val="0A1020"/>
                 </a:solidFill>
-                <a:latin typeface="Segoe UI" pitchFamily="34" charset="0"/>
-                <a:ea typeface="Segoe UI" pitchFamily="34" charset="-122"/>
-                <a:cs typeface="Segoe UI" pitchFamily="34" charset="-120"/>
+                <a:latin typeface="Segoe UI" panose="020B0502040204020203" pitchFamily="34" charset="0"/>
+                <a:ea typeface="Segoe UI" panose="020B0502040204020203" pitchFamily="34" charset="-122"/>
+                <a:cs typeface="Segoe UI" panose="020B0502040204020203" pitchFamily="34" charset="-120"/>
               </a:rPr>
               <a:t>every few seconds</a:t>
             </a:r>
@@ -4388,13 +4239,12 @@
             <a:avLst/>
           </a:prstGeom>
           <a:noFill/>
-          <a:ln/>
-        </p:spPr>
-        <p:txBody>
-          <a:bodyPr wrap="square" lIns="0" tIns="0" rIns="0" bIns="0" rtlCol="0" anchor="ctr"/>
-          <a:lstStyle/>
-          <a:p>
-            <a:pPr algn="ctr" indent="0" marL="0">
+        </p:spPr>
+        <p:txBody>
+          <a:bodyPr wrap="square" lIns="0" tIns="0" rIns="0" bIns="0" rtlCol="0" anchor="ctr"/>
+          <a:lstStyle/>
+          <a:p>
+            <a:pPr marL="0" indent="0" algn="ctr">
               <a:buNone/>
             </a:pPr>
             <a:r>
@@ -4402,9 +4252,9 @@
                 <a:solidFill>
                   <a:srgbClr val="22D3EE"/>
                 </a:solidFill>
-                <a:latin typeface="Segoe UI Semibold" pitchFamily="34" charset="0"/>
-                <a:ea typeface="Segoe UI Semibold" pitchFamily="34" charset="-122"/>
-                <a:cs typeface="Segoe UI Semibold" pitchFamily="34" charset="-120"/>
+                <a:latin typeface="Segoe UI Semibold" panose="020B0702040204020203" pitchFamily="34" charset="0"/>
+                <a:ea typeface="Segoe UI Semibold" panose="020B0702040204020203" pitchFamily="34" charset="-122"/>
+                <a:cs typeface="Segoe UI Semibold" panose="020B0702040204020203" pitchFamily="34" charset="-120"/>
               </a:rPr>
               <a:t>›</a:t>
             </a:r>
@@ -4454,13 +4304,12 @@
             <a:avLst/>
           </a:prstGeom>
           <a:noFill/>
-          <a:ln/>
-        </p:spPr>
-        <p:txBody>
-          <a:bodyPr wrap="square" lIns="0" tIns="0" rIns="0" bIns="0" rtlCol="0" anchor="ctr"/>
-          <a:lstStyle/>
-          <a:p>
-            <a:pPr algn="ctr" indent="0" marL="0">
+        </p:spPr>
+        <p:txBody>
+          <a:bodyPr wrap="square" lIns="0" tIns="0" rIns="0" bIns="0" rtlCol="0" anchor="ctr"/>
+          <a:lstStyle/>
+          <a:p>
+            <a:pPr marL="0" indent="0" algn="ctr">
               <a:buNone/>
             </a:pPr>
             <a:r>
@@ -4468,9 +4317,9 @@
                 <a:solidFill>
                   <a:srgbClr val="F1F5FB"/>
                 </a:solidFill>
-                <a:latin typeface="Segoe UI Semibold" pitchFamily="34" charset="0"/>
-                <a:ea typeface="Segoe UI Semibold" pitchFamily="34" charset="-122"/>
-                <a:cs typeface="Segoe UI Semibold" pitchFamily="34" charset="-120"/>
+                <a:latin typeface="Segoe UI Semibold" panose="020B0702040204020203" pitchFamily="34" charset="0"/>
+                <a:ea typeface="Segoe UI Semibold" panose="020B0702040204020203" pitchFamily="34" charset="-122"/>
+                <a:cs typeface="Segoe UI Semibold" panose="020B0702040204020203" pitchFamily="34" charset="-120"/>
               </a:rPr>
               <a:t>Rule check</a:t>
             </a:r>
@@ -4493,13 +4342,12 @@
             <a:avLst/>
           </a:prstGeom>
           <a:noFill/>
-          <a:ln/>
-        </p:spPr>
-        <p:txBody>
-          <a:bodyPr wrap="square" lIns="0" tIns="0" rIns="0" bIns="0" rtlCol="0" anchor="ctr"/>
-          <a:lstStyle/>
-          <a:p>
-            <a:pPr algn="ctr" indent="0" marL="0">
+        </p:spPr>
+        <p:txBody>
+          <a:bodyPr wrap="square" lIns="0" tIns="0" rIns="0" bIns="0" rtlCol="0" anchor="ctr"/>
+          <a:lstStyle/>
+          <a:p>
+            <a:pPr marL="0" indent="0" algn="ctr">
               <a:buNone/>
             </a:pPr>
             <a:r>
@@ -4507,9 +4355,9 @@
                 <a:solidFill>
                   <a:srgbClr val="8C9BB8"/>
                 </a:solidFill>
-                <a:latin typeface="Segoe UI" pitchFamily="34" charset="0"/>
-                <a:ea typeface="Segoe UI" pitchFamily="34" charset="-122"/>
-                <a:cs typeface="Segoe UI" pitchFamily="34" charset="-120"/>
+                <a:latin typeface="Segoe UI" panose="020B0502040204020203" pitchFamily="34" charset="0"/>
+                <a:ea typeface="Segoe UI" panose="020B0502040204020203" pitchFamily="34" charset="-122"/>
+                <a:cs typeface="Segoe UI" panose="020B0502040204020203" pitchFamily="34" charset="-120"/>
               </a:rPr>
               <a:t>threshold</a:t>
             </a:r>
@@ -4532,13 +4380,12 @@
             <a:avLst/>
           </a:prstGeom>
           <a:noFill/>
-          <a:ln/>
-        </p:spPr>
-        <p:txBody>
-          <a:bodyPr wrap="square" lIns="0" tIns="0" rIns="0" bIns="0" rtlCol="0" anchor="ctr"/>
-          <a:lstStyle/>
-          <a:p>
-            <a:pPr algn="ctr" indent="0" marL="0">
+        </p:spPr>
+        <p:txBody>
+          <a:bodyPr wrap="square" lIns="0" tIns="0" rIns="0" bIns="0" rtlCol="0" anchor="ctr"/>
+          <a:lstStyle/>
+          <a:p>
+            <a:pPr marL="0" indent="0" algn="ctr">
               <a:buNone/>
             </a:pPr>
             <a:r>
@@ -4546,9 +4393,9 @@
                 <a:solidFill>
                   <a:srgbClr val="22D3EE"/>
                 </a:solidFill>
-                <a:latin typeface="Segoe UI Semibold" pitchFamily="34" charset="0"/>
-                <a:ea typeface="Segoe UI Semibold" pitchFamily="34" charset="-122"/>
-                <a:cs typeface="Segoe UI Semibold" pitchFamily="34" charset="-120"/>
+                <a:latin typeface="Segoe UI Semibold" panose="020B0702040204020203" pitchFamily="34" charset="0"/>
+                <a:ea typeface="Segoe UI Semibold" panose="020B0702040204020203" pitchFamily="34" charset="-122"/>
+                <a:cs typeface="Segoe UI Semibold" panose="020B0702040204020203" pitchFamily="34" charset="-120"/>
               </a:rPr>
               <a:t>›</a:t>
             </a:r>
@@ -4598,13 +4445,12 @@
             <a:avLst/>
           </a:prstGeom>
           <a:noFill/>
-          <a:ln/>
-        </p:spPr>
-        <p:txBody>
-          <a:bodyPr wrap="square" lIns="0" tIns="0" rIns="0" bIns="0" rtlCol="0" anchor="ctr"/>
-          <a:lstStyle/>
-          <a:p>
-            <a:pPr algn="ctr" indent="0" marL="0">
+        </p:spPr>
+        <p:txBody>
+          <a:bodyPr wrap="square" lIns="0" tIns="0" rIns="0" bIns="0" rtlCol="0" anchor="ctr"/>
+          <a:lstStyle/>
+          <a:p>
+            <a:pPr marL="0" indent="0" algn="ctr">
               <a:buNone/>
             </a:pPr>
             <a:r>
@@ -4612,9 +4458,9 @@
                 <a:solidFill>
                   <a:srgbClr val="F1F5FB"/>
                 </a:solidFill>
-                <a:latin typeface="Segoe UI Semibold" pitchFamily="34" charset="0"/>
-                <a:ea typeface="Segoe UI Semibold" pitchFamily="34" charset="-122"/>
-                <a:cs typeface="Segoe UI Semibold" pitchFamily="34" charset="-120"/>
+                <a:latin typeface="Segoe UI Semibold" panose="020B0702040204020203" pitchFamily="34" charset="0"/>
+                <a:ea typeface="Segoe UI Semibold" panose="020B0702040204020203" pitchFamily="34" charset="-122"/>
+                <a:cs typeface="Segoe UI Semibold" panose="020B0702040204020203" pitchFamily="34" charset="-120"/>
               </a:rPr>
               <a:t>Alert</a:t>
             </a:r>
@@ -4637,13 +4483,12 @@
             <a:avLst/>
           </a:prstGeom>
           <a:noFill/>
-          <a:ln/>
-        </p:spPr>
-        <p:txBody>
-          <a:bodyPr wrap="square" lIns="0" tIns="0" rIns="0" bIns="0" rtlCol="0" anchor="ctr"/>
-          <a:lstStyle/>
-          <a:p>
-            <a:pPr algn="ctr" indent="0" marL="0">
+        </p:spPr>
+        <p:txBody>
+          <a:bodyPr wrap="square" lIns="0" tIns="0" rIns="0" bIns="0" rtlCol="0" anchor="ctr"/>
+          <a:lstStyle/>
+          <a:p>
+            <a:pPr marL="0" indent="0" algn="ctr">
               <a:buNone/>
             </a:pPr>
             <a:r>
@@ -4651,9 +4496,9 @@
                 <a:solidFill>
                   <a:srgbClr val="8C9BB8"/>
                 </a:solidFill>
-                <a:latin typeface="Segoe UI" pitchFamily="34" charset="0"/>
-                <a:ea typeface="Segoe UI" pitchFamily="34" charset="-122"/>
-                <a:cs typeface="Segoe UI" pitchFamily="34" charset="-120"/>
+                <a:latin typeface="Segoe UI" panose="020B0502040204020203" pitchFamily="34" charset="0"/>
+                <a:ea typeface="Segoe UI" panose="020B0502040204020203" pitchFamily="34" charset="-122"/>
+                <a:cs typeface="Segoe UI" panose="020B0502040204020203" pitchFamily="34" charset="-120"/>
               </a:rPr>
               <a:t>one per asset</a:t>
             </a:r>
@@ -4676,13 +4521,12 @@
             <a:avLst/>
           </a:prstGeom>
           <a:noFill/>
-          <a:ln/>
-        </p:spPr>
-        <p:txBody>
-          <a:bodyPr wrap="square" lIns="0" tIns="0" rIns="0" bIns="0" rtlCol="0" anchor="ctr"/>
-          <a:lstStyle/>
-          <a:p>
-            <a:pPr algn="ctr" indent="0" marL="0">
+        </p:spPr>
+        <p:txBody>
+          <a:bodyPr wrap="square" lIns="0" tIns="0" rIns="0" bIns="0" rtlCol="0" anchor="ctr"/>
+          <a:lstStyle/>
+          <a:p>
+            <a:pPr marL="0" indent="0" algn="ctr">
               <a:buNone/>
             </a:pPr>
             <a:r>
@@ -4690,9 +4534,9 @@
                 <a:solidFill>
                   <a:srgbClr val="22D3EE"/>
                 </a:solidFill>
-                <a:latin typeface="Segoe UI Semibold" pitchFamily="34" charset="0"/>
-                <a:ea typeface="Segoe UI Semibold" pitchFamily="34" charset="-122"/>
-                <a:cs typeface="Segoe UI Semibold" pitchFamily="34" charset="-120"/>
+                <a:latin typeface="Segoe UI Semibold" panose="020B0702040204020203" pitchFamily="34" charset="0"/>
+                <a:ea typeface="Segoe UI Semibold" panose="020B0702040204020203" pitchFamily="34" charset="-122"/>
+                <a:cs typeface="Segoe UI Semibold" panose="020B0702040204020203" pitchFamily="34" charset="-120"/>
               </a:rPr>
               <a:t>›</a:t>
             </a:r>
@@ -4742,13 +4586,12 @@
             <a:avLst/>
           </a:prstGeom>
           <a:noFill/>
-          <a:ln/>
-        </p:spPr>
-        <p:txBody>
-          <a:bodyPr wrap="square" lIns="0" tIns="0" rIns="0" bIns="0" rtlCol="0" anchor="ctr"/>
-          <a:lstStyle/>
-          <a:p>
-            <a:pPr algn="ctr" indent="0" marL="0">
+        </p:spPr>
+        <p:txBody>
+          <a:bodyPr wrap="square" lIns="0" tIns="0" rIns="0" bIns="0" rtlCol="0" anchor="ctr"/>
+          <a:lstStyle/>
+          <a:p>
+            <a:pPr marL="0" indent="0" algn="ctr">
               <a:buNone/>
             </a:pPr>
             <a:r>
@@ -4756,9 +4599,9 @@
                 <a:solidFill>
                   <a:srgbClr val="F1F5FB"/>
                 </a:solidFill>
-                <a:latin typeface="Segoe UI Semibold" pitchFamily="34" charset="0"/>
-                <a:ea typeface="Segoe UI Semibold" pitchFamily="34" charset="-122"/>
-                <a:cs typeface="Segoe UI Semibold" pitchFamily="34" charset="-120"/>
+                <a:latin typeface="Segoe UI Semibold" panose="020B0702040204020203" pitchFamily="34" charset="0"/>
+                <a:ea typeface="Segoe UI Semibold" panose="020B0702040204020203" pitchFamily="34" charset="-122"/>
+                <a:cs typeface="Segoe UI Semibold" panose="020B0702040204020203" pitchFamily="34" charset="-120"/>
               </a:rPr>
               <a:t>RabbitMQ</a:t>
             </a:r>
@@ -4781,13 +4624,12 @@
             <a:avLst/>
           </a:prstGeom>
           <a:noFill/>
-          <a:ln/>
-        </p:spPr>
-        <p:txBody>
-          <a:bodyPr wrap="square" lIns="0" tIns="0" rIns="0" bIns="0" rtlCol="0" anchor="ctr"/>
-          <a:lstStyle/>
-          <a:p>
-            <a:pPr algn="ctr" indent="0" marL="0">
+        </p:spPr>
+        <p:txBody>
+          <a:bodyPr wrap="square" lIns="0" tIns="0" rIns="0" bIns="0" rtlCol="0" anchor="ctr"/>
+          <a:lstStyle/>
+          <a:p>
+            <a:pPr marL="0" indent="0" algn="ctr">
               <a:buNone/>
             </a:pPr>
             <a:r>
@@ -4795,9 +4637,9 @@
                 <a:solidFill>
                   <a:srgbClr val="8C9BB8"/>
                 </a:solidFill>
-                <a:latin typeface="Segoe UI" pitchFamily="34" charset="0"/>
-                <a:ea typeface="Segoe UI" pitchFamily="34" charset="-122"/>
-                <a:cs typeface="Segoe UI" pitchFamily="34" charset="-120"/>
+                <a:latin typeface="Segoe UI" panose="020B0502040204020203" pitchFamily="34" charset="0"/>
+                <a:ea typeface="Segoe UI" panose="020B0502040204020203" pitchFamily="34" charset="-122"/>
+                <a:cs typeface="Segoe UI" panose="020B0502040204020203" pitchFamily="34" charset="-120"/>
               </a:rPr>
               <a:t>event</a:t>
             </a:r>
@@ -4843,13 +4685,12 @@
             <a:avLst/>
           </a:prstGeom>
           <a:noFill/>
-          <a:ln/>
-        </p:spPr>
-        <p:txBody>
-          <a:bodyPr wrap="square" lIns="0" tIns="0" rIns="0" bIns="0" rtlCol="0" anchor="ctr"/>
-          <a:lstStyle/>
-          <a:p>
-            <a:pPr indent="0" marL="0">
+        </p:spPr>
+        <p:txBody>
+          <a:bodyPr wrap="square" lIns="0" tIns="0" rIns="0" bIns="0" rtlCol="0" anchor="ctr"/>
+          <a:lstStyle/>
+          <a:p>
+            <a:pPr marL="0" indent="0">
               <a:buNone/>
             </a:pPr>
             <a:r>
@@ -4857,9 +4698,9 @@
                 <a:solidFill>
                   <a:srgbClr val="22D3EE"/>
                 </a:solidFill>
-                <a:latin typeface="Segoe UI Semibold" pitchFamily="34" charset="0"/>
-                <a:ea typeface="Segoe UI Semibold" pitchFamily="34" charset="-122"/>
-                <a:cs typeface="Segoe UI Semibold" pitchFamily="34" charset="-120"/>
+                <a:latin typeface="Segoe UI Semibold" panose="020B0702040204020203" pitchFamily="34" charset="0"/>
+                <a:ea typeface="Segoe UI Semibold" panose="020B0702040204020203" pitchFamily="34" charset="-122"/>
+                <a:cs typeface="Segoe UI Semibold" panose="020B0702040204020203" pitchFamily="34" charset="-120"/>
               </a:rPr>
               <a:t>16,000+</a:t>
             </a:r>
@@ -4882,13 +4723,12 @@
             <a:avLst/>
           </a:prstGeom>
           <a:noFill/>
-          <a:ln/>
         </p:spPr>
         <p:txBody>
           <a:bodyPr wrap="square" lIns="0" tIns="0" rIns="0" bIns="0" rtlCol="0" anchor="t"/>
           <a:lstStyle/>
           <a:p>
-            <a:pPr indent="0" marL="0">
+            <a:pPr marL="0" indent="0">
               <a:buNone/>
             </a:pPr>
             <a:r>
@@ -4896,9 +4736,9 @@
                 <a:solidFill>
                   <a:srgbClr val="8C9BB8"/>
                 </a:solidFill>
-                <a:latin typeface="Segoe UI" pitchFamily="34" charset="0"/>
-                <a:ea typeface="Segoe UI" pitchFamily="34" charset="-122"/>
-                <a:cs typeface="Segoe UI" pitchFamily="34" charset="-120"/>
+                <a:latin typeface="Segoe UI" panose="020B0502040204020203" pitchFamily="34" charset="0"/>
+                <a:ea typeface="Segoe UI" panose="020B0502040204020203" pitchFamily="34" charset="-122"/>
+                <a:cs typeface="Segoe UI" panose="020B0502040204020203" pitchFamily="34" charset="-120"/>
               </a:rPr>
               <a:t>readings stored</a:t>
             </a:r>
@@ -4944,13 +4784,12 @@
             <a:avLst/>
           </a:prstGeom>
           <a:noFill/>
-          <a:ln/>
-        </p:spPr>
-        <p:txBody>
-          <a:bodyPr wrap="square" lIns="0" tIns="0" rIns="0" bIns="0" rtlCol="0" anchor="ctr"/>
-          <a:lstStyle/>
-          <a:p>
-            <a:pPr indent="0" marL="0">
+        </p:spPr>
+        <p:txBody>
+          <a:bodyPr wrap="square" lIns="0" tIns="0" rIns="0" bIns="0" rtlCol="0" anchor="ctr"/>
+          <a:lstStyle/>
+          <a:p>
+            <a:pPr marL="0" indent="0">
               <a:buNone/>
             </a:pPr>
             <a:r>
@@ -4958,9 +4797,9 @@
                 <a:solidFill>
                   <a:srgbClr val="22D3EE"/>
                 </a:solidFill>
-                <a:latin typeface="Segoe UI Semibold" pitchFamily="34" charset="0"/>
-                <a:ea typeface="Segoe UI Semibold" pitchFamily="34" charset="-122"/>
-                <a:cs typeface="Segoe UI Semibold" pitchFamily="34" charset="-120"/>
+                <a:latin typeface="Segoe UI Semibold" panose="020B0702040204020203" pitchFamily="34" charset="0"/>
+                <a:ea typeface="Segoe UI Semibold" panose="020B0702040204020203" pitchFamily="34" charset="-122"/>
+                <a:cs typeface="Segoe UI Semibold" panose="020B0702040204020203" pitchFamily="34" charset="-120"/>
               </a:rPr>
               <a:t>7</a:t>
             </a:r>
@@ -4983,13 +4822,12 @@
             <a:avLst/>
           </a:prstGeom>
           <a:noFill/>
-          <a:ln/>
         </p:spPr>
         <p:txBody>
           <a:bodyPr wrap="square" lIns="0" tIns="0" rIns="0" bIns="0" rtlCol="0" anchor="t"/>
           <a:lstStyle/>
           <a:p>
-            <a:pPr indent="0" marL="0">
+            <a:pPr marL="0" indent="0">
               <a:buNone/>
             </a:pPr>
             <a:r>
@@ -4997,9 +4835,9 @@
                 <a:solidFill>
                   <a:srgbClr val="8C9BB8"/>
                 </a:solidFill>
-                <a:latin typeface="Segoe UI" pitchFamily="34" charset="0"/>
-                <a:ea typeface="Segoe UI" pitchFamily="34" charset="-122"/>
-                <a:cs typeface="Segoe UI" pitchFamily="34" charset="-120"/>
+                <a:latin typeface="Segoe UI" panose="020B0502040204020203" pitchFamily="34" charset="0"/>
+                <a:ea typeface="Segoe UI" panose="020B0502040204020203" pitchFamily="34" charset="-122"/>
+                <a:cs typeface="Segoe UI" panose="020B0502040204020203" pitchFamily="34" charset="-120"/>
               </a:rPr>
               <a:t>alert rules</a:t>
             </a:r>
@@ -5045,13 +4883,12 @@
             <a:avLst/>
           </a:prstGeom>
           <a:noFill/>
-          <a:ln/>
-        </p:spPr>
-        <p:txBody>
-          <a:bodyPr wrap="square" lIns="0" tIns="0" rIns="0" bIns="0" rtlCol="0" anchor="ctr"/>
-          <a:lstStyle/>
-          <a:p>
-            <a:pPr indent="0" marL="0">
+        </p:spPr>
+        <p:txBody>
+          <a:bodyPr wrap="square" lIns="0" tIns="0" rIns="0" bIns="0" rtlCol="0" anchor="ctr"/>
+          <a:lstStyle/>
+          <a:p>
+            <a:pPr marL="0" indent="0">
               <a:buNone/>
             </a:pPr>
             <a:r>
@@ -5059,9 +4896,9 @@
                 <a:solidFill>
                   <a:srgbClr val="22D3EE"/>
                 </a:solidFill>
-                <a:latin typeface="Segoe UI Semibold" pitchFamily="34" charset="0"/>
-                <a:ea typeface="Segoe UI Semibold" pitchFamily="34" charset="-122"/>
-                <a:cs typeface="Segoe UI Semibold" pitchFamily="34" charset="-120"/>
+                <a:latin typeface="Segoe UI Semibold" panose="020B0702040204020203" pitchFamily="34" charset="0"/>
+                <a:ea typeface="Segoe UI Semibold" panose="020B0702040204020203" pitchFamily="34" charset="-122"/>
+                <a:cs typeface="Segoe UI Semibold" panose="020B0702040204020203" pitchFamily="34" charset="-120"/>
               </a:rPr>
               <a:t>10 s</a:t>
             </a:r>
@@ -5084,13 +4921,12 @@
             <a:avLst/>
           </a:prstGeom>
           <a:noFill/>
-          <a:ln/>
         </p:spPr>
         <p:txBody>
           <a:bodyPr wrap="square" lIns="0" tIns="0" rIns="0" bIns="0" rtlCol="0" anchor="t"/>
           <a:lstStyle/>
           <a:p>
-            <a:pPr indent="0" marL="0">
+            <a:pPr marL="0" indent="0">
               <a:buNone/>
             </a:pPr>
             <a:r>
@@ -5098,9 +4934,9 @@
                 <a:solidFill>
                   <a:srgbClr val="8C9BB8"/>
                 </a:solidFill>
-                <a:latin typeface="Segoe UI" pitchFamily="34" charset="0"/>
-                <a:ea typeface="Segoe UI" pitchFamily="34" charset="-122"/>
-                <a:cs typeface="Segoe UI" pitchFamily="34" charset="-120"/>
+                <a:latin typeface="Segoe UI" panose="020B0502040204020203" pitchFamily="34" charset="0"/>
+                <a:ea typeface="Segoe UI" panose="020B0502040204020203" pitchFamily="34" charset="-122"/>
+                <a:cs typeface="Segoe UI" panose="020B0502040204020203" pitchFamily="34" charset="-120"/>
               </a:rPr>
               <a:t>Redis cached dashboard</a:t>
             </a:r>
@@ -5150,13 +4986,12 @@
             <a:avLst/>
           </a:prstGeom>
           <a:noFill/>
-          <a:ln/>
-        </p:spPr>
-        <p:txBody>
-          <a:bodyPr wrap="square" lIns="0" tIns="0" rIns="0" bIns="0" rtlCol="0" anchor="ctr"/>
-          <a:lstStyle/>
-          <a:p>
-            <a:pPr indent="0" marL="0">
+        </p:spPr>
+        <p:txBody>
+          <a:bodyPr wrap="square" lIns="0" tIns="0" rIns="0" bIns="0" rtlCol="0" anchor="ctr"/>
+          <a:lstStyle/>
+          <a:p>
+            <a:pPr marL="0" indent="0">
               <a:buNone/>
             </a:pPr>
             <a:r>
@@ -5164,23 +4999,20 @@
                 <a:solidFill>
                   <a:srgbClr val="22D3EE"/>
                 </a:solidFill>
-                <a:latin typeface="Segoe UI" pitchFamily="34" charset="0"/>
-                <a:ea typeface="Segoe UI" pitchFamily="34" charset="-122"/>
-                <a:cs typeface="Segoe UI" pitchFamily="34" charset="-120"/>
+                <a:latin typeface="Segoe UI" panose="020B0502040204020203" pitchFamily="34" charset="0"/>
+                <a:ea typeface="Segoe UI" panose="020B0502040204020203" pitchFamily="34" charset="-122"/>
+                <a:cs typeface="Segoe UI" panose="020B0502040204020203" pitchFamily="34" charset="-120"/>
               </a:rPr>
               <a:t>LIVE  </a:t>
             </a:r>
-            <a:pPr indent="0" marL="0">
-              <a:buNone/>
-            </a:pPr>
             <a:r>
               <a:rPr lang="en-US" sz="1100" dirty="0">
                 <a:solidFill>
                   <a:srgbClr val="F1F5FB"/>
                 </a:solidFill>
-                <a:latin typeface="Segoe UI" pitchFamily="34" charset="0"/>
-                <a:ea typeface="Segoe UI" pitchFamily="34" charset="-122"/>
-                <a:cs typeface="Segoe UI" pitchFamily="34" charset="-120"/>
+                <a:latin typeface="Segoe UI" panose="020B0502040204020203" pitchFamily="34" charset="0"/>
+                <a:ea typeface="Segoe UI" panose="020B0502040204020203" pitchFamily="34" charset="-122"/>
+                <a:cs typeface="Segoe UI" panose="020B0502040204020203" pitchFamily="34" charset="-120"/>
               </a:rPr>
               <a:t>Live monitoring page</a:t>
             </a:r>
@@ -5198,12 +5030,13 @@
 
 <file path=ppt/slides/slide5.xml><?xml version="1.0" encoding="utf-8"?>
 <p:sld xmlns:a="http://schemas.openxmlformats.org/drawingml/2006/main" xmlns:r="http://schemas.openxmlformats.org/officeDocument/2006/relationships" xmlns:p="http://schemas.openxmlformats.org/presentationml/2006/main">
-  <p:cSld name="Slide 5">
+  <p:cSld>
     <p:bg>
       <p:bgPr>
         <a:solidFill>
           <a:srgbClr val="0A1020"/>
         </a:solidFill>
+        <a:effectLst/>
       </p:bgPr>
     </p:bg>
     <p:spTree>
@@ -5235,25 +5068,24 @@
             <a:avLst/>
           </a:prstGeom>
           <a:noFill/>
-          <a:ln/>
-        </p:spPr>
-        <p:txBody>
-          <a:bodyPr wrap="square" lIns="0" tIns="0" rIns="0" bIns="0" rtlCol="0" anchor="ctr"/>
-          <a:lstStyle/>
-          <a:p>
-            <a:pPr indent="0" marL="0">
-              <a:buNone/>
-            </a:pPr>
-            <a:r>
-              <a:rPr lang="en-US" sz="1100" spc="400" kern="0" dirty="0">
+        </p:spPr>
+        <p:txBody>
+          <a:bodyPr wrap="square" lIns="0" tIns="0" rIns="0" bIns="0" rtlCol="0" anchor="ctr"/>
+          <a:lstStyle/>
+          <a:p>
+            <a:pPr marL="0" indent="0">
+              <a:buNone/>
+            </a:pPr>
+            <a:r>
+              <a:rPr lang="en-US" sz="1100" kern="0" spc="400" dirty="0">
                 <a:solidFill>
                   <a:srgbClr val="22D3EE"/>
                 </a:solidFill>
-                <a:latin typeface="Segoe UI Semibold" pitchFamily="34" charset="0"/>
-                <a:ea typeface="Segoe UI Semibold" pitchFamily="34" charset="-122"/>
-                <a:cs typeface="Segoe UI Semibold" pitchFamily="34" charset="-120"/>
-              </a:rPr>
-              <a:t>05 · THURUNU · MAINTENANCE SERVICE</a:t>
+                <a:latin typeface="Segoe UI Semibold" panose="020B0702040204020203" pitchFamily="34" charset="0"/>
+                <a:ea typeface="Segoe UI Semibold" panose="020B0702040204020203" pitchFamily="34" charset="-122"/>
+                <a:cs typeface="Segoe UI Semibold" panose="020B0702040204020203" pitchFamily="34" charset="-120"/>
+              </a:rPr>
+              <a:t>05 · MAINTENANCE SERVICE</a:t>
             </a:r>
             <a:endParaRPr lang="en-US" sz="1100" dirty="0"/>
           </a:p>
@@ -5274,13 +5106,12 @@
             <a:avLst/>
           </a:prstGeom>
           <a:noFill/>
-          <a:ln/>
-        </p:spPr>
-        <p:txBody>
-          <a:bodyPr wrap="square" lIns="0" tIns="0" rIns="0" bIns="0" rtlCol="0" anchor="ctr"/>
-          <a:lstStyle/>
-          <a:p>
-            <a:pPr indent="0" marL="0">
+        </p:spPr>
+        <p:txBody>
+          <a:bodyPr wrap="square" lIns="0" tIns="0" rIns="0" bIns="0" rtlCol="0" anchor="ctr"/>
+          <a:lstStyle/>
+          <a:p>
+            <a:pPr marL="0" indent="0">
               <a:buNone/>
             </a:pPr>
             <a:r>
@@ -5288,9 +5119,9 @@
                 <a:solidFill>
                   <a:srgbClr val="F1F5FB"/>
                 </a:solidFill>
-                <a:latin typeface="Segoe UI Semibold" pitchFamily="34" charset="0"/>
-                <a:ea typeface="Segoe UI Semibold" pitchFamily="34" charset="-122"/>
-                <a:cs typeface="Segoe UI Semibold" pitchFamily="34" charset="-120"/>
+                <a:latin typeface="Segoe UI Semibold" panose="020B0702040204020203" pitchFamily="34" charset="0"/>
+                <a:ea typeface="Segoe UI Semibold" panose="020B0702040204020203" pitchFamily="34" charset="-122"/>
+                <a:cs typeface="Segoe UI Semibold" panose="020B0702040204020203" pitchFamily="34" charset="-120"/>
               </a:rPr>
               <a:t>Faults become tracked work automatically</a:t>
             </a:r>
@@ -5313,13 +5144,12 @@
             <a:avLst/>
           </a:prstGeom>
           <a:noFill/>
-          <a:ln/>
-        </p:spPr>
-        <p:txBody>
-          <a:bodyPr wrap="square" lIns="0" tIns="0" rIns="0" bIns="0" rtlCol="0" anchor="ctr"/>
-          <a:lstStyle/>
-          <a:p>
-            <a:pPr indent="0" marL="0">
+        </p:spPr>
+        <p:txBody>
+          <a:bodyPr wrap="square" lIns="0" tIns="0" rIns="0" bIns="0" rtlCol="0" anchor="ctr"/>
+          <a:lstStyle/>
+          <a:p>
+            <a:pPr marL="0" indent="0">
               <a:buNone/>
             </a:pPr>
             <a:r>
@@ -5327,9 +5157,9 @@
                 <a:solidFill>
                   <a:srgbClr val="8C9BB8"/>
                 </a:solidFill>
-                <a:latin typeface="Segoe UI" pitchFamily="34" charset="0"/>
-                <a:ea typeface="Segoe UI" pitchFamily="34" charset="-122"/>
-                <a:cs typeface="Segoe UI" pitchFamily="34" charset="-120"/>
+                <a:latin typeface="Segoe UI" panose="020B0502040204020203" pitchFamily="34" charset="0"/>
+                <a:ea typeface="Segoe UI" panose="020B0502040204020203" pitchFamily="34" charset="-122"/>
+                <a:cs typeface="Segoe UI" panose="020B0502040204020203" pitchFamily="34" charset="-120"/>
               </a:rPr>
               <a:t>EC8208 Software Architecture  ·  University of Ruhuna</a:t>
             </a:r>
@@ -5352,13 +5182,12 @@
             <a:avLst/>
           </a:prstGeom>
           <a:noFill/>
-          <a:ln/>
-        </p:spPr>
-        <p:txBody>
-          <a:bodyPr wrap="square" lIns="0" tIns="0" rIns="0" bIns="0" rtlCol="0" anchor="ctr"/>
-          <a:lstStyle/>
-          <a:p>
-            <a:pPr algn="r" indent="0" marL="0">
+        </p:spPr>
+        <p:txBody>
+          <a:bodyPr wrap="square" lIns="0" tIns="0" rIns="0" bIns="0" rtlCol="0" anchor="ctr"/>
+          <a:lstStyle/>
+          <a:p>
+            <a:pPr marL="0" indent="0" algn="r">
               <a:buNone/>
             </a:pPr>
             <a:r>
@@ -5366,9 +5195,9 @@
                 <a:solidFill>
                   <a:srgbClr val="8C9BB8"/>
                 </a:solidFill>
-                <a:latin typeface="Segoe UI" pitchFamily="34" charset="0"/>
-                <a:ea typeface="Segoe UI" pitchFamily="34" charset="-122"/>
-                <a:cs typeface="Segoe UI" pitchFamily="34" charset="-120"/>
+                <a:latin typeface="Segoe UI" panose="020B0502040204020203" pitchFamily="34" charset="0"/>
+                <a:ea typeface="Segoe UI" panose="020B0502040204020203" pitchFamily="34" charset="-122"/>
+                <a:cs typeface="Segoe UI" panose="020B0502040204020203" pitchFamily="34" charset="-120"/>
               </a:rPr>
               <a:t>05  ·  1:49–2:38</a:t>
             </a:r>
@@ -5418,13 +5247,12 @@
             <a:avLst/>
           </a:prstGeom>
           <a:noFill/>
-          <a:ln/>
-        </p:spPr>
-        <p:txBody>
-          <a:bodyPr wrap="square" lIns="0" tIns="0" rIns="0" bIns="0" rtlCol="0" anchor="ctr"/>
-          <a:lstStyle/>
-          <a:p>
-            <a:pPr algn="ctr" indent="0" marL="0">
+        </p:spPr>
+        <p:txBody>
+          <a:bodyPr wrap="square" lIns="0" tIns="0" rIns="0" bIns="0" rtlCol="0" anchor="ctr"/>
+          <a:lstStyle/>
+          <a:p>
+            <a:pPr marL="0" indent="0" algn="ctr">
               <a:buNone/>
             </a:pPr>
             <a:r>
@@ -5432,9 +5260,9 @@
                 <a:solidFill>
                   <a:srgbClr val="0A1020"/>
                 </a:solidFill>
-                <a:latin typeface="Segoe UI Semibold" pitchFamily="34" charset="0"/>
-                <a:ea typeface="Segoe UI Semibold" pitchFamily="34" charset="-122"/>
-                <a:cs typeface="Segoe UI Semibold" pitchFamily="34" charset="-120"/>
+                <a:latin typeface="Segoe UI Semibold" panose="020B0702040204020203" pitchFamily="34" charset="0"/>
+                <a:ea typeface="Segoe UI Semibold" panose="020B0702040204020203" pitchFamily="34" charset="-122"/>
+                <a:cs typeface="Segoe UI Semibold" panose="020B0702040204020203" pitchFamily="34" charset="-120"/>
               </a:rPr>
               <a:t>Alert event</a:t>
             </a:r>
@@ -5457,13 +5285,12 @@
             <a:avLst/>
           </a:prstGeom>
           <a:noFill/>
-          <a:ln/>
-        </p:spPr>
-        <p:txBody>
-          <a:bodyPr wrap="square" lIns="0" tIns="0" rIns="0" bIns="0" rtlCol="0" anchor="ctr"/>
-          <a:lstStyle/>
-          <a:p>
-            <a:pPr algn="ctr" indent="0" marL="0">
+        </p:spPr>
+        <p:txBody>
+          <a:bodyPr wrap="square" lIns="0" tIns="0" rIns="0" bIns="0" rtlCol="0" anchor="ctr"/>
+          <a:lstStyle/>
+          <a:p>
+            <a:pPr marL="0" indent="0" algn="ctr">
               <a:buNone/>
             </a:pPr>
             <a:r>
@@ -5471,9 +5298,9 @@
                 <a:solidFill>
                   <a:srgbClr val="0A1020"/>
                 </a:solidFill>
-                <a:latin typeface="Segoe UI" pitchFamily="34" charset="0"/>
-                <a:ea typeface="Segoe UI" pitchFamily="34" charset="-122"/>
-                <a:cs typeface="Segoe UI" pitchFamily="34" charset="-120"/>
+                <a:latin typeface="Segoe UI" panose="020B0502040204020203" pitchFamily="34" charset="0"/>
+                <a:ea typeface="Segoe UI" panose="020B0502040204020203" pitchFamily="34" charset="-122"/>
+                <a:cs typeface="Segoe UI" panose="020B0502040204020203" pitchFamily="34" charset="-120"/>
               </a:rPr>
               <a:t>high or critical</a:t>
             </a:r>
@@ -5496,13 +5323,12 @@
             <a:avLst/>
           </a:prstGeom>
           <a:noFill/>
-          <a:ln/>
-        </p:spPr>
-        <p:txBody>
-          <a:bodyPr wrap="square" lIns="0" tIns="0" rIns="0" bIns="0" rtlCol="0" anchor="ctr"/>
-          <a:lstStyle/>
-          <a:p>
-            <a:pPr algn="ctr" indent="0" marL="0">
+        </p:spPr>
+        <p:txBody>
+          <a:bodyPr wrap="square" lIns="0" tIns="0" rIns="0" bIns="0" rtlCol="0" anchor="ctr"/>
+          <a:lstStyle/>
+          <a:p>
+            <a:pPr marL="0" indent="0" algn="ctr">
               <a:buNone/>
             </a:pPr>
             <a:r>
@@ -5510,9 +5336,9 @@
                 <a:solidFill>
                   <a:srgbClr val="22D3EE"/>
                 </a:solidFill>
-                <a:latin typeface="Segoe UI Semibold" pitchFamily="34" charset="0"/>
-                <a:ea typeface="Segoe UI Semibold" pitchFamily="34" charset="-122"/>
-                <a:cs typeface="Segoe UI Semibold" pitchFamily="34" charset="-120"/>
+                <a:latin typeface="Segoe UI Semibold" panose="020B0702040204020203" pitchFamily="34" charset="0"/>
+                <a:ea typeface="Segoe UI Semibold" panose="020B0702040204020203" pitchFamily="34" charset="-122"/>
+                <a:cs typeface="Segoe UI Semibold" panose="020B0702040204020203" pitchFamily="34" charset="-120"/>
               </a:rPr>
               <a:t>›</a:t>
             </a:r>
@@ -5562,13 +5388,12 @@
             <a:avLst/>
           </a:prstGeom>
           <a:noFill/>
-          <a:ln/>
-        </p:spPr>
-        <p:txBody>
-          <a:bodyPr wrap="square" lIns="0" tIns="0" rIns="0" bIns="0" rtlCol="0" anchor="ctr"/>
-          <a:lstStyle/>
-          <a:p>
-            <a:pPr algn="ctr" indent="0" marL="0">
+        </p:spPr>
+        <p:txBody>
+          <a:bodyPr wrap="square" lIns="0" tIns="0" rIns="0" bIns="0" rtlCol="0" anchor="ctr"/>
+          <a:lstStyle/>
+          <a:p>
+            <a:pPr marL="0" indent="0" algn="ctr">
               <a:buNone/>
             </a:pPr>
             <a:r>
@@ -5576,9 +5401,9 @@
                 <a:solidFill>
                   <a:srgbClr val="F1F5FB"/>
                 </a:solidFill>
-                <a:latin typeface="Segoe UI Semibold" pitchFamily="34" charset="0"/>
-                <a:ea typeface="Segoe UI Semibold" pitchFamily="34" charset="-122"/>
-                <a:cs typeface="Segoe UI Semibold" pitchFamily="34" charset="-120"/>
+                <a:latin typeface="Segoe UI Semibold" panose="020B0702040204020203" pitchFamily="34" charset="0"/>
+                <a:ea typeface="Segoe UI Semibold" panose="020B0702040204020203" pitchFamily="34" charset="-122"/>
+                <a:cs typeface="Segoe UI Semibold" panose="020B0702040204020203" pitchFamily="34" charset="-120"/>
               </a:rPr>
               <a:t>Work order</a:t>
             </a:r>
@@ -5601,13 +5426,12 @@
             <a:avLst/>
           </a:prstGeom>
           <a:noFill/>
-          <a:ln/>
-        </p:spPr>
-        <p:txBody>
-          <a:bodyPr wrap="square" lIns="0" tIns="0" rIns="0" bIns="0" rtlCol="0" anchor="ctr"/>
-          <a:lstStyle/>
-          <a:p>
-            <a:pPr algn="ctr" indent="0" marL="0">
+        </p:spPr>
+        <p:txBody>
+          <a:bodyPr wrap="square" lIns="0" tIns="0" rIns="0" bIns="0" rtlCol="0" anchor="ctr"/>
+          <a:lstStyle/>
+          <a:p>
+            <a:pPr marL="0" indent="0" algn="ctr">
               <a:buNone/>
             </a:pPr>
             <a:r>
@@ -5615,9 +5439,9 @@
                 <a:solidFill>
                   <a:srgbClr val="8C9BB8"/>
                 </a:solidFill>
-                <a:latin typeface="Segoe UI" pitchFamily="34" charset="0"/>
-                <a:ea typeface="Segoe UI" pitchFamily="34" charset="-122"/>
-                <a:cs typeface="Segoe UI" pitchFamily="34" charset="-120"/>
+                <a:latin typeface="Segoe UI" panose="020B0502040204020203" pitchFamily="34" charset="0"/>
+                <a:ea typeface="Segoe UI" panose="020B0502040204020203" pitchFamily="34" charset="-122"/>
+                <a:cs typeface="Segoe UI" panose="020B0502040204020203" pitchFamily="34" charset="-120"/>
               </a:rPr>
               <a:t>created</a:t>
             </a:r>
@@ -5640,13 +5464,12 @@
             <a:avLst/>
           </a:prstGeom>
           <a:noFill/>
-          <a:ln/>
-        </p:spPr>
-        <p:txBody>
-          <a:bodyPr wrap="square" lIns="0" tIns="0" rIns="0" bIns="0" rtlCol="0" anchor="ctr"/>
-          <a:lstStyle/>
-          <a:p>
-            <a:pPr algn="ctr" indent="0" marL="0">
+        </p:spPr>
+        <p:txBody>
+          <a:bodyPr wrap="square" lIns="0" tIns="0" rIns="0" bIns="0" rtlCol="0" anchor="ctr"/>
+          <a:lstStyle/>
+          <a:p>
+            <a:pPr marL="0" indent="0" algn="ctr">
               <a:buNone/>
             </a:pPr>
             <a:r>
@@ -5654,9 +5477,9 @@
                 <a:solidFill>
                   <a:srgbClr val="22D3EE"/>
                 </a:solidFill>
-                <a:latin typeface="Segoe UI Semibold" pitchFamily="34" charset="0"/>
-                <a:ea typeface="Segoe UI Semibold" pitchFamily="34" charset="-122"/>
-                <a:cs typeface="Segoe UI Semibold" pitchFamily="34" charset="-120"/>
+                <a:latin typeface="Segoe UI Semibold" panose="020B0702040204020203" pitchFamily="34" charset="0"/>
+                <a:ea typeface="Segoe UI Semibold" panose="020B0702040204020203" pitchFamily="34" charset="-122"/>
+                <a:cs typeface="Segoe UI Semibold" panose="020B0702040204020203" pitchFamily="34" charset="-120"/>
               </a:rPr>
               <a:t>›</a:t>
             </a:r>
@@ -5706,13 +5529,12 @@
             <a:avLst/>
           </a:prstGeom>
           <a:noFill/>
-          <a:ln/>
-        </p:spPr>
-        <p:txBody>
-          <a:bodyPr wrap="square" lIns="0" tIns="0" rIns="0" bIns="0" rtlCol="0" anchor="ctr"/>
-          <a:lstStyle/>
-          <a:p>
-            <a:pPr algn="ctr" indent="0" marL="0">
+        </p:spPr>
+        <p:txBody>
+          <a:bodyPr wrap="square" lIns="0" tIns="0" rIns="0" bIns="0" rtlCol="0" anchor="ctr"/>
+          <a:lstStyle/>
+          <a:p>
+            <a:pPr marL="0" indent="0" algn="ctr">
               <a:buNone/>
             </a:pPr>
             <a:r>
@@ -5720,9 +5542,9 @@
                 <a:solidFill>
                   <a:srgbClr val="F1F5FB"/>
                 </a:solidFill>
-                <a:latin typeface="Segoe UI Semibold" pitchFamily="34" charset="0"/>
-                <a:ea typeface="Segoe UI Semibold" pitchFamily="34" charset="-122"/>
-                <a:cs typeface="Segoe UI Semibold" pitchFamily="34" charset="-120"/>
+                <a:latin typeface="Segoe UI Semibold" panose="020B0702040204020203" pitchFamily="34" charset="0"/>
+                <a:ea typeface="Segoe UI Semibold" panose="020B0702040204020203" pitchFamily="34" charset="-122"/>
+                <a:cs typeface="Segoe UI Semibold" panose="020B0702040204020203" pitchFamily="34" charset="-120"/>
               </a:rPr>
               <a:t>Technician</a:t>
             </a:r>
@@ -5745,13 +5567,12 @@
             <a:avLst/>
           </a:prstGeom>
           <a:noFill/>
-          <a:ln/>
-        </p:spPr>
-        <p:txBody>
-          <a:bodyPr wrap="square" lIns="0" tIns="0" rIns="0" bIns="0" rtlCol="0" anchor="ctr"/>
-          <a:lstStyle/>
-          <a:p>
-            <a:pPr algn="ctr" indent="0" marL="0">
+        </p:spPr>
+        <p:txBody>
+          <a:bodyPr wrap="square" lIns="0" tIns="0" rIns="0" bIns="0" rtlCol="0" anchor="ctr"/>
+          <a:lstStyle/>
+          <a:p>
+            <a:pPr marL="0" indent="0" algn="ctr">
               <a:buNone/>
             </a:pPr>
             <a:r>
@@ -5759,9 +5580,9 @@
                 <a:solidFill>
                   <a:srgbClr val="8C9BB8"/>
                 </a:solidFill>
-                <a:latin typeface="Segoe UI" pitchFamily="34" charset="0"/>
-                <a:ea typeface="Segoe UI" pitchFamily="34" charset="-122"/>
-                <a:cs typeface="Segoe UI" pitchFamily="34" charset="-120"/>
+                <a:latin typeface="Segoe UI" panose="020B0502040204020203" pitchFamily="34" charset="0"/>
+                <a:ea typeface="Segoe UI" panose="020B0502040204020203" pitchFamily="34" charset="-122"/>
+                <a:cs typeface="Segoe UI" panose="020B0502040204020203" pitchFamily="34" charset="-120"/>
               </a:rPr>
               <a:t>assigned</a:t>
             </a:r>
@@ -5784,13 +5605,12 @@
             <a:avLst/>
           </a:prstGeom>
           <a:noFill/>
-          <a:ln/>
-        </p:spPr>
-        <p:txBody>
-          <a:bodyPr wrap="square" lIns="0" tIns="0" rIns="0" bIns="0" rtlCol="0" anchor="ctr"/>
-          <a:lstStyle/>
-          <a:p>
-            <a:pPr algn="ctr" indent="0" marL="0">
+        </p:spPr>
+        <p:txBody>
+          <a:bodyPr wrap="square" lIns="0" tIns="0" rIns="0" bIns="0" rtlCol="0" anchor="ctr"/>
+          <a:lstStyle/>
+          <a:p>
+            <a:pPr marL="0" indent="0" algn="ctr">
               <a:buNone/>
             </a:pPr>
             <a:r>
@@ -5798,9 +5618,9 @@
                 <a:solidFill>
                   <a:srgbClr val="22D3EE"/>
                 </a:solidFill>
-                <a:latin typeface="Segoe UI Semibold" pitchFamily="34" charset="0"/>
-                <a:ea typeface="Segoe UI Semibold" pitchFamily="34" charset="-122"/>
-                <a:cs typeface="Segoe UI Semibold" pitchFamily="34" charset="-120"/>
+                <a:latin typeface="Segoe UI Semibold" panose="020B0702040204020203" pitchFamily="34" charset="0"/>
+                <a:ea typeface="Segoe UI Semibold" panose="020B0702040204020203" pitchFamily="34" charset="-122"/>
+                <a:cs typeface="Segoe UI Semibold" panose="020B0702040204020203" pitchFamily="34" charset="-120"/>
               </a:rPr>
               <a:t>›</a:t>
             </a:r>
@@ -5850,13 +5670,12 @@
             <a:avLst/>
           </a:prstGeom>
           <a:noFill/>
-          <a:ln/>
-        </p:spPr>
-        <p:txBody>
-          <a:bodyPr wrap="square" lIns="0" tIns="0" rIns="0" bIns="0" rtlCol="0" anchor="ctr"/>
-          <a:lstStyle/>
-          <a:p>
-            <a:pPr algn="ctr" indent="0" marL="0">
+        </p:spPr>
+        <p:txBody>
+          <a:bodyPr wrap="square" lIns="0" tIns="0" rIns="0" bIns="0" rtlCol="0" anchor="ctr"/>
+          <a:lstStyle/>
+          <a:p>
+            <a:pPr marL="0" indent="0" algn="ctr">
               <a:buNone/>
             </a:pPr>
             <a:r>
@@ -5864,9 +5683,9 @@
                 <a:solidFill>
                   <a:srgbClr val="F1F5FB"/>
                 </a:solidFill>
-                <a:latin typeface="Segoe UI Semibold" pitchFamily="34" charset="0"/>
-                <a:ea typeface="Segoe UI Semibold" pitchFamily="34" charset="-122"/>
-                <a:cs typeface="Segoe UI Semibold" pitchFamily="34" charset="-120"/>
+                <a:latin typeface="Segoe UI Semibold" panose="020B0702040204020203" pitchFamily="34" charset="0"/>
+                <a:ea typeface="Segoe UI Semibold" panose="020B0702040204020203" pitchFamily="34" charset="-122"/>
+                <a:cs typeface="Segoe UI Semibold" panose="020B0702040204020203" pitchFamily="34" charset="-120"/>
               </a:rPr>
               <a:t>Completed</a:t>
             </a:r>
@@ -5889,13 +5708,12 @@
             <a:avLst/>
           </a:prstGeom>
           <a:noFill/>
-          <a:ln/>
-        </p:spPr>
-        <p:txBody>
-          <a:bodyPr wrap="square" lIns="0" tIns="0" rIns="0" bIns="0" rtlCol="0" anchor="ctr"/>
-          <a:lstStyle/>
-          <a:p>
-            <a:pPr algn="ctr" indent="0" marL="0">
+        </p:spPr>
+        <p:txBody>
+          <a:bodyPr wrap="square" lIns="0" tIns="0" rIns="0" bIns="0" rtlCol="0" anchor="ctr"/>
+          <a:lstStyle/>
+          <a:p>
+            <a:pPr marL="0" indent="0" algn="ctr">
               <a:buNone/>
             </a:pPr>
             <a:r>
@@ -5903,9 +5721,9 @@
                 <a:solidFill>
                   <a:srgbClr val="8C9BB8"/>
                 </a:solidFill>
-                <a:latin typeface="Segoe UI" pitchFamily="34" charset="0"/>
-                <a:ea typeface="Segoe UI" pitchFamily="34" charset="-122"/>
-                <a:cs typeface="Segoe UI" pitchFamily="34" charset="-120"/>
+                <a:latin typeface="Segoe UI" panose="020B0502040204020203" pitchFamily="34" charset="0"/>
+                <a:ea typeface="Segoe UI" panose="020B0502040204020203" pitchFamily="34" charset="-122"/>
+                <a:cs typeface="Segoe UI" panose="020B0502040204020203" pitchFamily="34" charset="-120"/>
               </a:rPr>
               <a:t>in history</a:t>
             </a:r>
@@ -5951,13 +5769,12 @@
             <a:avLst/>
           </a:prstGeom>
           <a:noFill/>
-          <a:ln/>
-        </p:spPr>
-        <p:txBody>
-          <a:bodyPr wrap="square" lIns="0" tIns="0" rIns="0" bIns="0" rtlCol="0" anchor="ctr"/>
-          <a:lstStyle/>
-          <a:p>
-            <a:pPr indent="0" marL="0">
+        </p:spPr>
+        <p:txBody>
+          <a:bodyPr wrap="square" lIns="0" tIns="0" rIns="0" bIns="0" rtlCol="0" anchor="ctr"/>
+          <a:lstStyle/>
+          <a:p>
+            <a:pPr marL="0" indent="0">
               <a:buNone/>
             </a:pPr>
             <a:r>
@@ -5965,9 +5782,9 @@
                 <a:solidFill>
                   <a:srgbClr val="22D3EE"/>
                 </a:solidFill>
-                <a:latin typeface="Segoe UI Semibold" pitchFamily="34" charset="0"/>
-                <a:ea typeface="Segoe UI Semibold" pitchFamily="34" charset="-122"/>
-                <a:cs typeface="Segoe UI Semibold" pitchFamily="34" charset="-120"/>
+                <a:latin typeface="Segoe UI Semibold" panose="020B0702040204020203" pitchFamily="34" charset="0"/>
+                <a:ea typeface="Segoe UI Semibold" panose="020B0702040204020203" pitchFamily="34" charset="-122"/>
+                <a:cs typeface="Segoe UI Semibold" panose="020B0702040204020203" pitchFamily="34" charset="-120"/>
               </a:rPr>
               <a:t>0 clicks</a:t>
             </a:r>
@@ -5990,13 +5807,12 @@
             <a:avLst/>
           </a:prstGeom>
           <a:noFill/>
-          <a:ln/>
         </p:spPr>
         <p:txBody>
           <a:bodyPr wrap="square" lIns="0" tIns="0" rIns="0" bIns="0" rtlCol="0" anchor="t"/>
           <a:lstStyle/>
           <a:p>
-            <a:pPr indent="0" marL="0">
+            <a:pPr marL="0" indent="0">
               <a:buNone/>
             </a:pPr>
             <a:r>
@@ -6004,9 +5820,9 @@
                 <a:solidFill>
                   <a:srgbClr val="8C9BB8"/>
                 </a:solidFill>
-                <a:latin typeface="Segoe UI" pitchFamily="34" charset="0"/>
-                <a:ea typeface="Segoe UI" pitchFamily="34" charset="-122"/>
-                <a:cs typeface="Segoe UI" pitchFamily="34" charset="-120"/>
+                <a:latin typeface="Segoe UI" panose="020B0502040204020203" pitchFamily="34" charset="0"/>
+                <a:ea typeface="Segoe UI" panose="020B0502040204020203" pitchFamily="34" charset="-122"/>
+                <a:cs typeface="Segoe UI" panose="020B0502040204020203" pitchFamily="34" charset="-120"/>
               </a:rPr>
               <a:t>to open a corrective order</a:t>
             </a:r>
@@ -6052,13 +5868,12 @@
             <a:avLst/>
           </a:prstGeom>
           <a:noFill/>
-          <a:ln/>
-        </p:spPr>
-        <p:txBody>
-          <a:bodyPr wrap="square" lIns="0" tIns="0" rIns="0" bIns="0" rtlCol="0" anchor="ctr"/>
-          <a:lstStyle/>
-          <a:p>
-            <a:pPr indent="0" marL="0">
+        </p:spPr>
+        <p:txBody>
+          <a:bodyPr wrap="square" lIns="0" tIns="0" rIns="0" bIns="0" rtlCol="0" anchor="ctr"/>
+          <a:lstStyle/>
+          <a:p>
+            <a:pPr marL="0" indent="0">
               <a:buNone/>
             </a:pPr>
             <a:r>
@@ -6066,9 +5881,9 @@
                 <a:solidFill>
                   <a:srgbClr val="22D3EE"/>
                 </a:solidFill>
-                <a:latin typeface="Segoe UI Semibold" pitchFamily="34" charset="0"/>
-                <a:ea typeface="Segoe UI Semibold" pitchFamily="34" charset="-122"/>
-                <a:cs typeface="Segoe UI Semibold" pitchFamily="34" charset="-120"/>
+                <a:latin typeface="Segoe UI Semibold" panose="020B0702040204020203" pitchFamily="34" charset="0"/>
+                <a:ea typeface="Segoe UI Semibold" panose="020B0702040204020203" pitchFamily="34" charset="-122"/>
+                <a:cs typeface="Segoe UI Semibold" panose="020B0702040204020203" pitchFamily="34" charset="-120"/>
               </a:rPr>
               <a:t>4</a:t>
             </a:r>
@@ -6091,13 +5906,12 @@
             <a:avLst/>
           </a:prstGeom>
           <a:noFill/>
-          <a:ln/>
         </p:spPr>
         <p:txBody>
           <a:bodyPr wrap="square" lIns="0" tIns="0" rIns="0" bIns="0" rtlCol="0" anchor="t"/>
           <a:lstStyle/>
           <a:p>
-            <a:pPr indent="0" marL="0">
+            <a:pPr marL="0" indent="0">
               <a:buNone/>
             </a:pPr>
             <a:r>
@@ -6105,9 +5919,9 @@
                 <a:solidFill>
                   <a:srgbClr val="8C9BB8"/>
                 </a:solidFill>
-                <a:latin typeface="Segoe UI" pitchFamily="34" charset="0"/>
-                <a:ea typeface="Segoe UI" pitchFamily="34" charset="-122"/>
-                <a:cs typeface="Segoe UI" pitchFamily="34" charset="-120"/>
+                <a:latin typeface="Segoe UI" panose="020B0502040204020203" pitchFamily="34" charset="0"/>
+                <a:ea typeface="Segoe UI" panose="020B0502040204020203" pitchFamily="34" charset="-122"/>
+                <a:cs typeface="Segoe UI" panose="020B0502040204020203" pitchFamily="34" charset="-120"/>
               </a:rPr>
               <a:t>technicians</a:t>
             </a:r>
@@ -6153,13 +5967,12 @@
             <a:avLst/>
           </a:prstGeom>
           <a:noFill/>
-          <a:ln/>
-        </p:spPr>
-        <p:txBody>
-          <a:bodyPr wrap="square" lIns="0" tIns="0" rIns="0" bIns="0" rtlCol="0" anchor="ctr"/>
-          <a:lstStyle/>
-          <a:p>
-            <a:pPr indent="0" marL="0">
+        </p:spPr>
+        <p:txBody>
+          <a:bodyPr wrap="square" lIns="0" tIns="0" rIns="0" bIns="0" rtlCol="0" anchor="ctr"/>
+          <a:lstStyle/>
+          <a:p>
+            <a:pPr marL="0" indent="0">
               <a:buNone/>
             </a:pPr>
             <a:r>
@@ -6167,9 +5980,9 @@
                 <a:solidFill>
                   <a:srgbClr val="22D3EE"/>
                 </a:solidFill>
-                <a:latin typeface="Segoe UI Semibold" pitchFamily="34" charset="0"/>
-                <a:ea typeface="Segoe UI Semibold" pitchFamily="34" charset="-122"/>
-                <a:cs typeface="Segoe UI Semibold" pitchFamily="34" charset="-120"/>
+                <a:latin typeface="Segoe UI Semibold" panose="020B0702040204020203" pitchFamily="34" charset="0"/>
+                <a:ea typeface="Segoe UI Semibold" panose="020B0702040204020203" pitchFamily="34" charset="-122"/>
+                <a:cs typeface="Segoe UI Semibold" panose="020B0702040204020203" pitchFamily="34" charset="-120"/>
               </a:rPr>
               <a:t>1</a:t>
             </a:r>
@@ -6192,13 +6005,12 @@
             <a:avLst/>
           </a:prstGeom>
           <a:noFill/>
-          <a:ln/>
         </p:spPr>
         <p:txBody>
           <a:bodyPr wrap="square" lIns="0" tIns="0" rIns="0" bIns="0" rtlCol="0" anchor="t"/>
           <a:lstStyle/>
           <a:p>
-            <a:pPr indent="0" marL="0">
+            <a:pPr marL="0" indent="0">
               <a:buNone/>
             </a:pPr>
             <a:r>
@@ -6206,9 +6018,9 @@
                 <a:solidFill>
                   <a:srgbClr val="8C9BB8"/>
                 </a:solidFill>
-                <a:latin typeface="Segoe UI" pitchFamily="34" charset="0"/>
-                <a:ea typeface="Segoe UI" pitchFamily="34" charset="-122"/>
-                <a:cs typeface="Segoe UI" pitchFamily="34" charset="-120"/>
+                <a:latin typeface="Segoe UI" panose="020B0502040204020203" pitchFamily="34" charset="0"/>
+                <a:ea typeface="Segoe UI" panose="020B0502040204020203" pitchFamily="34" charset="-122"/>
+                <a:cs typeface="Segoe UI" panose="020B0502040204020203" pitchFamily="34" charset="-120"/>
               </a:rPr>
               <a:t>active order per asset</a:t>
             </a:r>
@@ -6258,13 +6070,12 @@
             <a:avLst/>
           </a:prstGeom>
           <a:noFill/>
-          <a:ln/>
-        </p:spPr>
-        <p:txBody>
-          <a:bodyPr wrap="square" lIns="0" tIns="0" rIns="0" bIns="0" rtlCol="0" anchor="ctr"/>
-          <a:lstStyle/>
-          <a:p>
-            <a:pPr indent="0" marL="0">
+        </p:spPr>
+        <p:txBody>
+          <a:bodyPr wrap="square" lIns="0" tIns="0" rIns="0" bIns="0" rtlCol="0" anchor="ctr"/>
+          <a:lstStyle/>
+          <a:p>
+            <a:pPr marL="0" indent="0">
               <a:buNone/>
             </a:pPr>
             <a:r>
@@ -6272,23 +6083,20 @@
                 <a:solidFill>
                   <a:srgbClr val="22D3EE"/>
                 </a:solidFill>
-                <a:latin typeface="Segoe UI" pitchFamily="34" charset="0"/>
-                <a:ea typeface="Segoe UI" pitchFamily="34" charset="-122"/>
-                <a:cs typeface="Segoe UI" pitchFamily="34" charset="-120"/>
+                <a:latin typeface="Segoe UI" panose="020B0502040204020203" pitchFamily="34" charset="0"/>
+                <a:ea typeface="Segoe UI" panose="020B0502040204020203" pitchFamily="34" charset="-122"/>
+                <a:cs typeface="Segoe UI" panose="020B0502040204020203" pitchFamily="34" charset="-120"/>
               </a:rPr>
               <a:t>LIVE  </a:t>
             </a:r>
-            <a:pPr indent="0" marL="0">
-              <a:buNone/>
-            </a:pPr>
             <a:r>
               <a:rPr lang="en-US" sz="1100" dirty="0">
                 <a:solidFill>
                   <a:srgbClr val="F1F5FB"/>
                 </a:solidFill>
-                <a:latin typeface="Segoe UI" pitchFamily="34" charset="0"/>
-                <a:ea typeface="Segoe UI" pitchFamily="34" charset="-122"/>
-                <a:cs typeface="Segoe UI" pitchFamily="34" charset="-120"/>
+                <a:latin typeface="Segoe UI" panose="020B0502040204020203" pitchFamily="34" charset="0"/>
+                <a:ea typeface="Segoe UI" panose="020B0502040204020203" pitchFamily="34" charset="-122"/>
+                <a:cs typeface="Segoe UI" panose="020B0502040204020203" pitchFamily="34" charset="-120"/>
               </a:rPr>
               <a:t>Maintenance board</a:t>
             </a:r>
@@ -6306,12 +6114,13 @@
 
 <file path=ppt/slides/slide6.xml><?xml version="1.0" encoding="utf-8"?>
 <p:sld xmlns:a="http://schemas.openxmlformats.org/drawingml/2006/main" xmlns:r="http://schemas.openxmlformats.org/officeDocument/2006/relationships" xmlns:p="http://schemas.openxmlformats.org/presentationml/2006/main">
-  <p:cSld name="Slide 6">
+  <p:cSld>
     <p:bg>
       <p:bgPr>
         <a:solidFill>
           <a:srgbClr val="0A1020"/>
         </a:solidFill>
+        <a:effectLst/>
       </p:bgPr>
     </p:bg>
     <p:spTree>
@@ -6343,25 +6152,24 @@
             <a:avLst/>
           </a:prstGeom>
           <a:noFill/>
-          <a:ln/>
-        </p:spPr>
-        <p:txBody>
-          <a:bodyPr wrap="square" lIns="0" tIns="0" rIns="0" bIns="0" rtlCol="0" anchor="ctr"/>
-          <a:lstStyle/>
-          <a:p>
-            <a:pPr indent="0" marL="0">
-              <a:buNone/>
-            </a:pPr>
-            <a:r>
-              <a:rPr lang="en-US" sz="1100" spc="400" kern="0" dirty="0">
+        </p:spPr>
+        <p:txBody>
+          <a:bodyPr wrap="square" lIns="0" tIns="0" rIns="0" bIns="0" rtlCol="0" anchor="ctr"/>
+          <a:lstStyle/>
+          <a:p>
+            <a:pPr marL="0" indent="0">
+              <a:buNone/>
+            </a:pPr>
+            <a:r>
+              <a:rPr lang="en-US" sz="1100" kern="0" spc="400" dirty="0">
                 <a:solidFill>
                   <a:srgbClr val="22D3EE"/>
                 </a:solidFill>
-                <a:latin typeface="Segoe UI Semibold" pitchFamily="34" charset="0"/>
-                <a:ea typeface="Segoe UI Semibold" pitchFamily="34" charset="-122"/>
-                <a:cs typeface="Segoe UI Semibold" pitchFamily="34" charset="-120"/>
-              </a:rPr>
-              <a:t>06 · YASIRU · NOTIFICATION SERVICE</a:t>
+                <a:latin typeface="Segoe UI Semibold" panose="020B0702040204020203" pitchFamily="34" charset="0"/>
+                <a:ea typeface="Segoe UI Semibold" panose="020B0702040204020203" pitchFamily="34" charset="-122"/>
+                <a:cs typeface="Segoe UI Semibold" panose="020B0702040204020203" pitchFamily="34" charset="-120"/>
+              </a:rPr>
+              <a:t>06 · NOTIFICATION SERVICE</a:t>
             </a:r>
             <a:endParaRPr lang="en-US" sz="1100" dirty="0"/>
           </a:p>
@@ -6382,13 +6190,12 @@
             <a:avLst/>
           </a:prstGeom>
           <a:noFill/>
-          <a:ln/>
-        </p:spPr>
-        <p:txBody>
-          <a:bodyPr wrap="square" lIns="0" tIns="0" rIns="0" bIns="0" rtlCol="0" anchor="ctr"/>
-          <a:lstStyle/>
-          <a:p>
-            <a:pPr indent="0" marL="0">
+        </p:spPr>
+        <p:txBody>
+          <a:bodyPr wrap="square" lIns="0" tIns="0" rIns="0" bIns="0" rtlCol="0" anchor="ctr"/>
+          <a:lstStyle/>
+          <a:p>
+            <a:pPr marL="0" indent="0">
               <a:buNone/>
             </a:pPr>
             <a:r>
@@ -6396,9 +6203,9 @@
                 <a:solidFill>
                   <a:srgbClr val="F1F5FB"/>
                 </a:solidFill>
-                <a:latin typeface="Segoe UI Semibold" pitchFamily="34" charset="0"/>
-                <a:ea typeface="Segoe UI Semibold" pitchFamily="34" charset="-122"/>
-                <a:cs typeface="Segoe UI Semibold" pitchFamily="34" charset="-120"/>
+                <a:latin typeface="Segoe UI Semibold" panose="020B0702040204020203" pitchFamily="34" charset="0"/>
+                <a:ea typeface="Segoe UI Semibold" panose="020B0702040204020203" pitchFamily="34" charset="-122"/>
+                <a:cs typeface="Segoe UI Semibold" panose="020B0702040204020203" pitchFamily="34" charset="-120"/>
               </a:rPr>
               <a:t>Every alert delivered and recorded</a:t>
             </a:r>
@@ -6421,13 +6228,12 @@
             <a:avLst/>
           </a:prstGeom>
           <a:noFill/>
-          <a:ln/>
-        </p:spPr>
-        <p:txBody>
-          <a:bodyPr wrap="square" lIns="0" tIns="0" rIns="0" bIns="0" rtlCol="0" anchor="ctr"/>
-          <a:lstStyle/>
-          <a:p>
-            <a:pPr indent="0" marL="0">
+        </p:spPr>
+        <p:txBody>
+          <a:bodyPr wrap="square" lIns="0" tIns="0" rIns="0" bIns="0" rtlCol="0" anchor="ctr"/>
+          <a:lstStyle/>
+          <a:p>
+            <a:pPr marL="0" indent="0">
               <a:buNone/>
             </a:pPr>
             <a:r>
@@ -6435,9 +6241,9 @@
                 <a:solidFill>
                   <a:srgbClr val="8C9BB8"/>
                 </a:solidFill>
-                <a:latin typeface="Segoe UI" pitchFamily="34" charset="0"/>
-                <a:ea typeface="Segoe UI" pitchFamily="34" charset="-122"/>
-                <a:cs typeface="Segoe UI" pitchFamily="34" charset="-120"/>
+                <a:latin typeface="Segoe UI" panose="020B0502040204020203" pitchFamily="34" charset="0"/>
+                <a:ea typeface="Segoe UI" panose="020B0502040204020203" pitchFamily="34" charset="-122"/>
+                <a:cs typeface="Segoe UI" panose="020B0502040204020203" pitchFamily="34" charset="-120"/>
               </a:rPr>
               <a:t>EC8208 Software Architecture  ·  University of Ruhuna</a:t>
             </a:r>
@@ -6460,13 +6266,12 @@
             <a:avLst/>
           </a:prstGeom>
           <a:noFill/>
-          <a:ln/>
-        </p:spPr>
-        <p:txBody>
-          <a:bodyPr wrap="square" lIns="0" tIns="0" rIns="0" bIns="0" rtlCol="0" anchor="ctr"/>
-          <a:lstStyle/>
-          <a:p>
-            <a:pPr algn="r" indent="0" marL="0">
+        </p:spPr>
+        <p:txBody>
+          <a:bodyPr wrap="square" lIns="0" tIns="0" rIns="0" bIns="0" rtlCol="0" anchor="ctr"/>
+          <a:lstStyle/>
+          <a:p>
+            <a:pPr marL="0" indent="0" algn="r">
               <a:buNone/>
             </a:pPr>
             <a:r>
@@ -6474,9 +6279,9 @@
                 <a:solidFill>
                   <a:srgbClr val="8C9BB8"/>
                 </a:solidFill>
-                <a:latin typeface="Segoe UI" pitchFamily="34" charset="0"/>
-                <a:ea typeface="Segoe UI" pitchFamily="34" charset="-122"/>
-                <a:cs typeface="Segoe UI" pitchFamily="34" charset="-120"/>
+                <a:latin typeface="Segoe UI" panose="020B0502040204020203" pitchFamily="34" charset="0"/>
+                <a:ea typeface="Segoe UI" panose="020B0502040204020203" pitchFamily="34" charset="-122"/>
+                <a:cs typeface="Segoe UI" panose="020B0502040204020203" pitchFamily="34" charset="-120"/>
               </a:rPr>
               <a:t>06  ·  2:38–3:27</a:t>
             </a:r>
@@ -6526,13 +6331,12 @@
             <a:avLst/>
           </a:prstGeom>
           <a:noFill/>
-          <a:ln/>
-        </p:spPr>
-        <p:txBody>
-          <a:bodyPr wrap="square" lIns="0" tIns="0" rIns="0" bIns="0" rtlCol="0" anchor="ctr"/>
-          <a:lstStyle/>
-          <a:p>
-            <a:pPr algn="ctr" indent="0" marL="0">
+        </p:spPr>
+        <p:txBody>
+          <a:bodyPr wrap="square" lIns="0" tIns="0" rIns="0" bIns="0" rtlCol="0" anchor="ctr"/>
+          <a:lstStyle/>
+          <a:p>
+            <a:pPr marL="0" indent="0" algn="ctr">
               <a:buNone/>
             </a:pPr>
             <a:r>
@@ -6540,9 +6344,9 @@
                 <a:solidFill>
                   <a:srgbClr val="0A1020"/>
                 </a:solidFill>
-                <a:latin typeface="Segoe UI Semibold" pitchFamily="34" charset="0"/>
-                <a:ea typeface="Segoe UI Semibold" pitchFamily="34" charset="-122"/>
-                <a:cs typeface="Segoe UI Semibold" pitchFamily="34" charset="-120"/>
+                <a:latin typeface="Segoe UI Semibold" panose="020B0702040204020203" pitchFamily="34" charset="0"/>
+                <a:ea typeface="Segoe UI Semibold" panose="020B0702040204020203" pitchFamily="34" charset="-122"/>
+                <a:cs typeface="Segoe UI Semibold" panose="020B0702040204020203" pitchFamily="34" charset="-120"/>
               </a:rPr>
               <a:t>Queue</a:t>
             </a:r>
@@ -6565,13 +6369,12 @@
             <a:avLst/>
           </a:prstGeom>
           <a:noFill/>
-          <a:ln/>
-        </p:spPr>
-        <p:txBody>
-          <a:bodyPr wrap="square" lIns="0" tIns="0" rIns="0" bIns="0" rtlCol="0" anchor="ctr"/>
-          <a:lstStyle/>
-          <a:p>
-            <a:pPr algn="ctr" indent="0" marL="0">
+        </p:spPr>
+        <p:txBody>
+          <a:bodyPr wrap="square" lIns="0" tIns="0" rIns="0" bIns="0" rtlCol="0" anchor="ctr"/>
+          <a:lstStyle/>
+          <a:p>
+            <a:pPr marL="0" indent="0" algn="ctr">
               <a:buNone/>
             </a:pPr>
             <a:r>
@@ -6579,9 +6382,9 @@
                 <a:solidFill>
                   <a:srgbClr val="0A1020"/>
                 </a:solidFill>
-                <a:latin typeface="Segoe UI" pitchFamily="34" charset="0"/>
-                <a:ea typeface="Segoe UI" pitchFamily="34" charset="-122"/>
-                <a:cs typeface="Segoe UI" pitchFamily="34" charset="-120"/>
+                <a:latin typeface="Segoe UI" panose="020B0502040204020203" pitchFamily="34" charset="0"/>
+                <a:ea typeface="Segoe UI" panose="020B0502040204020203" pitchFamily="34" charset="-122"/>
+                <a:cs typeface="Segoe UI" panose="020B0502040204020203" pitchFamily="34" charset="-120"/>
               </a:rPr>
               <a:t>durable</a:t>
             </a:r>
@@ -6604,13 +6407,12 @@
             <a:avLst/>
           </a:prstGeom>
           <a:noFill/>
-          <a:ln/>
-        </p:spPr>
-        <p:txBody>
-          <a:bodyPr wrap="square" lIns="0" tIns="0" rIns="0" bIns="0" rtlCol="0" anchor="ctr"/>
-          <a:lstStyle/>
-          <a:p>
-            <a:pPr algn="ctr" indent="0" marL="0">
+        </p:spPr>
+        <p:txBody>
+          <a:bodyPr wrap="square" lIns="0" tIns="0" rIns="0" bIns="0" rtlCol="0" anchor="ctr"/>
+          <a:lstStyle/>
+          <a:p>
+            <a:pPr marL="0" indent="0" algn="ctr">
               <a:buNone/>
             </a:pPr>
             <a:r>
@@ -6618,9 +6420,9 @@
                 <a:solidFill>
                   <a:srgbClr val="22D3EE"/>
                 </a:solidFill>
-                <a:latin typeface="Segoe UI Semibold" pitchFamily="34" charset="0"/>
-                <a:ea typeface="Segoe UI Semibold" pitchFamily="34" charset="-122"/>
-                <a:cs typeface="Segoe UI Semibold" pitchFamily="34" charset="-120"/>
+                <a:latin typeface="Segoe UI Semibold" panose="020B0702040204020203" pitchFamily="34" charset="0"/>
+                <a:ea typeface="Segoe UI Semibold" panose="020B0702040204020203" pitchFamily="34" charset="-122"/>
+                <a:cs typeface="Segoe UI Semibold" panose="020B0702040204020203" pitchFamily="34" charset="-120"/>
               </a:rPr>
               <a:t>›</a:t>
             </a:r>
@@ -6670,13 +6472,12 @@
             <a:avLst/>
           </a:prstGeom>
           <a:noFill/>
-          <a:ln/>
-        </p:spPr>
-        <p:txBody>
-          <a:bodyPr wrap="square" lIns="0" tIns="0" rIns="0" bIns="0" rtlCol="0" anchor="ctr"/>
-          <a:lstStyle/>
-          <a:p>
-            <a:pPr algn="ctr" indent="0" marL="0">
+        </p:spPr>
+        <p:txBody>
+          <a:bodyPr wrap="square" lIns="0" tIns="0" rIns="0" bIns="0" rtlCol="0" anchor="ctr"/>
+          <a:lstStyle/>
+          <a:p>
+            <a:pPr marL="0" indent="0" algn="ctr">
               <a:buNone/>
             </a:pPr>
             <a:r>
@@ -6684,9 +6485,9 @@
                 <a:solidFill>
                   <a:srgbClr val="F1F5FB"/>
                 </a:solidFill>
-                <a:latin typeface="Segoe UI Semibold" pitchFamily="34" charset="0"/>
-                <a:ea typeface="Segoe UI Semibold" pitchFamily="34" charset="-122"/>
-                <a:cs typeface="Segoe UI Semibold" pitchFamily="34" charset="-120"/>
+                <a:latin typeface="Segoe UI Semibold" panose="020B0702040204020203" pitchFamily="34" charset="0"/>
+                <a:ea typeface="Segoe UI Semibold" panose="020B0702040204020203" pitchFamily="34" charset="-122"/>
+                <a:cs typeface="Segoe UI Semibold" panose="020B0702040204020203" pitchFamily="34" charset="-120"/>
               </a:rPr>
               <a:t>Consumer</a:t>
             </a:r>
@@ -6709,13 +6510,12 @@
             <a:avLst/>
           </a:prstGeom>
           <a:noFill/>
-          <a:ln/>
-        </p:spPr>
-        <p:txBody>
-          <a:bodyPr wrap="square" lIns="0" tIns="0" rIns="0" bIns="0" rtlCol="0" anchor="ctr"/>
-          <a:lstStyle/>
-          <a:p>
-            <a:pPr algn="ctr" indent="0" marL="0">
+        </p:spPr>
+        <p:txBody>
+          <a:bodyPr wrap="square" lIns="0" tIns="0" rIns="0" bIns="0" rtlCol="0" anchor="ctr"/>
+          <a:lstStyle/>
+          <a:p>
+            <a:pPr marL="0" indent="0" algn="ctr">
               <a:buNone/>
             </a:pPr>
             <a:r>
@@ -6723,9 +6523,9 @@
                 <a:solidFill>
                   <a:srgbClr val="8C9BB8"/>
                 </a:solidFill>
-                <a:latin typeface="Segoe UI" pitchFamily="34" charset="0"/>
-                <a:ea typeface="Segoe UI" pitchFamily="34" charset="-122"/>
-                <a:cs typeface="Segoe UI" pitchFamily="34" charset="-120"/>
+                <a:latin typeface="Segoe UI" panose="020B0502040204020203" pitchFamily="34" charset="0"/>
+                <a:ea typeface="Segoe UI" panose="020B0502040204020203" pitchFamily="34" charset="-122"/>
+                <a:cs typeface="Segoe UI" panose="020B0502040204020203" pitchFamily="34" charset="-120"/>
               </a:rPr>
               <a:t>schema check</a:t>
             </a:r>
@@ -6748,13 +6548,12 @@
             <a:avLst/>
           </a:prstGeom>
           <a:noFill/>
-          <a:ln/>
-        </p:spPr>
-        <p:txBody>
-          <a:bodyPr wrap="square" lIns="0" tIns="0" rIns="0" bIns="0" rtlCol="0" anchor="ctr"/>
-          <a:lstStyle/>
-          <a:p>
-            <a:pPr algn="ctr" indent="0" marL="0">
+        </p:spPr>
+        <p:txBody>
+          <a:bodyPr wrap="square" lIns="0" tIns="0" rIns="0" bIns="0" rtlCol="0" anchor="ctr"/>
+          <a:lstStyle/>
+          <a:p>
+            <a:pPr marL="0" indent="0" algn="ctr">
               <a:buNone/>
             </a:pPr>
             <a:r>
@@ -6762,9 +6561,9 @@
                 <a:solidFill>
                   <a:srgbClr val="22D3EE"/>
                 </a:solidFill>
-                <a:latin typeface="Segoe UI Semibold" pitchFamily="34" charset="0"/>
-                <a:ea typeface="Segoe UI Semibold" pitchFamily="34" charset="-122"/>
-                <a:cs typeface="Segoe UI Semibold" pitchFamily="34" charset="-120"/>
+                <a:latin typeface="Segoe UI Semibold" panose="020B0702040204020203" pitchFamily="34" charset="0"/>
+                <a:ea typeface="Segoe UI Semibold" panose="020B0702040204020203" pitchFamily="34" charset="-122"/>
+                <a:cs typeface="Segoe UI Semibold" panose="020B0702040204020203" pitchFamily="34" charset="-120"/>
               </a:rPr>
               <a:t>›</a:t>
             </a:r>
@@ -6814,13 +6613,12 @@
             <a:avLst/>
           </a:prstGeom>
           <a:noFill/>
-          <a:ln/>
-        </p:spPr>
-        <p:txBody>
-          <a:bodyPr wrap="square" lIns="0" tIns="0" rIns="0" bIns="0" rtlCol="0" anchor="ctr"/>
-          <a:lstStyle/>
-          <a:p>
-            <a:pPr algn="ctr" indent="0" marL="0">
+        </p:spPr>
+        <p:txBody>
+          <a:bodyPr wrap="square" lIns="0" tIns="0" rIns="0" bIns="0" rtlCol="0" anchor="ctr"/>
+          <a:lstStyle/>
+          <a:p>
+            <a:pPr marL="0" indent="0" algn="ctr">
               <a:buNone/>
             </a:pPr>
             <a:r>
@@ -6828,9 +6626,9 @@
                 <a:solidFill>
                   <a:srgbClr val="F1F5FB"/>
                 </a:solidFill>
-                <a:latin typeface="Segoe UI Semibold" pitchFamily="34" charset="0"/>
-                <a:ea typeface="Segoe UI Semibold" pitchFamily="34" charset="-122"/>
-                <a:cs typeface="Segoe UI Semibold" pitchFamily="34" charset="-120"/>
+                <a:latin typeface="Segoe UI Semibold" panose="020B0702040204020203" pitchFamily="34" charset="0"/>
+                <a:ea typeface="Segoe UI Semibold" panose="020B0702040204020203" pitchFamily="34" charset="-122"/>
+                <a:cs typeface="Segoe UI Semibold" panose="020B0702040204020203" pitchFamily="34" charset="-120"/>
               </a:rPr>
               <a:t>Channels</a:t>
             </a:r>
@@ -6853,13 +6651,12 @@
             <a:avLst/>
           </a:prstGeom>
           <a:noFill/>
-          <a:ln/>
-        </p:spPr>
-        <p:txBody>
-          <a:bodyPr wrap="square" lIns="0" tIns="0" rIns="0" bIns="0" rtlCol="0" anchor="ctr"/>
-          <a:lstStyle/>
-          <a:p>
-            <a:pPr algn="ctr" indent="0" marL="0">
+        </p:spPr>
+        <p:txBody>
+          <a:bodyPr wrap="square" lIns="0" tIns="0" rIns="0" bIns="0" rtlCol="0" anchor="ctr"/>
+          <a:lstStyle/>
+          <a:p>
+            <a:pPr marL="0" indent="0" algn="ctr">
               <a:buNone/>
             </a:pPr>
             <a:r>
@@ -6867,9 +6664,9 @@
                 <a:solidFill>
                   <a:srgbClr val="8C9BB8"/>
                 </a:solidFill>
-                <a:latin typeface="Segoe UI" pitchFamily="34" charset="0"/>
-                <a:ea typeface="Segoe UI" pitchFamily="34" charset="-122"/>
-                <a:cs typeface="Segoe UI" pitchFamily="34" charset="-120"/>
+                <a:latin typeface="Segoe UI" panose="020B0502040204020203" pitchFamily="34" charset="0"/>
+                <a:ea typeface="Segoe UI" panose="020B0502040204020203" pitchFamily="34" charset="-122"/>
+                <a:cs typeface="Segoe UI" panose="020B0502040204020203" pitchFamily="34" charset="-120"/>
               </a:rPr>
               <a:t>email · push</a:t>
             </a:r>
@@ -6892,13 +6689,12 @@
             <a:avLst/>
           </a:prstGeom>
           <a:noFill/>
-          <a:ln/>
-        </p:spPr>
-        <p:txBody>
-          <a:bodyPr wrap="square" lIns="0" tIns="0" rIns="0" bIns="0" rtlCol="0" anchor="ctr"/>
-          <a:lstStyle/>
-          <a:p>
-            <a:pPr algn="ctr" indent="0" marL="0">
+        </p:spPr>
+        <p:txBody>
+          <a:bodyPr wrap="square" lIns="0" tIns="0" rIns="0" bIns="0" rtlCol="0" anchor="ctr"/>
+          <a:lstStyle/>
+          <a:p>
+            <a:pPr marL="0" indent="0" algn="ctr">
               <a:buNone/>
             </a:pPr>
             <a:r>
@@ -6906,9 +6702,9 @@
                 <a:solidFill>
                   <a:srgbClr val="22D3EE"/>
                 </a:solidFill>
-                <a:latin typeface="Segoe UI Semibold" pitchFamily="34" charset="0"/>
-                <a:ea typeface="Segoe UI Semibold" pitchFamily="34" charset="-122"/>
-                <a:cs typeface="Segoe UI Semibold" pitchFamily="34" charset="-120"/>
+                <a:latin typeface="Segoe UI Semibold" panose="020B0702040204020203" pitchFamily="34" charset="0"/>
+                <a:ea typeface="Segoe UI Semibold" panose="020B0702040204020203" pitchFamily="34" charset="-122"/>
+                <a:cs typeface="Segoe UI Semibold" panose="020B0702040204020203" pitchFamily="34" charset="-120"/>
               </a:rPr>
               <a:t>›</a:t>
             </a:r>
@@ -6958,13 +6754,12 @@
             <a:avLst/>
           </a:prstGeom>
           <a:noFill/>
-          <a:ln/>
-        </p:spPr>
-        <p:txBody>
-          <a:bodyPr wrap="square" lIns="0" tIns="0" rIns="0" bIns="0" rtlCol="0" anchor="ctr"/>
-          <a:lstStyle/>
-          <a:p>
-            <a:pPr algn="ctr" indent="0" marL="0">
+        </p:spPr>
+        <p:txBody>
+          <a:bodyPr wrap="square" lIns="0" tIns="0" rIns="0" bIns="0" rtlCol="0" anchor="ctr"/>
+          <a:lstStyle/>
+          <a:p>
+            <a:pPr marL="0" indent="0" algn="ctr">
               <a:buNone/>
             </a:pPr>
             <a:r>
@@ -6972,9 +6767,9 @@
                 <a:solidFill>
                   <a:srgbClr val="F1F5FB"/>
                 </a:solidFill>
-                <a:latin typeface="Segoe UI Semibold" pitchFamily="34" charset="0"/>
-                <a:ea typeface="Segoe UI Semibold" pitchFamily="34" charset="-122"/>
-                <a:cs typeface="Segoe UI Semibold" pitchFamily="34" charset="-120"/>
+                <a:latin typeface="Segoe UI Semibold" panose="020B0702040204020203" pitchFamily="34" charset="0"/>
+                <a:ea typeface="Segoe UI Semibold" panose="020B0702040204020203" pitchFamily="34" charset="-122"/>
+                <a:cs typeface="Segoe UI Semibold" panose="020B0702040204020203" pitchFamily="34" charset="-120"/>
               </a:rPr>
               <a:t>History</a:t>
             </a:r>
@@ -6997,13 +6792,12 @@
             <a:avLst/>
           </a:prstGeom>
           <a:noFill/>
-          <a:ln/>
-        </p:spPr>
-        <p:txBody>
-          <a:bodyPr wrap="square" lIns="0" tIns="0" rIns="0" bIns="0" rtlCol="0" anchor="ctr"/>
-          <a:lstStyle/>
-          <a:p>
-            <a:pPr algn="ctr" indent="0" marL="0">
+        </p:spPr>
+        <p:txBody>
+          <a:bodyPr wrap="square" lIns="0" tIns="0" rIns="0" bIns="0" rtlCol="0" anchor="ctr"/>
+          <a:lstStyle/>
+          <a:p>
+            <a:pPr marL="0" indent="0" algn="ctr">
               <a:buNone/>
             </a:pPr>
             <a:r>
@@ -7011,9 +6805,9 @@
                 <a:solidFill>
                   <a:srgbClr val="8C9BB8"/>
                 </a:solidFill>
-                <a:latin typeface="Segoe UI" pitchFamily="34" charset="0"/>
-                <a:ea typeface="Segoe UI" pitchFamily="34" charset="-122"/>
-                <a:cs typeface="Segoe UI" pitchFamily="34" charset="-120"/>
+                <a:latin typeface="Segoe UI" panose="020B0502040204020203" pitchFamily="34" charset="0"/>
+                <a:ea typeface="Segoe UI" panose="020B0502040204020203" pitchFamily="34" charset="-122"/>
+                <a:cs typeface="Segoe UI" panose="020B0502040204020203" pitchFamily="34" charset="-120"/>
               </a:rPr>
               <a:t>stored</a:t>
             </a:r>
@@ -7059,13 +6853,12 @@
             <a:avLst/>
           </a:prstGeom>
           <a:noFill/>
-          <a:ln/>
-        </p:spPr>
-        <p:txBody>
-          <a:bodyPr wrap="square" lIns="0" tIns="0" rIns="0" bIns="0" rtlCol="0" anchor="ctr"/>
-          <a:lstStyle/>
-          <a:p>
-            <a:pPr indent="0" marL="0">
+        </p:spPr>
+        <p:txBody>
+          <a:bodyPr wrap="square" lIns="0" tIns="0" rIns="0" bIns="0" rtlCol="0" anchor="ctr"/>
+          <a:lstStyle/>
+          <a:p>
+            <a:pPr marL="0" indent="0">
               <a:buNone/>
             </a:pPr>
             <a:r>
@@ -7073,9 +6866,9 @@
                 <a:solidFill>
                   <a:srgbClr val="22D3EE"/>
                 </a:solidFill>
-                <a:latin typeface="Segoe UI Semibold" pitchFamily="34" charset="0"/>
-                <a:ea typeface="Segoe UI Semibold" pitchFamily="34" charset="-122"/>
-                <a:cs typeface="Segoe UI Semibold" pitchFamily="34" charset="-120"/>
+                <a:latin typeface="Segoe UI Semibold" panose="020B0702040204020203" pitchFamily="34" charset="0"/>
+                <a:ea typeface="Segoe UI Semibold" panose="020B0702040204020203" pitchFamily="34" charset="-122"/>
+                <a:cs typeface="Segoe UI Semibold" panose="020B0702040204020203" pitchFamily="34" charset="-120"/>
               </a:rPr>
               <a:t>Instant</a:t>
             </a:r>
@@ -7098,13 +6891,12 @@
             <a:avLst/>
           </a:prstGeom>
           <a:noFill/>
-          <a:ln/>
         </p:spPr>
         <p:txBody>
           <a:bodyPr wrap="square" lIns="0" tIns="0" rIns="0" bIns="0" rtlCol="0" anchor="t"/>
           <a:lstStyle/>
           <a:p>
-            <a:pPr indent="0" marL="0">
+            <a:pPr marL="0" indent="0">
               <a:buNone/>
             </a:pPr>
             <a:r>
@@ -7112,9 +6904,9 @@
                 <a:solidFill>
                   <a:srgbClr val="8C9BB8"/>
                 </a:solidFill>
-                <a:latin typeface="Segoe UI" pitchFamily="34" charset="0"/>
-                <a:ea typeface="Segoe UI" pitchFamily="34" charset="-122"/>
-                <a:cs typeface="Segoe UI" pitchFamily="34" charset="-120"/>
+                <a:latin typeface="Segoe UI" panose="020B0502040204020203" pitchFamily="34" charset="0"/>
+                <a:ea typeface="Segoe UI" panose="020B0502040204020203" pitchFamily="34" charset="-122"/>
+                <a:cs typeface="Segoe UI" panose="020B0502040204020203" pitchFamily="34" charset="-120"/>
               </a:rPr>
               <a:t>in-app push</a:t>
             </a:r>
@@ -7160,13 +6952,12 @@
             <a:avLst/>
           </a:prstGeom>
           <a:noFill/>
-          <a:ln/>
-        </p:spPr>
-        <p:txBody>
-          <a:bodyPr wrap="square" lIns="0" tIns="0" rIns="0" bIns="0" rtlCol="0" anchor="ctr"/>
-          <a:lstStyle/>
-          <a:p>
-            <a:pPr indent="0" marL="0">
+        </p:spPr>
+        <p:txBody>
+          <a:bodyPr wrap="square" lIns="0" tIns="0" rIns="0" bIns="0" rtlCol="0" anchor="ctr"/>
+          <a:lstStyle/>
+          <a:p>
+            <a:pPr marL="0" indent="0">
               <a:buNone/>
             </a:pPr>
             <a:r>
@@ -7174,9 +6965,9 @@
                 <a:solidFill>
                   <a:srgbClr val="22D3EE"/>
                 </a:solidFill>
-                <a:latin typeface="Segoe UI Semibold" pitchFamily="34" charset="0"/>
-                <a:ea typeface="Segoe UI Semibold" pitchFamily="34" charset="-122"/>
-                <a:cs typeface="Segoe UI Semibold" pitchFamily="34" charset="-120"/>
+                <a:latin typeface="Segoe UI Semibold" panose="020B0702040204020203" pitchFamily="34" charset="0"/>
+                <a:ea typeface="Segoe UI Semibold" panose="020B0702040204020203" pitchFamily="34" charset="-122"/>
+                <a:cs typeface="Segoe UI Semibold" panose="020B0702040204020203" pitchFamily="34" charset="-120"/>
               </a:rPr>
               <a:t>3</a:t>
             </a:r>
@@ -7199,13 +6990,12 @@
             <a:avLst/>
           </a:prstGeom>
           <a:noFill/>
-          <a:ln/>
         </p:spPr>
         <p:txBody>
           <a:bodyPr wrap="square" lIns="0" tIns="0" rIns="0" bIns="0" rtlCol="0" anchor="t"/>
           <a:lstStyle/>
           <a:p>
-            <a:pPr indent="0" marL="0">
+            <a:pPr marL="0" indent="0">
               <a:buNone/>
             </a:pPr>
             <a:r>
@@ -7213,9 +7003,9 @@
                 <a:solidFill>
                   <a:srgbClr val="8C9BB8"/>
                 </a:solidFill>
-                <a:latin typeface="Segoe UI" pitchFamily="34" charset="0"/>
-                <a:ea typeface="Segoe UI" pitchFamily="34" charset="-122"/>
-                <a:cs typeface="Segoe UI" pitchFamily="34" charset="-120"/>
+                <a:latin typeface="Segoe UI" panose="020B0502040204020203" pitchFamily="34" charset="0"/>
+                <a:ea typeface="Segoe UI" panose="020B0502040204020203" pitchFamily="34" charset="-122"/>
+                <a:cs typeface="Segoe UI" panose="020B0502040204020203" pitchFamily="34" charset="-120"/>
               </a:rPr>
               <a:t>automatic retries</a:t>
             </a:r>
@@ -7261,13 +7051,12 @@
             <a:avLst/>
           </a:prstGeom>
           <a:noFill/>
-          <a:ln/>
-        </p:spPr>
-        <p:txBody>
-          <a:bodyPr wrap="square" lIns="0" tIns="0" rIns="0" bIns="0" rtlCol="0" anchor="ctr"/>
-          <a:lstStyle/>
-          <a:p>
-            <a:pPr indent="0" marL="0">
+        </p:spPr>
+        <p:txBody>
+          <a:bodyPr wrap="square" lIns="0" tIns="0" rIns="0" bIns="0" rtlCol="0" anchor="ctr"/>
+          <a:lstStyle/>
+          <a:p>
+            <a:pPr marL="0" indent="0">
               <a:buNone/>
             </a:pPr>
             <a:r>
@@ -7275,9 +7064,9 @@
                 <a:solidFill>
                   <a:srgbClr val="22D3EE"/>
                 </a:solidFill>
-                <a:latin typeface="Segoe UI Semibold" pitchFamily="34" charset="0"/>
-                <a:ea typeface="Segoe UI Semibold" pitchFamily="34" charset="-122"/>
-                <a:cs typeface="Segoe UI Semibold" pitchFamily="34" charset="-120"/>
+                <a:latin typeface="Segoe UI Semibold" panose="020B0702040204020203" pitchFamily="34" charset="0"/>
+                <a:ea typeface="Segoe UI Semibold" panose="020B0702040204020203" pitchFamily="34" charset="-122"/>
+                <a:cs typeface="Segoe UI Semibold" panose="020B0702040204020203" pitchFamily="34" charset="-120"/>
               </a:rPr>
               <a:t>100%</a:t>
             </a:r>
@@ -7300,13 +7089,12 @@
             <a:avLst/>
           </a:prstGeom>
           <a:noFill/>
-          <a:ln/>
         </p:spPr>
         <p:txBody>
           <a:bodyPr wrap="square" lIns="0" tIns="0" rIns="0" bIns="0" rtlCol="0" anchor="t"/>
           <a:lstStyle/>
           <a:p>
-            <a:pPr indent="0" marL="0">
+            <a:pPr marL="0" indent="0">
               <a:buNone/>
             </a:pPr>
             <a:r>
@@ -7314,9 +7102,9 @@
                 <a:solidFill>
                   <a:srgbClr val="8C9BB8"/>
                 </a:solidFill>
-                <a:latin typeface="Segoe UI" pitchFamily="34" charset="0"/>
-                <a:ea typeface="Segoe UI" pitchFamily="34" charset="-122"/>
-                <a:cs typeface="Segoe UI" pitchFamily="34" charset="-120"/>
+                <a:latin typeface="Segoe UI" panose="020B0502040204020203" pitchFamily="34" charset="0"/>
+                <a:ea typeface="Segoe UI" panose="020B0502040204020203" pitchFamily="34" charset="-122"/>
+                <a:cs typeface="Segoe UI" panose="020B0502040204020203" pitchFamily="34" charset="-120"/>
               </a:rPr>
               <a:t>deliveries recorded</a:t>
             </a:r>
@@ -7366,13 +7154,12 @@
             <a:avLst/>
           </a:prstGeom>
           <a:noFill/>
-          <a:ln/>
-        </p:spPr>
-        <p:txBody>
-          <a:bodyPr wrap="square" lIns="0" tIns="0" rIns="0" bIns="0" rtlCol="0" anchor="ctr"/>
-          <a:lstStyle/>
-          <a:p>
-            <a:pPr indent="0" marL="0">
+        </p:spPr>
+        <p:txBody>
+          <a:bodyPr wrap="square" lIns="0" tIns="0" rIns="0" bIns="0" rtlCol="0" anchor="ctr"/>
+          <a:lstStyle/>
+          <a:p>
+            <a:pPr marL="0" indent="0">
               <a:buNone/>
             </a:pPr>
             <a:r>
@@ -7380,23 +7167,20 @@
                 <a:solidFill>
                   <a:srgbClr val="22D3EE"/>
                 </a:solidFill>
-                <a:latin typeface="Segoe UI" pitchFamily="34" charset="0"/>
-                <a:ea typeface="Segoe UI" pitchFamily="34" charset="-122"/>
-                <a:cs typeface="Segoe UI" pitchFamily="34" charset="-120"/>
+                <a:latin typeface="Segoe UI" panose="020B0502040204020203" pitchFamily="34" charset="0"/>
+                <a:ea typeface="Segoe UI" panose="020B0502040204020203" pitchFamily="34" charset="-122"/>
+                <a:cs typeface="Segoe UI" panose="020B0502040204020203" pitchFamily="34" charset="-120"/>
               </a:rPr>
               <a:t>LIVE  </a:t>
             </a:r>
-            <a:pPr indent="0" marL="0">
-              <a:buNone/>
-            </a:pPr>
             <a:r>
               <a:rPr lang="en-US" sz="1100" dirty="0">
                 <a:solidFill>
                   <a:srgbClr val="F1F5FB"/>
                 </a:solidFill>
-                <a:latin typeface="Segoe UI" pitchFamily="34" charset="0"/>
-                <a:ea typeface="Segoe UI" pitchFamily="34" charset="-122"/>
-                <a:cs typeface="Segoe UI" pitchFamily="34" charset="-120"/>
+                <a:latin typeface="Segoe UI" panose="020B0502040204020203" pitchFamily="34" charset="0"/>
+                <a:ea typeface="Segoe UI" panose="020B0502040204020203" pitchFamily="34" charset="-122"/>
+                <a:cs typeface="Segoe UI" panose="020B0502040204020203" pitchFamily="34" charset="-120"/>
               </a:rPr>
               <a:t>Notifications page</a:t>
             </a:r>
@@ -7414,12 +7198,13 @@
 
 <file path=ppt/slides/slide7.xml><?xml version="1.0" encoding="utf-8"?>
 <p:sld xmlns:a="http://schemas.openxmlformats.org/drawingml/2006/main" xmlns:r="http://schemas.openxmlformats.org/officeDocument/2006/relationships" xmlns:p="http://schemas.openxmlformats.org/presentationml/2006/main">
-  <p:cSld name="Slide 7">
+  <p:cSld>
     <p:bg>
       <p:bgPr>
         <a:solidFill>
           <a:srgbClr val="0A1020"/>
         </a:solidFill>
+        <a:effectLst/>
       </p:bgPr>
     </p:bg>
     <p:spTree>
@@ -7451,25 +7236,24 @@
             <a:avLst/>
           </a:prstGeom>
           <a:noFill/>
-          <a:ln/>
-        </p:spPr>
-        <p:txBody>
-          <a:bodyPr wrap="square" lIns="0" tIns="0" rIns="0" bIns="0" rtlCol="0" anchor="ctr"/>
-          <a:lstStyle/>
-          <a:p>
-            <a:pPr indent="0" marL="0">
-              <a:buNone/>
-            </a:pPr>
-            <a:r>
-              <a:rPr lang="en-US" sz="1100" spc="400" kern="0" dirty="0">
+        </p:spPr>
+        <p:txBody>
+          <a:bodyPr wrap="square" lIns="0" tIns="0" rIns="0" bIns="0" rtlCol="0" anchor="ctr"/>
+          <a:lstStyle/>
+          <a:p>
+            <a:pPr marL="0" indent="0">
+              <a:buNone/>
+            </a:pPr>
+            <a:r>
+              <a:rPr lang="en-US" sz="1100" kern="0" spc="400" dirty="0">
                 <a:solidFill>
                   <a:srgbClr val="22D3EE"/>
                 </a:solidFill>
-                <a:latin typeface="Segoe UI Semibold" pitchFamily="34" charset="0"/>
-                <a:ea typeface="Segoe UI Semibold" pitchFamily="34" charset="-122"/>
-                <a:cs typeface="Segoe UI Semibold" pitchFamily="34" charset="-120"/>
-              </a:rPr>
-              <a:t>07 · SACHINTHANA · ANALYTICS SERVICE</a:t>
+                <a:latin typeface="Segoe UI Semibold" panose="020B0702040204020203" pitchFamily="34" charset="0"/>
+                <a:ea typeface="Segoe UI Semibold" panose="020B0702040204020203" pitchFamily="34" charset="-122"/>
+                <a:cs typeface="Segoe UI Semibold" panose="020B0702040204020203" pitchFamily="34" charset="-120"/>
+              </a:rPr>
+              <a:t>07 · ANALYTICS SERVICE</a:t>
             </a:r>
             <a:endParaRPr lang="en-US" sz="1100" dirty="0"/>
           </a:p>
@@ -7490,13 +7274,12 @@
             <a:avLst/>
           </a:prstGeom>
           <a:noFill/>
-          <a:ln/>
-        </p:spPr>
-        <p:txBody>
-          <a:bodyPr wrap="square" lIns="0" tIns="0" rIns="0" bIns="0" rtlCol="0" anchor="ctr"/>
-          <a:lstStyle/>
-          <a:p>
-            <a:pPr indent="0" marL="0">
+        </p:spPr>
+        <p:txBody>
+          <a:bodyPr wrap="square" lIns="0" tIns="0" rIns="0" bIns="0" rtlCol="0" anchor="ctr"/>
+          <a:lstStyle/>
+          <a:p>
+            <a:pPr marL="0" indent="0">
               <a:buNone/>
             </a:pPr>
             <a:r>
@@ -7504,9 +7287,9 @@
                 <a:solidFill>
                   <a:srgbClr val="F1F5FB"/>
                 </a:solidFill>
-                <a:latin typeface="Segoe UI Semibold" pitchFamily="34" charset="0"/>
-                <a:ea typeface="Segoe UI Semibold" pitchFamily="34" charset="-122"/>
-                <a:cs typeface="Segoe UI Semibold" pitchFamily="34" charset="-120"/>
+                <a:latin typeface="Segoe UI Semibold" panose="020B0702040204020203" pitchFamily="34" charset="0"/>
+                <a:ea typeface="Segoe UI Semibold" panose="020B0702040204020203" pitchFamily="34" charset="-122"/>
+                <a:cs typeface="Segoe UI Semibold" panose="020B0702040204020203" pitchFamily="34" charset="-120"/>
               </a:rPr>
               <a:t>Trustworthy energy figures and reports</a:t>
             </a:r>
@@ -7529,13 +7312,12 @@
             <a:avLst/>
           </a:prstGeom>
           <a:noFill/>
-          <a:ln/>
-        </p:spPr>
-        <p:txBody>
-          <a:bodyPr wrap="square" lIns="0" tIns="0" rIns="0" bIns="0" rtlCol="0" anchor="ctr"/>
-          <a:lstStyle/>
-          <a:p>
-            <a:pPr indent="0" marL="0">
+        </p:spPr>
+        <p:txBody>
+          <a:bodyPr wrap="square" lIns="0" tIns="0" rIns="0" bIns="0" rtlCol="0" anchor="ctr"/>
+          <a:lstStyle/>
+          <a:p>
+            <a:pPr marL="0" indent="0">
               <a:buNone/>
             </a:pPr>
             <a:r>
@@ -7543,9 +7325,9 @@
                 <a:solidFill>
                   <a:srgbClr val="8C9BB8"/>
                 </a:solidFill>
-                <a:latin typeface="Segoe UI" pitchFamily="34" charset="0"/>
-                <a:ea typeface="Segoe UI" pitchFamily="34" charset="-122"/>
-                <a:cs typeface="Segoe UI" pitchFamily="34" charset="-120"/>
+                <a:latin typeface="Segoe UI" panose="020B0502040204020203" pitchFamily="34" charset="0"/>
+                <a:ea typeface="Segoe UI" panose="020B0502040204020203" pitchFamily="34" charset="-122"/>
+                <a:cs typeface="Segoe UI" panose="020B0502040204020203" pitchFamily="34" charset="-120"/>
               </a:rPr>
               <a:t>EC8208 Software Architecture  ·  University of Ruhuna</a:t>
             </a:r>
@@ -7568,13 +7350,12 @@
             <a:avLst/>
           </a:prstGeom>
           <a:noFill/>
-          <a:ln/>
-        </p:spPr>
-        <p:txBody>
-          <a:bodyPr wrap="square" lIns="0" tIns="0" rIns="0" bIns="0" rtlCol="0" anchor="ctr"/>
-          <a:lstStyle/>
-          <a:p>
-            <a:pPr algn="r" indent="0" marL="0">
+        </p:spPr>
+        <p:txBody>
+          <a:bodyPr wrap="square" lIns="0" tIns="0" rIns="0" bIns="0" rtlCol="0" anchor="ctr"/>
+          <a:lstStyle/>
+          <a:p>
+            <a:pPr marL="0" indent="0" algn="r">
               <a:buNone/>
             </a:pPr>
             <a:r>
@@ -7582,9 +7363,9 @@
                 <a:solidFill>
                   <a:srgbClr val="8C9BB8"/>
                 </a:solidFill>
-                <a:latin typeface="Segoe UI" pitchFamily="34" charset="0"/>
-                <a:ea typeface="Segoe UI" pitchFamily="34" charset="-122"/>
-                <a:cs typeface="Segoe UI" pitchFamily="34" charset="-120"/>
+                <a:latin typeface="Segoe UI" panose="020B0502040204020203" pitchFamily="34" charset="0"/>
+                <a:ea typeface="Segoe UI" panose="020B0502040204020203" pitchFamily="34" charset="-122"/>
+                <a:cs typeface="Segoe UI" panose="020B0502040204020203" pitchFamily="34" charset="-120"/>
               </a:rPr>
               <a:t>07  ·  3:27–4:16</a:t>
             </a:r>
@@ -7634,13 +7415,12 @@
             <a:avLst/>
           </a:prstGeom>
           <a:noFill/>
-          <a:ln/>
-        </p:spPr>
-        <p:txBody>
-          <a:bodyPr wrap="square" lIns="0" tIns="0" rIns="0" bIns="0" rtlCol="0" anchor="ctr"/>
-          <a:lstStyle/>
-          <a:p>
-            <a:pPr algn="ctr" indent="0" marL="0">
+        </p:spPr>
+        <p:txBody>
+          <a:bodyPr wrap="square" lIns="0" tIns="0" rIns="0" bIns="0" rtlCol="0" anchor="ctr"/>
+          <a:lstStyle/>
+          <a:p>
+            <a:pPr marL="0" indent="0" algn="ctr">
               <a:buNone/>
             </a:pPr>
             <a:r>
@@ -7648,9 +7428,9 @@
                 <a:solidFill>
                   <a:srgbClr val="0A1020"/>
                 </a:solidFill>
-                <a:latin typeface="Segoe UI Semibold" pitchFamily="34" charset="0"/>
-                <a:ea typeface="Segoe UI Semibold" pitchFamily="34" charset="-122"/>
-                <a:cs typeface="Segoe UI Semibold" pitchFamily="34" charset="-120"/>
+                <a:latin typeface="Segoe UI Semibold" panose="020B0702040204020203" pitchFamily="34" charset="0"/>
+                <a:ea typeface="Segoe UI Semibold" panose="020B0702040204020203" pitchFamily="34" charset="-122"/>
+                <a:cs typeface="Segoe UI Semibold" panose="020B0702040204020203" pitchFamily="34" charset="-120"/>
               </a:rPr>
               <a:t>Source APIs</a:t>
             </a:r>
@@ -7673,13 +7453,12 @@
             <a:avLst/>
           </a:prstGeom>
           <a:noFill/>
-          <a:ln/>
-        </p:spPr>
-        <p:txBody>
-          <a:bodyPr wrap="square" lIns="0" tIns="0" rIns="0" bIns="0" rtlCol="0" anchor="ctr"/>
-          <a:lstStyle/>
-          <a:p>
-            <a:pPr algn="ctr" indent="0" marL="0">
+        </p:spPr>
+        <p:txBody>
+          <a:bodyPr wrap="square" lIns="0" tIns="0" rIns="0" bIns="0" rtlCol="0" anchor="ctr"/>
+          <a:lstStyle/>
+          <a:p>
+            <a:pPr marL="0" indent="0" algn="ctr">
               <a:buNone/>
             </a:pPr>
             <a:r>
@@ -7687,9 +7466,9 @@
                 <a:solidFill>
                   <a:srgbClr val="0A1020"/>
                 </a:solidFill>
-                <a:latin typeface="Segoe UI" pitchFamily="34" charset="0"/>
-                <a:ea typeface="Segoe UI" pitchFamily="34" charset="-122"/>
-                <a:cs typeface="Segoe UI" pitchFamily="34" charset="-120"/>
+                <a:latin typeface="Segoe UI" panose="020B0502040204020203" pitchFamily="34" charset="0"/>
+                <a:ea typeface="Segoe UI" panose="020B0502040204020203" pitchFamily="34" charset="-122"/>
+                <a:cs typeface="Segoe UI" panose="020B0502040204020203" pitchFamily="34" charset="-120"/>
               </a:rPr>
               <a:t>REST only</a:t>
             </a:r>
@@ -7712,13 +7491,12 @@
             <a:avLst/>
           </a:prstGeom>
           <a:noFill/>
-          <a:ln/>
-        </p:spPr>
-        <p:txBody>
-          <a:bodyPr wrap="square" lIns="0" tIns="0" rIns="0" bIns="0" rtlCol="0" anchor="ctr"/>
-          <a:lstStyle/>
-          <a:p>
-            <a:pPr algn="ctr" indent="0" marL="0">
+        </p:spPr>
+        <p:txBody>
+          <a:bodyPr wrap="square" lIns="0" tIns="0" rIns="0" bIns="0" rtlCol="0" anchor="ctr"/>
+          <a:lstStyle/>
+          <a:p>
+            <a:pPr marL="0" indent="0" algn="ctr">
               <a:buNone/>
             </a:pPr>
             <a:r>
@@ -7726,9 +7504,9 @@
                 <a:solidFill>
                   <a:srgbClr val="22D3EE"/>
                 </a:solidFill>
-                <a:latin typeface="Segoe UI Semibold" pitchFamily="34" charset="0"/>
-                <a:ea typeface="Segoe UI Semibold" pitchFamily="34" charset="-122"/>
-                <a:cs typeface="Segoe UI Semibold" pitchFamily="34" charset="-120"/>
+                <a:latin typeface="Segoe UI Semibold" panose="020B0702040204020203" pitchFamily="34" charset="0"/>
+                <a:ea typeface="Segoe UI Semibold" panose="020B0702040204020203" pitchFamily="34" charset="-122"/>
+                <a:cs typeface="Segoe UI Semibold" panose="020B0702040204020203" pitchFamily="34" charset="-120"/>
               </a:rPr>
               <a:t>›</a:t>
             </a:r>
@@ -7778,13 +7556,12 @@
             <a:avLst/>
           </a:prstGeom>
           <a:noFill/>
-          <a:ln/>
-        </p:spPr>
-        <p:txBody>
-          <a:bodyPr wrap="square" lIns="0" tIns="0" rIns="0" bIns="0" rtlCol="0" anchor="ctr"/>
-          <a:lstStyle/>
-          <a:p>
-            <a:pPr algn="ctr" indent="0" marL="0">
+        </p:spPr>
+        <p:txBody>
+          <a:bodyPr wrap="square" lIns="0" tIns="0" rIns="0" bIns="0" rtlCol="0" anchor="ctr"/>
+          <a:lstStyle/>
+          <a:p>
+            <a:pPr marL="0" indent="0" algn="ctr">
               <a:buNone/>
             </a:pPr>
             <a:r>
@@ -7792,9 +7569,9 @@
                 <a:solidFill>
                   <a:srgbClr val="F1F5FB"/>
                 </a:solidFill>
-                <a:latin typeface="Segoe UI Semibold" pitchFamily="34" charset="0"/>
-                <a:ea typeface="Segoe UI Semibold" pitchFamily="34" charset="-122"/>
-                <a:cs typeface="Segoe UI Semibold" pitchFamily="34" charset="-120"/>
+                <a:latin typeface="Segoe UI Semibold" panose="020B0702040204020203" pitchFamily="34" charset="0"/>
+                <a:ea typeface="Segoe UI Semibold" panose="020B0702040204020203" pitchFamily="34" charset="-122"/>
+                <a:cs typeface="Segoe UI Semibold" panose="020B0702040204020203" pitchFamily="34" charset="-120"/>
               </a:rPr>
               <a:t>Calculation</a:t>
             </a:r>
@@ -7817,13 +7594,12 @@
             <a:avLst/>
           </a:prstGeom>
           <a:noFill/>
-          <a:ln/>
-        </p:spPr>
-        <p:txBody>
-          <a:bodyPr wrap="square" lIns="0" tIns="0" rIns="0" bIns="0" rtlCol="0" anchor="ctr"/>
-          <a:lstStyle/>
-          <a:p>
-            <a:pPr algn="ctr" indent="0" marL="0">
+        </p:spPr>
+        <p:txBody>
+          <a:bodyPr wrap="square" lIns="0" tIns="0" rIns="0" bIns="0" rtlCol="0" anchor="ctr"/>
+          <a:lstStyle/>
+          <a:p>
+            <a:pPr marL="0" indent="0" algn="ctr">
               <a:buNone/>
             </a:pPr>
             <a:r>
@@ -7831,9 +7607,9 @@
                 <a:solidFill>
                   <a:srgbClr val="8C9BB8"/>
                 </a:solidFill>
-                <a:latin typeface="Segoe UI" pitchFamily="34" charset="0"/>
-                <a:ea typeface="Segoe UI" pitchFamily="34" charset="-122"/>
-                <a:cs typeface="Segoe UI" pitchFamily="34" charset="-120"/>
+                <a:latin typeface="Segoe UI" panose="020B0502040204020203" pitchFamily="34" charset="0"/>
+                <a:ea typeface="Segoe UI" panose="020B0502040204020203" pitchFamily="34" charset="-122"/>
+                <a:cs typeface="Segoe UI" panose="020B0502040204020203" pitchFamily="34" charset="-120"/>
               </a:rPr>
               <a:t>power to kWh</a:t>
             </a:r>
@@ -7856,13 +7632,12 @@
             <a:avLst/>
           </a:prstGeom>
           <a:noFill/>
-          <a:ln/>
-        </p:spPr>
-        <p:txBody>
-          <a:bodyPr wrap="square" lIns="0" tIns="0" rIns="0" bIns="0" rtlCol="0" anchor="ctr"/>
-          <a:lstStyle/>
-          <a:p>
-            <a:pPr algn="ctr" indent="0" marL="0">
+        </p:spPr>
+        <p:txBody>
+          <a:bodyPr wrap="square" lIns="0" tIns="0" rIns="0" bIns="0" rtlCol="0" anchor="ctr"/>
+          <a:lstStyle/>
+          <a:p>
+            <a:pPr marL="0" indent="0" algn="ctr">
               <a:buNone/>
             </a:pPr>
             <a:r>
@@ -7870,9 +7645,9 @@
                 <a:solidFill>
                   <a:srgbClr val="22D3EE"/>
                 </a:solidFill>
-                <a:latin typeface="Segoe UI Semibold" pitchFamily="34" charset="0"/>
-                <a:ea typeface="Segoe UI Semibold" pitchFamily="34" charset="-122"/>
-                <a:cs typeface="Segoe UI Semibold" pitchFamily="34" charset="-120"/>
+                <a:latin typeface="Segoe UI Semibold" panose="020B0702040204020203" pitchFamily="34" charset="0"/>
+                <a:ea typeface="Segoe UI Semibold" panose="020B0702040204020203" pitchFamily="34" charset="-122"/>
+                <a:cs typeface="Segoe UI Semibold" panose="020B0702040204020203" pitchFamily="34" charset="-120"/>
               </a:rPr>
               <a:t>›</a:t>
             </a:r>
@@ -7922,13 +7697,12 @@
             <a:avLst/>
           </a:prstGeom>
           <a:noFill/>
-          <a:ln/>
-        </p:spPr>
-        <p:txBody>
-          <a:bodyPr wrap="square" lIns="0" tIns="0" rIns="0" bIns="0" rtlCol="0" anchor="ctr"/>
-          <a:lstStyle/>
-          <a:p>
-            <a:pPr algn="ctr" indent="0" marL="0">
+        </p:spPr>
+        <p:txBody>
+          <a:bodyPr wrap="square" lIns="0" tIns="0" rIns="0" bIns="0" rtlCol="0" anchor="ctr"/>
+          <a:lstStyle/>
+          <a:p>
+            <a:pPr marL="0" indent="0" algn="ctr">
               <a:buNone/>
             </a:pPr>
             <a:r>
@@ -7936,9 +7710,9 @@
                 <a:solidFill>
                   <a:srgbClr val="F1F5FB"/>
                 </a:solidFill>
-                <a:latin typeface="Segoe UI Semibold" pitchFamily="34" charset="0"/>
-                <a:ea typeface="Segoe UI Semibold" pitchFamily="34" charset="-122"/>
-                <a:cs typeface="Segoe UI Semibold" pitchFamily="34" charset="-120"/>
+                <a:latin typeface="Segoe UI Semibold" panose="020B0702040204020203" pitchFamily="34" charset="0"/>
+                <a:ea typeface="Segoe UI Semibold" panose="020B0702040204020203" pitchFamily="34" charset="-122"/>
+                <a:cs typeface="Segoe UI Semibold" panose="020B0702040204020203" pitchFamily="34" charset="-120"/>
               </a:rPr>
               <a:t>Reports</a:t>
             </a:r>
@@ -7961,13 +7735,12 @@
             <a:avLst/>
           </a:prstGeom>
           <a:noFill/>
-          <a:ln/>
-        </p:spPr>
-        <p:txBody>
-          <a:bodyPr wrap="square" lIns="0" tIns="0" rIns="0" bIns="0" rtlCol="0" anchor="ctr"/>
-          <a:lstStyle/>
-          <a:p>
-            <a:pPr algn="ctr" indent="0" marL="0">
+        </p:spPr>
+        <p:txBody>
+          <a:bodyPr wrap="square" lIns="0" tIns="0" rIns="0" bIns="0" rtlCol="0" anchor="ctr"/>
+          <a:lstStyle/>
+          <a:p>
+            <a:pPr marL="0" indent="0" algn="ctr">
               <a:buNone/>
             </a:pPr>
             <a:r>
@@ -7975,9 +7748,9 @@
                 <a:solidFill>
                   <a:srgbClr val="8C9BB8"/>
                 </a:solidFill>
-                <a:latin typeface="Segoe UI" pitchFamily="34" charset="0"/>
-                <a:ea typeface="Segoe UI" pitchFamily="34" charset="-122"/>
-                <a:cs typeface="Segoe UI" pitchFamily="34" charset="-120"/>
+                <a:latin typeface="Segoe UI" panose="020B0502040204020203" pitchFamily="34" charset="0"/>
+                <a:ea typeface="Segoe UI" panose="020B0502040204020203" pitchFamily="34" charset="-122"/>
+                <a:cs typeface="Segoe UI" panose="020B0502040204020203" pitchFamily="34" charset="-120"/>
               </a:rPr>
               <a:t>stored</a:t>
             </a:r>
@@ -8000,13 +7773,12 @@
             <a:avLst/>
           </a:prstGeom>
           <a:noFill/>
-          <a:ln/>
-        </p:spPr>
-        <p:txBody>
-          <a:bodyPr wrap="square" lIns="0" tIns="0" rIns="0" bIns="0" rtlCol="0" anchor="ctr"/>
-          <a:lstStyle/>
-          <a:p>
-            <a:pPr algn="ctr" indent="0" marL="0">
+        </p:spPr>
+        <p:txBody>
+          <a:bodyPr wrap="square" lIns="0" tIns="0" rIns="0" bIns="0" rtlCol="0" anchor="ctr"/>
+          <a:lstStyle/>
+          <a:p>
+            <a:pPr marL="0" indent="0" algn="ctr">
               <a:buNone/>
             </a:pPr>
             <a:r>
@@ -8014,9 +7786,9 @@
                 <a:solidFill>
                   <a:srgbClr val="22D3EE"/>
                 </a:solidFill>
-                <a:latin typeface="Segoe UI Semibold" pitchFamily="34" charset="0"/>
-                <a:ea typeface="Segoe UI Semibold" pitchFamily="34" charset="-122"/>
-                <a:cs typeface="Segoe UI Semibold" pitchFamily="34" charset="-120"/>
+                <a:latin typeface="Segoe UI Semibold" panose="020B0702040204020203" pitchFamily="34" charset="0"/>
+                <a:ea typeface="Segoe UI Semibold" panose="020B0702040204020203" pitchFamily="34" charset="-122"/>
+                <a:cs typeface="Segoe UI Semibold" panose="020B0702040204020203" pitchFamily="34" charset="-120"/>
               </a:rPr>
               <a:t>›</a:t>
             </a:r>
@@ -8066,13 +7838,12 @@
             <a:avLst/>
           </a:prstGeom>
           <a:noFill/>
-          <a:ln/>
-        </p:spPr>
-        <p:txBody>
-          <a:bodyPr wrap="square" lIns="0" tIns="0" rIns="0" bIns="0" rtlCol="0" anchor="ctr"/>
-          <a:lstStyle/>
-          <a:p>
-            <a:pPr algn="ctr" indent="0" marL="0">
+        </p:spPr>
+        <p:txBody>
+          <a:bodyPr wrap="square" lIns="0" tIns="0" rIns="0" bIns="0" rtlCol="0" anchor="ctr"/>
+          <a:lstStyle/>
+          <a:p>
+            <a:pPr marL="0" indent="0" algn="ctr">
               <a:buNone/>
             </a:pPr>
             <a:r>
@@ -8080,9 +7851,9 @@
                 <a:solidFill>
                   <a:srgbClr val="F1F5FB"/>
                 </a:solidFill>
-                <a:latin typeface="Segoe UI Semibold" pitchFamily="34" charset="0"/>
-                <a:ea typeface="Segoe UI Semibold" pitchFamily="34" charset="-122"/>
-                <a:cs typeface="Segoe UI Semibold" pitchFamily="34" charset="-120"/>
+                <a:latin typeface="Segoe UI Semibold" panose="020B0702040204020203" pitchFamily="34" charset="0"/>
+                <a:ea typeface="Segoe UI Semibold" panose="020B0702040204020203" pitchFamily="34" charset="-122"/>
+                <a:cs typeface="Segoe UI Semibold" panose="020B0702040204020203" pitchFamily="34" charset="-120"/>
               </a:rPr>
               <a:t>CSV</a:t>
             </a:r>
@@ -8105,13 +7876,12 @@
             <a:avLst/>
           </a:prstGeom>
           <a:noFill/>
-          <a:ln/>
-        </p:spPr>
-        <p:txBody>
-          <a:bodyPr wrap="square" lIns="0" tIns="0" rIns="0" bIns="0" rtlCol="0" anchor="ctr"/>
-          <a:lstStyle/>
-          <a:p>
-            <a:pPr algn="ctr" indent="0" marL="0">
+        </p:spPr>
+        <p:txBody>
+          <a:bodyPr wrap="square" lIns="0" tIns="0" rIns="0" bIns="0" rtlCol="0" anchor="ctr"/>
+          <a:lstStyle/>
+          <a:p>
+            <a:pPr marL="0" indent="0" algn="ctr">
               <a:buNone/>
             </a:pPr>
             <a:r>
@@ -8119,9 +7889,9 @@
                 <a:solidFill>
                   <a:srgbClr val="8C9BB8"/>
                 </a:solidFill>
-                <a:latin typeface="Segoe UI" pitchFamily="34" charset="0"/>
-                <a:ea typeface="Segoe UI" pitchFamily="34" charset="-122"/>
-                <a:cs typeface="Segoe UI" pitchFamily="34" charset="-120"/>
+                <a:latin typeface="Segoe UI" panose="020B0502040204020203" pitchFamily="34" charset="0"/>
+                <a:ea typeface="Segoe UI" panose="020B0502040204020203" pitchFamily="34" charset="-122"/>
+                <a:cs typeface="Segoe UI" panose="020B0502040204020203" pitchFamily="34" charset="-120"/>
               </a:rPr>
               <a:t>export</a:t>
             </a:r>
@@ -8167,13 +7937,12 @@
             <a:avLst/>
           </a:prstGeom>
           <a:noFill/>
-          <a:ln/>
-        </p:spPr>
-        <p:txBody>
-          <a:bodyPr wrap="square" lIns="0" tIns="0" rIns="0" bIns="0" rtlCol="0" anchor="ctr"/>
-          <a:lstStyle/>
-          <a:p>
-            <a:pPr indent="0" marL="0">
+        </p:spPr>
+        <p:txBody>
+          <a:bodyPr wrap="square" lIns="0" tIns="0" rIns="0" bIns="0" rtlCol="0" anchor="ctr"/>
+          <a:lstStyle/>
+          <a:p>
+            <a:pPr marL="0" indent="0">
               <a:buNone/>
             </a:pPr>
             <a:r>
@@ -8181,9 +7950,9 @@
                 <a:solidFill>
                   <a:srgbClr val="22D3EE"/>
                 </a:solidFill>
-                <a:latin typeface="Segoe UI Semibold" pitchFamily="34" charset="0"/>
-                <a:ea typeface="Segoe UI Semibold" pitchFamily="34" charset="-122"/>
-                <a:cs typeface="Segoe UI Semibold" pitchFamily="34" charset="-120"/>
+                <a:latin typeface="Segoe UI Semibold" panose="020B0702040204020203" pitchFamily="34" charset="0"/>
+                <a:ea typeface="Segoe UI Semibold" panose="020B0702040204020203" pitchFamily="34" charset="-122"/>
+                <a:cs typeface="Segoe UI Semibold" panose="020B0702040204020203" pitchFamily="34" charset="-120"/>
               </a:rPr>
               <a:t>kWh</a:t>
             </a:r>
@@ -8206,13 +7975,12 @@
             <a:avLst/>
           </a:prstGeom>
           <a:noFill/>
-          <a:ln/>
         </p:spPr>
         <p:txBody>
           <a:bodyPr wrap="square" lIns="0" tIns="0" rIns="0" bIns="0" rtlCol="0" anchor="t"/>
           <a:lstStyle/>
           <a:p>
-            <a:pPr indent="0" marL="0">
+            <a:pPr marL="0" indent="0">
               <a:buNone/>
             </a:pPr>
             <a:r>
@@ -8220,9 +7988,9 @@
                 <a:solidFill>
                   <a:srgbClr val="8C9BB8"/>
                 </a:solidFill>
-                <a:latin typeface="Segoe UI" pitchFamily="34" charset="0"/>
-                <a:ea typeface="Segoe UI" pitchFamily="34" charset="-122"/>
-                <a:cs typeface="Segoe UI" pitchFamily="34" charset="-120"/>
+                <a:latin typeface="Segoe UI" panose="020B0502040204020203" pitchFamily="34" charset="0"/>
+                <a:ea typeface="Segoe UI" panose="020B0502040204020203" pitchFamily="34" charset="-122"/>
+                <a:cs typeface="Segoe UI" panose="020B0502040204020203" pitchFamily="34" charset="-120"/>
               </a:rPr>
               <a:t>integrated from power</a:t>
             </a:r>
@@ -8268,13 +8036,12 @@
             <a:avLst/>
           </a:prstGeom>
           <a:noFill/>
-          <a:ln/>
-        </p:spPr>
-        <p:txBody>
-          <a:bodyPr wrap="square" lIns="0" tIns="0" rIns="0" bIns="0" rtlCol="0" anchor="ctr"/>
-          <a:lstStyle/>
-          <a:p>
-            <a:pPr indent="0" marL="0">
+        </p:spPr>
+        <p:txBody>
+          <a:bodyPr wrap="square" lIns="0" tIns="0" rIns="0" bIns="0" rtlCol="0" anchor="ctr"/>
+          <a:lstStyle/>
+          <a:p>
+            <a:pPr marL="0" indent="0">
               <a:buNone/>
             </a:pPr>
             <a:r>
@@ -8282,9 +8049,9 @@
                 <a:solidFill>
                   <a:srgbClr val="22D3EE"/>
                 </a:solidFill>
-                <a:latin typeface="Segoe UI Semibold" pitchFamily="34" charset="0"/>
-                <a:ea typeface="Segoe UI Semibold" pitchFamily="34" charset="-122"/>
-                <a:cs typeface="Segoe UI Semibold" pitchFamily="34" charset="-120"/>
+                <a:latin typeface="Segoe UI Semibold" panose="020B0702040204020203" pitchFamily="34" charset="0"/>
+                <a:ea typeface="Segoe UI Semibold" panose="020B0702040204020203" pitchFamily="34" charset="-122"/>
+                <a:cs typeface="Segoe UI Semibold" panose="020B0702040204020203" pitchFamily="34" charset="-120"/>
               </a:rPr>
               <a:t>6</a:t>
             </a:r>
@@ -8307,13 +8074,12 @@
             <a:avLst/>
           </a:prstGeom>
           <a:noFill/>
-          <a:ln/>
         </p:spPr>
         <p:txBody>
           <a:bodyPr wrap="square" lIns="0" tIns="0" rIns="0" bIns="0" rtlCol="0" anchor="t"/>
           <a:lstStyle/>
           <a:p>
-            <a:pPr indent="0" marL="0">
+            <a:pPr marL="0" indent="0">
               <a:buNone/>
             </a:pPr>
             <a:r>
@@ -8321,9 +8087,9 @@
                 <a:solidFill>
                   <a:srgbClr val="8C9BB8"/>
                 </a:solidFill>
-                <a:latin typeface="Segoe UI" pitchFamily="34" charset="0"/>
-                <a:ea typeface="Segoe UI" pitchFamily="34" charset="-122"/>
-                <a:cs typeface="Segoe UI" pitchFamily="34" charset="-120"/>
+                <a:latin typeface="Segoe UI" panose="020B0502040204020203" pitchFamily="34" charset="0"/>
+                <a:ea typeface="Segoe UI" panose="020B0502040204020203" pitchFamily="34" charset="-122"/>
+                <a:cs typeface="Segoe UI" panose="020B0502040204020203" pitchFamily="34" charset="-120"/>
               </a:rPr>
               <a:t>KPIs with targets</a:t>
             </a:r>
@@ -8369,13 +8135,12 @@
             <a:avLst/>
           </a:prstGeom>
           <a:noFill/>
-          <a:ln/>
-        </p:spPr>
-        <p:txBody>
-          <a:bodyPr wrap="square" lIns="0" tIns="0" rIns="0" bIns="0" rtlCol="0" anchor="ctr"/>
-          <a:lstStyle/>
-          <a:p>
-            <a:pPr indent="0" marL="0">
+        </p:spPr>
+        <p:txBody>
+          <a:bodyPr wrap="square" lIns="0" tIns="0" rIns="0" bIns="0" rtlCol="0" anchor="ctr"/>
+          <a:lstStyle/>
+          <a:p>
+            <a:pPr marL="0" indent="0">
               <a:buNone/>
             </a:pPr>
             <a:r>
@@ -8383,9 +8148,9 @@
                 <a:solidFill>
                   <a:srgbClr val="22D3EE"/>
                 </a:solidFill>
-                <a:latin typeface="Segoe UI Semibold" pitchFamily="34" charset="0"/>
-                <a:ea typeface="Segoe UI Semibold" pitchFamily="34" charset="-122"/>
-                <a:cs typeface="Segoe UI Semibold" pitchFamily="34" charset="-120"/>
+                <a:latin typeface="Segoe UI Semibold" panose="020B0702040204020203" pitchFamily="34" charset="0"/>
+                <a:ea typeface="Segoe UI Semibold" panose="020B0702040204020203" pitchFamily="34" charset="-122"/>
+                <a:cs typeface="Segoe UI Semibold" panose="020B0702040204020203" pitchFamily="34" charset="-120"/>
               </a:rPr>
               <a:t>5 + 5</a:t>
             </a:r>
@@ -8408,13 +8173,12 @@
             <a:avLst/>
           </a:prstGeom>
           <a:noFill/>
-          <a:ln/>
         </p:spPr>
         <p:txBody>
           <a:bodyPr wrap="square" lIns="0" tIns="0" rIns="0" bIns="0" rtlCol="0" anchor="t"/>
           <a:lstStyle/>
           <a:p>
-            <a:pPr indent="0" marL="0">
+            <a:pPr marL="0" indent="0">
               <a:buNone/>
             </a:pPr>
             <a:r>
@@ -8422,9 +8186,9 @@
                 <a:solidFill>
                   <a:srgbClr val="8C9BB8"/>
                 </a:solidFill>
-                <a:latin typeface="Segoe UI" pitchFamily="34" charset="0"/>
-                <a:ea typeface="Segoe UI" pitchFamily="34" charset="-122"/>
-                <a:cs typeface="Segoe UI" pitchFamily="34" charset="-120"/>
+                <a:latin typeface="Segoe UI" panose="020B0502040204020203" pitchFamily="34" charset="0"/>
+                <a:ea typeface="Segoe UI" panose="020B0502040204020203" pitchFamily="34" charset="-122"/>
+                <a:cs typeface="Segoe UI" panose="020B0502040204020203" pitchFamily="34" charset="-120"/>
               </a:rPr>
               <a:t>energy and performance reports</a:t>
             </a:r>
@@ -8474,13 +8238,12 @@
             <a:avLst/>
           </a:prstGeom>
           <a:noFill/>
-          <a:ln/>
-        </p:spPr>
-        <p:txBody>
-          <a:bodyPr wrap="square" lIns="0" tIns="0" rIns="0" bIns="0" rtlCol="0" anchor="ctr"/>
-          <a:lstStyle/>
-          <a:p>
-            <a:pPr indent="0" marL="0">
+        </p:spPr>
+        <p:txBody>
+          <a:bodyPr wrap="square" lIns="0" tIns="0" rIns="0" bIns="0" rtlCol="0" anchor="ctr"/>
+          <a:lstStyle/>
+          <a:p>
+            <a:pPr marL="0" indent="0">
               <a:buNone/>
             </a:pPr>
             <a:r>
@@ -8488,23 +8251,20 @@
                 <a:solidFill>
                   <a:srgbClr val="22D3EE"/>
                 </a:solidFill>
-                <a:latin typeface="Segoe UI" pitchFamily="34" charset="0"/>
-                <a:ea typeface="Segoe UI" pitchFamily="34" charset="-122"/>
-                <a:cs typeface="Segoe UI" pitchFamily="34" charset="-120"/>
+                <a:latin typeface="Segoe UI" panose="020B0502040204020203" pitchFamily="34" charset="0"/>
+                <a:ea typeface="Segoe UI" panose="020B0502040204020203" pitchFamily="34" charset="-122"/>
+                <a:cs typeface="Segoe UI" panose="020B0502040204020203" pitchFamily="34" charset="-120"/>
               </a:rPr>
               <a:t>LIVE  </a:t>
             </a:r>
-            <a:pPr indent="0" marL="0">
-              <a:buNone/>
-            </a:pPr>
             <a:r>
               <a:rPr lang="en-US" sz="1100" dirty="0">
                 <a:solidFill>
                   <a:srgbClr val="F1F5FB"/>
                 </a:solidFill>
-                <a:latin typeface="Segoe UI" pitchFamily="34" charset="0"/>
-                <a:ea typeface="Segoe UI" pitchFamily="34" charset="-122"/>
-                <a:cs typeface="Segoe UI" pitchFamily="34" charset="-120"/>
+                <a:latin typeface="Segoe UI" panose="020B0502040204020203" pitchFamily="34" charset="0"/>
+                <a:ea typeface="Segoe UI" panose="020B0502040204020203" pitchFamily="34" charset="-122"/>
+                <a:cs typeface="Segoe UI" panose="020B0502040204020203" pitchFamily="34" charset="-120"/>
               </a:rPr>
               <a:t>Analytics page</a:t>
             </a:r>
@@ -8522,12 +8282,13 @@
 
 <file path=ppt/slides/slide8.xml><?xml version="1.0" encoding="utf-8"?>
 <p:sld xmlns:a="http://schemas.openxmlformats.org/drawingml/2006/main" xmlns:r="http://schemas.openxmlformats.org/officeDocument/2006/relationships" xmlns:p="http://schemas.openxmlformats.org/presentationml/2006/main">
-  <p:cSld name="Slide 8">
+  <p:cSld>
     <p:bg>
       <p:bgPr>
         <a:solidFill>
           <a:srgbClr val="0A1020"/>
         </a:solidFill>
+        <a:effectLst/>
       </p:bgPr>
     </p:bg>
     <p:spTree>
@@ -8559,25 +8320,24 @@
             <a:avLst/>
           </a:prstGeom>
           <a:noFill/>
-          <a:ln/>
-        </p:spPr>
-        <p:txBody>
-          <a:bodyPr wrap="square" lIns="0" tIns="0" rIns="0" bIns="0" rtlCol="0" anchor="ctr"/>
-          <a:lstStyle/>
-          <a:p>
-            <a:pPr indent="0" marL="0">
-              <a:buNone/>
-            </a:pPr>
-            <a:r>
-              <a:rPr lang="en-US" sz="1100" spc="400" kern="0" dirty="0">
+        </p:spPr>
+        <p:txBody>
+          <a:bodyPr wrap="square" lIns="0" tIns="0" rIns="0" bIns="0" rtlCol="0" anchor="ctr"/>
+          <a:lstStyle/>
+          <a:p>
+            <a:pPr marL="0" indent="0">
+              <a:buNone/>
+            </a:pPr>
+            <a:r>
+              <a:rPr lang="en-US" sz="1100" kern="0" spc="400" dirty="0">
                 <a:solidFill>
                   <a:srgbClr val="22D3EE"/>
                 </a:solidFill>
-                <a:latin typeface="Segoe UI Semibold" pitchFamily="34" charset="0"/>
-                <a:ea typeface="Segoe UI Semibold" pitchFamily="34" charset="-122"/>
-                <a:cs typeface="Segoe UI Semibold" pitchFamily="34" charset="-120"/>
-              </a:rPr>
-              <a:t>08 · NEMAL · SECURITY</a:t>
+                <a:latin typeface="Segoe UI Semibold" panose="020B0702040204020203" pitchFamily="34" charset="0"/>
+                <a:ea typeface="Segoe UI Semibold" panose="020B0702040204020203" pitchFamily="34" charset="-122"/>
+                <a:cs typeface="Segoe UI Semibold" panose="020B0702040204020203" pitchFamily="34" charset="-120"/>
+              </a:rPr>
+              <a:t>08 · SECURITY</a:t>
             </a:r>
             <a:endParaRPr lang="en-US" sz="1100" dirty="0"/>
           </a:p>
@@ -8598,13 +8358,12 @@
             <a:avLst/>
           </a:prstGeom>
           <a:noFill/>
-          <a:ln/>
-        </p:spPr>
-        <p:txBody>
-          <a:bodyPr wrap="square" lIns="0" tIns="0" rIns="0" bIns="0" rtlCol="0" anchor="ctr"/>
-          <a:lstStyle/>
-          <a:p>
-            <a:pPr indent="0" marL="0">
+        </p:spPr>
+        <p:txBody>
+          <a:bodyPr wrap="square" lIns="0" tIns="0" rIns="0" bIns="0" rtlCol="0" anchor="ctr"/>
+          <a:lstStyle/>
+          <a:p>
+            <a:pPr marL="0" indent="0">
               <a:buNone/>
             </a:pPr>
             <a:r>
@@ -8612,9 +8371,9 @@
                 <a:solidFill>
                   <a:srgbClr val="F1F5FB"/>
                 </a:solidFill>
-                <a:latin typeface="Segoe UI Semibold" pitchFamily="34" charset="0"/>
-                <a:ea typeface="Segoe UI Semibold" pitchFamily="34" charset="-122"/>
-                <a:cs typeface="Segoe UI Semibold" pitchFamily="34" charset="-120"/>
+                <a:latin typeface="Segoe UI Semibold" panose="020B0702040204020203" pitchFamily="34" charset="0"/>
+                <a:ea typeface="Segoe UI Semibold" panose="020B0702040204020203" pitchFamily="34" charset="-122"/>
+                <a:cs typeface="Segoe UI Semibold" panose="020B0702040204020203" pitchFamily="34" charset="-120"/>
               </a:rPr>
               <a:t>Five roles, enforced at the gateway</a:t>
             </a:r>
@@ -8637,13 +8396,12 @@
             <a:avLst/>
           </a:prstGeom>
           <a:noFill/>
-          <a:ln/>
-        </p:spPr>
-        <p:txBody>
-          <a:bodyPr wrap="square" lIns="0" tIns="0" rIns="0" bIns="0" rtlCol="0" anchor="ctr"/>
-          <a:lstStyle/>
-          <a:p>
-            <a:pPr indent="0" marL="0">
+        </p:spPr>
+        <p:txBody>
+          <a:bodyPr wrap="square" lIns="0" tIns="0" rIns="0" bIns="0" rtlCol="0" anchor="ctr"/>
+          <a:lstStyle/>
+          <a:p>
+            <a:pPr marL="0" indent="0">
               <a:buNone/>
             </a:pPr>
             <a:r>
@@ -8651,9 +8409,9 @@
                 <a:solidFill>
                   <a:srgbClr val="8C9BB8"/>
                 </a:solidFill>
-                <a:latin typeface="Segoe UI" pitchFamily="34" charset="0"/>
-                <a:ea typeface="Segoe UI" pitchFamily="34" charset="-122"/>
-                <a:cs typeface="Segoe UI" pitchFamily="34" charset="-120"/>
+                <a:latin typeface="Segoe UI" panose="020B0502040204020203" pitchFamily="34" charset="0"/>
+                <a:ea typeface="Segoe UI" panose="020B0502040204020203" pitchFamily="34" charset="-122"/>
+                <a:cs typeface="Segoe UI" panose="020B0502040204020203" pitchFamily="34" charset="-120"/>
               </a:rPr>
               <a:t>EC8208 Software Architecture  ·  University of Ruhuna</a:t>
             </a:r>
@@ -8676,13 +8434,12 @@
             <a:avLst/>
           </a:prstGeom>
           <a:noFill/>
-          <a:ln/>
-        </p:spPr>
-        <p:txBody>
-          <a:bodyPr wrap="square" lIns="0" tIns="0" rIns="0" bIns="0" rtlCol="0" anchor="ctr"/>
-          <a:lstStyle/>
-          <a:p>
-            <a:pPr algn="r" indent="0" marL="0">
+        </p:spPr>
+        <p:txBody>
+          <a:bodyPr wrap="square" lIns="0" tIns="0" rIns="0" bIns="0" rtlCol="0" anchor="ctr"/>
+          <a:lstStyle/>
+          <a:p>
+            <a:pPr marL="0" indent="0" algn="r">
               <a:buNone/>
             </a:pPr>
             <a:r>
@@ -8690,9 +8447,9 @@
                 <a:solidFill>
                   <a:srgbClr val="8C9BB8"/>
                 </a:solidFill>
-                <a:latin typeface="Segoe UI" pitchFamily="34" charset="0"/>
-                <a:ea typeface="Segoe UI" pitchFamily="34" charset="-122"/>
-                <a:cs typeface="Segoe UI" pitchFamily="34" charset="-120"/>
+                <a:latin typeface="Segoe UI" panose="020B0502040204020203" pitchFamily="34" charset="0"/>
+                <a:ea typeface="Segoe UI" panose="020B0502040204020203" pitchFamily="34" charset="-122"/>
+                <a:cs typeface="Segoe UI" panose="020B0502040204020203" pitchFamily="34" charset="-120"/>
               </a:rPr>
               <a:t>08  ·  4:16–4:38</a:t>
             </a:r>
@@ -8742,13 +8499,12 @@
             <a:avLst/>
           </a:prstGeom>
           <a:noFill/>
-          <a:ln/>
-        </p:spPr>
-        <p:txBody>
-          <a:bodyPr wrap="square" lIns="0" tIns="0" rIns="0" bIns="0" rtlCol="0" anchor="ctr"/>
-          <a:lstStyle/>
-          <a:p>
-            <a:pPr indent="0" marL="0">
+        </p:spPr>
+        <p:txBody>
+          <a:bodyPr wrap="square" lIns="0" tIns="0" rIns="0" bIns="0" rtlCol="0" anchor="ctr"/>
+          <a:lstStyle/>
+          <a:p>
+            <a:pPr marL="0" indent="0">
               <a:buNone/>
             </a:pPr>
             <a:r>
@@ -8756,9 +8512,9 @@
                 <a:solidFill>
                   <a:srgbClr val="22D3EE"/>
                 </a:solidFill>
-                <a:latin typeface="Segoe UI Semibold" pitchFamily="34" charset="0"/>
-                <a:ea typeface="Segoe UI Semibold" pitchFamily="34" charset="-122"/>
-                <a:cs typeface="Segoe UI Semibold" pitchFamily="34" charset="-120"/>
+                <a:latin typeface="Segoe UI Semibold" panose="020B0702040204020203" pitchFamily="34" charset="0"/>
+                <a:ea typeface="Segoe UI Semibold" panose="020B0702040204020203" pitchFamily="34" charset="-122"/>
+                <a:cs typeface="Segoe UI Semibold" panose="020B0702040204020203" pitchFamily="34" charset="-120"/>
               </a:rPr>
               <a:t>Administrator</a:t>
             </a:r>
@@ -8781,13 +8537,12 @@
             <a:avLst/>
           </a:prstGeom>
           <a:noFill/>
-          <a:ln/>
-        </p:spPr>
-        <p:txBody>
-          <a:bodyPr wrap="square" lIns="0" tIns="0" rIns="0" bIns="0" rtlCol="0" anchor="ctr"/>
-          <a:lstStyle/>
-          <a:p>
-            <a:pPr indent="0" marL="0">
+        </p:spPr>
+        <p:txBody>
+          <a:bodyPr wrap="square" lIns="0" tIns="0" rIns="0" bIns="0" rtlCol="0" anchor="ctr"/>
+          <a:lstStyle/>
+          <a:p>
+            <a:pPr marL="0" indent="0">
               <a:buNone/>
             </a:pPr>
             <a:r>
@@ -8795,9 +8550,9 @@
                 <a:solidFill>
                   <a:srgbClr val="F1F5FB"/>
                 </a:solidFill>
-                <a:latin typeface="Segoe UI" pitchFamily="34" charset="0"/>
-                <a:ea typeface="Segoe UI" pitchFamily="34" charset="-122"/>
-                <a:cs typeface="Segoe UI" pitchFamily="34" charset="-120"/>
+                <a:latin typeface="Segoe UI" panose="020B0502040204020203" pitchFamily="34" charset="0"/>
+                <a:ea typeface="Segoe UI" panose="020B0502040204020203" pitchFamily="34" charset="-122"/>
+                <a:cs typeface="Segoe UI" panose="020B0502040204020203" pitchFamily="34" charset="-120"/>
               </a:rPr>
               <a:t>Everything, users and audit log</a:t>
             </a:r>
@@ -8847,13 +8602,12 @@
             <a:avLst/>
           </a:prstGeom>
           <a:noFill/>
-          <a:ln/>
-        </p:spPr>
-        <p:txBody>
-          <a:bodyPr wrap="square" lIns="0" tIns="0" rIns="0" bIns="0" rtlCol="0" anchor="ctr"/>
-          <a:lstStyle/>
-          <a:p>
-            <a:pPr indent="0" marL="0">
+        </p:spPr>
+        <p:txBody>
+          <a:bodyPr wrap="square" lIns="0" tIns="0" rIns="0" bIns="0" rtlCol="0" anchor="ctr"/>
+          <a:lstStyle/>
+          <a:p>
+            <a:pPr marL="0" indent="0">
               <a:buNone/>
             </a:pPr>
             <a:r>
@@ -8861,9 +8615,9 @@
                 <a:solidFill>
                   <a:srgbClr val="22D3EE"/>
                 </a:solidFill>
-                <a:latin typeface="Segoe UI Semibold" pitchFamily="34" charset="0"/>
-                <a:ea typeface="Segoe UI Semibold" pitchFamily="34" charset="-122"/>
-                <a:cs typeface="Segoe UI Semibold" pitchFamily="34" charset="-120"/>
+                <a:latin typeface="Segoe UI Semibold" panose="020B0702040204020203" pitchFamily="34" charset="0"/>
+                <a:ea typeface="Segoe UI Semibold" panose="020B0702040204020203" pitchFamily="34" charset="-122"/>
+                <a:cs typeface="Segoe UI Semibold" panose="020B0702040204020203" pitchFamily="34" charset="-120"/>
               </a:rPr>
               <a:t>Operations Manager</a:t>
             </a:r>
@@ -8886,13 +8640,12 @@
             <a:avLst/>
           </a:prstGeom>
           <a:noFill/>
-          <a:ln/>
-        </p:spPr>
-        <p:txBody>
-          <a:bodyPr wrap="square" lIns="0" tIns="0" rIns="0" bIns="0" rtlCol="0" anchor="ctr"/>
-          <a:lstStyle/>
-          <a:p>
-            <a:pPr indent="0" marL="0">
+        </p:spPr>
+        <p:txBody>
+          <a:bodyPr wrap="square" lIns="0" tIns="0" rIns="0" bIns="0" rtlCol="0" anchor="ctr"/>
+          <a:lstStyle/>
+          <a:p>
+            <a:pPr marL="0" indent="0">
               <a:buNone/>
             </a:pPr>
             <a:r>
@@ -8900,9 +8653,9 @@
                 <a:solidFill>
                   <a:srgbClr val="F1F5FB"/>
                 </a:solidFill>
-                <a:latin typeface="Segoe UI" pitchFamily="34" charset="0"/>
-                <a:ea typeface="Segoe UI" pitchFamily="34" charset="-122"/>
-                <a:cs typeface="Segoe UI" pitchFamily="34" charset="-120"/>
+                <a:latin typeface="Segoe UI" panose="020B0502040204020203" pitchFamily="34" charset="0"/>
+                <a:ea typeface="Segoe UI" panose="020B0502040204020203" pitchFamily="34" charset="-122"/>
+                <a:cs typeface="Segoe UI" panose="020B0502040204020203" pitchFamily="34" charset="-120"/>
               </a:rPr>
               <a:t>Assets, rules, work orders, reports</a:t>
             </a:r>
@@ -8952,13 +8705,12 @@
             <a:avLst/>
           </a:prstGeom>
           <a:noFill/>
-          <a:ln/>
-        </p:spPr>
-        <p:txBody>
-          <a:bodyPr wrap="square" lIns="0" tIns="0" rIns="0" bIns="0" rtlCol="0" anchor="ctr"/>
-          <a:lstStyle/>
-          <a:p>
-            <a:pPr indent="0" marL="0">
+        </p:spPr>
+        <p:txBody>
+          <a:bodyPr wrap="square" lIns="0" tIns="0" rIns="0" bIns="0" rtlCol="0" anchor="ctr"/>
+          <a:lstStyle/>
+          <a:p>
+            <a:pPr marL="0" indent="0">
               <a:buNone/>
             </a:pPr>
             <a:r>
@@ -8966,9 +8718,9 @@
                 <a:solidFill>
                   <a:srgbClr val="22D3EE"/>
                 </a:solidFill>
-                <a:latin typeface="Segoe UI Semibold" pitchFamily="34" charset="0"/>
-                <a:ea typeface="Segoe UI Semibold" pitchFamily="34" charset="-122"/>
-                <a:cs typeface="Segoe UI Semibold" pitchFamily="34" charset="-120"/>
+                <a:latin typeface="Segoe UI Semibold" panose="020B0702040204020203" pitchFamily="34" charset="0"/>
+                <a:ea typeface="Segoe UI Semibold" panose="020B0702040204020203" pitchFamily="34" charset="-122"/>
+                <a:cs typeface="Segoe UI Semibold" panose="020B0702040204020203" pitchFamily="34" charset="-120"/>
               </a:rPr>
               <a:t>Plant Operator</a:t>
             </a:r>
@@ -8991,13 +8743,12 @@
             <a:avLst/>
           </a:prstGeom>
           <a:noFill/>
-          <a:ln/>
-        </p:spPr>
-        <p:txBody>
-          <a:bodyPr wrap="square" lIns="0" tIns="0" rIns="0" bIns="0" rtlCol="0" anchor="ctr"/>
-          <a:lstStyle/>
-          <a:p>
-            <a:pPr indent="0" marL="0">
+        </p:spPr>
+        <p:txBody>
+          <a:bodyPr wrap="square" lIns="0" tIns="0" rIns="0" bIns="0" rtlCol="0" anchor="ctr"/>
+          <a:lstStyle/>
+          <a:p>
+            <a:pPr marL="0" indent="0">
               <a:buNone/>
             </a:pPr>
             <a:r>
@@ -9005,9 +8756,9 @@
                 <a:solidFill>
                   <a:srgbClr val="F1F5FB"/>
                 </a:solidFill>
-                <a:latin typeface="Segoe UI" pitchFamily="34" charset="0"/>
-                <a:ea typeface="Segoe UI" pitchFamily="34" charset="-122"/>
-                <a:cs typeface="Segoe UI" pitchFamily="34" charset="-120"/>
+                <a:latin typeface="Segoe UI" panose="020B0502040204020203" pitchFamily="34" charset="0"/>
+                <a:ea typeface="Segoe UI" panose="020B0502040204020203" pitchFamily="34" charset="-122"/>
+                <a:cs typeface="Segoe UI" panose="020B0502040204020203" pitchFamily="34" charset="-120"/>
               </a:rPr>
               <a:t>Monitor and handle alerts</a:t>
             </a:r>
@@ -9057,13 +8808,12 @@
             <a:avLst/>
           </a:prstGeom>
           <a:noFill/>
-          <a:ln/>
-        </p:spPr>
-        <p:txBody>
-          <a:bodyPr wrap="square" lIns="0" tIns="0" rIns="0" bIns="0" rtlCol="0" anchor="ctr"/>
-          <a:lstStyle/>
-          <a:p>
-            <a:pPr indent="0" marL="0">
+        </p:spPr>
+        <p:txBody>
+          <a:bodyPr wrap="square" lIns="0" tIns="0" rIns="0" bIns="0" rtlCol="0" anchor="ctr"/>
+          <a:lstStyle/>
+          <a:p>
+            <a:pPr marL="0" indent="0">
               <a:buNone/>
             </a:pPr>
             <a:r>
@@ -9071,9 +8821,9 @@
                 <a:solidFill>
                   <a:srgbClr val="22D3EE"/>
                 </a:solidFill>
-                <a:latin typeface="Segoe UI Semibold" pitchFamily="34" charset="0"/>
-                <a:ea typeface="Segoe UI Semibold" pitchFamily="34" charset="-122"/>
-                <a:cs typeface="Segoe UI Semibold" pitchFamily="34" charset="-120"/>
+                <a:latin typeface="Segoe UI Semibold" panose="020B0702040204020203" pitchFamily="34" charset="0"/>
+                <a:ea typeface="Segoe UI Semibold" panose="020B0702040204020203" pitchFamily="34" charset="-122"/>
+                <a:cs typeface="Segoe UI Semibold" panose="020B0702040204020203" pitchFamily="34" charset="-120"/>
               </a:rPr>
               <a:t>Maintenance Engineer</a:t>
             </a:r>
@@ -9096,13 +8846,12 @@
             <a:avLst/>
           </a:prstGeom>
           <a:noFill/>
-          <a:ln/>
-        </p:spPr>
-        <p:txBody>
-          <a:bodyPr wrap="square" lIns="0" tIns="0" rIns="0" bIns="0" rtlCol="0" anchor="ctr"/>
-          <a:lstStyle/>
-          <a:p>
-            <a:pPr indent="0" marL="0">
+        </p:spPr>
+        <p:txBody>
+          <a:bodyPr wrap="square" lIns="0" tIns="0" rIns="0" bIns="0" rtlCol="0" anchor="ctr"/>
+          <a:lstStyle/>
+          <a:p>
+            <a:pPr marL="0" indent="0">
               <a:buNone/>
             </a:pPr>
             <a:r>
@@ -9110,9 +8859,9 @@
                 <a:solidFill>
                   <a:srgbClr val="F1F5FB"/>
                 </a:solidFill>
-                <a:latin typeface="Segoe UI" pitchFamily="34" charset="0"/>
-                <a:ea typeface="Segoe UI" pitchFamily="34" charset="-122"/>
-                <a:cs typeface="Segoe UI" pitchFamily="34" charset="-120"/>
+                <a:latin typeface="Segoe UI" panose="020B0502040204020203" pitchFamily="34" charset="0"/>
+                <a:ea typeface="Segoe UI" panose="020B0502040204020203" pitchFamily="34" charset="-122"/>
+                <a:cs typeface="Segoe UI" panose="020B0502040204020203" pitchFamily="34" charset="-120"/>
               </a:rPr>
               <a:t>Assign and complete work orders</a:t>
             </a:r>
@@ -9162,13 +8911,12 @@
             <a:avLst/>
           </a:prstGeom>
           <a:noFill/>
-          <a:ln/>
-        </p:spPr>
-        <p:txBody>
-          <a:bodyPr wrap="square" lIns="0" tIns="0" rIns="0" bIns="0" rtlCol="0" anchor="ctr"/>
-          <a:lstStyle/>
-          <a:p>
-            <a:pPr indent="0" marL="0">
+        </p:spPr>
+        <p:txBody>
+          <a:bodyPr wrap="square" lIns="0" tIns="0" rIns="0" bIns="0" rtlCol="0" anchor="ctr"/>
+          <a:lstStyle/>
+          <a:p>
+            <a:pPr marL="0" indent="0">
               <a:buNone/>
             </a:pPr>
             <a:r>
@@ -9176,9 +8924,9 @@
                 <a:solidFill>
                   <a:srgbClr val="22D3EE"/>
                 </a:solidFill>
-                <a:latin typeface="Segoe UI Semibold" pitchFamily="34" charset="0"/>
-                <a:ea typeface="Segoe UI Semibold" pitchFamily="34" charset="-122"/>
-                <a:cs typeface="Segoe UI Semibold" pitchFamily="34" charset="-120"/>
+                <a:latin typeface="Segoe UI Semibold" panose="020B0702040204020203" pitchFamily="34" charset="0"/>
+                <a:ea typeface="Segoe UI Semibold" panose="020B0702040204020203" pitchFamily="34" charset="-122"/>
+                <a:cs typeface="Segoe UI Semibold" panose="020B0702040204020203" pitchFamily="34" charset="-120"/>
               </a:rPr>
               <a:t>Executive</a:t>
             </a:r>
@@ -9201,13 +8949,12 @@
             <a:avLst/>
           </a:prstGeom>
           <a:noFill/>
-          <a:ln/>
-        </p:spPr>
-        <p:txBody>
-          <a:bodyPr wrap="square" lIns="0" tIns="0" rIns="0" bIns="0" rtlCol="0" anchor="ctr"/>
-          <a:lstStyle/>
-          <a:p>
-            <a:pPr indent="0" marL="0">
+        </p:spPr>
+        <p:txBody>
+          <a:bodyPr wrap="square" lIns="0" tIns="0" rIns="0" bIns="0" rtlCol="0" anchor="ctr"/>
+          <a:lstStyle/>
+          <a:p>
+            <a:pPr marL="0" indent="0">
               <a:buNone/>
             </a:pPr>
             <a:r>
@@ -9215,9 +8962,9 @@
                 <a:solidFill>
                   <a:srgbClr val="F1F5FB"/>
                 </a:solidFill>
-                <a:latin typeface="Segoe UI" pitchFamily="34" charset="0"/>
-                <a:ea typeface="Segoe UI" pitchFamily="34" charset="-122"/>
-                <a:cs typeface="Segoe UI" pitchFamily="34" charset="-120"/>
+                <a:latin typeface="Segoe UI" panose="020B0502040204020203" pitchFamily="34" charset="0"/>
+                <a:ea typeface="Segoe UI" panose="020B0502040204020203" pitchFamily="34" charset="-122"/>
+                <a:cs typeface="Segoe UI" panose="020B0502040204020203" pitchFamily="34" charset="-120"/>
               </a:rPr>
               <a:t>Read-only dashboards and reports</a:t>
             </a:r>
@@ -9267,13 +9014,12 @@
             <a:avLst/>
           </a:prstGeom>
           <a:noFill/>
-          <a:ln/>
-        </p:spPr>
-        <p:txBody>
-          <a:bodyPr wrap="square" lIns="0" tIns="0" rIns="0" bIns="0" rtlCol="0" anchor="ctr"/>
-          <a:lstStyle/>
-          <a:p>
-            <a:pPr indent="0" marL="0">
+        </p:spPr>
+        <p:txBody>
+          <a:bodyPr wrap="square" lIns="0" tIns="0" rIns="0" bIns="0" rtlCol="0" anchor="ctr"/>
+          <a:lstStyle/>
+          <a:p>
+            <a:pPr marL="0" indent="0">
               <a:buNone/>
             </a:pPr>
             <a:r>
@@ -9281,23 +9027,20 @@
                 <a:solidFill>
                   <a:srgbClr val="22D3EE"/>
                 </a:solidFill>
-                <a:latin typeface="Segoe UI" pitchFamily="34" charset="0"/>
-                <a:ea typeface="Segoe UI" pitchFamily="34" charset="-122"/>
-                <a:cs typeface="Segoe UI" pitchFamily="34" charset="-120"/>
+                <a:latin typeface="Segoe UI" panose="020B0502040204020203" pitchFamily="34" charset="0"/>
+                <a:ea typeface="Segoe UI" panose="020B0502040204020203" pitchFamily="34" charset="-122"/>
+                <a:cs typeface="Segoe UI" panose="020B0502040204020203" pitchFamily="34" charset="-120"/>
               </a:rPr>
               <a:t>LIVE  </a:t>
             </a:r>
-            <a:pPr indent="0" marL="0">
-              <a:buNone/>
-            </a:pPr>
             <a:r>
               <a:rPr lang="en-US" sz="1100" dirty="0">
                 <a:solidFill>
                   <a:srgbClr val="F1F5FB"/>
                 </a:solidFill>
-                <a:latin typeface="Segoe UI" pitchFamily="34" charset="0"/>
-                <a:ea typeface="Segoe UI" pitchFamily="34" charset="-122"/>
-                <a:cs typeface="Segoe UI" pitchFamily="34" charset="-120"/>
+                <a:latin typeface="Segoe UI" panose="020B0502040204020203" pitchFamily="34" charset="0"/>
+                <a:ea typeface="Segoe UI" panose="020B0502040204020203" pitchFamily="34" charset="-122"/>
+                <a:cs typeface="Segoe UI" panose="020B0502040204020203" pitchFamily="34" charset="-120"/>
               </a:rPr>
               <a:t>executive sign-in, read-only</a:t>
             </a:r>
@@ -9315,12 +9058,13 @@
 
 <file path=ppt/slides/slide9.xml><?xml version="1.0" encoding="utf-8"?>
 <p:sld xmlns:a="http://schemas.openxmlformats.org/drawingml/2006/main" xmlns:r="http://schemas.openxmlformats.org/officeDocument/2006/relationships" xmlns:p="http://schemas.openxmlformats.org/presentationml/2006/main">
-  <p:cSld name="Slide 9">
+  <p:cSld>
     <p:bg>
       <p:bgPr>
         <a:solidFill>
           <a:srgbClr val="0A1020"/>
         </a:solidFill>
+        <a:effectLst/>
       </p:bgPr>
     </p:bg>
     <p:spTree>
@@ -9352,25 +9096,24 @@
             <a:avLst/>
           </a:prstGeom>
           <a:noFill/>
-          <a:ln/>
-        </p:spPr>
-        <p:txBody>
-          <a:bodyPr wrap="square" lIns="0" tIns="0" rIns="0" bIns="0" rtlCol="0" anchor="ctr"/>
-          <a:lstStyle/>
-          <a:p>
-            <a:pPr indent="0" marL="0">
-              <a:buNone/>
-            </a:pPr>
-            <a:r>
-              <a:rPr lang="en-US" sz="1100" spc="400" kern="0" dirty="0">
+        </p:spPr>
+        <p:txBody>
+          <a:bodyPr wrap="square" lIns="0" tIns="0" rIns="0" bIns="0" rtlCol="0" anchor="ctr"/>
+          <a:lstStyle/>
+          <a:p>
+            <a:pPr marL="0" indent="0">
+              <a:buNone/>
+            </a:pPr>
+            <a:r>
+              <a:rPr lang="en-US" sz="1100" kern="0" spc="400" dirty="0">
                 <a:solidFill>
                   <a:srgbClr val="22D3EE"/>
                 </a:solidFill>
-                <a:latin typeface="Segoe UI Semibold" pitchFamily="34" charset="0"/>
-                <a:ea typeface="Segoe UI Semibold" pitchFamily="34" charset="-122"/>
-                <a:cs typeface="Segoe UI Semibold" pitchFamily="34" charset="-120"/>
-              </a:rPr>
-              <a:t>09 · CHARITH · OPERATIONS AND QUALITY</a:t>
+                <a:latin typeface="Segoe UI Semibold" panose="020B0702040204020203" pitchFamily="34" charset="0"/>
+                <a:ea typeface="Segoe UI Semibold" panose="020B0702040204020203" pitchFamily="34" charset="-122"/>
+                <a:cs typeface="Segoe UI Semibold" panose="020B0702040204020203" pitchFamily="34" charset="-120"/>
+              </a:rPr>
+              <a:t>09 · OPERATIONS AND QUALITY</a:t>
             </a:r>
             <a:endParaRPr lang="en-US" sz="1100" dirty="0"/>
           </a:p>
@@ -9391,13 +9134,12 @@
             <a:avLst/>
           </a:prstGeom>
           <a:noFill/>
-          <a:ln/>
-        </p:spPr>
-        <p:txBody>
-          <a:bodyPr wrap="square" lIns="0" tIns="0" rIns="0" bIns="0" rtlCol="0" anchor="ctr"/>
-          <a:lstStyle/>
-          <a:p>
-            <a:pPr indent="0" marL="0">
+        </p:spPr>
+        <p:txBody>
+          <a:bodyPr wrap="square" lIns="0" tIns="0" rIns="0" bIns="0" rtlCol="0" anchor="ctr"/>
+          <a:lstStyle/>
+          <a:p>
+            <a:pPr marL="0" indent="0">
               <a:buNone/>
             </a:pPr>
             <a:r>
@@ -9405,9 +9147,9 @@
                 <a:solidFill>
                   <a:srgbClr val="F1F5FB"/>
                 </a:solidFill>
-                <a:latin typeface="Segoe UI Semibold" pitchFamily="34" charset="0"/>
-                <a:ea typeface="Segoe UI Semibold" pitchFamily="34" charset="-122"/>
-                <a:cs typeface="Segoe UI Semibold" pitchFamily="34" charset="-120"/>
+                <a:latin typeface="Segoe UI Semibold" panose="020B0702040204020203" pitchFamily="34" charset="0"/>
+                <a:ea typeface="Segoe UI Semibold" panose="020B0702040204020203" pitchFamily="34" charset="-122"/>
+                <a:cs typeface="Segoe UI Semibold" panose="020B0702040204020203" pitchFamily="34" charset="-120"/>
               </a:rPr>
               <a:t>Observable, tested, one command to run</a:t>
             </a:r>
@@ -9430,13 +9172,12 @@
             <a:avLst/>
           </a:prstGeom>
           <a:noFill/>
-          <a:ln/>
-        </p:spPr>
-        <p:txBody>
-          <a:bodyPr wrap="square" lIns="0" tIns="0" rIns="0" bIns="0" rtlCol="0" anchor="ctr"/>
-          <a:lstStyle/>
-          <a:p>
-            <a:pPr indent="0" marL="0">
+        </p:spPr>
+        <p:txBody>
+          <a:bodyPr wrap="square" lIns="0" tIns="0" rIns="0" bIns="0" rtlCol="0" anchor="ctr"/>
+          <a:lstStyle/>
+          <a:p>
+            <a:pPr marL="0" indent="0">
               <a:buNone/>
             </a:pPr>
             <a:r>
@@ -9444,9 +9185,9 @@
                 <a:solidFill>
                   <a:srgbClr val="8C9BB8"/>
                 </a:solidFill>
-                <a:latin typeface="Segoe UI" pitchFamily="34" charset="0"/>
-                <a:ea typeface="Segoe UI" pitchFamily="34" charset="-122"/>
-                <a:cs typeface="Segoe UI" pitchFamily="34" charset="-120"/>
+                <a:latin typeface="Segoe UI" panose="020B0502040204020203" pitchFamily="34" charset="0"/>
+                <a:ea typeface="Segoe UI" panose="020B0502040204020203" pitchFamily="34" charset="-122"/>
+                <a:cs typeface="Segoe UI" panose="020B0502040204020203" pitchFamily="34" charset="-120"/>
               </a:rPr>
               <a:t>EC8208 Software Architecture  ·  University of Ruhuna</a:t>
             </a:r>
@@ -9469,13 +9210,12 @@
             <a:avLst/>
           </a:prstGeom>
           <a:noFill/>
-          <a:ln/>
-        </p:spPr>
-        <p:txBody>
-          <a:bodyPr wrap="square" lIns="0" tIns="0" rIns="0" bIns="0" rtlCol="0" anchor="ctr"/>
-          <a:lstStyle/>
-          <a:p>
-            <a:pPr algn="r" indent="0" marL="0">
+        </p:spPr>
+        <p:txBody>
+          <a:bodyPr wrap="square" lIns="0" tIns="0" rIns="0" bIns="0" rtlCol="0" anchor="ctr"/>
+          <a:lstStyle/>
+          <a:p>
+            <a:pPr marL="0" indent="0" algn="r">
               <a:buNone/>
             </a:pPr>
             <a:r>
@@ -9483,9 +9223,9 @@
                 <a:solidFill>
                   <a:srgbClr val="8C9BB8"/>
                 </a:solidFill>
-                <a:latin typeface="Segoe UI" pitchFamily="34" charset="0"/>
-                <a:ea typeface="Segoe UI" pitchFamily="34" charset="-122"/>
-                <a:cs typeface="Segoe UI" pitchFamily="34" charset="-120"/>
+                <a:latin typeface="Segoe UI" panose="020B0502040204020203" pitchFamily="34" charset="0"/>
+                <a:ea typeface="Segoe UI" panose="020B0502040204020203" pitchFamily="34" charset="-122"/>
+                <a:cs typeface="Segoe UI" panose="020B0502040204020203" pitchFamily="34" charset="-120"/>
               </a:rPr>
               <a:t>09  ·  4:38–4:54</a:t>
             </a:r>
@@ -9531,13 +9271,12 @@
             <a:avLst/>
           </a:prstGeom>
           <a:noFill/>
-          <a:ln/>
-        </p:spPr>
-        <p:txBody>
-          <a:bodyPr wrap="square" lIns="0" tIns="0" rIns="0" bIns="0" rtlCol="0" anchor="ctr"/>
-          <a:lstStyle/>
-          <a:p>
-            <a:pPr indent="0" marL="0">
+        </p:spPr>
+        <p:txBody>
+          <a:bodyPr wrap="square" lIns="0" tIns="0" rIns="0" bIns="0" rtlCol="0" anchor="ctr"/>
+          <a:lstStyle/>
+          <a:p>
+            <a:pPr marL="0" indent="0">
               <a:buNone/>
             </a:pPr>
             <a:r>
@@ -9545,9 +9284,9 @@
                 <a:solidFill>
                   <a:srgbClr val="22D3EE"/>
                 </a:solidFill>
-                <a:latin typeface="Segoe UI Semibold" pitchFamily="34" charset="0"/>
-                <a:ea typeface="Segoe UI Semibold" pitchFamily="34" charset="-122"/>
-                <a:cs typeface="Segoe UI Semibold" pitchFamily="34" charset="-120"/>
+                <a:latin typeface="Segoe UI Semibold" panose="020B0702040204020203" pitchFamily="34" charset="0"/>
+                <a:ea typeface="Segoe UI Semibold" panose="020B0702040204020203" pitchFamily="34" charset="-122"/>
+                <a:cs typeface="Segoe UI Semibold" panose="020B0702040204020203" pitchFamily="34" charset="-120"/>
               </a:rPr>
               <a:t>60</a:t>
             </a:r>
@@ -9570,13 +9309,12 @@
             <a:avLst/>
           </a:prstGeom>
           <a:noFill/>
-          <a:ln/>
-        </p:spPr>
-        <p:txBody>
-          <a:bodyPr wrap="square" lIns="0" tIns="0" rIns="0" bIns="0" rtlCol="0" anchor="ctr"/>
-          <a:lstStyle/>
-          <a:p>
-            <a:pPr indent="0" marL="0">
+        </p:spPr>
+        <p:txBody>
+          <a:bodyPr wrap="square" lIns="0" tIns="0" rIns="0" bIns="0" rtlCol="0" anchor="ctr"/>
+          <a:lstStyle/>
+          <a:p>
+            <a:pPr marL="0" indent="0">
               <a:buNone/>
             </a:pPr>
             <a:r>
@@ -9584,9 +9322,9 @@
                 <a:solidFill>
                   <a:srgbClr val="8C9BB8"/>
                 </a:solidFill>
-                <a:latin typeface="Segoe UI" pitchFamily="34" charset="0"/>
-                <a:ea typeface="Segoe UI" pitchFamily="34" charset="-122"/>
-                <a:cs typeface="Segoe UI" pitchFamily="34" charset="-120"/>
+                <a:latin typeface="Segoe UI" panose="020B0502040204020203" pitchFamily="34" charset="0"/>
+                <a:ea typeface="Segoe UI" panose="020B0502040204020203" pitchFamily="34" charset="-122"/>
+                <a:cs typeface="Segoe UI" panose="020B0502040204020203" pitchFamily="34" charset="-120"/>
               </a:rPr>
               <a:t>test methods</a:t>
             </a:r>
@@ -9632,13 +9370,12 @@
             <a:avLst/>
           </a:prstGeom>
           <a:noFill/>
-          <a:ln/>
-        </p:spPr>
-        <p:txBody>
-          <a:bodyPr wrap="square" lIns="0" tIns="0" rIns="0" bIns="0" rtlCol="0" anchor="ctr"/>
-          <a:lstStyle/>
-          <a:p>
-            <a:pPr indent="0" marL="0">
+        </p:spPr>
+        <p:txBody>
+          <a:bodyPr wrap="square" lIns="0" tIns="0" rIns="0" bIns="0" rtlCol="0" anchor="ctr"/>
+          <a:lstStyle/>
+          <a:p>
+            <a:pPr marL="0" indent="0">
               <a:buNone/>
             </a:pPr>
             <a:r>
@@ -9646,9 +9383,9 @@
                 <a:solidFill>
                   <a:srgbClr val="22D3EE"/>
                 </a:solidFill>
-                <a:latin typeface="Segoe UI Semibold" pitchFamily="34" charset="0"/>
-                <a:ea typeface="Segoe UI Semibold" pitchFamily="34" charset="-122"/>
-                <a:cs typeface="Segoe UI Semibold" pitchFamily="34" charset="-120"/>
+                <a:latin typeface="Segoe UI Semibold" panose="020B0702040204020203" pitchFamily="34" charset="0"/>
+                <a:ea typeface="Segoe UI Semibold" panose="020B0702040204020203" pitchFamily="34" charset="-122"/>
+                <a:cs typeface="Segoe UI Semibold" panose="020B0702040204020203" pitchFamily="34" charset="-120"/>
               </a:rPr>
               <a:t>7</a:t>
             </a:r>
@@ -9671,13 +9408,12 @@
             <a:avLst/>
           </a:prstGeom>
           <a:noFill/>
-          <a:ln/>
-        </p:spPr>
-        <p:txBody>
-          <a:bodyPr wrap="square" lIns="0" tIns="0" rIns="0" bIns="0" rtlCol="0" anchor="ctr"/>
-          <a:lstStyle/>
-          <a:p>
-            <a:pPr indent="0" marL="0">
+        </p:spPr>
+        <p:txBody>
+          <a:bodyPr wrap="square" lIns="0" tIns="0" rIns="0" bIns="0" rtlCol="0" anchor="ctr"/>
+          <a:lstStyle/>
+          <a:p>
+            <a:pPr marL="0" indent="0">
               <a:buNone/>
             </a:pPr>
             <a:r>
@@ -9685,9 +9421,9 @@
                 <a:solidFill>
                   <a:srgbClr val="8C9BB8"/>
                 </a:solidFill>
-                <a:latin typeface="Segoe UI" pitchFamily="34" charset="0"/>
-                <a:ea typeface="Segoe UI" pitchFamily="34" charset="-122"/>
-                <a:cs typeface="Segoe UI" pitchFamily="34" charset="-120"/>
+                <a:latin typeface="Segoe UI" panose="020B0502040204020203" pitchFamily="34" charset="0"/>
+                <a:ea typeface="Segoe UI" panose="020B0502040204020203" pitchFamily="34" charset="-122"/>
+                <a:cs typeface="Segoe UI" panose="020B0502040204020203" pitchFamily="34" charset="-120"/>
               </a:rPr>
               <a:t>services monitored</a:t>
             </a:r>
@@ -9733,13 +9469,12 @@
             <a:avLst/>
           </a:prstGeom>
           <a:noFill/>
-          <a:ln/>
-        </p:spPr>
-        <p:txBody>
-          <a:bodyPr wrap="square" lIns="0" tIns="0" rIns="0" bIns="0" rtlCol="0" anchor="ctr"/>
-          <a:lstStyle/>
-          <a:p>
-            <a:pPr indent="0" marL="0">
+        </p:spPr>
+        <p:txBody>
+          <a:bodyPr wrap="square" lIns="0" tIns="0" rIns="0" bIns="0" rtlCol="0" anchor="ctr"/>
+          <a:lstStyle/>
+          <a:p>
+            <a:pPr marL="0" indent="0">
               <a:buNone/>
             </a:pPr>
             <a:r>
@@ -9747,9 +9482,9 @@
                 <a:solidFill>
                   <a:srgbClr val="22D3EE"/>
                 </a:solidFill>
-                <a:latin typeface="Segoe UI Semibold" pitchFamily="34" charset="0"/>
-                <a:ea typeface="Segoe UI Semibold" pitchFamily="34" charset="-122"/>
-                <a:cs typeface="Segoe UI Semibold" pitchFamily="34" charset="-120"/>
+                <a:latin typeface="Segoe UI Semibold" panose="020B0702040204020203" pitchFamily="34" charset="0"/>
+                <a:ea typeface="Segoe UI Semibold" panose="020B0702040204020203" pitchFamily="34" charset="-122"/>
+                <a:cs typeface="Segoe UI Semibold" panose="020B0702040204020203" pitchFamily="34" charset="-120"/>
               </a:rPr>
               <a:t>19</a:t>
             </a:r>
@@ -9772,13 +9507,12 @@
             <a:avLst/>
           </a:prstGeom>
           <a:noFill/>
-          <a:ln/>
-        </p:spPr>
-        <p:txBody>
-          <a:bodyPr wrap="square" lIns="0" tIns="0" rIns="0" bIns="0" rtlCol="0" anchor="ctr"/>
-          <a:lstStyle/>
-          <a:p>
-            <a:pPr indent="0" marL="0">
+        </p:spPr>
+        <p:txBody>
+          <a:bodyPr wrap="square" lIns="0" tIns="0" rIns="0" bIns="0" rtlCol="0" anchor="ctr"/>
+          <a:lstStyle/>
+          <a:p>
+            <a:pPr marL="0" indent="0">
               <a:buNone/>
             </a:pPr>
             <a:r>
@@ -9786,9 +9520,9 @@
                 <a:solidFill>
                   <a:srgbClr val="8C9BB8"/>
                 </a:solidFill>
-                <a:latin typeface="Segoe UI" pitchFamily="34" charset="0"/>
-                <a:ea typeface="Segoe UI" pitchFamily="34" charset="-122"/>
-                <a:cs typeface="Segoe UI" pitchFamily="34" charset="-120"/>
+                <a:latin typeface="Segoe UI" panose="020B0502040204020203" pitchFamily="34" charset="0"/>
+                <a:ea typeface="Segoe UI" panose="020B0502040204020203" pitchFamily="34" charset="-122"/>
+                <a:cs typeface="Segoe UI" panose="020B0502040204020203" pitchFamily="34" charset="-120"/>
               </a:rPr>
               <a:t>containers</a:t>
             </a:r>
@@ -9834,13 +9568,12 @@
             <a:avLst/>
           </a:prstGeom>
           <a:noFill/>
-          <a:ln/>
-        </p:spPr>
-        <p:txBody>
-          <a:bodyPr wrap="square" lIns="0" tIns="0" rIns="0" bIns="0" rtlCol="0" anchor="ctr"/>
-          <a:lstStyle/>
-          <a:p>
-            <a:pPr indent="0" marL="0">
+        </p:spPr>
+        <p:txBody>
+          <a:bodyPr wrap="square" lIns="0" tIns="0" rIns="0" bIns="0" rtlCol="0" anchor="ctr"/>
+          <a:lstStyle/>
+          <a:p>
+            <a:pPr marL="0" indent="0">
               <a:buNone/>
             </a:pPr>
             <a:r>
@@ -9848,9 +9581,9 @@
                 <a:solidFill>
                   <a:srgbClr val="A3E635"/>
                 </a:solidFill>
-                <a:latin typeface="Segoe UI Semibold" pitchFamily="34" charset="0"/>
-                <a:ea typeface="Segoe UI Semibold" pitchFamily="34" charset="-122"/>
-                <a:cs typeface="Segoe UI Semibold" pitchFamily="34" charset="-120"/>
+                <a:latin typeface="Segoe UI Semibold" panose="020B0702040204020203" pitchFamily="34" charset="0"/>
+                <a:ea typeface="Segoe UI Semibold" panose="020B0702040204020203" pitchFamily="34" charset="-122"/>
+                <a:cs typeface="Segoe UI Semibold" panose="020B0702040204020203" pitchFamily="34" charset="-120"/>
               </a:rPr>
               <a:t>1</a:t>
             </a:r>
@@ -9873,13 +9606,12 @@
             <a:avLst/>
           </a:prstGeom>
           <a:noFill/>
-          <a:ln/>
-        </p:spPr>
-        <p:txBody>
-          <a:bodyPr wrap="square" lIns="0" tIns="0" rIns="0" bIns="0" rtlCol="0" anchor="ctr"/>
-          <a:lstStyle/>
-          <a:p>
-            <a:pPr indent="0" marL="0">
+        </p:spPr>
+        <p:txBody>
+          <a:bodyPr wrap="square" lIns="0" tIns="0" rIns="0" bIns="0" rtlCol="0" anchor="ctr"/>
+          <a:lstStyle/>
+          <a:p>
+            <a:pPr marL="0" indent="0">
               <a:buNone/>
             </a:pPr>
             <a:r>
@@ -9887,9 +9619,9 @@
                 <a:solidFill>
                   <a:srgbClr val="8C9BB8"/>
                 </a:solidFill>
-                <a:latin typeface="Segoe UI" pitchFamily="34" charset="0"/>
-                <a:ea typeface="Segoe UI" pitchFamily="34" charset="-122"/>
-                <a:cs typeface="Segoe UI" pitchFamily="34" charset="-120"/>
+                <a:latin typeface="Segoe UI" panose="020B0502040204020203" pitchFamily="34" charset="0"/>
+                <a:ea typeface="Segoe UI" panose="020B0502040204020203" pitchFamily="34" charset="-122"/>
+                <a:cs typeface="Segoe UI" panose="020B0502040204020203" pitchFamily="34" charset="-120"/>
               </a:rPr>
               <a:t>command to start</a:t>
             </a:r>
@@ -9939,13 +9671,12 @@
             <a:avLst/>
           </a:prstGeom>
           <a:noFill/>
-          <a:ln/>
-        </p:spPr>
-        <p:txBody>
-          <a:bodyPr wrap="square" lIns="0" tIns="0" rIns="0" bIns="0" rtlCol="0" anchor="ctr"/>
-          <a:lstStyle/>
-          <a:p>
-            <a:pPr indent="0" marL="0">
+        </p:spPr>
+        <p:txBody>
+          <a:bodyPr wrap="square" lIns="0" tIns="0" rIns="0" bIns="0" rtlCol="0" anchor="ctr"/>
+          <a:lstStyle/>
+          <a:p>
+            <a:pPr marL="0" indent="0">
               <a:buNone/>
             </a:pPr>
             <a:r>
@@ -9953,23 +9684,20 @@
                 <a:solidFill>
                   <a:srgbClr val="22D3EE"/>
                 </a:solidFill>
-                <a:latin typeface="Segoe UI" pitchFamily="34" charset="0"/>
-                <a:ea typeface="Segoe UI" pitchFamily="34" charset="-122"/>
-                <a:cs typeface="Segoe UI" pitchFamily="34" charset="-120"/>
+                <a:latin typeface="Segoe UI" panose="020B0502040204020203" pitchFamily="34" charset="0"/>
+                <a:ea typeface="Segoe UI" panose="020B0502040204020203" pitchFamily="34" charset="-122"/>
+                <a:cs typeface="Segoe UI" panose="020B0502040204020203" pitchFamily="34" charset="-120"/>
               </a:rPr>
               <a:t>LIVE  </a:t>
             </a:r>
-            <a:pPr indent="0" marL="0">
-              <a:buNone/>
-            </a:pPr>
             <a:r>
               <a:rPr lang="en-US" sz="1100" dirty="0">
                 <a:solidFill>
                   <a:srgbClr val="F1F5FB"/>
                 </a:solidFill>
-                <a:latin typeface="Segoe UI" pitchFamily="34" charset="0"/>
-                <a:ea typeface="Segoe UI" pitchFamily="34" charset="-122"/>
-                <a:cs typeface="Segoe UI" pitchFamily="34" charset="-120"/>
+                <a:latin typeface="Segoe UI" panose="020B0502040204020203" pitchFamily="34" charset="0"/>
+                <a:ea typeface="Segoe UI" panose="020B0502040204020203" pitchFamily="34" charset="-122"/>
+                <a:cs typeface="Segoe UI" panose="020B0502040204020203" pitchFamily="34" charset="-120"/>
               </a:rPr>
               <a:t>Grafana platform health</a:t>
             </a:r>
@@ -10061,23 +9789,6 @@
         <a:font script="Viet" typeface="Times New Roman"/>
         <a:font script="Uigh" typeface="Microsoft Uighur"/>
         <a:font script="Geor" typeface="Sylfaen"/>
-        <a:font script="Armn" typeface="Arial"/>
-        <a:font script="Bugi" typeface="Leelawadee UI"/>
-        <a:font script="Bopo" typeface="Microsoft JhengHei"/>
-        <a:font script="Java" typeface="Javanese Text"/>
-        <a:font script="Lisu" typeface="Segoe UI"/>
-        <a:font script="Mymr" typeface="Myanmar Text"/>
-        <a:font script="Nkoo" typeface="Ebrima"/>
-        <a:font script="Olck" typeface="Nirmala UI"/>
-        <a:font script="Osma" typeface="Ebrima"/>
-        <a:font script="Phag" typeface="Phagspa"/>
-        <a:font script="Syrn" typeface="Estrangelo Edessa"/>
-        <a:font script="Syrj" typeface="Estrangelo Edessa"/>
-        <a:font script="Syre" typeface="Estrangelo Edessa"/>
-        <a:font script="Sora" typeface="Nirmala UI"/>
-        <a:font script="Tale" typeface="Microsoft Tai Le"/>
-        <a:font script="Talu" typeface="Microsoft New Tai Lue"/>
-        <a:font script="Tfng" typeface="Ebrima"/>
       </a:majorFont>
       <a:minorFont>
         <a:latin typeface="Segoe UI"/>
@@ -10113,23 +9824,6 @@
         <a:font script="Viet" typeface="Arial"/>
         <a:font script="Uigh" typeface="Microsoft Uighur"/>
         <a:font script="Geor" typeface="Sylfaen"/>
-        <a:font script="Armn" typeface="Arial"/>
-        <a:font script="Bugi" typeface="Leelawadee UI"/>
-        <a:font script="Bopo" typeface="Microsoft JhengHei"/>
-        <a:font script="Java" typeface="Javanese Text"/>
-        <a:font script="Lisu" typeface="Segoe UI"/>
-        <a:font script="Mymr" typeface="Myanmar Text"/>
-        <a:font script="Nkoo" typeface="Ebrima"/>
-        <a:font script="Olck" typeface="Nirmala UI"/>
-        <a:font script="Osma" typeface="Ebrima"/>
-        <a:font script="Phag" typeface="Phagspa"/>
-        <a:font script="Syrn" typeface="Estrangelo Edessa"/>
-        <a:font script="Syrj" typeface="Estrangelo Edessa"/>
-        <a:font script="Syre" typeface="Estrangelo Edessa"/>
-        <a:font script="Sora" typeface="Nirmala UI"/>
-        <a:font script="Tale" typeface="Microsoft Tai Le"/>
-        <a:font script="Talu" typeface="Microsoft New Tai Lue"/>
-        <a:font script="Tfng" typeface="Ebrima"/>
       </a:minorFont>
     </a:fontScheme>
     <a:fmtScheme name="Office">
@@ -10270,8 +9964,265 @@
       </a:bgFillStyleLst>
     </a:fmtScheme>
   </a:themeElements>
-  <a:objectDefaults/>
-  <a:extraClrSchemeLst/>
+  <a:extLst>
+    <a:ext uri="{05A4C25C-085E-4340-85A3-A5531E510DB2}">
+      <thm15:themeFamily xmlns:thm15="http://schemas.microsoft.com/office/thememl/2012/main" name="Office Theme" id="{62F939B6-93AF-4DB8-9C6B-D6C7DFDC589F}" vid="{4A3C46E8-61CC-4603-A589-7422A47A8E4A}"/>
+    </a:ext>
+  </a:extLst>
+</a:theme>
+</file>
+
+<file path=ppt/theme/theme2.xml><?xml version="1.0" encoding="utf-8"?>
+<a:theme xmlns:a="http://schemas.openxmlformats.org/drawingml/2006/main" name="Office Theme">
+  <a:themeElements>
+    <a:clrScheme name="Office">
+      <a:dk1>
+        <a:sysClr val="windowText" lastClr="000000"/>
+      </a:dk1>
+      <a:lt1>
+        <a:sysClr val="window" lastClr="FFFFFF"/>
+      </a:lt1>
+      <a:dk2>
+        <a:srgbClr val="44546A"/>
+      </a:dk2>
+      <a:lt2>
+        <a:srgbClr val="E7E6E6"/>
+      </a:lt2>
+      <a:accent1>
+        <a:srgbClr val="4472C4"/>
+      </a:accent1>
+      <a:accent2>
+        <a:srgbClr val="ED7D31"/>
+      </a:accent2>
+      <a:accent3>
+        <a:srgbClr val="A5A5A5"/>
+      </a:accent3>
+      <a:accent4>
+        <a:srgbClr val="FFC000"/>
+      </a:accent4>
+      <a:accent5>
+        <a:srgbClr val="5B9BD5"/>
+      </a:accent5>
+      <a:accent6>
+        <a:srgbClr val="70AD47"/>
+      </a:accent6>
+      <a:hlink>
+        <a:srgbClr val="0563C1"/>
+      </a:hlink>
+      <a:folHlink>
+        <a:srgbClr val="954F72"/>
+      </a:folHlink>
+    </a:clrScheme>
+    <a:fontScheme name="Office">
+      <a:majorFont>
+        <a:latin typeface="Segoe UI Semibold"/>
+        <a:ea typeface=""/>
+        <a:cs typeface=""/>
+        <a:font script="Jpan" typeface="游ゴシック Light"/>
+        <a:font script="Hang" typeface="맑은 고딕"/>
+        <a:font script="Hans" typeface="等线 Light"/>
+        <a:font script="Hant" typeface="新細明體"/>
+        <a:font script="Arab" typeface="Times New Roman"/>
+        <a:font script="Hebr" typeface="Times New Roman"/>
+        <a:font script="Thai" typeface="Angsana New"/>
+        <a:font script="Ethi" typeface="Nyala"/>
+        <a:font script="Beng" typeface="Vrinda"/>
+        <a:font script="Gujr" typeface="Shruti"/>
+        <a:font script="Khmr" typeface="MoolBoran"/>
+        <a:font script="Knda" typeface="Tunga"/>
+        <a:font script="Guru" typeface="Raavi"/>
+        <a:font script="Cans" typeface="Euphemia"/>
+        <a:font script="Cher" typeface="Plantagenet Cherokee"/>
+        <a:font script="Yiii" typeface="Microsoft Yi Baiti"/>
+        <a:font script="Tibt" typeface="Microsoft Himalaya"/>
+        <a:font script="Thaa" typeface="MV Boli"/>
+        <a:font script="Deva" typeface="Mangal"/>
+        <a:font script="Telu" typeface="Gautami"/>
+        <a:font script="Taml" typeface="Latha"/>
+        <a:font script="Syrc" typeface="Estrangelo Edessa"/>
+        <a:font script="Orya" typeface="Kalinga"/>
+        <a:font script="Mlym" typeface="Kartika"/>
+        <a:font script="Laoo" typeface="DokChampa"/>
+        <a:font script="Sinh" typeface="Iskoola Pota"/>
+        <a:font script="Mong" typeface="Mongolian Baiti"/>
+        <a:font script="Viet" typeface="Times New Roman"/>
+        <a:font script="Uigh" typeface="Microsoft Uighur"/>
+        <a:font script="Geor" typeface="Sylfaen"/>
+      </a:majorFont>
+      <a:minorFont>
+        <a:latin typeface="Segoe UI"/>
+        <a:ea typeface=""/>
+        <a:cs typeface=""/>
+        <a:font script="Jpan" typeface="游ゴシック"/>
+        <a:font script="Hang" typeface="맑은 고딕"/>
+        <a:font script="Hans" typeface="等线"/>
+        <a:font script="Hant" typeface="新細明體"/>
+        <a:font script="Arab" typeface="Arial"/>
+        <a:font script="Hebr" typeface="Arial"/>
+        <a:font script="Thai" typeface="Cordia New"/>
+        <a:font script="Ethi" typeface="Nyala"/>
+        <a:font script="Beng" typeface="Vrinda"/>
+        <a:font script="Gujr" typeface="Shruti"/>
+        <a:font script="Khmr" typeface="DaunPenh"/>
+        <a:font script="Knda" typeface="Tunga"/>
+        <a:font script="Guru" typeface="Raavi"/>
+        <a:font script="Cans" typeface="Euphemia"/>
+        <a:font script="Cher" typeface="Plantagenet Cherokee"/>
+        <a:font script="Yiii" typeface="Microsoft Yi Baiti"/>
+        <a:font script="Tibt" typeface="Microsoft Himalaya"/>
+        <a:font script="Thaa" typeface="MV Boli"/>
+        <a:font script="Deva" typeface="Mangal"/>
+        <a:font script="Telu" typeface="Gautami"/>
+        <a:font script="Taml" typeface="Latha"/>
+        <a:font script="Syrc" typeface="Estrangelo Edessa"/>
+        <a:font script="Orya" typeface="Kalinga"/>
+        <a:font script="Mlym" typeface="Kartika"/>
+        <a:font script="Laoo" typeface="DokChampa"/>
+        <a:font script="Sinh" typeface="Iskoola Pota"/>
+        <a:font script="Mong" typeface="Mongolian Baiti"/>
+        <a:font script="Viet" typeface="Arial"/>
+        <a:font script="Uigh" typeface="Microsoft Uighur"/>
+        <a:font script="Geor" typeface="Sylfaen"/>
+      </a:minorFont>
+    </a:fontScheme>
+    <a:fmtScheme name="Office">
+      <a:fillStyleLst>
+        <a:solidFill>
+          <a:schemeClr val="phClr"/>
+        </a:solidFill>
+        <a:gradFill rotWithShape="1">
+          <a:gsLst>
+            <a:gs pos="0">
+              <a:schemeClr val="phClr">
+                <a:lumMod val="110000"/>
+                <a:satMod val="105000"/>
+                <a:tint val="67000"/>
+              </a:schemeClr>
+            </a:gs>
+            <a:gs pos="50000">
+              <a:schemeClr val="phClr">
+                <a:lumMod val="105000"/>
+                <a:satMod val="103000"/>
+                <a:tint val="73000"/>
+              </a:schemeClr>
+            </a:gs>
+            <a:gs pos="100000">
+              <a:schemeClr val="phClr">
+                <a:lumMod val="105000"/>
+                <a:satMod val="109000"/>
+                <a:tint val="81000"/>
+              </a:schemeClr>
+            </a:gs>
+          </a:gsLst>
+          <a:lin ang="5400000" scaled="0"/>
+        </a:gradFill>
+        <a:gradFill rotWithShape="1">
+          <a:gsLst>
+            <a:gs pos="0">
+              <a:schemeClr val="phClr">
+                <a:satMod val="103000"/>
+                <a:lumMod val="102000"/>
+                <a:tint val="94000"/>
+              </a:schemeClr>
+            </a:gs>
+            <a:gs pos="50000">
+              <a:schemeClr val="phClr">
+                <a:satMod val="110000"/>
+                <a:lumMod val="100000"/>
+                <a:shade val="100000"/>
+              </a:schemeClr>
+            </a:gs>
+            <a:gs pos="100000">
+              <a:schemeClr val="phClr">
+                <a:lumMod val="99000"/>
+                <a:satMod val="120000"/>
+                <a:shade val="78000"/>
+              </a:schemeClr>
+            </a:gs>
+          </a:gsLst>
+          <a:lin ang="5400000" scaled="0"/>
+        </a:gradFill>
+      </a:fillStyleLst>
+      <a:lnStyleLst>
+        <a:ln w="6350" cap="flat" cmpd="sng" algn="ctr">
+          <a:solidFill>
+            <a:schemeClr val="phClr"/>
+          </a:solidFill>
+          <a:prstDash val="solid"/>
+          <a:miter lim="800000"/>
+        </a:ln>
+        <a:ln w="12700" cap="flat" cmpd="sng" algn="ctr">
+          <a:solidFill>
+            <a:schemeClr val="phClr"/>
+          </a:solidFill>
+          <a:prstDash val="solid"/>
+          <a:miter lim="800000"/>
+        </a:ln>
+        <a:ln w="19050" cap="flat" cmpd="sng" algn="ctr">
+          <a:solidFill>
+            <a:schemeClr val="phClr"/>
+          </a:solidFill>
+          <a:prstDash val="solid"/>
+          <a:miter lim="800000"/>
+        </a:ln>
+      </a:lnStyleLst>
+      <a:effectStyleLst>
+        <a:effectStyle>
+          <a:effectLst/>
+        </a:effectStyle>
+        <a:effectStyle>
+          <a:effectLst/>
+        </a:effectStyle>
+        <a:effectStyle>
+          <a:effectLst>
+            <a:outerShdw blurRad="57150" dist="19050" dir="5400000" algn="ctr" rotWithShape="0">
+              <a:srgbClr val="000000">
+                <a:alpha val="63000"/>
+              </a:srgbClr>
+            </a:outerShdw>
+          </a:effectLst>
+        </a:effectStyle>
+      </a:effectStyleLst>
+      <a:bgFillStyleLst>
+        <a:solidFill>
+          <a:schemeClr val="phClr"/>
+        </a:solidFill>
+        <a:solidFill>
+          <a:schemeClr val="phClr">
+            <a:tint val="95000"/>
+            <a:satMod val="170000"/>
+          </a:schemeClr>
+        </a:solidFill>
+        <a:gradFill rotWithShape="1">
+          <a:gsLst>
+            <a:gs pos="0">
+              <a:schemeClr val="phClr">
+                <a:tint val="93000"/>
+                <a:satMod val="150000"/>
+                <a:shade val="98000"/>
+                <a:lumMod val="102000"/>
+              </a:schemeClr>
+            </a:gs>
+            <a:gs pos="50000">
+              <a:schemeClr val="phClr">
+                <a:tint val="98000"/>
+                <a:satMod val="130000"/>
+                <a:shade val="90000"/>
+                <a:lumMod val="103000"/>
+              </a:schemeClr>
+            </a:gs>
+            <a:gs pos="100000">
+              <a:schemeClr val="phClr">
+                <a:shade val="63000"/>
+                <a:satMod val="120000"/>
+              </a:schemeClr>
+            </a:gs>
+          </a:gsLst>
+          <a:lin ang="5400000" scaled="0"/>
+        </a:gradFill>
+      </a:bgFillStyleLst>
+    </a:fmtScheme>
+  </a:themeElements>
   <a:extLst>
     <a:ext uri="{05A4C25C-085E-4340-85A3-A5531E510DB2}">
       <thm15:themeFamily xmlns:thm15="http://schemas.microsoft.com/office/thememl/2012/main" name="Office Theme" id="{62F939B6-93AF-4DB8-9C6B-D6C7DFDC589F}" vid="{4A3C46E8-61CC-4603-A589-7422A47A8E4A}"/>

--- a/deliverables/REOAGMS-Team-Presentation.pptx
+++ b/deliverables/REOAGMS-Team-Presentation.pptx
@@ -1775,7 +1775,7 @@
                 <a:ea typeface="Segoe UI Semibold" pitchFamily="34" charset="-122"/>
                 <a:cs typeface="Segoe UI Semibold" pitchFamily="34" charset="-120"/>
               </a:rPr>
-              <a:t>EC8208  ·  SOFTWARE ARCHITECTURE</a:t>
+              <a:t>GROUP 9  ·  EC8208  ·  SOFTWARE ARCHITECTURE</a:t>
             </a:r>
             <a:endParaRPr lang="en-US" sz="1200" dirty="0"/>
           </a:p>
@@ -1867,8 +1867,8 @@
         </p:nvSpPr>
         <p:spPr>
           <a:xfrm>
-            <a:off x="640080" y="3977640"/>
-            <a:ext cx="7863840" cy="320040"/>
+            <a:off x="640080" y="3200400"/>
+            <a:ext cx="3017520" cy="292608"/>
           </a:xfrm>
           <a:prstGeom prst="rect">
             <a:avLst/>
@@ -1884,17 +1884,31 @@
               <a:buNone/>
             </a:pPr>
             <a:r>
-              <a:rPr lang="en-US" sz="1400" dirty="0">
+              <a:rPr lang="en-US" sz="1300" dirty="0">
+                <a:solidFill>
+                  <a:srgbClr val="22D3EE"/>
+                </a:solidFill>
+                <a:latin typeface="Segoe UI" pitchFamily="34" charset="0"/>
+                <a:ea typeface="Segoe UI" pitchFamily="34" charset="-122"/>
+                <a:cs typeface="Segoe UI" pitchFamily="34" charset="-120"/>
+              </a:rPr>
+              <a:t>EG/2021/4707   </a:t>
+            </a:r>
+            <a:pPr indent="0" marL="0">
+              <a:buNone/>
+            </a:pPr>
+            <a:r>
+              <a:rPr lang="en-US" sz="1300" b="1" dirty="0">
                 <a:solidFill>
                   <a:srgbClr val="F1F5FB"/>
                 </a:solidFill>
-                <a:latin typeface="Segoe UI Semibold" pitchFamily="34" charset="0"/>
-                <a:ea typeface="Segoe UI Semibold" pitchFamily="34" charset="-122"/>
-                <a:cs typeface="Segoe UI Semibold" pitchFamily="34" charset="-120"/>
-              </a:rPr>
-              <a:t>Charith  ·  Nemal  ·  Govindu  ·  Thurunu  ·  Yasiru  ·  Sachinthana</a:t>
-            </a:r>
-            <a:endParaRPr lang="en-US" sz="1400" dirty="0"/>
+                <a:latin typeface="Segoe UI" pitchFamily="34" charset="0"/>
+                <a:ea typeface="Segoe UI" pitchFamily="34" charset="-122"/>
+                <a:cs typeface="Segoe UI" pitchFamily="34" charset="-120"/>
+              </a:rPr>
+              <a:t>Perera G C M</a:t>
+            </a:r>
+            <a:endParaRPr lang="en-US" sz="1300" dirty="0"/>
           </a:p>
         </p:txBody>
       </p:sp>
@@ -1906,7 +1920,272 @@
         </p:nvSpPr>
         <p:spPr>
           <a:xfrm>
-            <a:off x="640080" y="4343400"/>
+            <a:off x="640080" y="3547872"/>
+            <a:ext cx="3017520" cy="292608"/>
+          </a:xfrm>
+          <a:prstGeom prst="rect">
+            <a:avLst/>
+          </a:prstGeom>
+          <a:noFill/>
+          <a:ln/>
+        </p:spPr>
+        <p:txBody>
+          <a:bodyPr wrap="square" lIns="0" tIns="0" rIns="0" bIns="0" rtlCol="0" anchor="ctr"/>
+          <a:lstStyle/>
+          <a:p>
+            <a:pPr indent="0" marL="0">
+              <a:buNone/>
+            </a:pPr>
+            <a:r>
+              <a:rPr lang="en-US" sz="1300" dirty="0">
+                <a:solidFill>
+                  <a:srgbClr val="22D3EE"/>
+                </a:solidFill>
+                <a:latin typeface="Segoe UI" pitchFamily="34" charset="0"/>
+                <a:ea typeface="Segoe UI" pitchFamily="34" charset="-122"/>
+                <a:cs typeface="Segoe UI" pitchFamily="34" charset="-120"/>
+              </a:rPr>
+              <a:t>EG/2021/4620   </a:t>
+            </a:r>
+            <a:pPr indent="0" marL="0">
+              <a:buNone/>
+            </a:pPr>
+            <a:r>
+              <a:rPr lang="en-US" sz="1300" b="1" dirty="0">
+                <a:solidFill>
+                  <a:srgbClr val="F1F5FB"/>
+                </a:solidFill>
+                <a:latin typeface="Segoe UI" pitchFamily="34" charset="0"/>
+                <a:ea typeface="Segoe UI" pitchFamily="34" charset="-122"/>
+                <a:cs typeface="Segoe UI" pitchFamily="34" charset="-120"/>
+              </a:rPr>
+              <a:t>Kularathne MDYB</a:t>
+            </a:r>
+            <a:endParaRPr lang="en-US" sz="1300" dirty="0"/>
+          </a:p>
+        </p:txBody>
+      </p:sp>
+      <p:sp>
+        <p:nvSpPr>
+          <p:cNvPr id="11" name="Text 8"/>
+          <p:cNvSpPr txBox="1"/>
+          <p:nvPr/>
+        </p:nvSpPr>
+        <p:spPr>
+          <a:xfrm>
+            <a:off x="640080" y="3895344"/>
+            <a:ext cx="3017520" cy="292608"/>
+          </a:xfrm>
+          <a:prstGeom prst="rect">
+            <a:avLst/>
+          </a:prstGeom>
+          <a:noFill/>
+          <a:ln/>
+        </p:spPr>
+        <p:txBody>
+          <a:bodyPr wrap="square" lIns="0" tIns="0" rIns="0" bIns="0" rtlCol="0" anchor="ctr"/>
+          <a:lstStyle/>
+          <a:p>
+            <a:pPr indent="0" marL="0">
+              <a:buNone/>
+            </a:pPr>
+            <a:r>
+              <a:rPr lang="en-US" sz="1300" dirty="0">
+                <a:solidFill>
+                  <a:srgbClr val="22D3EE"/>
+                </a:solidFill>
+                <a:latin typeface="Segoe UI" pitchFamily="34" charset="0"/>
+                <a:ea typeface="Segoe UI" pitchFamily="34" charset="-122"/>
+                <a:cs typeface="Segoe UI" pitchFamily="34" charset="-120"/>
+              </a:rPr>
+              <a:t>EG/2021/4710   </a:t>
+            </a:r>
+            <a:pPr indent="0" marL="0">
+              <a:buNone/>
+            </a:pPr>
+            <a:r>
+              <a:rPr lang="en-US" sz="1300" b="1" dirty="0">
+                <a:solidFill>
+                  <a:srgbClr val="F1F5FB"/>
+                </a:solidFill>
+                <a:latin typeface="Segoe UI" pitchFamily="34" charset="0"/>
+                <a:ea typeface="Segoe UI" pitchFamily="34" charset="-122"/>
+                <a:cs typeface="Segoe UI" pitchFamily="34" charset="-120"/>
+              </a:rPr>
+              <a:t>Perera K P D N</a:t>
+            </a:r>
+            <a:endParaRPr lang="en-US" sz="1300" dirty="0"/>
+          </a:p>
+        </p:txBody>
+      </p:sp>
+      <p:sp>
+        <p:nvSpPr>
+          <p:cNvPr id="12" name="Text 9"/>
+          <p:cNvSpPr txBox="1"/>
+          <p:nvPr/>
+        </p:nvSpPr>
+        <p:spPr>
+          <a:xfrm>
+            <a:off x="3749040" y="3200400"/>
+            <a:ext cx="3017520" cy="292608"/>
+          </a:xfrm>
+          <a:prstGeom prst="rect">
+            <a:avLst/>
+          </a:prstGeom>
+          <a:noFill/>
+          <a:ln/>
+        </p:spPr>
+        <p:txBody>
+          <a:bodyPr wrap="square" lIns="0" tIns="0" rIns="0" bIns="0" rtlCol="0" anchor="ctr"/>
+          <a:lstStyle/>
+          <a:p>
+            <a:pPr indent="0" marL="0">
+              <a:buNone/>
+            </a:pPr>
+            <a:r>
+              <a:rPr lang="en-US" sz="1300" dirty="0">
+                <a:solidFill>
+                  <a:srgbClr val="22D3EE"/>
+                </a:solidFill>
+                <a:latin typeface="Segoe UI" pitchFamily="34" charset="0"/>
+                <a:ea typeface="Segoe UI" pitchFamily="34" charset="-122"/>
+                <a:cs typeface="Segoe UI" pitchFamily="34" charset="-120"/>
+              </a:rPr>
+              <a:t>EG/2021/4828   </a:t>
+            </a:r>
+            <a:pPr indent="0" marL="0">
+              <a:buNone/>
+            </a:pPr>
+            <a:r>
+              <a:rPr lang="en-US" sz="1300" b="1" dirty="0">
+                <a:solidFill>
+                  <a:srgbClr val="F1F5FB"/>
+                </a:solidFill>
+                <a:latin typeface="Segoe UI" pitchFamily="34" charset="0"/>
+                <a:ea typeface="Segoe UI" pitchFamily="34" charset="-122"/>
+                <a:cs typeface="Segoe UI" pitchFamily="34" charset="-120"/>
+              </a:rPr>
+              <a:t>Thejana BPGL</a:t>
+            </a:r>
+            <a:endParaRPr lang="en-US" sz="1300" dirty="0"/>
+          </a:p>
+        </p:txBody>
+      </p:sp>
+      <p:sp>
+        <p:nvSpPr>
+          <p:cNvPr id="13" name="Text 10"/>
+          <p:cNvSpPr txBox="1"/>
+          <p:nvPr/>
+        </p:nvSpPr>
+        <p:spPr>
+          <a:xfrm>
+            <a:off x="3749040" y="3547872"/>
+            <a:ext cx="3017520" cy="292608"/>
+          </a:xfrm>
+          <a:prstGeom prst="rect">
+            <a:avLst/>
+          </a:prstGeom>
+          <a:noFill/>
+          <a:ln/>
+        </p:spPr>
+        <p:txBody>
+          <a:bodyPr wrap="square" lIns="0" tIns="0" rIns="0" bIns="0" rtlCol="0" anchor="ctr"/>
+          <a:lstStyle/>
+          <a:p>
+            <a:pPr indent="0" marL="0">
+              <a:buNone/>
+            </a:pPr>
+            <a:r>
+              <a:rPr lang="en-US" sz="1300" dirty="0">
+                <a:solidFill>
+                  <a:srgbClr val="22D3EE"/>
+                </a:solidFill>
+                <a:latin typeface="Segoe UI" pitchFamily="34" charset="0"/>
+                <a:ea typeface="Segoe UI" pitchFamily="34" charset="-122"/>
+                <a:cs typeface="Segoe UI" pitchFamily="34" charset="-120"/>
+              </a:rPr>
+              <a:t>EG/2021/4701   </a:t>
+            </a:r>
+            <a:pPr indent="0" marL="0">
+              <a:buNone/>
+            </a:pPr>
+            <a:r>
+              <a:rPr lang="en-US" sz="1300" b="1" dirty="0">
+                <a:solidFill>
+                  <a:srgbClr val="F1F5FB"/>
+                </a:solidFill>
+                <a:latin typeface="Segoe UI" pitchFamily="34" charset="0"/>
+                <a:ea typeface="Segoe UI" pitchFamily="34" charset="-122"/>
+                <a:cs typeface="Segoe UI" pitchFamily="34" charset="-120"/>
+              </a:rPr>
+              <a:t>Pabasara PMGT</a:t>
+            </a:r>
+            <a:endParaRPr lang="en-US" sz="1300" dirty="0"/>
+          </a:p>
+        </p:txBody>
+      </p:sp>
+      <p:sp>
+        <p:nvSpPr>
+          <p:cNvPr id="14" name="Text 11"/>
+          <p:cNvSpPr txBox="1"/>
+          <p:nvPr/>
+        </p:nvSpPr>
+        <p:spPr>
+          <a:xfrm>
+            <a:off x="3749040" y="3895344"/>
+            <a:ext cx="3017520" cy="292608"/>
+          </a:xfrm>
+          <a:prstGeom prst="rect">
+            <a:avLst/>
+          </a:prstGeom>
+          <a:noFill/>
+          <a:ln/>
+        </p:spPr>
+        <p:txBody>
+          <a:bodyPr wrap="square" lIns="0" tIns="0" rIns="0" bIns="0" rtlCol="0" anchor="ctr"/>
+          <a:lstStyle/>
+          <a:p>
+            <a:pPr indent="0" marL="0">
+              <a:buNone/>
+            </a:pPr>
+            <a:r>
+              <a:rPr lang="en-US" sz="1300" dirty="0">
+                <a:solidFill>
+                  <a:srgbClr val="22D3EE"/>
+                </a:solidFill>
+                <a:latin typeface="Segoe UI" pitchFamily="34" charset="0"/>
+                <a:ea typeface="Segoe UI" pitchFamily="34" charset="-122"/>
+                <a:cs typeface="Segoe UI" pitchFamily="34" charset="-120"/>
+              </a:rPr>
+              <a:t>EG/2021/4770   </a:t>
+            </a:r>
+            <a:pPr indent="0" marL="0">
+              <a:buNone/>
+            </a:pPr>
+            <a:r>
+              <a:rPr lang="en-US" sz="1300" b="1" dirty="0">
+                <a:solidFill>
+                  <a:srgbClr val="F1F5FB"/>
+                </a:solidFill>
+                <a:latin typeface="Segoe UI" pitchFamily="34" charset="0"/>
+                <a:ea typeface="Segoe UI" pitchFamily="34" charset="-122"/>
+                <a:cs typeface="Segoe UI" pitchFamily="34" charset="-120"/>
+              </a:rPr>
+              <a:t>Sachinthana K AD</a:t>
+            </a:r>
+            <a:endParaRPr lang="en-US" sz="1300" dirty="0"/>
+          </a:p>
+        </p:txBody>
+      </p:sp>
+      <p:sp>
+        <p:nvSpPr>
+          <p:cNvPr id="15" name="Text 12"/>
+          <p:cNvSpPr txBox="1"/>
+          <p:nvPr/>
+        </p:nvSpPr>
+        <p:spPr>
+          <a:xfrm>
+            <a:off x="640080" y="4434840"/>
             <a:ext cx="7863840" cy="274320"/>
           </a:xfrm>
           <a:prstGeom prst="rect">

--- a/deliverables/REOAGMS-Team-Presentation.pptx
+++ b/deliverables/REOAGMS-Team-Presentation.pptx
@@ -1,24 +1,24 @@
 
 <file path=ppt/presentation.xml><?xml version="1.0" encoding="utf-8"?>
-<p:presentation xmlns:a="http://schemas.openxmlformats.org/drawingml/2006/main" xmlns:r="http://schemas.openxmlformats.org/officeDocument/2006/relationships" xmlns:p="http://schemas.openxmlformats.org/presentationml/2006/main" saveSubsetFonts="1" autoCompressPictures="0">
+<p:presentation xmlns:a="http://schemas.openxmlformats.org/drawingml/2006/main" xmlns:r="http://schemas.openxmlformats.org/officeDocument/2006/relationships" xmlns:p="http://schemas.openxmlformats.org/presentationml/2006/main" autoCompressPictures="0">
   <p:sldMasterIdLst>
     <p:sldMasterId id="2147483648" r:id="rId1"/>
   </p:sldMasterIdLst>
+  <p:notesMasterIdLst>
+    <p:notesMasterId r:id="rId4"/>
+  </p:notesMasterIdLst>
   <p:sldIdLst>
-    <p:sldId id="256" r:id="rId2"/>
-    <p:sldId id="257" r:id="rId3"/>
-    <p:sldId id="258" r:id="rId4"/>
-    <p:sldId id="259" r:id="rId5"/>
-    <p:sldId id="260" r:id="rId6"/>
-    <p:sldId id="261" r:id="rId7"/>
-    <p:sldId id="262" r:id="rId8"/>
-    <p:sldId id="263" r:id="rId9"/>
-    <p:sldId id="264" r:id="rId10"/>
-    <p:sldId id="265" r:id="rId11"/>
+    <p:sldId id="256" r:id="rId3"/>
+    <p:sldId id="257" r:id="rId5"/>
+    <p:sldId id="258" r:id="rId6"/>
+    <p:sldId id="259" r:id="rId7"/>
+    <p:sldId id="260" r:id="rId8"/>
+    <p:sldId id="261" r:id="rId9"/>
+    <p:sldId id="262" r:id="rId10"/>
+    <p:sldId id="263" r:id="rId11"/>
+    <p:sldId id="264" r:id="rId12"/>
+    <p:sldId id="265" r:id="rId13"/>
   </p:sldIdLst>
-  <p:notesMasterIdLst>
-    <p:notesMasterId r:id="rId12"/>
-  </p:notesMasterIdLst>
   <p:sldSz cx="9144000" cy="5143500"/>
   <p:notesSz cx="5143500" cy="9144000"/>
   <p:defaultTextStyle>
@@ -198,7 +198,6 @@
           <a:p>
             <a:fld id="{5282F153-3F37-0F45-9E97-73ACFA13230C}" type="datetimeFigureOut">
               <a:rPr lang="en-US"/>
-              <a:t>7/23/19</a:t>
             </a:fld>
             <a:endParaRPr lang="en-US"/>
           </a:p>
@@ -265,6 +264,7 @@
               <a:rPr lang="en-US"/>
               <a:t>Click to edit Master text styles</a:t>
             </a:r>
+            <a:endParaRPr lang="en-US"/>
           </a:p>
           <a:p>
             <a:pPr lvl="1"/>
@@ -272,6 +272,7 @@
               <a:rPr lang="en-US"/>
               <a:t>Second level</a:t>
             </a:r>
+            <a:endParaRPr lang="en-US"/>
           </a:p>
           <a:p>
             <a:pPr lvl="2"/>
@@ -279,6 +280,7 @@
               <a:rPr lang="en-US"/>
               <a:t>Third level</a:t>
             </a:r>
+            <a:endParaRPr lang="en-US"/>
           </a:p>
           <a:p>
             <a:pPr lvl="3"/>
@@ -286,6 +288,7 @@
               <a:rPr lang="en-US"/>
               <a:t>Fourth level</a:t>
             </a:r>
+            <a:endParaRPr lang="en-US"/>
           </a:p>
           <a:p>
             <a:pPr lvl="4"/>
@@ -293,6 +296,7 @@
               <a:rPr lang="en-US"/>
               <a:t>Fifth level</a:t>
             </a:r>
+            <a:endParaRPr lang="en-US"/>
           </a:p>
         </p:txBody>
       </p:sp>
@@ -356,18 +360,12 @@
           <a:p>
             <a:fld id="{CE5E9CC1-C706-0F49-92D6-E571CC5EEA8F}" type="slidenum">
               <a:rPr lang="en-US"/>
-              <a:t>‹#›</a:t>
             </a:fld>
             <a:endParaRPr lang="en-US"/>
           </a:p>
         </p:txBody>
       </p:sp>
     </p:spTree>
-    <p:extLst>
-      <p:ext uri="{BB962C8B-B14F-4D97-AF65-F5344CB8AC3E}">
-        <p14:creationId xmlns:p14="http://schemas.microsoft.com/office/powerpoint/2010/main" val="1024086991"/>
-      </p:ext>
-    </p:extLst>
   </p:cSld>
   <p:clrMap bg1="lt1" tx1="dk1" bg2="lt2" tx2="dk2" accent1="accent1" accent2="accent2" accent3="accent3" accent4="accent4" accent5="accent5" accent6="accent6" hlink="hlink" folHlink="folHlink"/>
   <p:notesStyle>
@@ -534,18 +532,12 @@
           <a:p>
             <a:fld id="{F7021451-1387-4CA6-816F-3879F97B5CBC}" type="slidenum">
               <a:rPr lang="en-US"/>
-              <a:t>1</a:t>
             </a:fld>
             <a:endParaRPr lang="en-US"/>
           </a:p>
         </p:txBody>
       </p:sp>
     </p:spTree>
-    <p:extLst>
-      <p:ext uri="{BB962C8B-B14F-4D97-AF65-F5344CB8AC3E}">
-        <p14:creationId xmlns:p14="http://schemas.microsoft.com/office/powerpoint/2010/main" val="1024086991"/>
-      </p:ext>
-    </p:extLst>
   </p:cSld>
   <p:clrMapOvr>
     <a:masterClrMapping/>
@@ -622,18 +614,12 @@
           <a:p>
             <a:fld id="{F7021451-1387-4CA6-816F-3879F97B5CBC}" type="slidenum">
               <a:rPr lang="en-US"/>
-              <a:t>10</a:t>
             </a:fld>
             <a:endParaRPr lang="en-US"/>
           </a:p>
         </p:txBody>
       </p:sp>
     </p:spTree>
-    <p:extLst>
-      <p:ext uri="{BB962C8B-B14F-4D97-AF65-F5344CB8AC3E}">
-        <p14:creationId xmlns:p14="http://schemas.microsoft.com/office/powerpoint/2010/main" val="1024086991"/>
-      </p:ext>
-    </p:extLst>
   </p:cSld>
   <p:clrMapOvr>
     <a:masterClrMapping/>
@@ -710,18 +696,12 @@
           <a:p>
             <a:fld id="{F7021451-1387-4CA6-816F-3879F97B5CBC}" type="slidenum">
               <a:rPr lang="en-US"/>
-              <a:t>2</a:t>
             </a:fld>
             <a:endParaRPr lang="en-US"/>
           </a:p>
         </p:txBody>
       </p:sp>
     </p:spTree>
-    <p:extLst>
-      <p:ext uri="{BB962C8B-B14F-4D97-AF65-F5344CB8AC3E}">
-        <p14:creationId xmlns:p14="http://schemas.microsoft.com/office/powerpoint/2010/main" val="1024086991"/>
-      </p:ext>
-    </p:extLst>
   </p:cSld>
   <p:clrMapOvr>
     <a:masterClrMapping/>
@@ -798,18 +778,12 @@
           <a:p>
             <a:fld id="{F7021451-1387-4CA6-816F-3879F97B5CBC}" type="slidenum">
               <a:rPr lang="en-US"/>
-              <a:t>3</a:t>
             </a:fld>
             <a:endParaRPr lang="en-US"/>
           </a:p>
         </p:txBody>
       </p:sp>
     </p:spTree>
-    <p:extLst>
-      <p:ext uri="{BB962C8B-B14F-4D97-AF65-F5344CB8AC3E}">
-        <p14:creationId xmlns:p14="http://schemas.microsoft.com/office/powerpoint/2010/main" val="1024086991"/>
-      </p:ext>
-    </p:extLst>
   </p:cSld>
   <p:clrMapOvr>
     <a:masterClrMapping/>
@@ -886,18 +860,12 @@
           <a:p>
             <a:fld id="{F7021451-1387-4CA6-816F-3879F97B5CBC}" type="slidenum">
               <a:rPr lang="en-US"/>
-              <a:t>4</a:t>
             </a:fld>
             <a:endParaRPr lang="en-US"/>
           </a:p>
         </p:txBody>
       </p:sp>
     </p:spTree>
-    <p:extLst>
-      <p:ext uri="{BB962C8B-B14F-4D97-AF65-F5344CB8AC3E}">
-        <p14:creationId xmlns:p14="http://schemas.microsoft.com/office/powerpoint/2010/main" val="1024086991"/>
-      </p:ext>
-    </p:extLst>
   </p:cSld>
   <p:clrMapOvr>
     <a:masterClrMapping/>
@@ -974,18 +942,12 @@
           <a:p>
             <a:fld id="{F7021451-1387-4CA6-816F-3879F97B5CBC}" type="slidenum">
               <a:rPr lang="en-US"/>
-              <a:t>5</a:t>
             </a:fld>
             <a:endParaRPr lang="en-US"/>
           </a:p>
         </p:txBody>
       </p:sp>
     </p:spTree>
-    <p:extLst>
-      <p:ext uri="{BB962C8B-B14F-4D97-AF65-F5344CB8AC3E}">
-        <p14:creationId xmlns:p14="http://schemas.microsoft.com/office/powerpoint/2010/main" val="1024086991"/>
-      </p:ext>
-    </p:extLst>
   </p:cSld>
   <p:clrMapOvr>
     <a:masterClrMapping/>
@@ -1062,18 +1024,12 @@
           <a:p>
             <a:fld id="{F7021451-1387-4CA6-816F-3879F97B5CBC}" type="slidenum">
               <a:rPr lang="en-US"/>
-              <a:t>6</a:t>
             </a:fld>
             <a:endParaRPr lang="en-US"/>
           </a:p>
         </p:txBody>
       </p:sp>
     </p:spTree>
-    <p:extLst>
-      <p:ext uri="{BB962C8B-B14F-4D97-AF65-F5344CB8AC3E}">
-        <p14:creationId xmlns:p14="http://schemas.microsoft.com/office/powerpoint/2010/main" val="1024086991"/>
-      </p:ext>
-    </p:extLst>
   </p:cSld>
   <p:clrMapOvr>
     <a:masterClrMapping/>
@@ -1150,18 +1106,12 @@
           <a:p>
             <a:fld id="{F7021451-1387-4CA6-816F-3879F97B5CBC}" type="slidenum">
               <a:rPr lang="en-US"/>
-              <a:t>7</a:t>
             </a:fld>
             <a:endParaRPr lang="en-US"/>
           </a:p>
         </p:txBody>
       </p:sp>
     </p:spTree>
-    <p:extLst>
-      <p:ext uri="{BB962C8B-B14F-4D97-AF65-F5344CB8AC3E}">
-        <p14:creationId xmlns:p14="http://schemas.microsoft.com/office/powerpoint/2010/main" val="1024086991"/>
-      </p:ext>
-    </p:extLst>
   </p:cSld>
   <p:clrMapOvr>
     <a:masterClrMapping/>
@@ -1238,18 +1188,12 @@
           <a:p>
             <a:fld id="{F7021451-1387-4CA6-816F-3879F97B5CBC}" type="slidenum">
               <a:rPr lang="en-US"/>
-              <a:t>8</a:t>
             </a:fld>
             <a:endParaRPr lang="en-US"/>
           </a:p>
         </p:txBody>
       </p:sp>
     </p:spTree>
-    <p:extLst>
-      <p:ext uri="{BB962C8B-B14F-4D97-AF65-F5344CB8AC3E}">
-        <p14:creationId xmlns:p14="http://schemas.microsoft.com/office/powerpoint/2010/main" val="1024086991"/>
-      </p:ext>
-    </p:extLst>
   </p:cSld>
   <p:clrMapOvr>
     <a:masterClrMapping/>
@@ -1326,18 +1270,12 @@
           <a:p>
             <a:fld id="{F7021451-1387-4CA6-816F-3879F97B5CBC}" type="slidenum">
               <a:rPr lang="en-US"/>
-              <a:t>9</a:t>
             </a:fld>
             <a:endParaRPr lang="en-US"/>
           </a:p>
         </p:txBody>
       </p:sp>
     </p:spTree>
-    <p:extLst>
-      <p:ext uri="{BB962C8B-B14F-4D97-AF65-F5344CB8AC3E}">
-        <p14:creationId xmlns:p14="http://schemas.microsoft.com/office/powerpoint/2010/main" val="1024086991"/>
-      </p:ext>
-    </p:extLst>
   </p:cSld>
   <p:clrMapOvr>
     <a:masterClrMapping/>
@@ -1378,6 +1316,11 @@
 <file path=ppt/slideMasters/slideMaster1.xml><?xml version="1.0" encoding="utf-8"?>
 <p:sldMaster xmlns:a="http://schemas.openxmlformats.org/drawingml/2006/main" xmlns:r="http://schemas.openxmlformats.org/officeDocument/2006/relationships" xmlns:p="http://schemas.openxmlformats.org/presentationml/2006/main">
   <p:cSld>
+    <p:bg>
+      <p:bgRef idx="1001">
+        <a:schemeClr val="bg1"/>
+      </p:bgRef>
+    </p:bg>
     <p:spTree>
       <p:nvGrpSpPr>
         <p:cNvPr id="1" name=""/>
@@ -1421,7 +1364,7 @@
         <a:spcBef>
           <a:spcPct val="20000"/>
         </a:spcBef>
-        <a:buFont typeface="Arial" pitchFamily="34" charset="0"/>
+        <a:buFont typeface="Arial" panose="020B0604020202020204" pitchFamily="34" charset="0"/>
         <a:buChar char="•"/>
         <a:defRPr sz="3200" kern="1200">
           <a:solidFill>
@@ -1436,7 +1379,7 @@
         <a:spcBef>
           <a:spcPct val="20000"/>
         </a:spcBef>
-        <a:buFont typeface="Arial" pitchFamily="34" charset="0"/>
+        <a:buFont typeface="Arial" panose="020B0604020202020204" pitchFamily="34" charset="0"/>
         <a:buChar char="–"/>
         <a:defRPr sz="2800" kern="1200">
           <a:solidFill>
@@ -1451,7 +1394,7 @@
         <a:spcBef>
           <a:spcPct val="20000"/>
         </a:spcBef>
-        <a:buFont typeface="Arial" pitchFamily="34" charset="0"/>
+        <a:buFont typeface="Arial" panose="020B0604020202020204" pitchFamily="34" charset="0"/>
         <a:buChar char="•"/>
         <a:defRPr sz="2400" kern="1200">
           <a:solidFill>
@@ -1466,7 +1409,7 @@
         <a:spcBef>
           <a:spcPct val="20000"/>
         </a:spcBef>
-        <a:buFont typeface="Arial" pitchFamily="34" charset="0"/>
+        <a:buFont typeface="Arial" panose="020B0604020202020204" pitchFamily="34" charset="0"/>
         <a:buChar char="–"/>
         <a:defRPr sz="2000" kern="1200">
           <a:solidFill>
@@ -1481,7 +1424,7 @@
         <a:spcBef>
           <a:spcPct val="20000"/>
         </a:spcBef>
-        <a:buFont typeface="Arial" pitchFamily="34" charset="0"/>
+        <a:buFont typeface="Arial" panose="020B0604020202020204" pitchFamily="34" charset="0"/>
         <a:buChar char="»"/>
         <a:defRPr sz="2000" kern="1200">
           <a:solidFill>
@@ -1496,7 +1439,7 @@
         <a:spcBef>
           <a:spcPct val="20000"/>
         </a:spcBef>
-        <a:buFont typeface="Arial" pitchFamily="34" charset="0"/>
+        <a:buFont typeface="Arial" panose="020B0604020202020204" pitchFamily="34" charset="0"/>
         <a:buChar char="•"/>
         <a:defRPr sz="2000" kern="1200">
           <a:solidFill>
@@ -1511,7 +1454,7 @@
         <a:spcBef>
           <a:spcPct val="20000"/>
         </a:spcBef>
-        <a:buFont typeface="Arial" pitchFamily="34" charset="0"/>
+        <a:buFont typeface="Arial" panose="020B0604020202020204" pitchFamily="34" charset="0"/>
         <a:buChar char="•"/>
         <a:defRPr sz="2000" kern="1200">
           <a:solidFill>
@@ -1526,7 +1469,7 @@
         <a:spcBef>
           <a:spcPct val="20000"/>
         </a:spcBef>
-        <a:buFont typeface="Arial" pitchFamily="34" charset="0"/>
+        <a:buFont typeface="Arial" panose="020B0604020202020204" pitchFamily="34" charset="0"/>
         <a:buChar char="•"/>
         <a:defRPr sz="2000" kern="1200">
           <a:solidFill>
@@ -1541,7 +1484,7 @@
         <a:spcBef>
           <a:spcPct val="20000"/>
         </a:spcBef>
-        <a:buFont typeface="Arial" pitchFamily="34" charset="0"/>
+        <a:buFont typeface="Arial" panose="020B0604020202020204" pitchFamily="34" charset="0"/>
         <a:buChar char="•"/>
         <a:defRPr sz="2000" kern="1200">
           <a:solidFill>
@@ -1654,12 +1597,13 @@
 
 <file path=ppt/slides/slide1.xml><?xml version="1.0" encoding="utf-8"?>
 <p:sld xmlns:a="http://schemas.openxmlformats.org/drawingml/2006/main" xmlns:r="http://schemas.openxmlformats.org/officeDocument/2006/relationships" xmlns:p="http://schemas.openxmlformats.org/presentationml/2006/main">
-  <p:cSld name="Slide 1">
+  <p:cSld>
     <p:bg>
       <p:bgPr>
         <a:solidFill>
           <a:srgbClr val="0B1220"/>
         </a:solidFill>
+        <a:effectLst/>
       </p:bgPr>
     </p:bg>
     <p:spTree>
@@ -1757,23 +1701,22 @@
             <a:avLst/>
           </a:prstGeom>
           <a:noFill/>
-          <a:ln/>
-        </p:spPr>
-        <p:txBody>
-          <a:bodyPr wrap="square" lIns="0" tIns="0" rIns="0" bIns="0" rtlCol="0" anchor="ctr"/>
-          <a:lstStyle/>
-          <a:p>
-            <a:pPr indent="0" marL="0">
-              <a:buNone/>
-            </a:pPr>
-            <a:r>
-              <a:rPr lang="en-US" sz="1200" spc="500" kern="0" dirty="0">
+        </p:spPr>
+        <p:txBody>
+          <a:bodyPr wrap="square" lIns="0" tIns="0" rIns="0" bIns="0" rtlCol="0" anchor="ctr"/>
+          <a:lstStyle/>
+          <a:p>
+            <a:pPr marL="0" indent="0">
+              <a:buNone/>
+            </a:pPr>
+            <a:r>
+              <a:rPr lang="en-US" sz="1200" kern="0" spc="500" dirty="0">
                 <a:solidFill>
                   <a:srgbClr val="22D3EE"/>
                 </a:solidFill>
-                <a:latin typeface="Segoe UI Semibold" pitchFamily="34" charset="0"/>
-                <a:ea typeface="Segoe UI Semibold" pitchFamily="34" charset="-122"/>
-                <a:cs typeface="Segoe UI Semibold" pitchFamily="34" charset="-120"/>
+                <a:latin typeface="Segoe UI Semibold" panose="020B0702040204020203" pitchFamily="34" charset="0"/>
+                <a:ea typeface="Segoe UI Semibold" panose="020B0702040204020203" pitchFamily="34" charset="-122"/>
+                <a:cs typeface="Segoe UI Semibold" panose="020B0702040204020203" pitchFamily="34" charset="-120"/>
               </a:rPr>
               <a:t>GROUP 9  ·  EC8208  ·  SOFTWARE ARCHITECTURE</a:t>
             </a:r>
@@ -1796,13 +1739,12 @@
             <a:avLst/>
           </a:prstGeom>
           <a:noFill/>
-          <a:ln/>
-        </p:spPr>
-        <p:txBody>
-          <a:bodyPr wrap="square" lIns="0" tIns="0" rIns="0" bIns="0" rtlCol="0" anchor="ctr"/>
-          <a:lstStyle/>
-          <a:p>
-            <a:pPr indent="0" marL="0">
+        </p:spPr>
+        <p:txBody>
+          <a:bodyPr wrap="square" lIns="0" tIns="0" rIns="0" bIns="0" rtlCol="0" anchor="ctr"/>
+          <a:lstStyle/>
+          <a:p>
+            <a:pPr marL="0" indent="0">
               <a:buNone/>
             </a:pPr>
             <a:r>
@@ -1810,9 +1752,9 @@
                 <a:solidFill>
                   <a:srgbClr val="F1F5FB"/>
                 </a:solidFill>
-                <a:latin typeface="Segoe UI Semibold" pitchFamily="34" charset="0"/>
-                <a:ea typeface="Segoe UI Semibold" pitchFamily="34" charset="-122"/>
-                <a:cs typeface="Segoe UI Semibold" pitchFamily="34" charset="-120"/>
+                <a:latin typeface="Segoe UI Semibold" panose="020B0702040204020203" pitchFamily="34" charset="0"/>
+                <a:ea typeface="Segoe UI Semibold" panose="020B0702040204020203" pitchFamily="34" charset="-122"/>
+                <a:cs typeface="Segoe UI Semibold" panose="020B0702040204020203" pitchFamily="34" charset="-120"/>
               </a:rPr>
               <a:t>REOAGMS</a:t>
             </a:r>
@@ -1835,13 +1777,12 @@
             <a:avLst/>
           </a:prstGeom>
           <a:noFill/>
-          <a:ln/>
-        </p:spPr>
-        <p:txBody>
-          <a:bodyPr wrap="square" lIns="0" tIns="0" rIns="0" bIns="0" rtlCol="0" anchor="ctr"/>
-          <a:lstStyle/>
-          <a:p>
-            <a:pPr indent="0" marL="0">
+        </p:spPr>
+        <p:txBody>
+          <a:bodyPr wrap="square" lIns="0" tIns="0" rIns="0" bIns="0" rtlCol="0" anchor="ctr"/>
+          <a:lstStyle/>
+          <a:p>
+            <a:pPr marL="0" indent="0">
               <a:buNone/>
             </a:pPr>
             <a:r>
@@ -1849,9 +1790,9 @@
                 <a:solidFill>
                   <a:srgbClr val="8C9BB8"/>
                 </a:solidFill>
-                <a:latin typeface="Segoe UI" pitchFamily="34" charset="0"/>
-                <a:ea typeface="Segoe UI" pitchFamily="34" charset="-122"/>
-                <a:cs typeface="Segoe UI" pitchFamily="34" charset="-120"/>
+                <a:latin typeface="Segoe UI" panose="020B0502040204020203" pitchFamily="34" charset="0"/>
+                <a:ea typeface="Segoe UI" panose="020B0502040204020203" pitchFamily="34" charset="-122"/>
+                <a:cs typeface="Segoe UI" panose="020B0502040204020203" pitchFamily="34" charset="-120"/>
               </a:rPr>
               <a:t>Renewable Energy Operations, Asset and Grid Management System</a:t>
             </a:r>
@@ -1874,13 +1815,12 @@
             <a:avLst/>
           </a:prstGeom>
           <a:noFill/>
-          <a:ln/>
-        </p:spPr>
-        <p:txBody>
-          <a:bodyPr wrap="square" lIns="0" tIns="0" rIns="0" bIns="0" rtlCol="0" anchor="ctr"/>
-          <a:lstStyle/>
-          <a:p>
-            <a:pPr indent="0" marL="0">
+        </p:spPr>
+        <p:txBody>
+          <a:bodyPr wrap="square" lIns="0" tIns="0" rIns="0" bIns="0" rtlCol="0" anchor="ctr"/>
+          <a:lstStyle/>
+          <a:p>
+            <a:pPr marL="0" indent="0">
               <a:buNone/>
             </a:pPr>
             <a:r>
@@ -1888,23 +1828,20 @@
                 <a:solidFill>
                   <a:srgbClr val="22D3EE"/>
                 </a:solidFill>
-                <a:latin typeface="Segoe UI" pitchFamily="34" charset="0"/>
-                <a:ea typeface="Segoe UI" pitchFamily="34" charset="-122"/>
-                <a:cs typeface="Segoe UI" pitchFamily="34" charset="-120"/>
+                <a:latin typeface="Segoe UI" panose="020B0502040204020203" pitchFamily="34" charset="0"/>
+                <a:ea typeface="Segoe UI" panose="020B0502040204020203" pitchFamily="34" charset="-122"/>
+                <a:cs typeface="Segoe UI" panose="020B0502040204020203" pitchFamily="34" charset="-120"/>
               </a:rPr>
               <a:t>EG/2021/4707   </a:t>
             </a:r>
-            <a:pPr indent="0" marL="0">
-              <a:buNone/>
-            </a:pPr>
             <a:r>
               <a:rPr lang="en-US" sz="1300" b="1" dirty="0">
                 <a:solidFill>
                   <a:srgbClr val="F1F5FB"/>
                 </a:solidFill>
-                <a:latin typeface="Segoe UI" pitchFamily="34" charset="0"/>
-                <a:ea typeface="Segoe UI" pitchFamily="34" charset="-122"/>
-                <a:cs typeface="Segoe UI" pitchFamily="34" charset="-120"/>
+                <a:latin typeface="Segoe UI" panose="020B0502040204020203" pitchFamily="34" charset="0"/>
+                <a:ea typeface="Segoe UI" panose="020B0502040204020203" pitchFamily="34" charset="-122"/>
+                <a:cs typeface="Segoe UI" panose="020B0502040204020203" pitchFamily="34" charset="-120"/>
               </a:rPr>
               <a:t>Perera G C M</a:t>
             </a:r>
@@ -1927,13 +1864,12 @@
             <a:avLst/>
           </a:prstGeom>
           <a:noFill/>
-          <a:ln/>
-        </p:spPr>
-        <p:txBody>
-          <a:bodyPr wrap="square" lIns="0" tIns="0" rIns="0" bIns="0" rtlCol="0" anchor="ctr"/>
-          <a:lstStyle/>
-          <a:p>
-            <a:pPr indent="0" marL="0">
+        </p:spPr>
+        <p:txBody>
+          <a:bodyPr wrap="square" lIns="0" tIns="0" rIns="0" bIns="0" rtlCol="0" anchor="ctr"/>
+          <a:lstStyle/>
+          <a:p>
+            <a:pPr marL="0" indent="0">
               <a:buNone/>
             </a:pPr>
             <a:r>
@@ -1941,23 +1877,20 @@
                 <a:solidFill>
                   <a:srgbClr val="22D3EE"/>
                 </a:solidFill>
-                <a:latin typeface="Segoe UI" pitchFamily="34" charset="0"/>
-                <a:ea typeface="Segoe UI" pitchFamily="34" charset="-122"/>
-                <a:cs typeface="Segoe UI" pitchFamily="34" charset="-120"/>
+                <a:latin typeface="Segoe UI" panose="020B0502040204020203" pitchFamily="34" charset="0"/>
+                <a:ea typeface="Segoe UI" panose="020B0502040204020203" pitchFamily="34" charset="-122"/>
+                <a:cs typeface="Segoe UI" panose="020B0502040204020203" pitchFamily="34" charset="-120"/>
               </a:rPr>
               <a:t>EG/2021/4620   </a:t>
             </a:r>
-            <a:pPr indent="0" marL="0">
-              <a:buNone/>
-            </a:pPr>
             <a:r>
               <a:rPr lang="en-US" sz="1300" b="1" dirty="0">
                 <a:solidFill>
                   <a:srgbClr val="F1F5FB"/>
                 </a:solidFill>
-                <a:latin typeface="Segoe UI" pitchFamily="34" charset="0"/>
-                <a:ea typeface="Segoe UI" pitchFamily="34" charset="-122"/>
-                <a:cs typeface="Segoe UI" pitchFamily="34" charset="-120"/>
+                <a:latin typeface="Segoe UI" panose="020B0502040204020203" pitchFamily="34" charset="0"/>
+                <a:ea typeface="Segoe UI" panose="020B0502040204020203" pitchFamily="34" charset="-122"/>
+                <a:cs typeface="Segoe UI" panose="020B0502040204020203" pitchFamily="34" charset="-120"/>
               </a:rPr>
               <a:t>Kularathne MDYB</a:t>
             </a:r>
@@ -1980,13 +1913,12 @@
             <a:avLst/>
           </a:prstGeom>
           <a:noFill/>
-          <a:ln/>
-        </p:spPr>
-        <p:txBody>
-          <a:bodyPr wrap="square" lIns="0" tIns="0" rIns="0" bIns="0" rtlCol="0" anchor="ctr"/>
-          <a:lstStyle/>
-          <a:p>
-            <a:pPr indent="0" marL="0">
+        </p:spPr>
+        <p:txBody>
+          <a:bodyPr wrap="square" lIns="0" tIns="0" rIns="0" bIns="0" rtlCol="0" anchor="ctr"/>
+          <a:lstStyle/>
+          <a:p>
+            <a:pPr marL="0" indent="0">
               <a:buNone/>
             </a:pPr>
             <a:r>
@@ -1994,23 +1926,20 @@
                 <a:solidFill>
                   <a:srgbClr val="22D3EE"/>
                 </a:solidFill>
-                <a:latin typeface="Segoe UI" pitchFamily="34" charset="0"/>
-                <a:ea typeface="Segoe UI" pitchFamily="34" charset="-122"/>
-                <a:cs typeface="Segoe UI" pitchFamily="34" charset="-120"/>
+                <a:latin typeface="Segoe UI" panose="020B0502040204020203" pitchFamily="34" charset="0"/>
+                <a:ea typeface="Segoe UI" panose="020B0502040204020203" pitchFamily="34" charset="-122"/>
+                <a:cs typeface="Segoe UI" panose="020B0502040204020203" pitchFamily="34" charset="-120"/>
               </a:rPr>
               <a:t>EG/2021/4710   </a:t>
             </a:r>
-            <a:pPr indent="0" marL="0">
-              <a:buNone/>
-            </a:pPr>
             <a:r>
               <a:rPr lang="en-US" sz="1300" b="1" dirty="0">
                 <a:solidFill>
                   <a:srgbClr val="F1F5FB"/>
                 </a:solidFill>
-                <a:latin typeface="Segoe UI" pitchFamily="34" charset="0"/>
-                <a:ea typeface="Segoe UI" pitchFamily="34" charset="-122"/>
-                <a:cs typeface="Segoe UI" pitchFamily="34" charset="-120"/>
+                <a:latin typeface="Segoe UI" panose="020B0502040204020203" pitchFamily="34" charset="0"/>
+                <a:ea typeface="Segoe UI" panose="020B0502040204020203" pitchFamily="34" charset="-122"/>
+                <a:cs typeface="Segoe UI" panose="020B0502040204020203" pitchFamily="34" charset="-120"/>
               </a:rPr>
               <a:t>Perera K P D N</a:t>
             </a:r>
@@ -2033,13 +1962,12 @@
             <a:avLst/>
           </a:prstGeom>
           <a:noFill/>
-          <a:ln/>
-        </p:spPr>
-        <p:txBody>
-          <a:bodyPr wrap="square" lIns="0" tIns="0" rIns="0" bIns="0" rtlCol="0" anchor="ctr"/>
-          <a:lstStyle/>
-          <a:p>
-            <a:pPr indent="0" marL="0">
+        </p:spPr>
+        <p:txBody>
+          <a:bodyPr wrap="square" lIns="0" tIns="0" rIns="0" bIns="0" rtlCol="0" anchor="ctr"/>
+          <a:lstStyle/>
+          <a:p>
+            <a:pPr marL="0" indent="0">
               <a:buNone/>
             </a:pPr>
             <a:r>
@@ -2047,23 +1975,20 @@
                 <a:solidFill>
                   <a:srgbClr val="22D3EE"/>
                 </a:solidFill>
-                <a:latin typeface="Segoe UI" pitchFamily="34" charset="0"/>
-                <a:ea typeface="Segoe UI" pitchFamily="34" charset="-122"/>
-                <a:cs typeface="Segoe UI" pitchFamily="34" charset="-120"/>
+                <a:latin typeface="Segoe UI" panose="020B0502040204020203" pitchFamily="34" charset="0"/>
+                <a:ea typeface="Segoe UI" panose="020B0502040204020203" pitchFamily="34" charset="-122"/>
+                <a:cs typeface="Segoe UI" panose="020B0502040204020203" pitchFamily="34" charset="-120"/>
               </a:rPr>
               <a:t>EG/2021/4828   </a:t>
             </a:r>
-            <a:pPr indent="0" marL="0">
-              <a:buNone/>
-            </a:pPr>
             <a:r>
               <a:rPr lang="en-US" sz="1300" b="1" dirty="0">
                 <a:solidFill>
                   <a:srgbClr val="F1F5FB"/>
                 </a:solidFill>
-                <a:latin typeface="Segoe UI" pitchFamily="34" charset="0"/>
-                <a:ea typeface="Segoe UI" pitchFamily="34" charset="-122"/>
-                <a:cs typeface="Segoe UI" pitchFamily="34" charset="-120"/>
+                <a:latin typeface="Segoe UI" panose="020B0502040204020203" pitchFamily="34" charset="0"/>
+                <a:ea typeface="Segoe UI" panose="020B0502040204020203" pitchFamily="34" charset="-122"/>
+                <a:cs typeface="Segoe UI" panose="020B0502040204020203" pitchFamily="34" charset="-120"/>
               </a:rPr>
               <a:t>Thejana BPGL</a:t>
             </a:r>
@@ -2086,13 +2011,12 @@
             <a:avLst/>
           </a:prstGeom>
           <a:noFill/>
-          <a:ln/>
-        </p:spPr>
-        <p:txBody>
-          <a:bodyPr wrap="square" lIns="0" tIns="0" rIns="0" bIns="0" rtlCol="0" anchor="ctr"/>
-          <a:lstStyle/>
-          <a:p>
-            <a:pPr indent="0" marL="0">
+        </p:spPr>
+        <p:txBody>
+          <a:bodyPr wrap="square" lIns="0" tIns="0" rIns="0" bIns="0" rtlCol="0" anchor="ctr"/>
+          <a:lstStyle/>
+          <a:p>
+            <a:pPr marL="0" indent="0">
               <a:buNone/>
             </a:pPr>
             <a:r>
@@ -2100,23 +2024,20 @@
                 <a:solidFill>
                   <a:srgbClr val="22D3EE"/>
                 </a:solidFill>
-                <a:latin typeface="Segoe UI" pitchFamily="34" charset="0"/>
-                <a:ea typeface="Segoe UI" pitchFamily="34" charset="-122"/>
-                <a:cs typeface="Segoe UI" pitchFamily="34" charset="-120"/>
+                <a:latin typeface="Segoe UI" panose="020B0502040204020203" pitchFamily="34" charset="0"/>
+                <a:ea typeface="Segoe UI" panose="020B0502040204020203" pitchFamily="34" charset="-122"/>
+                <a:cs typeface="Segoe UI" panose="020B0502040204020203" pitchFamily="34" charset="-120"/>
               </a:rPr>
               <a:t>EG/2021/4701   </a:t>
             </a:r>
-            <a:pPr indent="0" marL="0">
-              <a:buNone/>
-            </a:pPr>
             <a:r>
               <a:rPr lang="en-US" sz="1300" b="1" dirty="0">
                 <a:solidFill>
                   <a:srgbClr val="F1F5FB"/>
                 </a:solidFill>
-                <a:latin typeface="Segoe UI" pitchFamily="34" charset="0"/>
-                <a:ea typeface="Segoe UI" pitchFamily="34" charset="-122"/>
-                <a:cs typeface="Segoe UI" pitchFamily="34" charset="-120"/>
+                <a:latin typeface="Segoe UI" panose="020B0502040204020203" pitchFamily="34" charset="0"/>
+                <a:ea typeface="Segoe UI" panose="020B0502040204020203" pitchFamily="34" charset="-122"/>
+                <a:cs typeface="Segoe UI" panose="020B0502040204020203" pitchFamily="34" charset="-120"/>
               </a:rPr>
               <a:t>Pabasara PMGT</a:t>
             </a:r>
@@ -2139,13 +2060,12 @@
             <a:avLst/>
           </a:prstGeom>
           <a:noFill/>
-          <a:ln/>
-        </p:spPr>
-        <p:txBody>
-          <a:bodyPr wrap="square" lIns="0" tIns="0" rIns="0" bIns="0" rtlCol="0" anchor="ctr"/>
-          <a:lstStyle/>
-          <a:p>
-            <a:pPr indent="0" marL="0">
+        </p:spPr>
+        <p:txBody>
+          <a:bodyPr wrap="square" lIns="0" tIns="0" rIns="0" bIns="0" rtlCol="0" anchor="ctr"/>
+          <a:lstStyle/>
+          <a:p>
+            <a:pPr marL="0" indent="0">
               <a:buNone/>
             </a:pPr>
             <a:r>
@@ -2153,23 +2073,20 @@
                 <a:solidFill>
                   <a:srgbClr val="22D3EE"/>
                 </a:solidFill>
-                <a:latin typeface="Segoe UI" pitchFamily="34" charset="0"/>
-                <a:ea typeface="Segoe UI" pitchFamily="34" charset="-122"/>
-                <a:cs typeface="Segoe UI" pitchFamily="34" charset="-120"/>
+                <a:latin typeface="Segoe UI" panose="020B0502040204020203" pitchFamily="34" charset="0"/>
+                <a:ea typeface="Segoe UI" panose="020B0502040204020203" pitchFamily="34" charset="-122"/>
+                <a:cs typeface="Segoe UI" panose="020B0502040204020203" pitchFamily="34" charset="-120"/>
               </a:rPr>
               <a:t>EG/2021/4770   </a:t>
             </a:r>
-            <a:pPr indent="0" marL="0">
-              <a:buNone/>
-            </a:pPr>
             <a:r>
               <a:rPr lang="en-US" sz="1300" b="1" dirty="0">
                 <a:solidFill>
                   <a:srgbClr val="F1F5FB"/>
                 </a:solidFill>
-                <a:latin typeface="Segoe UI" pitchFamily="34" charset="0"/>
-                <a:ea typeface="Segoe UI" pitchFamily="34" charset="-122"/>
-                <a:cs typeface="Segoe UI" pitchFamily="34" charset="-120"/>
+                <a:latin typeface="Segoe UI" panose="020B0502040204020203" pitchFamily="34" charset="0"/>
+                <a:ea typeface="Segoe UI" panose="020B0502040204020203" pitchFamily="34" charset="-122"/>
+                <a:cs typeface="Segoe UI" panose="020B0502040204020203" pitchFamily="34" charset="-120"/>
               </a:rPr>
               <a:t>Sachinthana K AD</a:t>
             </a:r>
@@ -2192,13 +2109,12 @@
             <a:avLst/>
           </a:prstGeom>
           <a:noFill/>
-          <a:ln/>
-        </p:spPr>
-        <p:txBody>
-          <a:bodyPr wrap="square" lIns="0" tIns="0" rIns="0" bIns="0" rtlCol="0" anchor="ctr"/>
-          <a:lstStyle/>
-          <a:p>
-            <a:pPr indent="0" marL="0">
+        </p:spPr>
+        <p:txBody>
+          <a:bodyPr wrap="square" lIns="0" tIns="0" rIns="0" bIns="0" rtlCol="0" anchor="ctr"/>
+          <a:lstStyle/>
+          <a:p>
+            <a:pPr marL="0" indent="0">
               <a:buNone/>
             </a:pPr>
             <a:r>
@@ -2206,9 +2122,9 @@
                 <a:solidFill>
                   <a:srgbClr val="8C9BB8"/>
                 </a:solidFill>
-                <a:latin typeface="Segoe UI" pitchFamily="34" charset="0"/>
-                <a:ea typeface="Segoe UI" pitchFamily="34" charset="-122"/>
-                <a:cs typeface="Segoe UI" pitchFamily="34" charset="-120"/>
+                <a:latin typeface="Segoe UI" panose="020B0502040204020203" pitchFamily="34" charset="0"/>
+                <a:ea typeface="Segoe UI" panose="020B0502040204020203" pitchFamily="34" charset="-122"/>
+                <a:cs typeface="Segoe UI" panose="020B0502040204020203" pitchFamily="34" charset="-120"/>
               </a:rPr>
               <a:t>Department of Electrical and Information Engineering  ·  University of Ruhuna</a:t>
             </a:r>
@@ -2226,12 +2142,13 @@
 
 <file path=ppt/slides/slide10.xml><?xml version="1.0" encoding="utf-8"?>
 <p:sld xmlns:a="http://schemas.openxmlformats.org/drawingml/2006/main" xmlns:r="http://schemas.openxmlformats.org/officeDocument/2006/relationships" xmlns:p="http://schemas.openxmlformats.org/presentationml/2006/main">
-  <p:cSld name="Slide 10">
+  <p:cSld>
     <p:bg>
       <p:bgPr>
         <a:solidFill>
           <a:srgbClr val="0B1220"/>
         </a:solidFill>
+        <a:effectLst/>
       </p:bgPr>
     </p:bg>
     <p:spTree>
@@ -2329,13 +2246,12 @@
             <a:avLst/>
           </a:prstGeom>
           <a:noFill/>
-          <a:ln/>
-        </p:spPr>
-        <p:txBody>
-          <a:bodyPr wrap="square" lIns="0" tIns="0" rIns="0" bIns="0" rtlCol="0" anchor="ctr"/>
-          <a:lstStyle/>
-          <a:p>
-            <a:pPr indent="0" marL="0">
+        </p:spPr>
+        <p:txBody>
+          <a:bodyPr wrap="square" lIns="0" tIns="0" rIns="0" bIns="0" rtlCol="0" anchor="ctr"/>
+          <a:lstStyle/>
+          <a:p>
+            <a:pPr marL="0" indent="0">
               <a:buNone/>
             </a:pPr>
             <a:r>
@@ -2343,9 +2259,9 @@
                 <a:solidFill>
                   <a:srgbClr val="F1F5FB"/>
                 </a:solidFill>
-                <a:latin typeface="Segoe UI Semibold" pitchFamily="34" charset="0"/>
-                <a:ea typeface="Segoe UI Semibold" pitchFamily="34" charset="-122"/>
-                <a:cs typeface="Segoe UI Semibold" pitchFamily="34" charset="-120"/>
+                <a:latin typeface="Segoe UI Semibold" panose="020B0702040204020203" pitchFamily="34" charset="0"/>
+                <a:ea typeface="Segoe UI Semibold" panose="020B0702040204020203" pitchFamily="34" charset="-122"/>
+                <a:cs typeface="Segoe UI Semibold" panose="020B0702040204020203" pitchFamily="34" charset="-120"/>
               </a:rPr>
               <a:t>Thank you</a:t>
             </a:r>
@@ -2368,13 +2284,12 @@
             <a:avLst/>
           </a:prstGeom>
           <a:noFill/>
-          <a:ln/>
-        </p:spPr>
-        <p:txBody>
-          <a:bodyPr wrap="square" lIns="0" tIns="0" rIns="0" bIns="0" rtlCol="0" anchor="ctr"/>
-          <a:lstStyle/>
-          <a:p>
-            <a:pPr indent="0" marL="0">
+        </p:spPr>
+        <p:txBody>
+          <a:bodyPr wrap="square" lIns="0" tIns="0" rIns="0" bIns="0" rtlCol="0" anchor="ctr"/>
+          <a:lstStyle/>
+          <a:p>
+            <a:pPr marL="0" indent="0">
               <a:buNone/>
             </a:pPr>
             <a:r>
@@ -2382,9 +2297,9 @@
                 <a:solidFill>
                   <a:srgbClr val="22D3EE"/>
                 </a:solidFill>
-                <a:latin typeface="Segoe UI" pitchFamily="34" charset="0"/>
-                <a:ea typeface="Segoe UI" pitchFamily="34" charset="-122"/>
-                <a:cs typeface="Segoe UI" pitchFamily="34" charset="-120"/>
+                <a:latin typeface="Segoe UI" panose="020B0502040204020203" pitchFamily="34" charset="0"/>
+                <a:ea typeface="Segoe UI" panose="020B0502040204020203" pitchFamily="34" charset="-122"/>
+                <a:cs typeface="Segoe UI" panose="020B0502040204020203" pitchFamily="34" charset="-120"/>
               </a:rPr>
               <a:t>Questions and discussion</a:t>
             </a:r>
@@ -2407,13 +2322,12 @@
             <a:avLst/>
           </a:prstGeom>
           <a:noFill/>
-          <a:ln/>
-        </p:spPr>
-        <p:txBody>
-          <a:bodyPr wrap="square" lIns="0" tIns="0" rIns="0" bIns="0" rtlCol="0" anchor="ctr"/>
-          <a:lstStyle/>
-          <a:p>
-            <a:pPr indent="0" marL="0">
+        </p:spPr>
+        <p:txBody>
+          <a:bodyPr wrap="square" lIns="0" tIns="0" rIns="0" bIns="0" rtlCol="0" anchor="ctr"/>
+          <a:lstStyle/>
+          <a:p>
+            <a:pPr marL="0" indent="0">
               <a:buNone/>
             </a:pPr>
             <a:r>
@@ -2421,9 +2335,9 @@
                 <a:solidFill>
                   <a:srgbClr val="8C9BB8"/>
                 </a:solidFill>
-                <a:latin typeface="Segoe UI" pitchFamily="34" charset="0"/>
-                <a:ea typeface="Segoe UI" pitchFamily="34" charset="-122"/>
-                <a:cs typeface="Segoe UI" pitchFamily="34" charset="-120"/>
+                <a:latin typeface="Segoe UI" panose="020B0502040204020203" pitchFamily="34" charset="0"/>
+                <a:ea typeface="Segoe UI" panose="020B0502040204020203" pitchFamily="34" charset="-122"/>
+                <a:cs typeface="Segoe UI" panose="020B0502040204020203" pitchFamily="34" charset="-120"/>
               </a:rPr>
               <a:t>REOAGMS  ·  EC8208 Software Architecture  ·  University of Ruhuna</a:t>
             </a:r>
@@ -2441,12 +2355,13 @@
 
 <file path=ppt/slides/slide2.xml><?xml version="1.0" encoding="utf-8"?>
 <p:sld xmlns:a="http://schemas.openxmlformats.org/drawingml/2006/main" xmlns:r="http://schemas.openxmlformats.org/officeDocument/2006/relationships" xmlns:p="http://schemas.openxmlformats.org/presentationml/2006/main">
-  <p:cSld name="Slide 2">
+  <p:cSld>
     <p:bg>
       <p:bgPr>
         <a:solidFill>
           <a:srgbClr val="F6F8FB"/>
         </a:solidFill>
+        <a:effectLst/>
       </p:bgPr>
     </p:bg>
     <p:spTree>
@@ -2503,25 +2418,24 @@
             <a:avLst/>
           </a:prstGeom>
           <a:noFill/>
-          <a:ln/>
-        </p:spPr>
-        <p:txBody>
-          <a:bodyPr wrap="square" lIns="0" tIns="0" rIns="0" bIns="0" rtlCol="0" anchor="ctr"/>
-          <a:lstStyle/>
-          <a:p>
-            <a:pPr indent="0" marL="0">
-              <a:buNone/>
-            </a:pPr>
-            <a:r>
-              <a:rPr lang="en-US" sz="1050" spc="400" kern="0" dirty="0">
+        </p:spPr>
+        <p:txBody>
+          <a:bodyPr wrap="square" lIns="0" tIns="0" rIns="0" bIns="0" rtlCol="0" anchor="ctr"/>
+          <a:lstStyle/>
+          <a:p>
+            <a:pPr marL="0" indent="0">
+              <a:buNone/>
+            </a:pPr>
+            <a:r>
+              <a:rPr lang="en-US" sz="1050" kern="0" spc="400" dirty="0">
                 <a:solidFill>
                   <a:srgbClr val="0891B2"/>
                 </a:solidFill>
-                <a:latin typeface="Segoe UI Semibold" pitchFamily="34" charset="0"/>
-                <a:ea typeface="Segoe UI Semibold" pitchFamily="34" charset="-122"/>
-                <a:cs typeface="Segoe UI Semibold" pitchFamily="34" charset="-120"/>
-              </a:rPr>
-              <a:t>02 · CHARITH · ARCHITECTURE</a:t>
+                <a:latin typeface="Segoe UI Semibold" panose="020B0702040204020203" pitchFamily="34" charset="0"/>
+                <a:ea typeface="Segoe UI Semibold" panose="020B0702040204020203" pitchFamily="34" charset="-122"/>
+                <a:cs typeface="Segoe UI Semibold" panose="020B0702040204020203" pitchFamily="34" charset="-120"/>
+              </a:rPr>
+              <a:t>02 · ARCHITECTURE</a:t>
             </a:r>
             <a:endParaRPr lang="en-US" sz="1050" dirty="0"/>
           </a:p>
@@ -2542,13 +2456,12 @@
             <a:avLst/>
           </a:prstGeom>
           <a:noFill/>
-          <a:ln/>
-        </p:spPr>
-        <p:txBody>
-          <a:bodyPr wrap="square" lIns="0" tIns="0" rIns="0" bIns="0" rtlCol="0" anchor="ctr"/>
-          <a:lstStyle/>
-          <a:p>
-            <a:pPr indent="0" marL="0">
+        </p:spPr>
+        <p:txBody>
+          <a:bodyPr wrap="square" lIns="0" tIns="0" rIns="0" bIns="0" rtlCol="0" anchor="ctr"/>
+          <a:lstStyle/>
+          <a:p>
+            <a:pPr marL="0" indent="0">
               <a:buNone/>
             </a:pPr>
             <a:r>
@@ -2556,9 +2469,9 @@
                 <a:solidFill>
                   <a:srgbClr val="0B1B33"/>
                 </a:solidFill>
-                <a:latin typeface="Segoe UI Semibold" pitchFamily="34" charset="0"/>
-                <a:ea typeface="Segoe UI Semibold" pitchFamily="34" charset="-122"/>
-                <a:cs typeface="Segoe UI Semibold" pitchFamily="34" charset="-120"/>
+                <a:latin typeface="Segoe UI Semibold" panose="020B0702040204020203" pitchFamily="34" charset="0"/>
+                <a:ea typeface="Segoe UI Semibold" panose="020B0702040204020203" pitchFamily="34" charset="-122"/>
+                <a:cs typeface="Segoe UI Semibold" panose="020B0702040204020203" pitchFamily="34" charset="-120"/>
               </a:rPr>
               <a:t>One gateway, six independent services</a:t>
             </a:r>
@@ -2604,13 +2517,12 @@
             <a:avLst/>
           </a:prstGeom>
           <a:noFill/>
-          <a:ln/>
-        </p:spPr>
-        <p:txBody>
-          <a:bodyPr wrap="square" lIns="0" tIns="0" rIns="0" bIns="0" rtlCol="0" anchor="ctr"/>
-          <a:lstStyle/>
-          <a:p>
-            <a:pPr indent="0" marL="0">
+        </p:spPr>
+        <p:txBody>
+          <a:bodyPr wrap="square" lIns="0" tIns="0" rIns="0" bIns="0" rtlCol="0" anchor="ctr"/>
+          <a:lstStyle/>
+          <a:p>
+            <a:pPr marL="0" indent="0">
               <a:buNone/>
             </a:pPr>
             <a:r>
@@ -2618,9 +2530,9 @@
                 <a:solidFill>
                   <a:srgbClr val="64748B"/>
                 </a:solidFill>
-                <a:latin typeface="Segoe UI" pitchFamily="34" charset="0"/>
-                <a:ea typeface="Segoe UI" pitchFamily="34" charset="-122"/>
-                <a:cs typeface="Segoe UI" pitchFamily="34" charset="-120"/>
+                <a:latin typeface="Segoe UI" panose="020B0502040204020203" pitchFamily="34" charset="0"/>
+                <a:ea typeface="Segoe UI" panose="020B0502040204020203" pitchFamily="34" charset="-122"/>
+                <a:cs typeface="Segoe UI" panose="020B0502040204020203" pitchFamily="34" charset="-120"/>
               </a:rPr>
               <a:t>EC8208 Software Architecture  ·  University of Ruhuna</a:t>
             </a:r>
@@ -2643,13 +2555,12 @@
             <a:avLst/>
           </a:prstGeom>
           <a:noFill/>
-          <a:ln/>
-        </p:spPr>
-        <p:txBody>
-          <a:bodyPr wrap="square" lIns="0" tIns="0" rIns="0" bIns="0" rtlCol="0" anchor="ctr"/>
-          <a:lstStyle/>
-          <a:p>
-            <a:pPr algn="r" indent="0" marL="0">
+        </p:spPr>
+        <p:txBody>
+          <a:bodyPr wrap="square" lIns="0" tIns="0" rIns="0" bIns="0" rtlCol="0" anchor="ctr"/>
+          <a:lstStyle/>
+          <a:p>
+            <a:pPr marL="0" indent="0" algn="r">
               <a:buNone/>
             </a:pPr>
             <a:r>
@@ -2657,9 +2568,9 @@
                 <a:solidFill>
                   <a:srgbClr val="64748B"/>
                 </a:solidFill>
-                <a:latin typeface="Segoe UI" pitchFamily="34" charset="0"/>
-                <a:ea typeface="Segoe UI" pitchFamily="34" charset="-122"/>
-                <a:cs typeface="Segoe UI" pitchFamily="34" charset="-120"/>
+                <a:latin typeface="Segoe UI" panose="020B0502040204020203" pitchFamily="34" charset="0"/>
+                <a:ea typeface="Segoe UI" panose="020B0502040204020203" pitchFamily="34" charset="-122"/>
+                <a:cs typeface="Segoe UI" panose="020B0502040204020203" pitchFamily="34" charset="-120"/>
               </a:rPr>
               <a:t>02  ·  0:08–0:33</a:t>
             </a:r>
@@ -2709,13 +2620,12 @@
             <a:avLst/>
           </a:prstGeom>
           <a:noFill/>
-          <a:ln/>
-        </p:spPr>
-        <p:txBody>
-          <a:bodyPr wrap="square" lIns="0" tIns="0" rIns="0" bIns="0" rtlCol="0" anchor="ctr"/>
-          <a:lstStyle/>
-          <a:p>
-            <a:pPr algn="ctr" indent="0" marL="0">
+        </p:spPr>
+        <p:txBody>
+          <a:bodyPr wrap="square" lIns="0" tIns="0" rIns="0" bIns="0" rtlCol="0" anchor="ctr"/>
+          <a:lstStyle/>
+          <a:p>
+            <a:pPr marL="0" indent="0" algn="ctr">
               <a:buNone/>
             </a:pPr>
             <a:r>
@@ -2723,9 +2633,9 @@
                 <a:solidFill>
                   <a:srgbClr val="0B1B33"/>
                 </a:solidFill>
-                <a:latin typeface="Segoe UI" pitchFamily="34" charset="0"/>
-                <a:ea typeface="Segoe UI" pitchFamily="34" charset="-122"/>
-                <a:cs typeface="Segoe UI" pitchFamily="34" charset="-120"/>
+                <a:latin typeface="Segoe UI" panose="020B0502040204020203" pitchFamily="34" charset="0"/>
+                <a:ea typeface="Segoe UI" panose="020B0502040204020203" pitchFamily="34" charset="-122"/>
+                <a:cs typeface="Segoe UI" panose="020B0502040204020203" pitchFamily="34" charset="-120"/>
               </a:rPr>
               <a:t>React console  ·  nginx  ·  live updates over WebSocket</a:t>
             </a:r>
@@ -2775,13 +2685,12 @@
             <a:avLst/>
           </a:prstGeom>
           <a:noFill/>
-          <a:ln/>
-        </p:spPr>
-        <p:txBody>
-          <a:bodyPr wrap="square" lIns="0" tIns="0" rIns="0" bIns="0" rtlCol="0" anchor="ctr"/>
-          <a:lstStyle/>
-          <a:p>
-            <a:pPr algn="ctr" indent="0" marL="0">
+        </p:spPr>
+        <p:txBody>
+          <a:bodyPr wrap="square" lIns="0" tIns="0" rIns="0" bIns="0" rtlCol="0" anchor="ctr"/>
+          <a:lstStyle/>
+          <a:p>
+            <a:pPr marL="0" indent="0" algn="ctr">
               <a:buNone/>
             </a:pPr>
             <a:r>
@@ -2789,9 +2698,9 @@
                 <a:solidFill>
                   <a:srgbClr val="FFFFFF"/>
                 </a:solidFill>
-                <a:latin typeface="Segoe UI Semibold" pitchFamily="34" charset="0"/>
-                <a:ea typeface="Segoe UI Semibold" pitchFamily="34" charset="-122"/>
-                <a:cs typeface="Segoe UI Semibold" pitchFamily="34" charset="-120"/>
+                <a:latin typeface="Segoe UI Semibold" panose="020B0702040204020203" pitchFamily="34" charset="0"/>
+                <a:ea typeface="Segoe UI Semibold" panose="020B0702040204020203" pitchFamily="34" charset="-122"/>
+                <a:cs typeface="Segoe UI Semibold" panose="020B0702040204020203" pitchFamily="34" charset="-120"/>
               </a:rPr>
               <a:t>API Gateway  ·  JWT validation  ·  role policy</a:t>
             </a:r>
@@ -2841,13 +2750,12 @@
             <a:avLst/>
           </a:prstGeom>
           <a:noFill/>
-          <a:ln/>
-        </p:spPr>
-        <p:txBody>
-          <a:bodyPr wrap="square" lIns="0" tIns="0" rIns="0" bIns="0" rtlCol="0" anchor="ctr"/>
-          <a:lstStyle/>
-          <a:p>
-            <a:pPr algn="ctr" indent="0" marL="0">
+        </p:spPr>
+        <p:txBody>
+          <a:bodyPr wrap="square" lIns="0" tIns="0" rIns="0" bIns="0" rtlCol="0" anchor="ctr"/>
+          <a:lstStyle/>
+          <a:p>
+            <a:pPr marL="0" indent="0" algn="ctr">
               <a:buNone/>
             </a:pPr>
             <a:r>
@@ -2855,9 +2763,9 @@
                 <a:solidFill>
                   <a:srgbClr val="0B1B33"/>
                 </a:solidFill>
-                <a:latin typeface="Segoe UI Semibold" pitchFamily="34" charset="0"/>
-                <a:ea typeface="Segoe UI Semibold" pitchFamily="34" charset="-122"/>
-                <a:cs typeface="Segoe UI Semibold" pitchFamily="34" charset="-120"/>
+                <a:latin typeface="Segoe UI Semibold" panose="020B0702040204020203" pitchFamily="34" charset="0"/>
+                <a:ea typeface="Segoe UI Semibold" panose="020B0702040204020203" pitchFamily="34" charset="-122"/>
+                <a:cs typeface="Segoe UI Semibold" panose="020B0702040204020203" pitchFamily="34" charset="-120"/>
               </a:rPr>
               <a:t>Identity</a:t>
             </a:r>
@@ -2880,13 +2788,12 @@
             <a:avLst/>
           </a:prstGeom>
           <a:noFill/>
-          <a:ln/>
-        </p:spPr>
-        <p:txBody>
-          <a:bodyPr wrap="square" lIns="0" tIns="0" rIns="0" bIns="0" rtlCol="0" anchor="ctr"/>
-          <a:lstStyle/>
-          <a:p>
-            <a:pPr algn="ctr" indent="0" marL="0">
+        </p:spPr>
+        <p:txBody>
+          <a:bodyPr wrap="square" lIns="0" tIns="0" rIns="0" bIns="0" rtlCol="0" anchor="ctr"/>
+          <a:lstStyle/>
+          <a:p>
+            <a:pPr marL="0" indent="0" algn="ctr">
               <a:buNone/>
             </a:pPr>
             <a:r>
@@ -2894,9 +2801,9 @@
                 <a:solidFill>
                   <a:srgbClr val="64748B"/>
                 </a:solidFill>
-                <a:latin typeface="Segoe UI" pitchFamily="34" charset="0"/>
-                <a:ea typeface="Segoe UI" pitchFamily="34" charset="-122"/>
-                <a:cs typeface="Segoe UI" pitchFamily="34" charset="-120"/>
+                <a:latin typeface="Segoe UI" panose="020B0502040204020203" pitchFamily="34" charset="0"/>
+                <a:ea typeface="Segoe UI" panose="020B0502040204020203" pitchFamily="34" charset="-122"/>
+                <a:cs typeface="Segoe UI" panose="020B0502040204020203" pitchFamily="34" charset="-120"/>
               </a:rPr>
               <a:t>PostgreSQL</a:t>
             </a:r>
@@ -2946,13 +2853,12 @@
             <a:avLst/>
           </a:prstGeom>
           <a:noFill/>
-          <a:ln/>
-        </p:spPr>
-        <p:txBody>
-          <a:bodyPr wrap="square" lIns="0" tIns="0" rIns="0" bIns="0" rtlCol="0" anchor="ctr"/>
-          <a:lstStyle/>
-          <a:p>
-            <a:pPr algn="ctr" indent="0" marL="0">
+        </p:spPr>
+        <p:txBody>
+          <a:bodyPr wrap="square" lIns="0" tIns="0" rIns="0" bIns="0" rtlCol="0" anchor="ctr"/>
+          <a:lstStyle/>
+          <a:p>
+            <a:pPr marL="0" indent="0" algn="ctr">
               <a:buNone/>
             </a:pPr>
             <a:r>
@@ -2960,9 +2866,9 @@
                 <a:solidFill>
                   <a:srgbClr val="0B1B33"/>
                 </a:solidFill>
-                <a:latin typeface="Segoe UI Semibold" pitchFamily="34" charset="0"/>
-                <a:ea typeface="Segoe UI Semibold" pitchFamily="34" charset="-122"/>
-                <a:cs typeface="Segoe UI Semibold" pitchFamily="34" charset="-120"/>
+                <a:latin typeface="Segoe UI Semibold" panose="020B0702040204020203" pitchFamily="34" charset="0"/>
+                <a:ea typeface="Segoe UI Semibold" panose="020B0702040204020203" pitchFamily="34" charset="-122"/>
+                <a:cs typeface="Segoe UI Semibold" panose="020B0702040204020203" pitchFamily="34" charset="-120"/>
               </a:rPr>
               <a:t>Asset</a:t>
             </a:r>
@@ -2985,13 +2891,12 @@
             <a:avLst/>
           </a:prstGeom>
           <a:noFill/>
-          <a:ln/>
-        </p:spPr>
-        <p:txBody>
-          <a:bodyPr wrap="square" lIns="0" tIns="0" rIns="0" bIns="0" rtlCol="0" anchor="ctr"/>
-          <a:lstStyle/>
-          <a:p>
-            <a:pPr algn="ctr" indent="0" marL="0">
+        </p:spPr>
+        <p:txBody>
+          <a:bodyPr wrap="square" lIns="0" tIns="0" rIns="0" bIns="0" rtlCol="0" anchor="ctr"/>
+          <a:lstStyle/>
+          <a:p>
+            <a:pPr marL="0" indent="0" algn="ctr">
               <a:buNone/>
             </a:pPr>
             <a:r>
@@ -2999,9 +2904,9 @@
                 <a:solidFill>
                   <a:srgbClr val="64748B"/>
                 </a:solidFill>
-                <a:latin typeface="Segoe UI" pitchFamily="34" charset="0"/>
-                <a:ea typeface="Segoe UI" pitchFamily="34" charset="-122"/>
-                <a:cs typeface="Segoe UI" pitchFamily="34" charset="-120"/>
+                <a:latin typeface="Segoe UI" panose="020B0502040204020203" pitchFamily="34" charset="0"/>
+                <a:ea typeface="Segoe UI" panose="020B0502040204020203" pitchFamily="34" charset="-122"/>
+                <a:cs typeface="Segoe UI" panose="020B0502040204020203" pitchFamily="34" charset="-120"/>
               </a:rPr>
               <a:t>PostgreSQL</a:t>
             </a:r>
@@ -3051,13 +2956,12 @@
             <a:avLst/>
           </a:prstGeom>
           <a:noFill/>
-          <a:ln/>
-        </p:spPr>
-        <p:txBody>
-          <a:bodyPr wrap="square" lIns="0" tIns="0" rIns="0" bIns="0" rtlCol="0" anchor="ctr"/>
-          <a:lstStyle/>
-          <a:p>
-            <a:pPr algn="ctr" indent="0" marL="0">
+        </p:spPr>
+        <p:txBody>
+          <a:bodyPr wrap="square" lIns="0" tIns="0" rIns="0" bIns="0" rtlCol="0" anchor="ctr"/>
+          <a:lstStyle/>
+          <a:p>
+            <a:pPr marL="0" indent="0" algn="ctr">
               <a:buNone/>
             </a:pPr>
             <a:r>
@@ -3065,9 +2969,9 @@
                 <a:solidFill>
                   <a:srgbClr val="0B1B33"/>
                 </a:solidFill>
-                <a:latin typeface="Segoe UI Semibold" pitchFamily="34" charset="0"/>
-                <a:ea typeface="Segoe UI Semibold" pitchFamily="34" charset="-122"/>
-                <a:cs typeface="Segoe UI Semibold" pitchFamily="34" charset="-120"/>
+                <a:latin typeface="Segoe UI Semibold" panose="020B0702040204020203" pitchFamily="34" charset="0"/>
+                <a:ea typeface="Segoe UI Semibold" panose="020B0702040204020203" pitchFamily="34" charset="-122"/>
+                <a:cs typeface="Segoe UI Semibold" panose="020B0702040204020203" pitchFamily="34" charset="-120"/>
               </a:rPr>
               <a:t>Monitoring</a:t>
             </a:r>
@@ -3090,13 +2994,12 @@
             <a:avLst/>
           </a:prstGeom>
           <a:noFill/>
-          <a:ln/>
-        </p:spPr>
-        <p:txBody>
-          <a:bodyPr wrap="square" lIns="0" tIns="0" rIns="0" bIns="0" rtlCol="0" anchor="ctr"/>
-          <a:lstStyle/>
-          <a:p>
-            <a:pPr algn="ctr" indent="0" marL="0">
+        </p:spPr>
+        <p:txBody>
+          <a:bodyPr wrap="square" lIns="0" tIns="0" rIns="0" bIns="0" rtlCol="0" anchor="ctr"/>
+          <a:lstStyle/>
+          <a:p>
+            <a:pPr marL="0" indent="0" algn="ctr">
               <a:buNone/>
             </a:pPr>
             <a:r>
@@ -3104,9 +3007,9 @@
                 <a:solidFill>
                   <a:srgbClr val="64748B"/>
                 </a:solidFill>
-                <a:latin typeface="Segoe UI" pitchFamily="34" charset="0"/>
-                <a:ea typeface="Segoe UI" pitchFamily="34" charset="-122"/>
-                <a:cs typeface="Segoe UI" pitchFamily="34" charset="-120"/>
+                <a:latin typeface="Segoe UI" panose="020B0502040204020203" pitchFamily="34" charset="0"/>
+                <a:ea typeface="Segoe UI" panose="020B0502040204020203" pitchFamily="34" charset="-122"/>
+                <a:cs typeface="Segoe UI" panose="020B0502040204020203" pitchFamily="34" charset="-120"/>
               </a:rPr>
               <a:t>PostgreSQL</a:t>
             </a:r>
@@ -3156,13 +3059,12 @@
             <a:avLst/>
           </a:prstGeom>
           <a:noFill/>
-          <a:ln/>
-        </p:spPr>
-        <p:txBody>
-          <a:bodyPr wrap="square" lIns="0" tIns="0" rIns="0" bIns="0" rtlCol="0" anchor="ctr"/>
-          <a:lstStyle/>
-          <a:p>
-            <a:pPr algn="ctr" indent="0" marL="0">
+        </p:spPr>
+        <p:txBody>
+          <a:bodyPr wrap="square" lIns="0" tIns="0" rIns="0" bIns="0" rtlCol="0" anchor="ctr"/>
+          <a:lstStyle/>
+          <a:p>
+            <a:pPr marL="0" indent="0" algn="ctr">
               <a:buNone/>
             </a:pPr>
             <a:r>
@@ -3170,9 +3072,9 @@
                 <a:solidFill>
                   <a:srgbClr val="0B1B33"/>
                 </a:solidFill>
-                <a:latin typeface="Segoe UI Semibold" pitchFamily="34" charset="0"/>
-                <a:ea typeface="Segoe UI Semibold" pitchFamily="34" charset="-122"/>
-                <a:cs typeface="Segoe UI Semibold" pitchFamily="34" charset="-120"/>
+                <a:latin typeface="Segoe UI Semibold" panose="020B0702040204020203" pitchFamily="34" charset="0"/>
+                <a:ea typeface="Segoe UI Semibold" panose="020B0702040204020203" pitchFamily="34" charset="-122"/>
+                <a:cs typeface="Segoe UI Semibold" panose="020B0702040204020203" pitchFamily="34" charset="-120"/>
               </a:rPr>
               <a:t>Maintenance</a:t>
             </a:r>
@@ -3195,13 +3097,12 @@
             <a:avLst/>
           </a:prstGeom>
           <a:noFill/>
-          <a:ln/>
-        </p:spPr>
-        <p:txBody>
-          <a:bodyPr wrap="square" lIns="0" tIns="0" rIns="0" bIns="0" rtlCol="0" anchor="ctr"/>
-          <a:lstStyle/>
-          <a:p>
-            <a:pPr algn="ctr" indent="0" marL="0">
+        </p:spPr>
+        <p:txBody>
+          <a:bodyPr wrap="square" lIns="0" tIns="0" rIns="0" bIns="0" rtlCol="0" anchor="ctr"/>
+          <a:lstStyle/>
+          <a:p>
+            <a:pPr marL="0" indent="0" algn="ctr">
               <a:buNone/>
             </a:pPr>
             <a:r>
@@ -3209,9 +3110,9 @@
                 <a:solidFill>
                   <a:srgbClr val="64748B"/>
                 </a:solidFill>
-                <a:latin typeface="Segoe UI" pitchFamily="34" charset="0"/>
-                <a:ea typeface="Segoe UI" pitchFamily="34" charset="-122"/>
-                <a:cs typeface="Segoe UI" pitchFamily="34" charset="-120"/>
+                <a:latin typeface="Segoe UI" panose="020B0502040204020203" pitchFamily="34" charset="0"/>
+                <a:ea typeface="Segoe UI" panose="020B0502040204020203" pitchFamily="34" charset="-122"/>
+                <a:cs typeface="Segoe UI" panose="020B0502040204020203" pitchFamily="34" charset="-120"/>
               </a:rPr>
               <a:t>PostgreSQL</a:t>
             </a:r>
@@ -3261,13 +3162,12 @@
             <a:avLst/>
           </a:prstGeom>
           <a:noFill/>
-          <a:ln/>
-        </p:spPr>
-        <p:txBody>
-          <a:bodyPr wrap="square" lIns="0" tIns="0" rIns="0" bIns="0" rtlCol="0" anchor="ctr"/>
-          <a:lstStyle/>
-          <a:p>
-            <a:pPr algn="ctr" indent="0" marL="0">
+        </p:spPr>
+        <p:txBody>
+          <a:bodyPr wrap="square" lIns="0" tIns="0" rIns="0" bIns="0" rtlCol="0" anchor="ctr"/>
+          <a:lstStyle/>
+          <a:p>
+            <a:pPr marL="0" indent="0" algn="ctr">
               <a:buNone/>
             </a:pPr>
             <a:r>
@@ -3275,9 +3175,9 @@
                 <a:solidFill>
                   <a:srgbClr val="0B1B33"/>
                 </a:solidFill>
-                <a:latin typeface="Segoe UI Semibold" pitchFamily="34" charset="0"/>
-                <a:ea typeface="Segoe UI Semibold" pitchFamily="34" charset="-122"/>
-                <a:cs typeface="Segoe UI Semibold" pitchFamily="34" charset="-120"/>
+                <a:latin typeface="Segoe UI Semibold" panose="020B0702040204020203" pitchFamily="34" charset="0"/>
+                <a:ea typeface="Segoe UI Semibold" panose="020B0702040204020203" pitchFamily="34" charset="-122"/>
+                <a:cs typeface="Segoe UI Semibold" panose="020B0702040204020203" pitchFamily="34" charset="-120"/>
               </a:rPr>
               <a:t>Notification</a:t>
             </a:r>
@@ -3300,13 +3200,12 @@
             <a:avLst/>
           </a:prstGeom>
           <a:noFill/>
-          <a:ln/>
-        </p:spPr>
-        <p:txBody>
-          <a:bodyPr wrap="square" lIns="0" tIns="0" rIns="0" bIns="0" rtlCol="0" anchor="ctr"/>
-          <a:lstStyle/>
-          <a:p>
-            <a:pPr algn="ctr" indent="0" marL="0">
+        </p:spPr>
+        <p:txBody>
+          <a:bodyPr wrap="square" lIns="0" tIns="0" rIns="0" bIns="0" rtlCol="0" anchor="ctr"/>
+          <a:lstStyle/>
+          <a:p>
+            <a:pPr marL="0" indent="0" algn="ctr">
               <a:buNone/>
             </a:pPr>
             <a:r>
@@ -3314,9 +3213,9 @@
                 <a:solidFill>
                   <a:srgbClr val="64748B"/>
                 </a:solidFill>
-                <a:latin typeface="Segoe UI" pitchFamily="34" charset="0"/>
-                <a:ea typeface="Segoe UI" pitchFamily="34" charset="-122"/>
-                <a:cs typeface="Segoe UI" pitchFamily="34" charset="-120"/>
+                <a:latin typeface="Segoe UI" panose="020B0502040204020203" pitchFamily="34" charset="0"/>
+                <a:ea typeface="Segoe UI" panose="020B0502040204020203" pitchFamily="34" charset="-122"/>
+                <a:cs typeface="Segoe UI" panose="020B0502040204020203" pitchFamily="34" charset="-120"/>
               </a:rPr>
               <a:t>PostgreSQL</a:t>
             </a:r>
@@ -3366,13 +3265,12 @@
             <a:avLst/>
           </a:prstGeom>
           <a:noFill/>
-          <a:ln/>
-        </p:spPr>
-        <p:txBody>
-          <a:bodyPr wrap="square" lIns="0" tIns="0" rIns="0" bIns="0" rtlCol="0" anchor="ctr"/>
-          <a:lstStyle/>
-          <a:p>
-            <a:pPr algn="ctr" indent="0" marL="0">
+        </p:spPr>
+        <p:txBody>
+          <a:bodyPr wrap="square" lIns="0" tIns="0" rIns="0" bIns="0" rtlCol="0" anchor="ctr"/>
+          <a:lstStyle/>
+          <a:p>
+            <a:pPr marL="0" indent="0" algn="ctr">
               <a:buNone/>
             </a:pPr>
             <a:r>
@@ -3380,9 +3278,9 @@
                 <a:solidFill>
                   <a:srgbClr val="0B1B33"/>
                 </a:solidFill>
-                <a:latin typeface="Segoe UI Semibold" pitchFamily="34" charset="0"/>
-                <a:ea typeface="Segoe UI Semibold" pitchFamily="34" charset="-122"/>
-                <a:cs typeface="Segoe UI Semibold" pitchFamily="34" charset="-120"/>
+                <a:latin typeface="Segoe UI Semibold" panose="020B0702040204020203" pitchFamily="34" charset="0"/>
+                <a:ea typeface="Segoe UI Semibold" panose="020B0702040204020203" pitchFamily="34" charset="-122"/>
+                <a:cs typeface="Segoe UI Semibold" panose="020B0702040204020203" pitchFamily="34" charset="-120"/>
               </a:rPr>
               <a:t>Analytics</a:t>
             </a:r>
@@ -3405,13 +3303,12 @@
             <a:avLst/>
           </a:prstGeom>
           <a:noFill/>
-          <a:ln/>
-        </p:spPr>
-        <p:txBody>
-          <a:bodyPr wrap="square" lIns="0" tIns="0" rIns="0" bIns="0" rtlCol="0" anchor="ctr"/>
-          <a:lstStyle/>
-          <a:p>
-            <a:pPr algn="ctr" indent="0" marL="0">
+        </p:spPr>
+        <p:txBody>
+          <a:bodyPr wrap="square" lIns="0" tIns="0" rIns="0" bIns="0" rtlCol="0" anchor="ctr"/>
+          <a:lstStyle/>
+          <a:p>
+            <a:pPr marL="0" indent="0" algn="ctr">
               <a:buNone/>
             </a:pPr>
             <a:r>
@@ -3419,9 +3316,9 @@
                 <a:solidFill>
                   <a:srgbClr val="64748B"/>
                 </a:solidFill>
-                <a:latin typeface="Segoe UI" pitchFamily="34" charset="0"/>
-                <a:ea typeface="Segoe UI" pitchFamily="34" charset="-122"/>
-                <a:cs typeface="Segoe UI" pitchFamily="34" charset="-120"/>
+                <a:latin typeface="Segoe UI" panose="020B0502040204020203" pitchFamily="34" charset="0"/>
+                <a:ea typeface="Segoe UI" panose="020B0502040204020203" pitchFamily="34" charset="-122"/>
+                <a:cs typeface="Segoe UI" panose="020B0502040204020203" pitchFamily="34" charset="-120"/>
               </a:rPr>
               <a:t>PostgreSQL</a:t>
             </a:r>
@@ -3471,13 +3368,12 @@
             <a:avLst/>
           </a:prstGeom>
           <a:noFill/>
-          <a:ln/>
-        </p:spPr>
-        <p:txBody>
-          <a:bodyPr wrap="square" lIns="0" tIns="0" rIns="0" bIns="0" rtlCol="0" anchor="ctr"/>
-          <a:lstStyle/>
-          <a:p>
-            <a:pPr algn="ctr" indent="0" marL="0">
+        </p:spPr>
+        <p:txBody>
+          <a:bodyPr wrap="square" lIns="0" tIns="0" rIns="0" bIns="0" rtlCol="0" anchor="ctr"/>
+          <a:lstStyle/>
+          <a:p>
+            <a:pPr marL="0" indent="0" algn="ctr">
               <a:buNone/>
             </a:pPr>
             <a:r>
@@ -3485,9 +3381,9 @@
                 <a:solidFill>
                   <a:srgbClr val="0B1B33"/>
                 </a:solidFill>
-                <a:latin typeface="Segoe UI" pitchFamily="34" charset="0"/>
-                <a:ea typeface="Segoe UI" pitchFamily="34" charset="-122"/>
-                <a:cs typeface="Segoe UI" pitchFamily="34" charset="-120"/>
+                <a:latin typeface="Segoe UI" panose="020B0502040204020203" pitchFamily="34" charset="0"/>
+                <a:ea typeface="Segoe UI" panose="020B0502040204020203" pitchFamily="34" charset="-122"/>
+                <a:cs typeface="Segoe UI" panose="020B0502040204020203" pitchFamily="34" charset="-120"/>
               </a:rPr>
               <a:t>RabbitMQ events  ·  Redis cache  ·  Prometheus and Grafana</a:t>
             </a:r>
@@ -3537,13 +3433,12 @@
             <a:avLst/>
           </a:prstGeom>
           <a:noFill/>
-          <a:ln/>
-        </p:spPr>
-        <p:txBody>
-          <a:bodyPr wrap="square" lIns="0" tIns="0" rIns="0" bIns="0" rtlCol="0" anchor="ctr"/>
-          <a:lstStyle/>
-          <a:p>
-            <a:pPr indent="0" marL="0">
+        </p:spPr>
+        <p:txBody>
+          <a:bodyPr wrap="square" lIns="0" tIns="0" rIns="0" bIns="0" rtlCol="0" anchor="ctr"/>
+          <a:lstStyle/>
+          <a:p>
+            <a:pPr marL="0" indent="0">
               <a:buNone/>
             </a:pPr>
             <a:r>
@@ -3551,23 +3446,20 @@
                 <a:solidFill>
                   <a:srgbClr val="0891B2"/>
                 </a:solidFill>
-                <a:latin typeface="Segoe UI" pitchFamily="34" charset="0"/>
-                <a:ea typeface="Segoe UI" pitchFamily="34" charset="-122"/>
-                <a:cs typeface="Segoe UI" pitchFamily="34" charset="-120"/>
+                <a:latin typeface="Segoe UI" panose="020B0502040204020203" pitchFamily="34" charset="0"/>
+                <a:ea typeface="Segoe UI" panose="020B0502040204020203" pitchFamily="34" charset="-122"/>
+                <a:cs typeface="Segoe UI" panose="020B0502040204020203" pitchFamily="34" charset="-120"/>
               </a:rPr>
               <a:t>LIVE  </a:t>
             </a:r>
-            <a:pPr indent="0" marL="0">
-              <a:buNone/>
-            </a:pPr>
             <a:r>
               <a:rPr lang="en-US" sz="1100" dirty="0">
                 <a:solidFill>
                   <a:srgbClr val="0B1B33"/>
                 </a:solidFill>
-                <a:latin typeface="Segoe UI" pitchFamily="34" charset="0"/>
-                <a:ea typeface="Segoe UI" pitchFamily="34" charset="-122"/>
-                <a:cs typeface="Segoe UI" pitchFamily="34" charset="-120"/>
+                <a:latin typeface="Segoe UI" panose="020B0502040204020203" pitchFamily="34" charset="0"/>
+                <a:ea typeface="Segoe UI" panose="020B0502040204020203" pitchFamily="34" charset="-122"/>
+                <a:cs typeface="Segoe UI" panose="020B0502040204020203" pitchFamily="34" charset="-120"/>
               </a:rPr>
               <a:t>Console: sign in, Control room</a:t>
             </a:r>
@@ -3585,12 +3477,13 @@
 
 <file path=ppt/slides/slide3.xml><?xml version="1.0" encoding="utf-8"?>
 <p:sld xmlns:a="http://schemas.openxmlformats.org/drawingml/2006/main" xmlns:r="http://schemas.openxmlformats.org/officeDocument/2006/relationships" xmlns:p="http://schemas.openxmlformats.org/presentationml/2006/main">
-  <p:cSld name="Slide 3">
+  <p:cSld>
     <p:bg>
       <p:bgPr>
         <a:solidFill>
           <a:srgbClr val="F6F8FB"/>
         </a:solidFill>
+        <a:effectLst/>
       </p:bgPr>
     </p:bg>
     <p:spTree>
@@ -3647,25 +3540,24 @@
             <a:avLst/>
           </a:prstGeom>
           <a:noFill/>
-          <a:ln/>
-        </p:spPr>
-        <p:txBody>
-          <a:bodyPr wrap="square" lIns="0" tIns="0" rIns="0" bIns="0" rtlCol="0" anchor="ctr"/>
-          <a:lstStyle/>
-          <a:p>
-            <a:pPr indent="0" marL="0">
-              <a:buNone/>
-            </a:pPr>
-            <a:r>
-              <a:rPr lang="en-US" sz="1050" spc="400" kern="0" dirty="0">
+        </p:spPr>
+        <p:txBody>
+          <a:bodyPr wrap="square" lIns="0" tIns="0" rIns="0" bIns="0" rtlCol="0" anchor="ctr"/>
+          <a:lstStyle/>
+          <a:p>
+            <a:pPr marL="0" indent="0">
+              <a:buNone/>
+            </a:pPr>
+            <a:r>
+              <a:rPr lang="en-US" sz="1050" kern="0" spc="400" dirty="0">
                 <a:solidFill>
                   <a:srgbClr val="0891B2"/>
                 </a:solidFill>
-                <a:latin typeface="Segoe UI Semibold" pitchFamily="34" charset="0"/>
-                <a:ea typeface="Segoe UI Semibold" pitchFamily="34" charset="-122"/>
-                <a:cs typeface="Segoe UI Semibold" pitchFamily="34" charset="-120"/>
-              </a:rPr>
-              <a:t>03 · NEMAL · ASSET SERVICE</a:t>
+                <a:latin typeface="Segoe UI Semibold" panose="020B0702040204020203" pitchFamily="34" charset="0"/>
+                <a:ea typeface="Segoe UI Semibold" panose="020B0702040204020203" pitchFamily="34" charset="-122"/>
+                <a:cs typeface="Segoe UI Semibold" panose="020B0702040204020203" pitchFamily="34" charset="-120"/>
+              </a:rPr>
+              <a:t>03 · ASSET SERVICE</a:t>
             </a:r>
             <a:endParaRPr lang="en-US" sz="1050" dirty="0"/>
           </a:p>
@@ -3686,13 +3578,12 @@
             <a:avLst/>
           </a:prstGeom>
           <a:noFill/>
-          <a:ln/>
-        </p:spPr>
-        <p:txBody>
-          <a:bodyPr wrap="square" lIns="0" tIns="0" rIns="0" bIns="0" rtlCol="0" anchor="ctr"/>
-          <a:lstStyle/>
-          <a:p>
-            <a:pPr indent="0" marL="0">
+        </p:spPr>
+        <p:txBody>
+          <a:bodyPr wrap="square" lIns="0" tIns="0" rIns="0" bIns="0" rtlCol="0" anchor="ctr"/>
+          <a:lstStyle/>
+          <a:p>
+            <a:pPr marL="0" indent="0">
               <a:buNone/>
             </a:pPr>
             <a:r>
@@ -3700,9 +3591,9 @@
                 <a:solidFill>
                   <a:srgbClr val="0B1B33"/>
                 </a:solidFill>
-                <a:latin typeface="Segoe UI Semibold" pitchFamily="34" charset="0"/>
-                <a:ea typeface="Segoe UI Semibold" pitchFamily="34" charset="-122"/>
-                <a:cs typeface="Segoe UI Semibold" pitchFamily="34" charset="-120"/>
+                <a:latin typeface="Segoe UI Semibold" panose="020B0702040204020203" pitchFamily="34" charset="0"/>
+                <a:ea typeface="Segoe UI Semibold" panose="020B0702040204020203" pitchFamily="34" charset="-122"/>
+                <a:cs typeface="Segoe UI Semibold" panose="020B0702040204020203" pitchFamily="34" charset="-120"/>
               </a:rPr>
               <a:t>The registry every service relies on</a:t>
             </a:r>
@@ -3748,13 +3639,12 @@
             <a:avLst/>
           </a:prstGeom>
           <a:noFill/>
-          <a:ln/>
-        </p:spPr>
-        <p:txBody>
-          <a:bodyPr wrap="square" lIns="0" tIns="0" rIns="0" bIns="0" rtlCol="0" anchor="ctr"/>
-          <a:lstStyle/>
-          <a:p>
-            <a:pPr indent="0" marL="0">
+        </p:spPr>
+        <p:txBody>
+          <a:bodyPr wrap="square" lIns="0" tIns="0" rIns="0" bIns="0" rtlCol="0" anchor="ctr"/>
+          <a:lstStyle/>
+          <a:p>
+            <a:pPr marL="0" indent="0">
               <a:buNone/>
             </a:pPr>
             <a:r>
@@ -3762,9 +3652,9 @@
                 <a:solidFill>
                   <a:srgbClr val="64748B"/>
                 </a:solidFill>
-                <a:latin typeface="Segoe UI" pitchFamily="34" charset="0"/>
-                <a:ea typeface="Segoe UI" pitchFamily="34" charset="-122"/>
-                <a:cs typeface="Segoe UI" pitchFamily="34" charset="-120"/>
+                <a:latin typeface="Segoe UI" panose="020B0502040204020203" pitchFamily="34" charset="0"/>
+                <a:ea typeface="Segoe UI" panose="020B0502040204020203" pitchFamily="34" charset="-122"/>
+                <a:cs typeface="Segoe UI" panose="020B0502040204020203" pitchFamily="34" charset="-120"/>
               </a:rPr>
               <a:t>EC8208 Software Architecture  ·  University of Ruhuna</a:t>
             </a:r>
@@ -3787,13 +3677,12 @@
             <a:avLst/>
           </a:prstGeom>
           <a:noFill/>
-          <a:ln/>
-        </p:spPr>
-        <p:txBody>
-          <a:bodyPr wrap="square" lIns="0" tIns="0" rIns="0" bIns="0" rtlCol="0" anchor="ctr"/>
-          <a:lstStyle/>
-          <a:p>
-            <a:pPr algn="r" indent="0" marL="0">
+        </p:spPr>
+        <p:txBody>
+          <a:bodyPr wrap="square" lIns="0" tIns="0" rIns="0" bIns="0" rtlCol="0" anchor="ctr"/>
+          <a:lstStyle/>
+          <a:p>
+            <a:pPr marL="0" indent="0" algn="r">
               <a:buNone/>
             </a:pPr>
             <a:r>
@@ -3801,9 +3690,9 @@
                 <a:solidFill>
                   <a:srgbClr val="64748B"/>
                 </a:solidFill>
-                <a:latin typeface="Segoe UI" pitchFamily="34" charset="0"/>
-                <a:ea typeface="Segoe UI" pitchFamily="34" charset="-122"/>
-                <a:cs typeface="Segoe UI" pitchFamily="34" charset="-120"/>
+                <a:latin typeface="Segoe UI" panose="020B0502040204020203" pitchFamily="34" charset="0"/>
+                <a:ea typeface="Segoe UI" panose="020B0502040204020203" pitchFamily="34" charset="-122"/>
+                <a:cs typeface="Segoe UI" panose="020B0502040204020203" pitchFamily="34" charset="-120"/>
               </a:rPr>
               <a:t>03  ·  0:33–1:00</a:t>
             </a:r>
@@ -3853,13 +3742,12 @@
             <a:avLst/>
           </a:prstGeom>
           <a:noFill/>
-          <a:ln/>
-        </p:spPr>
-        <p:txBody>
-          <a:bodyPr wrap="square" lIns="0" tIns="0" rIns="0" bIns="0" rtlCol="0" anchor="ctr"/>
-          <a:lstStyle/>
-          <a:p>
-            <a:pPr algn="ctr" indent="0" marL="0">
+        </p:spPr>
+        <p:txBody>
+          <a:bodyPr wrap="square" lIns="0" tIns="0" rIns="0" bIns="0" rtlCol="0" anchor="ctr"/>
+          <a:lstStyle/>
+          <a:p>
+            <a:pPr marL="0" indent="0" algn="ctr">
               <a:buNone/>
             </a:pPr>
             <a:r>
@@ -3867,9 +3755,9 @@
                 <a:solidFill>
                   <a:srgbClr val="FFFFFF"/>
                 </a:solidFill>
-                <a:latin typeface="Segoe UI Semibold" pitchFamily="34" charset="0"/>
-                <a:ea typeface="Segoe UI Semibold" pitchFamily="34" charset="-122"/>
-                <a:cs typeface="Segoe UI Semibold" pitchFamily="34" charset="-120"/>
+                <a:latin typeface="Segoe UI Semibold" panose="020B0702040204020203" pitchFamily="34" charset="0"/>
+                <a:ea typeface="Segoe UI Semibold" panose="020B0702040204020203" pitchFamily="34" charset="-122"/>
+                <a:cs typeface="Segoe UI Semibold" panose="020B0702040204020203" pitchFamily="34" charset="-120"/>
               </a:rPr>
               <a:t>Facility</a:t>
             </a:r>
@@ -3892,13 +3780,12 @@
             <a:avLst/>
           </a:prstGeom>
           <a:noFill/>
-          <a:ln/>
-        </p:spPr>
-        <p:txBody>
-          <a:bodyPr wrap="square" lIns="0" tIns="0" rIns="0" bIns="0" rtlCol="0" anchor="ctr"/>
-          <a:lstStyle/>
-          <a:p>
-            <a:pPr algn="ctr" indent="0" marL="0">
+        </p:spPr>
+        <p:txBody>
+          <a:bodyPr wrap="square" lIns="0" tIns="0" rIns="0" bIns="0" rtlCol="0" anchor="ctr"/>
+          <a:lstStyle/>
+          <a:p>
+            <a:pPr marL="0" indent="0" algn="ctr">
               <a:buNone/>
             </a:pPr>
             <a:r>
@@ -3906,9 +3793,9 @@
                 <a:solidFill>
                   <a:srgbClr val="E6F4F8"/>
                 </a:solidFill>
-                <a:latin typeface="Segoe UI" pitchFamily="34" charset="0"/>
-                <a:ea typeface="Segoe UI" pitchFamily="34" charset="-122"/>
-                <a:cs typeface="Segoe UI" pitchFamily="34" charset="-120"/>
+                <a:latin typeface="Segoe UI" panose="020B0502040204020203" pitchFamily="34" charset="0"/>
+                <a:ea typeface="Segoe UI" panose="020B0502040204020203" pitchFamily="34" charset="-122"/>
+                <a:cs typeface="Segoe UI" panose="020B0502040204020203" pitchFamily="34" charset="-120"/>
               </a:rPr>
               <a:t>5 types</a:t>
             </a:r>
@@ -3931,13 +3818,12 @@
             <a:avLst/>
           </a:prstGeom>
           <a:noFill/>
-          <a:ln/>
-        </p:spPr>
-        <p:txBody>
-          <a:bodyPr wrap="square" lIns="0" tIns="0" rIns="0" bIns="0" rtlCol="0" anchor="ctr"/>
-          <a:lstStyle/>
-          <a:p>
-            <a:pPr algn="ctr" indent="0" marL="0">
+        </p:spPr>
+        <p:txBody>
+          <a:bodyPr wrap="square" lIns="0" tIns="0" rIns="0" bIns="0" rtlCol="0" anchor="ctr"/>
+          <a:lstStyle/>
+          <a:p>
+            <a:pPr marL="0" indent="0" algn="ctr">
               <a:buNone/>
             </a:pPr>
             <a:r>
@@ -3945,9 +3831,9 @@
                 <a:solidFill>
                   <a:srgbClr val="0891B2"/>
                 </a:solidFill>
-                <a:latin typeface="Segoe UI Semibold" pitchFamily="34" charset="0"/>
-                <a:ea typeface="Segoe UI Semibold" pitchFamily="34" charset="-122"/>
-                <a:cs typeface="Segoe UI Semibold" pitchFamily="34" charset="-120"/>
+                <a:latin typeface="Segoe UI Semibold" panose="020B0702040204020203" pitchFamily="34" charset="0"/>
+                <a:ea typeface="Segoe UI Semibold" panose="020B0702040204020203" pitchFamily="34" charset="-122"/>
+                <a:cs typeface="Segoe UI Semibold" panose="020B0702040204020203" pitchFamily="34" charset="-120"/>
               </a:rPr>
               <a:t>›</a:t>
             </a:r>
@@ -3997,13 +3883,12 @@
             <a:avLst/>
           </a:prstGeom>
           <a:noFill/>
-          <a:ln/>
-        </p:spPr>
-        <p:txBody>
-          <a:bodyPr wrap="square" lIns="0" tIns="0" rIns="0" bIns="0" rtlCol="0" anchor="ctr"/>
-          <a:lstStyle/>
-          <a:p>
-            <a:pPr algn="ctr" indent="0" marL="0">
+        </p:spPr>
+        <p:txBody>
+          <a:bodyPr wrap="square" lIns="0" tIns="0" rIns="0" bIns="0" rtlCol="0" anchor="ctr"/>
+          <a:lstStyle/>
+          <a:p>
+            <a:pPr marL="0" indent="0" algn="ctr">
               <a:buNone/>
             </a:pPr>
             <a:r>
@@ -4011,9 +3896,9 @@
                 <a:solidFill>
                   <a:srgbClr val="0B1B33"/>
                 </a:solidFill>
-                <a:latin typeface="Segoe UI Semibold" pitchFamily="34" charset="0"/>
-                <a:ea typeface="Segoe UI Semibold" pitchFamily="34" charset="-122"/>
-                <a:cs typeface="Segoe UI Semibold" pitchFamily="34" charset="-120"/>
+                <a:latin typeface="Segoe UI Semibold" panose="020B0702040204020203" pitchFamily="34" charset="0"/>
+                <a:ea typeface="Segoe UI Semibold" panose="020B0702040204020203" pitchFamily="34" charset="-122"/>
+                <a:cs typeface="Segoe UI Semibold" panose="020B0702040204020203" pitchFamily="34" charset="-120"/>
               </a:rPr>
               <a:t>Asset</a:t>
             </a:r>
@@ -4036,13 +3921,12 @@
             <a:avLst/>
           </a:prstGeom>
           <a:noFill/>
-          <a:ln/>
-        </p:spPr>
-        <p:txBody>
-          <a:bodyPr wrap="square" lIns="0" tIns="0" rIns="0" bIns="0" rtlCol="0" anchor="ctr"/>
-          <a:lstStyle/>
-          <a:p>
-            <a:pPr algn="ctr" indent="0" marL="0">
+        </p:spPr>
+        <p:txBody>
+          <a:bodyPr wrap="square" lIns="0" tIns="0" rIns="0" bIns="0" rtlCol="0" anchor="ctr"/>
+          <a:lstStyle/>
+          <a:p>
+            <a:pPr marL="0" indent="0" algn="ctr">
               <a:buNone/>
             </a:pPr>
             <a:r>
@@ -4050,9 +3934,9 @@
                 <a:solidFill>
                   <a:srgbClr val="64748B"/>
                 </a:solidFill>
-                <a:latin typeface="Segoe UI" pitchFamily="34" charset="0"/>
-                <a:ea typeface="Segoe UI" pitchFamily="34" charset="-122"/>
-                <a:cs typeface="Segoe UI" pitchFamily="34" charset="-120"/>
+                <a:latin typeface="Segoe UI" panose="020B0502040204020203" pitchFamily="34" charset="0"/>
+                <a:ea typeface="Segoe UI" panose="020B0502040204020203" pitchFamily="34" charset="-122"/>
+                <a:cs typeface="Segoe UI" panose="020B0502040204020203" pitchFamily="34" charset="-120"/>
               </a:rPr>
               <a:t>7 types</a:t>
             </a:r>
@@ -4075,13 +3959,12 @@
             <a:avLst/>
           </a:prstGeom>
           <a:noFill/>
-          <a:ln/>
-        </p:spPr>
-        <p:txBody>
-          <a:bodyPr wrap="square" lIns="0" tIns="0" rIns="0" bIns="0" rtlCol="0" anchor="ctr"/>
-          <a:lstStyle/>
-          <a:p>
-            <a:pPr algn="ctr" indent="0" marL="0">
+        </p:spPr>
+        <p:txBody>
+          <a:bodyPr wrap="square" lIns="0" tIns="0" rIns="0" bIns="0" rtlCol="0" anchor="ctr"/>
+          <a:lstStyle/>
+          <a:p>
+            <a:pPr marL="0" indent="0" algn="ctr">
               <a:buNone/>
             </a:pPr>
             <a:r>
@@ -4089,9 +3972,9 @@
                 <a:solidFill>
                   <a:srgbClr val="0891B2"/>
                 </a:solidFill>
-                <a:latin typeface="Segoe UI Semibold" pitchFamily="34" charset="0"/>
-                <a:ea typeface="Segoe UI Semibold" pitchFamily="34" charset="-122"/>
-                <a:cs typeface="Segoe UI Semibold" pitchFamily="34" charset="-120"/>
+                <a:latin typeface="Segoe UI Semibold" panose="020B0702040204020203" pitchFamily="34" charset="0"/>
+                <a:ea typeface="Segoe UI Semibold" panose="020B0702040204020203" pitchFamily="34" charset="-122"/>
+                <a:cs typeface="Segoe UI Semibold" panose="020B0702040204020203" pitchFamily="34" charset="-120"/>
               </a:rPr>
               <a:t>›</a:t>
             </a:r>
@@ -4141,13 +4024,12 @@
             <a:avLst/>
           </a:prstGeom>
           <a:noFill/>
-          <a:ln/>
-        </p:spPr>
-        <p:txBody>
-          <a:bodyPr wrap="square" lIns="0" tIns="0" rIns="0" bIns="0" rtlCol="0" anchor="ctr"/>
-          <a:lstStyle/>
-          <a:p>
-            <a:pPr algn="ctr" indent="0" marL="0">
+        </p:spPr>
+        <p:txBody>
+          <a:bodyPr wrap="square" lIns="0" tIns="0" rIns="0" bIns="0" rtlCol="0" anchor="ctr"/>
+          <a:lstStyle/>
+          <a:p>
+            <a:pPr marL="0" indent="0" algn="ctr">
               <a:buNone/>
             </a:pPr>
             <a:r>
@@ -4155,9 +4037,9 @@
                 <a:solidFill>
                   <a:srgbClr val="0B1B33"/>
                 </a:solidFill>
-                <a:latin typeface="Segoe UI Semibold" pitchFamily="34" charset="0"/>
-                <a:ea typeface="Segoe UI Semibold" pitchFamily="34" charset="-122"/>
-                <a:cs typeface="Segoe UI Semibold" pitchFamily="34" charset="-120"/>
+                <a:latin typeface="Segoe UI Semibold" panose="020B0702040204020203" pitchFamily="34" charset="0"/>
+                <a:ea typeface="Segoe UI Semibold" panose="020B0702040204020203" pitchFamily="34" charset="-122"/>
+                <a:cs typeface="Segoe UI Semibold" panose="020B0702040204020203" pitchFamily="34" charset="-120"/>
               </a:rPr>
               <a:t>Sensor</a:t>
             </a:r>
@@ -4180,13 +4062,12 @@
             <a:avLst/>
           </a:prstGeom>
           <a:noFill/>
-          <a:ln/>
-        </p:spPr>
-        <p:txBody>
-          <a:bodyPr wrap="square" lIns="0" tIns="0" rIns="0" bIns="0" rtlCol="0" anchor="ctr"/>
-          <a:lstStyle/>
-          <a:p>
-            <a:pPr algn="ctr" indent="0" marL="0">
+        </p:spPr>
+        <p:txBody>
+          <a:bodyPr wrap="square" lIns="0" tIns="0" rIns="0" bIns="0" rtlCol="0" anchor="ctr"/>
+          <a:lstStyle/>
+          <a:p>
+            <a:pPr marL="0" indent="0" algn="ctr">
               <a:buNone/>
             </a:pPr>
             <a:r>
@@ -4194,9 +4075,9 @@
                 <a:solidFill>
                   <a:srgbClr val="64748B"/>
                 </a:solidFill>
-                <a:latin typeface="Segoe UI" pitchFamily="34" charset="0"/>
-                <a:ea typeface="Segoe UI" pitchFamily="34" charset="-122"/>
-                <a:cs typeface="Segoe UI" pitchFamily="34" charset="-120"/>
+                <a:latin typeface="Segoe UI" panose="020B0502040204020203" pitchFamily="34" charset="0"/>
+                <a:ea typeface="Segoe UI" panose="020B0502040204020203" pitchFamily="34" charset="-122"/>
+                <a:cs typeface="Segoe UI" panose="020B0502040204020203" pitchFamily="34" charset="-120"/>
               </a:rPr>
               <a:t>9 metrics</a:t>
             </a:r>
@@ -4242,13 +4123,12 @@
             <a:avLst/>
           </a:prstGeom>
           <a:noFill/>
-          <a:ln/>
-        </p:spPr>
-        <p:txBody>
-          <a:bodyPr wrap="square" lIns="0" tIns="0" rIns="0" bIns="0" rtlCol="0" anchor="ctr"/>
-          <a:lstStyle/>
-          <a:p>
-            <a:pPr indent="0" marL="0">
+        </p:spPr>
+        <p:txBody>
+          <a:bodyPr wrap="square" lIns="0" tIns="0" rIns="0" bIns="0" rtlCol="0" anchor="ctr"/>
+          <a:lstStyle/>
+          <a:p>
+            <a:pPr marL="0" indent="0">
               <a:buNone/>
             </a:pPr>
             <a:r>
@@ -4256,9 +4136,9 @@
                 <a:solidFill>
                   <a:srgbClr val="0891B2"/>
                 </a:solidFill>
-                <a:latin typeface="Segoe UI Semibold" pitchFamily="34" charset="0"/>
-                <a:ea typeface="Segoe UI Semibold" pitchFamily="34" charset="-122"/>
-                <a:cs typeface="Segoe UI Semibold" pitchFamily="34" charset="-120"/>
+                <a:latin typeface="Segoe UI Semibold" panose="020B0702040204020203" pitchFamily="34" charset="0"/>
+                <a:ea typeface="Segoe UI Semibold" panose="020B0702040204020203" pitchFamily="34" charset="-122"/>
+                <a:cs typeface="Segoe UI Semibold" panose="020B0702040204020203" pitchFamily="34" charset="-120"/>
               </a:rPr>
               <a:t>5 · 11 · 32</a:t>
             </a:r>
@@ -4281,13 +4161,12 @@
             <a:avLst/>
           </a:prstGeom>
           <a:noFill/>
-          <a:ln/>
         </p:spPr>
         <p:txBody>
           <a:bodyPr wrap="square" lIns="0" tIns="0" rIns="0" bIns="0" rtlCol="0" anchor="t"/>
           <a:lstStyle/>
           <a:p>
-            <a:pPr indent="0" marL="0">
+            <a:pPr marL="0" indent="0">
               <a:buNone/>
             </a:pPr>
             <a:r>
@@ -4295,9 +4174,9 @@
                 <a:solidFill>
                   <a:srgbClr val="64748B"/>
                 </a:solidFill>
-                <a:latin typeface="Segoe UI" pitchFamily="34" charset="0"/>
-                <a:ea typeface="Segoe UI" pitchFamily="34" charset="-122"/>
-                <a:cs typeface="Segoe UI" pitchFamily="34" charset="-120"/>
+                <a:latin typeface="Segoe UI" panose="020B0502040204020203" pitchFamily="34" charset="0"/>
+                <a:ea typeface="Segoe UI" panose="020B0502040204020203" pitchFamily="34" charset="-122"/>
+                <a:cs typeface="Segoe UI" panose="020B0502040204020203" pitchFamily="34" charset="-120"/>
               </a:rPr>
               <a:t>facilities · assets · sensors</a:t>
             </a:r>
@@ -4343,13 +4222,12 @@
             <a:avLst/>
           </a:prstGeom>
           <a:noFill/>
-          <a:ln/>
-        </p:spPr>
-        <p:txBody>
-          <a:bodyPr wrap="square" lIns="0" tIns="0" rIns="0" bIns="0" rtlCol="0" anchor="ctr"/>
-          <a:lstStyle/>
-          <a:p>
-            <a:pPr indent="0" marL="0">
+        </p:spPr>
+        <p:txBody>
+          <a:bodyPr wrap="square" lIns="0" tIns="0" rIns="0" bIns="0" rtlCol="0" anchor="ctr"/>
+          <a:lstStyle/>
+          <a:p>
+            <a:pPr marL="0" indent="0">
               <a:buNone/>
             </a:pPr>
             <a:r>
@@ -4357,9 +4235,9 @@
                 <a:solidFill>
                   <a:srgbClr val="0891B2"/>
                 </a:solidFill>
-                <a:latin typeface="Segoe UI Semibold" pitchFamily="34" charset="0"/>
-                <a:ea typeface="Segoe UI Semibold" pitchFamily="34" charset="-122"/>
-                <a:cs typeface="Segoe UI Semibold" pitchFamily="34" charset="-120"/>
+                <a:latin typeface="Segoe UI Semibold" panose="020B0702040204020203" pitchFamily="34" charset="0"/>
+                <a:ea typeface="Segoe UI Semibold" panose="020B0702040204020203" pitchFamily="34" charset="-122"/>
+                <a:cs typeface="Segoe UI Semibold" panose="020B0702040204020203" pitchFamily="34" charset="-120"/>
               </a:rPr>
               <a:t>Server-side</a:t>
             </a:r>
@@ -4382,13 +4260,12 @@
             <a:avLst/>
           </a:prstGeom>
           <a:noFill/>
-          <a:ln/>
         </p:spPr>
         <p:txBody>
           <a:bodyPr wrap="square" lIns="0" tIns="0" rIns="0" bIns="0" rtlCol="0" anchor="t"/>
           <a:lstStyle/>
           <a:p>
-            <a:pPr indent="0" marL="0">
+            <a:pPr marL="0" indent="0">
               <a:buNone/>
             </a:pPr>
             <a:r>
@@ -4396,9 +4273,9 @@
                 <a:solidFill>
                   <a:srgbClr val="64748B"/>
                 </a:solidFill>
-                <a:latin typeface="Segoe UI" pitchFamily="34" charset="0"/>
-                <a:ea typeface="Segoe UI" pitchFamily="34" charset="-122"/>
-                <a:cs typeface="Segoe UI" pitchFamily="34" charset="-120"/>
+                <a:latin typeface="Segoe UI" panose="020B0502040204020203" pitchFamily="34" charset="0"/>
+                <a:ea typeface="Segoe UI" panose="020B0502040204020203" pitchFamily="34" charset="-122"/>
+                <a:cs typeface="Segoe UI" panose="020B0502040204020203" pitchFamily="34" charset="-120"/>
               </a:rPr>
               <a:t>search and paging</a:t>
             </a:r>
@@ -4444,13 +4321,12 @@
             <a:avLst/>
           </a:prstGeom>
           <a:noFill/>
-          <a:ln/>
-        </p:spPr>
-        <p:txBody>
-          <a:bodyPr wrap="square" lIns="0" tIns="0" rIns="0" bIns="0" rtlCol="0" anchor="ctr"/>
-          <a:lstStyle/>
-          <a:p>
-            <a:pPr indent="0" marL="0">
+        </p:spPr>
+        <p:txBody>
+          <a:bodyPr wrap="square" lIns="0" tIns="0" rIns="0" bIns="0" rtlCol="0" anchor="ctr"/>
+          <a:lstStyle/>
+          <a:p>
+            <a:pPr marL="0" indent="0">
               <a:buNone/>
             </a:pPr>
             <a:r>
@@ -4458,9 +4334,9 @@
                 <a:solidFill>
                   <a:srgbClr val="0891B2"/>
                 </a:solidFill>
-                <a:latin typeface="Segoe UI Semibold" pitchFamily="34" charset="0"/>
-                <a:ea typeface="Segoe UI Semibold" pitchFamily="34" charset="-122"/>
-                <a:cs typeface="Segoe UI Semibold" pitchFamily="34" charset="-120"/>
+                <a:latin typeface="Segoe UI Semibold" panose="020B0702040204020203" pitchFamily="34" charset="0"/>
+                <a:ea typeface="Segoe UI Semibold" panose="020B0702040204020203" pitchFamily="34" charset="-122"/>
+                <a:cs typeface="Segoe UI Semibold" panose="020B0702040204020203" pitchFamily="34" charset="-120"/>
               </a:rPr>
               <a:t>Validated</a:t>
             </a:r>
@@ -4483,13 +4359,12 @@
             <a:avLst/>
           </a:prstGeom>
           <a:noFill/>
-          <a:ln/>
         </p:spPr>
         <p:txBody>
           <a:bodyPr wrap="square" lIns="0" tIns="0" rIns="0" bIns="0" rtlCol="0" anchor="t"/>
           <a:lstStyle/>
           <a:p>
-            <a:pPr indent="0" marL="0">
+            <a:pPr marL="0" indent="0">
               <a:buNone/>
             </a:pPr>
             <a:r>
@@ -4497,9 +4372,9 @@
                 <a:solidFill>
                   <a:srgbClr val="64748B"/>
                 </a:solidFill>
-                <a:latin typeface="Segoe UI" pitchFamily="34" charset="0"/>
-                <a:ea typeface="Segoe UI" pitchFamily="34" charset="-122"/>
-                <a:cs typeface="Segoe UI" pitchFamily="34" charset="-120"/>
+                <a:latin typeface="Segoe UI" panose="020B0502040204020203" pitchFamily="34" charset="0"/>
+                <a:ea typeface="Segoe UI" panose="020B0502040204020203" pitchFamily="34" charset="-122"/>
+                <a:cs typeface="Segoe UI" panose="020B0502040204020203" pitchFamily="34" charset="-120"/>
               </a:rPr>
               <a:t>every form</a:t>
             </a:r>
@@ -4549,13 +4424,12 @@
             <a:avLst/>
           </a:prstGeom>
           <a:noFill/>
-          <a:ln/>
-        </p:spPr>
-        <p:txBody>
-          <a:bodyPr wrap="square" lIns="0" tIns="0" rIns="0" bIns="0" rtlCol="0" anchor="ctr"/>
-          <a:lstStyle/>
-          <a:p>
-            <a:pPr indent="0" marL="0">
+        </p:spPr>
+        <p:txBody>
+          <a:bodyPr wrap="square" lIns="0" tIns="0" rIns="0" bIns="0" rtlCol="0" anchor="ctr"/>
+          <a:lstStyle/>
+          <a:p>
+            <a:pPr marL="0" indent="0">
               <a:buNone/>
             </a:pPr>
             <a:r>
@@ -4563,23 +4437,20 @@
                 <a:solidFill>
                   <a:srgbClr val="0891B2"/>
                 </a:solidFill>
-                <a:latin typeface="Segoe UI" pitchFamily="34" charset="0"/>
-                <a:ea typeface="Segoe UI" pitchFamily="34" charset="-122"/>
-                <a:cs typeface="Segoe UI" pitchFamily="34" charset="-120"/>
+                <a:latin typeface="Segoe UI" panose="020B0502040204020203" pitchFamily="34" charset="0"/>
+                <a:ea typeface="Segoe UI" panose="020B0502040204020203" pitchFamily="34" charset="-122"/>
+                <a:cs typeface="Segoe UI" panose="020B0502040204020203" pitchFamily="34" charset="-120"/>
               </a:rPr>
               <a:t>LIVE  </a:t>
             </a:r>
-            <a:pPr indent="0" marL="0">
-              <a:buNone/>
-            </a:pPr>
             <a:r>
               <a:rPr lang="en-US" sz="1100" dirty="0">
                 <a:solidFill>
                   <a:srgbClr val="0B1B33"/>
                 </a:solidFill>
-                <a:latin typeface="Segoe UI" pitchFamily="34" charset="0"/>
-                <a:ea typeface="Segoe UI" pitchFamily="34" charset="-122"/>
-                <a:cs typeface="Segoe UI" pitchFamily="34" charset="-120"/>
+                <a:latin typeface="Segoe UI" panose="020B0502040204020203" pitchFamily="34" charset="0"/>
+                <a:ea typeface="Segoe UI" panose="020B0502040204020203" pitchFamily="34" charset="-122"/>
+                <a:cs typeface="Segoe UI" panose="020B0502040204020203" pitchFamily="34" charset="-120"/>
               </a:rPr>
               <a:t>Assets page</a:t>
             </a:r>
@@ -4597,12 +4468,13 @@
 
 <file path=ppt/slides/slide4.xml><?xml version="1.0" encoding="utf-8"?>
 <p:sld xmlns:a="http://schemas.openxmlformats.org/drawingml/2006/main" xmlns:r="http://schemas.openxmlformats.org/officeDocument/2006/relationships" xmlns:p="http://schemas.openxmlformats.org/presentationml/2006/main">
-  <p:cSld name="Slide 4">
+  <p:cSld>
     <p:bg>
       <p:bgPr>
         <a:solidFill>
           <a:srgbClr val="F6F8FB"/>
         </a:solidFill>
+        <a:effectLst/>
       </p:bgPr>
     </p:bg>
     <p:spTree>
@@ -4659,25 +4531,24 @@
             <a:avLst/>
           </a:prstGeom>
           <a:noFill/>
-          <a:ln/>
-        </p:spPr>
-        <p:txBody>
-          <a:bodyPr wrap="square" lIns="0" tIns="0" rIns="0" bIns="0" rtlCol="0" anchor="ctr"/>
-          <a:lstStyle/>
-          <a:p>
-            <a:pPr indent="0" marL="0">
-              <a:buNone/>
-            </a:pPr>
-            <a:r>
-              <a:rPr lang="en-US" sz="1050" spc="400" kern="0" dirty="0">
+        </p:spPr>
+        <p:txBody>
+          <a:bodyPr wrap="square" lIns="0" tIns="0" rIns="0" bIns="0" rtlCol="0" anchor="ctr"/>
+          <a:lstStyle/>
+          <a:p>
+            <a:pPr marL="0" indent="0">
+              <a:buNone/>
+            </a:pPr>
+            <a:r>
+              <a:rPr lang="en-US" sz="1050" kern="0" spc="400" dirty="0">
                 <a:solidFill>
                   <a:srgbClr val="0891B2"/>
                 </a:solidFill>
-                <a:latin typeface="Segoe UI Semibold" pitchFamily="34" charset="0"/>
-                <a:ea typeface="Segoe UI Semibold" pitchFamily="34" charset="-122"/>
-                <a:cs typeface="Segoe UI Semibold" pitchFamily="34" charset="-120"/>
-              </a:rPr>
-              <a:t>04 · GOVINDU · MONITORING SERVICE</a:t>
+                <a:latin typeface="Segoe UI Semibold" panose="020B0702040204020203" pitchFamily="34" charset="0"/>
+                <a:ea typeface="Segoe UI Semibold" panose="020B0702040204020203" pitchFamily="34" charset="-122"/>
+                <a:cs typeface="Segoe UI Semibold" panose="020B0702040204020203" pitchFamily="34" charset="-120"/>
+              </a:rPr>
+              <a:t>04 · MONITORING SERVICE</a:t>
             </a:r>
             <a:endParaRPr lang="en-US" sz="1050" dirty="0"/>
           </a:p>
@@ -4698,13 +4569,12 @@
             <a:avLst/>
           </a:prstGeom>
           <a:noFill/>
-          <a:ln/>
-        </p:spPr>
-        <p:txBody>
-          <a:bodyPr wrap="square" lIns="0" tIns="0" rIns="0" bIns="0" rtlCol="0" anchor="ctr"/>
-          <a:lstStyle/>
-          <a:p>
-            <a:pPr indent="0" marL="0">
+        </p:spPr>
+        <p:txBody>
+          <a:bodyPr wrap="square" lIns="0" tIns="0" rIns="0" bIns="0" rtlCol="0" anchor="ctr"/>
+          <a:lstStyle/>
+          <a:p>
+            <a:pPr marL="0" indent="0">
               <a:buNone/>
             </a:pPr>
             <a:r>
@@ -4712,9 +4582,9 @@
                 <a:solidFill>
                   <a:srgbClr val="0B1B33"/>
                 </a:solidFill>
-                <a:latin typeface="Segoe UI Semibold" pitchFamily="34" charset="0"/>
-                <a:ea typeface="Segoe UI Semibold" pitchFamily="34" charset="-122"/>
-                <a:cs typeface="Segoe UI Semibold" pitchFamily="34" charset="-120"/>
+                <a:latin typeface="Segoe UI Semibold" panose="020B0702040204020203" pitchFamily="34" charset="0"/>
+                <a:ea typeface="Segoe UI Semibold" panose="020B0702040204020203" pitchFamily="34" charset="-122"/>
+                <a:cs typeface="Segoe UI Semibold" panose="020B0702040204020203" pitchFamily="34" charset="-120"/>
               </a:rPr>
               <a:t>From a sensor reading to an instant alert</a:t>
             </a:r>
@@ -4760,13 +4630,12 @@
             <a:avLst/>
           </a:prstGeom>
           <a:noFill/>
-          <a:ln/>
-        </p:spPr>
-        <p:txBody>
-          <a:bodyPr wrap="square" lIns="0" tIns="0" rIns="0" bIns="0" rtlCol="0" anchor="ctr"/>
-          <a:lstStyle/>
-          <a:p>
-            <a:pPr indent="0" marL="0">
+        </p:spPr>
+        <p:txBody>
+          <a:bodyPr wrap="square" lIns="0" tIns="0" rIns="0" bIns="0" rtlCol="0" anchor="ctr"/>
+          <a:lstStyle/>
+          <a:p>
+            <a:pPr marL="0" indent="0">
               <a:buNone/>
             </a:pPr>
             <a:r>
@@ -4774,9 +4643,9 @@
                 <a:solidFill>
                   <a:srgbClr val="64748B"/>
                 </a:solidFill>
-                <a:latin typeface="Segoe UI" pitchFamily="34" charset="0"/>
-                <a:ea typeface="Segoe UI" pitchFamily="34" charset="-122"/>
-                <a:cs typeface="Segoe UI" pitchFamily="34" charset="-120"/>
+                <a:latin typeface="Segoe UI" panose="020B0502040204020203" pitchFamily="34" charset="0"/>
+                <a:ea typeface="Segoe UI" panose="020B0502040204020203" pitchFamily="34" charset="-122"/>
+                <a:cs typeface="Segoe UI" panose="020B0502040204020203" pitchFamily="34" charset="-120"/>
               </a:rPr>
               <a:t>EC8208 Software Architecture  ·  University of Ruhuna</a:t>
             </a:r>
@@ -4799,13 +4668,12 @@
             <a:avLst/>
           </a:prstGeom>
           <a:noFill/>
-          <a:ln/>
-        </p:spPr>
-        <p:txBody>
-          <a:bodyPr wrap="square" lIns="0" tIns="0" rIns="0" bIns="0" rtlCol="0" anchor="ctr"/>
-          <a:lstStyle/>
-          <a:p>
-            <a:pPr algn="r" indent="0" marL="0">
+        </p:spPr>
+        <p:txBody>
+          <a:bodyPr wrap="square" lIns="0" tIns="0" rIns="0" bIns="0" rtlCol="0" anchor="ctr"/>
+          <a:lstStyle/>
+          <a:p>
+            <a:pPr marL="0" indent="0" algn="r">
               <a:buNone/>
             </a:pPr>
             <a:r>
@@ -4813,9 +4681,9 @@
                 <a:solidFill>
                   <a:srgbClr val="64748B"/>
                 </a:solidFill>
-                <a:latin typeface="Segoe UI" pitchFamily="34" charset="0"/>
-                <a:ea typeface="Segoe UI" pitchFamily="34" charset="-122"/>
-                <a:cs typeface="Segoe UI" pitchFamily="34" charset="-120"/>
+                <a:latin typeface="Segoe UI" panose="020B0502040204020203" pitchFamily="34" charset="0"/>
+                <a:ea typeface="Segoe UI" panose="020B0502040204020203" pitchFamily="34" charset="-122"/>
+                <a:cs typeface="Segoe UI" panose="020B0502040204020203" pitchFamily="34" charset="-120"/>
               </a:rPr>
               <a:t>04  ·  1:00–1:49</a:t>
             </a:r>
@@ -4865,13 +4733,12 @@
             <a:avLst/>
           </a:prstGeom>
           <a:noFill/>
-          <a:ln/>
-        </p:spPr>
-        <p:txBody>
-          <a:bodyPr wrap="square" lIns="0" tIns="0" rIns="0" bIns="0" rtlCol="0" anchor="ctr"/>
-          <a:lstStyle/>
-          <a:p>
-            <a:pPr algn="ctr" indent="0" marL="0">
+        </p:spPr>
+        <p:txBody>
+          <a:bodyPr wrap="square" lIns="0" tIns="0" rIns="0" bIns="0" rtlCol="0" anchor="ctr"/>
+          <a:lstStyle/>
+          <a:p>
+            <a:pPr marL="0" indent="0" algn="ctr">
               <a:buNone/>
             </a:pPr>
             <a:r>
@@ -4879,9 +4746,9 @@
                 <a:solidFill>
                   <a:srgbClr val="FFFFFF"/>
                 </a:solidFill>
-                <a:latin typeface="Segoe UI Semibold" pitchFamily="34" charset="0"/>
-                <a:ea typeface="Segoe UI Semibold" pitchFamily="34" charset="-122"/>
-                <a:cs typeface="Segoe UI Semibold" pitchFamily="34" charset="-120"/>
+                <a:latin typeface="Segoe UI Semibold" panose="020B0702040204020203" pitchFamily="34" charset="0"/>
+                <a:ea typeface="Segoe UI Semibold" panose="020B0702040204020203" pitchFamily="34" charset="-122"/>
+                <a:cs typeface="Segoe UI Semibold" panose="020B0702040204020203" pitchFamily="34" charset="-120"/>
               </a:rPr>
               <a:t>Reading</a:t>
             </a:r>
@@ -4904,13 +4771,12 @@
             <a:avLst/>
           </a:prstGeom>
           <a:noFill/>
-          <a:ln/>
-        </p:spPr>
-        <p:txBody>
-          <a:bodyPr wrap="square" lIns="0" tIns="0" rIns="0" bIns="0" rtlCol="0" anchor="ctr"/>
-          <a:lstStyle/>
-          <a:p>
-            <a:pPr algn="ctr" indent="0" marL="0">
+        </p:spPr>
+        <p:txBody>
+          <a:bodyPr wrap="square" lIns="0" tIns="0" rIns="0" bIns="0" rtlCol="0" anchor="ctr"/>
+          <a:lstStyle/>
+          <a:p>
+            <a:pPr marL="0" indent="0" algn="ctr">
               <a:buNone/>
             </a:pPr>
             <a:r>
@@ -4918,9 +4784,9 @@
                 <a:solidFill>
                   <a:srgbClr val="E6F4F8"/>
                 </a:solidFill>
-                <a:latin typeface="Segoe UI" pitchFamily="34" charset="0"/>
-                <a:ea typeface="Segoe UI" pitchFamily="34" charset="-122"/>
-                <a:cs typeface="Segoe UI" pitchFamily="34" charset="-120"/>
+                <a:latin typeface="Segoe UI" panose="020B0502040204020203" pitchFamily="34" charset="0"/>
+                <a:ea typeface="Segoe UI" panose="020B0502040204020203" pitchFamily="34" charset="-122"/>
+                <a:cs typeface="Segoe UI" panose="020B0502040204020203" pitchFamily="34" charset="-120"/>
               </a:rPr>
               <a:t>every few seconds</a:t>
             </a:r>
@@ -4943,13 +4809,12 @@
             <a:avLst/>
           </a:prstGeom>
           <a:noFill/>
-          <a:ln/>
-        </p:spPr>
-        <p:txBody>
-          <a:bodyPr wrap="square" lIns="0" tIns="0" rIns="0" bIns="0" rtlCol="0" anchor="ctr"/>
-          <a:lstStyle/>
-          <a:p>
-            <a:pPr algn="ctr" indent="0" marL="0">
+        </p:spPr>
+        <p:txBody>
+          <a:bodyPr wrap="square" lIns="0" tIns="0" rIns="0" bIns="0" rtlCol="0" anchor="ctr"/>
+          <a:lstStyle/>
+          <a:p>
+            <a:pPr marL="0" indent="0" algn="ctr">
               <a:buNone/>
             </a:pPr>
             <a:r>
@@ -4957,9 +4822,9 @@
                 <a:solidFill>
                   <a:srgbClr val="0891B2"/>
                 </a:solidFill>
-                <a:latin typeface="Segoe UI Semibold" pitchFamily="34" charset="0"/>
-                <a:ea typeface="Segoe UI Semibold" pitchFamily="34" charset="-122"/>
-                <a:cs typeface="Segoe UI Semibold" pitchFamily="34" charset="-120"/>
+                <a:latin typeface="Segoe UI Semibold" panose="020B0702040204020203" pitchFamily="34" charset="0"/>
+                <a:ea typeface="Segoe UI Semibold" panose="020B0702040204020203" pitchFamily="34" charset="-122"/>
+                <a:cs typeface="Segoe UI Semibold" panose="020B0702040204020203" pitchFamily="34" charset="-120"/>
               </a:rPr>
               <a:t>›</a:t>
             </a:r>
@@ -5009,13 +4874,12 @@
             <a:avLst/>
           </a:prstGeom>
           <a:noFill/>
-          <a:ln/>
-        </p:spPr>
-        <p:txBody>
-          <a:bodyPr wrap="square" lIns="0" tIns="0" rIns="0" bIns="0" rtlCol="0" anchor="ctr"/>
-          <a:lstStyle/>
-          <a:p>
-            <a:pPr algn="ctr" indent="0" marL="0">
+        </p:spPr>
+        <p:txBody>
+          <a:bodyPr wrap="square" lIns="0" tIns="0" rIns="0" bIns="0" rtlCol="0" anchor="ctr"/>
+          <a:lstStyle/>
+          <a:p>
+            <a:pPr marL="0" indent="0" algn="ctr">
               <a:buNone/>
             </a:pPr>
             <a:r>
@@ -5023,9 +4887,9 @@
                 <a:solidFill>
                   <a:srgbClr val="0B1B33"/>
                 </a:solidFill>
-                <a:latin typeface="Segoe UI Semibold" pitchFamily="34" charset="0"/>
-                <a:ea typeface="Segoe UI Semibold" pitchFamily="34" charset="-122"/>
-                <a:cs typeface="Segoe UI Semibold" pitchFamily="34" charset="-120"/>
+                <a:latin typeface="Segoe UI Semibold" panose="020B0702040204020203" pitchFamily="34" charset="0"/>
+                <a:ea typeface="Segoe UI Semibold" panose="020B0702040204020203" pitchFamily="34" charset="-122"/>
+                <a:cs typeface="Segoe UI Semibold" panose="020B0702040204020203" pitchFamily="34" charset="-120"/>
               </a:rPr>
               <a:t>Rule check</a:t>
             </a:r>
@@ -5048,13 +4912,12 @@
             <a:avLst/>
           </a:prstGeom>
           <a:noFill/>
-          <a:ln/>
-        </p:spPr>
-        <p:txBody>
-          <a:bodyPr wrap="square" lIns="0" tIns="0" rIns="0" bIns="0" rtlCol="0" anchor="ctr"/>
-          <a:lstStyle/>
-          <a:p>
-            <a:pPr algn="ctr" indent="0" marL="0">
+        </p:spPr>
+        <p:txBody>
+          <a:bodyPr wrap="square" lIns="0" tIns="0" rIns="0" bIns="0" rtlCol="0" anchor="ctr"/>
+          <a:lstStyle/>
+          <a:p>
+            <a:pPr marL="0" indent="0" algn="ctr">
               <a:buNone/>
             </a:pPr>
             <a:r>
@@ -5062,9 +4925,9 @@
                 <a:solidFill>
                   <a:srgbClr val="64748B"/>
                 </a:solidFill>
-                <a:latin typeface="Segoe UI" pitchFamily="34" charset="0"/>
-                <a:ea typeface="Segoe UI" pitchFamily="34" charset="-122"/>
-                <a:cs typeface="Segoe UI" pitchFamily="34" charset="-120"/>
+                <a:latin typeface="Segoe UI" panose="020B0502040204020203" pitchFamily="34" charset="0"/>
+                <a:ea typeface="Segoe UI" panose="020B0502040204020203" pitchFamily="34" charset="-122"/>
+                <a:cs typeface="Segoe UI" panose="020B0502040204020203" pitchFamily="34" charset="-120"/>
               </a:rPr>
               <a:t>threshold</a:t>
             </a:r>
@@ -5087,13 +4950,12 @@
             <a:avLst/>
           </a:prstGeom>
           <a:noFill/>
-          <a:ln/>
-        </p:spPr>
-        <p:txBody>
-          <a:bodyPr wrap="square" lIns="0" tIns="0" rIns="0" bIns="0" rtlCol="0" anchor="ctr"/>
-          <a:lstStyle/>
-          <a:p>
-            <a:pPr algn="ctr" indent="0" marL="0">
+        </p:spPr>
+        <p:txBody>
+          <a:bodyPr wrap="square" lIns="0" tIns="0" rIns="0" bIns="0" rtlCol="0" anchor="ctr"/>
+          <a:lstStyle/>
+          <a:p>
+            <a:pPr marL="0" indent="0" algn="ctr">
               <a:buNone/>
             </a:pPr>
             <a:r>
@@ -5101,9 +4963,9 @@
                 <a:solidFill>
                   <a:srgbClr val="0891B2"/>
                 </a:solidFill>
-                <a:latin typeface="Segoe UI Semibold" pitchFamily="34" charset="0"/>
-                <a:ea typeface="Segoe UI Semibold" pitchFamily="34" charset="-122"/>
-                <a:cs typeface="Segoe UI Semibold" pitchFamily="34" charset="-120"/>
+                <a:latin typeface="Segoe UI Semibold" panose="020B0702040204020203" pitchFamily="34" charset="0"/>
+                <a:ea typeface="Segoe UI Semibold" panose="020B0702040204020203" pitchFamily="34" charset="-122"/>
+                <a:cs typeface="Segoe UI Semibold" panose="020B0702040204020203" pitchFamily="34" charset="-120"/>
               </a:rPr>
               <a:t>›</a:t>
             </a:r>
@@ -5153,13 +5015,12 @@
             <a:avLst/>
           </a:prstGeom>
           <a:noFill/>
-          <a:ln/>
-        </p:spPr>
-        <p:txBody>
-          <a:bodyPr wrap="square" lIns="0" tIns="0" rIns="0" bIns="0" rtlCol="0" anchor="ctr"/>
-          <a:lstStyle/>
-          <a:p>
-            <a:pPr algn="ctr" indent="0" marL="0">
+        </p:spPr>
+        <p:txBody>
+          <a:bodyPr wrap="square" lIns="0" tIns="0" rIns="0" bIns="0" rtlCol="0" anchor="ctr"/>
+          <a:lstStyle/>
+          <a:p>
+            <a:pPr marL="0" indent="0" algn="ctr">
               <a:buNone/>
             </a:pPr>
             <a:r>
@@ -5167,9 +5028,9 @@
                 <a:solidFill>
                   <a:srgbClr val="0B1B33"/>
                 </a:solidFill>
-                <a:latin typeface="Segoe UI Semibold" pitchFamily="34" charset="0"/>
-                <a:ea typeface="Segoe UI Semibold" pitchFamily="34" charset="-122"/>
-                <a:cs typeface="Segoe UI Semibold" pitchFamily="34" charset="-120"/>
+                <a:latin typeface="Segoe UI Semibold" panose="020B0702040204020203" pitchFamily="34" charset="0"/>
+                <a:ea typeface="Segoe UI Semibold" panose="020B0702040204020203" pitchFamily="34" charset="-122"/>
+                <a:cs typeface="Segoe UI Semibold" panose="020B0702040204020203" pitchFamily="34" charset="-120"/>
               </a:rPr>
               <a:t>Alert</a:t>
             </a:r>
@@ -5192,13 +5053,12 @@
             <a:avLst/>
           </a:prstGeom>
           <a:noFill/>
-          <a:ln/>
-        </p:spPr>
-        <p:txBody>
-          <a:bodyPr wrap="square" lIns="0" tIns="0" rIns="0" bIns="0" rtlCol="0" anchor="ctr"/>
-          <a:lstStyle/>
-          <a:p>
-            <a:pPr algn="ctr" indent="0" marL="0">
+        </p:spPr>
+        <p:txBody>
+          <a:bodyPr wrap="square" lIns="0" tIns="0" rIns="0" bIns="0" rtlCol="0" anchor="ctr"/>
+          <a:lstStyle/>
+          <a:p>
+            <a:pPr marL="0" indent="0" algn="ctr">
               <a:buNone/>
             </a:pPr>
             <a:r>
@@ -5206,9 +5066,9 @@
                 <a:solidFill>
                   <a:srgbClr val="64748B"/>
                 </a:solidFill>
-                <a:latin typeface="Segoe UI" pitchFamily="34" charset="0"/>
-                <a:ea typeface="Segoe UI" pitchFamily="34" charset="-122"/>
-                <a:cs typeface="Segoe UI" pitchFamily="34" charset="-120"/>
+                <a:latin typeface="Segoe UI" panose="020B0502040204020203" pitchFamily="34" charset="0"/>
+                <a:ea typeface="Segoe UI" panose="020B0502040204020203" pitchFamily="34" charset="-122"/>
+                <a:cs typeface="Segoe UI" panose="020B0502040204020203" pitchFamily="34" charset="-120"/>
               </a:rPr>
               <a:t>one per asset</a:t>
             </a:r>
@@ -5231,13 +5091,12 @@
             <a:avLst/>
           </a:prstGeom>
           <a:noFill/>
-          <a:ln/>
-        </p:spPr>
-        <p:txBody>
-          <a:bodyPr wrap="square" lIns="0" tIns="0" rIns="0" bIns="0" rtlCol="0" anchor="ctr"/>
-          <a:lstStyle/>
-          <a:p>
-            <a:pPr algn="ctr" indent="0" marL="0">
+        </p:spPr>
+        <p:txBody>
+          <a:bodyPr wrap="square" lIns="0" tIns="0" rIns="0" bIns="0" rtlCol="0" anchor="ctr"/>
+          <a:lstStyle/>
+          <a:p>
+            <a:pPr marL="0" indent="0" algn="ctr">
               <a:buNone/>
             </a:pPr>
             <a:r>
@@ -5245,9 +5104,9 @@
                 <a:solidFill>
                   <a:srgbClr val="0891B2"/>
                 </a:solidFill>
-                <a:latin typeface="Segoe UI Semibold" pitchFamily="34" charset="0"/>
-                <a:ea typeface="Segoe UI Semibold" pitchFamily="34" charset="-122"/>
-                <a:cs typeface="Segoe UI Semibold" pitchFamily="34" charset="-120"/>
+                <a:latin typeface="Segoe UI Semibold" panose="020B0702040204020203" pitchFamily="34" charset="0"/>
+                <a:ea typeface="Segoe UI Semibold" panose="020B0702040204020203" pitchFamily="34" charset="-122"/>
+                <a:cs typeface="Segoe UI Semibold" panose="020B0702040204020203" pitchFamily="34" charset="-120"/>
               </a:rPr>
               <a:t>›</a:t>
             </a:r>
@@ -5297,13 +5156,12 @@
             <a:avLst/>
           </a:prstGeom>
           <a:noFill/>
-          <a:ln/>
-        </p:spPr>
-        <p:txBody>
-          <a:bodyPr wrap="square" lIns="0" tIns="0" rIns="0" bIns="0" rtlCol="0" anchor="ctr"/>
-          <a:lstStyle/>
-          <a:p>
-            <a:pPr algn="ctr" indent="0" marL="0">
+        </p:spPr>
+        <p:txBody>
+          <a:bodyPr wrap="square" lIns="0" tIns="0" rIns="0" bIns="0" rtlCol="0" anchor="ctr"/>
+          <a:lstStyle/>
+          <a:p>
+            <a:pPr marL="0" indent="0" algn="ctr">
               <a:buNone/>
             </a:pPr>
             <a:r>
@@ -5311,9 +5169,9 @@
                 <a:solidFill>
                   <a:srgbClr val="0B1B33"/>
                 </a:solidFill>
-                <a:latin typeface="Segoe UI Semibold" pitchFamily="34" charset="0"/>
-                <a:ea typeface="Segoe UI Semibold" pitchFamily="34" charset="-122"/>
-                <a:cs typeface="Segoe UI Semibold" pitchFamily="34" charset="-120"/>
+                <a:latin typeface="Segoe UI Semibold" panose="020B0702040204020203" pitchFamily="34" charset="0"/>
+                <a:ea typeface="Segoe UI Semibold" panose="020B0702040204020203" pitchFamily="34" charset="-122"/>
+                <a:cs typeface="Segoe UI Semibold" panose="020B0702040204020203" pitchFamily="34" charset="-120"/>
               </a:rPr>
               <a:t>RabbitMQ</a:t>
             </a:r>
@@ -5336,13 +5194,12 @@
             <a:avLst/>
           </a:prstGeom>
           <a:noFill/>
-          <a:ln/>
-        </p:spPr>
-        <p:txBody>
-          <a:bodyPr wrap="square" lIns="0" tIns="0" rIns="0" bIns="0" rtlCol="0" anchor="ctr"/>
-          <a:lstStyle/>
-          <a:p>
-            <a:pPr algn="ctr" indent="0" marL="0">
+        </p:spPr>
+        <p:txBody>
+          <a:bodyPr wrap="square" lIns="0" tIns="0" rIns="0" bIns="0" rtlCol="0" anchor="ctr"/>
+          <a:lstStyle/>
+          <a:p>
+            <a:pPr marL="0" indent="0" algn="ctr">
               <a:buNone/>
             </a:pPr>
             <a:r>
@@ -5350,9 +5207,9 @@
                 <a:solidFill>
                   <a:srgbClr val="64748B"/>
                 </a:solidFill>
-                <a:latin typeface="Segoe UI" pitchFamily="34" charset="0"/>
-                <a:ea typeface="Segoe UI" pitchFamily="34" charset="-122"/>
-                <a:cs typeface="Segoe UI" pitchFamily="34" charset="-120"/>
+                <a:latin typeface="Segoe UI" panose="020B0502040204020203" pitchFamily="34" charset="0"/>
+                <a:ea typeface="Segoe UI" panose="020B0502040204020203" pitchFamily="34" charset="-122"/>
+                <a:cs typeface="Segoe UI" panose="020B0502040204020203" pitchFamily="34" charset="-120"/>
               </a:rPr>
               <a:t>event</a:t>
             </a:r>
@@ -5398,13 +5255,12 @@
             <a:avLst/>
           </a:prstGeom>
           <a:noFill/>
-          <a:ln/>
-        </p:spPr>
-        <p:txBody>
-          <a:bodyPr wrap="square" lIns="0" tIns="0" rIns="0" bIns="0" rtlCol="0" anchor="ctr"/>
-          <a:lstStyle/>
-          <a:p>
-            <a:pPr indent="0" marL="0">
+        </p:spPr>
+        <p:txBody>
+          <a:bodyPr wrap="square" lIns="0" tIns="0" rIns="0" bIns="0" rtlCol="0" anchor="ctr"/>
+          <a:lstStyle/>
+          <a:p>
+            <a:pPr marL="0" indent="0">
               <a:buNone/>
             </a:pPr>
             <a:r>
@@ -5412,9 +5268,9 @@
                 <a:solidFill>
                   <a:srgbClr val="0891B2"/>
                 </a:solidFill>
-                <a:latin typeface="Segoe UI Semibold" pitchFamily="34" charset="0"/>
-                <a:ea typeface="Segoe UI Semibold" pitchFamily="34" charset="-122"/>
-                <a:cs typeface="Segoe UI Semibold" pitchFamily="34" charset="-120"/>
+                <a:latin typeface="Segoe UI Semibold" panose="020B0702040204020203" pitchFamily="34" charset="0"/>
+                <a:ea typeface="Segoe UI Semibold" panose="020B0702040204020203" pitchFamily="34" charset="-122"/>
+                <a:cs typeface="Segoe UI Semibold" panose="020B0702040204020203" pitchFamily="34" charset="-120"/>
               </a:rPr>
               <a:t>16,000+</a:t>
             </a:r>
@@ -5437,13 +5293,12 @@
             <a:avLst/>
           </a:prstGeom>
           <a:noFill/>
-          <a:ln/>
         </p:spPr>
         <p:txBody>
           <a:bodyPr wrap="square" lIns="0" tIns="0" rIns="0" bIns="0" rtlCol="0" anchor="t"/>
           <a:lstStyle/>
           <a:p>
-            <a:pPr indent="0" marL="0">
+            <a:pPr marL="0" indent="0">
               <a:buNone/>
             </a:pPr>
             <a:r>
@@ -5451,9 +5306,9 @@
                 <a:solidFill>
                   <a:srgbClr val="64748B"/>
                 </a:solidFill>
-                <a:latin typeface="Segoe UI" pitchFamily="34" charset="0"/>
-                <a:ea typeface="Segoe UI" pitchFamily="34" charset="-122"/>
-                <a:cs typeface="Segoe UI" pitchFamily="34" charset="-120"/>
+                <a:latin typeface="Segoe UI" panose="020B0502040204020203" pitchFamily="34" charset="0"/>
+                <a:ea typeface="Segoe UI" panose="020B0502040204020203" pitchFamily="34" charset="-122"/>
+                <a:cs typeface="Segoe UI" panose="020B0502040204020203" pitchFamily="34" charset="-120"/>
               </a:rPr>
               <a:t>readings stored</a:t>
             </a:r>
@@ -5499,13 +5354,12 @@
             <a:avLst/>
           </a:prstGeom>
           <a:noFill/>
-          <a:ln/>
-        </p:spPr>
-        <p:txBody>
-          <a:bodyPr wrap="square" lIns="0" tIns="0" rIns="0" bIns="0" rtlCol="0" anchor="ctr"/>
-          <a:lstStyle/>
-          <a:p>
-            <a:pPr indent="0" marL="0">
+        </p:spPr>
+        <p:txBody>
+          <a:bodyPr wrap="square" lIns="0" tIns="0" rIns="0" bIns="0" rtlCol="0" anchor="ctr"/>
+          <a:lstStyle/>
+          <a:p>
+            <a:pPr marL="0" indent="0">
               <a:buNone/>
             </a:pPr>
             <a:r>
@@ -5513,9 +5367,9 @@
                 <a:solidFill>
                   <a:srgbClr val="0891B2"/>
                 </a:solidFill>
-                <a:latin typeface="Segoe UI Semibold" pitchFamily="34" charset="0"/>
-                <a:ea typeface="Segoe UI Semibold" pitchFamily="34" charset="-122"/>
-                <a:cs typeface="Segoe UI Semibold" pitchFamily="34" charset="-120"/>
+                <a:latin typeface="Segoe UI Semibold" panose="020B0702040204020203" pitchFamily="34" charset="0"/>
+                <a:ea typeface="Segoe UI Semibold" panose="020B0702040204020203" pitchFamily="34" charset="-122"/>
+                <a:cs typeface="Segoe UI Semibold" panose="020B0702040204020203" pitchFamily="34" charset="-120"/>
               </a:rPr>
               <a:t>7</a:t>
             </a:r>
@@ -5538,13 +5392,12 @@
             <a:avLst/>
           </a:prstGeom>
           <a:noFill/>
-          <a:ln/>
         </p:spPr>
         <p:txBody>
           <a:bodyPr wrap="square" lIns="0" tIns="0" rIns="0" bIns="0" rtlCol="0" anchor="t"/>
           <a:lstStyle/>
           <a:p>
-            <a:pPr indent="0" marL="0">
+            <a:pPr marL="0" indent="0">
               <a:buNone/>
             </a:pPr>
             <a:r>
@@ -5552,9 +5405,9 @@
                 <a:solidFill>
                   <a:srgbClr val="64748B"/>
                 </a:solidFill>
-                <a:latin typeface="Segoe UI" pitchFamily="34" charset="0"/>
-                <a:ea typeface="Segoe UI" pitchFamily="34" charset="-122"/>
-                <a:cs typeface="Segoe UI" pitchFamily="34" charset="-120"/>
+                <a:latin typeface="Segoe UI" panose="020B0502040204020203" pitchFamily="34" charset="0"/>
+                <a:ea typeface="Segoe UI" panose="020B0502040204020203" pitchFamily="34" charset="-122"/>
+                <a:cs typeface="Segoe UI" panose="020B0502040204020203" pitchFamily="34" charset="-120"/>
               </a:rPr>
               <a:t>alert rules</a:t>
             </a:r>
@@ -5600,13 +5453,12 @@
             <a:avLst/>
           </a:prstGeom>
           <a:noFill/>
-          <a:ln/>
-        </p:spPr>
-        <p:txBody>
-          <a:bodyPr wrap="square" lIns="0" tIns="0" rIns="0" bIns="0" rtlCol="0" anchor="ctr"/>
-          <a:lstStyle/>
-          <a:p>
-            <a:pPr indent="0" marL="0">
+        </p:spPr>
+        <p:txBody>
+          <a:bodyPr wrap="square" lIns="0" tIns="0" rIns="0" bIns="0" rtlCol="0" anchor="ctr"/>
+          <a:lstStyle/>
+          <a:p>
+            <a:pPr marL="0" indent="0">
               <a:buNone/>
             </a:pPr>
             <a:r>
@@ -5614,9 +5466,9 @@
                 <a:solidFill>
                   <a:srgbClr val="0891B2"/>
                 </a:solidFill>
-                <a:latin typeface="Segoe UI Semibold" pitchFamily="34" charset="0"/>
-                <a:ea typeface="Segoe UI Semibold" pitchFamily="34" charset="-122"/>
-                <a:cs typeface="Segoe UI Semibold" pitchFamily="34" charset="-120"/>
+                <a:latin typeface="Segoe UI Semibold" panose="020B0702040204020203" pitchFamily="34" charset="0"/>
+                <a:ea typeface="Segoe UI Semibold" panose="020B0702040204020203" pitchFamily="34" charset="-122"/>
+                <a:cs typeface="Segoe UI Semibold" panose="020B0702040204020203" pitchFamily="34" charset="-120"/>
               </a:rPr>
               <a:t>10 s</a:t>
             </a:r>
@@ -5639,13 +5491,12 @@
             <a:avLst/>
           </a:prstGeom>
           <a:noFill/>
-          <a:ln/>
         </p:spPr>
         <p:txBody>
           <a:bodyPr wrap="square" lIns="0" tIns="0" rIns="0" bIns="0" rtlCol="0" anchor="t"/>
           <a:lstStyle/>
           <a:p>
-            <a:pPr indent="0" marL="0">
+            <a:pPr marL="0" indent="0">
               <a:buNone/>
             </a:pPr>
             <a:r>
@@ -5653,9 +5504,9 @@
                 <a:solidFill>
                   <a:srgbClr val="64748B"/>
                 </a:solidFill>
-                <a:latin typeface="Segoe UI" pitchFamily="34" charset="0"/>
-                <a:ea typeface="Segoe UI" pitchFamily="34" charset="-122"/>
-                <a:cs typeface="Segoe UI" pitchFamily="34" charset="-120"/>
+                <a:latin typeface="Segoe UI" panose="020B0502040204020203" pitchFamily="34" charset="0"/>
+                <a:ea typeface="Segoe UI" panose="020B0502040204020203" pitchFamily="34" charset="-122"/>
+                <a:cs typeface="Segoe UI" panose="020B0502040204020203" pitchFamily="34" charset="-120"/>
               </a:rPr>
               <a:t>Redis cached dashboard</a:t>
             </a:r>
@@ -5705,13 +5556,12 @@
             <a:avLst/>
           </a:prstGeom>
           <a:noFill/>
-          <a:ln/>
-        </p:spPr>
-        <p:txBody>
-          <a:bodyPr wrap="square" lIns="0" tIns="0" rIns="0" bIns="0" rtlCol="0" anchor="ctr"/>
-          <a:lstStyle/>
-          <a:p>
-            <a:pPr indent="0" marL="0">
+        </p:spPr>
+        <p:txBody>
+          <a:bodyPr wrap="square" lIns="0" tIns="0" rIns="0" bIns="0" rtlCol="0" anchor="ctr"/>
+          <a:lstStyle/>
+          <a:p>
+            <a:pPr marL="0" indent="0">
               <a:buNone/>
             </a:pPr>
             <a:r>
@@ -5719,23 +5569,20 @@
                 <a:solidFill>
                   <a:srgbClr val="0891B2"/>
                 </a:solidFill>
-                <a:latin typeface="Segoe UI" pitchFamily="34" charset="0"/>
-                <a:ea typeface="Segoe UI" pitchFamily="34" charset="-122"/>
-                <a:cs typeface="Segoe UI" pitchFamily="34" charset="-120"/>
+                <a:latin typeface="Segoe UI" panose="020B0502040204020203" pitchFamily="34" charset="0"/>
+                <a:ea typeface="Segoe UI" panose="020B0502040204020203" pitchFamily="34" charset="-122"/>
+                <a:cs typeface="Segoe UI" panose="020B0502040204020203" pitchFamily="34" charset="-120"/>
               </a:rPr>
               <a:t>LIVE  </a:t>
             </a:r>
-            <a:pPr indent="0" marL="0">
-              <a:buNone/>
-            </a:pPr>
             <a:r>
               <a:rPr lang="en-US" sz="1100" dirty="0">
                 <a:solidFill>
                   <a:srgbClr val="0B1B33"/>
                 </a:solidFill>
-                <a:latin typeface="Segoe UI" pitchFamily="34" charset="0"/>
-                <a:ea typeface="Segoe UI" pitchFamily="34" charset="-122"/>
-                <a:cs typeface="Segoe UI" pitchFamily="34" charset="-120"/>
+                <a:latin typeface="Segoe UI" panose="020B0502040204020203" pitchFamily="34" charset="0"/>
+                <a:ea typeface="Segoe UI" panose="020B0502040204020203" pitchFamily="34" charset="-122"/>
+                <a:cs typeface="Segoe UI" panose="020B0502040204020203" pitchFamily="34" charset="-120"/>
               </a:rPr>
               <a:t>Live monitoring page</a:t>
             </a:r>
@@ -5753,12 +5600,13 @@
 
 <file path=ppt/slides/slide5.xml><?xml version="1.0" encoding="utf-8"?>
 <p:sld xmlns:a="http://schemas.openxmlformats.org/drawingml/2006/main" xmlns:r="http://schemas.openxmlformats.org/officeDocument/2006/relationships" xmlns:p="http://schemas.openxmlformats.org/presentationml/2006/main">
-  <p:cSld name="Slide 5">
+  <p:cSld>
     <p:bg>
       <p:bgPr>
         <a:solidFill>
           <a:srgbClr val="F6F8FB"/>
         </a:solidFill>
+        <a:effectLst/>
       </p:bgPr>
     </p:bg>
     <p:spTree>
@@ -5815,25 +5663,24 @@
             <a:avLst/>
           </a:prstGeom>
           <a:noFill/>
-          <a:ln/>
-        </p:spPr>
-        <p:txBody>
-          <a:bodyPr wrap="square" lIns="0" tIns="0" rIns="0" bIns="0" rtlCol="0" anchor="ctr"/>
-          <a:lstStyle/>
-          <a:p>
-            <a:pPr indent="0" marL="0">
-              <a:buNone/>
-            </a:pPr>
-            <a:r>
-              <a:rPr lang="en-US" sz="1050" spc="400" kern="0" dirty="0">
+        </p:spPr>
+        <p:txBody>
+          <a:bodyPr wrap="square" lIns="0" tIns="0" rIns="0" bIns="0" rtlCol="0" anchor="ctr"/>
+          <a:lstStyle/>
+          <a:p>
+            <a:pPr marL="0" indent="0">
+              <a:buNone/>
+            </a:pPr>
+            <a:r>
+              <a:rPr lang="en-US" sz="1050" kern="0" spc="400" dirty="0">
                 <a:solidFill>
                   <a:srgbClr val="0891B2"/>
                 </a:solidFill>
-                <a:latin typeface="Segoe UI Semibold" pitchFamily="34" charset="0"/>
-                <a:ea typeface="Segoe UI Semibold" pitchFamily="34" charset="-122"/>
-                <a:cs typeface="Segoe UI Semibold" pitchFamily="34" charset="-120"/>
-              </a:rPr>
-              <a:t>05 · THURUNU · MAINTENANCE SERVICE</a:t>
+                <a:latin typeface="Segoe UI Semibold" panose="020B0702040204020203" pitchFamily="34" charset="0"/>
+                <a:ea typeface="Segoe UI Semibold" panose="020B0702040204020203" pitchFamily="34" charset="-122"/>
+                <a:cs typeface="Segoe UI Semibold" panose="020B0702040204020203" pitchFamily="34" charset="-120"/>
+              </a:rPr>
+              <a:t>05 · MAINTENANCE SERVICE</a:t>
             </a:r>
             <a:endParaRPr lang="en-US" sz="1050" dirty="0"/>
           </a:p>
@@ -5854,13 +5701,12 @@
             <a:avLst/>
           </a:prstGeom>
           <a:noFill/>
-          <a:ln/>
-        </p:spPr>
-        <p:txBody>
-          <a:bodyPr wrap="square" lIns="0" tIns="0" rIns="0" bIns="0" rtlCol="0" anchor="ctr"/>
-          <a:lstStyle/>
-          <a:p>
-            <a:pPr indent="0" marL="0">
+        </p:spPr>
+        <p:txBody>
+          <a:bodyPr wrap="square" lIns="0" tIns="0" rIns="0" bIns="0" rtlCol="0" anchor="ctr"/>
+          <a:lstStyle/>
+          <a:p>
+            <a:pPr marL="0" indent="0">
               <a:buNone/>
             </a:pPr>
             <a:r>
@@ -5868,9 +5714,9 @@
                 <a:solidFill>
                   <a:srgbClr val="0B1B33"/>
                 </a:solidFill>
-                <a:latin typeface="Segoe UI Semibold" pitchFamily="34" charset="0"/>
-                <a:ea typeface="Segoe UI Semibold" pitchFamily="34" charset="-122"/>
-                <a:cs typeface="Segoe UI Semibold" pitchFamily="34" charset="-120"/>
+                <a:latin typeface="Segoe UI Semibold" panose="020B0702040204020203" pitchFamily="34" charset="0"/>
+                <a:ea typeface="Segoe UI Semibold" panose="020B0702040204020203" pitchFamily="34" charset="-122"/>
+                <a:cs typeface="Segoe UI Semibold" panose="020B0702040204020203" pitchFamily="34" charset="-120"/>
               </a:rPr>
               <a:t>Faults become tracked work automatically</a:t>
             </a:r>
@@ -5916,13 +5762,12 @@
             <a:avLst/>
           </a:prstGeom>
           <a:noFill/>
-          <a:ln/>
-        </p:spPr>
-        <p:txBody>
-          <a:bodyPr wrap="square" lIns="0" tIns="0" rIns="0" bIns="0" rtlCol="0" anchor="ctr"/>
-          <a:lstStyle/>
-          <a:p>
-            <a:pPr indent="0" marL="0">
+        </p:spPr>
+        <p:txBody>
+          <a:bodyPr wrap="square" lIns="0" tIns="0" rIns="0" bIns="0" rtlCol="0" anchor="ctr"/>
+          <a:lstStyle/>
+          <a:p>
+            <a:pPr marL="0" indent="0">
               <a:buNone/>
             </a:pPr>
             <a:r>
@@ -5930,9 +5775,9 @@
                 <a:solidFill>
                   <a:srgbClr val="64748B"/>
                 </a:solidFill>
-                <a:latin typeface="Segoe UI" pitchFamily="34" charset="0"/>
-                <a:ea typeface="Segoe UI" pitchFamily="34" charset="-122"/>
-                <a:cs typeface="Segoe UI" pitchFamily="34" charset="-120"/>
+                <a:latin typeface="Segoe UI" panose="020B0502040204020203" pitchFamily="34" charset="0"/>
+                <a:ea typeface="Segoe UI" panose="020B0502040204020203" pitchFamily="34" charset="-122"/>
+                <a:cs typeface="Segoe UI" panose="020B0502040204020203" pitchFamily="34" charset="-120"/>
               </a:rPr>
               <a:t>EC8208 Software Architecture  ·  University of Ruhuna</a:t>
             </a:r>
@@ -5955,13 +5800,12 @@
             <a:avLst/>
           </a:prstGeom>
           <a:noFill/>
-          <a:ln/>
-        </p:spPr>
-        <p:txBody>
-          <a:bodyPr wrap="square" lIns="0" tIns="0" rIns="0" bIns="0" rtlCol="0" anchor="ctr"/>
-          <a:lstStyle/>
-          <a:p>
-            <a:pPr algn="r" indent="0" marL="0">
+        </p:spPr>
+        <p:txBody>
+          <a:bodyPr wrap="square" lIns="0" tIns="0" rIns="0" bIns="0" rtlCol="0" anchor="ctr"/>
+          <a:lstStyle/>
+          <a:p>
+            <a:pPr marL="0" indent="0" algn="r">
               <a:buNone/>
             </a:pPr>
             <a:r>
@@ -5969,9 +5813,9 @@
                 <a:solidFill>
                   <a:srgbClr val="64748B"/>
                 </a:solidFill>
-                <a:latin typeface="Segoe UI" pitchFamily="34" charset="0"/>
-                <a:ea typeface="Segoe UI" pitchFamily="34" charset="-122"/>
-                <a:cs typeface="Segoe UI" pitchFamily="34" charset="-120"/>
+                <a:latin typeface="Segoe UI" panose="020B0502040204020203" pitchFamily="34" charset="0"/>
+                <a:ea typeface="Segoe UI" panose="020B0502040204020203" pitchFamily="34" charset="-122"/>
+                <a:cs typeface="Segoe UI" panose="020B0502040204020203" pitchFamily="34" charset="-120"/>
               </a:rPr>
               <a:t>05  ·  1:49–2:38</a:t>
             </a:r>
@@ -6021,13 +5865,12 @@
             <a:avLst/>
           </a:prstGeom>
           <a:noFill/>
-          <a:ln/>
-        </p:spPr>
-        <p:txBody>
-          <a:bodyPr wrap="square" lIns="0" tIns="0" rIns="0" bIns="0" rtlCol="0" anchor="ctr"/>
-          <a:lstStyle/>
-          <a:p>
-            <a:pPr algn="ctr" indent="0" marL="0">
+        </p:spPr>
+        <p:txBody>
+          <a:bodyPr wrap="square" lIns="0" tIns="0" rIns="0" bIns="0" rtlCol="0" anchor="ctr"/>
+          <a:lstStyle/>
+          <a:p>
+            <a:pPr marL="0" indent="0" algn="ctr">
               <a:buNone/>
             </a:pPr>
             <a:r>
@@ -6035,9 +5878,9 @@
                 <a:solidFill>
                   <a:srgbClr val="FFFFFF"/>
                 </a:solidFill>
-                <a:latin typeface="Segoe UI Semibold" pitchFamily="34" charset="0"/>
-                <a:ea typeface="Segoe UI Semibold" pitchFamily="34" charset="-122"/>
-                <a:cs typeface="Segoe UI Semibold" pitchFamily="34" charset="-120"/>
+                <a:latin typeface="Segoe UI Semibold" panose="020B0702040204020203" pitchFamily="34" charset="0"/>
+                <a:ea typeface="Segoe UI Semibold" panose="020B0702040204020203" pitchFamily="34" charset="-122"/>
+                <a:cs typeface="Segoe UI Semibold" panose="020B0702040204020203" pitchFamily="34" charset="-120"/>
               </a:rPr>
               <a:t>Alert event</a:t>
             </a:r>
@@ -6060,13 +5903,12 @@
             <a:avLst/>
           </a:prstGeom>
           <a:noFill/>
-          <a:ln/>
-        </p:spPr>
-        <p:txBody>
-          <a:bodyPr wrap="square" lIns="0" tIns="0" rIns="0" bIns="0" rtlCol="0" anchor="ctr"/>
-          <a:lstStyle/>
-          <a:p>
-            <a:pPr algn="ctr" indent="0" marL="0">
+        </p:spPr>
+        <p:txBody>
+          <a:bodyPr wrap="square" lIns="0" tIns="0" rIns="0" bIns="0" rtlCol="0" anchor="ctr"/>
+          <a:lstStyle/>
+          <a:p>
+            <a:pPr marL="0" indent="0" algn="ctr">
               <a:buNone/>
             </a:pPr>
             <a:r>
@@ -6074,9 +5916,9 @@
                 <a:solidFill>
                   <a:srgbClr val="E6F4F8"/>
                 </a:solidFill>
-                <a:latin typeface="Segoe UI" pitchFamily="34" charset="0"/>
-                <a:ea typeface="Segoe UI" pitchFamily="34" charset="-122"/>
-                <a:cs typeface="Segoe UI" pitchFamily="34" charset="-120"/>
+                <a:latin typeface="Segoe UI" panose="020B0502040204020203" pitchFamily="34" charset="0"/>
+                <a:ea typeface="Segoe UI" panose="020B0502040204020203" pitchFamily="34" charset="-122"/>
+                <a:cs typeface="Segoe UI" panose="020B0502040204020203" pitchFamily="34" charset="-120"/>
               </a:rPr>
               <a:t>high or critical</a:t>
             </a:r>
@@ -6099,13 +5941,12 @@
             <a:avLst/>
           </a:prstGeom>
           <a:noFill/>
-          <a:ln/>
-        </p:spPr>
-        <p:txBody>
-          <a:bodyPr wrap="square" lIns="0" tIns="0" rIns="0" bIns="0" rtlCol="0" anchor="ctr"/>
-          <a:lstStyle/>
-          <a:p>
-            <a:pPr algn="ctr" indent="0" marL="0">
+        </p:spPr>
+        <p:txBody>
+          <a:bodyPr wrap="square" lIns="0" tIns="0" rIns="0" bIns="0" rtlCol="0" anchor="ctr"/>
+          <a:lstStyle/>
+          <a:p>
+            <a:pPr marL="0" indent="0" algn="ctr">
               <a:buNone/>
             </a:pPr>
             <a:r>
@@ -6113,9 +5954,9 @@
                 <a:solidFill>
                   <a:srgbClr val="0891B2"/>
                 </a:solidFill>
-                <a:latin typeface="Segoe UI Semibold" pitchFamily="34" charset="0"/>
-                <a:ea typeface="Segoe UI Semibold" pitchFamily="34" charset="-122"/>
-                <a:cs typeface="Segoe UI Semibold" pitchFamily="34" charset="-120"/>
+                <a:latin typeface="Segoe UI Semibold" panose="020B0702040204020203" pitchFamily="34" charset="0"/>
+                <a:ea typeface="Segoe UI Semibold" panose="020B0702040204020203" pitchFamily="34" charset="-122"/>
+                <a:cs typeface="Segoe UI Semibold" panose="020B0702040204020203" pitchFamily="34" charset="-120"/>
               </a:rPr>
               <a:t>›</a:t>
             </a:r>
@@ -6165,13 +6006,12 @@
             <a:avLst/>
           </a:prstGeom>
           <a:noFill/>
-          <a:ln/>
-        </p:spPr>
-        <p:txBody>
-          <a:bodyPr wrap="square" lIns="0" tIns="0" rIns="0" bIns="0" rtlCol="0" anchor="ctr"/>
-          <a:lstStyle/>
-          <a:p>
-            <a:pPr algn="ctr" indent="0" marL="0">
+        </p:spPr>
+        <p:txBody>
+          <a:bodyPr wrap="square" lIns="0" tIns="0" rIns="0" bIns="0" rtlCol="0" anchor="ctr"/>
+          <a:lstStyle/>
+          <a:p>
+            <a:pPr marL="0" indent="0" algn="ctr">
               <a:buNone/>
             </a:pPr>
             <a:r>
@@ -6179,9 +6019,9 @@
                 <a:solidFill>
                   <a:srgbClr val="0B1B33"/>
                 </a:solidFill>
-                <a:latin typeface="Segoe UI Semibold" pitchFamily="34" charset="0"/>
-                <a:ea typeface="Segoe UI Semibold" pitchFamily="34" charset="-122"/>
-                <a:cs typeface="Segoe UI Semibold" pitchFamily="34" charset="-120"/>
+                <a:latin typeface="Segoe UI Semibold" panose="020B0702040204020203" pitchFamily="34" charset="0"/>
+                <a:ea typeface="Segoe UI Semibold" panose="020B0702040204020203" pitchFamily="34" charset="-122"/>
+                <a:cs typeface="Segoe UI Semibold" panose="020B0702040204020203" pitchFamily="34" charset="-120"/>
               </a:rPr>
               <a:t>Work order</a:t>
             </a:r>
@@ -6204,13 +6044,12 @@
             <a:avLst/>
           </a:prstGeom>
           <a:noFill/>
-          <a:ln/>
-        </p:spPr>
-        <p:txBody>
-          <a:bodyPr wrap="square" lIns="0" tIns="0" rIns="0" bIns="0" rtlCol="0" anchor="ctr"/>
-          <a:lstStyle/>
-          <a:p>
-            <a:pPr algn="ctr" indent="0" marL="0">
+        </p:spPr>
+        <p:txBody>
+          <a:bodyPr wrap="square" lIns="0" tIns="0" rIns="0" bIns="0" rtlCol="0" anchor="ctr"/>
+          <a:lstStyle/>
+          <a:p>
+            <a:pPr marL="0" indent="0" algn="ctr">
               <a:buNone/>
             </a:pPr>
             <a:r>
@@ -6218,9 +6057,9 @@
                 <a:solidFill>
                   <a:srgbClr val="64748B"/>
                 </a:solidFill>
-                <a:latin typeface="Segoe UI" pitchFamily="34" charset="0"/>
-                <a:ea typeface="Segoe UI" pitchFamily="34" charset="-122"/>
-                <a:cs typeface="Segoe UI" pitchFamily="34" charset="-120"/>
+                <a:latin typeface="Segoe UI" panose="020B0502040204020203" pitchFamily="34" charset="0"/>
+                <a:ea typeface="Segoe UI" panose="020B0502040204020203" pitchFamily="34" charset="-122"/>
+                <a:cs typeface="Segoe UI" panose="020B0502040204020203" pitchFamily="34" charset="-120"/>
               </a:rPr>
               <a:t>created</a:t>
             </a:r>
@@ -6243,13 +6082,12 @@
             <a:avLst/>
           </a:prstGeom>
           <a:noFill/>
-          <a:ln/>
-        </p:spPr>
-        <p:txBody>
-          <a:bodyPr wrap="square" lIns="0" tIns="0" rIns="0" bIns="0" rtlCol="0" anchor="ctr"/>
-          <a:lstStyle/>
-          <a:p>
-            <a:pPr algn="ctr" indent="0" marL="0">
+        </p:spPr>
+        <p:txBody>
+          <a:bodyPr wrap="square" lIns="0" tIns="0" rIns="0" bIns="0" rtlCol="0" anchor="ctr"/>
+          <a:lstStyle/>
+          <a:p>
+            <a:pPr marL="0" indent="0" algn="ctr">
               <a:buNone/>
             </a:pPr>
             <a:r>
@@ -6257,9 +6095,9 @@
                 <a:solidFill>
                   <a:srgbClr val="0891B2"/>
                 </a:solidFill>
-                <a:latin typeface="Segoe UI Semibold" pitchFamily="34" charset="0"/>
-                <a:ea typeface="Segoe UI Semibold" pitchFamily="34" charset="-122"/>
-                <a:cs typeface="Segoe UI Semibold" pitchFamily="34" charset="-120"/>
+                <a:latin typeface="Segoe UI Semibold" panose="020B0702040204020203" pitchFamily="34" charset="0"/>
+                <a:ea typeface="Segoe UI Semibold" panose="020B0702040204020203" pitchFamily="34" charset="-122"/>
+                <a:cs typeface="Segoe UI Semibold" panose="020B0702040204020203" pitchFamily="34" charset="-120"/>
               </a:rPr>
               <a:t>›</a:t>
             </a:r>
@@ -6309,13 +6147,12 @@
             <a:avLst/>
           </a:prstGeom>
           <a:noFill/>
-          <a:ln/>
-        </p:spPr>
-        <p:txBody>
-          <a:bodyPr wrap="square" lIns="0" tIns="0" rIns="0" bIns="0" rtlCol="0" anchor="ctr"/>
-          <a:lstStyle/>
-          <a:p>
-            <a:pPr algn="ctr" indent="0" marL="0">
+        </p:spPr>
+        <p:txBody>
+          <a:bodyPr wrap="square" lIns="0" tIns="0" rIns="0" bIns="0" rtlCol="0" anchor="ctr"/>
+          <a:lstStyle/>
+          <a:p>
+            <a:pPr marL="0" indent="0" algn="ctr">
               <a:buNone/>
             </a:pPr>
             <a:r>
@@ -6323,9 +6160,9 @@
                 <a:solidFill>
                   <a:srgbClr val="0B1B33"/>
                 </a:solidFill>
-                <a:latin typeface="Segoe UI Semibold" pitchFamily="34" charset="0"/>
-                <a:ea typeface="Segoe UI Semibold" pitchFamily="34" charset="-122"/>
-                <a:cs typeface="Segoe UI Semibold" pitchFamily="34" charset="-120"/>
+                <a:latin typeface="Segoe UI Semibold" panose="020B0702040204020203" pitchFamily="34" charset="0"/>
+                <a:ea typeface="Segoe UI Semibold" panose="020B0702040204020203" pitchFamily="34" charset="-122"/>
+                <a:cs typeface="Segoe UI Semibold" panose="020B0702040204020203" pitchFamily="34" charset="-120"/>
               </a:rPr>
               <a:t>Technician</a:t>
             </a:r>
@@ -6348,13 +6185,12 @@
             <a:avLst/>
           </a:prstGeom>
           <a:noFill/>
-          <a:ln/>
-        </p:spPr>
-        <p:txBody>
-          <a:bodyPr wrap="square" lIns="0" tIns="0" rIns="0" bIns="0" rtlCol="0" anchor="ctr"/>
-          <a:lstStyle/>
-          <a:p>
-            <a:pPr algn="ctr" indent="0" marL="0">
+        </p:spPr>
+        <p:txBody>
+          <a:bodyPr wrap="square" lIns="0" tIns="0" rIns="0" bIns="0" rtlCol="0" anchor="ctr"/>
+          <a:lstStyle/>
+          <a:p>
+            <a:pPr marL="0" indent="0" algn="ctr">
               <a:buNone/>
             </a:pPr>
             <a:r>
@@ -6362,9 +6198,9 @@
                 <a:solidFill>
                   <a:srgbClr val="64748B"/>
                 </a:solidFill>
-                <a:latin typeface="Segoe UI" pitchFamily="34" charset="0"/>
-                <a:ea typeface="Segoe UI" pitchFamily="34" charset="-122"/>
-                <a:cs typeface="Segoe UI" pitchFamily="34" charset="-120"/>
+                <a:latin typeface="Segoe UI" panose="020B0502040204020203" pitchFamily="34" charset="0"/>
+                <a:ea typeface="Segoe UI" panose="020B0502040204020203" pitchFamily="34" charset="-122"/>
+                <a:cs typeface="Segoe UI" panose="020B0502040204020203" pitchFamily="34" charset="-120"/>
               </a:rPr>
               <a:t>assigned</a:t>
             </a:r>
@@ -6387,13 +6223,12 @@
             <a:avLst/>
           </a:prstGeom>
           <a:noFill/>
-          <a:ln/>
-        </p:spPr>
-        <p:txBody>
-          <a:bodyPr wrap="square" lIns="0" tIns="0" rIns="0" bIns="0" rtlCol="0" anchor="ctr"/>
-          <a:lstStyle/>
-          <a:p>
-            <a:pPr algn="ctr" indent="0" marL="0">
+        </p:spPr>
+        <p:txBody>
+          <a:bodyPr wrap="square" lIns="0" tIns="0" rIns="0" bIns="0" rtlCol="0" anchor="ctr"/>
+          <a:lstStyle/>
+          <a:p>
+            <a:pPr marL="0" indent="0" algn="ctr">
               <a:buNone/>
             </a:pPr>
             <a:r>
@@ -6401,9 +6236,9 @@
                 <a:solidFill>
                   <a:srgbClr val="0891B2"/>
                 </a:solidFill>
-                <a:latin typeface="Segoe UI Semibold" pitchFamily="34" charset="0"/>
-                <a:ea typeface="Segoe UI Semibold" pitchFamily="34" charset="-122"/>
-                <a:cs typeface="Segoe UI Semibold" pitchFamily="34" charset="-120"/>
+                <a:latin typeface="Segoe UI Semibold" panose="020B0702040204020203" pitchFamily="34" charset="0"/>
+                <a:ea typeface="Segoe UI Semibold" panose="020B0702040204020203" pitchFamily="34" charset="-122"/>
+                <a:cs typeface="Segoe UI Semibold" panose="020B0702040204020203" pitchFamily="34" charset="-120"/>
               </a:rPr>
               <a:t>›</a:t>
             </a:r>
@@ -6453,13 +6288,12 @@
             <a:avLst/>
           </a:prstGeom>
           <a:noFill/>
-          <a:ln/>
-        </p:spPr>
-        <p:txBody>
-          <a:bodyPr wrap="square" lIns="0" tIns="0" rIns="0" bIns="0" rtlCol="0" anchor="ctr"/>
-          <a:lstStyle/>
-          <a:p>
-            <a:pPr algn="ctr" indent="0" marL="0">
+        </p:spPr>
+        <p:txBody>
+          <a:bodyPr wrap="square" lIns="0" tIns="0" rIns="0" bIns="0" rtlCol="0" anchor="ctr"/>
+          <a:lstStyle/>
+          <a:p>
+            <a:pPr marL="0" indent="0" algn="ctr">
               <a:buNone/>
             </a:pPr>
             <a:r>
@@ -6467,9 +6301,9 @@
                 <a:solidFill>
                   <a:srgbClr val="0B1B33"/>
                 </a:solidFill>
-                <a:latin typeface="Segoe UI Semibold" pitchFamily="34" charset="0"/>
-                <a:ea typeface="Segoe UI Semibold" pitchFamily="34" charset="-122"/>
-                <a:cs typeface="Segoe UI Semibold" pitchFamily="34" charset="-120"/>
+                <a:latin typeface="Segoe UI Semibold" panose="020B0702040204020203" pitchFamily="34" charset="0"/>
+                <a:ea typeface="Segoe UI Semibold" panose="020B0702040204020203" pitchFamily="34" charset="-122"/>
+                <a:cs typeface="Segoe UI Semibold" panose="020B0702040204020203" pitchFamily="34" charset="-120"/>
               </a:rPr>
               <a:t>Completed</a:t>
             </a:r>
@@ -6492,13 +6326,12 @@
             <a:avLst/>
           </a:prstGeom>
           <a:noFill/>
-          <a:ln/>
-        </p:spPr>
-        <p:txBody>
-          <a:bodyPr wrap="square" lIns="0" tIns="0" rIns="0" bIns="0" rtlCol="0" anchor="ctr"/>
-          <a:lstStyle/>
-          <a:p>
-            <a:pPr algn="ctr" indent="0" marL="0">
+        </p:spPr>
+        <p:txBody>
+          <a:bodyPr wrap="square" lIns="0" tIns="0" rIns="0" bIns="0" rtlCol="0" anchor="ctr"/>
+          <a:lstStyle/>
+          <a:p>
+            <a:pPr marL="0" indent="0" algn="ctr">
               <a:buNone/>
             </a:pPr>
             <a:r>
@@ -6506,9 +6339,9 @@
                 <a:solidFill>
                   <a:srgbClr val="64748B"/>
                 </a:solidFill>
-                <a:latin typeface="Segoe UI" pitchFamily="34" charset="0"/>
-                <a:ea typeface="Segoe UI" pitchFamily="34" charset="-122"/>
-                <a:cs typeface="Segoe UI" pitchFamily="34" charset="-120"/>
+                <a:latin typeface="Segoe UI" panose="020B0502040204020203" pitchFamily="34" charset="0"/>
+                <a:ea typeface="Segoe UI" panose="020B0502040204020203" pitchFamily="34" charset="-122"/>
+                <a:cs typeface="Segoe UI" panose="020B0502040204020203" pitchFamily="34" charset="-120"/>
               </a:rPr>
               <a:t>in history</a:t>
             </a:r>
@@ -6554,13 +6387,12 @@
             <a:avLst/>
           </a:prstGeom>
           <a:noFill/>
-          <a:ln/>
-        </p:spPr>
-        <p:txBody>
-          <a:bodyPr wrap="square" lIns="0" tIns="0" rIns="0" bIns="0" rtlCol="0" anchor="ctr"/>
-          <a:lstStyle/>
-          <a:p>
-            <a:pPr indent="0" marL="0">
+        </p:spPr>
+        <p:txBody>
+          <a:bodyPr wrap="square" lIns="0" tIns="0" rIns="0" bIns="0" rtlCol="0" anchor="ctr"/>
+          <a:lstStyle/>
+          <a:p>
+            <a:pPr marL="0" indent="0">
               <a:buNone/>
             </a:pPr>
             <a:r>
@@ -6568,9 +6400,9 @@
                 <a:solidFill>
                   <a:srgbClr val="0891B2"/>
                 </a:solidFill>
-                <a:latin typeface="Segoe UI Semibold" pitchFamily="34" charset="0"/>
-                <a:ea typeface="Segoe UI Semibold" pitchFamily="34" charset="-122"/>
-                <a:cs typeface="Segoe UI Semibold" pitchFamily="34" charset="-120"/>
+                <a:latin typeface="Segoe UI Semibold" panose="020B0702040204020203" pitchFamily="34" charset="0"/>
+                <a:ea typeface="Segoe UI Semibold" panose="020B0702040204020203" pitchFamily="34" charset="-122"/>
+                <a:cs typeface="Segoe UI Semibold" panose="020B0702040204020203" pitchFamily="34" charset="-120"/>
               </a:rPr>
               <a:t>0 clicks</a:t>
             </a:r>
@@ -6593,13 +6425,12 @@
             <a:avLst/>
           </a:prstGeom>
           <a:noFill/>
-          <a:ln/>
         </p:spPr>
         <p:txBody>
           <a:bodyPr wrap="square" lIns="0" tIns="0" rIns="0" bIns="0" rtlCol="0" anchor="t"/>
           <a:lstStyle/>
           <a:p>
-            <a:pPr indent="0" marL="0">
+            <a:pPr marL="0" indent="0">
               <a:buNone/>
             </a:pPr>
             <a:r>
@@ -6607,9 +6438,9 @@
                 <a:solidFill>
                   <a:srgbClr val="64748B"/>
                 </a:solidFill>
-                <a:latin typeface="Segoe UI" pitchFamily="34" charset="0"/>
-                <a:ea typeface="Segoe UI" pitchFamily="34" charset="-122"/>
-                <a:cs typeface="Segoe UI" pitchFamily="34" charset="-120"/>
+                <a:latin typeface="Segoe UI" panose="020B0502040204020203" pitchFamily="34" charset="0"/>
+                <a:ea typeface="Segoe UI" panose="020B0502040204020203" pitchFamily="34" charset="-122"/>
+                <a:cs typeface="Segoe UI" panose="020B0502040204020203" pitchFamily="34" charset="-120"/>
               </a:rPr>
               <a:t>to open a corrective order</a:t>
             </a:r>
@@ -6655,13 +6486,12 @@
             <a:avLst/>
           </a:prstGeom>
           <a:noFill/>
-          <a:ln/>
-        </p:spPr>
-        <p:txBody>
-          <a:bodyPr wrap="square" lIns="0" tIns="0" rIns="0" bIns="0" rtlCol="0" anchor="ctr"/>
-          <a:lstStyle/>
-          <a:p>
-            <a:pPr indent="0" marL="0">
+        </p:spPr>
+        <p:txBody>
+          <a:bodyPr wrap="square" lIns="0" tIns="0" rIns="0" bIns="0" rtlCol="0" anchor="ctr"/>
+          <a:lstStyle/>
+          <a:p>
+            <a:pPr marL="0" indent="0">
               <a:buNone/>
             </a:pPr>
             <a:r>
@@ -6669,9 +6499,9 @@
                 <a:solidFill>
                   <a:srgbClr val="0891B2"/>
                 </a:solidFill>
-                <a:latin typeface="Segoe UI Semibold" pitchFamily="34" charset="0"/>
-                <a:ea typeface="Segoe UI Semibold" pitchFamily="34" charset="-122"/>
-                <a:cs typeface="Segoe UI Semibold" pitchFamily="34" charset="-120"/>
+                <a:latin typeface="Segoe UI Semibold" panose="020B0702040204020203" pitchFamily="34" charset="0"/>
+                <a:ea typeface="Segoe UI Semibold" panose="020B0702040204020203" pitchFamily="34" charset="-122"/>
+                <a:cs typeface="Segoe UI Semibold" panose="020B0702040204020203" pitchFamily="34" charset="-120"/>
               </a:rPr>
               <a:t>4</a:t>
             </a:r>
@@ -6694,13 +6524,12 @@
             <a:avLst/>
           </a:prstGeom>
           <a:noFill/>
-          <a:ln/>
         </p:spPr>
         <p:txBody>
           <a:bodyPr wrap="square" lIns="0" tIns="0" rIns="0" bIns="0" rtlCol="0" anchor="t"/>
           <a:lstStyle/>
           <a:p>
-            <a:pPr indent="0" marL="0">
+            <a:pPr marL="0" indent="0">
               <a:buNone/>
             </a:pPr>
             <a:r>
@@ -6708,9 +6537,9 @@
                 <a:solidFill>
                   <a:srgbClr val="64748B"/>
                 </a:solidFill>
-                <a:latin typeface="Segoe UI" pitchFamily="34" charset="0"/>
-                <a:ea typeface="Segoe UI" pitchFamily="34" charset="-122"/>
-                <a:cs typeface="Segoe UI" pitchFamily="34" charset="-120"/>
+                <a:latin typeface="Segoe UI" panose="020B0502040204020203" pitchFamily="34" charset="0"/>
+                <a:ea typeface="Segoe UI" panose="020B0502040204020203" pitchFamily="34" charset="-122"/>
+                <a:cs typeface="Segoe UI" panose="020B0502040204020203" pitchFamily="34" charset="-120"/>
               </a:rPr>
               <a:t>technicians</a:t>
             </a:r>
@@ -6756,13 +6585,12 @@
             <a:avLst/>
           </a:prstGeom>
           <a:noFill/>
-          <a:ln/>
-        </p:spPr>
-        <p:txBody>
-          <a:bodyPr wrap="square" lIns="0" tIns="0" rIns="0" bIns="0" rtlCol="0" anchor="ctr"/>
-          <a:lstStyle/>
-          <a:p>
-            <a:pPr indent="0" marL="0">
+        </p:spPr>
+        <p:txBody>
+          <a:bodyPr wrap="square" lIns="0" tIns="0" rIns="0" bIns="0" rtlCol="0" anchor="ctr"/>
+          <a:lstStyle/>
+          <a:p>
+            <a:pPr marL="0" indent="0">
               <a:buNone/>
             </a:pPr>
             <a:r>
@@ -6770,9 +6598,9 @@
                 <a:solidFill>
                   <a:srgbClr val="0891B2"/>
                 </a:solidFill>
-                <a:latin typeface="Segoe UI Semibold" pitchFamily="34" charset="0"/>
-                <a:ea typeface="Segoe UI Semibold" pitchFamily="34" charset="-122"/>
-                <a:cs typeface="Segoe UI Semibold" pitchFamily="34" charset="-120"/>
+                <a:latin typeface="Segoe UI Semibold" panose="020B0702040204020203" pitchFamily="34" charset="0"/>
+                <a:ea typeface="Segoe UI Semibold" panose="020B0702040204020203" pitchFamily="34" charset="-122"/>
+                <a:cs typeface="Segoe UI Semibold" panose="020B0702040204020203" pitchFamily="34" charset="-120"/>
               </a:rPr>
               <a:t>1</a:t>
             </a:r>
@@ -6795,13 +6623,12 @@
             <a:avLst/>
           </a:prstGeom>
           <a:noFill/>
-          <a:ln/>
         </p:spPr>
         <p:txBody>
           <a:bodyPr wrap="square" lIns="0" tIns="0" rIns="0" bIns="0" rtlCol="0" anchor="t"/>
           <a:lstStyle/>
           <a:p>
-            <a:pPr indent="0" marL="0">
+            <a:pPr marL="0" indent="0">
               <a:buNone/>
             </a:pPr>
             <a:r>
@@ -6809,9 +6636,9 @@
                 <a:solidFill>
                   <a:srgbClr val="64748B"/>
                 </a:solidFill>
-                <a:latin typeface="Segoe UI" pitchFamily="34" charset="0"/>
-                <a:ea typeface="Segoe UI" pitchFamily="34" charset="-122"/>
-                <a:cs typeface="Segoe UI" pitchFamily="34" charset="-120"/>
+                <a:latin typeface="Segoe UI" panose="020B0502040204020203" pitchFamily="34" charset="0"/>
+                <a:ea typeface="Segoe UI" panose="020B0502040204020203" pitchFamily="34" charset="-122"/>
+                <a:cs typeface="Segoe UI" panose="020B0502040204020203" pitchFamily="34" charset="-120"/>
               </a:rPr>
               <a:t>active order per asset</a:t>
             </a:r>
@@ -6861,13 +6688,12 @@
             <a:avLst/>
           </a:prstGeom>
           <a:noFill/>
-          <a:ln/>
-        </p:spPr>
-        <p:txBody>
-          <a:bodyPr wrap="square" lIns="0" tIns="0" rIns="0" bIns="0" rtlCol="0" anchor="ctr"/>
-          <a:lstStyle/>
-          <a:p>
-            <a:pPr indent="0" marL="0">
+        </p:spPr>
+        <p:txBody>
+          <a:bodyPr wrap="square" lIns="0" tIns="0" rIns="0" bIns="0" rtlCol="0" anchor="ctr"/>
+          <a:lstStyle/>
+          <a:p>
+            <a:pPr marL="0" indent="0">
               <a:buNone/>
             </a:pPr>
             <a:r>
@@ -6875,23 +6701,20 @@
                 <a:solidFill>
                   <a:srgbClr val="0891B2"/>
                 </a:solidFill>
-                <a:latin typeface="Segoe UI" pitchFamily="34" charset="0"/>
-                <a:ea typeface="Segoe UI" pitchFamily="34" charset="-122"/>
-                <a:cs typeface="Segoe UI" pitchFamily="34" charset="-120"/>
+                <a:latin typeface="Segoe UI" panose="020B0502040204020203" pitchFamily="34" charset="0"/>
+                <a:ea typeface="Segoe UI" panose="020B0502040204020203" pitchFamily="34" charset="-122"/>
+                <a:cs typeface="Segoe UI" panose="020B0502040204020203" pitchFamily="34" charset="-120"/>
               </a:rPr>
               <a:t>LIVE  </a:t>
             </a:r>
-            <a:pPr indent="0" marL="0">
-              <a:buNone/>
-            </a:pPr>
             <a:r>
               <a:rPr lang="en-US" sz="1100" dirty="0">
                 <a:solidFill>
                   <a:srgbClr val="0B1B33"/>
                 </a:solidFill>
-                <a:latin typeface="Segoe UI" pitchFamily="34" charset="0"/>
-                <a:ea typeface="Segoe UI" pitchFamily="34" charset="-122"/>
-                <a:cs typeface="Segoe UI" pitchFamily="34" charset="-120"/>
+                <a:latin typeface="Segoe UI" panose="020B0502040204020203" pitchFamily="34" charset="0"/>
+                <a:ea typeface="Segoe UI" panose="020B0502040204020203" pitchFamily="34" charset="-122"/>
+                <a:cs typeface="Segoe UI" panose="020B0502040204020203" pitchFamily="34" charset="-120"/>
               </a:rPr>
               <a:t>Maintenance board</a:t>
             </a:r>
@@ -6909,12 +6732,13 @@
 
 <file path=ppt/slides/slide6.xml><?xml version="1.0" encoding="utf-8"?>
 <p:sld xmlns:a="http://schemas.openxmlformats.org/drawingml/2006/main" xmlns:r="http://schemas.openxmlformats.org/officeDocument/2006/relationships" xmlns:p="http://schemas.openxmlformats.org/presentationml/2006/main">
-  <p:cSld name="Slide 6">
+  <p:cSld>
     <p:bg>
       <p:bgPr>
         <a:solidFill>
           <a:srgbClr val="F6F8FB"/>
         </a:solidFill>
+        <a:effectLst/>
       </p:bgPr>
     </p:bg>
     <p:spTree>
@@ -6971,25 +6795,24 @@
             <a:avLst/>
           </a:prstGeom>
           <a:noFill/>
-          <a:ln/>
-        </p:spPr>
-        <p:txBody>
-          <a:bodyPr wrap="square" lIns="0" tIns="0" rIns="0" bIns="0" rtlCol="0" anchor="ctr"/>
-          <a:lstStyle/>
-          <a:p>
-            <a:pPr indent="0" marL="0">
-              <a:buNone/>
-            </a:pPr>
-            <a:r>
-              <a:rPr lang="en-US" sz="1050" spc="400" kern="0" dirty="0">
+        </p:spPr>
+        <p:txBody>
+          <a:bodyPr wrap="square" lIns="0" tIns="0" rIns="0" bIns="0" rtlCol="0" anchor="ctr"/>
+          <a:lstStyle/>
+          <a:p>
+            <a:pPr marL="0" indent="0">
+              <a:buNone/>
+            </a:pPr>
+            <a:r>
+              <a:rPr lang="en-US" sz="1050" kern="0" spc="400" dirty="0">
                 <a:solidFill>
                   <a:srgbClr val="0891B2"/>
                 </a:solidFill>
-                <a:latin typeface="Segoe UI Semibold" pitchFamily="34" charset="0"/>
-                <a:ea typeface="Segoe UI Semibold" pitchFamily="34" charset="-122"/>
-                <a:cs typeface="Segoe UI Semibold" pitchFamily="34" charset="-120"/>
-              </a:rPr>
-              <a:t>06 · YASIRU · NOTIFICATION SERVICE</a:t>
+                <a:latin typeface="Segoe UI Semibold" panose="020B0702040204020203" pitchFamily="34" charset="0"/>
+                <a:ea typeface="Segoe UI Semibold" panose="020B0702040204020203" pitchFamily="34" charset="-122"/>
+                <a:cs typeface="Segoe UI Semibold" panose="020B0702040204020203" pitchFamily="34" charset="-120"/>
+              </a:rPr>
+              <a:t>06 · NOTIFICATION SERVICE</a:t>
             </a:r>
             <a:endParaRPr lang="en-US" sz="1050" dirty="0"/>
           </a:p>
@@ -7010,13 +6833,12 @@
             <a:avLst/>
           </a:prstGeom>
           <a:noFill/>
-          <a:ln/>
-        </p:spPr>
-        <p:txBody>
-          <a:bodyPr wrap="square" lIns="0" tIns="0" rIns="0" bIns="0" rtlCol="0" anchor="ctr"/>
-          <a:lstStyle/>
-          <a:p>
-            <a:pPr indent="0" marL="0">
+        </p:spPr>
+        <p:txBody>
+          <a:bodyPr wrap="square" lIns="0" tIns="0" rIns="0" bIns="0" rtlCol="0" anchor="ctr"/>
+          <a:lstStyle/>
+          <a:p>
+            <a:pPr marL="0" indent="0">
               <a:buNone/>
             </a:pPr>
             <a:r>
@@ -7024,9 +6846,9 @@
                 <a:solidFill>
                   <a:srgbClr val="0B1B33"/>
                 </a:solidFill>
-                <a:latin typeface="Segoe UI Semibold" pitchFamily="34" charset="0"/>
-                <a:ea typeface="Segoe UI Semibold" pitchFamily="34" charset="-122"/>
-                <a:cs typeface="Segoe UI Semibold" pitchFamily="34" charset="-120"/>
+                <a:latin typeface="Segoe UI Semibold" panose="020B0702040204020203" pitchFamily="34" charset="0"/>
+                <a:ea typeface="Segoe UI Semibold" panose="020B0702040204020203" pitchFamily="34" charset="-122"/>
+                <a:cs typeface="Segoe UI Semibold" panose="020B0702040204020203" pitchFamily="34" charset="-120"/>
               </a:rPr>
               <a:t>Every alert delivered and recorded</a:t>
             </a:r>
@@ -7072,13 +6894,12 @@
             <a:avLst/>
           </a:prstGeom>
           <a:noFill/>
-          <a:ln/>
-        </p:spPr>
-        <p:txBody>
-          <a:bodyPr wrap="square" lIns="0" tIns="0" rIns="0" bIns="0" rtlCol="0" anchor="ctr"/>
-          <a:lstStyle/>
-          <a:p>
-            <a:pPr indent="0" marL="0">
+        </p:spPr>
+        <p:txBody>
+          <a:bodyPr wrap="square" lIns="0" tIns="0" rIns="0" bIns="0" rtlCol="0" anchor="ctr"/>
+          <a:lstStyle/>
+          <a:p>
+            <a:pPr marL="0" indent="0">
               <a:buNone/>
             </a:pPr>
             <a:r>
@@ -7086,9 +6907,9 @@
                 <a:solidFill>
                   <a:srgbClr val="64748B"/>
                 </a:solidFill>
-                <a:latin typeface="Segoe UI" pitchFamily="34" charset="0"/>
-                <a:ea typeface="Segoe UI" pitchFamily="34" charset="-122"/>
-                <a:cs typeface="Segoe UI" pitchFamily="34" charset="-120"/>
+                <a:latin typeface="Segoe UI" panose="020B0502040204020203" pitchFamily="34" charset="0"/>
+                <a:ea typeface="Segoe UI" panose="020B0502040204020203" pitchFamily="34" charset="-122"/>
+                <a:cs typeface="Segoe UI" panose="020B0502040204020203" pitchFamily="34" charset="-120"/>
               </a:rPr>
               <a:t>EC8208 Software Architecture  ·  University of Ruhuna</a:t>
             </a:r>
@@ -7111,13 +6932,12 @@
             <a:avLst/>
           </a:prstGeom>
           <a:noFill/>
-          <a:ln/>
-        </p:spPr>
-        <p:txBody>
-          <a:bodyPr wrap="square" lIns="0" tIns="0" rIns="0" bIns="0" rtlCol="0" anchor="ctr"/>
-          <a:lstStyle/>
-          <a:p>
-            <a:pPr algn="r" indent="0" marL="0">
+        </p:spPr>
+        <p:txBody>
+          <a:bodyPr wrap="square" lIns="0" tIns="0" rIns="0" bIns="0" rtlCol="0" anchor="ctr"/>
+          <a:lstStyle/>
+          <a:p>
+            <a:pPr marL="0" indent="0" algn="r">
               <a:buNone/>
             </a:pPr>
             <a:r>
@@ -7125,9 +6945,9 @@
                 <a:solidFill>
                   <a:srgbClr val="64748B"/>
                 </a:solidFill>
-                <a:latin typeface="Segoe UI" pitchFamily="34" charset="0"/>
-                <a:ea typeface="Segoe UI" pitchFamily="34" charset="-122"/>
-                <a:cs typeface="Segoe UI" pitchFamily="34" charset="-120"/>
+                <a:latin typeface="Segoe UI" panose="020B0502040204020203" pitchFamily="34" charset="0"/>
+                <a:ea typeface="Segoe UI" panose="020B0502040204020203" pitchFamily="34" charset="-122"/>
+                <a:cs typeface="Segoe UI" panose="020B0502040204020203" pitchFamily="34" charset="-120"/>
               </a:rPr>
               <a:t>06  ·  2:38–3:27</a:t>
             </a:r>
@@ -7177,13 +6997,12 @@
             <a:avLst/>
           </a:prstGeom>
           <a:noFill/>
-          <a:ln/>
-        </p:spPr>
-        <p:txBody>
-          <a:bodyPr wrap="square" lIns="0" tIns="0" rIns="0" bIns="0" rtlCol="0" anchor="ctr"/>
-          <a:lstStyle/>
-          <a:p>
-            <a:pPr algn="ctr" indent="0" marL="0">
+        </p:spPr>
+        <p:txBody>
+          <a:bodyPr wrap="square" lIns="0" tIns="0" rIns="0" bIns="0" rtlCol="0" anchor="ctr"/>
+          <a:lstStyle/>
+          <a:p>
+            <a:pPr marL="0" indent="0" algn="ctr">
               <a:buNone/>
             </a:pPr>
             <a:r>
@@ -7191,9 +7010,9 @@
                 <a:solidFill>
                   <a:srgbClr val="FFFFFF"/>
                 </a:solidFill>
-                <a:latin typeface="Segoe UI Semibold" pitchFamily="34" charset="0"/>
-                <a:ea typeface="Segoe UI Semibold" pitchFamily="34" charset="-122"/>
-                <a:cs typeface="Segoe UI Semibold" pitchFamily="34" charset="-120"/>
+                <a:latin typeface="Segoe UI Semibold" panose="020B0702040204020203" pitchFamily="34" charset="0"/>
+                <a:ea typeface="Segoe UI Semibold" panose="020B0702040204020203" pitchFamily="34" charset="-122"/>
+                <a:cs typeface="Segoe UI Semibold" panose="020B0702040204020203" pitchFamily="34" charset="-120"/>
               </a:rPr>
               <a:t>Queue</a:t>
             </a:r>
@@ -7216,13 +7035,12 @@
             <a:avLst/>
           </a:prstGeom>
           <a:noFill/>
-          <a:ln/>
-        </p:spPr>
-        <p:txBody>
-          <a:bodyPr wrap="square" lIns="0" tIns="0" rIns="0" bIns="0" rtlCol="0" anchor="ctr"/>
-          <a:lstStyle/>
-          <a:p>
-            <a:pPr algn="ctr" indent="0" marL="0">
+        </p:spPr>
+        <p:txBody>
+          <a:bodyPr wrap="square" lIns="0" tIns="0" rIns="0" bIns="0" rtlCol="0" anchor="ctr"/>
+          <a:lstStyle/>
+          <a:p>
+            <a:pPr marL="0" indent="0" algn="ctr">
               <a:buNone/>
             </a:pPr>
             <a:r>
@@ -7230,9 +7048,9 @@
                 <a:solidFill>
                   <a:srgbClr val="E6F4F8"/>
                 </a:solidFill>
-                <a:latin typeface="Segoe UI" pitchFamily="34" charset="0"/>
-                <a:ea typeface="Segoe UI" pitchFamily="34" charset="-122"/>
-                <a:cs typeface="Segoe UI" pitchFamily="34" charset="-120"/>
+                <a:latin typeface="Segoe UI" panose="020B0502040204020203" pitchFamily="34" charset="0"/>
+                <a:ea typeface="Segoe UI" panose="020B0502040204020203" pitchFamily="34" charset="-122"/>
+                <a:cs typeface="Segoe UI" panose="020B0502040204020203" pitchFamily="34" charset="-120"/>
               </a:rPr>
               <a:t>durable</a:t>
             </a:r>
@@ -7255,13 +7073,12 @@
             <a:avLst/>
           </a:prstGeom>
           <a:noFill/>
-          <a:ln/>
-        </p:spPr>
-        <p:txBody>
-          <a:bodyPr wrap="square" lIns="0" tIns="0" rIns="0" bIns="0" rtlCol="0" anchor="ctr"/>
-          <a:lstStyle/>
-          <a:p>
-            <a:pPr algn="ctr" indent="0" marL="0">
+        </p:spPr>
+        <p:txBody>
+          <a:bodyPr wrap="square" lIns="0" tIns="0" rIns="0" bIns="0" rtlCol="0" anchor="ctr"/>
+          <a:lstStyle/>
+          <a:p>
+            <a:pPr marL="0" indent="0" algn="ctr">
               <a:buNone/>
             </a:pPr>
             <a:r>
@@ -7269,9 +7086,9 @@
                 <a:solidFill>
                   <a:srgbClr val="0891B2"/>
                 </a:solidFill>
-                <a:latin typeface="Segoe UI Semibold" pitchFamily="34" charset="0"/>
-                <a:ea typeface="Segoe UI Semibold" pitchFamily="34" charset="-122"/>
-                <a:cs typeface="Segoe UI Semibold" pitchFamily="34" charset="-120"/>
+                <a:latin typeface="Segoe UI Semibold" panose="020B0702040204020203" pitchFamily="34" charset="0"/>
+                <a:ea typeface="Segoe UI Semibold" panose="020B0702040204020203" pitchFamily="34" charset="-122"/>
+                <a:cs typeface="Segoe UI Semibold" panose="020B0702040204020203" pitchFamily="34" charset="-120"/>
               </a:rPr>
               <a:t>›</a:t>
             </a:r>
@@ -7321,13 +7138,12 @@
             <a:avLst/>
           </a:prstGeom>
           <a:noFill/>
-          <a:ln/>
-        </p:spPr>
-        <p:txBody>
-          <a:bodyPr wrap="square" lIns="0" tIns="0" rIns="0" bIns="0" rtlCol="0" anchor="ctr"/>
-          <a:lstStyle/>
-          <a:p>
-            <a:pPr algn="ctr" indent="0" marL="0">
+        </p:spPr>
+        <p:txBody>
+          <a:bodyPr wrap="square" lIns="0" tIns="0" rIns="0" bIns="0" rtlCol="0" anchor="ctr"/>
+          <a:lstStyle/>
+          <a:p>
+            <a:pPr marL="0" indent="0" algn="ctr">
               <a:buNone/>
             </a:pPr>
             <a:r>
@@ -7335,9 +7151,9 @@
                 <a:solidFill>
                   <a:srgbClr val="0B1B33"/>
                 </a:solidFill>
-                <a:latin typeface="Segoe UI Semibold" pitchFamily="34" charset="0"/>
-                <a:ea typeface="Segoe UI Semibold" pitchFamily="34" charset="-122"/>
-                <a:cs typeface="Segoe UI Semibold" pitchFamily="34" charset="-120"/>
+                <a:latin typeface="Segoe UI Semibold" panose="020B0702040204020203" pitchFamily="34" charset="0"/>
+                <a:ea typeface="Segoe UI Semibold" panose="020B0702040204020203" pitchFamily="34" charset="-122"/>
+                <a:cs typeface="Segoe UI Semibold" panose="020B0702040204020203" pitchFamily="34" charset="-120"/>
               </a:rPr>
               <a:t>Consumer</a:t>
             </a:r>
@@ -7360,13 +7176,12 @@
             <a:avLst/>
           </a:prstGeom>
           <a:noFill/>
-          <a:ln/>
-        </p:spPr>
-        <p:txBody>
-          <a:bodyPr wrap="square" lIns="0" tIns="0" rIns="0" bIns="0" rtlCol="0" anchor="ctr"/>
-          <a:lstStyle/>
-          <a:p>
-            <a:pPr algn="ctr" indent="0" marL="0">
+        </p:spPr>
+        <p:txBody>
+          <a:bodyPr wrap="square" lIns="0" tIns="0" rIns="0" bIns="0" rtlCol="0" anchor="ctr"/>
+          <a:lstStyle/>
+          <a:p>
+            <a:pPr marL="0" indent="0" algn="ctr">
               <a:buNone/>
             </a:pPr>
             <a:r>
@@ -7374,9 +7189,9 @@
                 <a:solidFill>
                   <a:srgbClr val="64748B"/>
                 </a:solidFill>
-                <a:latin typeface="Segoe UI" pitchFamily="34" charset="0"/>
-                <a:ea typeface="Segoe UI" pitchFamily="34" charset="-122"/>
-                <a:cs typeface="Segoe UI" pitchFamily="34" charset="-120"/>
+                <a:latin typeface="Segoe UI" panose="020B0502040204020203" pitchFamily="34" charset="0"/>
+                <a:ea typeface="Segoe UI" panose="020B0502040204020203" pitchFamily="34" charset="-122"/>
+                <a:cs typeface="Segoe UI" panose="020B0502040204020203" pitchFamily="34" charset="-120"/>
               </a:rPr>
               <a:t>schema check</a:t>
             </a:r>
@@ -7399,13 +7214,12 @@
             <a:avLst/>
           </a:prstGeom>
           <a:noFill/>
-          <a:ln/>
-        </p:spPr>
-        <p:txBody>
-          <a:bodyPr wrap="square" lIns="0" tIns="0" rIns="0" bIns="0" rtlCol="0" anchor="ctr"/>
-          <a:lstStyle/>
-          <a:p>
-            <a:pPr algn="ctr" indent="0" marL="0">
+        </p:spPr>
+        <p:txBody>
+          <a:bodyPr wrap="square" lIns="0" tIns="0" rIns="0" bIns="0" rtlCol="0" anchor="ctr"/>
+          <a:lstStyle/>
+          <a:p>
+            <a:pPr marL="0" indent="0" algn="ctr">
               <a:buNone/>
             </a:pPr>
             <a:r>
@@ -7413,9 +7227,9 @@
                 <a:solidFill>
                   <a:srgbClr val="0891B2"/>
                 </a:solidFill>
-                <a:latin typeface="Segoe UI Semibold" pitchFamily="34" charset="0"/>
-                <a:ea typeface="Segoe UI Semibold" pitchFamily="34" charset="-122"/>
-                <a:cs typeface="Segoe UI Semibold" pitchFamily="34" charset="-120"/>
+                <a:latin typeface="Segoe UI Semibold" panose="020B0702040204020203" pitchFamily="34" charset="0"/>
+                <a:ea typeface="Segoe UI Semibold" panose="020B0702040204020203" pitchFamily="34" charset="-122"/>
+                <a:cs typeface="Segoe UI Semibold" panose="020B0702040204020203" pitchFamily="34" charset="-120"/>
               </a:rPr>
               <a:t>›</a:t>
             </a:r>
@@ -7465,13 +7279,12 @@
             <a:avLst/>
           </a:prstGeom>
           <a:noFill/>
-          <a:ln/>
-        </p:spPr>
-        <p:txBody>
-          <a:bodyPr wrap="square" lIns="0" tIns="0" rIns="0" bIns="0" rtlCol="0" anchor="ctr"/>
-          <a:lstStyle/>
-          <a:p>
-            <a:pPr algn="ctr" indent="0" marL="0">
+        </p:spPr>
+        <p:txBody>
+          <a:bodyPr wrap="square" lIns="0" tIns="0" rIns="0" bIns="0" rtlCol="0" anchor="ctr"/>
+          <a:lstStyle/>
+          <a:p>
+            <a:pPr marL="0" indent="0" algn="ctr">
               <a:buNone/>
             </a:pPr>
             <a:r>
@@ -7479,9 +7292,9 @@
                 <a:solidFill>
                   <a:srgbClr val="0B1B33"/>
                 </a:solidFill>
-                <a:latin typeface="Segoe UI Semibold" pitchFamily="34" charset="0"/>
-                <a:ea typeface="Segoe UI Semibold" pitchFamily="34" charset="-122"/>
-                <a:cs typeface="Segoe UI Semibold" pitchFamily="34" charset="-120"/>
+                <a:latin typeface="Segoe UI Semibold" panose="020B0702040204020203" pitchFamily="34" charset="0"/>
+                <a:ea typeface="Segoe UI Semibold" panose="020B0702040204020203" pitchFamily="34" charset="-122"/>
+                <a:cs typeface="Segoe UI Semibold" panose="020B0702040204020203" pitchFamily="34" charset="-120"/>
               </a:rPr>
               <a:t>Channels</a:t>
             </a:r>
@@ -7504,13 +7317,12 @@
             <a:avLst/>
           </a:prstGeom>
           <a:noFill/>
-          <a:ln/>
-        </p:spPr>
-        <p:txBody>
-          <a:bodyPr wrap="square" lIns="0" tIns="0" rIns="0" bIns="0" rtlCol="0" anchor="ctr"/>
-          <a:lstStyle/>
-          <a:p>
-            <a:pPr algn="ctr" indent="0" marL="0">
+        </p:spPr>
+        <p:txBody>
+          <a:bodyPr wrap="square" lIns="0" tIns="0" rIns="0" bIns="0" rtlCol="0" anchor="ctr"/>
+          <a:lstStyle/>
+          <a:p>
+            <a:pPr marL="0" indent="0" algn="ctr">
               <a:buNone/>
             </a:pPr>
             <a:r>
@@ -7518,9 +7330,9 @@
                 <a:solidFill>
                   <a:srgbClr val="64748B"/>
                 </a:solidFill>
-                <a:latin typeface="Segoe UI" pitchFamily="34" charset="0"/>
-                <a:ea typeface="Segoe UI" pitchFamily="34" charset="-122"/>
-                <a:cs typeface="Segoe UI" pitchFamily="34" charset="-120"/>
+                <a:latin typeface="Segoe UI" panose="020B0502040204020203" pitchFamily="34" charset="0"/>
+                <a:ea typeface="Segoe UI" panose="020B0502040204020203" pitchFamily="34" charset="-122"/>
+                <a:cs typeface="Segoe UI" panose="020B0502040204020203" pitchFamily="34" charset="-120"/>
               </a:rPr>
               <a:t>email · push</a:t>
             </a:r>
@@ -7543,13 +7355,12 @@
             <a:avLst/>
           </a:prstGeom>
           <a:noFill/>
-          <a:ln/>
-        </p:spPr>
-        <p:txBody>
-          <a:bodyPr wrap="square" lIns="0" tIns="0" rIns="0" bIns="0" rtlCol="0" anchor="ctr"/>
-          <a:lstStyle/>
-          <a:p>
-            <a:pPr algn="ctr" indent="0" marL="0">
+        </p:spPr>
+        <p:txBody>
+          <a:bodyPr wrap="square" lIns="0" tIns="0" rIns="0" bIns="0" rtlCol="0" anchor="ctr"/>
+          <a:lstStyle/>
+          <a:p>
+            <a:pPr marL="0" indent="0" algn="ctr">
               <a:buNone/>
             </a:pPr>
             <a:r>
@@ -7557,9 +7368,9 @@
                 <a:solidFill>
                   <a:srgbClr val="0891B2"/>
                 </a:solidFill>
-                <a:latin typeface="Segoe UI Semibold" pitchFamily="34" charset="0"/>
-                <a:ea typeface="Segoe UI Semibold" pitchFamily="34" charset="-122"/>
-                <a:cs typeface="Segoe UI Semibold" pitchFamily="34" charset="-120"/>
+                <a:latin typeface="Segoe UI Semibold" panose="020B0702040204020203" pitchFamily="34" charset="0"/>
+                <a:ea typeface="Segoe UI Semibold" panose="020B0702040204020203" pitchFamily="34" charset="-122"/>
+                <a:cs typeface="Segoe UI Semibold" panose="020B0702040204020203" pitchFamily="34" charset="-120"/>
               </a:rPr>
               <a:t>›</a:t>
             </a:r>
@@ -7609,13 +7420,12 @@
             <a:avLst/>
           </a:prstGeom>
           <a:noFill/>
-          <a:ln/>
-        </p:spPr>
-        <p:txBody>
-          <a:bodyPr wrap="square" lIns="0" tIns="0" rIns="0" bIns="0" rtlCol="0" anchor="ctr"/>
-          <a:lstStyle/>
-          <a:p>
-            <a:pPr algn="ctr" indent="0" marL="0">
+        </p:spPr>
+        <p:txBody>
+          <a:bodyPr wrap="square" lIns="0" tIns="0" rIns="0" bIns="0" rtlCol="0" anchor="ctr"/>
+          <a:lstStyle/>
+          <a:p>
+            <a:pPr marL="0" indent="0" algn="ctr">
               <a:buNone/>
             </a:pPr>
             <a:r>
@@ -7623,9 +7433,9 @@
                 <a:solidFill>
                   <a:srgbClr val="0B1B33"/>
                 </a:solidFill>
-                <a:latin typeface="Segoe UI Semibold" pitchFamily="34" charset="0"/>
-                <a:ea typeface="Segoe UI Semibold" pitchFamily="34" charset="-122"/>
-                <a:cs typeface="Segoe UI Semibold" pitchFamily="34" charset="-120"/>
+                <a:latin typeface="Segoe UI Semibold" panose="020B0702040204020203" pitchFamily="34" charset="0"/>
+                <a:ea typeface="Segoe UI Semibold" panose="020B0702040204020203" pitchFamily="34" charset="-122"/>
+                <a:cs typeface="Segoe UI Semibold" panose="020B0702040204020203" pitchFamily="34" charset="-120"/>
               </a:rPr>
               <a:t>History</a:t>
             </a:r>
@@ -7648,13 +7458,12 @@
             <a:avLst/>
           </a:prstGeom>
           <a:noFill/>
-          <a:ln/>
-        </p:spPr>
-        <p:txBody>
-          <a:bodyPr wrap="square" lIns="0" tIns="0" rIns="0" bIns="0" rtlCol="0" anchor="ctr"/>
-          <a:lstStyle/>
-          <a:p>
-            <a:pPr algn="ctr" indent="0" marL="0">
+        </p:spPr>
+        <p:txBody>
+          <a:bodyPr wrap="square" lIns="0" tIns="0" rIns="0" bIns="0" rtlCol="0" anchor="ctr"/>
+          <a:lstStyle/>
+          <a:p>
+            <a:pPr marL="0" indent="0" algn="ctr">
               <a:buNone/>
             </a:pPr>
             <a:r>
@@ -7662,9 +7471,9 @@
                 <a:solidFill>
                   <a:srgbClr val="64748B"/>
                 </a:solidFill>
-                <a:latin typeface="Segoe UI" pitchFamily="34" charset="0"/>
-                <a:ea typeface="Segoe UI" pitchFamily="34" charset="-122"/>
-                <a:cs typeface="Segoe UI" pitchFamily="34" charset="-120"/>
+                <a:latin typeface="Segoe UI" panose="020B0502040204020203" pitchFamily="34" charset="0"/>
+                <a:ea typeface="Segoe UI" panose="020B0502040204020203" pitchFamily="34" charset="-122"/>
+                <a:cs typeface="Segoe UI" panose="020B0502040204020203" pitchFamily="34" charset="-120"/>
               </a:rPr>
               <a:t>stored</a:t>
             </a:r>
@@ -7710,13 +7519,12 @@
             <a:avLst/>
           </a:prstGeom>
           <a:noFill/>
-          <a:ln/>
-        </p:spPr>
-        <p:txBody>
-          <a:bodyPr wrap="square" lIns="0" tIns="0" rIns="0" bIns="0" rtlCol="0" anchor="ctr"/>
-          <a:lstStyle/>
-          <a:p>
-            <a:pPr indent="0" marL="0">
+        </p:spPr>
+        <p:txBody>
+          <a:bodyPr wrap="square" lIns="0" tIns="0" rIns="0" bIns="0" rtlCol="0" anchor="ctr"/>
+          <a:lstStyle/>
+          <a:p>
+            <a:pPr marL="0" indent="0">
               <a:buNone/>
             </a:pPr>
             <a:r>
@@ -7724,9 +7532,9 @@
                 <a:solidFill>
                   <a:srgbClr val="0891B2"/>
                 </a:solidFill>
-                <a:latin typeface="Segoe UI Semibold" pitchFamily="34" charset="0"/>
-                <a:ea typeface="Segoe UI Semibold" pitchFamily="34" charset="-122"/>
-                <a:cs typeface="Segoe UI Semibold" pitchFamily="34" charset="-120"/>
+                <a:latin typeface="Segoe UI Semibold" panose="020B0702040204020203" pitchFamily="34" charset="0"/>
+                <a:ea typeface="Segoe UI Semibold" panose="020B0702040204020203" pitchFamily="34" charset="-122"/>
+                <a:cs typeface="Segoe UI Semibold" panose="020B0702040204020203" pitchFamily="34" charset="-120"/>
               </a:rPr>
               <a:t>Instant</a:t>
             </a:r>
@@ -7749,13 +7557,12 @@
             <a:avLst/>
           </a:prstGeom>
           <a:noFill/>
-          <a:ln/>
         </p:spPr>
         <p:txBody>
           <a:bodyPr wrap="square" lIns="0" tIns="0" rIns="0" bIns="0" rtlCol="0" anchor="t"/>
           <a:lstStyle/>
           <a:p>
-            <a:pPr indent="0" marL="0">
+            <a:pPr marL="0" indent="0">
               <a:buNone/>
             </a:pPr>
             <a:r>
@@ -7763,9 +7570,9 @@
                 <a:solidFill>
                   <a:srgbClr val="64748B"/>
                 </a:solidFill>
-                <a:latin typeface="Segoe UI" pitchFamily="34" charset="0"/>
-                <a:ea typeface="Segoe UI" pitchFamily="34" charset="-122"/>
-                <a:cs typeface="Segoe UI" pitchFamily="34" charset="-120"/>
+                <a:latin typeface="Segoe UI" panose="020B0502040204020203" pitchFamily="34" charset="0"/>
+                <a:ea typeface="Segoe UI" panose="020B0502040204020203" pitchFamily="34" charset="-122"/>
+                <a:cs typeface="Segoe UI" panose="020B0502040204020203" pitchFamily="34" charset="-120"/>
               </a:rPr>
               <a:t>in-app push</a:t>
             </a:r>
@@ -7811,13 +7618,12 @@
             <a:avLst/>
           </a:prstGeom>
           <a:noFill/>
-          <a:ln/>
-        </p:spPr>
-        <p:txBody>
-          <a:bodyPr wrap="square" lIns="0" tIns="0" rIns="0" bIns="0" rtlCol="0" anchor="ctr"/>
-          <a:lstStyle/>
-          <a:p>
-            <a:pPr indent="0" marL="0">
+        </p:spPr>
+        <p:txBody>
+          <a:bodyPr wrap="square" lIns="0" tIns="0" rIns="0" bIns="0" rtlCol="0" anchor="ctr"/>
+          <a:lstStyle/>
+          <a:p>
+            <a:pPr marL="0" indent="0">
               <a:buNone/>
             </a:pPr>
             <a:r>
@@ -7825,9 +7631,9 @@
                 <a:solidFill>
                   <a:srgbClr val="0891B2"/>
                 </a:solidFill>
-                <a:latin typeface="Segoe UI Semibold" pitchFamily="34" charset="0"/>
-                <a:ea typeface="Segoe UI Semibold" pitchFamily="34" charset="-122"/>
-                <a:cs typeface="Segoe UI Semibold" pitchFamily="34" charset="-120"/>
+                <a:latin typeface="Segoe UI Semibold" panose="020B0702040204020203" pitchFamily="34" charset="0"/>
+                <a:ea typeface="Segoe UI Semibold" panose="020B0702040204020203" pitchFamily="34" charset="-122"/>
+                <a:cs typeface="Segoe UI Semibold" panose="020B0702040204020203" pitchFamily="34" charset="-120"/>
               </a:rPr>
               <a:t>3</a:t>
             </a:r>
@@ -7850,13 +7656,12 @@
             <a:avLst/>
           </a:prstGeom>
           <a:noFill/>
-          <a:ln/>
         </p:spPr>
         <p:txBody>
           <a:bodyPr wrap="square" lIns="0" tIns="0" rIns="0" bIns="0" rtlCol="0" anchor="t"/>
           <a:lstStyle/>
           <a:p>
-            <a:pPr indent="0" marL="0">
+            <a:pPr marL="0" indent="0">
               <a:buNone/>
             </a:pPr>
             <a:r>
@@ -7864,9 +7669,9 @@
                 <a:solidFill>
                   <a:srgbClr val="64748B"/>
                 </a:solidFill>
-                <a:latin typeface="Segoe UI" pitchFamily="34" charset="0"/>
-                <a:ea typeface="Segoe UI" pitchFamily="34" charset="-122"/>
-                <a:cs typeface="Segoe UI" pitchFamily="34" charset="-120"/>
+                <a:latin typeface="Segoe UI" panose="020B0502040204020203" pitchFamily="34" charset="0"/>
+                <a:ea typeface="Segoe UI" panose="020B0502040204020203" pitchFamily="34" charset="-122"/>
+                <a:cs typeface="Segoe UI" panose="020B0502040204020203" pitchFamily="34" charset="-120"/>
               </a:rPr>
               <a:t>automatic retries</a:t>
             </a:r>
@@ -7912,13 +7717,12 @@
             <a:avLst/>
           </a:prstGeom>
           <a:noFill/>
-          <a:ln/>
-        </p:spPr>
-        <p:txBody>
-          <a:bodyPr wrap="square" lIns="0" tIns="0" rIns="0" bIns="0" rtlCol="0" anchor="ctr"/>
-          <a:lstStyle/>
-          <a:p>
-            <a:pPr indent="0" marL="0">
+        </p:spPr>
+        <p:txBody>
+          <a:bodyPr wrap="square" lIns="0" tIns="0" rIns="0" bIns="0" rtlCol="0" anchor="ctr"/>
+          <a:lstStyle/>
+          <a:p>
+            <a:pPr marL="0" indent="0">
               <a:buNone/>
             </a:pPr>
             <a:r>
@@ -7926,9 +7730,9 @@
                 <a:solidFill>
                   <a:srgbClr val="0891B2"/>
                 </a:solidFill>
-                <a:latin typeface="Segoe UI Semibold" pitchFamily="34" charset="0"/>
-                <a:ea typeface="Segoe UI Semibold" pitchFamily="34" charset="-122"/>
-                <a:cs typeface="Segoe UI Semibold" pitchFamily="34" charset="-120"/>
+                <a:latin typeface="Segoe UI Semibold" panose="020B0702040204020203" pitchFamily="34" charset="0"/>
+                <a:ea typeface="Segoe UI Semibold" panose="020B0702040204020203" pitchFamily="34" charset="-122"/>
+                <a:cs typeface="Segoe UI Semibold" panose="020B0702040204020203" pitchFamily="34" charset="-120"/>
               </a:rPr>
               <a:t>100%</a:t>
             </a:r>
@@ -7951,13 +7755,12 @@
             <a:avLst/>
           </a:prstGeom>
           <a:noFill/>
-          <a:ln/>
         </p:spPr>
         <p:txBody>
           <a:bodyPr wrap="square" lIns="0" tIns="0" rIns="0" bIns="0" rtlCol="0" anchor="t"/>
           <a:lstStyle/>
           <a:p>
-            <a:pPr indent="0" marL="0">
+            <a:pPr marL="0" indent="0">
               <a:buNone/>
             </a:pPr>
             <a:r>
@@ -7965,9 +7768,9 @@
                 <a:solidFill>
                   <a:srgbClr val="64748B"/>
                 </a:solidFill>
-                <a:latin typeface="Segoe UI" pitchFamily="34" charset="0"/>
-                <a:ea typeface="Segoe UI" pitchFamily="34" charset="-122"/>
-                <a:cs typeface="Segoe UI" pitchFamily="34" charset="-120"/>
+                <a:latin typeface="Segoe UI" panose="020B0502040204020203" pitchFamily="34" charset="0"/>
+                <a:ea typeface="Segoe UI" panose="020B0502040204020203" pitchFamily="34" charset="-122"/>
+                <a:cs typeface="Segoe UI" panose="020B0502040204020203" pitchFamily="34" charset="-120"/>
               </a:rPr>
               <a:t>deliveries recorded</a:t>
             </a:r>
@@ -8017,13 +7820,12 @@
             <a:avLst/>
           </a:prstGeom>
           <a:noFill/>
-          <a:ln/>
-        </p:spPr>
-        <p:txBody>
-          <a:bodyPr wrap="square" lIns="0" tIns="0" rIns="0" bIns="0" rtlCol="0" anchor="ctr"/>
-          <a:lstStyle/>
-          <a:p>
-            <a:pPr indent="0" marL="0">
+        </p:spPr>
+        <p:txBody>
+          <a:bodyPr wrap="square" lIns="0" tIns="0" rIns="0" bIns="0" rtlCol="0" anchor="ctr"/>
+          <a:lstStyle/>
+          <a:p>
+            <a:pPr marL="0" indent="0">
               <a:buNone/>
             </a:pPr>
             <a:r>
@@ -8031,23 +7833,20 @@
                 <a:solidFill>
                   <a:srgbClr val="0891B2"/>
                 </a:solidFill>
-                <a:latin typeface="Segoe UI" pitchFamily="34" charset="0"/>
-                <a:ea typeface="Segoe UI" pitchFamily="34" charset="-122"/>
-                <a:cs typeface="Segoe UI" pitchFamily="34" charset="-120"/>
+                <a:latin typeface="Segoe UI" panose="020B0502040204020203" pitchFamily="34" charset="0"/>
+                <a:ea typeface="Segoe UI" panose="020B0502040204020203" pitchFamily="34" charset="-122"/>
+                <a:cs typeface="Segoe UI" panose="020B0502040204020203" pitchFamily="34" charset="-120"/>
               </a:rPr>
               <a:t>LIVE  </a:t>
             </a:r>
-            <a:pPr indent="0" marL="0">
-              <a:buNone/>
-            </a:pPr>
             <a:r>
               <a:rPr lang="en-US" sz="1100" dirty="0">
                 <a:solidFill>
                   <a:srgbClr val="0B1B33"/>
                 </a:solidFill>
-                <a:latin typeface="Segoe UI" pitchFamily="34" charset="0"/>
-                <a:ea typeface="Segoe UI" pitchFamily="34" charset="-122"/>
-                <a:cs typeface="Segoe UI" pitchFamily="34" charset="-120"/>
+                <a:latin typeface="Segoe UI" panose="020B0502040204020203" pitchFamily="34" charset="0"/>
+                <a:ea typeface="Segoe UI" panose="020B0502040204020203" pitchFamily="34" charset="-122"/>
+                <a:cs typeface="Segoe UI" panose="020B0502040204020203" pitchFamily="34" charset="-120"/>
               </a:rPr>
               <a:t>Notifications page</a:t>
             </a:r>
@@ -8065,12 +7864,13 @@
 
 <file path=ppt/slides/slide7.xml><?xml version="1.0" encoding="utf-8"?>
 <p:sld xmlns:a="http://schemas.openxmlformats.org/drawingml/2006/main" xmlns:r="http://schemas.openxmlformats.org/officeDocument/2006/relationships" xmlns:p="http://schemas.openxmlformats.org/presentationml/2006/main">
-  <p:cSld name="Slide 7">
+  <p:cSld>
     <p:bg>
       <p:bgPr>
         <a:solidFill>
           <a:srgbClr val="F6F8FB"/>
         </a:solidFill>
+        <a:effectLst/>
       </p:bgPr>
     </p:bg>
     <p:spTree>
@@ -8127,25 +7927,24 @@
             <a:avLst/>
           </a:prstGeom>
           <a:noFill/>
-          <a:ln/>
-        </p:spPr>
-        <p:txBody>
-          <a:bodyPr wrap="square" lIns="0" tIns="0" rIns="0" bIns="0" rtlCol="0" anchor="ctr"/>
-          <a:lstStyle/>
-          <a:p>
-            <a:pPr indent="0" marL="0">
-              <a:buNone/>
-            </a:pPr>
-            <a:r>
-              <a:rPr lang="en-US" sz="1050" spc="400" kern="0" dirty="0">
+        </p:spPr>
+        <p:txBody>
+          <a:bodyPr wrap="square" lIns="0" tIns="0" rIns="0" bIns="0" rtlCol="0" anchor="ctr"/>
+          <a:lstStyle/>
+          <a:p>
+            <a:pPr marL="0" indent="0">
+              <a:buNone/>
+            </a:pPr>
+            <a:r>
+              <a:rPr lang="en-US" sz="1050" kern="0" spc="400" dirty="0">
                 <a:solidFill>
                   <a:srgbClr val="0891B2"/>
                 </a:solidFill>
-                <a:latin typeface="Segoe UI Semibold" pitchFamily="34" charset="0"/>
-                <a:ea typeface="Segoe UI Semibold" pitchFamily="34" charset="-122"/>
-                <a:cs typeface="Segoe UI Semibold" pitchFamily="34" charset="-120"/>
-              </a:rPr>
-              <a:t>07 · SACHINTHANA · ANALYTICS SERVICE</a:t>
+                <a:latin typeface="Segoe UI Semibold" panose="020B0702040204020203" pitchFamily="34" charset="0"/>
+                <a:ea typeface="Segoe UI Semibold" panose="020B0702040204020203" pitchFamily="34" charset="-122"/>
+                <a:cs typeface="Segoe UI Semibold" panose="020B0702040204020203" pitchFamily="34" charset="-120"/>
+              </a:rPr>
+              <a:t>07 · ANALYTICS SERVICE</a:t>
             </a:r>
             <a:endParaRPr lang="en-US" sz="1050" dirty="0"/>
           </a:p>
@@ -8166,13 +7965,12 @@
             <a:avLst/>
           </a:prstGeom>
           <a:noFill/>
-          <a:ln/>
-        </p:spPr>
-        <p:txBody>
-          <a:bodyPr wrap="square" lIns="0" tIns="0" rIns="0" bIns="0" rtlCol="0" anchor="ctr"/>
-          <a:lstStyle/>
-          <a:p>
-            <a:pPr indent="0" marL="0">
+        </p:spPr>
+        <p:txBody>
+          <a:bodyPr wrap="square" lIns="0" tIns="0" rIns="0" bIns="0" rtlCol="0" anchor="ctr"/>
+          <a:lstStyle/>
+          <a:p>
+            <a:pPr marL="0" indent="0">
               <a:buNone/>
             </a:pPr>
             <a:r>
@@ -8180,9 +7978,9 @@
                 <a:solidFill>
                   <a:srgbClr val="0B1B33"/>
                 </a:solidFill>
-                <a:latin typeface="Segoe UI Semibold" pitchFamily="34" charset="0"/>
-                <a:ea typeface="Segoe UI Semibold" pitchFamily="34" charset="-122"/>
-                <a:cs typeface="Segoe UI Semibold" pitchFamily="34" charset="-120"/>
+                <a:latin typeface="Segoe UI Semibold" panose="020B0702040204020203" pitchFamily="34" charset="0"/>
+                <a:ea typeface="Segoe UI Semibold" panose="020B0702040204020203" pitchFamily="34" charset="-122"/>
+                <a:cs typeface="Segoe UI Semibold" panose="020B0702040204020203" pitchFamily="34" charset="-120"/>
               </a:rPr>
               <a:t>Trustworthy energy figures and reports</a:t>
             </a:r>
@@ -8228,13 +8026,12 @@
             <a:avLst/>
           </a:prstGeom>
           <a:noFill/>
-          <a:ln/>
-        </p:spPr>
-        <p:txBody>
-          <a:bodyPr wrap="square" lIns="0" tIns="0" rIns="0" bIns="0" rtlCol="0" anchor="ctr"/>
-          <a:lstStyle/>
-          <a:p>
-            <a:pPr indent="0" marL="0">
+        </p:spPr>
+        <p:txBody>
+          <a:bodyPr wrap="square" lIns="0" tIns="0" rIns="0" bIns="0" rtlCol="0" anchor="ctr"/>
+          <a:lstStyle/>
+          <a:p>
+            <a:pPr marL="0" indent="0">
               <a:buNone/>
             </a:pPr>
             <a:r>
@@ -8242,9 +8039,9 @@
                 <a:solidFill>
                   <a:srgbClr val="64748B"/>
                 </a:solidFill>
-                <a:latin typeface="Segoe UI" pitchFamily="34" charset="0"/>
-                <a:ea typeface="Segoe UI" pitchFamily="34" charset="-122"/>
-                <a:cs typeface="Segoe UI" pitchFamily="34" charset="-120"/>
+                <a:latin typeface="Segoe UI" panose="020B0502040204020203" pitchFamily="34" charset="0"/>
+                <a:ea typeface="Segoe UI" panose="020B0502040204020203" pitchFamily="34" charset="-122"/>
+                <a:cs typeface="Segoe UI" panose="020B0502040204020203" pitchFamily="34" charset="-120"/>
               </a:rPr>
               <a:t>EC8208 Software Architecture  ·  University of Ruhuna</a:t>
             </a:r>
@@ -8267,13 +8064,12 @@
             <a:avLst/>
           </a:prstGeom>
           <a:noFill/>
-          <a:ln/>
-        </p:spPr>
-        <p:txBody>
-          <a:bodyPr wrap="square" lIns="0" tIns="0" rIns="0" bIns="0" rtlCol="0" anchor="ctr"/>
-          <a:lstStyle/>
-          <a:p>
-            <a:pPr algn="r" indent="0" marL="0">
+        </p:spPr>
+        <p:txBody>
+          <a:bodyPr wrap="square" lIns="0" tIns="0" rIns="0" bIns="0" rtlCol="0" anchor="ctr"/>
+          <a:lstStyle/>
+          <a:p>
+            <a:pPr marL="0" indent="0" algn="r">
               <a:buNone/>
             </a:pPr>
             <a:r>
@@ -8281,9 +8077,9 @@
                 <a:solidFill>
                   <a:srgbClr val="64748B"/>
                 </a:solidFill>
-                <a:latin typeface="Segoe UI" pitchFamily="34" charset="0"/>
-                <a:ea typeface="Segoe UI" pitchFamily="34" charset="-122"/>
-                <a:cs typeface="Segoe UI" pitchFamily="34" charset="-120"/>
+                <a:latin typeface="Segoe UI" panose="020B0502040204020203" pitchFamily="34" charset="0"/>
+                <a:ea typeface="Segoe UI" panose="020B0502040204020203" pitchFamily="34" charset="-122"/>
+                <a:cs typeface="Segoe UI" panose="020B0502040204020203" pitchFamily="34" charset="-120"/>
               </a:rPr>
               <a:t>07  ·  3:27–4:16</a:t>
             </a:r>
@@ -8333,13 +8129,12 @@
             <a:avLst/>
           </a:prstGeom>
           <a:noFill/>
-          <a:ln/>
-        </p:spPr>
-        <p:txBody>
-          <a:bodyPr wrap="square" lIns="0" tIns="0" rIns="0" bIns="0" rtlCol="0" anchor="ctr"/>
-          <a:lstStyle/>
-          <a:p>
-            <a:pPr algn="ctr" indent="0" marL="0">
+        </p:spPr>
+        <p:txBody>
+          <a:bodyPr wrap="square" lIns="0" tIns="0" rIns="0" bIns="0" rtlCol="0" anchor="ctr"/>
+          <a:lstStyle/>
+          <a:p>
+            <a:pPr marL="0" indent="0" algn="ctr">
               <a:buNone/>
             </a:pPr>
             <a:r>
@@ -8347,9 +8142,9 @@
                 <a:solidFill>
                   <a:srgbClr val="FFFFFF"/>
                 </a:solidFill>
-                <a:latin typeface="Segoe UI Semibold" pitchFamily="34" charset="0"/>
-                <a:ea typeface="Segoe UI Semibold" pitchFamily="34" charset="-122"/>
-                <a:cs typeface="Segoe UI Semibold" pitchFamily="34" charset="-120"/>
+                <a:latin typeface="Segoe UI Semibold" panose="020B0702040204020203" pitchFamily="34" charset="0"/>
+                <a:ea typeface="Segoe UI Semibold" panose="020B0702040204020203" pitchFamily="34" charset="-122"/>
+                <a:cs typeface="Segoe UI Semibold" panose="020B0702040204020203" pitchFamily="34" charset="-120"/>
               </a:rPr>
               <a:t>Source APIs</a:t>
             </a:r>
@@ -8372,13 +8167,12 @@
             <a:avLst/>
           </a:prstGeom>
           <a:noFill/>
-          <a:ln/>
-        </p:spPr>
-        <p:txBody>
-          <a:bodyPr wrap="square" lIns="0" tIns="0" rIns="0" bIns="0" rtlCol="0" anchor="ctr"/>
-          <a:lstStyle/>
-          <a:p>
-            <a:pPr algn="ctr" indent="0" marL="0">
+        </p:spPr>
+        <p:txBody>
+          <a:bodyPr wrap="square" lIns="0" tIns="0" rIns="0" bIns="0" rtlCol="0" anchor="ctr"/>
+          <a:lstStyle/>
+          <a:p>
+            <a:pPr marL="0" indent="0" algn="ctr">
               <a:buNone/>
             </a:pPr>
             <a:r>
@@ -8386,9 +8180,9 @@
                 <a:solidFill>
                   <a:srgbClr val="E6F4F8"/>
                 </a:solidFill>
-                <a:latin typeface="Segoe UI" pitchFamily="34" charset="0"/>
-                <a:ea typeface="Segoe UI" pitchFamily="34" charset="-122"/>
-                <a:cs typeface="Segoe UI" pitchFamily="34" charset="-120"/>
+                <a:latin typeface="Segoe UI" panose="020B0502040204020203" pitchFamily="34" charset="0"/>
+                <a:ea typeface="Segoe UI" panose="020B0502040204020203" pitchFamily="34" charset="-122"/>
+                <a:cs typeface="Segoe UI" panose="020B0502040204020203" pitchFamily="34" charset="-120"/>
               </a:rPr>
               <a:t>REST only</a:t>
             </a:r>
@@ -8411,13 +8205,12 @@
             <a:avLst/>
           </a:prstGeom>
           <a:noFill/>
-          <a:ln/>
-        </p:spPr>
-        <p:txBody>
-          <a:bodyPr wrap="square" lIns="0" tIns="0" rIns="0" bIns="0" rtlCol="0" anchor="ctr"/>
-          <a:lstStyle/>
-          <a:p>
-            <a:pPr algn="ctr" indent="0" marL="0">
+        </p:spPr>
+        <p:txBody>
+          <a:bodyPr wrap="square" lIns="0" tIns="0" rIns="0" bIns="0" rtlCol="0" anchor="ctr"/>
+          <a:lstStyle/>
+          <a:p>
+            <a:pPr marL="0" indent="0" algn="ctr">
               <a:buNone/>
             </a:pPr>
             <a:r>
@@ -8425,9 +8218,9 @@
                 <a:solidFill>
                   <a:srgbClr val="0891B2"/>
                 </a:solidFill>
-                <a:latin typeface="Segoe UI Semibold" pitchFamily="34" charset="0"/>
-                <a:ea typeface="Segoe UI Semibold" pitchFamily="34" charset="-122"/>
-                <a:cs typeface="Segoe UI Semibold" pitchFamily="34" charset="-120"/>
+                <a:latin typeface="Segoe UI Semibold" panose="020B0702040204020203" pitchFamily="34" charset="0"/>
+                <a:ea typeface="Segoe UI Semibold" panose="020B0702040204020203" pitchFamily="34" charset="-122"/>
+                <a:cs typeface="Segoe UI Semibold" panose="020B0702040204020203" pitchFamily="34" charset="-120"/>
               </a:rPr>
               <a:t>›</a:t>
             </a:r>
@@ -8477,13 +8270,12 @@
             <a:avLst/>
           </a:prstGeom>
           <a:noFill/>
-          <a:ln/>
-        </p:spPr>
-        <p:txBody>
-          <a:bodyPr wrap="square" lIns="0" tIns="0" rIns="0" bIns="0" rtlCol="0" anchor="ctr"/>
-          <a:lstStyle/>
-          <a:p>
-            <a:pPr algn="ctr" indent="0" marL="0">
+        </p:spPr>
+        <p:txBody>
+          <a:bodyPr wrap="square" lIns="0" tIns="0" rIns="0" bIns="0" rtlCol="0" anchor="ctr"/>
+          <a:lstStyle/>
+          <a:p>
+            <a:pPr marL="0" indent="0" algn="ctr">
               <a:buNone/>
             </a:pPr>
             <a:r>
@@ -8491,9 +8283,9 @@
                 <a:solidFill>
                   <a:srgbClr val="0B1B33"/>
                 </a:solidFill>
-                <a:latin typeface="Segoe UI Semibold" pitchFamily="34" charset="0"/>
-                <a:ea typeface="Segoe UI Semibold" pitchFamily="34" charset="-122"/>
-                <a:cs typeface="Segoe UI Semibold" pitchFamily="34" charset="-120"/>
+                <a:latin typeface="Segoe UI Semibold" panose="020B0702040204020203" pitchFamily="34" charset="0"/>
+                <a:ea typeface="Segoe UI Semibold" panose="020B0702040204020203" pitchFamily="34" charset="-122"/>
+                <a:cs typeface="Segoe UI Semibold" panose="020B0702040204020203" pitchFamily="34" charset="-120"/>
               </a:rPr>
               <a:t>Calculation</a:t>
             </a:r>
@@ -8516,13 +8308,12 @@
             <a:avLst/>
           </a:prstGeom>
           <a:noFill/>
-          <a:ln/>
-        </p:spPr>
-        <p:txBody>
-          <a:bodyPr wrap="square" lIns="0" tIns="0" rIns="0" bIns="0" rtlCol="0" anchor="ctr"/>
-          <a:lstStyle/>
-          <a:p>
-            <a:pPr algn="ctr" indent="0" marL="0">
+        </p:spPr>
+        <p:txBody>
+          <a:bodyPr wrap="square" lIns="0" tIns="0" rIns="0" bIns="0" rtlCol="0" anchor="ctr"/>
+          <a:lstStyle/>
+          <a:p>
+            <a:pPr marL="0" indent="0" algn="ctr">
               <a:buNone/>
             </a:pPr>
             <a:r>
@@ -8530,9 +8321,9 @@
                 <a:solidFill>
                   <a:srgbClr val="64748B"/>
                 </a:solidFill>
-                <a:latin typeface="Segoe UI" pitchFamily="34" charset="0"/>
-                <a:ea typeface="Segoe UI" pitchFamily="34" charset="-122"/>
-                <a:cs typeface="Segoe UI" pitchFamily="34" charset="-120"/>
+                <a:latin typeface="Segoe UI" panose="020B0502040204020203" pitchFamily="34" charset="0"/>
+                <a:ea typeface="Segoe UI" panose="020B0502040204020203" pitchFamily="34" charset="-122"/>
+                <a:cs typeface="Segoe UI" panose="020B0502040204020203" pitchFamily="34" charset="-120"/>
               </a:rPr>
               <a:t>power to kWh</a:t>
             </a:r>
@@ -8555,13 +8346,12 @@
             <a:avLst/>
           </a:prstGeom>
           <a:noFill/>
-          <a:ln/>
-        </p:spPr>
-        <p:txBody>
-          <a:bodyPr wrap="square" lIns="0" tIns="0" rIns="0" bIns="0" rtlCol="0" anchor="ctr"/>
-          <a:lstStyle/>
-          <a:p>
-            <a:pPr algn="ctr" indent="0" marL="0">
+        </p:spPr>
+        <p:txBody>
+          <a:bodyPr wrap="square" lIns="0" tIns="0" rIns="0" bIns="0" rtlCol="0" anchor="ctr"/>
+          <a:lstStyle/>
+          <a:p>
+            <a:pPr marL="0" indent="0" algn="ctr">
               <a:buNone/>
             </a:pPr>
             <a:r>
@@ -8569,9 +8359,9 @@
                 <a:solidFill>
                   <a:srgbClr val="0891B2"/>
                 </a:solidFill>
-                <a:latin typeface="Segoe UI Semibold" pitchFamily="34" charset="0"/>
-                <a:ea typeface="Segoe UI Semibold" pitchFamily="34" charset="-122"/>
-                <a:cs typeface="Segoe UI Semibold" pitchFamily="34" charset="-120"/>
+                <a:latin typeface="Segoe UI Semibold" panose="020B0702040204020203" pitchFamily="34" charset="0"/>
+                <a:ea typeface="Segoe UI Semibold" panose="020B0702040204020203" pitchFamily="34" charset="-122"/>
+                <a:cs typeface="Segoe UI Semibold" panose="020B0702040204020203" pitchFamily="34" charset="-120"/>
               </a:rPr>
               <a:t>›</a:t>
             </a:r>
@@ -8621,13 +8411,12 @@
             <a:avLst/>
           </a:prstGeom>
           <a:noFill/>
-          <a:ln/>
-        </p:spPr>
-        <p:txBody>
-          <a:bodyPr wrap="square" lIns="0" tIns="0" rIns="0" bIns="0" rtlCol="0" anchor="ctr"/>
-          <a:lstStyle/>
-          <a:p>
-            <a:pPr algn="ctr" indent="0" marL="0">
+        </p:spPr>
+        <p:txBody>
+          <a:bodyPr wrap="square" lIns="0" tIns="0" rIns="0" bIns="0" rtlCol="0" anchor="ctr"/>
+          <a:lstStyle/>
+          <a:p>
+            <a:pPr marL="0" indent="0" algn="ctr">
               <a:buNone/>
             </a:pPr>
             <a:r>
@@ -8635,9 +8424,9 @@
                 <a:solidFill>
                   <a:srgbClr val="0B1B33"/>
                 </a:solidFill>
-                <a:latin typeface="Segoe UI Semibold" pitchFamily="34" charset="0"/>
-                <a:ea typeface="Segoe UI Semibold" pitchFamily="34" charset="-122"/>
-                <a:cs typeface="Segoe UI Semibold" pitchFamily="34" charset="-120"/>
+                <a:latin typeface="Segoe UI Semibold" panose="020B0702040204020203" pitchFamily="34" charset="0"/>
+                <a:ea typeface="Segoe UI Semibold" panose="020B0702040204020203" pitchFamily="34" charset="-122"/>
+                <a:cs typeface="Segoe UI Semibold" panose="020B0702040204020203" pitchFamily="34" charset="-120"/>
               </a:rPr>
               <a:t>Reports</a:t>
             </a:r>
@@ -8660,13 +8449,12 @@
             <a:avLst/>
           </a:prstGeom>
           <a:noFill/>
-          <a:ln/>
-        </p:spPr>
-        <p:txBody>
-          <a:bodyPr wrap="square" lIns="0" tIns="0" rIns="0" bIns="0" rtlCol="0" anchor="ctr"/>
-          <a:lstStyle/>
-          <a:p>
-            <a:pPr algn="ctr" indent="0" marL="0">
+        </p:spPr>
+        <p:txBody>
+          <a:bodyPr wrap="square" lIns="0" tIns="0" rIns="0" bIns="0" rtlCol="0" anchor="ctr"/>
+          <a:lstStyle/>
+          <a:p>
+            <a:pPr marL="0" indent="0" algn="ctr">
               <a:buNone/>
             </a:pPr>
             <a:r>
@@ -8674,9 +8462,9 @@
                 <a:solidFill>
                   <a:srgbClr val="64748B"/>
                 </a:solidFill>
-                <a:latin typeface="Segoe UI" pitchFamily="34" charset="0"/>
-                <a:ea typeface="Segoe UI" pitchFamily="34" charset="-122"/>
-                <a:cs typeface="Segoe UI" pitchFamily="34" charset="-120"/>
+                <a:latin typeface="Segoe UI" panose="020B0502040204020203" pitchFamily="34" charset="0"/>
+                <a:ea typeface="Segoe UI" panose="020B0502040204020203" pitchFamily="34" charset="-122"/>
+                <a:cs typeface="Segoe UI" panose="020B0502040204020203" pitchFamily="34" charset="-120"/>
               </a:rPr>
               <a:t>stored</a:t>
             </a:r>
@@ -8699,13 +8487,12 @@
             <a:avLst/>
           </a:prstGeom>
           <a:noFill/>
-          <a:ln/>
-        </p:spPr>
-        <p:txBody>
-          <a:bodyPr wrap="square" lIns="0" tIns="0" rIns="0" bIns="0" rtlCol="0" anchor="ctr"/>
-          <a:lstStyle/>
-          <a:p>
-            <a:pPr algn="ctr" indent="0" marL="0">
+        </p:spPr>
+        <p:txBody>
+          <a:bodyPr wrap="square" lIns="0" tIns="0" rIns="0" bIns="0" rtlCol="0" anchor="ctr"/>
+          <a:lstStyle/>
+          <a:p>
+            <a:pPr marL="0" indent="0" algn="ctr">
               <a:buNone/>
             </a:pPr>
             <a:r>
@@ -8713,9 +8500,9 @@
                 <a:solidFill>
                   <a:srgbClr val="0891B2"/>
                 </a:solidFill>
-                <a:latin typeface="Segoe UI Semibold" pitchFamily="34" charset="0"/>
-                <a:ea typeface="Segoe UI Semibold" pitchFamily="34" charset="-122"/>
-                <a:cs typeface="Segoe UI Semibold" pitchFamily="34" charset="-120"/>
+                <a:latin typeface="Segoe UI Semibold" panose="020B0702040204020203" pitchFamily="34" charset="0"/>
+                <a:ea typeface="Segoe UI Semibold" panose="020B0702040204020203" pitchFamily="34" charset="-122"/>
+                <a:cs typeface="Segoe UI Semibold" panose="020B0702040204020203" pitchFamily="34" charset="-120"/>
               </a:rPr>
               <a:t>›</a:t>
             </a:r>
@@ -8765,13 +8552,12 @@
             <a:avLst/>
           </a:prstGeom>
           <a:noFill/>
-          <a:ln/>
-        </p:spPr>
-        <p:txBody>
-          <a:bodyPr wrap="square" lIns="0" tIns="0" rIns="0" bIns="0" rtlCol="0" anchor="ctr"/>
-          <a:lstStyle/>
-          <a:p>
-            <a:pPr algn="ctr" indent="0" marL="0">
+        </p:spPr>
+        <p:txBody>
+          <a:bodyPr wrap="square" lIns="0" tIns="0" rIns="0" bIns="0" rtlCol="0" anchor="ctr"/>
+          <a:lstStyle/>
+          <a:p>
+            <a:pPr marL="0" indent="0" algn="ctr">
               <a:buNone/>
             </a:pPr>
             <a:r>
@@ -8779,9 +8565,9 @@
                 <a:solidFill>
                   <a:srgbClr val="0B1B33"/>
                 </a:solidFill>
-                <a:latin typeface="Segoe UI Semibold" pitchFamily="34" charset="0"/>
-                <a:ea typeface="Segoe UI Semibold" pitchFamily="34" charset="-122"/>
-                <a:cs typeface="Segoe UI Semibold" pitchFamily="34" charset="-120"/>
+                <a:latin typeface="Segoe UI Semibold" panose="020B0702040204020203" pitchFamily="34" charset="0"/>
+                <a:ea typeface="Segoe UI Semibold" panose="020B0702040204020203" pitchFamily="34" charset="-122"/>
+                <a:cs typeface="Segoe UI Semibold" panose="020B0702040204020203" pitchFamily="34" charset="-120"/>
               </a:rPr>
               <a:t>CSV</a:t>
             </a:r>
@@ -8804,13 +8590,12 @@
             <a:avLst/>
           </a:prstGeom>
           <a:noFill/>
-          <a:ln/>
-        </p:spPr>
-        <p:txBody>
-          <a:bodyPr wrap="square" lIns="0" tIns="0" rIns="0" bIns="0" rtlCol="0" anchor="ctr"/>
-          <a:lstStyle/>
-          <a:p>
-            <a:pPr algn="ctr" indent="0" marL="0">
+        </p:spPr>
+        <p:txBody>
+          <a:bodyPr wrap="square" lIns="0" tIns="0" rIns="0" bIns="0" rtlCol="0" anchor="ctr"/>
+          <a:lstStyle/>
+          <a:p>
+            <a:pPr marL="0" indent="0" algn="ctr">
               <a:buNone/>
             </a:pPr>
             <a:r>
@@ -8818,9 +8603,9 @@
                 <a:solidFill>
                   <a:srgbClr val="64748B"/>
                 </a:solidFill>
-                <a:latin typeface="Segoe UI" pitchFamily="34" charset="0"/>
-                <a:ea typeface="Segoe UI" pitchFamily="34" charset="-122"/>
-                <a:cs typeface="Segoe UI" pitchFamily="34" charset="-120"/>
+                <a:latin typeface="Segoe UI" panose="020B0502040204020203" pitchFamily="34" charset="0"/>
+                <a:ea typeface="Segoe UI" panose="020B0502040204020203" pitchFamily="34" charset="-122"/>
+                <a:cs typeface="Segoe UI" panose="020B0502040204020203" pitchFamily="34" charset="-120"/>
               </a:rPr>
               <a:t>export</a:t>
             </a:r>
@@ -8866,13 +8651,12 @@
             <a:avLst/>
           </a:prstGeom>
           <a:noFill/>
-          <a:ln/>
-        </p:spPr>
-        <p:txBody>
-          <a:bodyPr wrap="square" lIns="0" tIns="0" rIns="0" bIns="0" rtlCol="0" anchor="ctr"/>
-          <a:lstStyle/>
-          <a:p>
-            <a:pPr indent="0" marL="0">
+        </p:spPr>
+        <p:txBody>
+          <a:bodyPr wrap="square" lIns="0" tIns="0" rIns="0" bIns="0" rtlCol="0" anchor="ctr"/>
+          <a:lstStyle/>
+          <a:p>
+            <a:pPr marL="0" indent="0">
               <a:buNone/>
             </a:pPr>
             <a:r>
@@ -8880,9 +8664,9 @@
                 <a:solidFill>
                   <a:srgbClr val="0891B2"/>
                 </a:solidFill>
-                <a:latin typeface="Segoe UI Semibold" pitchFamily="34" charset="0"/>
-                <a:ea typeface="Segoe UI Semibold" pitchFamily="34" charset="-122"/>
-                <a:cs typeface="Segoe UI Semibold" pitchFamily="34" charset="-120"/>
+                <a:latin typeface="Segoe UI Semibold" panose="020B0702040204020203" pitchFamily="34" charset="0"/>
+                <a:ea typeface="Segoe UI Semibold" panose="020B0702040204020203" pitchFamily="34" charset="-122"/>
+                <a:cs typeface="Segoe UI Semibold" panose="020B0702040204020203" pitchFamily="34" charset="-120"/>
               </a:rPr>
               <a:t>kWh</a:t>
             </a:r>
@@ -8905,13 +8689,12 @@
             <a:avLst/>
           </a:prstGeom>
           <a:noFill/>
-          <a:ln/>
         </p:spPr>
         <p:txBody>
           <a:bodyPr wrap="square" lIns="0" tIns="0" rIns="0" bIns="0" rtlCol="0" anchor="t"/>
           <a:lstStyle/>
           <a:p>
-            <a:pPr indent="0" marL="0">
+            <a:pPr marL="0" indent="0">
               <a:buNone/>
             </a:pPr>
             <a:r>
@@ -8919,9 +8702,9 @@
                 <a:solidFill>
                   <a:srgbClr val="64748B"/>
                 </a:solidFill>
-                <a:latin typeface="Segoe UI" pitchFamily="34" charset="0"/>
-                <a:ea typeface="Segoe UI" pitchFamily="34" charset="-122"/>
-                <a:cs typeface="Segoe UI" pitchFamily="34" charset="-120"/>
+                <a:latin typeface="Segoe UI" panose="020B0502040204020203" pitchFamily="34" charset="0"/>
+                <a:ea typeface="Segoe UI" panose="020B0502040204020203" pitchFamily="34" charset="-122"/>
+                <a:cs typeface="Segoe UI" panose="020B0502040204020203" pitchFamily="34" charset="-120"/>
               </a:rPr>
               <a:t>integrated from power</a:t>
             </a:r>
@@ -8967,13 +8750,12 @@
             <a:avLst/>
           </a:prstGeom>
           <a:noFill/>
-          <a:ln/>
-        </p:spPr>
-        <p:txBody>
-          <a:bodyPr wrap="square" lIns="0" tIns="0" rIns="0" bIns="0" rtlCol="0" anchor="ctr"/>
-          <a:lstStyle/>
-          <a:p>
-            <a:pPr indent="0" marL="0">
+        </p:spPr>
+        <p:txBody>
+          <a:bodyPr wrap="square" lIns="0" tIns="0" rIns="0" bIns="0" rtlCol="0" anchor="ctr"/>
+          <a:lstStyle/>
+          <a:p>
+            <a:pPr marL="0" indent="0">
               <a:buNone/>
             </a:pPr>
             <a:r>
@@ -8981,9 +8763,9 @@
                 <a:solidFill>
                   <a:srgbClr val="0891B2"/>
                 </a:solidFill>
-                <a:latin typeface="Segoe UI Semibold" pitchFamily="34" charset="0"/>
-                <a:ea typeface="Segoe UI Semibold" pitchFamily="34" charset="-122"/>
-                <a:cs typeface="Segoe UI Semibold" pitchFamily="34" charset="-120"/>
+                <a:latin typeface="Segoe UI Semibold" panose="020B0702040204020203" pitchFamily="34" charset="0"/>
+                <a:ea typeface="Segoe UI Semibold" panose="020B0702040204020203" pitchFamily="34" charset="-122"/>
+                <a:cs typeface="Segoe UI Semibold" panose="020B0702040204020203" pitchFamily="34" charset="-120"/>
               </a:rPr>
               <a:t>6</a:t>
             </a:r>
@@ -9006,13 +8788,12 @@
             <a:avLst/>
           </a:prstGeom>
           <a:noFill/>
-          <a:ln/>
         </p:spPr>
         <p:txBody>
           <a:bodyPr wrap="square" lIns="0" tIns="0" rIns="0" bIns="0" rtlCol="0" anchor="t"/>
           <a:lstStyle/>
           <a:p>
-            <a:pPr indent="0" marL="0">
+            <a:pPr marL="0" indent="0">
               <a:buNone/>
             </a:pPr>
             <a:r>
@@ -9020,9 +8801,9 @@
                 <a:solidFill>
                   <a:srgbClr val="64748B"/>
                 </a:solidFill>
-                <a:latin typeface="Segoe UI" pitchFamily="34" charset="0"/>
-                <a:ea typeface="Segoe UI" pitchFamily="34" charset="-122"/>
-                <a:cs typeface="Segoe UI" pitchFamily="34" charset="-120"/>
+                <a:latin typeface="Segoe UI" panose="020B0502040204020203" pitchFamily="34" charset="0"/>
+                <a:ea typeface="Segoe UI" panose="020B0502040204020203" pitchFamily="34" charset="-122"/>
+                <a:cs typeface="Segoe UI" panose="020B0502040204020203" pitchFamily="34" charset="-120"/>
               </a:rPr>
               <a:t>KPIs with targets</a:t>
             </a:r>
@@ -9068,13 +8849,12 @@
             <a:avLst/>
           </a:prstGeom>
           <a:noFill/>
-          <a:ln/>
-        </p:spPr>
-        <p:txBody>
-          <a:bodyPr wrap="square" lIns="0" tIns="0" rIns="0" bIns="0" rtlCol="0" anchor="ctr"/>
-          <a:lstStyle/>
-          <a:p>
-            <a:pPr indent="0" marL="0">
+        </p:spPr>
+        <p:txBody>
+          <a:bodyPr wrap="square" lIns="0" tIns="0" rIns="0" bIns="0" rtlCol="0" anchor="ctr"/>
+          <a:lstStyle/>
+          <a:p>
+            <a:pPr marL="0" indent="0">
               <a:buNone/>
             </a:pPr>
             <a:r>
@@ -9082,9 +8862,9 @@
                 <a:solidFill>
                   <a:srgbClr val="0891B2"/>
                 </a:solidFill>
-                <a:latin typeface="Segoe UI Semibold" pitchFamily="34" charset="0"/>
-                <a:ea typeface="Segoe UI Semibold" pitchFamily="34" charset="-122"/>
-                <a:cs typeface="Segoe UI Semibold" pitchFamily="34" charset="-120"/>
+                <a:latin typeface="Segoe UI Semibold" panose="020B0702040204020203" pitchFamily="34" charset="0"/>
+                <a:ea typeface="Segoe UI Semibold" panose="020B0702040204020203" pitchFamily="34" charset="-122"/>
+                <a:cs typeface="Segoe UI Semibold" panose="020B0702040204020203" pitchFamily="34" charset="-120"/>
               </a:rPr>
               <a:t>5 + 5</a:t>
             </a:r>
@@ -9107,13 +8887,12 @@
             <a:avLst/>
           </a:prstGeom>
           <a:noFill/>
-          <a:ln/>
         </p:spPr>
         <p:txBody>
           <a:bodyPr wrap="square" lIns="0" tIns="0" rIns="0" bIns="0" rtlCol="0" anchor="t"/>
           <a:lstStyle/>
           <a:p>
-            <a:pPr indent="0" marL="0">
+            <a:pPr marL="0" indent="0">
               <a:buNone/>
             </a:pPr>
             <a:r>
@@ -9121,9 +8900,9 @@
                 <a:solidFill>
                   <a:srgbClr val="64748B"/>
                 </a:solidFill>
-                <a:latin typeface="Segoe UI" pitchFamily="34" charset="0"/>
-                <a:ea typeface="Segoe UI" pitchFamily="34" charset="-122"/>
-                <a:cs typeface="Segoe UI" pitchFamily="34" charset="-120"/>
+                <a:latin typeface="Segoe UI" panose="020B0502040204020203" pitchFamily="34" charset="0"/>
+                <a:ea typeface="Segoe UI" panose="020B0502040204020203" pitchFamily="34" charset="-122"/>
+                <a:cs typeface="Segoe UI" panose="020B0502040204020203" pitchFamily="34" charset="-120"/>
               </a:rPr>
               <a:t>energy and performance reports</a:t>
             </a:r>
@@ -9173,13 +8952,12 @@
             <a:avLst/>
           </a:prstGeom>
           <a:noFill/>
-          <a:ln/>
-        </p:spPr>
-        <p:txBody>
-          <a:bodyPr wrap="square" lIns="0" tIns="0" rIns="0" bIns="0" rtlCol="0" anchor="ctr"/>
-          <a:lstStyle/>
-          <a:p>
-            <a:pPr indent="0" marL="0">
+        </p:spPr>
+        <p:txBody>
+          <a:bodyPr wrap="square" lIns="0" tIns="0" rIns="0" bIns="0" rtlCol="0" anchor="ctr"/>
+          <a:lstStyle/>
+          <a:p>
+            <a:pPr marL="0" indent="0">
               <a:buNone/>
             </a:pPr>
             <a:r>
@@ -9187,23 +8965,20 @@
                 <a:solidFill>
                   <a:srgbClr val="0891B2"/>
                 </a:solidFill>
-                <a:latin typeface="Segoe UI" pitchFamily="34" charset="0"/>
-                <a:ea typeface="Segoe UI" pitchFamily="34" charset="-122"/>
-                <a:cs typeface="Segoe UI" pitchFamily="34" charset="-120"/>
+                <a:latin typeface="Segoe UI" panose="020B0502040204020203" pitchFamily="34" charset="0"/>
+                <a:ea typeface="Segoe UI" panose="020B0502040204020203" pitchFamily="34" charset="-122"/>
+                <a:cs typeface="Segoe UI" panose="020B0502040204020203" pitchFamily="34" charset="-120"/>
               </a:rPr>
               <a:t>LIVE  </a:t>
             </a:r>
-            <a:pPr indent="0" marL="0">
-              <a:buNone/>
-            </a:pPr>
             <a:r>
               <a:rPr lang="en-US" sz="1100" dirty="0">
                 <a:solidFill>
                   <a:srgbClr val="0B1B33"/>
                 </a:solidFill>
-                <a:latin typeface="Segoe UI" pitchFamily="34" charset="0"/>
-                <a:ea typeface="Segoe UI" pitchFamily="34" charset="-122"/>
-                <a:cs typeface="Segoe UI" pitchFamily="34" charset="-120"/>
+                <a:latin typeface="Segoe UI" panose="020B0502040204020203" pitchFamily="34" charset="0"/>
+                <a:ea typeface="Segoe UI" panose="020B0502040204020203" pitchFamily="34" charset="-122"/>
+                <a:cs typeface="Segoe UI" panose="020B0502040204020203" pitchFamily="34" charset="-120"/>
               </a:rPr>
               <a:t>Analytics page</a:t>
             </a:r>
@@ -9221,12 +8996,13 @@
 
 <file path=ppt/slides/slide8.xml><?xml version="1.0" encoding="utf-8"?>
 <p:sld xmlns:a="http://schemas.openxmlformats.org/drawingml/2006/main" xmlns:r="http://schemas.openxmlformats.org/officeDocument/2006/relationships" xmlns:p="http://schemas.openxmlformats.org/presentationml/2006/main">
-  <p:cSld name="Slide 8">
+  <p:cSld>
     <p:bg>
       <p:bgPr>
         <a:solidFill>
           <a:srgbClr val="F6F8FB"/>
         </a:solidFill>
+        <a:effectLst/>
       </p:bgPr>
     </p:bg>
     <p:spTree>
@@ -9283,25 +9059,24 @@
             <a:avLst/>
           </a:prstGeom>
           <a:noFill/>
-          <a:ln/>
-        </p:spPr>
-        <p:txBody>
-          <a:bodyPr wrap="square" lIns="0" tIns="0" rIns="0" bIns="0" rtlCol="0" anchor="ctr"/>
-          <a:lstStyle/>
-          <a:p>
-            <a:pPr indent="0" marL="0">
-              <a:buNone/>
-            </a:pPr>
-            <a:r>
-              <a:rPr lang="en-US" sz="1050" spc="400" kern="0" dirty="0">
+        </p:spPr>
+        <p:txBody>
+          <a:bodyPr wrap="square" lIns="0" tIns="0" rIns="0" bIns="0" rtlCol="0" anchor="ctr"/>
+          <a:lstStyle/>
+          <a:p>
+            <a:pPr marL="0" indent="0">
+              <a:buNone/>
+            </a:pPr>
+            <a:r>
+              <a:rPr lang="en-US" sz="1050" kern="0" spc="400" dirty="0">
                 <a:solidFill>
                   <a:srgbClr val="0891B2"/>
                 </a:solidFill>
-                <a:latin typeface="Segoe UI Semibold" pitchFamily="34" charset="0"/>
-                <a:ea typeface="Segoe UI Semibold" pitchFamily="34" charset="-122"/>
-                <a:cs typeface="Segoe UI Semibold" pitchFamily="34" charset="-120"/>
-              </a:rPr>
-              <a:t>08 · NEMAL · SECURITY</a:t>
+                <a:latin typeface="Segoe UI Semibold" panose="020B0702040204020203" pitchFamily="34" charset="0"/>
+                <a:ea typeface="Segoe UI Semibold" panose="020B0702040204020203" pitchFamily="34" charset="-122"/>
+                <a:cs typeface="Segoe UI Semibold" panose="020B0702040204020203" pitchFamily="34" charset="-120"/>
+              </a:rPr>
+              <a:t>08 · SECURITY</a:t>
             </a:r>
             <a:endParaRPr lang="en-US" sz="1050" dirty="0"/>
           </a:p>
@@ -9322,13 +9097,12 @@
             <a:avLst/>
           </a:prstGeom>
           <a:noFill/>
-          <a:ln/>
-        </p:spPr>
-        <p:txBody>
-          <a:bodyPr wrap="square" lIns="0" tIns="0" rIns="0" bIns="0" rtlCol="0" anchor="ctr"/>
-          <a:lstStyle/>
-          <a:p>
-            <a:pPr indent="0" marL="0">
+        </p:spPr>
+        <p:txBody>
+          <a:bodyPr wrap="square" lIns="0" tIns="0" rIns="0" bIns="0" rtlCol="0" anchor="ctr"/>
+          <a:lstStyle/>
+          <a:p>
+            <a:pPr marL="0" indent="0">
               <a:buNone/>
             </a:pPr>
             <a:r>
@@ -9336,9 +9110,9 @@
                 <a:solidFill>
                   <a:srgbClr val="0B1B33"/>
                 </a:solidFill>
-                <a:latin typeface="Segoe UI Semibold" pitchFamily="34" charset="0"/>
-                <a:ea typeface="Segoe UI Semibold" pitchFamily="34" charset="-122"/>
-                <a:cs typeface="Segoe UI Semibold" pitchFamily="34" charset="-120"/>
+                <a:latin typeface="Segoe UI Semibold" panose="020B0702040204020203" pitchFamily="34" charset="0"/>
+                <a:ea typeface="Segoe UI Semibold" panose="020B0702040204020203" pitchFamily="34" charset="-122"/>
+                <a:cs typeface="Segoe UI Semibold" panose="020B0702040204020203" pitchFamily="34" charset="-120"/>
               </a:rPr>
               <a:t>Five roles, enforced at the gateway</a:t>
             </a:r>
@@ -9384,13 +9158,12 @@
             <a:avLst/>
           </a:prstGeom>
           <a:noFill/>
-          <a:ln/>
-        </p:spPr>
-        <p:txBody>
-          <a:bodyPr wrap="square" lIns="0" tIns="0" rIns="0" bIns="0" rtlCol="0" anchor="ctr"/>
-          <a:lstStyle/>
-          <a:p>
-            <a:pPr indent="0" marL="0">
+        </p:spPr>
+        <p:txBody>
+          <a:bodyPr wrap="square" lIns="0" tIns="0" rIns="0" bIns="0" rtlCol="0" anchor="ctr"/>
+          <a:lstStyle/>
+          <a:p>
+            <a:pPr marL="0" indent="0">
               <a:buNone/>
             </a:pPr>
             <a:r>
@@ -9398,9 +9171,9 @@
                 <a:solidFill>
                   <a:srgbClr val="64748B"/>
                 </a:solidFill>
-                <a:latin typeface="Segoe UI" pitchFamily="34" charset="0"/>
-                <a:ea typeface="Segoe UI" pitchFamily="34" charset="-122"/>
-                <a:cs typeface="Segoe UI" pitchFamily="34" charset="-120"/>
+                <a:latin typeface="Segoe UI" panose="020B0502040204020203" pitchFamily="34" charset="0"/>
+                <a:ea typeface="Segoe UI" panose="020B0502040204020203" pitchFamily="34" charset="-122"/>
+                <a:cs typeface="Segoe UI" panose="020B0502040204020203" pitchFamily="34" charset="-120"/>
               </a:rPr>
               <a:t>EC8208 Software Architecture  ·  University of Ruhuna</a:t>
             </a:r>
@@ -9423,13 +9196,12 @@
             <a:avLst/>
           </a:prstGeom>
           <a:noFill/>
-          <a:ln/>
-        </p:spPr>
-        <p:txBody>
-          <a:bodyPr wrap="square" lIns="0" tIns="0" rIns="0" bIns="0" rtlCol="0" anchor="ctr"/>
-          <a:lstStyle/>
-          <a:p>
-            <a:pPr algn="r" indent="0" marL="0">
+        </p:spPr>
+        <p:txBody>
+          <a:bodyPr wrap="square" lIns="0" tIns="0" rIns="0" bIns="0" rtlCol="0" anchor="ctr"/>
+          <a:lstStyle/>
+          <a:p>
+            <a:pPr marL="0" indent="0" algn="r">
               <a:buNone/>
             </a:pPr>
             <a:r>
@@ -9437,9 +9209,9 @@
                 <a:solidFill>
                   <a:srgbClr val="64748B"/>
                 </a:solidFill>
-                <a:latin typeface="Segoe UI" pitchFamily="34" charset="0"/>
-                <a:ea typeface="Segoe UI" pitchFamily="34" charset="-122"/>
-                <a:cs typeface="Segoe UI" pitchFamily="34" charset="-120"/>
+                <a:latin typeface="Segoe UI" panose="020B0502040204020203" pitchFamily="34" charset="0"/>
+                <a:ea typeface="Segoe UI" panose="020B0502040204020203" pitchFamily="34" charset="-122"/>
+                <a:cs typeface="Segoe UI" panose="020B0502040204020203" pitchFamily="34" charset="-120"/>
               </a:rPr>
               <a:t>08  ·  4:16–4:38</a:t>
             </a:r>
@@ -9489,13 +9261,12 @@
             <a:avLst/>
           </a:prstGeom>
           <a:noFill/>
-          <a:ln/>
-        </p:spPr>
-        <p:txBody>
-          <a:bodyPr wrap="square" lIns="0" tIns="0" rIns="0" bIns="0" rtlCol="0" anchor="ctr"/>
-          <a:lstStyle/>
-          <a:p>
-            <a:pPr indent="0" marL="0">
+        </p:spPr>
+        <p:txBody>
+          <a:bodyPr wrap="square" lIns="0" tIns="0" rIns="0" bIns="0" rtlCol="0" anchor="ctr"/>
+          <a:lstStyle/>
+          <a:p>
+            <a:pPr marL="0" indent="0">
               <a:buNone/>
             </a:pPr>
             <a:r>
@@ -9503,9 +9274,9 @@
                 <a:solidFill>
                   <a:srgbClr val="0891B2"/>
                 </a:solidFill>
-                <a:latin typeface="Segoe UI Semibold" pitchFamily="34" charset="0"/>
-                <a:ea typeface="Segoe UI Semibold" pitchFamily="34" charset="-122"/>
-                <a:cs typeface="Segoe UI Semibold" pitchFamily="34" charset="-120"/>
+                <a:latin typeface="Segoe UI Semibold" panose="020B0702040204020203" pitchFamily="34" charset="0"/>
+                <a:ea typeface="Segoe UI Semibold" panose="020B0702040204020203" pitchFamily="34" charset="-122"/>
+                <a:cs typeface="Segoe UI Semibold" panose="020B0702040204020203" pitchFamily="34" charset="-120"/>
               </a:rPr>
               <a:t>Administrator</a:t>
             </a:r>
@@ -9528,13 +9299,12 @@
             <a:avLst/>
           </a:prstGeom>
           <a:noFill/>
-          <a:ln/>
-        </p:spPr>
-        <p:txBody>
-          <a:bodyPr wrap="square" lIns="0" tIns="0" rIns="0" bIns="0" rtlCol="0" anchor="ctr"/>
-          <a:lstStyle/>
-          <a:p>
-            <a:pPr indent="0" marL="0">
+        </p:spPr>
+        <p:txBody>
+          <a:bodyPr wrap="square" lIns="0" tIns="0" rIns="0" bIns="0" rtlCol="0" anchor="ctr"/>
+          <a:lstStyle/>
+          <a:p>
+            <a:pPr marL="0" indent="0">
               <a:buNone/>
             </a:pPr>
             <a:r>
@@ -9542,9 +9312,9 @@
                 <a:solidFill>
                   <a:srgbClr val="0B1B33"/>
                 </a:solidFill>
-                <a:latin typeface="Segoe UI" pitchFamily="34" charset="0"/>
-                <a:ea typeface="Segoe UI" pitchFamily="34" charset="-122"/>
-                <a:cs typeface="Segoe UI" pitchFamily="34" charset="-120"/>
+                <a:latin typeface="Segoe UI" panose="020B0502040204020203" pitchFamily="34" charset="0"/>
+                <a:ea typeface="Segoe UI" panose="020B0502040204020203" pitchFamily="34" charset="-122"/>
+                <a:cs typeface="Segoe UI" panose="020B0502040204020203" pitchFamily="34" charset="-120"/>
               </a:rPr>
               <a:t>Everything, users and audit log</a:t>
             </a:r>
@@ -9594,13 +9364,12 @@
             <a:avLst/>
           </a:prstGeom>
           <a:noFill/>
-          <a:ln/>
-        </p:spPr>
-        <p:txBody>
-          <a:bodyPr wrap="square" lIns="0" tIns="0" rIns="0" bIns="0" rtlCol="0" anchor="ctr"/>
-          <a:lstStyle/>
-          <a:p>
-            <a:pPr indent="0" marL="0">
+        </p:spPr>
+        <p:txBody>
+          <a:bodyPr wrap="square" lIns="0" tIns="0" rIns="0" bIns="0" rtlCol="0" anchor="ctr"/>
+          <a:lstStyle/>
+          <a:p>
+            <a:pPr marL="0" indent="0">
               <a:buNone/>
             </a:pPr>
             <a:r>
@@ -9608,9 +9377,9 @@
                 <a:solidFill>
                   <a:srgbClr val="0891B2"/>
                 </a:solidFill>
-                <a:latin typeface="Segoe UI Semibold" pitchFamily="34" charset="0"/>
-                <a:ea typeface="Segoe UI Semibold" pitchFamily="34" charset="-122"/>
-                <a:cs typeface="Segoe UI Semibold" pitchFamily="34" charset="-120"/>
+                <a:latin typeface="Segoe UI Semibold" panose="020B0702040204020203" pitchFamily="34" charset="0"/>
+                <a:ea typeface="Segoe UI Semibold" panose="020B0702040204020203" pitchFamily="34" charset="-122"/>
+                <a:cs typeface="Segoe UI Semibold" panose="020B0702040204020203" pitchFamily="34" charset="-120"/>
               </a:rPr>
               <a:t>Operations Manager</a:t>
             </a:r>
@@ -9633,13 +9402,12 @@
             <a:avLst/>
           </a:prstGeom>
           <a:noFill/>
-          <a:ln/>
-        </p:spPr>
-        <p:txBody>
-          <a:bodyPr wrap="square" lIns="0" tIns="0" rIns="0" bIns="0" rtlCol="0" anchor="ctr"/>
-          <a:lstStyle/>
-          <a:p>
-            <a:pPr indent="0" marL="0">
+        </p:spPr>
+        <p:txBody>
+          <a:bodyPr wrap="square" lIns="0" tIns="0" rIns="0" bIns="0" rtlCol="0" anchor="ctr"/>
+          <a:lstStyle/>
+          <a:p>
+            <a:pPr marL="0" indent="0">
               <a:buNone/>
             </a:pPr>
             <a:r>
@@ -9647,9 +9415,9 @@
                 <a:solidFill>
                   <a:srgbClr val="0B1B33"/>
                 </a:solidFill>
-                <a:latin typeface="Segoe UI" pitchFamily="34" charset="0"/>
-                <a:ea typeface="Segoe UI" pitchFamily="34" charset="-122"/>
-                <a:cs typeface="Segoe UI" pitchFamily="34" charset="-120"/>
+                <a:latin typeface="Segoe UI" panose="020B0502040204020203" pitchFamily="34" charset="0"/>
+                <a:ea typeface="Segoe UI" panose="020B0502040204020203" pitchFamily="34" charset="-122"/>
+                <a:cs typeface="Segoe UI" panose="020B0502040204020203" pitchFamily="34" charset="-120"/>
               </a:rPr>
               <a:t>Assets, rules, work orders, reports</a:t>
             </a:r>
@@ -9699,13 +9467,12 @@
             <a:avLst/>
           </a:prstGeom>
           <a:noFill/>
-          <a:ln/>
-        </p:spPr>
-        <p:txBody>
-          <a:bodyPr wrap="square" lIns="0" tIns="0" rIns="0" bIns="0" rtlCol="0" anchor="ctr"/>
-          <a:lstStyle/>
-          <a:p>
-            <a:pPr indent="0" marL="0">
+        </p:spPr>
+        <p:txBody>
+          <a:bodyPr wrap="square" lIns="0" tIns="0" rIns="0" bIns="0" rtlCol="0" anchor="ctr"/>
+          <a:lstStyle/>
+          <a:p>
+            <a:pPr marL="0" indent="0">
               <a:buNone/>
             </a:pPr>
             <a:r>
@@ -9713,9 +9480,9 @@
                 <a:solidFill>
                   <a:srgbClr val="0891B2"/>
                 </a:solidFill>
-                <a:latin typeface="Segoe UI Semibold" pitchFamily="34" charset="0"/>
-                <a:ea typeface="Segoe UI Semibold" pitchFamily="34" charset="-122"/>
-                <a:cs typeface="Segoe UI Semibold" pitchFamily="34" charset="-120"/>
+                <a:latin typeface="Segoe UI Semibold" panose="020B0702040204020203" pitchFamily="34" charset="0"/>
+                <a:ea typeface="Segoe UI Semibold" panose="020B0702040204020203" pitchFamily="34" charset="-122"/>
+                <a:cs typeface="Segoe UI Semibold" panose="020B0702040204020203" pitchFamily="34" charset="-120"/>
               </a:rPr>
               <a:t>Plant Operator</a:t>
             </a:r>
@@ -9738,13 +9505,12 @@
             <a:avLst/>
           </a:prstGeom>
           <a:noFill/>
-          <a:ln/>
-        </p:spPr>
-        <p:txBody>
-          <a:bodyPr wrap="square" lIns="0" tIns="0" rIns="0" bIns="0" rtlCol="0" anchor="ctr"/>
-          <a:lstStyle/>
-          <a:p>
-            <a:pPr indent="0" marL="0">
+        </p:spPr>
+        <p:txBody>
+          <a:bodyPr wrap="square" lIns="0" tIns="0" rIns="0" bIns="0" rtlCol="0" anchor="ctr"/>
+          <a:lstStyle/>
+          <a:p>
+            <a:pPr marL="0" indent="0">
               <a:buNone/>
             </a:pPr>
             <a:r>
@@ -9752,9 +9518,9 @@
                 <a:solidFill>
                   <a:srgbClr val="0B1B33"/>
                 </a:solidFill>
-                <a:latin typeface="Segoe UI" pitchFamily="34" charset="0"/>
-                <a:ea typeface="Segoe UI" pitchFamily="34" charset="-122"/>
-                <a:cs typeface="Segoe UI" pitchFamily="34" charset="-120"/>
+                <a:latin typeface="Segoe UI" panose="020B0502040204020203" pitchFamily="34" charset="0"/>
+                <a:ea typeface="Segoe UI" panose="020B0502040204020203" pitchFamily="34" charset="-122"/>
+                <a:cs typeface="Segoe UI" panose="020B0502040204020203" pitchFamily="34" charset="-120"/>
               </a:rPr>
               <a:t>Monitor and handle alerts</a:t>
             </a:r>
@@ -9804,13 +9570,12 @@
             <a:avLst/>
           </a:prstGeom>
           <a:noFill/>
-          <a:ln/>
-        </p:spPr>
-        <p:txBody>
-          <a:bodyPr wrap="square" lIns="0" tIns="0" rIns="0" bIns="0" rtlCol="0" anchor="ctr"/>
-          <a:lstStyle/>
-          <a:p>
-            <a:pPr indent="0" marL="0">
+        </p:spPr>
+        <p:txBody>
+          <a:bodyPr wrap="square" lIns="0" tIns="0" rIns="0" bIns="0" rtlCol="0" anchor="ctr"/>
+          <a:lstStyle/>
+          <a:p>
+            <a:pPr marL="0" indent="0">
               <a:buNone/>
             </a:pPr>
             <a:r>
@@ -9818,9 +9583,9 @@
                 <a:solidFill>
                   <a:srgbClr val="0891B2"/>
                 </a:solidFill>
-                <a:latin typeface="Segoe UI Semibold" pitchFamily="34" charset="0"/>
-                <a:ea typeface="Segoe UI Semibold" pitchFamily="34" charset="-122"/>
-                <a:cs typeface="Segoe UI Semibold" pitchFamily="34" charset="-120"/>
+                <a:latin typeface="Segoe UI Semibold" panose="020B0702040204020203" pitchFamily="34" charset="0"/>
+                <a:ea typeface="Segoe UI Semibold" panose="020B0702040204020203" pitchFamily="34" charset="-122"/>
+                <a:cs typeface="Segoe UI Semibold" panose="020B0702040204020203" pitchFamily="34" charset="-120"/>
               </a:rPr>
               <a:t>Maintenance Engineer</a:t>
             </a:r>
@@ -9843,13 +9608,12 @@
             <a:avLst/>
           </a:prstGeom>
           <a:noFill/>
-          <a:ln/>
-        </p:spPr>
-        <p:txBody>
-          <a:bodyPr wrap="square" lIns="0" tIns="0" rIns="0" bIns="0" rtlCol="0" anchor="ctr"/>
-          <a:lstStyle/>
-          <a:p>
-            <a:pPr indent="0" marL="0">
+        </p:spPr>
+        <p:txBody>
+          <a:bodyPr wrap="square" lIns="0" tIns="0" rIns="0" bIns="0" rtlCol="0" anchor="ctr"/>
+          <a:lstStyle/>
+          <a:p>
+            <a:pPr marL="0" indent="0">
               <a:buNone/>
             </a:pPr>
             <a:r>
@@ -9857,9 +9621,9 @@
                 <a:solidFill>
                   <a:srgbClr val="0B1B33"/>
                 </a:solidFill>
-                <a:latin typeface="Segoe UI" pitchFamily="34" charset="0"/>
-                <a:ea typeface="Segoe UI" pitchFamily="34" charset="-122"/>
-                <a:cs typeface="Segoe UI" pitchFamily="34" charset="-120"/>
+                <a:latin typeface="Segoe UI" panose="020B0502040204020203" pitchFamily="34" charset="0"/>
+                <a:ea typeface="Segoe UI" panose="020B0502040204020203" pitchFamily="34" charset="-122"/>
+                <a:cs typeface="Segoe UI" panose="020B0502040204020203" pitchFamily="34" charset="-120"/>
               </a:rPr>
               <a:t>Assign and complete work orders</a:t>
             </a:r>
@@ -9909,13 +9673,12 @@
             <a:avLst/>
           </a:prstGeom>
           <a:noFill/>
-          <a:ln/>
-        </p:spPr>
-        <p:txBody>
-          <a:bodyPr wrap="square" lIns="0" tIns="0" rIns="0" bIns="0" rtlCol="0" anchor="ctr"/>
-          <a:lstStyle/>
-          <a:p>
-            <a:pPr indent="0" marL="0">
+        </p:spPr>
+        <p:txBody>
+          <a:bodyPr wrap="square" lIns="0" tIns="0" rIns="0" bIns="0" rtlCol="0" anchor="ctr"/>
+          <a:lstStyle/>
+          <a:p>
+            <a:pPr marL="0" indent="0">
               <a:buNone/>
             </a:pPr>
             <a:r>
@@ -9923,9 +9686,9 @@
                 <a:solidFill>
                   <a:srgbClr val="0891B2"/>
                 </a:solidFill>
-                <a:latin typeface="Segoe UI Semibold" pitchFamily="34" charset="0"/>
-                <a:ea typeface="Segoe UI Semibold" pitchFamily="34" charset="-122"/>
-                <a:cs typeface="Segoe UI Semibold" pitchFamily="34" charset="-120"/>
+                <a:latin typeface="Segoe UI Semibold" panose="020B0702040204020203" pitchFamily="34" charset="0"/>
+                <a:ea typeface="Segoe UI Semibold" panose="020B0702040204020203" pitchFamily="34" charset="-122"/>
+                <a:cs typeface="Segoe UI Semibold" panose="020B0702040204020203" pitchFamily="34" charset="-120"/>
               </a:rPr>
               <a:t>Executive</a:t>
             </a:r>
@@ -9948,13 +9711,12 @@
             <a:avLst/>
           </a:prstGeom>
           <a:noFill/>
-          <a:ln/>
-        </p:spPr>
-        <p:txBody>
-          <a:bodyPr wrap="square" lIns="0" tIns="0" rIns="0" bIns="0" rtlCol="0" anchor="ctr"/>
-          <a:lstStyle/>
-          <a:p>
-            <a:pPr indent="0" marL="0">
+        </p:spPr>
+        <p:txBody>
+          <a:bodyPr wrap="square" lIns="0" tIns="0" rIns="0" bIns="0" rtlCol="0" anchor="ctr"/>
+          <a:lstStyle/>
+          <a:p>
+            <a:pPr marL="0" indent="0">
               <a:buNone/>
             </a:pPr>
             <a:r>
@@ -9962,9 +9724,9 @@
                 <a:solidFill>
                   <a:srgbClr val="0B1B33"/>
                 </a:solidFill>
-                <a:latin typeface="Segoe UI" pitchFamily="34" charset="0"/>
-                <a:ea typeface="Segoe UI" pitchFamily="34" charset="-122"/>
-                <a:cs typeface="Segoe UI" pitchFamily="34" charset="-120"/>
+                <a:latin typeface="Segoe UI" panose="020B0502040204020203" pitchFamily="34" charset="0"/>
+                <a:ea typeface="Segoe UI" panose="020B0502040204020203" pitchFamily="34" charset="-122"/>
+                <a:cs typeface="Segoe UI" panose="020B0502040204020203" pitchFamily="34" charset="-120"/>
               </a:rPr>
               <a:t>Read-only dashboards and reports</a:t>
             </a:r>
@@ -10014,13 +9776,12 @@
             <a:avLst/>
           </a:prstGeom>
           <a:noFill/>
-          <a:ln/>
-        </p:spPr>
-        <p:txBody>
-          <a:bodyPr wrap="square" lIns="0" tIns="0" rIns="0" bIns="0" rtlCol="0" anchor="ctr"/>
-          <a:lstStyle/>
-          <a:p>
-            <a:pPr indent="0" marL="0">
+        </p:spPr>
+        <p:txBody>
+          <a:bodyPr wrap="square" lIns="0" tIns="0" rIns="0" bIns="0" rtlCol="0" anchor="ctr"/>
+          <a:lstStyle/>
+          <a:p>
+            <a:pPr marL="0" indent="0">
               <a:buNone/>
             </a:pPr>
             <a:r>
@@ -10028,23 +9789,20 @@
                 <a:solidFill>
                   <a:srgbClr val="0891B2"/>
                 </a:solidFill>
-                <a:latin typeface="Segoe UI" pitchFamily="34" charset="0"/>
-                <a:ea typeface="Segoe UI" pitchFamily="34" charset="-122"/>
-                <a:cs typeface="Segoe UI" pitchFamily="34" charset="-120"/>
+                <a:latin typeface="Segoe UI" panose="020B0502040204020203" pitchFamily="34" charset="0"/>
+                <a:ea typeface="Segoe UI" panose="020B0502040204020203" pitchFamily="34" charset="-122"/>
+                <a:cs typeface="Segoe UI" panose="020B0502040204020203" pitchFamily="34" charset="-120"/>
               </a:rPr>
               <a:t>LIVE  </a:t>
             </a:r>
-            <a:pPr indent="0" marL="0">
-              <a:buNone/>
-            </a:pPr>
             <a:r>
               <a:rPr lang="en-US" sz="1100" dirty="0">
                 <a:solidFill>
                   <a:srgbClr val="0B1B33"/>
                 </a:solidFill>
-                <a:latin typeface="Segoe UI" pitchFamily="34" charset="0"/>
-                <a:ea typeface="Segoe UI" pitchFamily="34" charset="-122"/>
-                <a:cs typeface="Segoe UI" pitchFamily="34" charset="-120"/>
+                <a:latin typeface="Segoe UI" panose="020B0502040204020203" pitchFamily="34" charset="0"/>
+                <a:ea typeface="Segoe UI" panose="020B0502040204020203" pitchFamily="34" charset="-122"/>
+                <a:cs typeface="Segoe UI" panose="020B0502040204020203" pitchFamily="34" charset="-120"/>
               </a:rPr>
               <a:t>executive sign-in, read-only</a:t>
             </a:r>
@@ -10062,12 +9820,13 @@
 
 <file path=ppt/slides/slide9.xml><?xml version="1.0" encoding="utf-8"?>
 <p:sld xmlns:a="http://schemas.openxmlformats.org/drawingml/2006/main" xmlns:r="http://schemas.openxmlformats.org/officeDocument/2006/relationships" xmlns:p="http://schemas.openxmlformats.org/presentationml/2006/main">
-  <p:cSld name="Slide 9">
+  <p:cSld>
     <p:bg>
       <p:bgPr>
         <a:solidFill>
           <a:srgbClr val="F6F8FB"/>
         </a:solidFill>
+        <a:effectLst/>
       </p:bgPr>
     </p:bg>
     <p:spTree>
@@ -10124,25 +9883,24 @@
             <a:avLst/>
           </a:prstGeom>
           <a:noFill/>
-          <a:ln/>
-        </p:spPr>
-        <p:txBody>
-          <a:bodyPr wrap="square" lIns="0" tIns="0" rIns="0" bIns="0" rtlCol="0" anchor="ctr"/>
-          <a:lstStyle/>
-          <a:p>
-            <a:pPr indent="0" marL="0">
-              <a:buNone/>
-            </a:pPr>
-            <a:r>
-              <a:rPr lang="en-US" sz="1050" spc="400" kern="0" dirty="0">
+        </p:spPr>
+        <p:txBody>
+          <a:bodyPr wrap="square" lIns="0" tIns="0" rIns="0" bIns="0" rtlCol="0" anchor="ctr"/>
+          <a:lstStyle/>
+          <a:p>
+            <a:pPr marL="0" indent="0">
+              <a:buNone/>
+            </a:pPr>
+            <a:r>
+              <a:rPr lang="en-US" sz="1050" kern="0" spc="400" dirty="0">
                 <a:solidFill>
                   <a:srgbClr val="0891B2"/>
                 </a:solidFill>
-                <a:latin typeface="Segoe UI Semibold" pitchFamily="34" charset="0"/>
-                <a:ea typeface="Segoe UI Semibold" pitchFamily="34" charset="-122"/>
-                <a:cs typeface="Segoe UI Semibold" pitchFamily="34" charset="-120"/>
-              </a:rPr>
-              <a:t>09 · CHARITH · OPERATIONS AND QUALITY</a:t>
+                <a:latin typeface="Segoe UI Semibold" panose="020B0702040204020203" pitchFamily="34" charset="0"/>
+                <a:ea typeface="Segoe UI Semibold" panose="020B0702040204020203" pitchFamily="34" charset="-122"/>
+                <a:cs typeface="Segoe UI Semibold" panose="020B0702040204020203" pitchFamily="34" charset="-120"/>
+              </a:rPr>
+              <a:t>09 · OPERATIONS AND QUALITY</a:t>
             </a:r>
             <a:endParaRPr lang="en-US" sz="1050" dirty="0"/>
           </a:p>
@@ -10163,13 +9921,12 @@
             <a:avLst/>
           </a:prstGeom>
           <a:noFill/>
-          <a:ln/>
-        </p:spPr>
-        <p:txBody>
-          <a:bodyPr wrap="square" lIns="0" tIns="0" rIns="0" bIns="0" rtlCol="0" anchor="ctr"/>
-          <a:lstStyle/>
-          <a:p>
-            <a:pPr indent="0" marL="0">
+        </p:spPr>
+        <p:txBody>
+          <a:bodyPr wrap="square" lIns="0" tIns="0" rIns="0" bIns="0" rtlCol="0" anchor="ctr"/>
+          <a:lstStyle/>
+          <a:p>
+            <a:pPr marL="0" indent="0">
               <a:buNone/>
             </a:pPr>
             <a:r>
@@ -10177,9 +9934,9 @@
                 <a:solidFill>
                   <a:srgbClr val="0B1B33"/>
                 </a:solidFill>
-                <a:latin typeface="Segoe UI Semibold" pitchFamily="34" charset="0"/>
-                <a:ea typeface="Segoe UI Semibold" pitchFamily="34" charset="-122"/>
-                <a:cs typeface="Segoe UI Semibold" pitchFamily="34" charset="-120"/>
+                <a:latin typeface="Segoe UI Semibold" panose="020B0702040204020203" pitchFamily="34" charset="0"/>
+                <a:ea typeface="Segoe UI Semibold" panose="020B0702040204020203" pitchFamily="34" charset="-122"/>
+                <a:cs typeface="Segoe UI Semibold" panose="020B0702040204020203" pitchFamily="34" charset="-120"/>
               </a:rPr>
               <a:t>Observable, tested, one command to run</a:t>
             </a:r>
@@ -10225,13 +9982,12 @@
             <a:avLst/>
           </a:prstGeom>
           <a:noFill/>
-          <a:ln/>
-        </p:spPr>
-        <p:txBody>
-          <a:bodyPr wrap="square" lIns="0" tIns="0" rIns="0" bIns="0" rtlCol="0" anchor="ctr"/>
-          <a:lstStyle/>
-          <a:p>
-            <a:pPr indent="0" marL="0">
+        </p:spPr>
+        <p:txBody>
+          <a:bodyPr wrap="square" lIns="0" tIns="0" rIns="0" bIns="0" rtlCol="0" anchor="ctr"/>
+          <a:lstStyle/>
+          <a:p>
+            <a:pPr marL="0" indent="0">
               <a:buNone/>
             </a:pPr>
             <a:r>
@@ -10239,9 +9995,9 @@
                 <a:solidFill>
                   <a:srgbClr val="64748B"/>
                 </a:solidFill>
-                <a:latin typeface="Segoe UI" pitchFamily="34" charset="0"/>
-                <a:ea typeface="Segoe UI" pitchFamily="34" charset="-122"/>
-                <a:cs typeface="Segoe UI" pitchFamily="34" charset="-120"/>
+                <a:latin typeface="Segoe UI" panose="020B0502040204020203" pitchFamily="34" charset="0"/>
+                <a:ea typeface="Segoe UI" panose="020B0502040204020203" pitchFamily="34" charset="-122"/>
+                <a:cs typeface="Segoe UI" panose="020B0502040204020203" pitchFamily="34" charset="-120"/>
               </a:rPr>
               <a:t>EC8208 Software Architecture  ·  University of Ruhuna</a:t>
             </a:r>
@@ -10264,13 +10020,12 @@
             <a:avLst/>
           </a:prstGeom>
           <a:noFill/>
-          <a:ln/>
-        </p:spPr>
-        <p:txBody>
-          <a:bodyPr wrap="square" lIns="0" tIns="0" rIns="0" bIns="0" rtlCol="0" anchor="ctr"/>
-          <a:lstStyle/>
-          <a:p>
-            <a:pPr algn="r" indent="0" marL="0">
+        </p:spPr>
+        <p:txBody>
+          <a:bodyPr wrap="square" lIns="0" tIns="0" rIns="0" bIns="0" rtlCol="0" anchor="ctr"/>
+          <a:lstStyle/>
+          <a:p>
+            <a:pPr marL="0" indent="0" algn="r">
               <a:buNone/>
             </a:pPr>
             <a:r>
@@ -10278,9 +10033,9 @@
                 <a:solidFill>
                   <a:srgbClr val="64748B"/>
                 </a:solidFill>
-                <a:latin typeface="Segoe UI" pitchFamily="34" charset="0"/>
-                <a:ea typeface="Segoe UI" pitchFamily="34" charset="-122"/>
-                <a:cs typeface="Segoe UI" pitchFamily="34" charset="-120"/>
+                <a:latin typeface="Segoe UI" panose="020B0502040204020203" pitchFamily="34" charset="0"/>
+                <a:ea typeface="Segoe UI" panose="020B0502040204020203" pitchFamily="34" charset="-122"/>
+                <a:cs typeface="Segoe UI" panose="020B0502040204020203" pitchFamily="34" charset="-120"/>
               </a:rPr>
               <a:t>09  ·  4:38–4:54</a:t>
             </a:r>
@@ -10326,13 +10081,12 @@
             <a:avLst/>
           </a:prstGeom>
           <a:noFill/>
-          <a:ln/>
-        </p:spPr>
-        <p:txBody>
-          <a:bodyPr wrap="square" lIns="0" tIns="0" rIns="0" bIns="0" rtlCol="0" anchor="ctr"/>
-          <a:lstStyle/>
-          <a:p>
-            <a:pPr indent="0" marL="0">
+        </p:spPr>
+        <p:txBody>
+          <a:bodyPr wrap="square" lIns="0" tIns="0" rIns="0" bIns="0" rtlCol="0" anchor="ctr"/>
+          <a:lstStyle/>
+          <a:p>
+            <a:pPr marL="0" indent="0">
               <a:buNone/>
             </a:pPr>
             <a:r>
@@ -10340,9 +10094,9 @@
                 <a:solidFill>
                   <a:srgbClr val="0891B2"/>
                 </a:solidFill>
-                <a:latin typeface="Segoe UI Semibold" pitchFamily="34" charset="0"/>
-                <a:ea typeface="Segoe UI Semibold" pitchFamily="34" charset="-122"/>
-                <a:cs typeface="Segoe UI Semibold" pitchFamily="34" charset="-120"/>
+                <a:latin typeface="Segoe UI Semibold" panose="020B0702040204020203" pitchFamily="34" charset="0"/>
+                <a:ea typeface="Segoe UI Semibold" panose="020B0702040204020203" pitchFamily="34" charset="-122"/>
+                <a:cs typeface="Segoe UI Semibold" panose="020B0702040204020203" pitchFamily="34" charset="-120"/>
               </a:rPr>
               <a:t>60</a:t>
             </a:r>
@@ -10365,13 +10119,12 @@
             <a:avLst/>
           </a:prstGeom>
           <a:noFill/>
-          <a:ln/>
-        </p:spPr>
-        <p:txBody>
-          <a:bodyPr wrap="square" lIns="0" tIns="0" rIns="0" bIns="0" rtlCol="0" anchor="ctr"/>
-          <a:lstStyle/>
-          <a:p>
-            <a:pPr indent="0" marL="0">
+        </p:spPr>
+        <p:txBody>
+          <a:bodyPr wrap="square" lIns="0" tIns="0" rIns="0" bIns="0" rtlCol="0" anchor="ctr"/>
+          <a:lstStyle/>
+          <a:p>
+            <a:pPr marL="0" indent="0">
               <a:buNone/>
             </a:pPr>
             <a:r>
@@ -10379,9 +10132,9 @@
                 <a:solidFill>
                   <a:srgbClr val="64748B"/>
                 </a:solidFill>
-                <a:latin typeface="Segoe UI" pitchFamily="34" charset="0"/>
-                <a:ea typeface="Segoe UI" pitchFamily="34" charset="-122"/>
-                <a:cs typeface="Segoe UI" pitchFamily="34" charset="-120"/>
+                <a:latin typeface="Segoe UI" panose="020B0502040204020203" pitchFamily="34" charset="0"/>
+                <a:ea typeface="Segoe UI" panose="020B0502040204020203" pitchFamily="34" charset="-122"/>
+                <a:cs typeface="Segoe UI" panose="020B0502040204020203" pitchFamily="34" charset="-120"/>
               </a:rPr>
               <a:t>test methods</a:t>
             </a:r>
@@ -10427,13 +10180,12 @@
             <a:avLst/>
           </a:prstGeom>
           <a:noFill/>
-          <a:ln/>
-        </p:spPr>
-        <p:txBody>
-          <a:bodyPr wrap="square" lIns="0" tIns="0" rIns="0" bIns="0" rtlCol="0" anchor="ctr"/>
-          <a:lstStyle/>
-          <a:p>
-            <a:pPr indent="0" marL="0">
+        </p:spPr>
+        <p:txBody>
+          <a:bodyPr wrap="square" lIns="0" tIns="0" rIns="0" bIns="0" rtlCol="0" anchor="ctr"/>
+          <a:lstStyle/>
+          <a:p>
+            <a:pPr marL="0" indent="0">
               <a:buNone/>
             </a:pPr>
             <a:r>
@@ -10441,9 +10193,9 @@
                 <a:solidFill>
                   <a:srgbClr val="0891B2"/>
                 </a:solidFill>
-                <a:latin typeface="Segoe UI Semibold" pitchFamily="34" charset="0"/>
-                <a:ea typeface="Segoe UI Semibold" pitchFamily="34" charset="-122"/>
-                <a:cs typeface="Segoe UI Semibold" pitchFamily="34" charset="-120"/>
+                <a:latin typeface="Segoe UI Semibold" panose="020B0702040204020203" pitchFamily="34" charset="0"/>
+                <a:ea typeface="Segoe UI Semibold" panose="020B0702040204020203" pitchFamily="34" charset="-122"/>
+                <a:cs typeface="Segoe UI Semibold" panose="020B0702040204020203" pitchFamily="34" charset="-120"/>
               </a:rPr>
               <a:t>7</a:t>
             </a:r>
@@ -10466,13 +10218,12 @@
             <a:avLst/>
           </a:prstGeom>
           <a:noFill/>
-          <a:ln/>
-        </p:spPr>
-        <p:txBody>
-          <a:bodyPr wrap="square" lIns="0" tIns="0" rIns="0" bIns="0" rtlCol="0" anchor="ctr"/>
-          <a:lstStyle/>
-          <a:p>
-            <a:pPr indent="0" marL="0">
+        </p:spPr>
+        <p:txBody>
+          <a:bodyPr wrap="square" lIns="0" tIns="0" rIns="0" bIns="0" rtlCol="0" anchor="ctr"/>
+          <a:lstStyle/>
+          <a:p>
+            <a:pPr marL="0" indent="0">
               <a:buNone/>
             </a:pPr>
             <a:r>
@@ -10480,9 +10231,9 @@
                 <a:solidFill>
                   <a:srgbClr val="64748B"/>
                 </a:solidFill>
-                <a:latin typeface="Segoe UI" pitchFamily="34" charset="0"/>
-                <a:ea typeface="Segoe UI" pitchFamily="34" charset="-122"/>
-                <a:cs typeface="Segoe UI" pitchFamily="34" charset="-120"/>
+                <a:latin typeface="Segoe UI" panose="020B0502040204020203" pitchFamily="34" charset="0"/>
+                <a:ea typeface="Segoe UI" panose="020B0502040204020203" pitchFamily="34" charset="-122"/>
+                <a:cs typeface="Segoe UI" panose="020B0502040204020203" pitchFamily="34" charset="-120"/>
               </a:rPr>
               <a:t>services monitored</a:t>
             </a:r>
@@ -10528,13 +10279,12 @@
             <a:avLst/>
           </a:prstGeom>
           <a:noFill/>
-          <a:ln/>
-        </p:spPr>
-        <p:txBody>
-          <a:bodyPr wrap="square" lIns="0" tIns="0" rIns="0" bIns="0" rtlCol="0" anchor="ctr"/>
-          <a:lstStyle/>
-          <a:p>
-            <a:pPr indent="0" marL="0">
+        </p:spPr>
+        <p:txBody>
+          <a:bodyPr wrap="square" lIns="0" tIns="0" rIns="0" bIns="0" rtlCol="0" anchor="ctr"/>
+          <a:lstStyle/>
+          <a:p>
+            <a:pPr marL="0" indent="0">
               <a:buNone/>
             </a:pPr>
             <a:r>
@@ -10542,9 +10292,9 @@
                 <a:solidFill>
                   <a:srgbClr val="0891B2"/>
                 </a:solidFill>
-                <a:latin typeface="Segoe UI Semibold" pitchFamily="34" charset="0"/>
-                <a:ea typeface="Segoe UI Semibold" pitchFamily="34" charset="-122"/>
-                <a:cs typeface="Segoe UI Semibold" pitchFamily="34" charset="-120"/>
+                <a:latin typeface="Segoe UI Semibold" panose="020B0702040204020203" pitchFamily="34" charset="0"/>
+                <a:ea typeface="Segoe UI Semibold" panose="020B0702040204020203" pitchFamily="34" charset="-122"/>
+                <a:cs typeface="Segoe UI Semibold" panose="020B0702040204020203" pitchFamily="34" charset="-120"/>
               </a:rPr>
               <a:t>19</a:t>
             </a:r>
@@ -10567,13 +10317,12 @@
             <a:avLst/>
           </a:prstGeom>
           <a:noFill/>
-          <a:ln/>
-        </p:spPr>
-        <p:txBody>
-          <a:bodyPr wrap="square" lIns="0" tIns="0" rIns="0" bIns="0" rtlCol="0" anchor="ctr"/>
-          <a:lstStyle/>
-          <a:p>
-            <a:pPr indent="0" marL="0">
+        </p:spPr>
+        <p:txBody>
+          <a:bodyPr wrap="square" lIns="0" tIns="0" rIns="0" bIns="0" rtlCol="0" anchor="ctr"/>
+          <a:lstStyle/>
+          <a:p>
+            <a:pPr marL="0" indent="0">
               <a:buNone/>
             </a:pPr>
             <a:r>
@@ -10581,9 +10330,9 @@
                 <a:solidFill>
                   <a:srgbClr val="64748B"/>
                 </a:solidFill>
-                <a:latin typeface="Segoe UI" pitchFamily="34" charset="0"/>
-                <a:ea typeface="Segoe UI" pitchFamily="34" charset="-122"/>
-                <a:cs typeface="Segoe UI" pitchFamily="34" charset="-120"/>
+                <a:latin typeface="Segoe UI" panose="020B0502040204020203" pitchFamily="34" charset="0"/>
+                <a:ea typeface="Segoe UI" panose="020B0502040204020203" pitchFamily="34" charset="-122"/>
+                <a:cs typeface="Segoe UI" panose="020B0502040204020203" pitchFamily="34" charset="-120"/>
               </a:rPr>
               <a:t>containers</a:t>
             </a:r>
@@ -10629,13 +10378,12 @@
             <a:avLst/>
           </a:prstGeom>
           <a:noFill/>
-          <a:ln/>
-        </p:spPr>
-        <p:txBody>
-          <a:bodyPr wrap="square" lIns="0" tIns="0" rIns="0" bIns="0" rtlCol="0" anchor="ctr"/>
-          <a:lstStyle/>
-          <a:p>
-            <a:pPr indent="0" marL="0">
+        </p:spPr>
+        <p:txBody>
+          <a:bodyPr wrap="square" lIns="0" tIns="0" rIns="0" bIns="0" rtlCol="0" anchor="ctr"/>
+          <a:lstStyle/>
+          <a:p>
+            <a:pPr marL="0" indent="0">
               <a:buNone/>
             </a:pPr>
             <a:r>
@@ -10643,9 +10391,9 @@
                 <a:solidFill>
                   <a:srgbClr val="16A34A"/>
                 </a:solidFill>
-                <a:latin typeface="Segoe UI Semibold" pitchFamily="34" charset="0"/>
-                <a:ea typeface="Segoe UI Semibold" pitchFamily="34" charset="-122"/>
-                <a:cs typeface="Segoe UI Semibold" pitchFamily="34" charset="-120"/>
+                <a:latin typeface="Segoe UI Semibold" panose="020B0702040204020203" pitchFamily="34" charset="0"/>
+                <a:ea typeface="Segoe UI Semibold" panose="020B0702040204020203" pitchFamily="34" charset="-122"/>
+                <a:cs typeface="Segoe UI Semibold" panose="020B0702040204020203" pitchFamily="34" charset="-120"/>
               </a:rPr>
               <a:t>1</a:t>
             </a:r>
@@ -10668,13 +10416,12 @@
             <a:avLst/>
           </a:prstGeom>
           <a:noFill/>
-          <a:ln/>
-        </p:spPr>
-        <p:txBody>
-          <a:bodyPr wrap="square" lIns="0" tIns="0" rIns="0" bIns="0" rtlCol="0" anchor="ctr"/>
-          <a:lstStyle/>
-          <a:p>
-            <a:pPr indent="0" marL="0">
+        </p:spPr>
+        <p:txBody>
+          <a:bodyPr wrap="square" lIns="0" tIns="0" rIns="0" bIns="0" rtlCol="0" anchor="ctr"/>
+          <a:lstStyle/>
+          <a:p>
+            <a:pPr marL="0" indent="0">
               <a:buNone/>
             </a:pPr>
             <a:r>
@@ -10682,9 +10429,9 @@
                 <a:solidFill>
                   <a:srgbClr val="64748B"/>
                 </a:solidFill>
-                <a:latin typeface="Segoe UI" pitchFamily="34" charset="0"/>
-                <a:ea typeface="Segoe UI" pitchFamily="34" charset="-122"/>
-                <a:cs typeface="Segoe UI" pitchFamily="34" charset="-120"/>
+                <a:latin typeface="Segoe UI" panose="020B0502040204020203" pitchFamily="34" charset="0"/>
+                <a:ea typeface="Segoe UI" panose="020B0502040204020203" pitchFamily="34" charset="-122"/>
+                <a:cs typeface="Segoe UI" panose="020B0502040204020203" pitchFamily="34" charset="-120"/>
               </a:rPr>
               <a:t>command to start</a:t>
             </a:r>
@@ -10734,13 +10481,12 @@
             <a:avLst/>
           </a:prstGeom>
           <a:noFill/>
-          <a:ln/>
-        </p:spPr>
-        <p:txBody>
-          <a:bodyPr wrap="square" lIns="0" tIns="0" rIns="0" bIns="0" rtlCol="0" anchor="ctr"/>
-          <a:lstStyle/>
-          <a:p>
-            <a:pPr indent="0" marL="0">
+        </p:spPr>
+        <p:txBody>
+          <a:bodyPr wrap="square" lIns="0" tIns="0" rIns="0" bIns="0" rtlCol="0" anchor="ctr"/>
+          <a:lstStyle/>
+          <a:p>
+            <a:pPr marL="0" indent="0">
               <a:buNone/>
             </a:pPr>
             <a:r>
@@ -10748,23 +10494,20 @@
                 <a:solidFill>
                   <a:srgbClr val="0891B2"/>
                 </a:solidFill>
-                <a:latin typeface="Segoe UI" pitchFamily="34" charset="0"/>
-                <a:ea typeface="Segoe UI" pitchFamily="34" charset="-122"/>
-                <a:cs typeface="Segoe UI" pitchFamily="34" charset="-120"/>
+                <a:latin typeface="Segoe UI" panose="020B0502040204020203" pitchFamily="34" charset="0"/>
+                <a:ea typeface="Segoe UI" panose="020B0502040204020203" pitchFamily="34" charset="-122"/>
+                <a:cs typeface="Segoe UI" panose="020B0502040204020203" pitchFamily="34" charset="-120"/>
               </a:rPr>
               <a:t>LIVE  </a:t>
             </a:r>
-            <a:pPr indent="0" marL="0">
-              <a:buNone/>
-            </a:pPr>
             <a:r>
               <a:rPr lang="en-US" sz="1100" dirty="0">
                 <a:solidFill>
                   <a:srgbClr val="0B1B33"/>
                 </a:solidFill>
-                <a:latin typeface="Segoe UI" pitchFamily="34" charset="0"/>
-                <a:ea typeface="Segoe UI" pitchFamily="34" charset="-122"/>
-                <a:cs typeface="Segoe UI" pitchFamily="34" charset="-120"/>
+                <a:latin typeface="Segoe UI" panose="020B0502040204020203" pitchFamily="34" charset="0"/>
+                <a:ea typeface="Segoe UI" panose="020B0502040204020203" pitchFamily="34" charset="-122"/>
+                <a:cs typeface="Segoe UI" panose="020B0502040204020203" pitchFamily="34" charset="-120"/>
               </a:rPr>
               <a:t>Grafana platform health</a:t>
             </a:r>
@@ -10856,23 +10599,6 @@
         <a:font script="Viet" typeface="Times New Roman"/>
         <a:font script="Uigh" typeface="Microsoft Uighur"/>
         <a:font script="Geor" typeface="Sylfaen"/>
-        <a:font script="Armn" typeface="Arial"/>
-        <a:font script="Bugi" typeface="Leelawadee UI"/>
-        <a:font script="Bopo" typeface="Microsoft JhengHei"/>
-        <a:font script="Java" typeface="Javanese Text"/>
-        <a:font script="Lisu" typeface="Segoe UI"/>
-        <a:font script="Mymr" typeface="Myanmar Text"/>
-        <a:font script="Nkoo" typeface="Ebrima"/>
-        <a:font script="Olck" typeface="Nirmala UI"/>
-        <a:font script="Osma" typeface="Ebrima"/>
-        <a:font script="Phag" typeface="Phagspa"/>
-        <a:font script="Syrn" typeface="Estrangelo Edessa"/>
-        <a:font script="Syrj" typeface="Estrangelo Edessa"/>
-        <a:font script="Syre" typeface="Estrangelo Edessa"/>
-        <a:font script="Sora" typeface="Nirmala UI"/>
-        <a:font script="Tale" typeface="Microsoft Tai Le"/>
-        <a:font script="Talu" typeface="Microsoft New Tai Lue"/>
-        <a:font script="Tfng" typeface="Ebrima"/>
       </a:majorFont>
       <a:minorFont>
         <a:latin typeface="Segoe UI"/>
@@ -10908,23 +10634,6 @@
         <a:font script="Viet" typeface="Arial"/>
         <a:font script="Uigh" typeface="Microsoft Uighur"/>
         <a:font script="Geor" typeface="Sylfaen"/>
-        <a:font script="Armn" typeface="Arial"/>
-        <a:font script="Bugi" typeface="Leelawadee UI"/>
-        <a:font script="Bopo" typeface="Microsoft JhengHei"/>
-        <a:font script="Java" typeface="Javanese Text"/>
-        <a:font script="Lisu" typeface="Segoe UI"/>
-        <a:font script="Mymr" typeface="Myanmar Text"/>
-        <a:font script="Nkoo" typeface="Ebrima"/>
-        <a:font script="Olck" typeface="Nirmala UI"/>
-        <a:font script="Osma" typeface="Ebrima"/>
-        <a:font script="Phag" typeface="Phagspa"/>
-        <a:font script="Syrn" typeface="Estrangelo Edessa"/>
-        <a:font script="Syrj" typeface="Estrangelo Edessa"/>
-        <a:font script="Syre" typeface="Estrangelo Edessa"/>
-        <a:font script="Sora" typeface="Nirmala UI"/>
-        <a:font script="Tale" typeface="Microsoft Tai Le"/>
-        <a:font script="Talu" typeface="Microsoft New Tai Lue"/>
-        <a:font script="Tfng" typeface="Ebrima"/>
       </a:minorFont>
     </a:fontScheme>
     <a:fmtScheme name="Office">
@@ -11065,8 +10774,265 @@
       </a:bgFillStyleLst>
     </a:fmtScheme>
   </a:themeElements>
-  <a:objectDefaults/>
-  <a:extraClrSchemeLst/>
+  <a:extLst>
+    <a:ext uri="{05A4C25C-085E-4340-85A3-A5531E510DB2}">
+      <thm15:themeFamily xmlns:thm15="http://schemas.microsoft.com/office/thememl/2012/main" name="Office Theme" id="{62F939B6-93AF-4DB8-9C6B-D6C7DFDC589F}" vid="{4A3C46E8-61CC-4603-A589-7422A47A8E4A}"/>
+    </a:ext>
+  </a:extLst>
+</a:theme>
+</file>
+
+<file path=ppt/theme/theme2.xml><?xml version="1.0" encoding="utf-8"?>
+<a:theme xmlns:a="http://schemas.openxmlformats.org/drawingml/2006/main" name="Office Theme">
+  <a:themeElements>
+    <a:clrScheme name="Office">
+      <a:dk1>
+        <a:sysClr val="windowText" lastClr="000000"/>
+      </a:dk1>
+      <a:lt1>
+        <a:sysClr val="window" lastClr="FFFFFF"/>
+      </a:lt1>
+      <a:dk2>
+        <a:srgbClr val="44546A"/>
+      </a:dk2>
+      <a:lt2>
+        <a:srgbClr val="E7E6E6"/>
+      </a:lt2>
+      <a:accent1>
+        <a:srgbClr val="4472C4"/>
+      </a:accent1>
+      <a:accent2>
+        <a:srgbClr val="ED7D31"/>
+      </a:accent2>
+      <a:accent3>
+        <a:srgbClr val="A5A5A5"/>
+      </a:accent3>
+      <a:accent4>
+        <a:srgbClr val="FFC000"/>
+      </a:accent4>
+      <a:accent5>
+        <a:srgbClr val="5B9BD5"/>
+      </a:accent5>
+      <a:accent6>
+        <a:srgbClr val="70AD47"/>
+      </a:accent6>
+      <a:hlink>
+        <a:srgbClr val="0563C1"/>
+      </a:hlink>
+      <a:folHlink>
+        <a:srgbClr val="954F72"/>
+      </a:folHlink>
+    </a:clrScheme>
+    <a:fontScheme name="Office">
+      <a:majorFont>
+        <a:latin typeface="Segoe UI Semibold"/>
+        <a:ea typeface=""/>
+        <a:cs typeface=""/>
+        <a:font script="Jpan" typeface="游ゴシック Light"/>
+        <a:font script="Hang" typeface="맑은 고딕"/>
+        <a:font script="Hans" typeface="等线 Light"/>
+        <a:font script="Hant" typeface="新細明體"/>
+        <a:font script="Arab" typeface="Times New Roman"/>
+        <a:font script="Hebr" typeface="Times New Roman"/>
+        <a:font script="Thai" typeface="Angsana New"/>
+        <a:font script="Ethi" typeface="Nyala"/>
+        <a:font script="Beng" typeface="Vrinda"/>
+        <a:font script="Gujr" typeface="Shruti"/>
+        <a:font script="Khmr" typeface="MoolBoran"/>
+        <a:font script="Knda" typeface="Tunga"/>
+        <a:font script="Guru" typeface="Raavi"/>
+        <a:font script="Cans" typeface="Euphemia"/>
+        <a:font script="Cher" typeface="Plantagenet Cherokee"/>
+        <a:font script="Yiii" typeface="Microsoft Yi Baiti"/>
+        <a:font script="Tibt" typeface="Microsoft Himalaya"/>
+        <a:font script="Thaa" typeface="MV Boli"/>
+        <a:font script="Deva" typeface="Mangal"/>
+        <a:font script="Telu" typeface="Gautami"/>
+        <a:font script="Taml" typeface="Latha"/>
+        <a:font script="Syrc" typeface="Estrangelo Edessa"/>
+        <a:font script="Orya" typeface="Kalinga"/>
+        <a:font script="Mlym" typeface="Kartika"/>
+        <a:font script="Laoo" typeface="DokChampa"/>
+        <a:font script="Sinh" typeface="Iskoola Pota"/>
+        <a:font script="Mong" typeface="Mongolian Baiti"/>
+        <a:font script="Viet" typeface="Times New Roman"/>
+        <a:font script="Uigh" typeface="Microsoft Uighur"/>
+        <a:font script="Geor" typeface="Sylfaen"/>
+      </a:majorFont>
+      <a:minorFont>
+        <a:latin typeface="Segoe UI"/>
+        <a:ea typeface=""/>
+        <a:cs typeface=""/>
+        <a:font script="Jpan" typeface="游ゴシック"/>
+        <a:font script="Hang" typeface="맑은 고딕"/>
+        <a:font script="Hans" typeface="等线"/>
+        <a:font script="Hant" typeface="新細明體"/>
+        <a:font script="Arab" typeface="Arial"/>
+        <a:font script="Hebr" typeface="Arial"/>
+        <a:font script="Thai" typeface="Cordia New"/>
+        <a:font script="Ethi" typeface="Nyala"/>
+        <a:font script="Beng" typeface="Vrinda"/>
+        <a:font script="Gujr" typeface="Shruti"/>
+        <a:font script="Khmr" typeface="DaunPenh"/>
+        <a:font script="Knda" typeface="Tunga"/>
+        <a:font script="Guru" typeface="Raavi"/>
+        <a:font script="Cans" typeface="Euphemia"/>
+        <a:font script="Cher" typeface="Plantagenet Cherokee"/>
+        <a:font script="Yiii" typeface="Microsoft Yi Baiti"/>
+        <a:font script="Tibt" typeface="Microsoft Himalaya"/>
+        <a:font script="Thaa" typeface="MV Boli"/>
+        <a:font script="Deva" typeface="Mangal"/>
+        <a:font script="Telu" typeface="Gautami"/>
+        <a:font script="Taml" typeface="Latha"/>
+        <a:font script="Syrc" typeface="Estrangelo Edessa"/>
+        <a:font script="Orya" typeface="Kalinga"/>
+        <a:font script="Mlym" typeface="Kartika"/>
+        <a:font script="Laoo" typeface="DokChampa"/>
+        <a:font script="Sinh" typeface="Iskoola Pota"/>
+        <a:font script="Mong" typeface="Mongolian Baiti"/>
+        <a:font script="Viet" typeface="Arial"/>
+        <a:font script="Uigh" typeface="Microsoft Uighur"/>
+        <a:font script="Geor" typeface="Sylfaen"/>
+      </a:minorFont>
+    </a:fontScheme>
+    <a:fmtScheme name="Office">
+      <a:fillStyleLst>
+        <a:solidFill>
+          <a:schemeClr val="phClr"/>
+        </a:solidFill>
+        <a:gradFill rotWithShape="1">
+          <a:gsLst>
+            <a:gs pos="0">
+              <a:schemeClr val="phClr">
+                <a:lumMod val="110000"/>
+                <a:satMod val="105000"/>
+                <a:tint val="67000"/>
+              </a:schemeClr>
+            </a:gs>
+            <a:gs pos="50000">
+              <a:schemeClr val="phClr">
+                <a:lumMod val="105000"/>
+                <a:satMod val="103000"/>
+                <a:tint val="73000"/>
+              </a:schemeClr>
+            </a:gs>
+            <a:gs pos="100000">
+              <a:schemeClr val="phClr">
+                <a:lumMod val="105000"/>
+                <a:satMod val="109000"/>
+                <a:tint val="81000"/>
+              </a:schemeClr>
+            </a:gs>
+          </a:gsLst>
+          <a:lin ang="5400000" scaled="0"/>
+        </a:gradFill>
+        <a:gradFill rotWithShape="1">
+          <a:gsLst>
+            <a:gs pos="0">
+              <a:schemeClr val="phClr">
+                <a:satMod val="103000"/>
+                <a:lumMod val="102000"/>
+                <a:tint val="94000"/>
+              </a:schemeClr>
+            </a:gs>
+            <a:gs pos="50000">
+              <a:schemeClr val="phClr">
+                <a:satMod val="110000"/>
+                <a:lumMod val="100000"/>
+                <a:shade val="100000"/>
+              </a:schemeClr>
+            </a:gs>
+            <a:gs pos="100000">
+              <a:schemeClr val="phClr">
+                <a:lumMod val="99000"/>
+                <a:satMod val="120000"/>
+                <a:shade val="78000"/>
+              </a:schemeClr>
+            </a:gs>
+          </a:gsLst>
+          <a:lin ang="5400000" scaled="0"/>
+        </a:gradFill>
+      </a:fillStyleLst>
+      <a:lnStyleLst>
+        <a:ln w="6350" cap="flat" cmpd="sng" algn="ctr">
+          <a:solidFill>
+            <a:schemeClr val="phClr"/>
+          </a:solidFill>
+          <a:prstDash val="solid"/>
+          <a:miter lim="800000"/>
+        </a:ln>
+        <a:ln w="12700" cap="flat" cmpd="sng" algn="ctr">
+          <a:solidFill>
+            <a:schemeClr val="phClr"/>
+          </a:solidFill>
+          <a:prstDash val="solid"/>
+          <a:miter lim="800000"/>
+        </a:ln>
+        <a:ln w="19050" cap="flat" cmpd="sng" algn="ctr">
+          <a:solidFill>
+            <a:schemeClr val="phClr"/>
+          </a:solidFill>
+          <a:prstDash val="solid"/>
+          <a:miter lim="800000"/>
+        </a:ln>
+      </a:lnStyleLst>
+      <a:effectStyleLst>
+        <a:effectStyle>
+          <a:effectLst/>
+        </a:effectStyle>
+        <a:effectStyle>
+          <a:effectLst/>
+        </a:effectStyle>
+        <a:effectStyle>
+          <a:effectLst>
+            <a:outerShdw blurRad="57150" dist="19050" dir="5400000" algn="ctr" rotWithShape="0">
+              <a:srgbClr val="000000">
+                <a:alpha val="63000"/>
+              </a:srgbClr>
+            </a:outerShdw>
+          </a:effectLst>
+        </a:effectStyle>
+      </a:effectStyleLst>
+      <a:bgFillStyleLst>
+        <a:solidFill>
+          <a:schemeClr val="phClr"/>
+        </a:solidFill>
+        <a:solidFill>
+          <a:schemeClr val="phClr">
+            <a:tint val="95000"/>
+            <a:satMod val="170000"/>
+          </a:schemeClr>
+        </a:solidFill>
+        <a:gradFill rotWithShape="1">
+          <a:gsLst>
+            <a:gs pos="0">
+              <a:schemeClr val="phClr">
+                <a:tint val="93000"/>
+                <a:satMod val="150000"/>
+                <a:shade val="98000"/>
+                <a:lumMod val="102000"/>
+              </a:schemeClr>
+            </a:gs>
+            <a:gs pos="50000">
+              <a:schemeClr val="phClr">
+                <a:tint val="98000"/>
+                <a:satMod val="130000"/>
+                <a:shade val="90000"/>
+                <a:lumMod val="103000"/>
+              </a:schemeClr>
+            </a:gs>
+            <a:gs pos="100000">
+              <a:schemeClr val="phClr">
+                <a:shade val="63000"/>
+                <a:satMod val="120000"/>
+              </a:schemeClr>
+            </a:gs>
+          </a:gsLst>
+          <a:lin ang="5400000" scaled="0"/>
+        </a:gradFill>
+      </a:bgFillStyleLst>
+    </a:fmtScheme>
+  </a:themeElements>
   <a:extLst>
     <a:ext uri="{05A4C25C-085E-4340-85A3-A5531E510DB2}">
       <thm15:themeFamily xmlns:thm15="http://schemas.microsoft.com/office/thememl/2012/main" name="Office Theme" id="{62F939B6-93AF-4DB8-9C6B-D6C7DFDC589F}" vid="{4A3C46E8-61CC-4603-A589-7422A47A8E4A}"/>

--- a/deliverables/REOAGMS-Team-Presentation.pptx
+++ b/deliverables/REOAGMS-Team-Presentation.pptx
@@ -1,24 +1,24 @@
 
 <file path=ppt/presentation.xml><?xml version="1.0" encoding="utf-8"?>
-<p:presentation xmlns:a="http://schemas.openxmlformats.org/drawingml/2006/main" xmlns:r="http://schemas.openxmlformats.org/officeDocument/2006/relationships" xmlns:p="http://schemas.openxmlformats.org/presentationml/2006/main" autoCompressPictures="0">
+<p:presentation xmlns:a="http://schemas.openxmlformats.org/drawingml/2006/main" xmlns:r="http://schemas.openxmlformats.org/officeDocument/2006/relationships" xmlns:p="http://schemas.openxmlformats.org/presentationml/2006/main" saveSubsetFonts="1" autoCompressPictures="0">
   <p:sldMasterIdLst>
     <p:sldMasterId id="2147483648" r:id="rId1"/>
   </p:sldMasterIdLst>
+  <p:sldIdLst>
+    <p:sldId id="256" r:id="rId2"/>
+    <p:sldId id="257" r:id="rId3"/>
+    <p:sldId id="258" r:id="rId4"/>
+    <p:sldId id="259" r:id="rId5"/>
+    <p:sldId id="260" r:id="rId6"/>
+    <p:sldId id="261" r:id="rId7"/>
+    <p:sldId id="262" r:id="rId8"/>
+    <p:sldId id="263" r:id="rId9"/>
+    <p:sldId id="264" r:id="rId10"/>
+    <p:sldId id="265" r:id="rId11"/>
+  </p:sldIdLst>
   <p:notesMasterIdLst>
-    <p:notesMasterId r:id="rId4"/>
+    <p:notesMasterId r:id="rId12"/>
   </p:notesMasterIdLst>
-  <p:sldIdLst>
-    <p:sldId id="256" r:id="rId3"/>
-    <p:sldId id="257" r:id="rId5"/>
-    <p:sldId id="258" r:id="rId6"/>
-    <p:sldId id="259" r:id="rId7"/>
-    <p:sldId id="260" r:id="rId8"/>
-    <p:sldId id="261" r:id="rId9"/>
-    <p:sldId id="262" r:id="rId10"/>
-    <p:sldId id="263" r:id="rId11"/>
-    <p:sldId id="264" r:id="rId12"/>
-    <p:sldId id="265" r:id="rId13"/>
-  </p:sldIdLst>
   <p:sldSz cx="9144000" cy="5143500"/>
   <p:notesSz cx="5143500" cy="9144000"/>
   <p:defaultTextStyle>
@@ -198,6 +198,7 @@
           <a:p>
             <a:fld id="{5282F153-3F37-0F45-9E97-73ACFA13230C}" type="datetimeFigureOut">
               <a:rPr lang="en-US"/>
+              <a:t>7/23/19</a:t>
             </a:fld>
             <a:endParaRPr lang="en-US"/>
           </a:p>
@@ -264,7 +265,6 @@
               <a:rPr lang="en-US"/>
               <a:t>Click to edit Master text styles</a:t>
             </a:r>
-            <a:endParaRPr lang="en-US"/>
           </a:p>
           <a:p>
             <a:pPr lvl="1"/>
@@ -272,7 +272,6 @@
               <a:rPr lang="en-US"/>
               <a:t>Second level</a:t>
             </a:r>
-            <a:endParaRPr lang="en-US"/>
           </a:p>
           <a:p>
             <a:pPr lvl="2"/>
@@ -280,7 +279,6 @@
               <a:rPr lang="en-US"/>
               <a:t>Third level</a:t>
             </a:r>
-            <a:endParaRPr lang="en-US"/>
           </a:p>
           <a:p>
             <a:pPr lvl="3"/>
@@ -288,7 +286,6 @@
               <a:rPr lang="en-US"/>
               <a:t>Fourth level</a:t>
             </a:r>
-            <a:endParaRPr lang="en-US"/>
           </a:p>
           <a:p>
             <a:pPr lvl="4"/>
@@ -296,7 +293,6 @@
               <a:rPr lang="en-US"/>
               <a:t>Fifth level</a:t>
             </a:r>
-            <a:endParaRPr lang="en-US"/>
           </a:p>
         </p:txBody>
       </p:sp>
@@ -360,12 +356,18 @@
           <a:p>
             <a:fld id="{CE5E9CC1-C706-0F49-92D6-E571CC5EEA8F}" type="slidenum">
               <a:rPr lang="en-US"/>
+              <a:t>‹#›</a:t>
             </a:fld>
             <a:endParaRPr lang="en-US"/>
           </a:p>
         </p:txBody>
       </p:sp>
     </p:spTree>
+    <p:extLst>
+      <p:ext uri="{BB962C8B-B14F-4D97-AF65-F5344CB8AC3E}">
+        <p14:creationId xmlns:p14="http://schemas.microsoft.com/office/powerpoint/2010/main" val="1024086991"/>
+      </p:ext>
+    </p:extLst>
   </p:cSld>
   <p:clrMap bg1="lt1" tx1="dk1" bg2="lt2" tx2="dk2" accent1="accent1" accent2="accent2" accent3="accent3" accent4="accent4" accent5="accent5" accent6="accent6" hlink="hlink" folHlink="folHlink"/>
   <p:notesStyle>
@@ -509,7 +511,7 @@
           <a:p>
             <a:r>
               <a:rPr lang="en-US" dirty="0"/>
-              <a:t>Charith (0:00–0:08): Good morning. We are presenting REOAGMS, a platform that monitors and maintains renewable energy assets in real time.</a:t>
+              <a:t>Charith (0:00–0:15): Good morning, everyone. We are Group 9, and we are presenting REOAGMS, the Renewable Energy Operations, Asset and Grid Management System. It monitors and maintains renewable energy assets in real time.</a:t>
             </a:r>
             <a:endParaRPr lang="en-US" dirty="0"/>
           </a:p>
@@ -532,12 +534,18 @@
           <a:p>
             <a:fld id="{F7021451-1387-4CA6-816F-3879F97B5CBC}" type="slidenum">
               <a:rPr lang="en-US"/>
+              <a:t>1</a:t>
             </a:fld>
             <a:endParaRPr lang="en-US"/>
           </a:p>
         </p:txBody>
       </p:sp>
     </p:spTree>
+    <p:extLst>
+      <p:ext uri="{BB962C8B-B14F-4D97-AF65-F5344CB8AC3E}">
+        <p14:creationId xmlns:p14="http://schemas.microsoft.com/office/powerpoint/2010/main" val="1024086991"/>
+      </p:ext>
+    </p:extLst>
   </p:cSld>
   <p:clrMapOvr>
     <a:masterClrMapping/>
@@ -591,7 +599,7 @@
           <a:p>
             <a:r>
               <a:rPr lang="en-US" dirty="0"/>
-              <a:t>All members (4:54–5:00): Thank you. We are happy to take your questions.</a:t>
+              <a:t>All members (9:48–10:00): Thank you very much. We are happy to take your questions.</a:t>
             </a:r>
             <a:endParaRPr lang="en-US" dirty="0"/>
           </a:p>
@@ -614,12 +622,18 @@
           <a:p>
             <a:fld id="{F7021451-1387-4CA6-816F-3879F97B5CBC}" type="slidenum">
               <a:rPr lang="en-US"/>
+              <a:t>10</a:t>
             </a:fld>
             <a:endParaRPr lang="en-US"/>
           </a:p>
         </p:txBody>
       </p:sp>
     </p:spTree>
+    <p:extLst>
+      <p:ext uri="{BB962C8B-B14F-4D97-AF65-F5344CB8AC3E}">
+        <p14:creationId xmlns:p14="http://schemas.microsoft.com/office/powerpoint/2010/main" val="1024086991"/>
+      </p:ext>
+    </p:extLst>
   </p:cSld>
   <p:clrMapOvr>
     <a:masterClrMapping/>
@@ -673,7 +687,7 @@
           <a:p>
             <a:r>
               <a:rPr lang="en-US" dirty="0"/>
-              <a:t>Charith (0:08–0:33): REOAGMS is six Spring Boot microservices behind one API gateway, connected by RabbitMQ events, each with its own PostgreSQL database. I sign in as the administrator, and this is the control room with live data. Nemal will show where it comes from.</a:t>
+              <a:t>Charith (0:15–1:13): REOAGMS is six Spring Boot microservices behind one API gateway: identity, asset, monitoring, maintenance, notification and analytics. Each service owns its own PostgreSQL database and never reads another's, and they talk to each other through RabbitMQ events. The React console reaches everything through the gateway, which checks the token and the role on every request. I sign in as the administrator, and this is the control room: live generation, open alerts, device health and an hourly energy curve, all coming from real data in the databases. Nemal will show where that data comes from.</a:t>
             </a:r>
             <a:endParaRPr lang="en-US" dirty="0"/>
           </a:p>
@@ -696,12 +710,18 @@
           <a:p>
             <a:fld id="{F7021451-1387-4CA6-816F-3879F97B5CBC}" type="slidenum">
               <a:rPr lang="en-US"/>
+              <a:t>2</a:t>
             </a:fld>
             <a:endParaRPr lang="en-US"/>
           </a:p>
         </p:txBody>
       </p:sp>
     </p:spTree>
+    <p:extLst>
+      <p:ext uri="{BB962C8B-B14F-4D97-AF65-F5344CB8AC3E}">
+        <p14:creationId xmlns:p14="http://schemas.microsoft.com/office/powerpoint/2010/main" val="1024086991"/>
+      </p:ext>
+    </p:extLst>
   </p:cSld>
   <p:clrMapOvr>
     <a:masterClrMapping/>
@@ -755,7 +775,7 @@
           <a:p>
             <a:r>
               <a:rPr lang="en-US" dirty="0"/>
-              <a:t>Nemal (0:33–1:00): Thank you, Charith. The Asset Service owns the registry: five facilities, eleven assets and thirty-two sensors. Lists are searched and paged on the server, and every form is validated, so a blank name is rejected. Govindu will show these assets producing live data.</a:t>
+              <a:t>Nemal (1:13–2:08): Thank you, Charith. The Asset Service owns the registry of everything we monitor. As you can see, there are five facilities, eleven assets and thirty-two sensors, covering solar, wind, hydro, battery storage and tidal. I switch between the facility, asset and sensor tabs, and search runs on the server with paging, so lists stay fast. Now I open the add form and leave the name blank: the form rejects it, because every input is validated. Other services refer to these assets only by ID. Govindu will now show these assets producing live data.</a:t>
             </a:r>
             <a:endParaRPr lang="en-US" dirty="0"/>
           </a:p>
@@ -778,12 +798,18 @@
           <a:p>
             <a:fld id="{F7021451-1387-4CA6-816F-3879F97B5CBC}" type="slidenum">
               <a:rPr lang="en-US"/>
+              <a:t>3</a:t>
             </a:fld>
             <a:endParaRPr lang="en-US"/>
           </a:p>
         </p:txBody>
       </p:sp>
     </p:spTree>
+    <p:extLst>
+      <p:ext uri="{BB962C8B-B14F-4D97-AF65-F5344CB8AC3E}">
+        <p14:creationId xmlns:p14="http://schemas.microsoft.com/office/powerpoint/2010/main" val="1024086991"/>
+      </p:ext>
+    </p:extLst>
   </p:cSld>
   <p:clrMapOvr>
     <a:masterClrMapping/>
@@ -837,7 +863,7 @@
           <a:p>
             <a:r>
               <a:rPr lang="en-US" dirty="0"/>
-              <a:t>Govindu (1:00–1:49): Thanks, Nemal. The Monitoring Service receives a reading from every sensor and checks it against our alert rules. This tile is a live sensor and the dashed line is its threshold. The simulator has just injected a fault, and here is the alert, instantly. One alert is stored, one event goes to RabbitMQ, and the browser is updated over WebSocket. That same event is now reaching Thurunu.</a:t>
+              <a:t>Govindu (2:08–3:46): Thanks, Nemal. The Monitoring Service receives a reading from every sensor every few seconds and keeps the history: more than sixteen thousand readings are already stored. On the live monitoring page each tile is a real sensor, and the dashed line is its alert threshold. Every reading is checked against our seven alert rules. The simulator has just injected a fault, and here is the toast, instantly. On the Alerts page you can see the alert with its severity, the asset and the value that broke the threshold. Behind this, one alert is stored, and we keep only one open alert per rule and asset, so operators are never flooded. One event is published to RabbitMQ, and the Notification Service pushes it to this browser over WebSocket. The dashboard totals are cached in Redis for ten seconds, and if Redis ever stops, PostgreSQL answers instead. That same event is now reaching Thurunu's service.</a:t>
             </a:r>
             <a:endParaRPr lang="en-US" dirty="0"/>
           </a:p>
@@ -860,12 +886,18 @@
           <a:p>
             <a:fld id="{F7021451-1387-4CA6-816F-3879F97B5CBC}" type="slidenum">
               <a:rPr lang="en-US"/>
+              <a:t>4</a:t>
             </a:fld>
             <a:endParaRPr lang="en-US"/>
           </a:p>
         </p:txBody>
       </p:sp>
     </p:spTree>
+    <p:extLst>
+      <p:ext uri="{BB962C8B-B14F-4D97-AF65-F5344CB8AC3E}">
+        <p14:creationId xmlns:p14="http://schemas.microsoft.com/office/powerpoint/2010/main" val="1024086991"/>
+      </p:ext>
+    </p:extLst>
   </p:cSld>
   <p:clrMapOvr>
     <a:masterClrMapping/>
@@ -919,7 +951,7 @@
           <a:p>
             <a:r>
               <a:rPr lang="en-US" dirty="0"/>
-              <a:t>Thurunu (1:49–2:38): Yes. The Maintenance Service received the same event and, because the severity is high, it opened a corrective work order by itself. Here it is on the board. I assign a technician, start the work and complete it. Each step is its own endpoint, and the finished job is saved to the maintenance history. Yasiru will show how people are informed.</a:t>
+              <a:t>Thurunu (3:46–5:24): Yes. The Maintenance Service listens on its own RabbitMQ queue, received the same event and, because the severity is high, it opened a corrective work order by itself, with no one clicking anything. Here it is on the board, in the Created column. It stores the alert ID, so a repeated message never creates a duplicate, and it keeps one active corrective order per asset. Now I assign one of our four technicians. The card moves to Assigned. I start the work, and it moves to In progress. Then I complete it. Each step is its own endpoint, and the finished job is written to the maintenance history for that asset. So a fault becomes tracked, auditable work from the first reading to the last repair. Yasiru will show how people are informed.</a:t>
             </a:r>
             <a:endParaRPr lang="en-US" dirty="0"/>
           </a:p>
@@ -942,12 +974,18 @@
           <a:p>
             <a:fld id="{F7021451-1387-4CA6-816F-3879F97B5CBC}" type="slidenum">
               <a:rPr lang="en-US"/>
+              <a:t>5</a:t>
             </a:fld>
             <a:endParaRPr lang="en-US"/>
           </a:p>
         </p:txBody>
       </p:sp>
     </p:spTree>
+    <p:extLst>
+      <p:ext uri="{BB962C8B-B14F-4D97-AF65-F5344CB8AC3E}">
+        <p14:creationId xmlns:p14="http://schemas.microsoft.com/office/powerpoint/2010/main" val="1024086991"/>
+      </p:ext>
+    </p:extLst>
   </p:cSld>
   <p:clrMapOvr>
     <a:masterClrMapping/>
@@ -1001,7 +1039,7 @@
           <a:p>
             <a:r>
               <a:rPr lang="en-US" dirty="0"/>
-              <a:t>Yasiru (2:38–3:27): The Notification Service read the same alert from its own RabbitMQ queue. In this history, the in-app push was delivered instantly, and every email attempt is stored with its status, retry count and reason. A scheduler retries up to three times, I can retry any message here, and failing messages go to a dead-letter queue, so nothing is lost. Sachinthana will turn all this into reports.</a:t>
+              <a:t>Yasiru (5:24–7:02): The Notification Service read the same alert from its own durable RabbitMQ queue, so it never depends on the Monitoring Service being online. The consumer checks the event schema, then sends the message on each channel. In this history, the in-app push shows as delivered, and it reached this browser instantly. Every email attempt is stored with its status, its retry count and the reason, so nothing is hidden. If delivery fails, a scheduler retries up to three times, sixty seconds apart, and I can also retry any message from this page. Messages that keep failing go to a dead-letter queue, so no alert is ever lost. Email settings come from environment variables, so no credentials are in the code. Sachinthana will now turn all this data into reports.</a:t>
             </a:r>
             <a:endParaRPr lang="en-US" dirty="0"/>
           </a:p>
@@ -1024,12 +1062,18 @@
           <a:p>
             <a:fld id="{F7021451-1387-4CA6-816F-3879F97B5CBC}" type="slidenum">
               <a:rPr lang="en-US"/>
+              <a:t>6</a:t>
             </a:fld>
             <a:endParaRPr lang="en-US"/>
           </a:p>
         </p:txBody>
       </p:sp>
     </p:spTree>
+    <p:extLst>
+      <p:ext uri="{BB962C8B-B14F-4D97-AF65-F5344CB8AC3E}">
+        <p14:creationId xmlns:p14="http://schemas.microsoft.com/office/powerpoint/2010/main" val="1024086991"/>
+      </p:ext>
+    </p:extLst>
   </p:cSld>
   <p:clrMapOvr>
     <a:masterClrMapping/>
@@ -1083,7 +1127,7 @@
           <a:p>
             <a:r>
               <a:rPr lang="en-US" dirty="0"/>
-              <a:t>Sachinthana (3:27–4:16): The Analytics Service calls the other services over REST and never touches their databases. For this facility it integrates average power into kilowatt-hours for each hour, and calculates availability, efficiency and capacity factor. I generate an energy report for the last day and export it as CSV for management. Nemal will show who is allowed to see it.</a:t>
+              <a:t>Sachinthana (7:02–8:40): The Analytics Service calls the other services over REST and never touches their databases. For this facility, I pick it from the selector, and the chart shows hourly energy. Our figures are true kilowatt-hours: the service takes average power for each hour and integrates it over time. It also calculates availability, efficiency, capacity factor and utilisation, and compares the energy with what the rated capacity should have produced. Now I generate an energy report for the last day. It is stored, and I export it as CSV for management. We also keep six KPIs with targets, dashboards and performance reports. Executives see all of this read-only, and Nemal will show exactly who is allowed to see what.</a:t>
             </a:r>
             <a:endParaRPr lang="en-US" dirty="0"/>
           </a:p>
@@ -1106,12 +1150,18 @@
           <a:p>
             <a:fld id="{F7021451-1387-4CA6-816F-3879F97B5CBC}" type="slidenum">
               <a:rPr lang="en-US"/>
+              <a:t>7</a:t>
             </a:fld>
             <a:endParaRPr lang="en-US"/>
           </a:p>
         </p:txBody>
       </p:sp>
     </p:spTree>
+    <p:extLst>
+      <p:ext uri="{BB962C8B-B14F-4D97-AF65-F5344CB8AC3E}">
+        <p14:creationId xmlns:p14="http://schemas.microsoft.com/office/powerpoint/2010/main" val="1024086991"/>
+      </p:ext>
+    </p:extLst>
   </p:cSld>
   <p:clrMapOvr>
     <a:masterClrMapping/>
@@ -1165,7 +1215,7 @@
           <a:p>
             <a:r>
               <a:rPr lang="en-US" dirty="0"/>
-              <a:t>Nemal (4:16–4:38): Access is enforced at the gateway, and five roles carry different rights. I sign in as the executive: there are no action buttons, and the API itself refuses any write. Charith will close.</a:t>
+              <a:t>Nemal (8:40–9:23): Access is enforced at the gateway, and five roles carry different rights, as listed on this slide. I sign out and sign in as the executive. Every page is visible, but there are no action buttons, and the API itself returns forbidden for any write. Now the operator: it can handle alerts, but cannot create a facility. Passwords are stored as BCrypt hashes, and every login and user change is written to the audit log, which the administrator can review. Charith will close.</a:t>
             </a:r>
             <a:endParaRPr lang="en-US" dirty="0"/>
           </a:p>
@@ -1188,12 +1238,18 @@
           <a:p>
             <a:fld id="{F7021451-1387-4CA6-816F-3879F97B5CBC}" type="slidenum">
               <a:rPr lang="en-US"/>
+              <a:t>8</a:t>
             </a:fld>
             <a:endParaRPr lang="en-US"/>
           </a:p>
         </p:txBody>
       </p:sp>
     </p:spTree>
+    <p:extLst>
+      <p:ext uri="{BB962C8B-B14F-4D97-AF65-F5344CB8AC3E}">
+        <p14:creationId xmlns:p14="http://schemas.microsoft.com/office/powerpoint/2010/main" val="1024086991"/>
+      </p:ext>
+    </p:extLst>
   </p:cSld>
   <p:clrMapOvr>
     <a:masterClrMapping/>
@@ -1247,7 +1303,7 @@
           <a:p>
             <a:r>
               <a:rPr lang="en-US" dirty="0"/>
-              <a:t>Charith (4:38–4:54): Grafana shows platform health from Prometheus across all seven services. Sixty tests protect the services, and one docker compose command starts everything.</a:t>
+              <a:t>Charith (9:23–9:48): Finally, operations. Grafana shows platform health from Prometheus, which scrapes all seven services. Sixty test methods protect the services, validation and error handling are built into every one of them, and one docker compose command starts all nineteen containers.</a:t>
             </a:r>
             <a:endParaRPr lang="en-US" dirty="0"/>
           </a:p>
@@ -1270,12 +1326,18 @@
           <a:p>
             <a:fld id="{F7021451-1387-4CA6-816F-3879F97B5CBC}" type="slidenum">
               <a:rPr lang="en-US"/>
+              <a:t>9</a:t>
             </a:fld>
             <a:endParaRPr lang="en-US"/>
           </a:p>
         </p:txBody>
       </p:sp>
     </p:spTree>
+    <p:extLst>
+      <p:ext uri="{BB962C8B-B14F-4D97-AF65-F5344CB8AC3E}">
+        <p14:creationId xmlns:p14="http://schemas.microsoft.com/office/powerpoint/2010/main" val="1024086991"/>
+      </p:ext>
+    </p:extLst>
   </p:cSld>
   <p:clrMapOvr>
     <a:masterClrMapping/>
@@ -1316,11 +1378,6 @@
 <file path=ppt/slideMasters/slideMaster1.xml><?xml version="1.0" encoding="utf-8"?>
 <p:sldMaster xmlns:a="http://schemas.openxmlformats.org/drawingml/2006/main" xmlns:r="http://schemas.openxmlformats.org/officeDocument/2006/relationships" xmlns:p="http://schemas.openxmlformats.org/presentationml/2006/main">
   <p:cSld>
-    <p:bg>
-      <p:bgRef idx="1001">
-        <a:schemeClr val="bg1"/>
-      </p:bgRef>
-    </p:bg>
     <p:spTree>
       <p:nvGrpSpPr>
         <p:cNvPr id="1" name=""/>
@@ -1364,7 +1421,7 @@
         <a:spcBef>
           <a:spcPct val="20000"/>
         </a:spcBef>
-        <a:buFont typeface="Arial" panose="020B0604020202020204" pitchFamily="34" charset="0"/>
+        <a:buFont typeface="Arial" pitchFamily="34" charset="0"/>
         <a:buChar char="•"/>
         <a:defRPr sz="3200" kern="1200">
           <a:solidFill>
@@ -1379,7 +1436,7 @@
         <a:spcBef>
           <a:spcPct val="20000"/>
         </a:spcBef>
-        <a:buFont typeface="Arial" panose="020B0604020202020204" pitchFamily="34" charset="0"/>
+        <a:buFont typeface="Arial" pitchFamily="34" charset="0"/>
         <a:buChar char="–"/>
         <a:defRPr sz="2800" kern="1200">
           <a:solidFill>
@@ -1394,7 +1451,7 @@
         <a:spcBef>
           <a:spcPct val="20000"/>
         </a:spcBef>
-        <a:buFont typeface="Arial" panose="020B0604020202020204" pitchFamily="34" charset="0"/>
+        <a:buFont typeface="Arial" pitchFamily="34" charset="0"/>
         <a:buChar char="•"/>
         <a:defRPr sz="2400" kern="1200">
           <a:solidFill>
@@ -1409,7 +1466,7 @@
         <a:spcBef>
           <a:spcPct val="20000"/>
         </a:spcBef>
-        <a:buFont typeface="Arial" panose="020B0604020202020204" pitchFamily="34" charset="0"/>
+        <a:buFont typeface="Arial" pitchFamily="34" charset="0"/>
         <a:buChar char="–"/>
         <a:defRPr sz="2000" kern="1200">
           <a:solidFill>
@@ -1424,7 +1481,7 @@
         <a:spcBef>
           <a:spcPct val="20000"/>
         </a:spcBef>
-        <a:buFont typeface="Arial" panose="020B0604020202020204" pitchFamily="34" charset="0"/>
+        <a:buFont typeface="Arial" pitchFamily="34" charset="0"/>
         <a:buChar char="»"/>
         <a:defRPr sz="2000" kern="1200">
           <a:solidFill>
@@ -1439,7 +1496,7 @@
         <a:spcBef>
           <a:spcPct val="20000"/>
         </a:spcBef>
-        <a:buFont typeface="Arial" panose="020B0604020202020204" pitchFamily="34" charset="0"/>
+        <a:buFont typeface="Arial" pitchFamily="34" charset="0"/>
         <a:buChar char="•"/>
         <a:defRPr sz="2000" kern="1200">
           <a:solidFill>
@@ -1454,7 +1511,7 @@
         <a:spcBef>
           <a:spcPct val="20000"/>
         </a:spcBef>
-        <a:buFont typeface="Arial" panose="020B0604020202020204" pitchFamily="34" charset="0"/>
+        <a:buFont typeface="Arial" pitchFamily="34" charset="0"/>
         <a:buChar char="•"/>
         <a:defRPr sz="2000" kern="1200">
           <a:solidFill>
@@ -1469,7 +1526,7 @@
         <a:spcBef>
           <a:spcPct val="20000"/>
         </a:spcBef>
-        <a:buFont typeface="Arial" panose="020B0604020202020204" pitchFamily="34" charset="0"/>
+        <a:buFont typeface="Arial" pitchFamily="34" charset="0"/>
         <a:buChar char="•"/>
         <a:defRPr sz="2000" kern="1200">
           <a:solidFill>
@@ -1484,7 +1541,7 @@
         <a:spcBef>
           <a:spcPct val="20000"/>
         </a:spcBef>
-        <a:buFont typeface="Arial" panose="020B0604020202020204" pitchFamily="34" charset="0"/>
+        <a:buFont typeface="Arial" pitchFamily="34" charset="0"/>
         <a:buChar char="•"/>
         <a:defRPr sz="2000" kern="1200">
           <a:solidFill>
@@ -1597,13 +1654,12 @@
 
 <file path=ppt/slides/slide1.xml><?xml version="1.0" encoding="utf-8"?>
 <p:sld xmlns:a="http://schemas.openxmlformats.org/drawingml/2006/main" xmlns:r="http://schemas.openxmlformats.org/officeDocument/2006/relationships" xmlns:p="http://schemas.openxmlformats.org/presentationml/2006/main">
-  <p:cSld>
+  <p:cSld name="Slide 1">
     <p:bg>
       <p:bgPr>
         <a:solidFill>
           <a:srgbClr val="0B1220"/>
         </a:solidFill>
-        <a:effectLst/>
       </p:bgPr>
     </p:bg>
     <p:spTree>
@@ -1701,22 +1757,23 @@
             <a:avLst/>
           </a:prstGeom>
           <a:noFill/>
-        </p:spPr>
-        <p:txBody>
-          <a:bodyPr wrap="square" lIns="0" tIns="0" rIns="0" bIns="0" rtlCol="0" anchor="ctr"/>
-          <a:lstStyle/>
-          <a:p>
-            <a:pPr marL="0" indent="0">
-              <a:buNone/>
-            </a:pPr>
-            <a:r>
-              <a:rPr lang="en-US" sz="1200" kern="0" spc="500" dirty="0">
+          <a:ln/>
+        </p:spPr>
+        <p:txBody>
+          <a:bodyPr wrap="square" lIns="0" tIns="0" rIns="0" bIns="0" rtlCol="0" anchor="ctr"/>
+          <a:lstStyle/>
+          <a:p>
+            <a:pPr indent="0" marL="0">
+              <a:buNone/>
+            </a:pPr>
+            <a:r>
+              <a:rPr lang="en-US" sz="1200" spc="500" kern="0" dirty="0">
                 <a:solidFill>
                   <a:srgbClr val="22D3EE"/>
                 </a:solidFill>
-                <a:latin typeface="Segoe UI Semibold" panose="020B0702040204020203" pitchFamily="34" charset="0"/>
-                <a:ea typeface="Segoe UI Semibold" panose="020B0702040204020203" pitchFamily="34" charset="-122"/>
-                <a:cs typeface="Segoe UI Semibold" panose="020B0702040204020203" pitchFamily="34" charset="-120"/>
+                <a:latin typeface="Segoe UI Semibold" pitchFamily="34" charset="0"/>
+                <a:ea typeface="Segoe UI Semibold" pitchFamily="34" charset="-122"/>
+                <a:cs typeface="Segoe UI Semibold" pitchFamily="34" charset="-120"/>
               </a:rPr>
               <a:t>GROUP 9  ·  EC8208  ·  SOFTWARE ARCHITECTURE</a:t>
             </a:r>
@@ -1739,12 +1796,13 @@
             <a:avLst/>
           </a:prstGeom>
           <a:noFill/>
-        </p:spPr>
-        <p:txBody>
-          <a:bodyPr wrap="square" lIns="0" tIns="0" rIns="0" bIns="0" rtlCol="0" anchor="ctr"/>
-          <a:lstStyle/>
-          <a:p>
-            <a:pPr marL="0" indent="0">
+          <a:ln/>
+        </p:spPr>
+        <p:txBody>
+          <a:bodyPr wrap="square" lIns="0" tIns="0" rIns="0" bIns="0" rtlCol="0" anchor="ctr"/>
+          <a:lstStyle/>
+          <a:p>
+            <a:pPr indent="0" marL="0">
               <a:buNone/>
             </a:pPr>
             <a:r>
@@ -1752,9 +1810,9 @@
                 <a:solidFill>
                   <a:srgbClr val="F1F5FB"/>
                 </a:solidFill>
-                <a:latin typeface="Segoe UI Semibold" panose="020B0702040204020203" pitchFamily="34" charset="0"/>
-                <a:ea typeface="Segoe UI Semibold" panose="020B0702040204020203" pitchFamily="34" charset="-122"/>
-                <a:cs typeface="Segoe UI Semibold" panose="020B0702040204020203" pitchFamily="34" charset="-120"/>
+                <a:latin typeface="Segoe UI Semibold" pitchFamily="34" charset="0"/>
+                <a:ea typeface="Segoe UI Semibold" pitchFamily="34" charset="-122"/>
+                <a:cs typeface="Segoe UI Semibold" pitchFamily="34" charset="-120"/>
               </a:rPr>
               <a:t>REOAGMS</a:t>
             </a:r>
@@ -1777,12 +1835,13 @@
             <a:avLst/>
           </a:prstGeom>
           <a:noFill/>
-        </p:spPr>
-        <p:txBody>
-          <a:bodyPr wrap="square" lIns="0" tIns="0" rIns="0" bIns="0" rtlCol="0" anchor="ctr"/>
-          <a:lstStyle/>
-          <a:p>
-            <a:pPr marL="0" indent="0">
+          <a:ln/>
+        </p:spPr>
+        <p:txBody>
+          <a:bodyPr wrap="square" lIns="0" tIns="0" rIns="0" bIns="0" rtlCol="0" anchor="ctr"/>
+          <a:lstStyle/>
+          <a:p>
+            <a:pPr indent="0" marL="0">
               <a:buNone/>
             </a:pPr>
             <a:r>
@@ -1790,9 +1849,9 @@
                 <a:solidFill>
                   <a:srgbClr val="8C9BB8"/>
                 </a:solidFill>
-                <a:latin typeface="Segoe UI" panose="020B0502040204020203" pitchFamily="34" charset="0"/>
-                <a:ea typeface="Segoe UI" panose="020B0502040204020203" pitchFamily="34" charset="-122"/>
-                <a:cs typeface="Segoe UI" panose="020B0502040204020203" pitchFamily="34" charset="-120"/>
+                <a:latin typeface="Segoe UI" pitchFamily="34" charset="0"/>
+                <a:ea typeface="Segoe UI" pitchFamily="34" charset="-122"/>
+                <a:cs typeface="Segoe UI" pitchFamily="34" charset="-120"/>
               </a:rPr>
               <a:t>Renewable Energy Operations, Asset and Grid Management System</a:t>
             </a:r>
@@ -1815,12 +1874,13 @@
             <a:avLst/>
           </a:prstGeom>
           <a:noFill/>
-        </p:spPr>
-        <p:txBody>
-          <a:bodyPr wrap="square" lIns="0" tIns="0" rIns="0" bIns="0" rtlCol="0" anchor="ctr"/>
-          <a:lstStyle/>
-          <a:p>
-            <a:pPr marL="0" indent="0">
+          <a:ln/>
+        </p:spPr>
+        <p:txBody>
+          <a:bodyPr wrap="square" lIns="0" tIns="0" rIns="0" bIns="0" rtlCol="0" anchor="ctr"/>
+          <a:lstStyle/>
+          <a:p>
+            <a:pPr indent="0" marL="0">
               <a:buNone/>
             </a:pPr>
             <a:r>
@@ -1828,20 +1888,23 @@
                 <a:solidFill>
                   <a:srgbClr val="22D3EE"/>
                 </a:solidFill>
-                <a:latin typeface="Segoe UI" panose="020B0502040204020203" pitchFamily="34" charset="0"/>
-                <a:ea typeface="Segoe UI" panose="020B0502040204020203" pitchFamily="34" charset="-122"/>
-                <a:cs typeface="Segoe UI" panose="020B0502040204020203" pitchFamily="34" charset="-120"/>
+                <a:latin typeface="Segoe UI" pitchFamily="34" charset="0"/>
+                <a:ea typeface="Segoe UI" pitchFamily="34" charset="-122"/>
+                <a:cs typeface="Segoe UI" pitchFamily="34" charset="-120"/>
               </a:rPr>
               <a:t>EG/2021/4707   </a:t>
             </a:r>
+            <a:pPr indent="0" marL="0">
+              <a:buNone/>
+            </a:pPr>
             <a:r>
               <a:rPr lang="en-US" sz="1300" b="1" dirty="0">
                 <a:solidFill>
                   <a:srgbClr val="F1F5FB"/>
                 </a:solidFill>
-                <a:latin typeface="Segoe UI" panose="020B0502040204020203" pitchFamily="34" charset="0"/>
-                <a:ea typeface="Segoe UI" panose="020B0502040204020203" pitchFamily="34" charset="-122"/>
-                <a:cs typeface="Segoe UI" panose="020B0502040204020203" pitchFamily="34" charset="-120"/>
+                <a:latin typeface="Segoe UI" pitchFamily="34" charset="0"/>
+                <a:ea typeface="Segoe UI" pitchFamily="34" charset="-122"/>
+                <a:cs typeface="Segoe UI" pitchFamily="34" charset="-120"/>
               </a:rPr>
               <a:t>Perera G C M</a:t>
             </a:r>
@@ -1864,12 +1927,13 @@
             <a:avLst/>
           </a:prstGeom>
           <a:noFill/>
-        </p:spPr>
-        <p:txBody>
-          <a:bodyPr wrap="square" lIns="0" tIns="0" rIns="0" bIns="0" rtlCol="0" anchor="ctr"/>
-          <a:lstStyle/>
-          <a:p>
-            <a:pPr marL="0" indent="0">
+          <a:ln/>
+        </p:spPr>
+        <p:txBody>
+          <a:bodyPr wrap="square" lIns="0" tIns="0" rIns="0" bIns="0" rtlCol="0" anchor="ctr"/>
+          <a:lstStyle/>
+          <a:p>
+            <a:pPr indent="0" marL="0">
               <a:buNone/>
             </a:pPr>
             <a:r>
@@ -1877,20 +1941,23 @@
                 <a:solidFill>
                   <a:srgbClr val="22D3EE"/>
                 </a:solidFill>
-                <a:latin typeface="Segoe UI" panose="020B0502040204020203" pitchFamily="34" charset="0"/>
-                <a:ea typeface="Segoe UI" panose="020B0502040204020203" pitchFamily="34" charset="-122"/>
-                <a:cs typeface="Segoe UI" panose="020B0502040204020203" pitchFamily="34" charset="-120"/>
+                <a:latin typeface="Segoe UI" pitchFamily="34" charset="0"/>
+                <a:ea typeface="Segoe UI" pitchFamily="34" charset="-122"/>
+                <a:cs typeface="Segoe UI" pitchFamily="34" charset="-120"/>
               </a:rPr>
               <a:t>EG/2021/4620   </a:t>
             </a:r>
+            <a:pPr indent="0" marL="0">
+              <a:buNone/>
+            </a:pPr>
             <a:r>
               <a:rPr lang="en-US" sz="1300" b="1" dirty="0">
                 <a:solidFill>
                   <a:srgbClr val="F1F5FB"/>
                 </a:solidFill>
-                <a:latin typeface="Segoe UI" panose="020B0502040204020203" pitchFamily="34" charset="0"/>
-                <a:ea typeface="Segoe UI" panose="020B0502040204020203" pitchFamily="34" charset="-122"/>
-                <a:cs typeface="Segoe UI" panose="020B0502040204020203" pitchFamily="34" charset="-120"/>
+                <a:latin typeface="Segoe UI" pitchFamily="34" charset="0"/>
+                <a:ea typeface="Segoe UI" pitchFamily="34" charset="-122"/>
+                <a:cs typeface="Segoe UI" pitchFamily="34" charset="-120"/>
               </a:rPr>
               <a:t>Kularathne MDYB</a:t>
             </a:r>
@@ -1913,12 +1980,13 @@
             <a:avLst/>
           </a:prstGeom>
           <a:noFill/>
-        </p:spPr>
-        <p:txBody>
-          <a:bodyPr wrap="square" lIns="0" tIns="0" rIns="0" bIns="0" rtlCol="0" anchor="ctr"/>
-          <a:lstStyle/>
-          <a:p>
-            <a:pPr marL="0" indent="0">
+          <a:ln/>
+        </p:spPr>
+        <p:txBody>
+          <a:bodyPr wrap="square" lIns="0" tIns="0" rIns="0" bIns="0" rtlCol="0" anchor="ctr"/>
+          <a:lstStyle/>
+          <a:p>
+            <a:pPr indent="0" marL="0">
               <a:buNone/>
             </a:pPr>
             <a:r>
@@ -1926,20 +1994,23 @@
                 <a:solidFill>
                   <a:srgbClr val="22D3EE"/>
                 </a:solidFill>
-                <a:latin typeface="Segoe UI" panose="020B0502040204020203" pitchFamily="34" charset="0"/>
-                <a:ea typeface="Segoe UI" panose="020B0502040204020203" pitchFamily="34" charset="-122"/>
-                <a:cs typeface="Segoe UI" panose="020B0502040204020203" pitchFamily="34" charset="-120"/>
+                <a:latin typeface="Segoe UI" pitchFamily="34" charset="0"/>
+                <a:ea typeface="Segoe UI" pitchFamily="34" charset="-122"/>
+                <a:cs typeface="Segoe UI" pitchFamily="34" charset="-120"/>
               </a:rPr>
               <a:t>EG/2021/4710   </a:t>
             </a:r>
+            <a:pPr indent="0" marL="0">
+              <a:buNone/>
+            </a:pPr>
             <a:r>
               <a:rPr lang="en-US" sz="1300" b="1" dirty="0">
                 <a:solidFill>
                   <a:srgbClr val="F1F5FB"/>
                 </a:solidFill>
-                <a:latin typeface="Segoe UI" panose="020B0502040204020203" pitchFamily="34" charset="0"/>
-                <a:ea typeface="Segoe UI" panose="020B0502040204020203" pitchFamily="34" charset="-122"/>
-                <a:cs typeface="Segoe UI" panose="020B0502040204020203" pitchFamily="34" charset="-120"/>
+                <a:latin typeface="Segoe UI" pitchFamily="34" charset="0"/>
+                <a:ea typeface="Segoe UI" pitchFamily="34" charset="-122"/>
+                <a:cs typeface="Segoe UI" pitchFamily="34" charset="-120"/>
               </a:rPr>
               <a:t>Perera K P D N</a:t>
             </a:r>
@@ -1962,12 +2033,13 @@
             <a:avLst/>
           </a:prstGeom>
           <a:noFill/>
-        </p:spPr>
-        <p:txBody>
-          <a:bodyPr wrap="square" lIns="0" tIns="0" rIns="0" bIns="0" rtlCol="0" anchor="ctr"/>
-          <a:lstStyle/>
-          <a:p>
-            <a:pPr marL="0" indent="0">
+          <a:ln/>
+        </p:spPr>
+        <p:txBody>
+          <a:bodyPr wrap="square" lIns="0" tIns="0" rIns="0" bIns="0" rtlCol="0" anchor="ctr"/>
+          <a:lstStyle/>
+          <a:p>
+            <a:pPr indent="0" marL="0">
               <a:buNone/>
             </a:pPr>
             <a:r>
@@ -1975,20 +2047,23 @@
                 <a:solidFill>
                   <a:srgbClr val="22D3EE"/>
                 </a:solidFill>
-                <a:latin typeface="Segoe UI" panose="020B0502040204020203" pitchFamily="34" charset="0"/>
-                <a:ea typeface="Segoe UI" panose="020B0502040204020203" pitchFamily="34" charset="-122"/>
-                <a:cs typeface="Segoe UI" panose="020B0502040204020203" pitchFamily="34" charset="-120"/>
+                <a:latin typeface="Segoe UI" pitchFamily="34" charset="0"/>
+                <a:ea typeface="Segoe UI" pitchFamily="34" charset="-122"/>
+                <a:cs typeface="Segoe UI" pitchFamily="34" charset="-120"/>
               </a:rPr>
               <a:t>EG/2021/4828   </a:t>
             </a:r>
+            <a:pPr indent="0" marL="0">
+              <a:buNone/>
+            </a:pPr>
             <a:r>
               <a:rPr lang="en-US" sz="1300" b="1" dirty="0">
                 <a:solidFill>
                   <a:srgbClr val="F1F5FB"/>
                 </a:solidFill>
-                <a:latin typeface="Segoe UI" panose="020B0502040204020203" pitchFamily="34" charset="0"/>
-                <a:ea typeface="Segoe UI" panose="020B0502040204020203" pitchFamily="34" charset="-122"/>
-                <a:cs typeface="Segoe UI" panose="020B0502040204020203" pitchFamily="34" charset="-120"/>
+                <a:latin typeface="Segoe UI" pitchFamily="34" charset="0"/>
+                <a:ea typeface="Segoe UI" pitchFamily="34" charset="-122"/>
+                <a:cs typeface="Segoe UI" pitchFamily="34" charset="-120"/>
               </a:rPr>
               <a:t>Thejana BPGL</a:t>
             </a:r>
@@ -2011,12 +2086,13 @@
             <a:avLst/>
           </a:prstGeom>
           <a:noFill/>
-        </p:spPr>
-        <p:txBody>
-          <a:bodyPr wrap="square" lIns="0" tIns="0" rIns="0" bIns="0" rtlCol="0" anchor="ctr"/>
-          <a:lstStyle/>
-          <a:p>
-            <a:pPr marL="0" indent="0">
+          <a:ln/>
+        </p:spPr>
+        <p:txBody>
+          <a:bodyPr wrap="square" lIns="0" tIns="0" rIns="0" bIns="0" rtlCol="0" anchor="ctr"/>
+          <a:lstStyle/>
+          <a:p>
+            <a:pPr indent="0" marL="0">
               <a:buNone/>
             </a:pPr>
             <a:r>
@@ -2024,20 +2100,23 @@
                 <a:solidFill>
                   <a:srgbClr val="22D3EE"/>
                 </a:solidFill>
-                <a:latin typeface="Segoe UI" panose="020B0502040204020203" pitchFamily="34" charset="0"/>
-                <a:ea typeface="Segoe UI" panose="020B0502040204020203" pitchFamily="34" charset="-122"/>
-                <a:cs typeface="Segoe UI" panose="020B0502040204020203" pitchFamily="34" charset="-120"/>
+                <a:latin typeface="Segoe UI" pitchFamily="34" charset="0"/>
+                <a:ea typeface="Segoe UI" pitchFamily="34" charset="-122"/>
+                <a:cs typeface="Segoe UI" pitchFamily="34" charset="-120"/>
               </a:rPr>
               <a:t>EG/2021/4701   </a:t>
             </a:r>
+            <a:pPr indent="0" marL="0">
+              <a:buNone/>
+            </a:pPr>
             <a:r>
               <a:rPr lang="en-US" sz="1300" b="1" dirty="0">
                 <a:solidFill>
                   <a:srgbClr val="F1F5FB"/>
                 </a:solidFill>
-                <a:latin typeface="Segoe UI" panose="020B0502040204020203" pitchFamily="34" charset="0"/>
-                <a:ea typeface="Segoe UI" panose="020B0502040204020203" pitchFamily="34" charset="-122"/>
-                <a:cs typeface="Segoe UI" panose="020B0502040204020203" pitchFamily="34" charset="-120"/>
+                <a:latin typeface="Segoe UI" pitchFamily="34" charset="0"/>
+                <a:ea typeface="Segoe UI" pitchFamily="34" charset="-122"/>
+                <a:cs typeface="Segoe UI" pitchFamily="34" charset="-120"/>
               </a:rPr>
               <a:t>Pabasara PMGT</a:t>
             </a:r>
@@ -2060,12 +2139,13 @@
             <a:avLst/>
           </a:prstGeom>
           <a:noFill/>
-        </p:spPr>
-        <p:txBody>
-          <a:bodyPr wrap="square" lIns="0" tIns="0" rIns="0" bIns="0" rtlCol="0" anchor="ctr"/>
-          <a:lstStyle/>
-          <a:p>
-            <a:pPr marL="0" indent="0">
+          <a:ln/>
+        </p:spPr>
+        <p:txBody>
+          <a:bodyPr wrap="square" lIns="0" tIns="0" rIns="0" bIns="0" rtlCol="0" anchor="ctr"/>
+          <a:lstStyle/>
+          <a:p>
+            <a:pPr indent="0" marL="0">
               <a:buNone/>
             </a:pPr>
             <a:r>
@@ -2073,20 +2153,23 @@
                 <a:solidFill>
                   <a:srgbClr val="22D3EE"/>
                 </a:solidFill>
-                <a:latin typeface="Segoe UI" panose="020B0502040204020203" pitchFamily="34" charset="0"/>
-                <a:ea typeface="Segoe UI" panose="020B0502040204020203" pitchFamily="34" charset="-122"/>
-                <a:cs typeface="Segoe UI" panose="020B0502040204020203" pitchFamily="34" charset="-120"/>
+                <a:latin typeface="Segoe UI" pitchFamily="34" charset="0"/>
+                <a:ea typeface="Segoe UI" pitchFamily="34" charset="-122"/>
+                <a:cs typeface="Segoe UI" pitchFamily="34" charset="-120"/>
               </a:rPr>
               <a:t>EG/2021/4770   </a:t>
             </a:r>
+            <a:pPr indent="0" marL="0">
+              <a:buNone/>
+            </a:pPr>
             <a:r>
               <a:rPr lang="en-US" sz="1300" b="1" dirty="0">
                 <a:solidFill>
                   <a:srgbClr val="F1F5FB"/>
                 </a:solidFill>
-                <a:latin typeface="Segoe UI" panose="020B0502040204020203" pitchFamily="34" charset="0"/>
-                <a:ea typeface="Segoe UI" panose="020B0502040204020203" pitchFamily="34" charset="-122"/>
-                <a:cs typeface="Segoe UI" panose="020B0502040204020203" pitchFamily="34" charset="-120"/>
+                <a:latin typeface="Segoe UI" pitchFamily="34" charset="0"/>
+                <a:ea typeface="Segoe UI" pitchFamily="34" charset="-122"/>
+                <a:cs typeface="Segoe UI" pitchFamily="34" charset="-120"/>
               </a:rPr>
               <a:t>Sachinthana K AD</a:t>
             </a:r>
@@ -2109,12 +2192,13 @@
             <a:avLst/>
           </a:prstGeom>
           <a:noFill/>
-        </p:spPr>
-        <p:txBody>
-          <a:bodyPr wrap="square" lIns="0" tIns="0" rIns="0" bIns="0" rtlCol="0" anchor="ctr"/>
-          <a:lstStyle/>
-          <a:p>
-            <a:pPr marL="0" indent="0">
+          <a:ln/>
+        </p:spPr>
+        <p:txBody>
+          <a:bodyPr wrap="square" lIns="0" tIns="0" rIns="0" bIns="0" rtlCol="0" anchor="ctr"/>
+          <a:lstStyle/>
+          <a:p>
+            <a:pPr indent="0" marL="0">
               <a:buNone/>
             </a:pPr>
             <a:r>
@@ -2122,9 +2206,9 @@
                 <a:solidFill>
                   <a:srgbClr val="8C9BB8"/>
                 </a:solidFill>
-                <a:latin typeface="Segoe UI" panose="020B0502040204020203" pitchFamily="34" charset="0"/>
-                <a:ea typeface="Segoe UI" panose="020B0502040204020203" pitchFamily="34" charset="-122"/>
-                <a:cs typeface="Segoe UI" panose="020B0502040204020203" pitchFamily="34" charset="-120"/>
+                <a:latin typeface="Segoe UI" pitchFamily="34" charset="0"/>
+                <a:ea typeface="Segoe UI" pitchFamily="34" charset="-122"/>
+                <a:cs typeface="Segoe UI" pitchFamily="34" charset="-120"/>
               </a:rPr>
               <a:t>Department of Electrical and Information Engineering  ·  University of Ruhuna</a:t>
             </a:r>
@@ -2142,13 +2226,12 @@
 
 <file path=ppt/slides/slide10.xml><?xml version="1.0" encoding="utf-8"?>
 <p:sld xmlns:a="http://schemas.openxmlformats.org/drawingml/2006/main" xmlns:r="http://schemas.openxmlformats.org/officeDocument/2006/relationships" xmlns:p="http://schemas.openxmlformats.org/presentationml/2006/main">
-  <p:cSld>
+  <p:cSld name="Slide 10">
     <p:bg>
       <p:bgPr>
         <a:solidFill>
           <a:srgbClr val="0B1220"/>
         </a:solidFill>
-        <a:effectLst/>
       </p:bgPr>
     </p:bg>
     <p:spTree>
@@ -2246,12 +2329,13 @@
             <a:avLst/>
           </a:prstGeom>
           <a:noFill/>
-        </p:spPr>
-        <p:txBody>
-          <a:bodyPr wrap="square" lIns="0" tIns="0" rIns="0" bIns="0" rtlCol="0" anchor="ctr"/>
-          <a:lstStyle/>
-          <a:p>
-            <a:pPr marL="0" indent="0">
+          <a:ln/>
+        </p:spPr>
+        <p:txBody>
+          <a:bodyPr wrap="square" lIns="0" tIns="0" rIns="0" bIns="0" rtlCol="0" anchor="ctr"/>
+          <a:lstStyle/>
+          <a:p>
+            <a:pPr indent="0" marL="0">
               <a:buNone/>
             </a:pPr>
             <a:r>
@@ -2259,9 +2343,9 @@
                 <a:solidFill>
                   <a:srgbClr val="F1F5FB"/>
                 </a:solidFill>
-                <a:latin typeface="Segoe UI Semibold" panose="020B0702040204020203" pitchFamily="34" charset="0"/>
-                <a:ea typeface="Segoe UI Semibold" panose="020B0702040204020203" pitchFamily="34" charset="-122"/>
-                <a:cs typeface="Segoe UI Semibold" panose="020B0702040204020203" pitchFamily="34" charset="-120"/>
+                <a:latin typeface="Segoe UI Semibold" pitchFamily="34" charset="0"/>
+                <a:ea typeface="Segoe UI Semibold" pitchFamily="34" charset="-122"/>
+                <a:cs typeface="Segoe UI Semibold" pitchFamily="34" charset="-120"/>
               </a:rPr>
               <a:t>Thank you</a:t>
             </a:r>
@@ -2284,12 +2368,13 @@
             <a:avLst/>
           </a:prstGeom>
           <a:noFill/>
-        </p:spPr>
-        <p:txBody>
-          <a:bodyPr wrap="square" lIns="0" tIns="0" rIns="0" bIns="0" rtlCol="0" anchor="ctr"/>
-          <a:lstStyle/>
-          <a:p>
-            <a:pPr marL="0" indent="0">
+          <a:ln/>
+        </p:spPr>
+        <p:txBody>
+          <a:bodyPr wrap="square" lIns="0" tIns="0" rIns="0" bIns="0" rtlCol="0" anchor="ctr"/>
+          <a:lstStyle/>
+          <a:p>
+            <a:pPr indent="0" marL="0">
               <a:buNone/>
             </a:pPr>
             <a:r>
@@ -2297,9 +2382,9 @@
                 <a:solidFill>
                   <a:srgbClr val="22D3EE"/>
                 </a:solidFill>
-                <a:latin typeface="Segoe UI" panose="020B0502040204020203" pitchFamily="34" charset="0"/>
-                <a:ea typeface="Segoe UI" panose="020B0502040204020203" pitchFamily="34" charset="-122"/>
-                <a:cs typeface="Segoe UI" panose="020B0502040204020203" pitchFamily="34" charset="-120"/>
+                <a:latin typeface="Segoe UI" pitchFamily="34" charset="0"/>
+                <a:ea typeface="Segoe UI" pitchFamily="34" charset="-122"/>
+                <a:cs typeface="Segoe UI" pitchFamily="34" charset="-120"/>
               </a:rPr>
               <a:t>Questions and discussion</a:t>
             </a:r>
@@ -2322,12 +2407,13 @@
             <a:avLst/>
           </a:prstGeom>
           <a:noFill/>
-        </p:spPr>
-        <p:txBody>
-          <a:bodyPr wrap="square" lIns="0" tIns="0" rIns="0" bIns="0" rtlCol="0" anchor="ctr"/>
-          <a:lstStyle/>
-          <a:p>
-            <a:pPr marL="0" indent="0">
+          <a:ln/>
+        </p:spPr>
+        <p:txBody>
+          <a:bodyPr wrap="square" lIns="0" tIns="0" rIns="0" bIns="0" rtlCol="0" anchor="ctr"/>
+          <a:lstStyle/>
+          <a:p>
+            <a:pPr indent="0" marL="0">
               <a:buNone/>
             </a:pPr>
             <a:r>
@@ -2335,9 +2421,9 @@
                 <a:solidFill>
                   <a:srgbClr val="8C9BB8"/>
                 </a:solidFill>
-                <a:latin typeface="Segoe UI" panose="020B0502040204020203" pitchFamily="34" charset="0"/>
-                <a:ea typeface="Segoe UI" panose="020B0502040204020203" pitchFamily="34" charset="-122"/>
-                <a:cs typeface="Segoe UI" panose="020B0502040204020203" pitchFamily="34" charset="-120"/>
+                <a:latin typeface="Segoe UI" pitchFamily="34" charset="0"/>
+                <a:ea typeface="Segoe UI" pitchFamily="34" charset="-122"/>
+                <a:cs typeface="Segoe UI" pitchFamily="34" charset="-120"/>
               </a:rPr>
               <a:t>REOAGMS  ·  EC8208 Software Architecture  ·  University of Ruhuna</a:t>
             </a:r>
@@ -2355,13 +2441,12 @@
 
 <file path=ppt/slides/slide2.xml><?xml version="1.0" encoding="utf-8"?>
 <p:sld xmlns:a="http://schemas.openxmlformats.org/drawingml/2006/main" xmlns:r="http://schemas.openxmlformats.org/officeDocument/2006/relationships" xmlns:p="http://schemas.openxmlformats.org/presentationml/2006/main">
-  <p:cSld>
+  <p:cSld name="Slide 2">
     <p:bg>
       <p:bgPr>
         <a:solidFill>
           <a:srgbClr val="F6F8FB"/>
         </a:solidFill>
-        <a:effectLst/>
       </p:bgPr>
     </p:bg>
     <p:spTree>
@@ -2418,24 +2503,25 @@
             <a:avLst/>
           </a:prstGeom>
           <a:noFill/>
-        </p:spPr>
-        <p:txBody>
-          <a:bodyPr wrap="square" lIns="0" tIns="0" rIns="0" bIns="0" rtlCol="0" anchor="ctr"/>
-          <a:lstStyle/>
-          <a:p>
-            <a:pPr marL="0" indent="0">
-              <a:buNone/>
-            </a:pPr>
-            <a:r>
-              <a:rPr lang="en-US" sz="1050" kern="0" spc="400" dirty="0">
+          <a:ln/>
+        </p:spPr>
+        <p:txBody>
+          <a:bodyPr wrap="square" lIns="0" tIns="0" rIns="0" bIns="0" rtlCol="0" anchor="ctr"/>
+          <a:lstStyle/>
+          <a:p>
+            <a:pPr indent="0" marL="0">
+              <a:buNone/>
+            </a:pPr>
+            <a:r>
+              <a:rPr lang="en-US" sz="1050" spc="400" kern="0" dirty="0">
                 <a:solidFill>
                   <a:srgbClr val="0891B2"/>
                 </a:solidFill>
-                <a:latin typeface="Segoe UI Semibold" panose="020B0702040204020203" pitchFamily="34" charset="0"/>
-                <a:ea typeface="Segoe UI Semibold" panose="020B0702040204020203" pitchFamily="34" charset="-122"/>
-                <a:cs typeface="Segoe UI Semibold" panose="020B0702040204020203" pitchFamily="34" charset="-120"/>
-              </a:rPr>
-              <a:t>02 · ARCHITECTURE</a:t>
+                <a:latin typeface="Segoe UI Semibold" pitchFamily="34" charset="0"/>
+                <a:ea typeface="Segoe UI Semibold" pitchFamily="34" charset="-122"/>
+                <a:cs typeface="Segoe UI Semibold" pitchFamily="34" charset="-120"/>
+              </a:rPr>
+              <a:t>02 · CHARITH · ARCHITECTURE</a:t>
             </a:r>
             <a:endParaRPr lang="en-US" sz="1050" dirty="0"/>
           </a:p>
@@ -2456,12 +2542,13 @@
             <a:avLst/>
           </a:prstGeom>
           <a:noFill/>
-        </p:spPr>
-        <p:txBody>
-          <a:bodyPr wrap="square" lIns="0" tIns="0" rIns="0" bIns="0" rtlCol="0" anchor="ctr"/>
-          <a:lstStyle/>
-          <a:p>
-            <a:pPr marL="0" indent="0">
+          <a:ln/>
+        </p:spPr>
+        <p:txBody>
+          <a:bodyPr wrap="square" lIns="0" tIns="0" rIns="0" bIns="0" rtlCol="0" anchor="ctr"/>
+          <a:lstStyle/>
+          <a:p>
+            <a:pPr indent="0" marL="0">
               <a:buNone/>
             </a:pPr>
             <a:r>
@@ -2469,9 +2556,9 @@
                 <a:solidFill>
                   <a:srgbClr val="0B1B33"/>
                 </a:solidFill>
-                <a:latin typeface="Segoe UI Semibold" panose="020B0702040204020203" pitchFamily="34" charset="0"/>
-                <a:ea typeface="Segoe UI Semibold" panose="020B0702040204020203" pitchFamily="34" charset="-122"/>
-                <a:cs typeface="Segoe UI Semibold" panose="020B0702040204020203" pitchFamily="34" charset="-120"/>
+                <a:latin typeface="Segoe UI Semibold" pitchFamily="34" charset="0"/>
+                <a:ea typeface="Segoe UI Semibold" pitchFamily="34" charset="-122"/>
+                <a:cs typeface="Segoe UI Semibold" pitchFamily="34" charset="-120"/>
               </a:rPr>
               <a:t>One gateway, six independent services</a:t>
             </a:r>
@@ -2517,12 +2604,13 @@
             <a:avLst/>
           </a:prstGeom>
           <a:noFill/>
-        </p:spPr>
-        <p:txBody>
-          <a:bodyPr wrap="square" lIns="0" tIns="0" rIns="0" bIns="0" rtlCol="0" anchor="ctr"/>
-          <a:lstStyle/>
-          <a:p>
-            <a:pPr marL="0" indent="0">
+          <a:ln/>
+        </p:spPr>
+        <p:txBody>
+          <a:bodyPr wrap="square" lIns="0" tIns="0" rIns="0" bIns="0" rtlCol="0" anchor="ctr"/>
+          <a:lstStyle/>
+          <a:p>
+            <a:pPr indent="0" marL="0">
               <a:buNone/>
             </a:pPr>
             <a:r>
@@ -2530,9 +2618,9 @@
                 <a:solidFill>
                   <a:srgbClr val="64748B"/>
                 </a:solidFill>
-                <a:latin typeface="Segoe UI" panose="020B0502040204020203" pitchFamily="34" charset="0"/>
-                <a:ea typeface="Segoe UI" panose="020B0502040204020203" pitchFamily="34" charset="-122"/>
-                <a:cs typeface="Segoe UI" panose="020B0502040204020203" pitchFamily="34" charset="-120"/>
+                <a:latin typeface="Segoe UI" pitchFamily="34" charset="0"/>
+                <a:ea typeface="Segoe UI" pitchFamily="34" charset="-122"/>
+                <a:cs typeface="Segoe UI" pitchFamily="34" charset="-120"/>
               </a:rPr>
               <a:t>EC8208 Software Architecture  ·  University of Ruhuna</a:t>
             </a:r>
@@ -2555,12 +2643,13 @@
             <a:avLst/>
           </a:prstGeom>
           <a:noFill/>
-        </p:spPr>
-        <p:txBody>
-          <a:bodyPr wrap="square" lIns="0" tIns="0" rIns="0" bIns="0" rtlCol="0" anchor="ctr"/>
-          <a:lstStyle/>
-          <a:p>
-            <a:pPr marL="0" indent="0" algn="r">
+          <a:ln/>
+        </p:spPr>
+        <p:txBody>
+          <a:bodyPr wrap="square" lIns="0" tIns="0" rIns="0" bIns="0" rtlCol="0" anchor="ctr"/>
+          <a:lstStyle/>
+          <a:p>
+            <a:pPr algn="r" indent="0" marL="0">
               <a:buNone/>
             </a:pPr>
             <a:r>
@@ -2568,11 +2657,11 @@
                 <a:solidFill>
                   <a:srgbClr val="64748B"/>
                 </a:solidFill>
-                <a:latin typeface="Segoe UI" panose="020B0502040204020203" pitchFamily="34" charset="0"/>
-                <a:ea typeface="Segoe UI" panose="020B0502040204020203" pitchFamily="34" charset="-122"/>
-                <a:cs typeface="Segoe UI" panose="020B0502040204020203" pitchFamily="34" charset="-120"/>
-              </a:rPr>
-              <a:t>02  ·  0:08–0:33</a:t>
+                <a:latin typeface="Segoe UI" pitchFamily="34" charset="0"/>
+                <a:ea typeface="Segoe UI" pitchFamily="34" charset="-122"/>
+                <a:cs typeface="Segoe UI" pitchFamily="34" charset="-120"/>
+              </a:rPr>
+              <a:t>02  ·  0:15–1:13</a:t>
             </a:r>
             <a:endParaRPr lang="en-US" sz="900" dirty="0"/>
           </a:p>
@@ -2620,12 +2709,13 @@
             <a:avLst/>
           </a:prstGeom>
           <a:noFill/>
-        </p:spPr>
-        <p:txBody>
-          <a:bodyPr wrap="square" lIns="0" tIns="0" rIns="0" bIns="0" rtlCol="0" anchor="ctr"/>
-          <a:lstStyle/>
-          <a:p>
-            <a:pPr marL="0" indent="0" algn="ctr">
+          <a:ln/>
+        </p:spPr>
+        <p:txBody>
+          <a:bodyPr wrap="square" lIns="0" tIns="0" rIns="0" bIns="0" rtlCol="0" anchor="ctr"/>
+          <a:lstStyle/>
+          <a:p>
+            <a:pPr algn="ctr" indent="0" marL="0">
               <a:buNone/>
             </a:pPr>
             <a:r>
@@ -2633,9 +2723,9 @@
                 <a:solidFill>
                   <a:srgbClr val="0B1B33"/>
                 </a:solidFill>
-                <a:latin typeface="Segoe UI" panose="020B0502040204020203" pitchFamily="34" charset="0"/>
-                <a:ea typeface="Segoe UI" panose="020B0502040204020203" pitchFamily="34" charset="-122"/>
-                <a:cs typeface="Segoe UI" panose="020B0502040204020203" pitchFamily="34" charset="-120"/>
+                <a:latin typeface="Segoe UI" pitchFamily="34" charset="0"/>
+                <a:ea typeface="Segoe UI" pitchFamily="34" charset="-122"/>
+                <a:cs typeface="Segoe UI" pitchFamily="34" charset="-120"/>
               </a:rPr>
               <a:t>React console  ·  nginx  ·  live updates over WebSocket</a:t>
             </a:r>
@@ -2685,12 +2775,13 @@
             <a:avLst/>
           </a:prstGeom>
           <a:noFill/>
-        </p:spPr>
-        <p:txBody>
-          <a:bodyPr wrap="square" lIns="0" tIns="0" rIns="0" bIns="0" rtlCol="0" anchor="ctr"/>
-          <a:lstStyle/>
-          <a:p>
-            <a:pPr marL="0" indent="0" algn="ctr">
+          <a:ln/>
+        </p:spPr>
+        <p:txBody>
+          <a:bodyPr wrap="square" lIns="0" tIns="0" rIns="0" bIns="0" rtlCol="0" anchor="ctr"/>
+          <a:lstStyle/>
+          <a:p>
+            <a:pPr algn="ctr" indent="0" marL="0">
               <a:buNone/>
             </a:pPr>
             <a:r>
@@ -2698,9 +2789,9 @@
                 <a:solidFill>
                   <a:srgbClr val="FFFFFF"/>
                 </a:solidFill>
-                <a:latin typeface="Segoe UI Semibold" panose="020B0702040204020203" pitchFamily="34" charset="0"/>
-                <a:ea typeface="Segoe UI Semibold" panose="020B0702040204020203" pitchFamily="34" charset="-122"/>
-                <a:cs typeface="Segoe UI Semibold" panose="020B0702040204020203" pitchFamily="34" charset="-120"/>
+                <a:latin typeface="Segoe UI Semibold" pitchFamily="34" charset="0"/>
+                <a:ea typeface="Segoe UI Semibold" pitchFamily="34" charset="-122"/>
+                <a:cs typeface="Segoe UI Semibold" pitchFamily="34" charset="-120"/>
               </a:rPr>
               <a:t>API Gateway  ·  JWT validation  ·  role policy</a:t>
             </a:r>
@@ -2750,12 +2841,13 @@
             <a:avLst/>
           </a:prstGeom>
           <a:noFill/>
-        </p:spPr>
-        <p:txBody>
-          <a:bodyPr wrap="square" lIns="0" tIns="0" rIns="0" bIns="0" rtlCol="0" anchor="ctr"/>
-          <a:lstStyle/>
-          <a:p>
-            <a:pPr marL="0" indent="0" algn="ctr">
+          <a:ln/>
+        </p:spPr>
+        <p:txBody>
+          <a:bodyPr wrap="square" lIns="0" tIns="0" rIns="0" bIns="0" rtlCol="0" anchor="ctr"/>
+          <a:lstStyle/>
+          <a:p>
+            <a:pPr algn="ctr" indent="0" marL="0">
               <a:buNone/>
             </a:pPr>
             <a:r>
@@ -2763,9 +2855,9 @@
                 <a:solidFill>
                   <a:srgbClr val="0B1B33"/>
                 </a:solidFill>
-                <a:latin typeface="Segoe UI Semibold" panose="020B0702040204020203" pitchFamily="34" charset="0"/>
-                <a:ea typeface="Segoe UI Semibold" panose="020B0702040204020203" pitchFamily="34" charset="-122"/>
-                <a:cs typeface="Segoe UI Semibold" panose="020B0702040204020203" pitchFamily="34" charset="-120"/>
+                <a:latin typeface="Segoe UI Semibold" pitchFamily="34" charset="0"/>
+                <a:ea typeface="Segoe UI Semibold" pitchFamily="34" charset="-122"/>
+                <a:cs typeface="Segoe UI Semibold" pitchFamily="34" charset="-120"/>
               </a:rPr>
               <a:t>Identity</a:t>
             </a:r>
@@ -2788,12 +2880,13 @@
             <a:avLst/>
           </a:prstGeom>
           <a:noFill/>
-        </p:spPr>
-        <p:txBody>
-          <a:bodyPr wrap="square" lIns="0" tIns="0" rIns="0" bIns="0" rtlCol="0" anchor="ctr"/>
-          <a:lstStyle/>
-          <a:p>
-            <a:pPr marL="0" indent="0" algn="ctr">
+          <a:ln/>
+        </p:spPr>
+        <p:txBody>
+          <a:bodyPr wrap="square" lIns="0" tIns="0" rIns="0" bIns="0" rtlCol="0" anchor="ctr"/>
+          <a:lstStyle/>
+          <a:p>
+            <a:pPr algn="ctr" indent="0" marL="0">
               <a:buNone/>
             </a:pPr>
             <a:r>
@@ -2801,9 +2894,9 @@
                 <a:solidFill>
                   <a:srgbClr val="64748B"/>
                 </a:solidFill>
-                <a:latin typeface="Segoe UI" panose="020B0502040204020203" pitchFamily="34" charset="0"/>
-                <a:ea typeface="Segoe UI" panose="020B0502040204020203" pitchFamily="34" charset="-122"/>
-                <a:cs typeface="Segoe UI" panose="020B0502040204020203" pitchFamily="34" charset="-120"/>
+                <a:latin typeface="Segoe UI" pitchFamily="34" charset="0"/>
+                <a:ea typeface="Segoe UI" pitchFamily="34" charset="-122"/>
+                <a:cs typeface="Segoe UI" pitchFamily="34" charset="-120"/>
               </a:rPr>
               <a:t>PostgreSQL</a:t>
             </a:r>
@@ -2853,12 +2946,13 @@
             <a:avLst/>
           </a:prstGeom>
           <a:noFill/>
-        </p:spPr>
-        <p:txBody>
-          <a:bodyPr wrap="square" lIns="0" tIns="0" rIns="0" bIns="0" rtlCol="0" anchor="ctr"/>
-          <a:lstStyle/>
-          <a:p>
-            <a:pPr marL="0" indent="0" algn="ctr">
+          <a:ln/>
+        </p:spPr>
+        <p:txBody>
+          <a:bodyPr wrap="square" lIns="0" tIns="0" rIns="0" bIns="0" rtlCol="0" anchor="ctr"/>
+          <a:lstStyle/>
+          <a:p>
+            <a:pPr algn="ctr" indent="0" marL="0">
               <a:buNone/>
             </a:pPr>
             <a:r>
@@ -2866,9 +2960,9 @@
                 <a:solidFill>
                   <a:srgbClr val="0B1B33"/>
                 </a:solidFill>
-                <a:latin typeface="Segoe UI Semibold" panose="020B0702040204020203" pitchFamily="34" charset="0"/>
-                <a:ea typeface="Segoe UI Semibold" panose="020B0702040204020203" pitchFamily="34" charset="-122"/>
-                <a:cs typeface="Segoe UI Semibold" panose="020B0702040204020203" pitchFamily="34" charset="-120"/>
+                <a:latin typeface="Segoe UI Semibold" pitchFamily="34" charset="0"/>
+                <a:ea typeface="Segoe UI Semibold" pitchFamily="34" charset="-122"/>
+                <a:cs typeface="Segoe UI Semibold" pitchFamily="34" charset="-120"/>
               </a:rPr>
               <a:t>Asset</a:t>
             </a:r>
@@ -2891,12 +2985,13 @@
             <a:avLst/>
           </a:prstGeom>
           <a:noFill/>
-        </p:spPr>
-        <p:txBody>
-          <a:bodyPr wrap="square" lIns="0" tIns="0" rIns="0" bIns="0" rtlCol="0" anchor="ctr"/>
-          <a:lstStyle/>
-          <a:p>
-            <a:pPr marL="0" indent="0" algn="ctr">
+          <a:ln/>
+        </p:spPr>
+        <p:txBody>
+          <a:bodyPr wrap="square" lIns="0" tIns="0" rIns="0" bIns="0" rtlCol="0" anchor="ctr"/>
+          <a:lstStyle/>
+          <a:p>
+            <a:pPr algn="ctr" indent="0" marL="0">
               <a:buNone/>
             </a:pPr>
             <a:r>
@@ -2904,9 +2999,9 @@
                 <a:solidFill>
                   <a:srgbClr val="64748B"/>
                 </a:solidFill>
-                <a:latin typeface="Segoe UI" panose="020B0502040204020203" pitchFamily="34" charset="0"/>
-                <a:ea typeface="Segoe UI" panose="020B0502040204020203" pitchFamily="34" charset="-122"/>
-                <a:cs typeface="Segoe UI" panose="020B0502040204020203" pitchFamily="34" charset="-120"/>
+                <a:latin typeface="Segoe UI" pitchFamily="34" charset="0"/>
+                <a:ea typeface="Segoe UI" pitchFamily="34" charset="-122"/>
+                <a:cs typeface="Segoe UI" pitchFamily="34" charset="-120"/>
               </a:rPr>
               <a:t>PostgreSQL</a:t>
             </a:r>
@@ -2956,12 +3051,13 @@
             <a:avLst/>
           </a:prstGeom>
           <a:noFill/>
-        </p:spPr>
-        <p:txBody>
-          <a:bodyPr wrap="square" lIns="0" tIns="0" rIns="0" bIns="0" rtlCol="0" anchor="ctr"/>
-          <a:lstStyle/>
-          <a:p>
-            <a:pPr marL="0" indent="0" algn="ctr">
+          <a:ln/>
+        </p:spPr>
+        <p:txBody>
+          <a:bodyPr wrap="square" lIns="0" tIns="0" rIns="0" bIns="0" rtlCol="0" anchor="ctr"/>
+          <a:lstStyle/>
+          <a:p>
+            <a:pPr algn="ctr" indent="0" marL="0">
               <a:buNone/>
             </a:pPr>
             <a:r>
@@ -2969,9 +3065,9 @@
                 <a:solidFill>
                   <a:srgbClr val="0B1B33"/>
                 </a:solidFill>
-                <a:latin typeface="Segoe UI Semibold" panose="020B0702040204020203" pitchFamily="34" charset="0"/>
-                <a:ea typeface="Segoe UI Semibold" panose="020B0702040204020203" pitchFamily="34" charset="-122"/>
-                <a:cs typeface="Segoe UI Semibold" panose="020B0702040204020203" pitchFamily="34" charset="-120"/>
+                <a:latin typeface="Segoe UI Semibold" pitchFamily="34" charset="0"/>
+                <a:ea typeface="Segoe UI Semibold" pitchFamily="34" charset="-122"/>
+                <a:cs typeface="Segoe UI Semibold" pitchFamily="34" charset="-120"/>
               </a:rPr>
               <a:t>Monitoring</a:t>
             </a:r>
@@ -2994,12 +3090,13 @@
             <a:avLst/>
           </a:prstGeom>
           <a:noFill/>
-        </p:spPr>
-        <p:txBody>
-          <a:bodyPr wrap="square" lIns="0" tIns="0" rIns="0" bIns="0" rtlCol="0" anchor="ctr"/>
-          <a:lstStyle/>
-          <a:p>
-            <a:pPr marL="0" indent="0" algn="ctr">
+          <a:ln/>
+        </p:spPr>
+        <p:txBody>
+          <a:bodyPr wrap="square" lIns="0" tIns="0" rIns="0" bIns="0" rtlCol="0" anchor="ctr"/>
+          <a:lstStyle/>
+          <a:p>
+            <a:pPr algn="ctr" indent="0" marL="0">
               <a:buNone/>
             </a:pPr>
             <a:r>
@@ -3007,9 +3104,9 @@
                 <a:solidFill>
                   <a:srgbClr val="64748B"/>
                 </a:solidFill>
-                <a:latin typeface="Segoe UI" panose="020B0502040204020203" pitchFamily="34" charset="0"/>
-                <a:ea typeface="Segoe UI" panose="020B0502040204020203" pitchFamily="34" charset="-122"/>
-                <a:cs typeface="Segoe UI" panose="020B0502040204020203" pitchFamily="34" charset="-120"/>
+                <a:latin typeface="Segoe UI" pitchFamily="34" charset="0"/>
+                <a:ea typeface="Segoe UI" pitchFamily="34" charset="-122"/>
+                <a:cs typeface="Segoe UI" pitchFamily="34" charset="-120"/>
               </a:rPr>
               <a:t>PostgreSQL</a:t>
             </a:r>
@@ -3059,12 +3156,13 @@
             <a:avLst/>
           </a:prstGeom>
           <a:noFill/>
-        </p:spPr>
-        <p:txBody>
-          <a:bodyPr wrap="square" lIns="0" tIns="0" rIns="0" bIns="0" rtlCol="0" anchor="ctr"/>
-          <a:lstStyle/>
-          <a:p>
-            <a:pPr marL="0" indent="0" algn="ctr">
+          <a:ln/>
+        </p:spPr>
+        <p:txBody>
+          <a:bodyPr wrap="square" lIns="0" tIns="0" rIns="0" bIns="0" rtlCol="0" anchor="ctr"/>
+          <a:lstStyle/>
+          <a:p>
+            <a:pPr algn="ctr" indent="0" marL="0">
               <a:buNone/>
             </a:pPr>
             <a:r>
@@ -3072,9 +3170,9 @@
                 <a:solidFill>
                   <a:srgbClr val="0B1B33"/>
                 </a:solidFill>
-                <a:latin typeface="Segoe UI Semibold" panose="020B0702040204020203" pitchFamily="34" charset="0"/>
-                <a:ea typeface="Segoe UI Semibold" panose="020B0702040204020203" pitchFamily="34" charset="-122"/>
-                <a:cs typeface="Segoe UI Semibold" panose="020B0702040204020203" pitchFamily="34" charset="-120"/>
+                <a:latin typeface="Segoe UI Semibold" pitchFamily="34" charset="0"/>
+                <a:ea typeface="Segoe UI Semibold" pitchFamily="34" charset="-122"/>
+                <a:cs typeface="Segoe UI Semibold" pitchFamily="34" charset="-120"/>
               </a:rPr>
               <a:t>Maintenance</a:t>
             </a:r>
@@ -3097,12 +3195,13 @@
             <a:avLst/>
           </a:prstGeom>
           <a:noFill/>
-        </p:spPr>
-        <p:txBody>
-          <a:bodyPr wrap="square" lIns="0" tIns="0" rIns="0" bIns="0" rtlCol="0" anchor="ctr"/>
-          <a:lstStyle/>
-          <a:p>
-            <a:pPr marL="0" indent="0" algn="ctr">
+          <a:ln/>
+        </p:spPr>
+        <p:txBody>
+          <a:bodyPr wrap="square" lIns="0" tIns="0" rIns="0" bIns="0" rtlCol="0" anchor="ctr"/>
+          <a:lstStyle/>
+          <a:p>
+            <a:pPr algn="ctr" indent="0" marL="0">
               <a:buNone/>
             </a:pPr>
             <a:r>
@@ -3110,9 +3209,9 @@
                 <a:solidFill>
                   <a:srgbClr val="64748B"/>
                 </a:solidFill>
-                <a:latin typeface="Segoe UI" panose="020B0502040204020203" pitchFamily="34" charset="0"/>
-                <a:ea typeface="Segoe UI" panose="020B0502040204020203" pitchFamily="34" charset="-122"/>
-                <a:cs typeface="Segoe UI" panose="020B0502040204020203" pitchFamily="34" charset="-120"/>
+                <a:latin typeface="Segoe UI" pitchFamily="34" charset="0"/>
+                <a:ea typeface="Segoe UI" pitchFamily="34" charset="-122"/>
+                <a:cs typeface="Segoe UI" pitchFamily="34" charset="-120"/>
               </a:rPr>
               <a:t>PostgreSQL</a:t>
             </a:r>
@@ -3162,12 +3261,13 @@
             <a:avLst/>
           </a:prstGeom>
           <a:noFill/>
-        </p:spPr>
-        <p:txBody>
-          <a:bodyPr wrap="square" lIns="0" tIns="0" rIns="0" bIns="0" rtlCol="0" anchor="ctr"/>
-          <a:lstStyle/>
-          <a:p>
-            <a:pPr marL="0" indent="0" algn="ctr">
+          <a:ln/>
+        </p:spPr>
+        <p:txBody>
+          <a:bodyPr wrap="square" lIns="0" tIns="0" rIns="0" bIns="0" rtlCol="0" anchor="ctr"/>
+          <a:lstStyle/>
+          <a:p>
+            <a:pPr algn="ctr" indent="0" marL="0">
               <a:buNone/>
             </a:pPr>
             <a:r>
@@ -3175,9 +3275,9 @@
                 <a:solidFill>
                   <a:srgbClr val="0B1B33"/>
                 </a:solidFill>
-                <a:latin typeface="Segoe UI Semibold" panose="020B0702040204020203" pitchFamily="34" charset="0"/>
-                <a:ea typeface="Segoe UI Semibold" panose="020B0702040204020203" pitchFamily="34" charset="-122"/>
-                <a:cs typeface="Segoe UI Semibold" panose="020B0702040204020203" pitchFamily="34" charset="-120"/>
+                <a:latin typeface="Segoe UI Semibold" pitchFamily="34" charset="0"/>
+                <a:ea typeface="Segoe UI Semibold" pitchFamily="34" charset="-122"/>
+                <a:cs typeface="Segoe UI Semibold" pitchFamily="34" charset="-120"/>
               </a:rPr>
               <a:t>Notification</a:t>
             </a:r>
@@ -3200,12 +3300,13 @@
             <a:avLst/>
           </a:prstGeom>
           <a:noFill/>
-        </p:spPr>
-        <p:txBody>
-          <a:bodyPr wrap="square" lIns="0" tIns="0" rIns="0" bIns="0" rtlCol="0" anchor="ctr"/>
-          <a:lstStyle/>
-          <a:p>
-            <a:pPr marL="0" indent="0" algn="ctr">
+          <a:ln/>
+        </p:spPr>
+        <p:txBody>
+          <a:bodyPr wrap="square" lIns="0" tIns="0" rIns="0" bIns="0" rtlCol="0" anchor="ctr"/>
+          <a:lstStyle/>
+          <a:p>
+            <a:pPr algn="ctr" indent="0" marL="0">
               <a:buNone/>
             </a:pPr>
             <a:r>
@@ -3213,9 +3314,9 @@
                 <a:solidFill>
                   <a:srgbClr val="64748B"/>
                 </a:solidFill>
-                <a:latin typeface="Segoe UI" panose="020B0502040204020203" pitchFamily="34" charset="0"/>
-                <a:ea typeface="Segoe UI" panose="020B0502040204020203" pitchFamily="34" charset="-122"/>
-                <a:cs typeface="Segoe UI" panose="020B0502040204020203" pitchFamily="34" charset="-120"/>
+                <a:latin typeface="Segoe UI" pitchFamily="34" charset="0"/>
+                <a:ea typeface="Segoe UI" pitchFamily="34" charset="-122"/>
+                <a:cs typeface="Segoe UI" pitchFamily="34" charset="-120"/>
               </a:rPr>
               <a:t>PostgreSQL</a:t>
             </a:r>
@@ -3265,12 +3366,13 @@
             <a:avLst/>
           </a:prstGeom>
           <a:noFill/>
-        </p:spPr>
-        <p:txBody>
-          <a:bodyPr wrap="square" lIns="0" tIns="0" rIns="0" bIns="0" rtlCol="0" anchor="ctr"/>
-          <a:lstStyle/>
-          <a:p>
-            <a:pPr marL="0" indent="0" algn="ctr">
+          <a:ln/>
+        </p:spPr>
+        <p:txBody>
+          <a:bodyPr wrap="square" lIns="0" tIns="0" rIns="0" bIns="0" rtlCol="0" anchor="ctr"/>
+          <a:lstStyle/>
+          <a:p>
+            <a:pPr algn="ctr" indent="0" marL="0">
               <a:buNone/>
             </a:pPr>
             <a:r>
@@ -3278,9 +3380,9 @@
                 <a:solidFill>
                   <a:srgbClr val="0B1B33"/>
                 </a:solidFill>
-                <a:latin typeface="Segoe UI Semibold" panose="020B0702040204020203" pitchFamily="34" charset="0"/>
-                <a:ea typeface="Segoe UI Semibold" panose="020B0702040204020203" pitchFamily="34" charset="-122"/>
-                <a:cs typeface="Segoe UI Semibold" panose="020B0702040204020203" pitchFamily="34" charset="-120"/>
+                <a:latin typeface="Segoe UI Semibold" pitchFamily="34" charset="0"/>
+                <a:ea typeface="Segoe UI Semibold" pitchFamily="34" charset="-122"/>
+                <a:cs typeface="Segoe UI Semibold" pitchFamily="34" charset="-120"/>
               </a:rPr>
               <a:t>Analytics</a:t>
             </a:r>
@@ -3303,12 +3405,13 @@
             <a:avLst/>
           </a:prstGeom>
           <a:noFill/>
-        </p:spPr>
-        <p:txBody>
-          <a:bodyPr wrap="square" lIns="0" tIns="0" rIns="0" bIns="0" rtlCol="0" anchor="ctr"/>
-          <a:lstStyle/>
-          <a:p>
-            <a:pPr marL="0" indent="0" algn="ctr">
+          <a:ln/>
+        </p:spPr>
+        <p:txBody>
+          <a:bodyPr wrap="square" lIns="0" tIns="0" rIns="0" bIns="0" rtlCol="0" anchor="ctr"/>
+          <a:lstStyle/>
+          <a:p>
+            <a:pPr algn="ctr" indent="0" marL="0">
               <a:buNone/>
             </a:pPr>
             <a:r>
@@ -3316,9 +3419,9 @@
                 <a:solidFill>
                   <a:srgbClr val="64748B"/>
                 </a:solidFill>
-                <a:latin typeface="Segoe UI" panose="020B0502040204020203" pitchFamily="34" charset="0"/>
-                <a:ea typeface="Segoe UI" panose="020B0502040204020203" pitchFamily="34" charset="-122"/>
-                <a:cs typeface="Segoe UI" panose="020B0502040204020203" pitchFamily="34" charset="-120"/>
+                <a:latin typeface="Segoe UI" pitchFamily="34" charset="0"/>
+                <a:ea typeface="Segoe UI" pitchFamily="34" charset="-122"/>
+                <a:cs typeface="Segoe UI" pitchFamily="34" charset="-120"/>
               </a:rPr>
               <a:t>PostgreSQL</a:t>
             </a:r>
@@ -3368,12 +3471,13 @@
             <a:avLst/>
           </a:prstGeom>
           <a:noFill/>
-        </p:spPr>
-        <p:txBody>
-          <a:bodyPr wrap="square" lIns="0" tIns="0" rIns="0" bIns="0" rtlCol="0" anchor="ctr"/>
-          <a:lstStyle/>
-          <a:p>
-            <a:pPr marL="0" indent="0" algn="ctr">
+          <a:ln/>
+        </p:spPr>
+        <p:txBody>
+          <a:bodyPr wrap="square" lIns="0" tIns="0" rIns="0" bIns="0" rtlCol="0" anchor="ctr"/>
+          <a:lstStyle/>
+          <a:p>
+            <a:pPr algn="ctr" indent="0" marL="0">
               <a:buNone/>
             </a:pPr>
             <a:r>
@@ -3381,9 +3485,9 @@
                 <a:solidFill>
                   <a:srgbClr val="0B1B33"/>
                 </a:solidFill>
-                <a:latin typeface="Segoe UI" panose="020B0502040204020203" pitchFamily="34" charset="0"/>
-                <a:ea typeface="Segoe UI" panose="020B0502040204020203" pitchFamily="34" charset="-122"/>
-                <a:cs typeface="Segoe UI" panose="020B0502040204020203" pitchFamily="34" charset="-120"/>
+                <a:latin typeface="Segoe UI" pitchFamily="34" charset="0"/>
+                <a:ea typeface="Segoe UI" pitchFamily="34" charset="-122"/>
+                <a:cs typeface="Segoe UI" pitchFamily="34" charset="-120"/>
               </a:rPr>
               <a:t>RabbitMQ events  ·  Redis cache  ·  Prometheus and Grafana</a:t>
             </a:r>
@@ -3433,12 +3537,13 @@
             <a:avLst/>
           </a:prstGeom>
           <a:noFill/>
-        </p:spPr>
-        <p:txBody>
-          <a:bodyPr wrap="square" lIns="0" tIns="0" rIns="0" bIns="0" rtlCol="0" anchor="ctr"/>
-          <a:lstStyle/>
-          <a:p>
-            <a:pPr marL="0" indent="0">
+          <a:ln/>
+        </p:spPr>
+        <p:txBody>
+          <a:bodyPr wrap="square" lIns="0" tIns="0" rIns="0" bIns="0" rtlCol="0" anchor="ctr"/>
+          <a:lstStyle/>
+          <a:p>
+            <a:pPr indent="0" marL="0">
               <a:buNone/>
             </a:pPr>
             <a:r>
@@ -3446,20 +3551,23 @@
                 <a:solidFill>
                   <a:srgbClr val="0891B2"/>
                 </a:solidFill>
-                <a:latin typeface="Segoe UI" panose="020B0502040204020203" pitchFamily="34" charset="0"/>
-                <a:ea typeface="Segoe UI" panose="020B0502040204020203" pitchFamily="34" charset="-122"/>
-                <a:cs typeface="Segoe UI" panose="020B0502040204020203" pitchFamily="34" charset="-120"/>
+                <a:latin typeface="Segoe UI" pitchFamily="34" charset="0"/>
+                <a:ea typeface="Segoe UI" pitchFamily="34" charset="-122"/>
+                <a:cs typeface="Segoe UI" pitchFamily="34" charset="-120"/>
               </a:rPr>
               <a:t>LIVE  </a:t>
             </a:r>
+            <a:pPr indent="0" marL="0">
+              <a:buNone/>
+            </a:pPr>
             <a:r>
               <a:rPr lang="en-US" sz="1100" dirty="0">
                 <a:solidFill>
                   <a:srgbClr val="0B1B33"/>
                 </a:solidFill>
-                <a:latin typeface="Segoe UI" panose="020B0502040204020203" pitchFamily="34" charset="0"/>
-                <a:ea typeface="Segoe UI" panose="020B0502040204020203" pitchFamily="34" charset="-122"/>
-                <a:cs typeface="Segoe UI" panose="020B0502040204020203" pitchFamily="34" charset="-120"/>
+                <a:latin typeface="Segoe UI" pitchFamily="34" charset="0"/>
+                <a:ea typeface="Segoe UI" pitchFamily="34" charset="-122"/>
+                <a:cs typeface="Segoe UI" pitchFamily="34" charset="-120"/>
               </a:rPr>
               <a:t>Console: sign in, Control room</a:t>
             </a:r>
@@ -3477,13 +3585,12 @@
 
 <file path=ppt/slides/slide3.xml><?xml version="1.0" encoding="utf-8"?>
 <p:sld xmlns:a="http://schemas.openxmlformats.org/drawingml/2006/main" xmlns:r="http://schemas.openxmlformats.org/officeDocument/2006/relationships" xmlns:p="http://schemas.openxmlformats.org/presentationml/2006/main">
-  <p:cSld>
+  <p:cSld name="Slide 3">
     <p:bg>
       <p:bgPr>
         <a:solidFill>
           <a:srgbClr val="F6F8FB"/>
         </a:solidFill>
-        <a:effectLst/>
       </p:bgPr>
     </p:bg>
     <p:spTree>
@@ -3540,24 +3647,25 @@
             <a:avLst/>
           </a:prstGeom>
           <a:noFill/>
-        </p:spPr>
-        <p:txBody>
-          <a:bodyPr wrap="square" lIns="0" tIns="0" rIns="0" bIns="0" rtlCol="0" anchor="ctr"/>
-          <a:lstStyle/>
-          <a:p>
-            <a:pPr marL="0" indent="0">
-              <a:buNone/>
-            </a:pPr>
-            <a:r>
-              <a:rPr lang="en-US" sz="1050" kern="0" spc="400" dirty="0">
+          <a:ln/>
+        </p:spPr>
+        <p:txBody>
+          <a:bodyPr wrap="square" lIns="0" tIns="0" rIns="0" bIns="0" rtlCol="0" anchor="ctr"/>
+          <a:lstStyle/>
+          <a:p>
+            <a:pPr indent="0" marL="0">
+              <a:buNone/>
+            </a:pPr>
+            <a:r>
+              <a:rPr lang="en-US" sz="1050" spc="400" kern="0" dirty="0">
                 <a:solidFill>
                   <a:srgbClr val="0891B2"/>
                 </a:solidFill>
-                <a:latin typeface="Segoe UI Semibold" panose="020B0702040204020203" pitchFamily="34" charset="0"/>
-                <a:ea typeface="Segoe UI Semibold" panose="020B0702040204020203" pitchFamily="34" charset="-122"/>
-                <a:cs typeface="Segoe UI Semibold" panose="020B0702040204020203" pitchFamily="34" charset="-120"/>
-              </a:rPr>
-              <a:t>03 · ASSET SERVICE</a:t>
+                <a:latin typeface="Segoe UI Semibold" pitchFamily="34" charset="0"/>
+                <a:ea typeface="Segoe UI Semibold" pitchFamily="34" charset="-122"/>
+                <a:cs typeface="Segoe UI Semibold" pitchFamily="34" charset="-120"/>
+              </a:rPr>
+              <a:t>03 · NEMAL · ASSET SERVICE</a:t>
             </a:r>
             <a:endParaRPr lang="en-US" sz="1050" dirty="0"/>
           </a:p>
@@ -3578,12 +3686,13 @@
             <a:avLst/>
           </a:prstGeom>
           <a:noFill/>
-        </p:spPr>
-        <p:txBody>
-          <a:bodyPr wrap="square" lIns="0" tIns="0" rIns="0" bIns="0" rtlCol="0" anchor="ctr"/>
-          <a:lstStyle/>
-          <a:p>
-            <a:pPr marL="0" indent="0">
+          <a:ln/>
+        </p:spPr>
+        <p:txBody>
+          <a:bodyPr wrap="square" lIns="0" tIns="0" rIns="0" bIns="0" rtlCol="0" anchor="ctr"/>
+          <a:lstStyle/>
+          <a:p>
+            <a:pPr indent="0" marL="0">
               <a:buNone/>
             </a:pPr>
             <a:r>
@@ -3591,9 +3700,9 @@
                 <a:solidFill>
                   <a:srgbClr val="0B1B33"/>
                 </a:solidFill>
-                <a:latin typeface="Segoe UI Semibold" panose="020B0702040204020203" pitchFamily="34" charset="0"/>
-                <a:ea typeface="Segoe UI Semibold" panose="020B0702040204020203" pitchFamily="34" charset="-122"/>
-                <a:cs typeface="Segoe UI Semibold" panose="020B0702040204020203" pitchFamily="34" charset="-120"/>
+                <a:latin typeface="Segoe UI Semibold" pitchFamily="34" charset="0"/>
+                <a:ea typeface="Segoe UI Semibold" pitchFamily="34" charset="-122"/>
+                <a:cs typeface="Segoe UI Semibold" pitchFamily="34" charset="-120"/>
               </a:rPr>
               <a:t>The registry every service relies on</a:t>
             </a:r>
@@ -3639,12 +3748,13 @@
             <a:avLst/>
           </a:prstGeom>
           <a:noFill/>
-        </p:spPr>
-        <p:txBody>
-          <a:bodyPr wrap="square" lIns="0" tIns="0" rIns="0" bIns="0" rtlCol="0" anchor="ctr"/>
-          <a:lstStyle/>
-          <a:p>
-            <a:pPr marL="0" indent="0">
+          <a:ln/>
+        </p:spPr>
+        <p:txBody>
+          <a:bodyPr wrap="square" lIns="0" tIns="0" rIns="0" bIns="0" rtlCol="0" anchor="ctr"/>
+          <a:lstStyle/>
+          <a:p>
+            <a:pPr indent="0" marL="0">
               <a:buNone/>
             </a:pPr>
             <a:r>
@@ -3652,9 +3762,9 @@
                 <a:solidFill>
                   <a:srgbClr val="64748B"/>
                 </a:solidFill>
-                <a:latin typeface="Segoe UI" panose="020B0502040204020203" pitchFamily="34" charset="0"/>
-                <a:ea typeface="Segoe UI" panose="020B0502040204020203" pitchFamily="34" charset="-122"/>
-                <a:cs typeface="Segoe UI" panose="020B0502040204020203" pitchFamily="34" charset="-120"/>
+                <a:latin typeface="Segoe UI" pitchFamily="34" charset="0"/>
+                <a:ea typeface="Segoe UI" pitchFamily="34" charset="-122"/>
+                <a:cs typeface="Segoe UI" pitchFamily="34" charset="-120"/>
               </a:rPr>
               <a:t>EC8208 Software Architecture  ·  University of Ruhuna</a:t>
             </a:r>
@@ -3677,12 +3787,13 @@
             <a:avLst/>
           </a:prstGeom>
           <a:noFill/>
-        </p:spPr>
-        <p:txBody>
-          <a:bodyPr wrap="square" lIns="0" tIns="0" rIns="0" bIns="0" rtlCol="0" anchor="ctr"/>
-          <a:lstStyle/>
-          <a:p>
-            <a:pPr marL="0" indent="0" algn="r">
+          <a:ln/>
+        </p:spPr>
+        <p:txBody>
+          <a:bodyPr wrap="square" lIns="0" tIns="0" rIns="0" bIns="0" rtlCol="0" anchor="ctr"/>
+          <a:lstStyle/>
+          <a:p>
+            <a:pPr algn="r" indent="0" marL="0">
               <a:buNone/>
             </a:pPr>
             <a:r>
@@ -3690,11 +3801,11 @@
                 <a:solidFill>
                   <a:srgbClr val="64748B"/>
                 </a:solidFill>
-                <a:latin typeface="Segoe UI" panose="020B0502040204020203" pitchFamily="34" charset="0"/>
-                <a:ea typeface="Segoe UI" panose="020B0502040204020203" pitchFamily="34" charset="-122"/>
-                <a:cs typeface="Segoe UI" panose="020B0502040204020203" pitchFamily="34" charset="-120"/>
-              </a:rPr>
-              <a:t>03  ·  0:33–1:00</a:t>
+                <a:latin typeface="Segoe UI" pitchFamily="34" charset="0"/>
+                <a:ea typeface="Segoe UI" pitchFamily="34" charset="-122"/>
+                <a:cs typeface="Segoe UI" pitchFamily="34" charset="-120"/>
+              </a:rPr>
+              <a:t>03  ·  1:13–2:08</a:t>
             </a:r>
             <a:endParaRPr lang="en-US" sz="900" dirty="0"/>
           </a:p>
@@ -3742,12 +3853,13 @@
             <a:avLst/>
           </a:prstGeom>
           <a:noFill/>
-        </p:spPr>
-        <p:txBody>
-          <a:bodyPr wrap="square" lIns="0" tIns="0" rIns="0" bIns="0" rtlCol="0" anchor="ctr"/>
-          <a:lstStyle/>
-          <a:p>
-            <a:pPr marL="0" indent="0" algn="ctr">
+          <a:ln/>
+        </p:spPr>
+        <p:txBody>
+          <a:bodyPr wrap="square" lIns="0" tIns="0" rIns="0" bIns="0" rtlCol="0" anchor="ctr"/>
+          <a:lstStyle/>
+          <a:p>
+            <a:pPr algn="ctr" indent="0" marL="0">
               <a:buNone/>
             </a:pPr>
             <a:r>
@@ -3755,9 +3867,9 @@
                 <a:solidFill>
                   <a:srgbClr val="FFFFFF"/>
                 </a:solidFill>
-                <a:latin typeface="Segoe UI Semibold" panose="020B0702040204020203" pitchFamily="34" charset="0"/>
-                <a:ea typeface="Segoe UI Semibold" panose="020B0702040204020203" pitchFamily="34" charset="-122"/>
-                <a:cs typeface="Segoe UI Semibold" panose="020B0702040204020203" pitchFamily="34" charset="-120"/>
+                <a:latin typeface="Segoe UI Semibold" pitchFamily="34" charset="0"/>
+                <a:ea typeface="Segoe UI Semibold" pitchFamily="34" charset="-122"/>
+                <a:cs typeface="Segoe UI Semibold" pitchFamily="34" charset="-120"/>
               </a:rPr>
               <a:t>Facility</a:t>
             </a:r>
@@ -3780,12 +3892,13 @@
             <a:avLst/>
           </a:prstGeom>
           <a:noFill/>
-        </p:spPr>
-        <p:txBody>
-          <a:bodyPr wrap="square" lIns="0" tIns="0" rIns="0" bIns="0" rtlCol="0" anchor="ctr"/>
-          <a:lstStyle/>
-          <a:p>
-            <a:pPr marL="0" indent="0" algn="ctr">
+          <a:ln/>
+        </p:spPr>
+        <p:txBody>
+          <a:bodyPr wrap="square" lIns="0" tIns="0" rIns="0" bIns="0" rtlCol="0" anchor="ctr"/>
+          <a:lstStyle/>
+          <a:p>
+            <a:pPr algn="ctr" indent="0" marL="0">
               <a:buNone/>
             </a:pPr>
             <a:r>
@@ -3793,9 +3906,9 @@
                 <a:solidFill>
                   <a:srgbClr val="E6F4F8"/>
                 </a:solidFill>
-                <a:latin typeface="Segoe UI" panose="020B0502040204020203" pitchFamily="34" charset="0"/>
-                <a:ea typeface="Segoe UI" panose="020B0502040204020203" pitchFamily="34" charset="-122"/>
-                <a:cs typeface="Segoe UI" panose="020B0502040204020203" pitchFamily="34" charset="-120"/>
+                <a:latin typeface="Segoe UI" pitchFamily="34" charset="0"/>
+                <a:ea typeface="Segoe UI" pitchFamily="34" charset="-122"/>
+                <a:cs typeface="Segoe UI" pitchFamily="34" charset="-120"/>
               </a:rPr>
               <a:t>5 types</a:t>
             </a:r>
@@ -3818,12 +3931,13 @@
             <a:avLst/>
           </a:prstGeom>
           <a:noFill/>
-        </p:spPr>
-        <p:txBody>
-          <a:bodyPr wrap="square" lIns="0" tIns="0" rIns="0" bIns="0" rtlCol="0" anchor="ctr"/>
-          <a:lstStyle/>
-          <a:p>
-            <a:pPr marL="0" indent="0" algn="ctr">
+          <a:ln/>
+        </p:spPr>
+        <p:txBody>
+          <a:bodyPr wrap="square" lIns="0" tIns="0" rIns="0" bIns="0" rtlCol="0" anchor="ctr"/>
+          <a:lstStyle/>
+          <a:p>
+            <a:pPr algn="ctr" indent="0" marL="0">
               <a:buNone/>
             </a:pPr>
             <a:r>
@@ -3831,9 +3945,9 @@
                 <a:solidFill>
                   <a:srgbClr val="0891B2"/>
                 </a:solidFill>
-                <a:latin typeface="Segoe UI Semibold" panose="020B0702040204020203" pitchFamily="34" charset="0"/>
-                <a:ea typeface="Segoe UI Semibold" panose="020B0702040204020203" pitchFamily="34" charset="-122"/>
-                <a:cs typeface="Segoe UI Semibold" panose="020B0702040204020203" pitchFamily="34" charset="-120"/>
+                <a:latin typeface="Segoe UI Semibold" pitchFamily="34" charset="0"/>
+                <a:ea typeface="Segoe UI Semibold" pitchFamily="34" charset="-122"/>
+                <a:cs typeface="Segoe UI Semibold" pitchFamily="34" charset="-120"/>
               </a:rPr>
               <a:t>›</a:t>
             </a:r>
@@ -3883,12 +3997,13 @@
             <a:avLst/>
           </a:prstGeom>
           <a:noFill/>
-        </p:spPr>
-        <p:txBody>
-          <a:bodyPr wrap="square" lIns="0" tIns="0" rIns="0" bIns="0" rtlCol="0" anchor="ctr"/>
-          <a:lstStyle/>
-          <a:p>
-            <a:pPr marL="0" indent="0" algn="ctr">
+          <a:ln/>
+        </p:spPr>
+        <p:txBody>
+          <a:bodyPr wrap="square" lIns="0" tIns="0" rIns="0" bIns="0" rtlCol="0" anchor="ctr"/>
+          <a:lstStyle/>
+          <a:p>
+            <a:pPr algn="ctr" indent="0" marL="0">
               <a:buNone/>
             </a:pPr>
             <a:r>
@@ -3896,9 +4011,9 @@
                 <a:solidFill>
                   <a:srgbClr val="0B1B33"/>
                 </a:solidFill>
-                <a:latin typeface="Segoe UI Semibold" panose="020B0702040204020203" pitchFamily="34" charset="0"/>
-                <a:ea typeface="Segoe UI Semibold" panose="020B0702040204020203" pitchFamily="34" charset="-122"/>
-                <a:cs typeface="Segoe UI Semibold" panose="020B0702040204020203" pitchFamily="34" charset="-120"/>
+                <a:latin typeface="Segoe UI Semibold" pitchFamily="34" charset="0"/>
+                <a:ea typeface="Segoe UI Semibold" pitchFamily="34" charset="-122"/>
+                <a:cs typeface="Segoe UI Semibold" pitchFamily="34" charset="-120"/>
               </a:rPr>
               <a:t>Asset</a:t>
             </a:r>
@@ -3921,12 +4036,13 @@
             <a:avLst/>
           </a:prstGeom>
           <a:noFill/>
-        </p:spPr>
-        <p:txBody>
-          <a:bodyPr wrap="square" lIns="0" tIns="0" rIns="0" bIns="0" rtlCol="0" anchor="ctr"/>
-          <a:lstStyle/>
-          <a:p>
-            <a:pPr marL="0" indent="0" algn="ctr">
+          <a:ln/>
+        </p:spPr>
+        <p:txBody>
+          <a:bodyPr wrap="square" lIns="0" tIns="0" rIns="0" bIns="0" rtlCol="0" anchor="ctr"/>
+          <a:lstStyle/>
+          <a:p>
+            <a:pPr algn="ctr" indent="0" marL="0">
               <a:buNone/>
             </a:pPr>
             <a:r>
@@ -3934,9 +4050,9 @@
                 <a:solidFill>
                   <a:srgbClr val="64748B"/>
                 </a:solidFill>
-                <a:latin typeface="Segoe UI" panose="020B0502040204020203" pitchFamily="34" charset="0"/>
-                <a:ea typeface="Segoe UI" panose="020B0502040204020203" pitchFamily="34" charset="-122"/>
-                <a:cs typeface="Segoe UI" panose="020B0502040204020203" pitchFamily="34" charset="-120"/>
+                <a:latin typeface="Segoe UI" pitchFamily="34" charset="0"/>
+                <a:ea typeface="Segoe UI" pitchFamily="34" charset="-122"/>
+                <a:cs typeface="Segoe UI" pitchFamily="34" charset="-120"/>
               </a:rPr>
               <a:t>7 types</a:t>
             </a:r>
@@ -3959,12 +4075,13 @@
             <a:avLst/>
           </a:prstGeom>
           <a:noFill/>
-        </p:spPr>
-        <p:txBody>
-          <a:bodyPr wrap="square" lIns="0" tIns="0" rIns="0" bIns="0" rtlCol="0" anchor="ctr"/>
-          <a:lstStyle/>
-          <a:p>
-            <a:pPr marL="0" indent="0" algn="ctr">
+          <a:ln/>
+        </p:spPr>
+        <p:txBody>
+          <a:bodyPr wrap="square" lIns="0" tIns="0" rIns="0" bIns="0" rtlCol="0" anchor="ctr"/>
+          <a:lstStyle/>
+          <a:p>
+            <a:pPr algn="ctr" indent="0" marL="0">
               <a:buNone/>
             </a:pPr>
             <a:r>
@@ -3972,9 +4089,9 @@
                 <a:solidFill>
                   <a:srgbClr val="0891B2"/>
                 </a:solidFill>
-                <a:latin typeface="Segoe UI Semibold" panose="020B0702040204020203" pitchFamily="34" charset="0"/>
-                <a:ea typeface="Segoe UI Semibold" panose="020B0702040204020203" pitchFamily="34" charset="-122"/>
-                <a:cs typeface="Segoe UI Semibold" panose="020B0702040204020203" pitchFamily="34" charset="-120"/>
+                <a:latin typeface="Segoe UI Semibold" pitchFamily="34" charset="0"/>
+                <a:ea typeface="Segoe UI Semibold" pitchFamily="34" charset="-122"/>
+                <a:cs typeface="Segoe UI Semibold" pitchFamily="34" charset="-120"/>
               </a:rPr>
               <a:t>›</a:t>
             </a:r>
@@ -4024,12 +4141,13 @@
             <a:avLst/>
           </a:prstGeom>
           <a:noFill/>
-        </p:spPr>
-        <p:txBody>
-          <a:bodyPr wrap="square" lIns="0" tIns="0" rIns="0" bIns="0" rtlCol="0" anchor="ctr"/>
-          <a:lstStyle/>
-          <a:p>
-            <a:pPr marL="0" indent="0" algn="ctr">
+          <a:ln/>
+        </p:spPr>
+        <p:txBody>
+          <a:bodyPr wrap="square" lIns="0" tIns="0" rIns="0" bIns="0" rtlCol="0" anchor="ctr"/>
+          <a:lstStyle/>
+          <a:p>
+            <a:pPr algn="ctr" indent="0" marL="0">
               <a:buNone/>
             </a:pPr>
             <a:r>
@@ -4037,9 +4155,9 @@
                 <a:solidFill>
                   <a:srgbClr val="0B1B33"/>
                 </a:solidFill>
-                <a:latin typeface="Segoe UI Semibold" panose="020B0702040204020203" pitchFamily="34" charset="0"/>
-                <a:ea typeface="Segoe UI Semibold" panose="020B0702040204020203" pitchFamily="34" charset="-122"/>
-                <a:cs typeface="Segoe UI Semibold" panose="020B0702040204020203" pitchFamily="34" charset="-120"/>
+                <a:latin typeface="Segoe UI Semibold" pitchFamily="34" charset="0"/>
+                <a:ea typeface="Segoe UI Semibold" pitchFamily="34" charset="-122"/>
+                <a:cs typeface="Segoe UI Semibold" pitchFamily="34" charset="-120"/>
               </a:rPr>
               <a:t>Sensor</a:t>
             </a:r>
@@ -4062,12 +4180,13 @@
             <a:avLst/>
           </a:prstGeom>
           <a:noFill/>
-        </p:spPr>
-        <p:txBody>
-          <a:bodyPr wrap="square" lIns="0" tIns="0" rIns="0" bIns="0" rtlCol="0" anchor="ctr"/>
-          <a:lstStyle/>
-          <a:p>
-            <a:pPr marL="0" indent="0" algn="ctr">
+          <a:ln/>
+        </p:spPr>
+        <p:txBody>
+          <a:bodyPr wrap="square" lIns="0" tIns="0" rIns="0" bIns="0" rtlCol="0" anchor="ctr"/>
+          <a:lstStyle/>
+          <a:p>
+            <a:pPr algn="ctr" indent="0" marL="0">
               <a:buNone/>
             </a:pPr>
             <a:r>
@@ -4075,9 +4194,9 @@
                 <a:solidFill>
                   <a:srgbClr val="64748B"/>
                 </a:solidFill>
-                <a:latin typeface="Segoe UI" panose="020B0502040204020203" pitchFamily="34" charset="0"/>
-                <a:ea typeface="Segoe UI" panose="020B0502040204020203" pitchFamily="34" charset="-122"/>
-                <a:cs typeface="Segoe UI" panose="020B0502040204020203" pitchFamily="34" charset="-120"/>
+                <a:latin typeface="Segoe UI" pitchFamily="34" charset="0"/>
+                <a:ea typeface="Segoe UI" pitchFamily="34" charset="-122"/>
+                <a:cs typeface="Segoe UI" pitchFamily="34" charset="-120"/>
               </a:rPr>
               <a:t>9 metrics</a:t>
             </a:r>
@@ -4123,12 +4242,13 @@
             <a:avLst/>
           </a:prstGeom>
           <a:noFill/>
-        </p:spPr>
-        <p:txBody>
-          <a:bodyPr wrap="square" lIns="0" tIns="0" rIns="0" bIns="0" rtlCol="0" anchor="ctr"/>
-          <a:lstStyle/>
-          <a:p>
-            <a:pPr marL="0" indent="0">
+          <a:ln/>
+        </p:spPr>
+        <p:txBody>
+          <a:bodyPr wrap="square" lIns="0" tIns="0" rIns="0" bIns="0" rtlCol="0" anchor="ctr"/>
+          <a:lstStyle/>
+          <a:p>
+            <a:pPr indent="0" marL="0">
               <a:buNone/>
             </a:pPr>
             <a:r>
@@ -4136,9 +4256,9 @@
                 <a:solidFill>
                   <a:srgbClr val="0891B2"/>
                 </a:solidFill>
-                <a:latin typeface="Segoe UI Semibold" panose="020B0702040204020203" pitchFamily="34" charset="0"/>
-                <a:ea typeface="Segoe UI Semibold" panose="020B0702040204020203" pitchFamily="34" charset="-122"/>
-                <a:cs typeface="Segoe UI Semibold" panose="020B0702040204020203" pitchFamily="34" charset="-120"/>
+                <a:latin typeface="Segoe UI Semibold" pitchFamily="34" charset="0"/>
+                <a:ea typeface="Segoe UI Semibold" pitchFamily="34" charset="-122"/>
+                <a:cs typeface="Segoe UI Semibold" pitchFamily="34" charset="-120"/>
               </a:rPr>
               <a:t>5 · 11 · 32</a:t>
             </a:r>
@@ -4161,12 +4281,13 @@
             <a:avLst/>
           </a:prstGeom>
           <a:noFill/>
+          <a:ln/>
         </p:spPr>
         <p:txBody>
           <a:bodyPr wrap="square" lIns="0" tIns="0" rIns="0" bIns="0" rtlCol="0" anchor="t"/>
           <a:lstStyle/>
           <a:p>
-            <a:pPr marL="0" indent="0">
+            <a:pPr indent="0" marL="0">
               <a:buNone/>
             </a:pPr>
             <a:r>
@@ -4174,9 +4295,9 @@
                 <a:solidFill>
                   <a:srgbClr val="64748B"/>
                 </a:solidFill>
-                <a:latin typeface="Segoe UI" panose="020B0502040204020203" pitchFamily="34" charset="0"/>
-                <a:ea typeface="Segoe UI" panose="020B0502040204020203" pitchFamily="34" charset="-122"/>
-                <a:cs typeface="Segoe UI" panose="020B0502040204020203" pitchFamily="34" charset="-120"/>
+                <a:latin typeface="Segoe UI" pitchFamily="34" charset="0"/>
+                <a:ea typeface="Segoe UI" pitchFamily="34" charset="-122"/>
+                <a:cs typeface="Segoe UI" pitchFamily="34" charset="-120"/>
               </a:rPr>
               <a:t>facilities · assets · sensors</a:t>
             </a:r>
@@ -4222,12 +4343,13 @@
             <a:avLst/>
           </a:prstGeom>
           <a:noFill/>
-        </p:spPr>
-        <p:txBody>
-          <a:bodyPr wrap="square" lIns="0" tIns="0" rIns="0" bIns="0" rtlCol="0" anchor="ctr"/>
-          <a:lstStyle/>
-          <a:p>
-            <a:pPr marL="0" indent="0">
+          <a:ln/>
+        </p:spPr>
+        <p:txBody>
+          <a:bodyPr wrap="square" lIns="0" tIns="0" rIns="0" bIns="0" rtlCol="0" anchor="ctr"/>
+          <a:lstStyle/>
+          <a:p>
+            <a:pPr indent="0" marL="0">
               <a:buNone/>
             </a:pPr>
             <a:r>
@@ -4235,9 +4357,9 @@
                 <a:solidFill>
                   <a:srgbClr val="0891B2"/>
                 </a:solidFill>
-                <a:latin typeface="Segoe UI Semibold" panose="020B0702040204020203" pitchFamily="34" charset="0"/>
-                <a:ea typeface="Segoe UI Semibold" panose="020B0702040204020203" pitchFamily="34" charset="-122"/>
-                <a:cs typeface="Segoe UI Semibold" panose="020B0702040204020203" pitchFamily="34" charset="-120"/>
+                <a:latin typeface="Segoe UI Semibold" pitchFamily="34" charset="0"/>
+                <a:ea typeface="Segoe UI Semibold" pitchFamily="34" charset="-122"/>
+                <a:cs typeface="Segoe UI Semibold" pitchFamily="34" charset="-120"/>
               </a:rPr>
               <a:t>Server-side</a:t>
             </a:r>
@@ -4260,12 +4382,13 @@
             <a:avLst/>
           </a:prstGeom>
           <a:noFill/>
+          <a:ln/>
         </p:spPr>
         <p:txBody>
           <a:bodyPr wrap="square" lIns="0" tIns="0" rIns="0" bIns="0" rtlCol="0" anchor="t"/>
           <a:lstStyle/>
           <a:p>
-            <a:pPr marL="0" indent="0">
+            <a:pPr indent="0" marL="0">
               <a:buNone/>
             </a:pPr>
             <a:r>
@@ -4273,9 +4396,9 @@
                 <a:solidFill>
                   <a:srgbClr val="64748B"/>
                 </a:solidFill>
-                <a:latin typeface="Segoe UI" panose="020B0502040204020203" pitchFamily="34" charset="0"/>
-                <a:ea typeface="Segoe UI" panose="020B0502040204020203" pitchFamily="34" charset="-122"/>
-                <a:cs typeface="Segoe UI" panose="020B0502040204020203" pitchFamily="34" charset="-120"/>
+                <a:latin typeface="Segoe UI" pitchFamily="34" charset="0"/>
+                <a:ea typeface="Segoe UI" pitchFamily="34" charset="-122"/>
+                <a:cs typeface="Segoe UI" pitchFamily="34" charset="-120"/>
               </a:rPr>
               <a:t>search and paging</a:t>
             </a:r>
@@ -4321,12 +4444,13 @@
             <a:avLst/>
           </a:prstGeom>
           <a:noFill/>
-        </p:spPr>
-        <p:txBody>
-          <a:bodyPr wrap="square" lIns="0" tIns="0" rIns="0" bIns="0" rtlCol="0" anchor="ctr"/>
-          <a:lstStyle/>
-          <a:p>
-            <a:pPr marL="0" indent="0">
+          <a:ln/>
+        </p:spPr>
+        <p:txBody>
+          <a:bodyPr wrap="square" lIns="0" tIns="0" rIns="0" bIns="0" rtlCol="0" anchor="ctr"/>
+          <a:lstStyle/>
+          <a:p>
+            <a:pPr indent="0" marL="0">
               <a:buNone/>
             </a:pPr>
             <a:r>
@@ -4334,9 +4458,9 @@
                 <a:solidFill>
                   <a:srgbClr val="0891B2"/>
                 </a:solidFill>
-                <a:latin typeface="Segoe UI Semibold" panose="020B0702040204020203" pitchFamily="34" charset="0"/>
-                <a:ea typeface="Segoe UI Semibold" panose="020B0702040204020203" pitchFamily="34" charset="-122"/>
-                <a:cs typeface="Segoe UI Semibold" panose="020B0702040204020203" pitchFamily="34" charset="-120"/>
+                <a:latin typeface="Segoe UI Semibold" pitchFamily="34" charset="0"/>
+                <a:ea typeface="Segoe UI Semibold" pitchFamily="34" charset="-122"/>
+                <a:cs typeface="Segoe UI Semibold" pitchFamily="34" charset="-120"/>
               </a:rPr>
               <a:t>Validated</a:t>
             </a:r>
@@ -4359,12 +4483,13 @@
             <a:avLst/>
           </a:prstGeom>
           <a:noFill/>
+          <a:ln/>
         </p:spPr>
         <p:txBody>
           <a:bodyPr wrap="square" lIns="0" tIns="0" rIns="0" bIns="0" rtlCol="0" anchor="t"/>
           <a:lstStyle/>
           <a:p>
-            <a:pPr marL="0" indent="0">
+            <a:pPr indent="0" marL="0">
               <a:buNone/>
             </a:pPr>
             <a:r>
@@ -4372,9 +4497,9 @@
                 <a:solidFill>
                   <a:srgbClr val="64748B"/>
                 </a:solidFill>
-                <a:latin typeface="Segoe UI" panose="020B0502040204020203" pitchFamily="34" charset="0"/>
-                <a:ea typeface="Segoe UI" panose="020B0502040204020203" pitchFamily="34" charset="-122"/>
-                <a:cs typeface="Segoe UI" panose="020B0502040204020203" pitchFamily="34" charset="-120"/>
+                <a:latin typeface="Segoe UI" pitchFamily="34" charset="0"/>
+                <a:ea typeface="Segoe UI" pitchFamily="34" charset="-122"/>
+                <a:cs typeface="Segoe UI" pitchFamily="34" charset="-120"/>
               </a:rPr>
               <a:t>every form</a:t>
             </a:r>
@@ -4424,12 +4549,13 @@
             <a:avLst/>
           </a:prstGeom>
           <a:noFill/>
-        </p:spPr>
-        <p:txBody>
-          <a:bodyPr wrap="square" lIns="0" tIns="0" rIns="0" bIns="0" rtlCol="0" anchor="ctr"/>
-          <a:lstStyle/>
-          <a:p>
-            <a:pPr marL="0" indent="0">
+          <a:ln/>
+        </p:spPr>
+        <p:txBody>
+          <a:bodyPr wrap="square" lIns="0" tIns="0" rIns="0" bIns="0" rtlCol="0" anchor="ctr"/>
+          <a:lstStyle/>
+          <a:p>
+            <a:pPr indent="0" marL="0">
               <a:buNone/>
             </a:pPr>
             <a:r>
@@ -4437,20 +4563,23 @@
                 <a:solidFill>
                   <a:srgbClr val="0891B2"/>
                 </a:solidFill>
-                <a:latin typeface="Segoe UI" panose="020B0502040204020203" pitchFamily="34" charset="0"/>
-                <a:ea typeface="Segoe UI" panose="020B0502040204020203" pitchFamily="34" charset="-122"/>
-                <a:cs typeface="Segoe UI" panose="020B0502040204020203" pitchFamily="34" charset="-120"/>
+                <a:latin typeface="Segoe UI" pitchFamily="34" charset="0"/>
+                <a:ea typeface="Segoe UI" pitchFamily="34" charset="-122"/>
+                <a:cs typeface="Segoe UI" pitchFamily="34" charset="-120"/>
               </a:rPr>
               <a:t>LIVE  </a:t>
             </a:r>
+            <a:pPr indent="0" marL="0">
+              <a:buNone/>
+            </a:pPr>
             <a:r>
               <a:rPr lang="en-US" sz="1100" dirty="0">
                 <a:solidFill>
                   <a:srgbClr val="0B1B33"/>
                 </a:solidFill>
-                <a:latin typeface="Segoe UI" panose="020B0502040204020203" pitchFamily="34" charset="0"/>
-                <a:ea typeface="Segoe UI" panose="020B0502040204020203" pitchFamily="34" charset="-122"/>
-                <a:cs typeface="Segoe UI" panose="020B0502040204020203" pitchFamily="34" charset="-120"/>
+                <a:latin typeface="Segoe UI" pitchFamily="34" charset="0"/>
+                <a:ea typeface="Segoe UI" pitchFamily="34" charset="-122"/>
+                <a:cs typeface="Segoe UI" pitchFamily="34" charset="-120"/>
               </a:rPr>
               <a:t>Assets page</a:t>
             </a:r>
@@ -4468,13 +4597,12 @@
 
 <file path=ppt/slides/slide4.xml><?xml version="1.0" encoding="utf-8"?>
 <p:sld xmlns:a="http://schemas.openxmlformats.org/drawingml/2006/main" xmlns:r="http://schemas.openxmlformats.org/officeDocument/2006/relationships" xmlns:p="http://schemas.openxmlformats.org/presentationml/2006/main">
-  <p:cSld>
+  <p:cSld name="Slide 4">
     <p:bg>
       <p:bgPr>
         <a:solidFill>
           <a:srgbClr val="F6F8FB"/>
         </a:solidFill>
-        <a:effectLst/>
       </p:bgPr>
     </p:bg>
     <p:spTree>
@@ -4531,24 +4659,25 @@
             <a:avLst/>
           </a:prstGeom>
           <a:noFill/>
-        </p:spPr>
-        <p:txBody>
-          <a:bodyPr wrap="square" lIns="0" tIns="0" rIns="0" bIns="0" rtlCol="0" anchor="ctr"/>
-          <a:lstStyle/>
-          <a:p>
-            <a:pPr marL="0" indent="0">
-              <a:buNone/>
-            </a:pPr>
-            <a:r>
-              <a:rPr lang="en-US" sz="1050" kern="0" spc="400" dirty="0">
+          <a:ln/>
+        </p:spPr>
+        <p:txBody>
+          <a:bodyPr wrap="square" lIns="0" tIns="0" rIns="0" bIns="0" rtlCol="0" anchor="ctr"/>
+          <a:lstStyle/>
+          <a:p>
+            <a:pPr indent="0" marL="0">
+              <a:buNone/>
+            </a:pPr>
+            <a:r>
+              <a:rPr lang="en-US" sz="1050" spc="400" kern="0" dirty="0">
                 <a:solidFill>
                   <a:srgbClr val="0891B2"/>
                 </a:solidFill>
-                <a:latin typeface="Segoe UI Semibold" panose="020B0702040204020203" pitchFamily="34" charset="0"/>
-                <a:ea typeface="Segoe UI Semibold" panose="020B0702040204020203" pitchFamily="34" charset="-122"/>
-                <a:cs typeface="Segoe UI Semibold" panose="020B0702040204020203" pitchFamily="34" charset="-120"/>
-              </a:rPr>
-              <a:t>04 · MONITORING SERVICE</a:t>
+                <a:latin typeface="Segoe UI Semibold" pitchFamily="34" charset="0"/>
+                <a:ea typeface="Segoe UI Semibold" pitchFamily="34" charset="-122"/>
+                <a:cs typeface="Segoe UI Semibold" pitchFamily="34" charset="-120"/>
+              </a:rPr>
+              <a:t>04 · GOVINDU · MONITORING SERVICE</a:t>
             </a:r>
             <a:endParaRPr lang="en-US" sz="1050" dirty="0"/>
           </a:p>
@@ -4569,12 +4698,13 @@
             <a:avLst/>
           </a:prstGeom>
           <a:noFill/>
-        </p:spPr>
-        <p:txBody>
-          <a:bodyPr wrap="square" lIns="0" tIns="0" rIns="0" bIns="0" rtlCol="0" anchor="ctr"/>
-          <a:lstStyle/>
-          <a:p>
-            <a:pPr marL="0" indent="0">
+          <a:ln/>
+        </p:spPr>
+        <p:txBody>
+          <a:bodyPr wrap="square" lIns="0" tIns="0" rIns="0" bIns="0" rtlCol="0" anchor="ctr"/>
+          <a:lstStyle/>
+          <a:p>
+            <a:pPr indent="0" marL="0">
               <a:buNone/>
             </a:pPr>
             <a:r>
@@ -4582,9 +4712,9 @@
                 <a:solidFill>
                   <a:srgbClr val="0B1B33"/>
                 </a:solidFill>
-                <a:latin typeface="Segoe UI Semibold" panose="020B0702040204020203" pitchFamily="34" charset="0"/>
-                <a:ea typeface="Segoe UI Semibold" panose="020B0702040204020203" pitchFamily="34" charset="-122"/>
-                <a:cs typeface="Segoe UI Semibold" panose="020B0702040204020203" pitchFamily="34" charset="-120"/>
+                <a:latin typeface="Segoe UI Semibold" pitchFamily="34" charset="0"/>
+                <a:ea typeface="Segoe UI Semibold" pitchFamily="34" charset="-122"/>
+                <a:cs typeface="Segoe UI Semibold" pitchFamily="34" charset="-120"/>
               </a:rPr>
               <a:t>From a sensor reading to an instant alert</a:t>
             </a:r>
@@ -4630,12 +4760,13 @@
             <a:avLst/>
           </a:prstGeom>
           <a:noFill/>
-        </p:spPr>
-        <p:txBody>
-          <a:bodyPr wrap="square" lIns="0" tIns="0" rIns="0" bIns="0" rtlCol="0" anchor="ctr"/>
-          <a:lstStyle/>
-          <a:p>
-            <a:pPr marL="0" indent="0">
+          <a:ln/>
+        </p:spPr>
+        <p:txBody>
+          <a:bodyPr wrap="square" lIns="0" tIns="0" rIns="0" bIns="0" rtlCol="0" anchor="ctr"/>
+          <a:lstStyle/>
+          <a:p>
+            <a:pPr indent="0" marL="0">
               <a:buNone/>
             </a:pPr>
             <a:r>
@@ -4643,9 +4774,9 @@
                 <a:solidFill>
                   <a:srgbClr val="64748B"/>
                 </a:solidFill>
-                <a:latin typeface="Segoe UI" panose="020B0502040204020203" pitchFamily="34" charset="0"/>
-                <a:ea typeface="Segoe UI" panose="020B0502040204020203" pitchFamily="34" charset="-122"/>
-                <a:cs typeface="Segoe UI" panose="020B0502040204020203" pitchFamily="34" charset="-120"/>
+                <a:latin typeface="Segoe UI" pitchFamily="34" charset="0"/>
+                <a:ea typeface="Segoe UI" pitchFamily="34" charset="-122"/>
+                <a:cs typeface="Segoe UI" pitchFamily="34" charset="-120"/>
               </a:rPr>
               <a:t>EC8208 Software Architecture  ·  University of Ruhuna</a:t>
             </a:r>
@@ -4668,12 +4799,13 @@
             <a:avLst/>
           </a:prstGeom>
           <a:noFill/>
-        </p:spPr>
-        <p:txBody>
-          <a:bodyPr wrap="square" lIns="0" tIns="0" rIns="0" bIns="0" rtlCol="0" anchor="ctr"/>
-          <a:lstStyle/>
-          <a:p>
-            <a:pPr marL="0" indent="0" algn="r">
+          <a:ln/>
+        </p:spPr>
+        <p:txBody>
+          <a:bodyPr wrap="square" lIns="0" tIns="0" rIns="0" bIns="0" rtlCol="0" anchor="ctr"/>
+          <a:lstStyle/>
+          <a:p>
+            <a:pPr algn="r" indent="0" marL="0">
               <a:buNone/>
             </a:pPr>
             <a:r>
@@ -4681,11 +4813,11 @@
                 <a:solidFill>
                   <a:srgbClr val="64748B"/>
                 </a:solidFill>
-                <a:latin typeface="Segoe UI" panose="020B0502040204020203" pitchFamily="34" charset="0"/>
-                <a:ea typeface="Segoe UI" panose="020B0502040204020203" pitchFamily="34" charset="-122"/>
-                <a:cs typeface="Segoe UI" panose="020B0502040204020203" pitchFamily="34" charset="-120"/>
-              </a:rPr>
-              <a:t>04  ·  1:00–1:49</a:t>
+                <a:latin typeface="Segoe UI" pitchFamily="34" charset="0"/>
+                <a:ea typeface="Segoe UI" pitchFamily="34" charset="-122"/>
+                <a:cs typeface="Segoe UI" pitchFamily="34" charset="-120"/>
+              </a:rPr>
+              <a:t>04  ·  2:08–3:46</a:t>
             </a:r>
             <a:endParaRPr lang="en-US" sz="900" dirty="0"/>
           </a:p>
@@ -4733,12 +4865,13 @@
             <a:avLst/>
           </a:prstGeom>
           <a:noFill/>
-        </p:spPr>
-        <p:txBody>
-          <a:bodyPr wrap="square" lIns="0" tIns="0" rIns="0" bIns="0" rtlCol="0" anchor="ctr"/>
-          <a:lstStyle/>
-          <a:p>
-            <a:pPr marL="0" indent="0" algn="ctr">
+          <a:ln/>
+        </p:spPr>
+        <p:txBody>
+          <a:bodyPr wrap="square" lIns="0" tIns="0" rIns="0" bIns="0" rtlCol="0" anchor="ctr"/>
+          <a:lstStyle/>
+          <a:p>
+            <a:pPr algn="ctr" indent="0" marL="0">
               <a:buNone/>
             </a:pPr>
             <a:r>
@@ -4746,9 +4879,9 @@
                 <a:solidFill>
                   <a:srgbClr val="FFFFFF"/>
                 </a:solidFill>
-                <a:latin typeface="Segoe UI Semibold" panose="020B0702040204020203" pitchFamily="34" charset="0"/>
-                <a:ea typeface="Segoe UI Semibold" panose="020B0702040204020203" pitchFamily="34" charset="-122"/>
-                <a:cs typeface="Segoe UI Semibold" panose="020B0702040204020203" pitchFamily="34" charset="-120"/>
+                <a:latin typeface="Segoe UI Semibold" pitchFamily="34" charset="0"/>
+                <a:ea typeface="Segoe UI Semibold" pitchFamily="34" charset="-122"/>
+                <a:cs typeface="Segoe UI Semibold" pitchFamily="34" charset="-120"/>
               </a:rPr>
               <a:t>Reading</a:t>
             </a:r>
@@ -4771,12 +4904,13 @@
             <a:avLst/>
           </a:prstGeom>
           <a:noFill/>
-        </p:spPr>
-        <p:txBody>
-          <a:bodyPr wrap="square" lIns="0" tIns="0" rIns="0" bIns="0" rtlCol="0" anchor="ctr"/>
-          <a:lstStyle/>
-          <a:p>
-            <a:pPr marL="0" indent="0" algn="ctr">
+          <a:ln/>
+        </p:spPr>
+        <p:txBody>
+          <a:bodyPr wrap="square" lIns="0" tIns="0" rIns="0" bIns="0" rtlCol="0" anchor="ctr"/>
+          <a:lstStyle/>
+          <a:p>
+            <a:pPr algn="ctr" indent="0" marL="0">
               <a:buNone/>
             </a:pPr>
             <a:r>
@@ -4784,9 +4918,9 @@
                 <a:solidFill>
                   <a:srgbClr val="E6F4F8"/>
                 </a:solidFill>
-                <a:latin typeface="Segoe UI" panose="020B0502040204020203" pitchFamily="34" charset="0"/>
-                <a:ea typeface="Segoe UI" panose="020B0502040204020203" pitchFamily="34" charset="-122"/>
-                <a:cs typeface="Segoe UI" panose="020B0502040204020203" pitchFamily="34" charset="-120"/>
+                <a:latin typeface="Segoe UI" pitchFamily="34" charset="0"/>
+                <a:ea typeface="Segoe UI" pitchFamily="34" charset="-122"/>
+                <a:cs typeface="Segoe UI" pitchFamily="34" charset="-120"/>
               </a:rPr>
               <a:t>every few seconds</a:t>
             </a:r>
@@ -4809,12 +4943,13 @@
             <a:avLst/>
           </a:prstGeom>
           <a:noFill/>
-        </p:spPr>
-        <p:txBody>
-          <a:bodyPr wrap="square" lIns="0" tIns="0" rIns="0" bIns="0" rtlCol="0" anchor="ctr"/>
-          <a:lstStyle/>
-          <a:p>
-            <a:pPr marL="0" indent="0" algn="ctr">
+          <a:ln/>
+        </p:spPr>
+        <p:txBody>
+          <a:bodyPr wrap="square" lIns="0" tIns="0" rIns="0" bIns="0" rtlCol="0" anchor="ctr"/>
+          <a:lstStyle/>
+          <a:p>
+            <a:pPr algn="ctr" indent="0" marL="0">
               <a:buNone/>
             </a:pPr>
             <a:r>
@@ -4822,9 +4957,9 @@
                 <a:solidFill>
                   <a:srgbClr val="0891B2"/>
                 </a:solidFill>
-                <a:latin typeface="Segoe UI Semibold" panose="020B0702040204020203" pitchFamily="34" charset="0"/>
-                <a:ea typeface="Segoe UI Semibold" panose="020B0702040204020203" pitchFamily="34" charset="-122"/>
-                <a:cs typeface="Segoe UI Semibold" panose="020B0702040204020203" pitchFamily="34" charset="-120"/>
+                <a:latin typeface="Segoe UI Semibold" pitchFamily="34" charset="0"/>
+                <a:ea typeface="Segoe UI Semibold" pitchFamily="34" charset="-122"/>
+                <a:cs typeface="Segoe UI Semibold" pitchFamily="34" charset="-120"/>
               </a:rPr>
               <a:t>›</a:t>
             </a:r>
@@ -4874,12 +5009,13 @@
             <a:avLst/>
           </a:prstGeom>
           <a:noFill/>
-        </p:spPr>
-        <p:txBody>
-          <a:bodyPr wrap="square" lIns="0" tIns="0" rIns="0" bIns="0" rtlCol="0" anchor="ctr"/>
-          <a:lstStyle/>
-          <a:p>
-            <a:pPr marL="0" indent="0" algn="ctr">
+          <a:ln/>
+        </p:spPr>
+        <p:txBody>
+          <a:bodyPr wrap="square" lIns="0" tIns="0" rIns="0" bIns="0" rtlCol="0" anchor="ctr"/>
+          <a:lstStyle/>
+          <a:p>
+            <a:pPr algn="ctr" indent="0" marL="0">
               <a:buNone/>
             </a:pPr>
             <a:r>
@@ -4887,9 +5023,9 @@
                 <a:solidFill>
                   <a:srgbClr val="0B1B33"/>
                 </a:solidFill>
-                <a:latin typeface="Segoe UI Semibold" panose="020B0702040204020203" pitchFamily="34" charset="0"/>
-                <a:ea typeface="Segoe UI Semibold" panose="020B0702040204020203" pitchFamily="34" charset="-122"/>
-                <a:cs typeface="Segoe UI Semibold" panose="020B0702040204020203" pitchFamily="34" charset="-120"/>
+                <a:latin typeface="Segoe UI Semibold" pitchFamily="34" charset="0"/>
+                <a:ea typeface="Segoe UI Semibold" pitchFamily="34" charset="-122"/>
+                <a:cs typeface="Segoe UI Semibold" pitchFamily="34" charset="-120"/>
               </a:rPr>
               <a:t>Rule check</a:t>
             </a:r>
@@ -4912,12 +5048,13 @@
             <a:avLst/>
           </a:prstGeom>
           <a:noFill/>
-        </p:spPr>
-        <p:txBody>
-          <a:bodyPr wrap="square" lIns="0" tIns="0" rIns="0" bIns="0" rtlCol="0" anchor="ctr"/>
-          <a:lstStyle/>
-          <a:p>
-            <a:pPr marL="0" indent="0" algn="ctr">
+          <a:ln/>
+        </p:spPr>
+        <p:txBody>
+          <a:bodyPr wrap="square" lIns="0" tIns="0" rIns="0" bIns="0" rtlCol="0" anchor="ctr"/>
+          <a:lstStyle/>
+          <a:p>
+            <a:pPr algn="ctr" indent="0" marL="0">
               <a:buNone/>
             </a:pPr>
             <a:r>
@@ -4925,9 +5062,9 @@
                 <a:solidFill>
                   <a:srgbClr val="64748B"/>
                 </a:solidFill>
-                <a:latin typeface="Segoe UI" panose="020B0502040204020203" pitchFamily="34" charset="0"/>
-                <a:ea typeface="Segoe UI" panose="020B0502040204020203" pitchFamily="34" charset="-122"/>
-                <a:cs typeface="Segoe UI" panose="020B0502040204020203" pitchFamily="34" charset="-120"/>
+                <a:latin typeface="Segoe UI" pitchFamily="34" charset="0"/>
+                <a:ea typeface="Segoe UI" pitchFamily="34" charset="-122"/>
+                <a:cs typeface="Segoe UI" pitchFamily="34" charset="-120"/>
               </a:rPr>
               <a:t>threshold</a:t>
             </a:r>
@@ -4950,12 +5087,13 @@
             <a:avLst/>
           </a:prstGeom>
           <a:noFill/>
-        </p:spPr>
-        <p:txBody>
-          <a:bodyPr wrap="square" lIns="0" tIns="0" rIns="0" bIns="0" rtlCol="0" anchor="ctr"/>
-          <a:lstStyle/>
-          <a:p>
-            <a:pPr marL="0" indent="0" algn="ctr">
+          <a:ln/>
+        </p:spPr>
+        <p:txBody>
+          <a:bodyPr wrap="square" lIns="0" tIns="0" rIns="0" bIns="0" rtlCol="0" anchor="ctr"/>
+          <a:lstStyle/>
+          <a:p>
+            <a:pPr algn="ctr" indent="0" marL="0">
               <a:buNone/>
             </a:pPr>
             <a:r>
@@ -4963,9 +5101,9 @@
                 <a:solidFill>
                   <a:srgbClr val="0891B2"/>
                 </a:solidFill>
-                <a:latin typeface="Segoe UI Semibold" panose="020B0702040204020203" pitchFamily="34" charset="0"/>
-                <a:ea typeface="Segoe UI Semibold" panose="020B0702040204020203" pitchFamily="34" charset="-122"/>
-                <a:cs typeface="Segoe UI Semibold" panose="020B0702040204020203" pitchFamily="34" charset="-120"/>
+                <a:latin typeface="Segoe UI Semibold" pitchFamily="34" charset="0"/>
+                <a:ea typeface="Segoe UI Semibold" pitchFamily="34" charset="-122"/>
+                <a:cs typeface="Segoe UI Semibold" pitchFamily="34" charset="-120"/>
               </a:rPr>
               <a:t>›</a:t>
             </a:r>
@@ -5015,12 +5153,13 @@
             <a:avLst/>
           </a:prstGeom>
           <a:noFill/>
-        </p:spPr>
-        <p:txBody>
-          <a:bodyPr wrap="square" lIns="0" tIns="0" rIns="0" bIns="0" rtlCol="0" anchor="ctr"/>
-          <a:lstStyle/>
-          <a:p>
-            <a:pPr marL="0" indent="0" algn="ctr">
+          <a:ln/>
+        </p:spPr>
+        <p:txBody>
+          <a:bodyPr wrap="square" lIns="0" tIns="0" rIns="0" bIns="0" rtlCol="0" anchor="ctr"/>
+          <a:lstStyle/>
+          <a:p>
+            <a:pPr algn="ctr" indent="0" marL="0">
               <a:buNone/>
             </a:pPr>
             <a:r>
@@ -5028,9 +5167,9 @@
                 <a:solidFill>
                   <a:srgbClr val="0B1B33"/>
                 </a:solidFill>
-                <a:latin typeface="Segoe UI Semibold" panose="020B0702040204020203" pitchFamily="34" charset="0"/>
-                <a:ea typeface="Segoe UI Semibold" panose="020B0702040204020203" pitchFamily="34" charset="-122"/>
-                <a:cs typeface="Segoe UI Semibold" panose="020B0702040204020203" pitchFamily="34" charset="-120"/>
+                <a:latin typeface="Segoe UI Semibold" pitchFamily="34" charset="0"/>
+                <a:ea typeface="Segoe UI Semibold" pitchFamily="34" charset="-122"/>
+                <a:cs typeface="Segoe UI Semibold" pitchFamily="34" charset="-120"/>
               </a:rPr>
               <a:t>Alert</a:t>
             </a:r>
@@ -5053,12 +5192,13 @@
             <a:avLst/>
           </a:prstGeom>
           <a:noFill/>
-        </p:spPr>
-        <p:txBody>
-          <a:bodyPr wrap="square" lIns="0" tIns="0" rIns="0" bIns="0" rtlCol="0" anchor="ctr"/>
-          <a:lstStyle/>
-          <a:p>
-            <a:pPr marL="0" indent="0" algn="ctr">
+          <a:ln/>
+        </p:spPr>
+        <p:txBody>
+          <a:bodyPr wrap="square" lIns="0" tIns="0" rIns="0" bIns="0" rtlCol="0" anchor="ctr"/>
+          <a:lstStyle/>
+          <a:p>
+            <a:pPr algn="ctr" indent="0" marL="0">
               <a:buNone/>
             </a:pPr>
             <a:r>
@@ -5066,9 +5206,9 @@
                 <a:solidFill>
                   <a:srgbClr val="64748B"/>
                 </a:solidFill>
-                <a:latin typeface="Segoe UI" panose="020B0502040204020203" pitchFamily="34" charset="0"/>
-                <a:ea typeface="Segoe UI" panose="020B0502040204020203" pitchFamily="34" charset="-122"/>
-                <a:cs typeface="Segoe UI" panose="020B0502040204020203" pitchFamily="34" charset="-120"/>
+                <a:latin typeface="Segoe UI" pitchFamily="34" charset="0"/>
+                <a:ea typeface="Segoe UI" pitchFamily="34" charset="-122"/>
+                <a:cs typeface="Segoe UI" pitchFamily="34" charset="-120"/>
               </a:rPr>
               <a:t>one per asset</a:t>
             </a:r>
@@ -5091,12 +5231,13 @@
             <a:avLst/>
           </a:prstGeom>
           <a:noFill/>
-        </p:spPr>
-        <p:txBody>
-          <a:bodyPr wrap="square" lIns="0" tIns="0" rIns="0" bIns="0" rtlCol="0" anchor="ctr"/>
-          <a:lstStyle/>
-          <a:p>
-            <a:pPr marL="0" indent="0" algn="ctr">
+          <a:ln/>
+        </p:spPr>
+        <p:txBody>
+          <a:bodyPr wrap="square" lIns="0" tIns="0" rIns="0" bIns="0" rtlCol="0" anchor="ctr"/>
+          <a:lstStyle/>
+          <a:p>
+            <a:pPr algn="ctr" indent="0" marL="0">
               <a:buNone/>
             </a:pPr>
             <a:r>
@@ -5104,9 +5245,9 @@
                 <a:solidFill>
                   <a:srgbClr val="0891B2"/>
                 </a:solidFill>
-                <a:latin typeface="Segoe UI Semibold" panose="020B0702040204020203" pitchFamily="34" charset="0"/>
-                <a:ea typeface="Segoe UI Semibold" panose="020B0702040204020203" pitchFamily="34" charset="-122"/>
-                <a:cs typeface="Segoe UI Semibold" panose="020B0702040204020203" pitchFamily="34" charset="-120"/>
+                <a:latin typeface="Segoe UI Semibold" pitchFamily="34" charset="0"/>
+                <a:ea typeface="Segoe UI Semibold" pitchFamily="34" charset="-122"/>
+                <a:cs typeface="Segoe UI Semibold" pitchFamily="34" charset="-120"/>
               </a:rPr>
               <a:t>›</a:t>
             </a:r>
@@ -5156,12 +5297,13 @@
             <a:avLst/>
           </a:prstGeom>
           <a:noFill/>
-        </p:spPr>
-        <p:txBody>
-          <a:bodyPr wrap="square" lIns="0" tIns="0" rIns="0" bIns="0" rtlCol="0" anchor="ctr"/>
-          <a:lstStyle/>
-          <a:p>
-            <a:pPr marL="0" indent="0" algn="ctr">
+          <a:ln/>
+        </p:spPr>
+        <p:txBody>
+          <a:bodyPr wrap="square" lIns="0" tIns="0" rIns="0" bIns="0" rtlCol="0" anchor="ctr"/>
+          <a:lstStyle/>
+          <a:p>
+            <a:pPr algn="ctr" indent="0" marL="0">
               <a:buNone/>
             </a:pPr>
             <a:r>
@@ -5169,9 +5311,9 @@
                 <a:solidFill>
                   <a:srgbClr val="0B1B33"/>
                 </a:solidFill>
-                <a:latin typeface="Segoe UI Semibold" panose="020B0702040204020203" pitchFamily="34" charset="0"/>
-                <a:ea typeface="Segoe UI Semibold" panose="020B0702040204020203" pitchFamily="34" charset="-122"/>
-                <a:cs typeface="Segoe UI Semibold" panose="020B0702040204020203" pitchFamily="34" charset="-120"/>
+                <a:latin typeface="Segoe UI Semibold" pitchFamily="34" charset="0"/>
+                <a:ea typeface="Segoe UI Semibold" pitchFamily="34" charset="-122"/>
+                <a:cs typeface="Segoe UI Semibold" pitchFamily="34" charset="-120"/>
               </a:rPr>
               <a:t>RabbitMQ</a:t>
             </a:r>
@@ -5194,12 +5336,13 @@
             <a:avLst/>
           </a:prstGeom>
           <a:noFill/>
-        </p:spPr>
-        <p:txBody>
-          <a:bodyPr wrap="square" lIns="0" tIns="0" rIns="0" bIns="0" rtlCol="0" anchor="ctr"/>
-          <a:lstStyle/>
-          <a:p>
-            <a:pPr marL="0" indent="0" algn="ctr">
+          <a:ln/>
+        </p:spPr>
+        <p:txBody>
+          <a:bodyPr wrap="square" lIns="0" tIns="0" rIns="0" bIns="0" rtlCol="0" anchor="ctr"/>
+          <a:lstStyle/>
+          <a:p>
+            <a:pPr algn="ctr" indent="0" marL="0">
               <a:buNone/>
             </a:pPr>
             <a:r>
@@ -5207,9 +5350,9 @@
                 <a:solidFill>
                   <a:srgbClr val="64748B"/>
                 </a:solidFill>
-                <a:latin typeface="Segoe UI" panose="020B0502040204020203" pitchFamily="34" charset="0"/>
-                <a:ea typeface="Segoe UI" panose="020B0502040204020203" pitchFamily="34" charset="-122"/>
-                <a:cs typeface="Segoe UI" panose="020B0502040204020203" pitchFamily="34" charset="-120"/>
+                <a:latin typeface="Segoe UI" pitchFamily="34" charset="0"/>
+                <a:ea typeface="Segoe UI" pitchFamily="34" charset="-122"/>
+                <a:cs typeface="Segoe UI" pitchFamily="34" charset="-120"/>
               </a:rPr>
               <a:t>event</a:t>
             </a:r>
@@ -5255,12 +5398,13 @@
             <a:avLst/>
           </a:prstGeom>
           <a:noFill/>
-        </p:spPr>
-        <p:txBody>
-          <a:bodyPr wrap="square" lIns="0" tIns="0" rIns="0" bIns="0" rtlCol="0" anchor="ctr"/>
-          <a:lstStyle/>
-          <a:p>
-            <a:pPr marL="0" indent="0">
+          <a:ln/>
+        </p:spPr>
+        <p:txBody>
+          <a:bodyPr wrap="square" lIns="0" tIns="0" rIns="0" bIns="0" rtlCol="0" anchor="ctr"/>
+          <a:lstStyle/>
+          <a:p>
+            <a:pPr indent="0" marL="0">
               <a:buNone/>
             </a:pPr>
             <a:r>
@@ -5268,9 +5412,9 @@
                 <a:solidFill>
                   <a:srgbClr val="0891B2"/>
                 </a:solidFill>
-                <a:latin typeface="Segoe UI Semibold" panose="020B0702040204020203" pitchFamily="34" charset="0"/>
-                <a:ea typeface="Segoe UI Semibold" panose="020B0702040204020203" pitchFamily="34" charset="-122"/>
-                <a:cs typeface="Segoe UI Semibold" panose="020B0702040204020203" pitchFamily="34" charset="-120"/>
+                <a:latin typeface="Segoe UI Semibold" pitchFamily="34" charset="0"/>
+                <a:ea typeface="Segoe UI Semibold" pitchFamily="34" charset="-122"/>
+                <a:cs typeface="Segoe UI Semibold" pitchFamily="34" charset="-120"/>
               </a:rPr>
               <a:t>16,000+</a:t>
             </a:r>
@@ -5293,12 +5437,13 @@
             <a:avLst/>
           </a:prstGeom>
           <a:noFill/>
+          <a:ln/>
         </p:spPr>
         <p:txBody>
           <a:bodyPr wrap="square" lIns="0" tIns="0" rIns="0" bIns="0" rtlCol="0" anchor="t"/>
           <a:lstStyle/>
           <a:p>
-            <a:pPr marL="0" indent="0">
+            <a:pPr indent="0" marL="0">
               <a:buNone/>
             </a:pPr>
             <a:r>
@@ -5306,9 +5451,9 @@
                 <a:solidFill>
                   <a:srgbClr val="64748B"/>
                 </a:solidFill>
-                <a:latin typeface="Segoe UI" panose="020B0502040204020203" pitchFamily="34" charset="0"/>
-                <a:ea typeface="Segoe UI" panose="020B0502040204020203" pitchFamily="34" charset="-122"/>
-                <a:cs typeface="Segoe UI" panose="020B0502040204020203" pitchFamily="34" charset="-120"/>
+                <a:latin typeface="Segoe UI" pitchFamily="34" charset="0"/>
+                <a:ea typeface="Segoe UI" pitchFamily="34" charset="-122"/>
+                <a:cs typeface="Segoe UI" pitchFamily="34" charset="-120"/>
               </a:rPr>
               <a:t>readings stored</a:t>
             </a:r>
@@ -5354,12 +5499,13 @@
             <a:avLst/>
           </a:prstGeom>
           <a:noFill/>
-        </p:spPr>
-        <p:txBody>
-          <a:bodyPr wrap="square" lIns="0" tIns="0" rIns="0" bIns="0" rtlCol="0" anchor="ctr"/>
-          <a:lstStyle/>
-          <a:p>
-            <a:pPr marL="0" indent="0">
+          <a:ln/>
+        </p:spPr>
+        <p:txBody>
+          <a:bodyPr wrap="square" lIns="0" tIns="0" rIns="0" bIns="0" rtlCol="0" anchor="ctr"/>
+          <a:lstStyle/>
+          <a:p>
+            <a:pPr indent="0" marL="0">
               <a:buNone/>
             </a:pPr>
             <a:r>
@@ -5367,9 +5513,9 @@
                 <a:solidFill>
                   <a:srgbClr val="0891B2"/>
                 </a:solidFill>
-                <a:latin typeface="Segoe UI Semibold" panose="020B0702040204020203" pitchFamily="34" charset="0"/>
-                <a:ea typeface="Segoe UI Semibold" panose="020B0702040204020203" pitchFamily="34" charset="-122"/>
-                <a:cs typeface="Segoe UI Semibold" panose="020B0702040204020203" pitchFamily="34" charset="-120"/>
+                <a:latin typeface="Segoe UI Semibold" pitchFamily="34" charset="0"/>
+                <a:ea typeface="Segoe UI Semibold" pitchFamily="34" charset="-122"/>
+                <a:cs typeface="Segoe UI Semibold" pitchFamily="34" charset="-120"/>
               </a:rPr>
               <a:t>7</a:t>
             </a:r>
@@ -5392,12 +5538,13 @@
             <a:avLst/>
           </a:prstGeom>
           <a:noFill/>
+          <a:ln/>
         </p:spPr>
         <p:txBody>
           <a:bodyPr wrap="square" lIns="0" tIns="0" rIns="0" bIns="0" rtlCol="0" anchor="t"/>
           <a:lstStyle/>
           <a:p>
-            <a:pPr marL="0" indent="0">
+            <a:pPr indent="0" marL="0">
               <a:buNone/>
             </a:pPr>
             <a:r>
@@ -5405,9 +5552,9 @@
                 <a:solidFill>
                   <a:srgbClr val="64748B"/>
                 </a:solidFill>
-                <a:latin typeface="Segoe UI" panose="020B0502040204020203" pitchFamily="34" charset="0"/>
-                <a:ea typeface="Segoe UI" panose="020B0502040204020203" pitchFamily="34" charset="-122"/>
-                <a:cs typeface="Segoe UI" panose="020B0502040204020203" pitchFamily="34" charset="-120"/>
+                <a:latin typeface="Segoe UI" pitchFamily="34" charset="0"/>
+                <a:ea typeface="Segoe UI" pitchFamily="34" charset="-122"/>
+                <a:cs typeface="Segoe UI" pitchFamily="34" charset="-120"/>
               </a:rPr>
               <a:t>alert rules</a:t>
             </a:r>
@@ -5453,12 +5600,13 @@
             <a:avLst/>
           </a:prstGeom>
           <a:noFill/>
-        </p:spPr>
-        <p:txBody>
-          <a:bodyPr wrap="square" lIns="0" tIns="0" rIns="0" bIns="0" rtlCol="0" anchor="ctr"/>
-          <a:lstStyle/>
-          <a:p>
-            <a:pPr marL="0" indent="0">
+          <a:ln/>
+        </p:spPr>
+        <p:txBody>
+          <a:bodyPr wrap="square" lIns="0" tIns="0" rIns="0" bIns="0" rtlCol="0" anchor="ctr"/>
+          <a:lstStyle/>
+          <a:p>
+            <a:pPr indent="0" marL="0">
               <a:buNone/>
             </a:pPr>
             <a:r>
@@ -5466,9 +5614,9 @@
                 <a:solidFill>
                   <a:srgbClr val="0891B2"/>
                 </a:solidFill>
-                <a:latin typeface="Segoe UI Semibold" panose="020B0702040204020203" pitchFamily="34" charset="0"/>
-                <a:ea typeface="Segoe UI Semibold" panose="020B0702040204020203" pitchFamily="34" charset="-122"/>
-                <a:cs typeface="Segoe UI Semibold" panose="020B0702040204020203" pitchFamily="34" charset="-120"/>
+                <a:latin typeface="Segoe UI Semibold" pitchFamily="34" charset="0"/>
+                <a:ea typeface="Segoe UI Semibold" pitchFamily="34" charset="-122"/>
+                <a:cs typeface="Segoe UI Semibold" pitchFamily="34" charset="-120"/>
               </a:rPr>
               <a:t>10 s</a:t>
             </a:r>
@@ -5491,12 +5639,13 @@
             <a:avLst/>
           </a:prstGeom>
           <a:noFill/>
+          <a:ln/>
         </p:spPr>
         <p:txBody>
           <a:bodyPr wrap="square" lIns="0" tIns="0" rIns="0" bIns="0" rtlCol="0" anchor="t"/>
           <a:lstStyle/>
           <a:p>
-            <a:pPr marL="0" indent="0">
+            <a:pPr indent="0" marL="0">
               <a:buNone/>
             </a:pPr>
             <a:r>
@@ -5504,9 +5653,9 @@
                 <a:solidFill>
                   <a:srgbClr val="64748B"/>
                 </a:solidFill>
-                <a:latin typeface="Segoe UI" panose="020B0502040204020203" pitchFamily="34" charset="0"/>
-                <a:ea typeface="Segoe UI" panose="020B0502040204020203" pitchFamily="34" charset="-122"/>
-                <a:cs typeface="Segoe UI" panose="020B0502040204020203" pitchFamily="34" charset="-120"/>
+                <a:latin typeface="Segoe UI" pitchFamily="34" charset="0"/>
+                <a:ea typeface="Segoe UI" pitchFamily="34" charset="-122"/>
+                <a:cs typeface="Segoe UI" pitchFamily="34" charset="-120"/>
               </a:rPr>
               <a:t>Redis cached dashboard</a:t>
             </a:r>
@@ -5556,12 +5705,13 @@
             <a:avLst/>
           </a:prstGeom>
           <a:noFill/>
-        </p:spPr>
-        <p:txBody>
-          <a:bodyPr wrap="square" lIns="0" tIns="0" rIns="0" bIns="0" rtlCol="0" anchor="ctr"/>
-          <a:lstStyle/>
-          <a:p>
-            <a:pPr marL="0" indent="0">
+          <a:ln/>
+        </p:spPr>
+        <p:txBody>
+          <a:bodyPr wrap="square" lIns="0" tIns="0" rIns="0" bIns="0" rtlCol="0" anchor="ctr"/>
+          <a:lstStyle/>
+          <a:p>
+            <a:pPr indent="0" marL="0">
               <a:buNone/>
             </a:pPr>
             <a:r>
@@ -5569,22 +5719,25 @@
                 <a:solidFill>
                   <a:srgbClr val="0891B2"/>
                 </a:solidFill>
-                <a:latin typeface="Segoe UI" panose="020B0502040204020203" pitchFamily="34" charset="0"/>
-                <a:ea typeface="Segoe UI" panose="020B0502040204020203" pitchFamily="34" charset="-122"/>
-                <a:cs typeface="Segoe UI" panose="020B0502040204020203" pitchFamily="34" charset="-120"/>
+                <a:latin typeface="Segoe UI" pitchFamily="34" charset="0"/>
+                <a:ea typeface="Segoe UI" pitchFamily="34" charset="-122"/>
+                <a:cs typeface="Segoe UI" pitchFamily="34" charset="-120"/>
               </a:rPr>
               <a:t>LIVE  </a:t>
             </a:r>
+            <a:pPr indent="0" marL="0">
+              <a:buNone/>
+            </a:pPr>
             <a:r>
               <a:rPr lang="en-US" sz="1100" dirty="0">
                 <a:solidFill>
                   <a:srgbClr val="0B1B33"/>
                 </a:solidFill>
-                <a:latin typeface="Segoe UI" panose="020B0502040204020203" pitchFamily="34" charset="0"/>
-                <a:ea typeface="Segoe UI" panose="020B0502040204020203" pitchFamily="34" charset="-122"/>
-                <a:cs typeface="Segoe UI" panose="020B0502040204020203" pitchFamily="34" charset="-120"/>
-              </a:rPr>
-              <a:t>Live monitoring page</a:t>
+                <a:latin typeface="Segoe UI" pitchFamily="34" charset="0"/>
+                <a:ea typeface="Segoe UI" pitchFamily="34" charset="-122"/>
+                <a:cs typeface="Segoe UI" pitchFamily="34" charset="-120"/>
+              </a:rPr>
+              <a:t>Live monitoring page (tiles and dashed threshold)</a:t>
             </a:r>
             <a:endParaRPr lang="en-US" sz="1100" dirty="0"/>
           </a:p>
@@ -5600,13 +5753,12 @@
 
 <file path=ppt/slides/slide5.xml><?xml version="1.0" encoding="utf-8"?>
 <p:sld xmlns:a="http://schemas.openxmlformats.org/drawingml/2006/main" xmlns:r="http://schemas.openxmlformats.org/officeDocument/2006/relationships" xmlns:p="http://schemas.openxmlformats.org/presentationml/2006/main">
-  <p:cSld>
+  <p:cSld name="Slide 5">
     <p:bg>
       <p:bgPr>
         <a:solidFill>
           <a:srgbClr val="F6F8FB"/>
         </a:solidFill>
-        <a:effectLst/>
       </p:bgPr>
     </p:bg>
     <p:spTree>
@@ -5663,24 +5815,25 @@
             <a:avLst/>
           </a:prstGeom>
           <a:noFill/>
-        </p:spPr>
-        <p:txBody>
-          <a:bodyPr wrap="square" lIns="0" tIns="0" rIns="0" bIns="0" rtlCol="0" anchor="ctr"/>
-          <a:lstStyle/>
-          <a:p>
-            <a:pPr marL="0" indent="0">
-              <a:buNone/>
-            </a:pPr>
-            <a:r>
-              <a:rPr lang="en-US" sz="1050" kern="0" spc="400" dirty="0">
+          <a:ln/>
+        </p:spPr>
+        <p:txBody>
+          <a:bodyPr wrap="square" lIns="0" tIns="0" rIns="0" bIns="0" rtlCol="0" anchor="ctr"/>
+          <a:lstStyle/>
+          <a:p>
+            <a:pPr indent="0" marL="0">
+              <a:buNone/>
+            </a:pPr>
+            <a:r>
+              <a:rPr lang="en-US" sz="1050" spc="400" kern="0" dirty="0">
                 <a:solidFill>
                   <a:srgbClr val="0891B2"/>
                 </a:solidFill>
-                <a:latin typeface="Segoe UI Semibold" panose="020B0702040204020203" pitchFamily="34" charset="0"/>
-                <a:ea typeface="Segoe UI Semibold" panose="020B0702040204020203" pitchFamily="34" charset="-122"/>
-                <a:cs typeface="Segoe UI Semibold" panose="020B0702040204020203" pitchFamily="34" charset="-120"/>
-              </a:rPr>
-              <a:t>05 · MAINTENANCE SERVICE</a:t>
+                <a:latin typeface="Segoe UI Semibold" pitchFamily="34" charset="0"/>
+                <a:ea typeface="Segoe UI Semibold" pitchFamily="34" charset="-122"/>
+                <a:cs typeface="Segoe UI Semibold" pitchFamily="34" charset="-120"/>
+              </a:rPr>
+              <a:t>05 · THURUNU · MAINTENANCE SERVICE</a:t>
             </a:r>
             <a:endParaRPr lang="en-US" sz="1050" dirty="0"/>
           </a:p>
@@ -5701,12 +5854,13 @@
             <a:avLst/>
           </a:prstGeom>
           <a:noFill/>
-        </p:spPr>
-        <p:txBody>
-          <a:bodyPr wrap="square" lIns="0" tIns="0" rIns="0" bIns="0" rtlCol="0" anchor="ctr"/>
-          <a:lstStyle/>
-          <a:p>
-            <a:pPr marL="0" indent="0">
+          <a:ln/>
+        </p:spPr>
+        <p:txBody>
+          <a:bodyPr wrap="square" lIns="0" tIns="0" rIns="0" bIns="0" rtlCol="0" anchor="ctr"/>
+          <a:lstStyle/>
+          <a:p>
+            <a:pPr indent="0" marL="0">
               <a:buNone/>
             </a:pPr>
             <a:r>
@@ -5714,9 +5868,9 @@
                 <a:solidFill>
                   <a:srgbClr val="0B1B33"/>
                 </a:solidFill>
-                <a:latin typeface="Segoe UI Semibold" panose="020B0702040204020203" pitchFamily="34" charset="0"/>
-                <a:ea typeface="Segoe UI Semibold" panose="020B0702040204020203" pitchFamily="34" charset="-122"/>
-                <a:cs typeface="Segoe UI Semibold" panose="020B0702040204020203" pitchFamily="34" charset="-120"/>
+                <a:latin typeface="Segoe UI Semibold" pitchFamily="34" charset="0"/>
+                <a:ea typeface="Segoe UI Semibold" pitchFamily="34" charset="-122"/>
+                <a:cs typeface="Segoe UI Semibold" pitchFamily="34" charset="-120"/>
               </a:rPr>
               <a:t>Faults become tracked work automatically</a:t>
             </a:r>
@@ -5762,12 +5916,13 @@
             <a:avLst/>
           </a:prstGeom>
           <a:noFill/>
-        </p:spPr>
-        <p:txBody>
-          <a:bodyPr wrap="square" lIns="0" tIns="0" rIns="0" bIns="0" rtlCol="0" anchor="ctr"/>
-          <a:lstStyle/>
-          <a:p>
-            <a:pPr marL="0" indent="0">
+          <a:ln/>
+        </p:spPr>
+        <p:txBody>
+          <a:bodyPr wrap="square" lIns="0" tIns="0" rIns="0" bIns="0" rtlCol="0" anchor="ctr"/>
+          <a:lstStyle/>
+          <a:p>
+            <a:pPr indent="0" marL="0">
               <a:buNone/>
             </a:pPr>
             <a:r>
@@ -5775,9 +5930,9 @@
                 <a:solidFill>
                   <a:srgbClr val="64748B"/>
                 </a:solidFill>
-                <a:latin typeface="Segoe UI" panose="020B0502040204020203" pitchFamily="34" charset="0"/>
-                <a:ea typeface="Segoe UI" panose="020B0502040204020203" pitchFamily="34" charset="-122"/>
-                <a:cs typeface="Segoe UI" panose="020B0502040204020203" pitchFamily="34" charset="-120"/>
+                <a:latin typeface="Segoe UI" pitchFamily="34" charset="0"/>
+                <a:ea typeface="Segoe UI" pitchFamily="34" charset="-122"/>
+                <a:cs typeface="Segoe UI" pitchFamily="34" charset="-120"/>
               </a:rPr>
               <a:t>EC8208 Software Architecture  ·  University of Ruhuna</a:t>
             </a:r>
@@ -5800,12 +5955,13 @@
             <a:avLst/>
           </a:prstGeom>
           <a:noFill/>
-        </p:spPr>
-        <p:txBody>
-          <a:bodyPr wrap="square" lIns="0" tIns="0" rIns="0" bIns="0" rtlCol="0" anchor="ctr"/>
-          <a:lstStyle/>
-          <a:p>
-            <a:pPr marL="0" indent="0" algn="r">
+          <a:ln/>
+        </p:spPr>
+        <p:txBody>
+          <a:bodyPr wrap="square" lIns="0" tIns="0" rIns="0" bIns="0" rtlCol="0" anchor="ctr"/>
+          <a:lstStyle/>
+          <a:p>
+            <a:pPr algn="r" indent="0" marL="0">
               <a:buNone/>
             </a:pPr>
             <a:r>
@@ -5813,11 +5969,11 @@
                 <a:solidFill>
                   <a:srgbClr val="64748B"/>
                 </a:solidFill>
-                <a:latin typeface="Segoe UI" panose="020B0502040204020203" pitchFamily="34" charset="0"/>
-                <a:ea typeface="Segoe UI" panose="020B0502040204020203" pitchFamily="34" charset="-122"/>
-                <a:cs typeface="Segoe UI" panose="020B0502040204020203" pitchFamily="34" charset="-120"/>
-              </a:rPr>
-              <a:t>05  ·  1:49–2:38</a:t>
+                <a:latin typeface="Segoe UI" pitchFamily="34" charset="0"/>
+                <a:ea typeface="Segoe UI" pitchFamily="34" charset="-122"/>
+                <a:cs typeface="Segoe UI" pitchFamily="34" charset="-120"/>
+              </a:rPr>
+              <a:t>05  ·  3:46–5:24</a:t>
             </a:r>
             <a:endParaRPr lang="en-US" sz="900" dirty="0"/>
           </a:p>
@@ -5865,12 +6021,13 @@
             <a:avLst/>
           </a:prstGeom>
           <a:noFill/>
-        </p:spPr>
-        <p:txBody>
-          <a:bodyPr wrap="square" lIns="0" tIns="0" rIns="0" bIns="0" rtlCol="0" anchor="ctr"/>
-          <a:lstStyle/>
-          <a:p>
-            <a:pPr marL="0" indent="0" algn="ctr">
+          <a:ln/>
+        </p:spPr>
+        <p:txBody>
+          <a:bodyPr wrap="square" lIns="0" tIns="0" rIns="0" bIns="0" rtlCol="0" anchor="ctr"/>
+          <a:lstStyle/>
+          <a:p>
+            <a:pPr algn="ctr" indent="0" marL="0">
               <a:buNone/>
             </a:pPr>
             <a:r>
@@ -5878,9 +6035,9 @@
                 <a:solidFill>
                   <a:srgbClr val="FFFFFF"/>
                 </a:solidFill>
-                <a:latin typeface="Segoe UI Semibold" panose="020B0702040204020203" pitchFamily="34" charset="0"/>
-                <a:ea typeface="Segoe UI Semibold" panose="020B0702040204020203" pitchFamily="34" charset="-122"/>
-                <a:cs typeface="Segoe UI Semibold" panose="020B0702040204020203" pitchFamily="34" charset="-120"/>
+                <a:latin typeface="Segoe UI Semibold" pitchFamily="34" charset="0"/>
+                <a:ea typeface="Segoe UI Semibold" pitchFamily="34" charset="-122"/>
+                <a:cs typeface="Segoe UI Semibold" pitchFamily="34" charset="-120"/>
               </a:rPr>
               <a:t>Alert event</a:t>
             </a:r>
@@ -5903,12 +6060,13 @@
             <a:avLst/>
           </a:prstGeom>
           <a:noFill/>
-        </p:spPr>
-        <p:txBody>
-          <a:bodyPr wrap="square" lIns="0" tIns="0" rIns="0" bIns="0" rtlCol="0" anchor="ctr"/>
-          <a:lstStyle/>
-          <a:p>
-            <a:pPr marL="0" indent="0" algn="ctr">
+          <a:ln/>
+        </p:spPr>
+        <p:txBody>
+          <a:bodyPr wrap="square" lIns="0" tIns="0" rIns="0" bIns="0" rtlCol="0" anchor="ctr"/>
+          <a:lstStyle/>
+          <a:p>
+            <a:pPr algn="ctr" indent="0" marL="0">
               <a:buNone/>
             </a:pPr>
             <a:r>
@@ -5916,9 +6074,9 @@
                 <a:solidFill>
                   <a:srgbClr val="E6F4F8"/>
                 </a:solidFill>
-                <a:latin typeface="Segoe UI" panose="020B0502040204020203" pitchFamily="34" charset="0"/>
-                <a:ea typeface="Segoe UI" panose="020B0502040204020203" pitchFamily="34" charset="-122"/>
-                <a:cs typeface="Segoe UI" panose="020B0502040204020203" pitchFamily="34" charset="-120"/>
+                <a:latin typeface="Segoe UI" pitchFamily="34" charset="0"/>
+                <a:ea typeface="Segoe UI" pitchFamily="34" charset="-122"/>
+                <a:cs typeface="Segoe UI" pitchFamily="34" charset="-120"/>
               </a:rPr>
               <a:t>high or critical</a:t>
             </a:r>
@@ -5941,12 +6099,13 @@
             <a:avLst/>
           </a:prstGeom>
           <a:noFill/>
-        </p:spPr>
-        <p:txBody>
-          <a:bodyPr wrap="square" lIns="0" tIns="0" rIns="0" bIns="0" rtlCol="0" anchor="ctr"/>
-          <a:lstStyle/>
-          <a:p>
-            <a:pPr marL="0" indent="0" algn="ctr">
+          <a:ln/>
+        </p:spPr>
+        <p:txBody>
+          <a:bodyPr wrap="square" lIns="0" tIns="0" rIns="0" bIns="0" rtlCol="0" anchor="ctr"/>
+          <a:lstStyle/>
+          <a:p>
+            <a:pPr algn="ctr" indent="0" marL="0">
               <a:buNone/>
             </a:pPr>
             <a:r>
@@ -5954,9 +6113,9 @@
                 <a:solidFill>
                   <a:srgbClr val="0891B2"/>
                 </a:solidFill>
-                <a:latin typeface="Segoe UI Semibold" panose="020B0702040204020203" pitchFamily="34" charset="0"/>
-                <a:ea typeface="Segoe UI Semibold" panose="020B0702040204020203" pitchFamily="34" charset="-122"/>
-                <a:cs typeface="Segoe UI Semibold" panose="020B0702040204020203" pitchFamily="34" charset="-120"/>
+                <a:latin typeface="Segoe UI Semibold" pitchFamily="34" charset="0"/>
+                <a:ea typeface="Segoe UI Semibold" pitchFamily="34" charset="-122"/>
+                <a:cs typeface="Segoe UI Semibold" pitchFamily="34" charset="-120"/>
               </a:rPr>
               <a:t>›</a:t>
             </a:r>
@@ -6006,12 +6165,13 @@
             <a:avLst/>
           </a:prstGeom>
           <a:noFill/>
-        </p:spPr>
-        <p:txBody>
-          <a:bodyPr wrap="square" lIns="0" tIns="0" rIns="0" bIns="0" rtlCol="0" anchor="ctr"/>
-          <a:lstStyle/>
-          <a:p>
-            <a:pPr marL="0" indent="0" algn="ctr">
+          <a:ln/>
+        </p:spPr>
+        <p:txBody>
+          <a:bodyPr wrap="square" lIns="0" tIns="0" rIns="0" bIns="0" rtlCol="0" anchor="ctr"/>
+          <a:lstStyle/>
+          <a:p>
+            <a:pPr algn="ctr" indent="0" marL="0">
               <a:buNone/>
             </a:pPr>
             <a:r>
@@ -6019,9 +6179,9 @@
                 <a:solidFill>
                   <a:srgbClr val="0B1B33"/>
                 </a:solidFill>
-                <a:latin typeface="Segoe UI Semibold" panose="020B0702040204020203" pitchFamily="34" charset="0"/>
-                <a:ea typeface="Segoe UI Semibold" panose="020B0702040204020203" pitchFamily="34" charset="-122"/>
-                <a:cs typeface="Segoe UI Semibold" panose="020B0702040204020203" pitchFamily="34" charset="-120"/>
+                <a:latin typeface="Segoe UI Semibold" pitchFamily="34" charset="0"/>
+                <a:ea typeface="Segoe UI Semibold" pitchFamily="34" charset="-122"/>
+                <a:cs typeface="Segoe UI Semibold" pitchFamily="34" charset="-120"/>
               </a:rPr>
               <a:t>Work order</a:t>
             </a:r>
@@ -6044,12 +6204,13 @@
             <a:avLst/>
           </a:prstGeom>
           <a:noFill/>
-        </p:spPr>
-        <p:txBody>
-          <a:bodyPr wrap="square" lIns="0" tIns="0" rIns="0" bIns="0" rtlCol="0" anchor="ctr"/>
-          <a:lstStyle/>
-          <a:p>
-            <a:pPr marL="0" indent="0" algn="ctr">
+          <a:ln/>
+        </p:spPr>
+        <p:txBody>
+          <a:bodyPr wrap="square" lIns="0" tIns="0" rIns="0" bIns="0" rtlCol="0" anchor="ctr"/>
+          <a:lstStyle/>
+          <a:p>
+            <a:pPr algn="ctr" indent="0" marL="0">
               <a:buNone/>
             </a:pPr>
             <a:r>
@@ -6057,9 +6218,9 @@
                 <a:solidFill>
                   <a:srgbClr val="64748B"/>
                 </a:solidFill>
-                <a:latin typeface="Segoe UI" panose="020B0502040204020203" pitchFamily="34" charset="0"/>
-                <a:ea typeface="Segoe UI" panose="020B0502040204020203" pitchFamily="34" charset="-122"/>
-                <a:cs typeface="Segoe UI" panose="020B0502040204020203" pitchFamily="34" charset="-120"/>
+                <a:latin typeface="Segoe UI" pitchFamily="34" charset="0"/>
+                <a:ea typeface="Segoe UI" pitchFamily="34" charset="-122"/>
+                <a:cs typeface="Segoe UI" pitchFamily="34" charset="-120"/>
               </a:rPr>
               <a:t>created</a:t>
             </a:r>
@@ -6082,12 +6243,13 @@
             <a:avLst/>
           </a:prstGeom>
           <a:noFill/>
-        </p:spPr>
-        <p:txBody>
-          <a:bodyPr wrap="square" lIns="0" tIns="0" rIns="0" bIns="0" rtlCol="0" anchor="ctr"/>
-          <a:lstStyle/>
-          <a:p>
-            <a:pPr marL="0" indent="0" algn="ctr">
+          <a:ln/>
+        </p:spPr>
+        <p:txBody>
+          <a:bodyPr wrap="square" lIns="0" tIns="0" rIns="0" bIns="0" rtlCol="0" anchor="ctr"/>
+          <a:lstStyle/>
+          <a:p>
+            <a:pPr algn="ctr" indent="0" marL="0">
               <a:buNone/>
             </a:pPr>
             <a:r>
@@ -6095,9 +6257,9 @@
                 <a:solidFill>
                   <a:srgbClr val="0891B2"/>
                 </a:solidFill>
-                <a:latin typeface="Segoe UI Semibold" panose="020B0702040204020203" pitchFamily="34" charset="0"/>
-                <a:ea typeface="Segoe UI Semibold" panose="020B0702040204020203" pitchFamily="34" charset="-122"/>
-                <a:cs typeface="Segoe UI Semibold" panose="020B0702040204020203" pitchFamily="34" charset="-120"/>
+                <a:latin typeface="Segoe UI Semibold" pitchFamily="34" charset="0"/>
+                <a:ea typeface="Segoe UI Semibold" pitchFamily="34" charset="-122"/>
+                <a:cs typeface="Segoe UI Semibold" pitchFamily="34" charset="-120"/>
               </a:rPr>
               <a:t>›</a:t>
             </a:r>
@@ -6147,12 +6309,13 @@
             <a:avLst/>
           </a:prstGeom>
           <a:noFill/>
-        </p:spPr>
-        <p:txBody>
-          <a:bodyPr wrap="square" lIns="0" tIns="0" rIns="0" bIns="0" rtlCol="0" anchor="ctr"/>
-          <a:lstStyle/>
-          <a:p>
-            <a:pPr marL="0" indent="0" algn="ctr">
+          <a:ln/>
+        </p:spPr>
+        <p:txBody>
+          <a:bodyPr wrap="square" lIns="0" tIns="0" rIns="0" bIns="0" rtlCol="0" anchor="ctr"/>
+          <a:lstStyle/>
+          <a:p>
+            <a:pPr algn="ctr" indent="0" marL="0">
               <a:buNone/>
             </a:pPr>
             <a:r>
@@ -6160,9 +6323,9 @@
                 <a:solidFill>
                   <a:srgbClr val="0B1B33"/>
                 </a:solidFill>
-                <a:latin typeface="Segoe UI Semibold" panose="020B0702040204020203" pitchFamily="34" charset="0"/>
-                <a:ea typeface="Segoe UI Semibold" panose="020B0702040204020203" pitchFamily="34" charset="-122"/>
-                <a:cs typeface="Segoe UI Semibold" panose="020B0702040204020203" pitchFamily="34" charset="-120"/>
+                <a:latin typeface="Segoe UI Semibold" pitchFamily="34" charset="0"/>
+                <a:ea typeface="Segoe UI Semibold" pitchFamily="34" charset="-122"/>
+                <a:cs typeface="Segoe UI Semibold" pitchFamily="34" charset="-120"/>
               </a:rPr>
               <a:t>Technician</a:t>
             </a:r>
@@ -6185,12 +6348,13 @@
             <a:avLst/>
           </a:prstGeom>
           <a:noFill/>
-        </p:spPr>
-        <p:txBody>
-          <a:bodyPr wrap="square" lIns="0" tIns="0" rIns="0" bIns="0" rtlCol="0" anchor="ctr"/>
-          <a:lstStyle/>
-          <a:p>
-            <a:pPr marL="0" indent="0" algn="ctr">
+          <a:ln/>
+        </p:spPr>
+        <p:txBody>
+          <a:bodyPr wrap="square" lIns="0" tIns="0" rIns="0" bIns="0" rtlCol="0" anchor="ctr"/>
+          <a:lstStyle/>
+          <a:p>
+            <a:pPr algn="ctr" indent="0" marL="0">
               <a:buNone/>
             </a:pPr>
             <a:r>
@@ -6198,9 +6362,9 @@
                 <a:solidFill>
                   <a:srgbClr val="64748B"/>
                 </a:solidFill>
-                <a:latin typeface="Segoe UI" panose="020B0502040204020203" pitchFamily="34" charset="0"/>
-                <a:ea typeface="Segoe UI" panose="020B0502040204020203" pitchFamily="34" charset="-122"/>
-                <a:cs typeface="Segoe UI" panose="020B0502040204020203" pitchFamily="34" charset="-120"/>
+                <a:latin typeface="Segoe UI" pitchFamily="34" charset="0"/>
+                <a:ea typeface="Segoe UI" pitchFamily="34" charset="-122"/>
+                <a:cs typeface="Segoe UI" pitchFamily="34" charset="-120"/>
               </a:rPr>
               <a:t>assigned</a:t>
             </a:r>
@@ -6223,12 +6387,13 @@
             <a:avLst/>
           </a:prstGeom>
           <a:noFill/>
-        </p:spPr>
-        <p:txBody>
-          <a:bodyPr wrap="square" lIns="0" tIns="0" rIns="0" bIns="0" rtlCol="0" anchor="ctr"/>
-          <a:lstStyle/>
-          <a:p>
-            <a:pPr marL="0" indent="0" algn="ctr">
+          <a:ln/>
+        </p:spPr>
+        <p:txBody>
+          <a:bodyPr wrap="square" lIns="0" tIns="0" rIns="0" bIns="0" rtlCol="0" anchor="ctr"/>
+          <a:lstStyle/>
+          <a:p>
+            <a:pPr algn="ctr" indent="0" marL="0">
               <a:buNone/>
             </a:pPr>
             <a:r>
@@ -6236,9 +6401,9 @@
                 <a:solidFill>
                   <a:srgbClr val="0891B2"/>
                 </a:solidFill>
-                <a:latin typeface="Segoe UI Semibold" panose="020B0702040204020203" pitchFamily="34" charset="0"/>
-                <a:ea typeface="Segoe UI Semibold" panose="020B0702040204020203" pitchFamily="34" charset="-122"/>
-                <a:cs typeface="Segoe UI Semibold" panose="020B0702040204020203" pitchFamily="34" charset="-120"/>
+                <a:latin typeface="Segoe UI Semibold" pitchFamily="34" charset="0"/>
+                <a:ea typeface="Segoe UI Semibold" pitchFamily="34" charset="-122"/>
+                <a:cs typeface="Segoe UI Semibold" pitchFamily="34" charset="-120"/>
               </a:rPr>
               <a:t>›</a:t>
             </a:r>
@@ -6288,12 +6453,13 @@
             <a:avLst/>
           </a:prstGeom>
           <a:noFill/>
-        </p:spPr>
-        <p:txBody>
-          <a:bodyPr wrap="square" lIns="0" tIns="0" rIns="0" bIns="0" rtlCol="0" anchor="ctr"/>
-          <a:lstStyle/>
-          <a:p>
-            <a:pPr marL="0" indent="0" algn="ctr">
+          <a:ln/>
+        </p:spPr>
+        <p:txBody>
+          <a:bodyPr wrap="square" lIns="0" tIns="0" rIns="0" bIns="0" rtlCol="0" anchor="ctr"/>
+          <a:lstStyle/>
+          <a:p>
+            <a:pPr algn="ctr" indent="0" marL="0">
               <a:buNone/>
             </a:pPr>
             <a:r>
@@ -6301,9 +6467,9 @@
                 <a:solidFill>
                   <a:srgbClr val="0B1B33"/>
                 </a:solidFill>
-                <a:latin typeface="Segoe UI Semibold" panose="020B0702040204020203" pitchFamily="34" charset="0"/>
-                <a:ea typeface="Segoe UI Semibold" panose="020B0702040204020203" pitchFamily="34" charset="-122"/>
-                <a:cs typeface="Segoe UI Semibold" panose="020B0702040204020203" pitchFamily="34" charset="-120"/>
+                <a:latin typeface="Segoe UI Semibold" pitchFamily="34" charset="0"/>
+                <a:ea typeface="Segoe UI Semibold" pitchFamily="34" charset="-122"/>
+                <a:cs typeface="Segoe UI Semibold" pitchFamily="34" charset="-120"/>
               </a:rPr>
               <a:t>Completed</a:t>
             </a:r>
@@ -6326,12 +6492,13 @@
             <a:avLst/>
           </a:prstGeom>
           <a:noFill/>
-        </p:spPr>
-        <p:txBody>
-          <a:bodyPr wrap="square" lIns="0" tIns="0" rIns="0" bIns="0" rtlCol="0" anchor="ctr"/>
-          <a:lstStyle/>
-          <a:p>
-            <a:pPr marL="0" indent="0" algn="ctr">
+          <a:ln/>
+        </p:spPr>
+        <p:txBody>
+          <a:bodyPr wrap="square" lIns="0" tIns="0" rIns="0" bIns="0" rtlCol="0" anchor="ctr"/>
+          <a:lstStyle/>
+          <a:p>
+            <a:pPr algn="ctr" indent="0" marL="0">
               <a:buNone/>
             </a:pPr>
             <a:r>
@@ -6339,9 +6506,9 @@
                 <a:solidFill>
                   <a:srgbClr val="64748B"/>
                 </a:solidFill>
-                <a:latin typeface="Segoe UI" panose="020B0502040204020203" pitchFamily="34" charset="0"/>
-                <a:ea typeface="Segoe UI" panose="020B0502040204020203" pitchFamily="34" charset="-122"/>
-                <a:cs typeface="Segoe UI" panose="020B0502040204020203" pitchFamily="34" charset="-120"/>
+                <a:latin typeface="Segoe UI" pitchFamily="34" charset="0"/>
+                <a:ea typeface="Segoe UI" pitchFamily="34" charset="-122"/>
+                <a:cs typeface="Segoe UI" pitchFamily="34" charset="-120"/>
               </a:rPr>
               <a:t>in history</a:t>
             </a:r>
@@ -6387,12 +6554,13 @@
             <a:avLst/>
           </a:prstGeom>
           <a:noFill/>
-        </p:spPr>
-        <p:txBody>
-          <a:bodyPr wrap="square" lIns="0" tIns="0" rIns="0" bIns="0" rtlCol="0" anchor="ctr"/>
-          <a:lstStyle/>
-          <a:p>
-            <a:pPr marL="0" indent="0">
+          <a:ln/>
+        </p:spPr>
+        <p:txBody>
+          <a:bodyPr wrap="square" lIns="0" tIns="0" rIns="0" bIns="0" rtlCol="0" anchor="ctr"/>
+          <a:lstStyle/>
+          <a:p>
+            <a:pPr indent="0" marL="0">
               <a:buNone/>
             </a:pPr>
             <a:r>
@@ -6400,9 +6568,9 @@
                 <a:solidFill>
                   <a:srgbClr val="0891B2"/>
                 </a:solidFill>
-                <a:latin typeface="Segoe UI Semibold" panose="020B0702040204020203" pitchFamily="34" charset="0"/>
-                <a:ea typeface="Segoe UI Semibold" panose="020B0702040204020203" pitchFamily="34" charset="-122"/>
-                <a:cs typeface="Segoe UI Semibold" panose="020B0702040204020203" pitchFamily="34" charset="-120"/>
+                <a:latin typeface="Segoe UI Semibold" pitchFamily="34" charset="0"/>
+                <a:ea typeface="Segoe UI Semibold" pitchFamily="34" charset="-122"/>
+                <a:cs typeface="Segoe UI Semibold" pitchFamily="34" charset="-120"/>
               </a:rPr>
               <a:t>0 clicks</a:t>
             </a:r>
@@ -6425,12 +6593,13 @@
             <a:avLst/>
           </a:prstGeom>
           <a:noFill/>
+          <a:ln/>
         </p:spPr>
         <p:txBody>
           <a:bodyPr wrap="square" lIns="0" tIns="0" rIns="0" bIns="0" rtlCol="0" anchor="t"/>
           <a:lstStyle/>
           <a:p>
-            <a:pPr marL="0" indent="0">
+            <a:pPr indent="0" marL="0">
               <a:buNone/>
             </a:pPr>
             <a:r>
@@ -6438,9 +6607,9 @@
                 <a:solidFill>
                   <a:srgbClr val="64748B"/>
                 </a:solidFill>
-                <a:latin typeface="Segoe UI" panose="020B0502040204020203" pitchFamily="34" charset="0"/>
-                <a:ea typeface="Segoe UI" panose="020B0502040204020203" pitchFamily="34" charset="-122"/>
-                <a:cs typeface="Segoe UI" panose="020B0502040204020203" pitchFamily="34" charset="-120"/>
+                <a:latin typeface="Segoe UI" pitchFamily="34" charset="0"/>
+                <a:ea typeface="Segoe UI" pitchFamily="34" charset="-122"/>
+                <a:cs typeface="Segoe UI" pitchFamily="34" charset="-120"/>
               </a:rPr>
               <a:t>to open a corrective order</a:t>
             </a:r>
@@ -6486,12 +6655,13 @@
             <a:avLst/>
           </a:prstGeom>
           <a:noFill/>
-        </p:spPr>
-        <p:txBody>
-          <a:bodyPr wrap="square" lIns="0" tIns="0" rIns="0" bIns="0" rtlCol="0" anchor="ctr"/>
-          <a:lstStyle/>
-          <a:p>
-            <a:pPr marL="0" indent="0">
+          <a:ln/>
+        </p:spPr>
+        <p:txBody>
+          <a:bodyPr wrap="square" lIns="0" tIns="0" rIns="0" bIns="0" rtlCol="0" anchor="ctr"/>
+          <a:lstStyle/>
+          <a:p>
+            <a:pPr indent="0" marL="0">
               <a:buNone/>
             </a:pPr>
             <a:r>
@@ -6499,9 +6669,9 @@
                 <a:solidFill>
                   <a:srgbClr val="0891B2"/>
                 </a:solidFill>
-                <a:latin typeface="Segoe UI Semibold" panose="020B0702040204020203" pitchFamily="34" charset="0"/>
-                <a:ea typeface="Segoe UI Semibold" panose="020B0702040204020203" pitchFamily="34" charset="-122"/>
-                <a:cs typeface="Segoe UI Semibold" panose="020B0702040204020203" pitchFamily="34" charset="-120"/>
+                <a:latin typeface="Segoe UI Semibold" pitchFamily="34" charset="0"/>
+                <a:ea typeface="Segoe UI Semibold" pitchFamily="34" charset="-122"/>
+                <a:cs typeface="Segoe UI Semibold" pitchFamily="34" charset="-120"/>
               </a:rPr>
               <a:t>4</a:t>
             </a:r>
@@ -6524,12 +6694,13 @@
             <a:avLst/>
           </a:prstGeom>
           <a:noFill/>
+          <a:ln/>
         </p:spPr>
         <p:txBody>
           <a:bodyPr wrap="square" lIns="0" tIns="0" rIns="0" bIns="0" rtlCol="0" anchor="t"/>
           <a:lstStyle/>
           <a:p>
-            <a:pPr marL="0" indent="0">
+            <a:pPr indent="0" marL="0">
               <a:buNone/>
             </a:pPr>
             <a:r>
@@ -6537,9 +6708,9 @@
                 <a:solidFill>
                   <a:srgbClr val="64748B"/>
                 </a:solidFill>
-                <a:latin typeface="Segoe UI" panose="020B0502040204020203" pitchFamily="34" charset="0"/>
-                <a:ea typeface="Segoe UI" panose="020B0502040204020203" pitchFamily="34" charset="-122"/>
-                <a:cs typeface="Segoe UI" panose="020B0502040204020203" pitchFamily="34" charset="-120"/>
+                <a:latin typeface="Segoe UI" pitchFamily="34" charset="0"/>
+                <a:ea typeface="Segoe UI" pitchFamily="34" charset="-122"/>
+                <a:cs typeface="Segoe UI" pitchFamily="34" charset="-120"/>
               </a:rPr>
               <a:t>technicians</a:t>
             </a:r>
@@ -6585,12 +6756,13 @@
             <a:avLst/>
           </a:prstGeom>
           <a:noFill/>
-        </p:spPr>
-        <p:txBody>
-          <a:bodyPr wrap="square" lIns="0" tIns="0" rIns="0" bIns="0" rtlCol="0" anchor="ctr"/>
-          <a:lstStyle/>
-          <a:p>
-            <a:pPr marL="0" indent="0">
+          <a:ln/>
+        </p:spPr>
+        <p:txBody>
+          <a:bodyPr wrap="square" lIns="0" tIns="0" rIns="0" bIns="0" rtlCol="0" anchor="ctr"/>
+          <a:lstStyle/>
+          <a:p>
+            <a:pPr indent="0" marL="0">
               <a:buNone/>
             </a:pPr>
             <a:r>
@@ -6598,9 +6770,9 @@
                 <a:solidFill>
                   <a:srgbClr val="0891B2"/>
                 </a:solidFill>
-                <a:latin typeface="Segoe UI Semibold" panose="020B0702040204020203" pitchFamily="34" charset="0"/>
-                <a:ea typeface="Segoe UI Semibold" panose="020B0702040204020203" pitchFamily="34" charset="-122"/>
-                <a:cs typeface="Segoe UI Semibold" panose="020B0702040204020203" pitchFamily="34" charset="-120"/>
+                <a:latin typeface="Segoe UI Semibold" pitchFamily="34" charset="0"/>
+                <a:ea typeface="Segoe UI Semibold" pitchFamily="34" charset="-122"/>
+                <a:cs typeface="Segoe UI Semibold" pitchFamily="34" charset="-120"/>
               </a:rPr>
               <a:t>1</a:t>
             </a:r>
@@ -6623,12 +6795,13 @@
             <a:avLst/>
           </a:prstGeom>
           <a:noFill/>
+          <a:ln/>
         </p:spPr>
         <p:txBody>
           <a:bodyPr wrap="square" lIns="0" tIns="0" rIns="0" bIns="0" rtlCol="0" anchor="t"/>
           <a:lstStyle/>
           <a:p>
-            <a:pPr marL="0" indent="0">
+            <a:pPr indent="0" marL="0">
               <a:buNone/>
             </a:pPr>
             <a:r>
@@ -6636,9 +6809,9 @@
                 <a:solidFill>
                   <a:srgbClr val="64748B"/>
                 </a:solidFill>
-                <a:latin typeface="Segoe UI" panose="020B0502040204020203" pitchFamily="34" charset="0"/>
-                <a:ea typeface="Segoe UI" panose="020B0502040204020203" pitchFamily="34" charset="-122"/>
-                <a:cs typeface="Segoe UI" panose="020B0502040204020203" pitchFamily="34" charset="-120"/>
+                <a:latin typeface="Segoe UI" pitchFamily="34" charset="0"/>
+                <a:ea typeface="Segoe UI" pitchFamily="34" charset="-122"/>
+                <a:cs typeface="Segoe UI" pitchFamily="34" charset="-120"/>
               </a:rPr>
               <a:t>active order per asset</a:t>
             </a:r>
@@ -6688,12 +6861,13 @@
             <a:avLst/>
           </a:prstGeom>
           <a:noFill/>
-        </p:spPr>
-        <p:txBody>
-          <a:bodyPr wrap="square" lIns="0" tIns="0" rIns="0" bIns="0" rtlCol="0" anchor="ctr"/>
-          <a:lstStyle/>
-          <a:p>
-            <a:pPr marL="0" indent="0">
+          <a:ln/>
+        </p:spPr>
+        <p:txBody>
+          <a:bodyPr wrap="square" lIns="0" tIns="0" rIns="0" bIns="0" rtlCol="0" anchor="ctr"/>
+          <a:lstStyle/>
+          <a:p>
+            <a:pPr indent="0" marL="0">
               <a:buNone/>
             </a:pPr>
             <a:r>
@@ -6701,20 +6875,23 @@
                 <a:solidFill>
                   <a:srgbClr val="0891B2"/>
                 </a:solidFill>
-                <a:latin typeface="Segoe UI" panose="020B0502040204020203" pitchFamily="34" charset="0"/>
-                <a:ea typeface="Segoe UI" panose="020B0502040204020203" pitchFamily="34" charset="-122"/>
-                <a:cs typeface="Segoe UI" panose="020B0502040204020203" pitchFamily="34" charset="-120"/>
+                <a:latin typeface="Segoe UI" pitchFamily="34" charset="0"/>
+                <a:ea typeface="Segoe UI" pitchFamily="34" charset="-122"/>
+                <a:cs typeface="Segoe UI" pitchFamily="34" charset="-120"/>
               </a:rPr>
               <a:t>LIVE  </a:t>
             </a:r>
+            <a:pPr indent="0" marL="0">
+              <a:buNone/>
+            </a:pPr>
             <a:r>
               <a:rPr lang="en-US" sz="1100" dirty="0">
                 <a:solidFill>
                   <a:srgbClr val="0B1B33"/>
                 </a:solidFill>
-                <a:latin typeface="Segoe UI" panose="020B0502040204020203" pitchFamily="34" charset="0"/>
-                <a:ea typeface="Segoe UI" panose="020B0502040204020203" pitchFamily="34" charset="-122"/>
-                <a:cs typeface="Segoe UI" panose="020B0502040204020203" pitchFamily="34" charset="-120"/>
+                <a:latin typeface="Segoe UI" pitchFamily="34" charset="0"/>
+                <a:ea typeface="Segoe UI" pitchFamily="34" charset="-122"/>
+                <a:cs typeface="Segoe UI" pitchFamily="34" charset="-120"/>
               </a:rPr>
               <a:t>Maintenance board</a:t>
             </a:r>
@@ -6732,13 +6909,12 @@
 
 <file path=ppt/slides/slide6.xml><?xml version="1.0" encoding="utf-8"?>
 <p:sld xmlns:a="http://schemas.openxmlformats.org/drawingml/2006/main" xmlns:r="http://schemas.openxmlformats.org/officeDocument/2006/relationships" xmlns:p="http://schemas.openxmlformats.org/presentationml/2006/main">
-  <p:cSld>
+  <p:cSld name="Slide 6">
     <p:bg>
       <p:bgPr>
         <a:solidFill>
           <a:srgbClr val="F6F8FB"/>
         </a:solidFill>
-        <a:effectLst/>
       </p:bgPr>
     </p:bg>
     <p:spTree>
@@ -6795,24 +6971,25 @@
             <a:avLst/>
           </a:prstGeom>
           <a:noFill/>
-        </p:spPr>
-        <p:txBody>
-          <a:bodyPr wrap="square" lIns="0" tIns="0" rIns="0" bIns="0" rtlCol="0" anchor="ctr"/>
-          <a:lstStyle/>
-          <a:p>
-            <a:pPr marL="0" indent="0">
-              <a:buNone/>
-            </a:pPr>
-            <a:r>
-              <a:rPr lang="en-US" sz="1050" kern="0" spc="400" dirty="0">
+          <a:ln/>
+        </p:spPr>
+        <p:txBody>
+          <a:bodyPr wrap="square" lIns="0" tIns="0" rIns="0" bIns="0" rtlCol="0" anchor="ctr"/>
+          <a:lstStyle/>
+          <a:p>
+            <a:pPr indent="0" marL="0">
+              <a:buNone/>
+            </a:pPr>
+            <a:r>
+              <a:rPr lang="en-US" sz="1050" spc="400" kern="0" dirty="0">
                 <a:solidFill>
                   <a:srgbClr val="0891B2"/>
                 </a:solidFill>
-                <a:latin typeface="Segoe UI Semibold" panose="020B0702040204020203" pitchFamily="34" charset="0"/>
-                <a:ea typeface="Segoe UI Semibold" panose="020B0702040204020203" pitchFamily="34" charset="-122"/>
-                <a:cs typeface="Segoe UI Semibold" panose="020B0702040204020203" pitchFamily="34" charset="-120"/>
-              </a:rPr>
-              <a:t>06 · NOTIFICATION SERVICE</a:t>
+                <a:latin typeface="Segoe UI Semibold" pitchFamily="34" charset="0"/>
+                <a:ea typeface="Segoe UI Semibold" pitchFamily="34" charset="-122"/>
+                <a:cs typeface="Segoe UI Semibold" pitchFamily="34" charset="-120"/>
+              </a:rPr>
+              <a:t>06 · YASIRU · NOTIFICATION SERVICE</a:t>
             </a:r>
             <a:endParaRPr lang="en-US" sz="1050" dirty="0"/>
           </a:p>
@@ -6833,12 +7010,13 @@
             <a:avLst/>
           </a:prstGeom>
           <a:noFill/>
-        </p:spPr>
-        <p:txBody>
-          <a:bodyPr wrap="square" lIns="0" tIns="0" rIns="0" bIns="0" rtlCol="0" anchor="ctr"/>
-          <a:lstStyle/>
-          <a:p>
-            <a:pPr marL="0" indent="0">
+          <a:ln/>
+        </p:spPr>
+        <p:txBody>
+          <a:bodyPr wrap="square" lIns="0" tIns="0" rIns="0" bIns="0" rtlCol="0" anchor="ctr"/>
+          <a:lstStyle/>
+          <a:p>
+            <a:pPr indent="0" marL="0">
               <a:buNone/>
             </a:pPr>
             <a:r>
@@ -6846,9 +7024,9 @@
                 <a:solidFill>
                   <a:srgbClr val="0B1B33"/>
                 </a:solidFill>
-                <a:latin typeface="Segoe UI Semibold" panose="020B0702040204020203" pitchFamily="34" charset="0"/>
-                <a:ea typeface="Segoe UI Semibold" panose="020B0702040204020203" pitchFamily="34" charset="-122"/>
-                <a:cs typeface="Segoe UI Semibold" panose="020B0702040204020203" pitchFamily="34" charset="-120"/>
+                <a:latin typeface="Segoe UI Semibold" pitchFamily="34" charset="0"/>
+                <a:ea typeface="Segoe UI Semibold" pitchFamily="34" charset="-122"/>
+                <a:cs typeface="Segoe UI Semibold" pitchFamily="34" charset="-120"/>
               </a:rPr>
               <a:t>Every alert delivered and recorded</a:t>
             </a:r>
@@ -6894,12 +7072,13 @@
             <a:avLst/>
           </a:prstGeom>
           <a:noFill/>
-        </p:spPr>
-        <p:txBody>
-          <a:bodyPr wrap="square" lIns="0" tIns="0" rIns="0" bIns="0" rtlCol="0" anchor="ctr"/>
-          <a:lstStyle/>
-          <a:p>
-            <a:pPr marL="0" indent="0">
+          <a:ln/>
+        </p:spPr>
+        <p:txBody>
+          <a:bodyPr wrap="square" lIns="0" tIns="0" rIns="0" bIns="0" rtlCol="0" anchor="ctr"/>
+          <a:lstStyle/>
+          <a:p>
+            <a:pPr indent="0" marL="0">
               <a:buNone/>
             </a:pPr>
             <a:r>
@@ -6907,9 +7086,9 @@
                 <a:solidFill>
                   <a:srgbClr val="64748B"/>
                 </a:solidFill>
-                <a:latin typeface="Segoe UI" panose="020B0502040204020203" pitchFamily="34" charset="0"/>
-                <a:ea typeface="Segoe UI" panose="020B0502040204020203" pitchFamily="34" charset="-122"/>
-                <a:cs typeface="Segoe UI" panose="020B0502040204020203" pitchFamily="34" charset="-120"/>
+                <a:latin typeface="Segoe UI" pitchFamily="34" charset="0"/>
+                <a:ea typeface="Segoe UI" pitchFamily="34" charset="-122"/>
+                <a:cs typeface="Segoe UI" pitchFamily="34" charset="-120"/>
               </a:rPr>
               <a:t>EC8208 Software Architecture  ·  University of Ruhuna</a:t>
             </a:r>
@@ -6932,12 +7111,13 @@
             <a:avLst/>
           </a:prstGeom>
           <a:noFill/>
-        </p:spPr>
-        <p:txBody>
-          <a:bodyPr wrap="square" lIns="0" tIns="0" rIns="0" bIns="0" rtlCol="0" anchor="ctr"/>
-          <a:lstStyle/>
-          <a:p>
-            <a:pPr marL="0" indent="0" algn="r">
+          <a:ln/>
+        </p:spPr>
+        <p:txBody>
+          <a:bodyPr wrap="square" lIns="0" tIns="0" rIns="0" bIns="0" rtlCol="0" anchor="ctr"/>
+          <a:lstStyle/>
+          <a:p>
+            <a:pPr algn="r" indent="0" marL="0">
               <a:buNone/>
             </a:pPr>
             <a:r>
@@ -6945,11 +7125,11 @@
                 <a:solidFill>
                   <a:srgbClr val="64748B"/>
                 </a:solidFill>
-                <a:latin typeface="Segoe UI" panose="020B0502040204020203" pitchFamily="34" charset="0"/>
-                <a:ea typeface="Segoe UI" panose="020B0502040204020203" pitchFamily="34" charset="-122"/>
-                <a:cs typeface="Segoe UI" panose="020B0502040204020203" pitchFamily="34" charset="-120"/>
-              </a:rPr>
-              <a:t>06  ·  2:38–3:27</a:t>
+                <a:latin typeface="Segoe UI" pitchFamily="34" charset="0"/>
+                <a:ea typeface="Segoe UI" pitchFamily="34" charset="-122"/>
+                <a:cs typeface="Segoe UI" pitchFamily="34" charset="-120"/>
+              </a:rPr>
+              <a:t>06  ·  5:24–7:02</a:t>
             </a:r>
             <a:endParaRPr lang="en-US" sz="900" dirty="0"/>
           </a:p>
@@ -6997,12 +7177,13 @@
             <a:avLst/>
           </a:prstGeom>
           <a:noFill/>
-        </p:spPr>
-        <p:txBody>
-          <a:bodyPr wrap="square" lIns="0" tIns="0" rIns="0" bIns="0" rtlCol="0" anchor="ctr"/>
-          <a:lstStyle/>
-          <a:p>
-            <a:pPr marL="0" indent="0" algn="ctr">
+          <a:ln/>
+        </p:spPr>
+        <p:txBody>
+          <a:bodyPr wrap="square" lIns="0" tIns="0" rIns="0" bIns="0" rtlCol="0" anchor="ctr"/>
+          <a:lstStyle/>
+          <a:p>
+            <a:pPr algn="ctr" indent="0" marL="0">
               <a:buNone/>
             </a:pPr>
             <a:r>
@@ -7010,9 +7191,9 @@
                 <a:solidFill>
                   <a:srgbClr val="FFFFFF"/>
                 </a:solidFill>
-                <a:latin typeface="Segoe UI Semibold" panose="020B0702040204020203" pitchFamily="34" charset="0"/>
-                <a:ea typeface="Segoe UI Semibold" panose="020B0702040204020203" pitchFamily="34" charset="-122"/>
-                <a:cs typeface="Segoe UI Semibold" panose="020B0702040204020203" pitchFamily="34" charset="-120"/>
+                <a:latin typeface="Segoe UI Semibold" pitchFamily="34" charset="0"/>
+                <a:ea typeface="Segoe UI Semibold" pitchFamily="34" charset="-122"/>
+                <a:cs typeface="Segoe UI Semibold" pitchFamily="34" charset="-120"/>
               </a:rPr>
               <a:t>Queue</a:t>
             </a:r>
@@ -7035,12 +7216,13 @@
             <a:avLst/>
           </a:prstGeom>
           <a:noFill/>
-        </p:spPr>
-        <p:txBody>
-          <a:bodyPr wrap="square" lIns="0" tIns="0" rIns="0" bIns="0" rtlCol="0" anchor="ctr"/>
-          <a:lstStyle/>
-          <a:p>
-            <a:pPr marL="0" indent="0" algn="ctr">
+          <a:ln/>
+        </p:spPr>
+        <p:txBody>
+          <a:bodyPr wrap="square" lIns="0" tIns="0" rIns="0" bIns="0" rtlCol="0" anchor="ctr"/>
+          <a:lstStyle/>
+          <a:p>
+            <a:pPr algn="ctr" indent="0" marL="0">
               <a:buNone/>
             </a:pPr>
             <a:r>
@@ -7048,9 +7230,9 @@
                 <a:solidFill>
                   <a:srgbClr val="E6F4F8"/>
                 </a:solidFill>
-                <a:latin typeface="Segoe UI" panose="020B0502040204020203" pitchFamily="34" charset="0"/>
-                <a:ea typeface="Segoe UI" panose="020B0502040204020203" pitchFamily="34" charset="-122"/>
-                <a:cs typeface="Segoe UI" panose="020B0502040204020203" pitchFamily="34" charset="-120"/>
+                <a:latin typeface="Segoe UI" pitchFamily="34" charset="0"/>
+                <a:ea typeface="Segoe UI" pitchFamily="34" charset="-122"/>
+                <a:cs typeface="Segoe UI" pitchFamily="34" charset="-120"/>
               </a:rPr>
               <a:t>durable</a:t>
             </a:r>
@@ -7073,12 +7255,13 @@
             <a:avLst/>
           </a:prstGeom>
           <a:noFill/>
-        </p:spPr>
-        <p:txBody>
-          <a:bodyPr wrap="square" lIns="0" tIns="0" rIns="0" bIns="0" rtlCol="0" anchor="ctr"/>
-          <a:lstStyle/>
-          <a:p>
-            <a:pPr marL="0" indent="0" algn="ctr">
+          <a:ln/>
+        </p:spPr>
+        <p:txBody>
+          <a:bodyPr wrap="square" lIns="0" tIns="0" rIns="0" bIns="0" rtlCol="0" anchor="ctr"/>
+          <a:lstStyle/>
+          <a:p>
+            <a:pPr algn="ctr" indent="0" marL="0">
               <a:buNone/>
             </a:pPr>
             <a:r>
@@ -7086,9 +7269,9 @@
                 <a:solidFill>
                   <a:srgbClr val="0891B2"/>
                 </a:solidFill>
-                <a:latin typeface="Segoe UI Semibold" panose="020B0702040204020203" pitchFamily="34" charset="0"/>
-                <a:ea typeface="Segoe UI Semibold" panose="020B0702040204020203" pitchFamily="34" charset="-122"/>
-                <a:cs typeface="Segoe UI Semibold" panose="020B0702040204020203" pitchFamily="34" charset="-120"/>
+                <a:latin typeface="Segoe UI Semibold" pitchFamily="34" charset="0"/>
+                <a:ea typeface="Segoe UI Semibold" pitchFamily="34" charset="-122"/>
+                <a:cs typeface="Segoe UI Semibold" pitchFamily="34" charset="-120"/>
               </a:rPr>
               <a:t>›</a:t>
             </a:r>
@@ -7138,12 +7321,13 @@
             <a:avLst/>
           </a:prstGeom>
           <a:noFill/>
-        </p:spPr>
-        <p:txBody>
-          <a:bodyPr wrap="square" lIns="0" tIns="0" rIns="0" bIns="0" rtlCol="0" anchor="ctr"/>
-          <a:lstStyle/>
-          <a:p>
-            <a:pPr marL="0" indent="0" algn="ctr">
+          <a:ln/>
+        </p:spPr>
+        <p:txBody>
+          <a:bodyPr wrap="square" lIns="0" tIns="0" rIns="0" bIns="0" rtlCol="0" anchor="ctr"/>
+          <a:lstStyle/>
+          <a:p>
+            <a:pPr algn="ctr" indent="0" marL="0">
               <a:buNone/>
             </a:pPr>
             <a:r>
@@ -7151,9 +7335,9 @@
                 <a:solidFill>
                   <a:srgbClr val="0B1B33"/>
                 </a:solidFill>
-                <a:latin typeface="Segoe UI Semibold" panose="020B0702040204020203" pitchFamily="34" charset="0"/>
-                <a:ea typeface="Segoe UI Semibold" panose="020B0702040204020203" pitchFamily="34" charset="-122"/>
-                <a:cs typeface="Segoe UI Semibold" panose="020B0702040204020203" pitchFamily="34" charset="-120"/>
+                <a:latin typeface="Segoe UI Semibold" pitchFamily="34" charset="0"/>
+                <a:ea typeface="Segoe UI Semibold" pitchFamily="34" charset="-122"/>
+                <a:cs typeface="Segoe UI Semibold" pitchFamily="34" charset="-120"/>
               </a:rPr>
               <a:t>Consumer</a:t>
             </a:r>
@@ -7176,12 +7360,13 @@
             <a:avLst/>
           </a:prstGeom>
           <a:noFill/>
-        </p:spPr>
-        <p:txBody>
-          <a:bodyPr wrap="square" lIns="0" tIns="0" rIns="0" bIns="0" rtlCol="0" anchor="ctr"/>
-          <a:lstStyle/>
-          <a:p>
-            <a:pPr marL="0" indent="0" algn="ctr">
+          <a:ln/>
+        </p:spPr>
+        <p:txBody>
+          <a:bodyPr wrap="square" lIns="0" tIns="0" rIns="0" bIns="0" rtlCol="0" anchor="ctr"/>
+          <a:lstStyle/>
+          <a:p>
+            <a:pPr algn="ctr" indent="0" marL="0">
               <a:buNone/>
             </a:pPr>
             <a:r>
@@ -7189,9 +7374,9 @@
                 <a:solidFill>
                   <a:srgbClr val="64748B"/>
                 </a:solidFill>
-                <a:latin typeface="Segoe UI" panose="020B0502040204020203" pitchFamily="34" charset="0"/>
-                <a:ea typeface="Segoe UI" panose="020B0502040204020203" pitchFamily="34" charset="-122"/>
-                <a:cs typeface="Segoe UI" panose="020B0502040204020203" pitchFamily="34" charset="-120"/>
+                <a:latin typeface="Segoe UI" pitchFamily="34" charset="0"/>
+                <a:ea typeface="Segoe UI" pitchFamily="34" charset="-122"/>
+                <a:cs typeface="Segoe UI" pitchFamily="34" charset="-120"/>
               </a:rPr>
               <a:t>schema check</a:t>
             </a:r>
@@ -7214,12 +7399,13 @@
             <a:avLst/>
           </a:prstGeom>
           <a:noFill/>
-        </p:spPr>
-        <p:txBody>
-          <a:bodyPr wrap="square" lIns="0" tIns="0" rIns="0" bIns="0" rtlCol="0" anchor="ctr"/>
-          <a:lstStyle/>
-          <a:p>
-            <a:pPr marL="0" indent="0" algn="ctr">
+          <a:ln/>
+        </p:spPr>
+        <p:txBody>
+          <a:bodyPr wrap="square" lIns="0" tIns="0" rIns="0" bIns="0" rtlCol="0" anchor="ctr"/>
+          <a:lstStyle/>
+          <a:p>
+            <a:pPr algn="ctr" indent="0" marL="0">
               <a:buNone/>
             </a:pPr>
             <a:r>
@@ -7227,9 +7413,9 @@
                 <a:solidFill>
                   <a:srgbClr val="0891B2"/>
                 </a:solidFill>
-                <a:latin typeface="Segoe UI Semibold" panose="020B0702040204020203" pitchFamily="34" charset="0"/>
-                <a:ea typeface="Segoe UI Semibold" panose="020B0702040204020203" pitchFamily="34" charset="-122"/>
-                <a:cs typeface="Segoe UI Semibold" panose="020B0702040204020203" pitchFamily="34" charset="-120"/>
+                <a:latin typeface="Segoe UI Semibold" pitchFamily="34" charset="0"/>
+                <a:ea typeface="Segoe UI Semibold" pitchFamily="34" charset="-122"/>
+                <a:cs typeface="Segoe UI Semibold" pitchFamily="34" charset="-120"/>
               </a:rPr>
               <a:t>›</a:t>
             </a:r>
@@ -7279,12 +7465,13 @@
             <a:avLst/>
           </a:prstGeom>
           <a:noFill/>
-        </p:spPr>
-        <p:txBody>
-          <a:bodyPr wrap="square" lIns="0" tIns="0" rIns="0" bIns="0" rtlCol="0" anchor="ctr"/>
-          <a:lstStyle/>
-          <a:p>
-            <a:pPr marL="0" indent="0" algn="ctr">
+          <a:ln/>
+        </p:spPr>
+        <p:txBody>
+          <a:bodyPr wrap="square" lIns="0" tIns="0" rIns="0" bIns="0" rtlCol="0" anchor="ctr"/>
+          <a:lstStyle/>
+          <a:p>
+            <a:pPr algn="ctr" indent="0" marL="0">
               <a:buNone/>
             </a:pPr>
             <a:r>
@@ -7292,9 +7479,9 @@
                 <a:solidFill>
                   <a:srgbClr val="0B1B33"/>
                 </a:solidFill>
-                <a:latin typeface="Segoe UI Semibold" panose="020B0702040204020203" pitchFamily="34" charset="0"/>
-                <a:ea typeface="Segoe UI Semibold" panose="020B0702040204020203" pitchFamily="34" charset="-122"/>
-                <a:cs typeface="Segoe UI Semibold" panose="020B0702040204020203" pitchFamily="34" charset="-120"/>
+                <a:latin typeface="Segoe UI Semibold" pitchFamily="34" charset="0"/>
+                <a:ea typeface="Segoe UI Semibold" pitchFamily="34" charset="-122"/>
+                <a:cs typeface="Segoe UI Semibold" pitchFamily="34" charset="-120"/>
               </a:rPr>
               <a:t>Channels</a:t>
             </a:r>
@@ -7317,12 +7504,13 @@
             <a:avLst/>
           </a:prstGeom>
           <a:noFill/>
-        </p:spPr>
-        <p:txBody>
-          <a:bodyPr wrap="square" lIns="0" tIns="0" rIns="0" bIns="0" rtlCol="0" anchor="ctr"/>
-          <a:lstStyle/>
-          <a:p>
-            <a:pPr marL="0" indent="0" algn="ctr">
+          <a:ln/>
+        </p:spPr>
+        <p:txBody>
+          <a:bodyPr wrap="square" lIns="0" tIns="0" rIns="0" bIns="0" rtlCol="0" anchor="ctr"/>
+          <a:lstStyle/>
+          <a:p>
+            <a:pPr algn="ctr" indent="0" marL="0">
               <a:buNone/>
             </a:pPr>
             <a:r>
@@ -7330,9 +7518,9 @@
                 <a:solidFill>
                   <a:srgbClr val="64748B"/>
                 </a:solidFill>
-                <a:latin typeface="Segoe UI" panose="020B0502040204020203" pitchFamily="34" charset="0"/>
-                <a:ea typeface="Segoe UI" panose="020B0502040204020203" pitchFamily="34" charset="-122"/>
-                <a:cs typeface="Segoe UI" panose="020B0502040204020203" pitchFamily="34" charset="-120"/>
+                <a:latin typeface="Segoe UI" pitchFamily="34" charset="0"/>
+                <a:ea typeface="Segoe UI" pitchFamily="34" charset="-122"/>
+                <a:cs typeface="Segoe UI" pitchFamily="34" charset="-120"/>
               </a:rPr>
               <a:t>email · push</a:t>
             </a:r>
@@ -7355,12 +7543,13 @@
             <a:avLst/>
           </a:prstGeom>
           <a:noFill/>
-        </p:spPr>
-        <p:txBody>
-          <a:bodyPr wrap="square" lIns="0" tIns="0" rIns="0" bIns="0" rtlCol="0" anchor="ctr"/>
-          <a:lstStyle/>
-          <a:p>
-            <a:pPr marL="0" indent="0" algn="ctr">
+          <a:ln/>
+        </p:spPr>
+        <p:txBody>
+          <a:bodyPr wrap="square" lIns="0" tIns="0" rIns="0" bIns="0" rtlCol="0" anchor="ctr"/>
+          <a:lstStyle/>
+          <a:p>
+            <a:pPr algn="ctr" indent="0" marL="0">
               <a:buNone/>
             </a:pPr>
             <a:r>
@@ -7368,9 +7557,9 @@
                 <a:solidFill>
                   <a:srgbClr val="0891B2"/>
                 </a:solidFill>
-                <a:latin typeface="Segoe UI Semibold" panose="020B0702040204020203" pitchFamily="34" charset="0"/>
-                <a:ea typeface="Segoe UI Semibold" panose="020B0702040204020203" pitchFamily="34" charset="-122"/>
-                <a:cs typeface="Segoe UI Semibold" panose="020B0702040204020203" pitchFamily="34" charset="-120"/>
+                <a:latin typeface="Segoe UI Semibold" pitchFamily="34" charset="0"/>
+                <a:ea typeface="Segoe UI Semibold" pitchFamily="34" charset="-122"/>
+                <a:cs typeface="Segoe UI Semibold" pitchFamily="34" charset="-120"/>
               </a:rPr>
               <a:t>›</a:t>
             </a:r>
@@ -7420,12 +7609,13 @@
             <a:avLst/>
           </a:prstGeom>
           <a:noFill/>
-        </p:spPr>
-        <p:txBody>
-          <a:bodyPr wrap="square" lIns="0" tIns="0" rIns="0" bIns="0" rtlCol="0" anchor="ctr"/>
-          <a:lstStyle/>
-          <a:p>
-            <a:pPr marL="0" indent="0" algn="ctr">
+          <a:ln/>
+        </p:spPr>
+        <p:txBody>
+          <a:bodyPr wrap="square" lIns="0" tIns="0" rIns="0" bIns="0" rtlCol="0" anchor="ctr"/>
+          <a:lstStyle/>
+          <a:p>
+            <a:pPr algn="ctr" indent="0" marL="0">
               <a:buNone/>
             </a:pPr>
             <a:r>
@@ -7433,9 +7623,9 @@
                 <a:solidFill>
                   <a:srgbClr val="0B1B33"/>
                 </a:solidFill>
-                <a:latin typeface="Segoe UI Semibold" panose="020B0702040204020203" pitchFamily="34" charset="0"/>
-                <a:ea typeface="Segoe UI Semibold" panose="020B0702040204020203" pitchFamily="34" charset="-122"/>
-                <a:cs typeface="Segoe UI Semibold" panose="020B0702040204020203" pitchFamily="34" charset="-120"/>
+                <a:latin typeface="Segoe UI Semibold" pitchFamily="34" charset="0"/>
+                <a:ea typeface="Segoe UI Semibold" pitchFamily="34" charset="-122"/>
+                <a:cs typeface="Segoe UI Semibold" pitchFamily="34" charset="-120"/>
               </a:rPr>
               <a:t>History</a:t>
             </a:r>
@@ -7458,12 +7648,13 @@
             <a:avLst/>
           </a:prstGeom>
           <a:noFill/>
-        </p:spPr>
-        <p:txBody>
-          <a:bodyPr wrap="square" lIns="0" tIns="0" rIns="0" bIns="0" rtlCol="0" anchor="ctr"/>
-          <a:lstStyle/>
-          <a:p>
-            <a:pPr marL="0" indent="0" algn="ctr">
+          <a:ln/>
+        </p:spPr>
+        <p:txBody>
+          <a:bodyPr wrap="square" lIns="0" tIns="0" rIns="0" bIns="0" rtlCol="0" anchor="ctr"/>
+          <a:lstStyle/>
+          <a:p>
+            <a:pPr algn="ctr" indent="0" marL="0">
               <a:buNone/>
             </a:pPr>
             <a:r>
@@ -7471,9 +7662,9 @@
                 <a:solidFill>
                   <a:srgbClr val="64748B"/>
                 </a:solidFill>
-                <a:latin typeface="Segoe UI" panose="020B0502040204020203" pitchFamily="34" charset="0"/>
-                <a:ea typeface="Segoe UI" panose="020B0502040204020203" pitchFamily="34" charset="-122"/>
-                <a:cs typeface="Segoe UI" panose="020B0502040204020203" pitchFamily="34" charset="-120"/>
+                <a:latin typeface="Segoe UI" pitchFamily="34" charset="0"/>
+                <a:ea typeface="Segoe UI" pitchFamily="34" charset="-122"/>
+                <a:cs typeface="Segoe UI" pitchFamily="34" charset="-120"/>
               </a:rPr>
               <a:t>stored</a:t>
             </a:r>
@@ -7519,12 +7710,13 @@
             <a:avLst/>
           </a:prstGeom>
           <a:noFill/>
-        </p:spPr>
-        <p:txBody>
-          <a:bodyPr wrap="square" lIns="0" tIns="0" rIns="0" bIns="0" rtlCol="0" anchor="ctr"/>
-          <a:lstStyle/>
-          <a:p>
-            <a:pPr marL="0" indent="0">
+          <a:ln/>
+        </p:spPr>
+        <p:txBody>
+          <a:bodyPr wrap="square" lIns="0" tIns="0" rIns="0" bIns="0" rtlCol="0" anchor="ctr"/>
+          <a:lstStyle/>
+          <a:p>
+            <a:pPr indent="0" marL="0">
               <a:buNone/>
             </a:pPr>
             <a:r>
@@ -7532,9 +7724,9 @@
                 <a:solidFill>
                   <a:srgbClr val="0891B2"/>
                 </a:solidFill>
-                <a:latin typeface="Segoe UI Semibold" panose="020B0702040204020203" pitchFamily="34" charset="0"/>
-                <a:ea typeface="Segoe UI Semibold" panose="020B0702040204020203" pitchFamily="34" charset="-122"/>
-                <a:cs typeface="Segoe UI Semibold" panose="020B0702040204020203" pitchFamily="34" charset="-120"/>
+                <a:latin typeface="Segoe UI Semibold" pitchFamily="34" charset="0"/>
+                <a:ea typeface="Segoe UI Semibold" pitchFamily="34" charset="-122"/>
+                <a:cs typeface="Segoe UI Semibold" pitchFamily="34" charset="-120"/>
               </a:rPr>
               <a:t>Instant</a:t>
             </a:r>
@@ -7557,12 +7749,13 @@
             <a:avLst/>
           </a:prstGeom>
           <a:noFill/>
+          <a:ln/>
         </p:spPr>
         <p:txBody>
           <a:bodyPr wrap="square" lIns="0" tIns="0" rIns="0" bIns="0" rtlCol="0" anchor="t"/>
           <a:lstStyle/>
           <a:p>
-            <a:pPr marL="0" indent="0">
+            <a:pPr indent="0" marL="0">
               <a:buNone/>
             </a:pPr>
             <a:r>
@@ -7570,9 +7763,9 @@
                 <a:solidFill>
                   <a:srgbClr val="64748B"/>
                 </a:solidFill>
-                <a:latin typeface="Segoe UI" panose="020B0502040204020203" pitchFamily="34" charset="0"/>
-                <a:ea typeface="Segoe UI" panose="020B0502040204020203" pitchFamily="34" charset="-122"/>
-                <a:cs typeface="Segoe UI" panose="020B0502040204020203" pitchFamily="34" charset="-120"/>
+                <a:latin typeface="Segoe UI" pitchFamily="34" charset="0"/>
+                <a:ea typeface="Segoe UI" pitchFamily="34" charset="-122"/>
+                <a:cs typeface="Segoe UI" pitchFamily="34" charset="-120"/>
               </a:rPr>
               <a:t>in-app push</a:t>
             </a:r>
@@ -7618,12 +7811,13 @@
             <a:avLst/>
           </a:prstGeom>
           <a:noFill/>
-        </p:spPr>
-        <p:txBody>
-          <a:bodyPr wrap="square" lIns="0" tIns="0" rIns="0" bIns="0" rtlCol="0" anchor="ctr"/>
-          <a:lstStyle/>
-          <a:p>
-            <a:pPr marL="0" indent="0">
+          <a:ln/>
+        </p:spPr>
+        <p:txBody>
+          <a:bodyPr wrap="square" lIns="0" tIns="0" rIns="0" bIns="0" rtlCol="0" anchor="ctr"/>
+          <a:lstStyle/>
+          <a:p>
+            <a:pPr indent="0" marL="0">
               <a:buNone/>
             </a:pPr>
             <a:r>
@@ -7631,9 +7825,9 @@
                 <a:solidFill>
                   <a:srgbClr val="0891B2"/>
                 </a:solidFill>
-                <a:latin typeface="Segoe UI Semibold" panose="020B0702040204020203" pitchFamily="34" charset="0"/>
-                <a:ea typeface="Segoe UI Semibold" panose="020B0702040204020203" pitchFamily="34" charset="-122"/>
-                <a:cs typeface="Segoe UI Semibold" panose="020B0702040204020203" pitchFamily="34" charset="-120"/>
+                <a:latin typeface="Segoe UI Semibold" pitchFamily="34" charset="0"/>
+                <a:ea typeface="Segoe UI Semibold" pitchFamily="34" charset="-122"/>
+                <a:cs typeface="Segoe UI Semibold" pitchFamily="34" charset="-120"/>
               </a:rPr>
               <a:t>3</a:t>
             </a:r>
@@ -7656,12 +7850,13 @@
             <a:avLst/>
           </a:prstGeom>
           <a:noFill/>
+          <a:ln/>
         </p:spPr>
         <p:txBody>
           <a:bodyPr wrap="square" lIns="0" tIns="0" rIns="0" bIns="0" rtlCol="0" anchor="t"/>
           <a:lstStyle/>
           <a:p>
-            <a:pPr marL="0" indent="0">
+            <a:pPr indent="0" marL="0">
               <a:buNone/>
             </a:pPr>
             <a:r>
@@ -7669,9 +7864,9 @@
                 <a:solidFill>
                   <a:srgbClr val="64748B"/>
                 </a:solidFill>
-                <a:latin typeface="Segoe UI" panose="020B0502040204020203" pitchFamily="34" charset="0"/>
-                <a:ea typeface="Segoe UI" panose="020B0502040204020203" pitchFamily="34" charset="-122"/>
-                <a:cs typeface="Segoe UI" panose="020B0502040204020203" pitchFamily="34" charset="-120"/>
+                <a:latin typeface="Segoe UI" pitchFamily="34" charset="0"/>
+                <a:ea typeface="Segoe UI" pitchFamily="34" charset="-122"/>
+                <a:cs typeface="Segoe UI" pitchFamily="34" charset="-120"/>
               </a:rPr>
               <a:t>automatic retries</a:t>
             </a:r>
@@ -7717,12 +7912,13 @@
             <a:avLst/>
           </a:prstGeom>
           <a:noFill/>
-        </p:spPr>
-        <p:txBody>
-          <a:bodyPr wrap="square" lIns="0" tIns="0" rIns="0" bIns="0" rtlCol="0" anchor="ctr"/>
-          <a:lstStyle/>
-          <a:p>
-            <a:pPr marL="0" indent="0">
+          <a:ln/>
+        </p:spPr>
+        <p:txBody>
+          <a:bodyPr wrap="square" lIns="0" tIns="0" rIns="0" bIns="0" rtlCol="0" anchor="ctr"/>
+          <a:lstStyle/>
+          <a:p>
+            <a:pPr indent="0" marL="0">
               <a:buNone/>
             </a:pPr>
             <a:r>
@@ -7730,9 +7926,9 @@
                 <a:solidFill>
                   <a:srgbClr val="0891B2"/>
                 </a:solidFill>
-                <a:latin typeface="Segoe UI Semibold" panose="020B0702040204020203" pitchFamily="34" charset="0"/>
-                <a:ea typeface="Segoe UI Semibold" panose="020B0702040204020203" pitchFamily="34" charset="-122"/>
-                <a:cs typeface="Segoe UI Semibold" panose="020B0702040204020203" pitchFamily="34" charset="-120"/>
+                <a:latin typeface="Segoe UI Semibold" pitchFamily="34" charset="0"/>
+                <a:ea typeface="Segoe UI Semibold" pitchFamily="34" charset="-122"/>
+                <a:cs typeface="Segoe UI Semibold" pitchFamily="34" charset="-120"/>
               </a:rPr>
               <a:t>100%</a:t>
             </a:r>
@@ -7755,12 +7951,13 @@
             <a:avLst/>
           </a:prstGeom>
           <a:noFill/>
+          <a:ln/>
         </p:spPr>
         <p:txBody>
           <a:bodyPr wrap="square" lIns="0" tIns="0" rIns="0" bIns="0" rtlCol="0" anchor="t"/>
           <a:lstStyle/>
           <a:p>
-            <a:pPr marL="0" indent="0">
+            <a:pPr indent="0" marL="0">
               <a:buNone/>
             </a:pPr>
             <a:r>
@@ -7768,9 +7965,9 @@
                 <a:solidFill>
                   <a:srgbClr val="64748B"/>
                 </a:solidFill>
-                <a:latin typeface="Segoe UI" panose="020B0502040204020203" pitchFamily="34" charset="0"/>
-                <a:ea typeface="Segoe UI" panose="020B0502040204020203" pitchFamily="34" charset="-122"/>
-                <a:cs typeface="Segoe UI" panose="020B0502040204020203" pitchFamily="34" charset="-120"/>
+                <a:latin typeface="Segoe UI" pitchFamily="34" charset="0"/>
+                <a:ea typeface="Segoe UI" pitchFamily="34" charset="-122"/>
+                <a:cs typeface="Segoe UI" pitchFamily="34" charset="-120"/>
               </a:rPr>
               <a:t>deliveries recorded</a:t>
             </a:r>
@@ -7820,12 +8017,13 @@
             <a:avLst/>
           </a:prstGeom>
           <a:noFill/>
-        </p:spPr>
-        <p:txBody>
-          <a:bodyPr wrap="square" lIns="0" tIns="0" rIns="0" bIns="0" rtlCol="0" anchor="ctr"/>
-          <a:lstStyle/>
-          <a:p>
-            <a:pPr marL="0" indent="0">
+          <a:ln/>
+        </p:spPr>
+        <p:txBody>
+          <a:bodyPr wrap="square" lIns="0" tIns="0" rIns="0" bIns="0" rtlCol="0" anchor="ctr"/>
+          <a:lstStyle/>
+          <a:p>
+            <a:pPr indent="0" marL="0">
               <a:buNone/>
             </a:pPr>
             <a:r>
@@ -7833,20 +8031,23 @@
                 <a:solidFill>
                   <a:srgbClr val="0891B2"/>
                 </a:solidFill>
-                <a:latin typeface="Segoe UI" panose="020B0502040204020203" pitchFamily="34" charset="0"/>
-                <a:ea typeface="Segoe UI" panose="020B0502040204020203" pitchFamily="34" charset="-122"/>
-                <a:cs typeface="Segoe UI" panose="020B0502040204020203" pitchFamily="34" charset="-120"/>
+                <a:latin typeface="Segoe UI" pitchFamily="34" charset="0"/>
+                <a:ea typeface="Segoe UI" pitchFamily="34" charset="-122"/>
+                <a:cs typeface="Segoe UI" pitchFamily="34" charset="-120"/>
               </a:rPr>
               <a:t>LIVE  </a:t>
             </a:r>
+            <a:pPr indent="0" marL="0">
+              <a:buNone/>
+            </a:pPr>
             <a:r>
               <a:rPr lang="en-US" sz="1100" dirty="0">
                 <a:solidFill>
                   <a:srgbClr val="0B1B33"/>
                 </a:solidFill>
-                <a:latin typeface="Segoe UI" panose="020B0502040204020203" pitchFamily="34" charset="0"/>
-                <a:ea typeface="Segoe UI" panose="020B0502040204020203" pitchFamily="34" charset="-122"/>
-                <a:cs typeface="Segoe UI" panose="020B0502040204020203" pitchFamily="34" charset="-120"/>
+                <a:latin typeface="Segoe UI" pitchFamily="34" charset="0"/>
+                <a:ea typeface="Segoe UI" pitchFamily="34" charset="-122"/>
+                <a:cs typeface="Segoe UI" pitchFamily="34" charset="-120"/>
               </a:rPr>
               <a:t>Notifications page</a:t>
             </a:r>
@@ -7864,13 +8065,12 @@
 
 <file path=ppt/slides/slide7.xml><?xml version="1.0" encoding="utf-8"?>
 <p:sld xmlns:a="http://schemas.openxmlformats.org/drawingml/2006/main" xmlns:r="http://schemas.openxmlformats.org/officeDocument/2006/relationships" xmlns:p="http://schemas.openxmlformats.org/presentationml/2006/main">
-  <p:cSld>
+  <p:cSld name="Slide 7">
     <p:bg>
       <p:bgPr>
         <a:solidFill>
           <a:srgbClr val="F6F8FB"/>
         </a:solidFill>
-        <a:effectLst/>
       </p:bgPr>
     </p:bg>
     <p:spTree>
@@ -7927,24 +8127,25 @@
             <a:avLst/>
           </a:prstGeom>
           <a:noFill/>
-        </p:spPr>
-        <p:txBody>
-          <a:bodyPr wrap="square" lIns="0" tIns="0" rIns="0" bIns="0" rtlCol="0" anchor="ctr"/>
-          <a:lstStyle/>
-          <a:p>
-            <a:pPr marL="0" indent="0">
-              <a:buNone/>
-            </a:pPr>
-            <a:r>
-              <a:rPr lang="en-US" sz="1050" kern="0" spc="400" dirty="0">
+          <a:ln/>
+        </p:spPr>
+        <p:txBody>
+          <a:bodyPr wrap="square" lIns="0" tIns="0" rIns="0" bIns="0" rtlCol="0" anchor="ctr"/>
+          <a:lstStyle/>
+          <a:p>
+            <a:pPr indent="0" marL="0">
+              <a:buNone/>
+            </a:pPr>
+            <a:r>
+              <a:rPr lang="en-US" sz="1050" spc="400" kern="0" dirty="0">
                 <a:solidFill>
                   <a:srgbClr val="0891B2"/>
                 </a:solidFill>
-                <a:latin typeface="Segoe UI Semibold" panose="020B0702040204020203" pitchFamily="34" charset="0"/>
-                <a:ea typeface="Segoe UI Semibold" panose="020B0702040204020203" pitchFamily="34" charset="-122"/>
-                <a:cs typeface="Segoe UI Semibold" panose="020B0702040204020203" pitchFamily="34" charset="-120"/>
-              </a:rPr>
-              <a:t>07 · ANALYTICS SERVICE</a:t>
+                <a:latin typeface="Segoe UI Semibold" pitchFamily="34" charset="0"/>
+                <a:ea typeface="Segoe UI Semibold" pitchFamily="34" charset="-122"/>
+                <a:cs typeface="Segoe UI Semibold" pitchFamily="34" charset="-120"/>
+              </a:rPr>
+              <a:t>07 · SACHINTHANA · ANALYTICS SERVICE</a:t>
             </a:r>
             <a:endParaRPr lang="en-US" sz="1050" dirty="0"/>
           </a:p>
@@ -7965,12 +8166,13 @@
             <a:avLst/>
           </a:prstGeom>
           <a:noFill/>
-        </p:spPr>
-        <p:txBody>
-          <a:bodyPr wrap="square" lIns="0" tIns="0" rIns="0" bIns="0" rtlCol="0" anchor="ctr"/>
-          <a:lstStyle/>
-          <a:p>
-            <a:pPr marL="0" indent="0">
+          <a:ln/>
+        </p:spPr>
+        <p:txBody>
+          <a:bodyPr wrap="square" lIns="0" tIns="0" rIns="0" bIns="0" rtlCol="0" anchor="ctr"/>
+          <a:lstStyle/>
+          <a:p>
+            <a:pPr indent="0" marL="0">
               <a:buNone/>
             </a:pPr>
             <a:r>
@@ -7978,9 +8180,9 @@
                 <a:solidFill>
                   <a:srgbClr val="0B1B33"/>
                 </a:solidFill>
-                <a:latin typeface="Segoe UI Semibold" panose="020B0702040204020203" pitchFamily="34" charset="0"/>
-                <a:ea typeface="Segoe UI Semibold" panose="020B0702040204020203" pitchFamily="34" charset="-122"/>
-                <a:cs typeface="Segoe UI Semibold" panose="020B0702040204020203" pitchFamily="34" charset="-120"/>
+                <a:latin typeface="Segoe UI Semibold" pitchFamily="34" charset="0"/>
+                <a:ea typeface="Segoe UI Semibold" pitchFamily="34" charset="-122"/>
+                <a:cs typeface="Segoe UI Semibold" pitchFamily="34" charset="-120"/>
               </a:rPr>
               <a:t>Trustworthy energy figures and reports</a:t>
             </a:r>
@@ -8026,12 +8228,13 @@
             <a:avLst/>
           </a:prstGeom>
           <a:noFill/>
-        </p:spPr>
-        <p:txBody>
-          <a:bodyPr wrap="square" lIns="0" tIns="0" rIns="0" bIns="0" rtlCol="0" anchor="ctr"/>
-          <a:lstStyle/>
-          <a:p>
-            <a:pPr marL="0" indent="0">
+          <a:ln/>
+        </p:spPr>
+        <p:txBody>
+          <a:bodyPr wrap="square" lIns="0" tIns="0" rIns="0" bIns="0" rtlCol="0" anchor="ctr"/>
+          <a:lstStyle/>
+          <a:p>
+            <a:pPr indent="0" marL="0">
               <a:buNone/>
             </a:pPr>
             <a:r>
@@ -8039,9 +8242,9 @@
                 <a:solidFill>
                   <a:srgbClr val="64748B"/>
                 </a:solidFill>
-                <a:latin typeface="Segoe UI" panose="020B0502040204020203" pitchFamily="34" charset="0"/>
-                <a:ea typeface="Segoe UI" panose="020B0502040204020203" pitchFamily="34" charset="-122"/>
-                <a:cs typeface="Segoe UI" panose="020B0502040204020203" pitchFamily="34" charset="-120"/>
+                <a:latin typeface="Segoe UI" pitchFamily="34" charset="0"/>
+                <a:ea typeface="Segoe UI" pitchFamily="34" charset="-122"/>
+                <a:cs typeface="Segoe UI" pitchFamily="34" charset="-120"/>
               </a:rPr>
               <a:t>EC8208 Software Architecture  ·  University of Ruhuna</a:t>
             </a:r>
@@ -8064,12 +8267,13 @@
             <a:avLst/>
           </a:prstGeom>
           <a:noFill/>
-        </p:spPr>
-        <p:txBody>
-          <a:bodyPr wrap="square" lIns="0" tIns="0" rIns="0" bIns="0" rtlCol="0" anchor="ctr"/>
-          <a:lstStyle/>
-          <a:p>
-            <a:pPr marL="0" indent="0" algn="r">
+          <a:ln/>
+        </p:spPr>
+        <p:txBody>
+          <a:bodyPr wrap="square" lIns="0" tIns="0" rIns="0" bIns="0" rtlCol="0" anchor="ctr"/>
+          <a:lstStyle/>
+          <a:p>
+            <a:pPr algn="r" indent="0" marL="0">
               <a:buNone/>
             </a:pPr>
             <a:r>
@@ -8077,11 +8281,11 @@
                 <a:solidFill>
                   <a:srgbClr val="64748B"/>
                 </a:solidFill>
-                <a:latin typeface="Segoe UI" panose="020B0502040204020203" pitchFamily="34" charset="0"/>
-                <a:ea typeface="Segoe UI" panose="020B0502040204020203" pitchFamily="34" charset="-122"/>
-                <a:cs typeface="Segoe UI" panose="020B0502040204020203" pitchFamily="34" charset="-120"/>
-              </a:rPr>
-              <a:t>07  ·  3:27–4:16</a:t>
+                <a:latin typeface="Segoe UI" pitchFamily="34" charset="0"/>
+                <a:ea typeface="Segoe UI" pitchFamily="34" charset="-122"/>
+                <a:cs typeface="Segoe UI" pitchFamily="34" charset="-120"/>
+              </a:rPr>
+              <a:t>07  ·  7:02–8:40</a:t>
             </a:r>
             <a:endParaRPr lang="en-US" sz="900" dirty="0"/>
           </a:p>
@@ -8129,12 +8333,13 @@
             <a:avLst/>
           </a:prstGeom>
           <a:noFill/>
-        </p:spPr>
-        <p:txBody>
-          <a:bodyPr wrap="square" lIns="0" tIns="0" rIns="0" bIns="0" rtlCol="0" anchor="ctr"/>
-          <a:lstStyle/>
-          <a:p>
-            <a:pPr marL="0" indent="0" algn="ctr">
+          <a:ln/>
+        </p:spPr>
+        <p:txBody>
+          <a:bodyPr wrap="square" lIns="0" tIns="0" rIns="0" bIns="0" rtlCol="0" anchor="ctr"/>
+          <a:lstStyle/>
+          <a:p>
+            <a:pPr algn="ctr" indent="0" marL="0">
               <a:buNone/>
             </a:pPr>
             <a:r>
@@ -8142,9 +8347,9 @@
                 <a:solidFill>
                   <a:srgbClr val="FFFFFF"/>
                 </a:solidFill>
-                <a:latin typeface="Segoe UI Semibold" panose="020B0702040204020203" pitchFamily="34" charset="0"/>
-                <a:ea typeface="Segoe UI Semibold" panose="020B0702040204020203" pitchFamily="34" charset="-122"/>
-                <a:cs typeface="Segoe UI Semibold" panose="020B0702040204020203" pitchFamily="34" charset="-120"/>
+                <a:latin typeface="Segoe UI Semibold" pitchFamily="34" charset="0"/>
+                <a:ea typeface="Segoe UI Semibold" pitchFamily="34" charset="-122"/>
+                <a:cs typeface="Segoe UI Semibold" pitchFamily="34" charset="-120"/>
               </a:rPr>
               <a:t>Source APIs</a:t>
             </a:r>
@@ -8167,12 +8372,13 @@
             <a:avLst/>
           </a:prstGeom>
           <a:noFill/>
-        </p:spPr>
-        <p:txBody>
-          <a:bodyPr wrap="square" lIns="0" tIns="0" rIns="0" bIns="0" rtlCol="0" anchor="ctr"/>
-          <a:lstStyle/>
-          <a:p>
-            <a:pPr marL="0" indent="0" algn="ctr">
+          <a:ln/>
+        </p:spPr>
+        <p:txBody>
+          <a:bodyPr wrap="square" lIns="0" tIns="0" rIns="0" bIns="0" rtlCol="0" anchor="ctr"/>
+          <a:lstStyle/>
+          <a:p>
+            <a:pPr algn="ctr" indent="0" marL="0">
               <a:buNone/>
             </a:pPr>
             <a:r>
@@ -8180,9 +8386,9 @@
                 <a:solidFill>
                   <a:srgbClr val="E6F4F8"/>
                 </a:solidFill>
-                <a:latin typeface="Segoe UI" panose="020B0502040204020203" pitchFamily="34" charset="0"/>
-                <a:ea typeface="Segoe UI" panose="020B0502040204020203" pitchFamily="34" charset="-122"/>
-                <a:cs typeface="Segoe UI" panose="020B0502040204020203" pitchFamily="34" charset="-120"/>
+                <a:latin typeface="Segoe UI" pitchFamily="34" charset="0"/>
+                <a:ea typeface="Segoe UI" pitchFamily="34" charset="-122"/>
+                <a:cs typeface="Segoe UI" pitchFamily="34" charset="-120"/>
               </a:rPr>
               <a:t>REST only</a:t>
             </a:r>
@@ -8205,12 +8411,13 @@
             <a:avLst/>
           </a:prstGeom>
           <a:noFill/>
-        </p:spPr>
-        <p:txBody>
-          <a:bodyPr wrap="square" lIns="0" tIns="0" rIns="0" bIns="0" rtlCol="0" anchor="ctr"/>
-          <a:lstStyle/>
-          <a:p>
-            <a:pPr marL="0" indent="0" algn="ctr">
+          <a:ln/>
+        </p:spPr>
+        <p:txBody>
+          <a:bodyPr wrap="square" lIns="0" tIns="0" rIns="0" bIns="0" rtlCol="0" anchor="ctr"/>
+          <a:lstStyle/>
+          <a:p>
+            <a:pPr algn="ctr" indent="0" marL="0">
               <a:buNone/>
             </a:pPr>
             <a:r>
@@ -8218,9 +8425,9 @@
                 <a:solidFill>
                   <a:srgbClr val="0891B2"/>
                 </a:solidFill>
-                <a:latin typeface="Segoe UI Semibold" panose="020B0702040204020203" pitchFamily="34" charset="0"/>
-                <a:ea typeface="Segoe UI Semibold" panose="020B0702040204020203" pitchFamily="34" charset="-122"/>
-                <a:cs typeface="Segoe UI Semibold" panose="020B0702040204020203" pitchFamily="34" charset="-120"/>
+                <a:latin typeface="Segoe UI Semibold" pitchFamily="34" charset="0"/>
+                <a:ea typeface="Segoe UI Semibold" pitchFamily="34" charset="-122"/>
+                <a:cs typeface="Segoe UI Semibold" pitchFamily="34" charset="-120"/>
               </a:rPr>
               <a:t>›</a:t>
             </a:r>
@@ -8270,12 +8477,13 @@
             <a:avLst/>
           </a:prstGeom>
           <a:noFill/>
-        </p:spPr>
-        <p:txBody>
-          <a:bodyPr wrap="square" lIns="0" tIns="0" rIns="0" bIns="0" rtlCol="0" anchor="ctr"/>
-          <a:lstStyle/>
-          <a:p>
-            <a:pPr marL="0" indent="0" algn="ctr">
+          <a:ln/>
+        </p:spPr>
+        <p:txBody>
+          <a:bodyPr wrap="square" lIns="0" tIns="0" rIns="0" bIns="0" rtlCol="0" anchor="ctr"/>
+          <a:lstStyle/>
+          <a:p>
+            <a:pPr algn="ctr" indent="0" marL="0">
               <a:buNone/>
             </a:pPr>
             <a:r>
@@ -8283,9 +8491,9 @@
                 <a:solidFill>
                   <a:srgbClr val="0B1B33"/>
                 </a:solidFill>
-                <a:latin typeface="Segoe UI Semibold" panose="020B0702040204020203" pitchFamily="34" charset="0"/>
-                <a:ea typeface="Segoe UI Semibold" panose="020B0702040204020203" pitchFamily="34" charset="-122"/>
-                <a:cs typeface="Segoe UI Semibold" panose="020B0702040204020203" pitchFamily="34" charset="-120"/>
+                <a:latin typeface="Segoe UI Semibold" pitchFamily="34" charset="0"/>
+                <a:ea typeface="Segoe UI Semibold" pitchFamily="34" charset="-122"/>
+                <a:cs typeface="Segoe UI Semibold" pitchFamily="34" charset="-120"/>
               </a:rPr>
               <a:t>Calculation</a:t>
             </a:r>
@@ -8308,12 +8516,13 @@
             <a:avLst/>
           </a:prstGeom>
           <a:noFill/>
-        </p:spPr>
-        <p:txBody>
-          <a:bodyPr wrap="square" lIns="0" tIns="0" rIns="0" bIns="0" rtlCol="0" anchor="ctr"/>
-          <a:lstStyle/>
-          <a:p>
-            <a:pPr marL="0" indent="0" algn="ctr">
+          <a:ln/>
+        </p:spPr>
+        <p:txBody>
+          <a:bodyPr wrap="square" lIns="0" tIns="0" rIns="0" bIns="0" rtlCol="0" anchor="ctr"/>
+          <a:lstStyle/>
+          <a:p>
+            <a:pPr algn="ctr" indent="0" marL="0">
               <a:buNone/>
             </a:pPr>
             <a:r>
@@ -8321,9 +8530,9 @@
                 <a:solidFill>
                   <a:srgbClr val="64748B"/>
                 </a:solidFill>
-                <a:latin typeface="Segoe UI" panose="020B0502040204020203" pitchFamily="34" charset="0"/>
-                <a:ea typeface="Segoe UI" panose="020B0502040204020203" pitchFamily="34" charset="-122"/>
-                <a:cs typeface="Segoe UI" panose="020B0502040204020203" pitchFamily="34" charset="-120"/>
+                <a:latin typeface="Segoe UI" pitchFamily="34" charset="0"/>
+                <a:ea typeface="Segoe UI" pitchFamily="34" charset="-122"/>
+                <a:cs typeface="Segoe UI" pitchFamily="34" charset="-120"/>
               </a:rPr>
               <a:t>power to kWh</a:t>
             </a:r>
@@ -8346,12 +8555,13 @@
             <a:avLst/>
           </a:prstGeom>
           <a:noFill/>
-        </p:spPr>
-        <p:txBody>
-          <a:bodyPr wrap="square" lIns="0" tIns="0" rIns="0" bIns="0" rtlCol="0" anchor="ctr"/>
-          <a:lstStyle/>
-          <a:p>
-            <a:pPr marL="0" indent="0" algn="ctr">
+          <a:ln/>
+        </p:spPr>
+        <p:txBody>
+          <a:bodyPr wrap="square" lIns="0" tIns="0" rIns="0" bIns="0" rtlCol="0" anchor="ctr"/>
+          <a:lstStyle/>
+          <a:p>
+            <a:pPr algn="ctr" indent="0" marL="0">
               <a:buNone/>
             </a:pPr>
             <a:r>
@@ -8359,9 +8569,9 @@
                 <a:solidFill>
                   <a:srgbClr val="0891B2"/>
                 </a:solidFill>
-                <a:latin typeface="Segoe UI Semibold" panose="020B0702040204020203" pitchFamily="34" charset="0"/>
-                <a:ea typeface="Segoe UI Semibold" panose="020B0702040204020203" pitchFamily="34" charset="-122"/>
-                <a:cs typeface="Segoe UI Semibold" panose="020B0702040204020203" pitchFamily="34" charset="-120"/>
+                <a:latin typeface="Segoe UI Semibold" pitchFamily="34" charset="0"/>
+                <a:ea typeface="Segoe UI Semibold" pitchFamily="34" charset="-122"/>
+                <a:cs typeface="Segoe UI Semibold" pitchFamily="34" charset="-120"/>
               </a:rPr>
               <a:t>›</a:t>
             </a:r>
@@ -8411,12 +8621,13 @@
             <a:avLst/>
           </a:prstGeom>
           <a:noFill/>
-        </p:spPr>
-        <p:txBody>
-          <a:bodyPr wrap="square" lIns="0" tIns="0" rIns="0" bIns="0" rtlCol="0" anchor="ctr"/>
-          <a:lstStyle/>
-          <a:p>
-            <a:pPr marL="0" indent="0" algn="ctr">
+          <a:ln/>
+        </p:spPr>
+        <p:txBody>
+          <a:bodyPr wrap="square" lIns="0" tIns="0" rIns="0" bIns="0" rtlCol="0" anchor="ctr"/>
+          <a:lstStyle/>
+          <a:p>
+            <a:pPr algn="ctr" indent="0" marL="0">
               <a:buNone/>
             </a:pPr>
             <a:r>
@@ -8424,9 +8635,9 @@
                 <a:solidFill>
                   <a:srgbClr val="0B1B33"/>
                 </a:solidFill>
-                <a:latin typeface="Segoe UI Semibold" panose="020B0702040204020203" pitchFamily="34" charset="0"/>
-                <a:ea typeface="Segoe UI Semibold" panose="020B0702040204020203" pitchFamily="34" charset="-122"/>
-                <a:cs typeface="Segoe UI Semibold" panose="020B0702040204020203" pitchFamily="34" charset="-120"/>
+                <a:latin typeface="Segoe UI Semibold" pitchFamily="34" charset="0"/>
+                <a:ea typeface="Segoe UI Semibold" pitchFamily="34" charset="-122"/>
+                <a:cs typeface="Segoe UI Semibold" pitchFamily="34" charset="-120"/>
               </a:rPr>
               <a:t>Reports</a:t>
             </a:r>
@@ -8449,12 +8660,13 @@
             <a:avLst/>
           </a:prstGeom>
           <a:noFill/>
-        </p:spPr>
-        <p:txBody>
-          <a:bodyPr wrap="square" lIns="0" tIns="0" rIns="0" bIns="0" rtlCol="0" anchor="ctr"/>
-          <a:lstStyle/>
-          <a:p>
-            <a:pPr marL="0" indent="0" algn="ctr">
+          <a:ln/>
+        </p:spPr>
+        <p:txBody>
+          <a:bodyPr wrap="square" lIns="0" tIns="0" rIns="0" bIns="0" rtlCol="0" anchor="ctr"/>
+          <a:lstStyle/>
+          <a:p>
+            <a:pPr algn="ctr" indent="0" marL="0">
               <a:buNone/>
             </a:pPr>
             <a:r>
@@ -8462,9 +8674,9 @@
                 <a:solidFill>
                   <a:srgbClr val="64748B"/>
                 </a:solidFill>
-                <a:latin typeface="Segoe UI" panose="020B0502040204020203" pitchFamily="34" charset="0"/>
-                <a:ea typeface="Segoe UI" panose="020B0502040204020203" pitchFamily="34" charset="-122"/>
-                <a:cs typeface="Segoe UI" panose="020B0502040204020203" pitchFamily="34" charset="-120"/>
+                <a:latin typeface="Segoe UI" pitchFamily="34" charset="0"/>
+                <a:ea typeface="Segoe UI" pitchFamily="34" charset="-122"/>
+                <a:cs typeface="Segoe UI" pitchFamily="34" charset="-120"/>
               </a:rPr>
               <a:t>stored</a:t>
             </a:r>
@@ -8487,12 +8699,13 @@
             <a:avLst/>
           </a:prstGeom>
           <a:noFill/>
-        </p:spPr>
-        <p:txBody>
-          <a:bodyPr wrap="square" lIns="0" tIns="0" rIns="0" bIns="0" rtlCol="0" anchor="ctr"/>
-          <a:lstStyle/>
-          <a:p>
-            <a:pPr marL="0" indent="0" algn="ctr">
+          <a:ln/>
+        </p:spPr>
+        <p:txBody>
+          <a:bodyPr wrap="square" lIns="0" tIns="0" rIns="0" bIns="0" rtlCol="0" anchor="ctr"/>
+          <a:lstStyle/>
+          <a:p>
+            <a:pPr algn="ctr" indent="0" marL="0">
               <a:buNone/>
             </a:pPr>
             <a:r>
@@ -8500,9 +8713,9 @@
                 <a:solidFill>
                   <a:srgbClr val="0891B2"/>
                 </a:solidFill>
-                <a:latin typeface="Segoe UI Semibold" panose="020B0702040204020203" pitchFamily="34" charset="0"/>
-                <a:ea typeface="Segoe UI Semibold" panose="020B0702040204020203" pitchFamily="34" charset="-122"/>
-                <a:cs typeface="Segoe UI Semibold" panose="020B0702040204020203" pitchFamily="34" charset="-120"/>
+                <a:latin typeface="Segoe UI Semibold" pitchFamily="34" charset="0"/>
+                <a:ea typeface="Segoe UI Semibold" pitchFamily="34" charset="-122"/>
+                <a:cs typeface="Segoe UI Semibold" pitchFamily="34" charset="-120"/>
               </a:rPr>
               <a:t>›</a:t>
             </a:r>
@@ -8552,12 +8765,13 @@
             <a:avLst/>
           </a:prstGeom>
           <a:noFill/>
-        </p:spPr>
-        <p:txBody>
-          <a:bodyPr wrap="square" lIns="0" tIns="0" rIns="0" bIns="0" rtlCol="0" anchor="ctr"/>
-          <a:lstStyle/>
-          <a:p>
-            <a:pPr marL="0" indent="0" algn="ctr">
+          <a:ln/>
+        </p:spPr>
+        <p:txBody>
+          <a:bodyPr wrap="square" lIns="0" tIns="0" rIns="0" bIns="0" rtlCol="0" anchor="ctr"/>
+          <a:lstStyle/>
+          <a:p>
+            <a:pPr algn="ctr" indent="0" marL="0">
               <a:buNone/>
             </a:pPr>
             <a:r>
@@ -8565,9 +8779,9 @@
                 <a:solidFill>
                   <a:srgbClr val="0B1B33"/>
                 </a:solidFill>
-                <a:latin typeface="Segoe UI Semibold" panose="020B0702040204020203" pitchFamily="34" charset="0"/>
-                <a:ea typeface="Segoe UI Semibold" panose="020B0702040204020203" pitchFamily="34" charset="-122"/>
-                <a:cs typeface="Segoe UI Semibold" panose="020B0702040204020203" pitchFamily="34" charset="-120"/>
+                <a:latin typeface="Segoe UI Semibold" pitchFamily="34" charset="0"/>
+                <a:ea typeface="Segoe UI Semibold" pitchFamily="34" charset="-122"/>
+                <a:cs typeface="Segoe UI Semibold" pitchFamily="34" charset="-120"/>
               </a:rPr>
               <a:t>CSV</a:t>
             </a:r>
@@ -8590,12 +8804,13 @@
             <a:avLst/>
           </a:prstGeom>
           <a:noFill/>
-        </p:spPr>
-        <p:txBody>
-          <a:bodyPr wrap="square" lIns="0" tIns="0" rIns="0" bIns="0" rtlCol="0" anchor="ctr"/>
-          <a:lstStyle/>
-          <a:p>
-            <a:pPr marL="0" indent="0" algn="ctr">
+          <a:ln/>
+        </p:spPr>
+        <p:txBody>
+          <a:bodyPr wrap="square" lIns="0" tIns="0" rIns="0" bIns="0" rtlCol="0" anchor="ctr"/>
+          <a:lstStyle/>
+          <a:p>
+            <a:pPr algn="ctr" indent="0" marL="0">
               <a:buNone/>
             </a:pPr>
             <a:r>
@@ -8603,9 +8818,9 @@
                 <a:solidFill>
                   <a:srgbClr val="64748B"/>
                 </a:solidFill>
-                <a:latin typeface="Segoe UI" panose="020B0502040204020203" pitchFamily="34" charset="0"/>
-                <a:ea typeface="Segoe UI" panose="020B0502040204020203" pitchFamily="34" charset="-122"/>
-                <a:cs typeface="Segoe UI" panose="020B0502040204020203" pitchFamily="34" charset="-120"/>
+                <a:latin typeface="Segoe UI" pitchFamily="34" charset="0"/>
+                <a:ea typeface="Segoe UI" pitchFamily="34" charset="-122"/>
+                <a:cs typeface="Segoe UI" pitchFamily="34" charset="-120"/>
               </a:rPr>
               <a:t>export</a:t>
             </a:r>
@@ -8651,12 +8866,13 @@
             <a:avLst/>
           </a:prstGeom>
           <a:noFill/>
-        </p:spPr>
-        <p:txBody>
-          <a:bodyPr wrap="square" lIns="0" tIns="0" rIns="0" bIns="0" rtlCol="0" anchor="ctr"/>
-          <a:lstStyle/>
-          <a:p>
-            <a:pPr marL="0" indent="0">
+          <a:ln/>
+        </p:spPr>
+        <p:txBody>
+          <a:bodyPr wrap="square" lIns="0" tIns="0" rIns="0" bIns="0" rtlCol="0" anchor="ctr"/>
+          <a:lstStyle/>
+          <a:p>
+            <a:pPr indent="0" marL="0">
               <a:buNone/>
             </a:pPr>
             <a:r>
@@ -8664,9 +8880,9 @@
                 <a:solidFill>
                   <a:srgbClr val="0891B2"/>
                 </a:solidFill>
-                <a:latin typeface="Segoe UI Semibold" panose="020B0702040204020203" pitchFamily="34" charset="0"/>
-                <a:ea typeface="Segoe UI Semibold" panose="020B0702040204020203" pitchFamily="34" charset="-122"/>
-                <a:cs typeface="Segoe UI Semibold" panose="020B0702040204020203" pitchFamily="34" charset="-120"/>
+                <a:latin typeface="Segoe UI Semibold" pitchFamily="34" charset="0"/>
+                <a:ea typeface="Segoe UI Semibold" pitchFamily="34" charset="-122"/>
+                <a:cs typeface="Segoe UI Semibold" pitchFamily="34" charset="-120"/>
               </a:rPr>
               <a:t>kWh</a:t>
             </a:r>
@@ -8689,12 +8905,13 @@
             <a:avLst/>
           </a:prstGeom>
           <a:noFill/>
+          <a:ln/>
         </p:spPr>
         <p:txBody>
           <a:bodyPr wrap="square" lIns="0" tIns="0" rIns="0" bIns="0" rtlCol="0" anchor="t"/>
           <a:lstStyle/>
           <a:p>
-            <a:pPr marL="0" indent="0">
+            <a:pPr indent="0" marL="0">
               <a:buNone/>
             </a:pPr>
             <a:r>
@@ -8702,9 +8919,9 @@
                 <a:solidFill>
                   <a:srgbClr val="64748B"/>
                 </a:solidFill>
-                <a:latin typeface="Segoe UI" panose="020B0502040204020203" pitchFamily="34" charset="0"/>
-                <a:ea typeface="Segoe UI" panose="020B0502040204020203" pitchFamily="34" charset="-122"/>
-                <a:cs typeface="Segoe UI" panose="020B0502040204020203" pitchFamily="34" charset="-120"/>
+                <a:latin typeface="Segoe UI" pitchFamily="34" charset="0"/>
+                <a:ea typeface="Segoe UI" pitchFamily="34" charset="-122"/>
+                <a:cs typeface="Segoe UI" pitchFamily="34" charset="-120"/>
               </a:rPr>
               <a:t>integrated from power</a:t>
             </a:r>
@@ -8750,12 +8967,13 @@
             <a:avLst/>
           </a:prstGeom>
           <a:noFill/>
-        </p:spPr>
-        <p:txBody>
-          <a:bodyPr wrap="square" lIns="0" tIns="0" rIns="0" bIns="0" rtlCol="0" anchor="ctr"/>
-          <a:lstStyle/>
-          <a:p>
-            <a:pPr marL="0" indent="0">
+          <a:ln/>
+        </p:spPr>
+        <p:txBody>
+          <a:bodyPr wrap="square" lIns="0" tIns="0" rIns="0" bIns="0" rtlCol="0" anchor="ctr"/>
+          <a:lstStyle/>
+          <a:p>
+            <a:pPr indent="0" marL="0">
               <a:buNone/>
             </a:pPr>
             <a:r>
@@ -8763,9 +8981,9 @@
                 <a:solidFill>
                   <a:srgbClr val="0891B2"/>
                 </a:solidFill>
-                <a:latin typeface="Segoe UI Semibold" panose="020B0702040204020203" pitchFamily="34" charset="0"/>
-                <a:ea typeface="Segoe UI Semibold" panose="020B0702040204020203" pitchFamily="34" charset="-122"/>
-                <a:cs typeface="Segoe UI Semibold" panose="020B0702040204020203" pitchFamily="34" charset="-120"/>
+                <a:latin typeface="Segoe UI Semibold" pitchFamily="34" charset="0"/>
+                <a:ea typeface="Segoe UI Semibold" pitchFamily="34" charset="-122"/>
+                <a:cs typeface="Segoe UI Semibold" pitchFamily="34" charset="-120"/>
               </a:rPr>
               <a:t>6</a:t>
             </a:r>
@@ -8788,12 +9006,13 @@
             <a:avLst/>
           </a:prstGeom>
           <a:noFill/>
+          <a:ln/>
         </p:spPr>
         <p:txBody>
           <a:bodyPr wrap="square" lIns="0" tIns="0" rIns="0" bIns="0" rtlCol="0" anchor="t"/>
           <a:lstStyle/>
           <a:p>
-            <a:pPr marL="0" indent="0">
+            <a:pPr indent="0" marL="0">
               <a:buNone/>
             </a:pPr>
             <a:r>
@@ -8801,9 +9020,9 @@
                 <a:solidFill>
                   <a:srgbClr val="64748B"/>
                 </a:solidFill>
-                <a:latin typeface="Segoe UI" panose="020B0502040204020203" pitchFamily="34" charset="0"/>
-                <a:ea typeface="Segoe UI" panose="020B0502040204020203" pitchFamily="34" charset="-122"/>
-                <a:cs typeface="Segoe UI" panose="020B0502040204020203" pitchFamily="34" charset="-120"/>
+                <a:latin typeface="Segoe UI" pitchFamily="34" charset="0"/>
+                <a:ea typeface="Segoe UI" pitchFamily="34" charset="-122"/>
+                <a:cs typeface="Segoe UI" pitchFamily="34" charset="-120"/>
               </a:rPr>
               <a:t>KPIs with targets</a:t>
             </a:r>
@@ -8849,12 +9068,13 @@
             <a:avLst/>
           </a:prstGeom>
           <a:noFill/>
-        </p:spPr>
-        <p:txBody>
-          <a:bodyPr wrap="square" lIns="0" tIns="0" rIns="0" bIns="0" rtlCol="0" anchor="ctr"/>
-          <a:lstStyle/>
-          <a:p>
-            <a:pPr marL="0" indent="0">
+          <a:ln/>
+        </p:spPr>
+        <p:txBody>
+          <a:bodyPr wrap="square" lIns="0" tIns="0" rIns="0" bIns="0" rtlCol="0" anchor="ctr"/>
+          <a:lstStyle/>
+          <a:p>
+            <a:pPr indent="0" marL="0">
               <a:buNone/>
             </a:pPr>
             <a:r>
@@ -8862,9 +9082,9 @@
                 <a:solidFill>
                   <a:srgbClr val="0891B2"/>
                 </a:solidFill>
-                <a:latin typeface="Segoe UI Semibold" panose="020B0702040204020203" pitchFamily="34" charset="0"/>
-                <a:ea typeface="Segoe UI Semibold" panose="020B0702040204020203" pitchFamily="34" charset="-122"/>
-                <a:cs typeface="Segoe UI Semibold" panose="020B0702040204020203" pitchFamily="34" charset="-120"/>
+                <a:latin typeface="Segoe UI Semibold" pitchFamily="34" charset="0"/>
+                <a:ea typeface="Segoe UI Semibold" pitchFamily="34" charset="-122"/>
+                <a:cs typeface="Segoe UI Semibold" pitchFamily="34" charset="-120"/>
               </a:rPr>
               <a:t>5 + 5</a:t>
             </a:r>
@@ -8887,12 +9107,13 @@
             <a:avLst/>
           </a:prstGeom>
           <a:noFill/>
+          <a:ln/>
         </p:spPr>
         <p:txBody>
           <a:bodyPr wrap="square" lIns="0" tIns="0" rIns="0" bIns="0" rtlCol="0" anchor="t"/>
           <a:lstStyle/>
           <a:p>
-            <a:pPr marL="0" indent="0">
+            <a:pPr indent="0" marL="0">
               <a:buNone/>
             </a:pPr>
             <a:r>
@@ -8900,9 +9121,9 @@
                 <a:solidFill>
                   <a:srgbClr val="64748B"/>
                 </a:solidFill>
-                <a:latin typeface="Segoe UI" panose="020B0502040204020203" pitchFamily="34" charset="0"/>
-                <a:ea typeface="Segoe UI" panose="020B0502040204020203" pitchFamily="34" charset="-122"/>
-                <a:cs typeface="Segoe UI" panose="020B0502040204020203" pitchFamily="34" charset="-120"/>
+                <a:latin typeface="Segoe UI" pitchFamily="34" charset="0"/>
+                <a:ea typeface="Segoe UI" pitchFamily="34" charset="-122"/>
+                <a:cs typeface="Segoe UI" pitchFamily="34" charset="-120"/>
               </a:rPr>
               <a:t>energy and performance reports</a:t>
             </a:r>
@@ -8952,12 +9173,13 @@
             <a:avLst/>
           </a:prstGeom>
           <a:noFill/>
-        </p:spPr>
-        <p:txBody>
-          <a:bodyPr wrap="square" lIns="0" tIns="0" rIns="0" bIns="0" rtlCol="0" anchor="ctr"/>
-          <a:lstStyle/>
-          <a:p>
-            <a:pPr marL="0" indent="0">
+          <a:ln/>
+        </p:spPr>
+        <p:txBody>
+          <a:bodyPr wrap="square" lIns="0" tIns="0" rIns="0" bIns="0" rtlCol="0" anchor="ctr"/>
+          <a:lstStyle/>
+          <a:p>
+            <a:pPr indent="0" marL="0">
               <a:buNone/>
             </a:pPr>
             <a:r>
@@ -8965,20 +9187,23 @@
                 <a:solidFill>
                   <a:srgbClr val="0891B2"/>
                 </a:solidFill>
-                <a:latin typeface="Segoe UI" panose="020B0502040204020203" pitchFamily="34" charset="0"/>
-                <a:ea typeface="Segoe UI" panose="020B0502040204020203" pitchFamily="34" charset="-122"/>
-                <a:cs typeface="Segoe UI" panose="020B0502040204020203" pitchFamily="34" charset="-120"/>
+                <a:latin typeface="Segoe UI" pitchFamily="34" charset="0"/>
+                <a:ea typeface="Segoe UI" pitchFamily="34" charset="-122"/>
+                <a:cs typeface="Segoe UI" pitchFamily="34" charset="-120"/>
               </a:rPr>
               <a:t>LIVE  </a:t>
             </a:r>
+            <a:pPr indent="0" marL="0">
+              <a:buNone/>
+            </a:pPr>
             <a:r>
               <a:rPr lang="en-US" sz="1100" dirty="0">
                 <a:solidFill>
                   <a:srgbClr val="0B1B33"/>
                 </a:solidFill>
-                <a:latin typeface="Segoe UI" panose="020B0502040204020203" pitchFamily="34" charset="0"/>
-                <a:ea typeface="Segoe UI" panose="020B0502040204020203" pitchFamily="34" charset="-122"/>
-                <a:cs typeface="Segoe UI" panose="020B0502040204020203" pitchFamily="34" charset="-120"/>
+                <a:latin typeface="Segoe UI" pitchFamily="34" charset="0"/>
+                <a:ea typeface="Segoe UI" pitchFamily="34" charset="-122"/>
+                <a:cs typeface="Segoe UI" pitchFamily="34" charset="-120"/>
               </a:rPr>
               <a:t>Analytics page</a:t>
             </a:r>
@@ -8996,13 +9221,12 @@
 
 <file path=ppt/slides/slide8.xml><?xml version="1.0" encoding="utf-8"?>
 <p:sld xmlns:a="http://schemas.openxmlformats.org/drawingml/2006/main" xmlns:r="http://schemas.openxmlformats.org/officeDocument/2006/relationships" xmlns:p="http://schemas.openxmlformats.org/presentationml/2006/main">
-  <p:cSld>
+  <p:cSld name="Slide 8">
     <p:bg>
       <p:bgPr>
         <a:solidFill>
           <a:srgbClr val="F6F8FB"/>
         </a:solidFill>
-        <a:effectLst/>
       </p:bgPr>
     </p:bg>
     <p:spTree>
@@ -9059,24 +9283,25 @@
             <a:avLst/>
           </a:prstGeom>
           <a:noFill/>
-        </p:spPr>
-        <p:txBody>
-          <a:bodyPr wrap="square" lIns="0" tIns="0" rIns="0" bIns="0" rtlCol="0" anchor="ctr"/>
-          <a:lstStyle/>
-          <a:p>
-            <a:pPr marL="0" indent="0">
-              <a:buNone/>
-            </a:pPr>
-            <a:r>
-              <a:rPr lang="en-US" sz="1050" kern="0" spc="400" dirty="0">
+          <a:ln/>
+        </p:spPr>
+        <p:txBody>
+          <a:bodyPr wrap="square" lIns="0" tIns="0" rIns="0" bIns="0" rtlCol="0" anchor="ctr"/>
+          <a:lstStyle/>
+          <a:p>
+            <a:pPr indent="0" marL="0">
+              <a:buNone/>
+            </a:pPr>
+            <a:r>
+              <a:rPr lang="en-US" sz="1050" spc="400" kern="0" dirty="0">
                 <a:solidFill>
                   <a:srgbClr val="0891B2"/>
                 </a:solidFill>
-                <a:latin typeface="Segoe UI Semibold" panose="020B0702040204020203" pitchFamily="34" charset="0"/>
-                <a:ea typeface="Segoe UI Semibold" panose="020B0702040204020203" pitchFamily="34" charset="-122"/>
-                <a:cs typeface="Segoe UI Semibold" panose="020B0702040204020203" pitchFamily="34" charset="-120"/>
-              </a:rPr>
-              <a:t>08 · SECURITY</a:t>
+                <a:latin typeface="Segoe UI Semibold" pitchFamily="34" charset="0"/>
+                <a:ea typeface="Segoe UI Semibold" pitchFamily="34" charset="-122"/>
+                <a:cs typeface="Segoe UI Semibold" pitchFamily="34" charset="-120"/>
+              </a:rPr>
+              <a:t>08 · NEMAL · SECURITY</a:t>
             </a:r>
             <a:endParaRPr lang="en-US" sz="1050" dirty="0"/>
           </a:p>
@@ -9097,12 +9322,13 @@
             <a:avLst/>
           </a:prstGeom>
           <a:noFill/>
-        </p:spPr>
-        <p:txBody>
-          <a:bodyPr wrap="square" lIns="0" tIns="0" rIns="0" bIns="0" rtlCol="0" anchor="ctr"/>
-          <a:lstStyle/>
-          <a:p>
-            <a:pPr marL="0" indent="0">
+          <a:ln/>
+        </p:spPr>
+        <p:txBody>
+          <a:bodyPr wrap="square" lIns="0" tIns="0" rIns="0" bIns="0" rtlCol="0" anchor="ctr"/>
+          <a:lstStyle/>
+          <a:p>
+            <a:pPr indent="0" marL="0">
               <a:buNone/>
             </a:pPr>
             <a:r>
@@ -9110,9 +9336,9 @@
                 <a:solidFill>
                   <a:srgbClr val="0B1B33"/>
                 </a:solidFill>
-                <a:latin typeface="Segoe UI Semibold" panose="020B0702040204020203" pitchFamily="34" charset="0"/>
-                <a:ea typeface="Segoe UI Semibold" panose="020B0702040204020203" pitchFamily="34" charset="-122"/>
-                <a:cs typeface="Segoe UI Semibold" panose="020B0702040204020203" pitchFamily="34" charset="-120"/>
+                <a:latin typeface="Segoe UI Semibold" pitchFamily="34" charset="0"/>
+                <a:ea typeface="Segoe UI Semibold" pitchFamily="34" charset="-122"/>
+                <a:cs typeface="Segoe UI Semibold" pitchFamily="34" charset="-120"/>
               </a:rPr>
               <a:t>Five roles, enforced at the gateway</a:t>
             </a:r>
@@ -9158,12 +9384,13 @@
             <a:avLst/>
           </a:prstGeom>
           <a:noFill/>
-        </p:spPr>
-        <p:txBody>
-          <a:bodyPr wrap="square" lIns="0" tIns="0" rIns="0" bIns="0" rtlCol="0" anchor="ctr"/>
-          <a:lstStyle/>
-          <a:p>
-            <a:pPr marL="0" indent="0">
+          <a:ln/>
+        </p:spPr>
+        <p:txBody>
+          <a:bodyPr wrap="square" lIns="0" tIns="0" rIns="0" bIns="0" rtlCol="0" anchor="ctr"/>
+          <a:lstStyle/>
+          <a:p>
+            <a:pPr indent="0" marL="0">
               <a:buNone/>
             </a:pPr>
             <a:r>
@@ -9171,9 +9398,9 @@
                 <a:solidFill>
                   <a:srgbClr val="64748B"/>
                 </a:solidFill>
-                <a:latin typeface="Segoe UI" panose="020B0502040204020203" pitchFamily="34" charset="0"/>
-                <a:ea typeface="Segoe UI" panose="020B0502040204020203" pitchFamily="34" charset="-122"/>
-                <a:cs typeface="Segoe UI" panose="020B0502040204020203" pitchFamily="34" charset="-120"/>
+                <a:latin typeface="Segoe UI" pitchFamily="34" charset="0"/>
+                <a:ea typeface="Segoe UI" pitchFamily="34" charset="-122"/>
+                <a:cs typeface="Segoe UI" pitchFamily="34" charset="-120"/>
               </a:rPr>
               <a:t>EC8208 Software Architecture  ·  University of Ruhuna</a:t>
             </a:r>
@@ -9196,12 +9423,13 @@
             <a:avLst/>
           </a:prstGeom>
           <a:noFill/>
-        </p:spPr>
-        <p:txBody>
-          <a:bodyPr wrap="square" lIns="0" tIns="0" rIns="0" bIns="0" rtlCol="0" anchor="ctr"/>
-          <a:lstStyle/>
-          <a:p>
-            <a:pPr marL="0" indent="0" algn="r">
+          <a:ln/>
+        </p:spPr>
+        <p:txBody>
+          <a:bodyPr wrap="square" lIns="0" tIns="0" rIns="0" bIns="0" rtlCol="0" anchor="ctr"/>
+          <a:lstStyle/>
+          <a:p>
+            <a:pPr algn="r" indent="0" marL="0">
               <a:buNone/>
             </a:pPr>
             <a:r>
@@ -9209,11 +9437,11 @@
                 <a:solidFill>
                   <a:srgbClr val="64748B"/>
                 </a:solidFill>
-                <a:latin typeface="Segoe UI" panose="020B0502040204020203" pitchFamily="34" charset="0"/>
-                <a:ea typeface="Segoe UI" panose="020B0502040204020203" pitchFamily="34" charset="-122"/>
-                <a:cs typeface="Segoe UI" panose="020B0502040204020203" pitchFamily="34" charset="-120"/>
-              </a:rPr>
-              <a:t>08  ·  4:16–4:38</a:t>
+                <a:latin typeface="Segoe UI" pitchFamily="34" charset="0"/>
+                <a:ea typeface="Segoe UI" pitchFamily="34" charset="-122"/>
+                <a:cs typeface="Segoe UI" pitchFamily="34" charset="-120"/>
+              </a:rPr>
+              <a:t>08  ·  8:40–9:23</a:t>
             </a:r>
             <a:endParaRPr lang="en-US" sz="900" dirty="0"/>
           </a:p>
@@ -9261,12 +9489,13 @@
             <a:avLst/>
           </a:prstGeom>
           <a:noFill/>
-        </p:spPr>
-        <p:txBody>
-          <a:bodyPr wrap="square" lIns="0" tIns="0" rIns="0" bIns="0" rtlCol="0" anchor="ctr"/>
-          <a:lstStyle/>
-          <a:p>
-            <a:pPr marL="0" indent="0">
+          <a:ln/>
+        </p:spPr>
+        <p:txBody>
+          <a:bodyPr wrap="square" lIns="0" tIns="0" rIns="0" bIns="0" rtlCol="0" anchor="ctr"/>
+          <a:lstStyle/>
+          <a:p>
+            <a:pPr indent="0" marL="0">
               <a:buNone/>
             </a:pPr>
             <a:r>
@@ -9274,9 +9503,9 @@
                 <a:solidFill>
                   <a:srgbClr val="0891B2"/>
                 </a:solidFill>
-                <a:latin typeface="Segoe UI Semibold" panose="020B0702040204020203" pitchFamily="34" charset="0"/>
-                <a:ea typeface="Segoe UI Semibold" panose="020B0702040204020203" pitchFamily="34" charset="-122"/>
-                <a:cs typeface="Segoe UI Semibold" panose="020B0702040204020203" pitchFamily="34" charset="-120"/>
+                <a:latin typeface="Segoe UI Semibold" pitchFamily="34" charset="0"/>
+                <a:ea typeface="Segoe UI Semibold" pitchFamily="34" charset="-122"/>
+                <a:cs typeface="Segoe UI Semibold" pitchFamily="34" charset="-120"/>
               </a:rPr>
               <a:t>Administrator</a:t>
             </a:r>
@@ -9299,12 +9528,13 @@
             <a:avLst/>
           </a:prstGeom>
           <a:noFill/>
-        </p:spPr>
-        <p:txBody>
-          <a:bodyPr wrap="square" lIns="0" tIns="0" rIns="0" bIns="0" rtlCol="0" anchor="ctr"/>
-          <a:lstStyle/>
-          <a:p>
-            <a:pPr marL="0" indent="0">
+          <a:ln/>
+        </p:spPr>
+        <p:txBody>
+          <a:bodyPr wrap="square" lIns="0" tIns="0" rIns="0" bIns="0" rtlCol="0" anchor="ctr"/>
+          <a:lstStyle/>
+          <a:p>
+            <a:pPr indent="0" marL="0">
               <a:buNone/>
             </a:pPr>
             <a:r>
@@ -9312,9 +9542,9 @@
                 <a:solidFill>
                   <a:srgbClr val="0B1B33"/>
                 </a:solidFill>
-                <a:latin typeface="Segoe UI" panose="020B0502040204020203" pitchFamily="34" charset="0"/>
-                <a:ea typeface="Segoe UI" panose="020B0502040204020203" pitchFamily="34" charset="-122"/>
-                <a:cs typeface="Segoe UI" panose="020B0502040204020203" pitchFamily="34" charset="-120"/>
+                <a:latin typeface="Segoe UI" pitchFamily="34" charset="0"/>
+                <a:ea typeface="Segoe UI" pitchFamily="34" charset="-122"/>
+                <a:cs typeface="Segoe UI" pitchFamily="34" charset="-120"/>
               </a:rPr>
               <a:t>Everything, users and audit log</a:t>
             </a:r>
@@ -9364,12 +9594,13 @@
             <a:avLst/>
           </a:prstGeom>
           <a:noFill/>
-        </p:spPr>
-        <p:txBody>
-          <a:bodyPr wrap="square" lIns="0" tIns="0" rIns="0" bIns="0" rtlCol="0" anchor="ctr"/>
-          <a:lstStyle/>
-          <a:p>
-            <a:pPr marL="0" indent="0">
+          <a:ln/>
+        </p:spPr>
+        <p:txBody>
+          <a:bodyPr wrap="square" lIns="0" tIns="0" rIns="0" bIns="0" rtlCol="0" anchor="ctr"/>
+          <a:lstStyle/>
+          <a:p>
+            <a:pPr indent="0" marL="0">
               <a:buNone/>
             </a:pPr>
             <a:r>
@@ -9377,9 +9608,9 @@
                 <a:solidFill>
                   <a:srgbClr val="0891B2"/>
                 </a:solidFill>
-                <a:latin typeface="Segoe UI Semibold" panose="020B0702040204020203" pitchFamily="34" charset="0"/>
-                <a:ea typeface="Segoe UI Semibold" panose="020B0702040204020203" pitchFamily="34" charset="-122"/>
-                <a:cs typeface="Segoe UI Semibold" panose="020B0702040204020203" pitchFamily="34" charset="-120"/>
+                <a:latin typeface="Segoe UI Semibold" pitchFamily="34" charset="0"/>
+                <a:ea typeface="Segoe UI Semibold" pitchFamily="34" charset="-122"/>
+                <a:cs typeface="Segoe UI Semibold" pitchFamily="34" charset="-120"/>
               </a:rPr>
               <a:t>Operations Manager</a:t>
             </a:r>
@@ -9402,12 +9633,13 @@
             <a:avLst/>
           </a:prstGeom>
           <a:noFill/>
-        </p:spPr>
-        <p:txBody>
-          <a:bodyPr wrap="square" lIns="0" tIns="0" rIns="0" bIns="0" rtlCol="0" anchor="ctr"/>
-          <a:lstStyle/>
-          <a:p>
-            <a:pPr marL="0" indent="0">
+          <a:ln/>
+        </p:spPr>
+        <p:txBody>
+          <a:bodyPr wrap="square" lIns="0" tIns="0" rIns="0" bIns="0" rtlCol="0" anchor="ctr"/>
+          <a:lstStyle/>
+          <a:p>
+            <a:pPr indent="0" marL="0">
               <a:buNone/>
             </a:pPr>
             <a:r>
@@ -9415,9 +9647,9 @@
                 <a:solidFill>
                   <a:srgbClr val="0B1B33"/>
                 </a:solidFill>
-                <a:latin typeface="Segoe UI" panose="020B0502040204020203" pitchFamily="34" charset="0"/>
-                <a:ea typeface="Segoe UI" panose="020B0502040204020203" pitchFamily="34" charset="-122"/>
-                <a:cs typeface="Segoe UI" panose="020B0502040204020203" pitchFamily="34" charset="-120"/>
+                <a:latin typeface="Segoe UI" pitchFamily="34" charset="0"/>
+                <a:ea typeface="Segoe UI" pitchFamily="34" charset="-122"/>
+                <a:cs typeface="Segoe UI" pitchFamily="34" charset="-120"/>
               </a:rPr>
               <a:t>Assets, rules, work orders, reports</a:t>
             </a:r>
@@ -9467,12 +9699,13 @@
             <a:avLst/>
           </a:prstGeom>
           <a:noFill/>
-        </p:spPr>
-        <p:txBody>
-          <a:bodyPr wrap="square" lIns="0" tIns="0" rIns="0" bIns="0" rtlCol="0" anchor="ctr"/>
-          <a:lstStyle/>
-          <a:p>
-            <a:pPr marL="0" indent="0">
+          <a:ln/>
+        </p:spPr>
+        <p:txBody>
+          <a:bodyPr wrap="square" lIns="0" tIns="0" rIns="0" bIns="0" rtlCol="0" anchor="ctr"/>
+          <a:lstStyle/>
+          <a:p>
+            <a:pPr indent="0" marL="0">
               <a:buNone/>
             </a:pPr>
             <a:r>
@@ -9480,9 +9713,9 @@
                 <a:solidFill>
                   <a:srgbClr val="0891B2"/>
                 </a:solidFill>
-                <a:latin typeface="Segoe UI Semibold" panose="020B0702040204020203" pitchFamily="34" charset="0"/>
-                <a:ea typeface="Segoe UI Semibold" panose="020B0702040204020203" pitchFamily="34" charset="-122"/>
-                <a:cs typeface="Segoe UI Semibold" panose="020B0702040204020203" pitchFamily="34" charset="-120"/>
+                <a:latin typeface="Segoe UI Semibold" pitchFamily="34" charset="0"/>
+                <a:ea typeface="Segoe UI Semibold" pitchFamily="34" charset="-122"/>
+                <a:cs typeface="Segoe UI Semibold" pitchFamily="34" charset="-120"/>
               </a:rPr>
               <a:t>Plant Operator</a:t>
             </a:r>
@@ -9505,12 +9738,13 @@
             <a:avLst/>
           </a:prstGeom>
           <a:noFill/>
-        </p:spPr>
-        <p:txBody>
-          <a:bodyPr wrap="square" lIns="0" tIns="0" rIns="0" bIns="0" rtlCol="0" anchor="ctr"/>
-          <a:lstStyle/>
-          <a:p>
-            <a:pPr marL="0" indent="0">
+          <a:ln/>
+        </p:spPr>
+        <p:txBody>
+          <a:bodyPr wrap="square" lIns="0" tIns="0" rIns="0" bIns="0" rtlCol="0" anchor="ctr"/>
+          <a:lstStyle/>
+          <a:p>
+            <a:pPr indent="0" marL="0">
               <a:buNone/>
             </a:pPr>
             <a:r>
@@ -9518,9 +9752,9 @@
                 <a:solidFill>
                   <a:srgbClr val="0B1B33"/>
                 </a:solidFill>
-                <a:latin typeface="Segoe UI" panose="020B0502040204020203" pitchFamily="34" charset="0"/>
-                <a:ea typeface="Segoe UI" panose="020B0502040204020203" pitchFamily="34" charset="-122"/>
-                <a:cs typeface="Segoe UI" panose="020B0502040204020203" pitchFamily="34" charset="-120"/>
+                <a:latin typeface="Segoe UI" pitchFamily="34" charset="0"/>
+                <a:ea typeface="Segoe UI" pitchFamily="34" charset="-122"/>
+                <a:cs typeface="Segoe UI" pitchFamily="34" charset="-120"/>
               </a:rPr>
               <a:t>Monitor and handle alerts</a:t>
             </a:r>
@@ -9570,12 +9804,13 @@
             <a:avLst/>
           </a:prstGeom>
           <a:noFill/>
-        </p:spPr>
-        <p:txBody>
-          <a:bodyPr wrap="square" lIns="0" tIns="0" rIns="0" bIns="0" rtlCol="0" anchor="ctr"/>
-          <a:lstStyle/>
-          <a:p>
-            <a:pPr marL="0" indent="0">
+          <a:ln/>
+        </p:spPr>
+        <p:txBody>
+          <a:bodyPr wrap="square" lIns="0" tIns="0" rIns="0" bIns="0" rtlCol="0" anchor="ctr"/>
+          <a:lstStyle/>
+          <a:p>
+            <a:pPr indent="0" marL="0">
               <a:buNone/>
             </a:pPr>
             <a:r>
@@ -9583,9 +9818,9 @@
                 <a:solidFill>
                   <a:srgbClr val="0891B2"/>
                 </a:solidFill>
-                <a:latin typeface="Segoe UI Semibold" panose="020B0702040204020203" pitchFamily="34" charset="0"/>
-                <a:ea typeface="Segoe UI Semibold" panose="020B0702040204020203" pitchFamily="34" charset="-122"/>
-                <a:cs typeface="Segoe UI Semibold" panose="020B0702040204020203" pitchFamily="34" charset="-120"/>
+                <a:latin typeface="Segoe UI Semibold" pitchFamily="34" charset="0"/>
+                <a:ea typeface="Segoe UI Semibold" pitchFamily="34" charset="-122"/>
+                <a:cs typeface="Segoe UI Semibold" pitchFamily="34" charset="-120"/>
               </a:rPr>
               <a:t>Maintenance Engineer</a:t>
             </a:r>
@@ -9608,12 +9843,13 @@
             <a:avLst/>
           </a:prstGeom>
           <a:noFill/>
-        </p:spPr>
-        <p:txBody>
-          <a:bodyPr wrap="square" lIns="0" tIns="0" rIns="0" bIns="0" rtlCol="0" anchor="ctr"/>
-          <a:lstStyle/>
-          <a:p>
-            <a:pPr marL="0" indent="0">
+          <a:ln/>
+        </p:spPr>
+        <p:txBody>
+          <a:bodyPr wrap="square" lIns="0" tIns="0" rIns="0" bIns="0" rtlCol="0" anchor="ctr"/>
+          <a:lstStyle/>
+          <a:p>
+            <a:pPr indent="0" marL="0">
               <a:buNone/>
             </a:pPr>
             <a:r>
@@ -9621,9 +9857,9 @@
                 <a:solidFill>
                   <a:srgbClr val="0B1B33"/>
                 </a:solidFill>
-                <a:latin typeface="Segoe UI" panose="020B0502040204020203" pitchFamily="34" charset="0"/>
-                <a:ea typeface="Segoe UI" panose="020B0502040204020203" pitchFamily="34" charset="-122"/>
-                <a:cs typeface="Segoe UI" panose="020B0502040204020203" pitchFamily="34" charset="-120"/>
+                <a:latin typeface="Segoe UI" pitchFamily="34" charset="0"/>
+                <a:ea typeface="Segoe UI" pitchFamily="34" charset="-122"/>
+                <a:cs typeface="Segoe UI" pitchFamily="34" charset="-120"/>
               </a:rPr>
               <a:t>Assign and complete work orders</a:t>
             </a:r>
@@ -9673,12 +9909,13 @@
             <a:avLst/>
           </a:prstGeom>
           <a:noFill/>
-        </p:spPr>
-        <p:txBody>
-          <a:bodyPr wrap="square" lIns="0" tIns="0" rIns="0" bIns="0" rtlCol="0" anchor="ctr"/>
-          <a:lstStyle/>
-          <a:p>
-            <a:pPr marL="0" indent="0">
+          <a:ln/>
+        </p:spPr>
+        <p:txBody>
+          <a:bodyPr wrap="square" lIns="0" tIns="0" rIns="0" bIns="0" rtlCol="0" anchor="ctr"/>
+          <a:lstStyle/>
+          <a:p>
+            <a:pPr indent="0" marL="0">
               <a:buNone/>
             </a:pPr>
             <a:r>
@@ -9686,9 +9923,9 @@
                 <a:solidFill>
                   <a:srgbClr val="0891B2"/>
                 </a:solidFill>
-                <a:latin typeface="Segoe UI Semibold" panose="020B0702040204020203" pitchFamily="34" charset="0"/>
-                <a:ea typeface="Segoe UI Semibold" panose="020B0702040204020203" pitchFamily="34" charset="-122"/>
-                <a:cs typeface="Segoe UI Semibold" panose="020B0702040204020203" pitchFamily="34" charset="-120"/>
+                <a:latin typeface="Segoe UI Semibold" pitchFamily="34" charset="0"/>
+                <a:ea typeface="Segoe UI Semibold" pitchFamily="34" charset="-122"/>
+                <a:cs typeface="Segoe UI Semibold" pitchFamily="34" charset="-120"/>
               </a:rPr>
               <a:t>Executive</a:t>
             </a:r>
@@ -9711,12 +9948,13 @@
             <a:avLst/>
           </a:prstGeom>
           <a:noFill/>
-        </p:spPr>
-        <p:txBody>
-          <a:bodyPr wrap="square" lIns="0" tIns="0" rIns="0" bIns="0" rtlCol="0" anchor="ctr"/>
-          <a:lstStyle/>
-          <a:p>
-            <a:pPr marL="0" indent="0">
+          <a:ln/>
+        </p:spPr>
+        <p:txBody>
+          <a:bodyPr wrap="square" lIns="0" tIns="0" rIns="0" bIns="0" rtlCol="0" anchor="ctr"/>
+          <a:lstStyle/>
+          <a:p>
+            <a:pPr indent="0" marL="0">
               <a:buNone/>
             </a:pPr>
             <a:r>
@@ -9724,9 +9962,9 @@
                 <a:solidFill>
                   <a:srgbClr val="0B1B33"/>
                 </a:solidFill>
-                <a:latin typeface="Segoe UI" panose="020B0502040204020203" pitchFamily="34" charset="0"/>
-                <a:ea typeface="Segoe UI" panose="020B0502040204020203" pitchFamily="34" charset="-122"/>
-                <a:cs typeface="Segoe UI" panose="020B0502040204020203" pitchFamily="34" charset="-120"/>
+                <a:latin typeface="Segoe UI" pitchFamily="34" charset="0"/>
+                <a:ea typeface="Segoe UI" pitchFamily="34" charset="-122"/>
+                <a:cs typeface="Segoe UI" pitchFamily="34" charset="-120"/>
               </a:rPr>
               <a:t>Read-only dashboards and reports</a:t>
             </a:r>
@@ -9776,12 +10014,13 @@
             <a:avLst/>
           </a:prstGeom>
           <a:noFill/>
-        </p:spPr>
-        <p:txBody>
-          <a:bodyPr wrap="square" lIns="0" tIns="0" rIns="0" bIns="0" rtlCol="0" anchor="ctr"/>
-          <a:lstStyle/>
-          <a:p>
-            <a:pPr marL="0" indent="0">
+          <a:ln/>
+        </p:spPr>
+        <p:txBody>
+          <a:bodyPr wrap="square" lIns="0" tIns="0" rIns="0" bIns="0" rtlCol="0" anchor="ctr"/>
+          <a:lstStyle/>
+          <a:p>
+            <a:pPr indent="0" marL="0">
               <a:buNone/>
             </a:pPr>
             <a:r>
@@ -9789,20 +10028,23 @@
                 <a:solidFill>
                   <a:srgbClr val="0891B2"/>
                 </a:solidFill>
-                <a:latin typeface="Segoe UI" panose="020B0502040204020203" pitchFamily="34" charset="0"/>
-                <a:ea typeface="Segoe UI" panose="020B0502040204020203" pitchFamily="34" charset="-122"/>
-                <a:cs typeface="Segoe UI" panose="020B0502040204020203" pitchFamily="34" charset="-120"/>
+                <a:latin typeface="Segoe UI" pitchFamily="34" charset="0"/>
+                <a:ea typeface="Segoe UI" pitchFamily="34" charset="-122"/>
+                <a:cs typeface="Segoe UI" pitchFamily="34" charset="-120"/>
               </a:rPr>
               <a:t>LIVE  </a:t>
             </a:r>
+            <a:pPr indent="0" marL="0">
+              <a:buNone/>
+            </a:pPr>
             <a:r>
               <a:rPr lang="en-US" sz="1100" dirty="0">
                 <a:solidFill>
                   <a:srgbClr val="0B1B33"/>
                 </a:solidFill>
-                <a:latin typeface="Segoe UI" panose="020B0502040204020203" pitchFamily="34" charset="0"/>
-                <a:ea typeface="Segoe UI" panose="020B0502040204020203" pitchFamily="34" charset="-122"/>
-                <a:cs typeface="Segoe UI" panose="020B0502040204020203" pitchFamily="34" charset="-120"/>
+                <a:latin typeface="Segoe UI" pitchFamily="34" charset="0"/>
+                <a:ea typeface="Segoe UI" pitchFamily="34" charset="-122"/>
+                <a:cs typeface="Segoe UI" pitchFamily="34" charset="-120"/>
               </a:rPr>
               <a:t>executive sign-in, read-only</a:t>
             </a:r>
@@ -9820,13 +10062,12 @@
 
 <file path=ppt/slides/slide9.xml><?xml version="1.0" encoding="utf-8"?>
 <p:sld xmlns:a="http://schemas.openxmlformats.org/drawingml/2006/main" xmlns:r="http://schemas.openxmlformats.org/officeDocument/2006/relationships" xmlns:p="http://schemas.openxmlformats.org/presentationml/2006/main">
-  <p:cSld>
+  <p:cSld name="Slide 9">
     <p:bg>
       <p:bgPr>
         <a:solidFill>
           <a:srgbClr val="F6F8FB"/>
         </a:solidFill>
-        <a:effectLst/>
       </p:bgPr>
     </p:bg>
     <p:spTree>
@@ -9883,24 +10124,25 @@
             <a:avLst/>
           </a:prstGeom>
           <a:noFill/>
-        </p:spPr>
-        <p:txBody>
-          <a:bodyPr wrap="square" lIns="0" tIns="0" rIns="0" bIns="0" rtlCol="0" anchor="ctr"/>
-          <a:lstStyle/>
-          <a:p>
-            <a:pPr marL="0" indent="0">
-              <a:buNone/>
-            </a:pPr>
-            <a:r>
-              <a:rPr lang="en-US" sz="1050" kern="0" spc="400" dirty="0">
+          <a:ln/>
+        </p:spPr>
+        <p:txBody>
+          <a:bodyPr wrap="square" lIns="0" tIns="0" rIns="0" bIns="0" rtlCol="0" anchor="ctr"/>
+          <a:lstStyle/>
+          <a:p>
+            <a:pPr indent="0" marL="0">
+              <a:buNone/>
+            </a:pPr>
+            <a:r>
+              <a:rPr lang="en-US" sz="1050" spc="400" kern="0" dirty="0">
                 <a:solidFill>
                   <a:srgbClr val="0891B2"/>
                 </a:solidFill>
-                <a:latin typeface="Segoe UI Semibold" panose="020B0702040204020203" pitchFamily="34" charset="0"/>
-                <a:ea typeface="Segoe UI Semibold" panose="020B0702040204020203" pitchFamily="34" charset="-122"/>
-                <a:cs typeface="Segoe UI Semibold" panose="020B0702040204020203" pitchFamily="34" charset="-120"/>
-              </a:rPr>
-              <a:t>09 · OPERATIONS AND QUALITY</a:t>
+                <a:latin typeface="Segoe UI Semibold" pitchFamily="34" charset="0"/>
+                <a:ea typeface="Segoe UI Semibold" pitchFamily="34" charset="-122"/>
+                <a:cs typeface="Segoe UI Semibold" pitchFamily="34" charset="-120"/>
+              </a:rPr>
+              <a:t>09 · CHARITH · OPERATIONS AND QUALITY</a:t>
             </a:r>
             <a:endParaRPr lang="en-US" sz="1050" dirty="0"/>
           </a:p>
@@ -9921,12 +10163,13 @@
             <a:avLst/>
           </a:prstGeom>
           <a:noFill/>
-        </p:spPr>
-        <p:txBody>
-          <a:bodyPr wrap="square" lIns="0" tIns="0" rIns="0" bIns="0" rtlCol="0" anchor="ctr"/>
-          <a:lstStyle/>
-          <a:p>
-            <a:pPr marL="0" indent="0">
+          <a:ln/>
+        </p:spPr>
+        <p:txBody>
+          <a:bodyPr wrap="square" lIns="0" tIns="0" rIns="0" bIns="0" rtlCol="0" anchor="ctr"/>
+          <a:lstStyle/>
+          <a:p>
+            <a:pPr indent="0" marL="0">
               <a:buNone/>
             </a:pPr>
             <a:r>
@@ -9934,9 +10177,9 @@
                 <a:solidFill>
                   <a:srgbClr val="0B1B33"/>
                 </a:solidFill>
-                <a:latin typeface="Segoe UI Semibold" panose="020B0702040204020203" pitchFamily="34" charset="0"/>
-                <a:ea typeface="Segoe UI Semibold" panose="020B0702040204020203" pitchFamily="34" charset="-122"/>
-                <a:cs typeface="Segoe UI Semibold" panose="020B0702040204020203" pitchFamily="34" charset="-120"/>
+                <a:latin typeface="Segoe UI Semibold" pitchFamily="34" charset="0"/>
+                <a:ea typeface="Segoe UI Semibold" pitchFamily="34" charset="-122"/>
+                <a:cs typeface="Segoe UI Semibold" pitchFamily="34" charset="-120"/>
               </a:rPr>
               <a:t>Observable, tested, one command to run</a:t>
             </a:r>
@@ -9982,12 +10225,13 @@
             <a:avLst/>
           </a:prstGeom>
           <a:noFill/>
-        </p:spPr>
-        <p:txBody>
-          <a:bodyPr wrap="square" lIns="0" tIns="0" rIns="0" bIns="0" rtlCol="0" anchor="ctr"/>
-          <a:lstStyle/>
-          <a:p>
-            <a:pPr marL="0" indent="0">
+          <a:ln/>
+        </p:spPr>
+        <p:txBody>
+          <a:bodyPr wrap="square" lIns="0" tIns="0" rIns="0" bIns="0" rtlCol="0" anchor="ctr"/>
+          <a:lstStyle/>
+          <a:p>
+            <a:pPr indent="0" marL="0">
               <a:buNone/>
             </a:pPr>
             <a:r>
@@ -9995,9 +10239,9 @@
                 <a:solidFill>
                   <a:srgbClr val="64748B"/>
                 </a:solidFill>
-                <a:latin typeface="Segoe UI" panose="020B0502040204020203" pitchFamily="34" charset="0"/>
-                <a:ea typeface="Segoe UI" panose="020B0502040204020203" pitchFamily="34" charset="-122"/>
-                <a:cs typeface="Segoe UI" panose="020B0502040204020203" pitchFamily="34" charset="-120"/>
+                <a:latin typeface="Segoe UI" pitchFamily="34" charset="0"/>
+                <a:ea typeface="Segoe UI" pitchFamily="34" charset="-122"/>
+                <a:cs typeface="Segoe UI" pitchFamily="34" charset="-120"/>
               </a:rPr>
               <a:t>EC8208 Software Architecture  ·  University of Ruhuna</a:t>
             </a:r>
@@ -10020,12 +10264,13 @@
             <a:avLst/>
           </a:prstGeom>
           <a:noFill/>
-        </p:spPr>
-        <p:txBody>
-          <a:bodyPr wrap="square" lIns="0" tIns="0" rIns="0" bIns="0" rtlCol="0" anchor="ctr"/>
-          <a:lstStyle/>
-          <a:p>
-            <a:pPr marL="0" indent="0" algn="r">
+          <a:ln/>
+        </p:spPr>
+        <p:txBody>
+          <a:bodyPr wrap="square" lIns="0" tIns="0" rIns="0" bIns="0" rtlCol="0" anchor="ctr"/>
+          <a:lstStyle/>
+          <a:p>
+            <a:pPr algn="r" indent="0" marL="0">
               <a:buNone/>
             </a:pPr>
             <a:r>
@@ -10033,11 +10278,11 @@
                 <a:solidFill>
                   <a:srgbClr val="64748B"/>
                 </a:solidFill>
-                <a:latin typeface="Segoe UI" panose="020B0502040204020203" pitchFamily="34" charset="0"/>
-                <a:ea typeface="Segoe UI" panose="020B0502040204020203" pitchFamily="34" charset="-122"/>
-                <a:cs typeface="Segoe UI" panose="020B0502040204020203" pitchFamily="34" charset="-120"/>
-              </a:rPr>
-              <a:t>09  ·  4:38–4:54</a:t>
+                <a:latin typeface="Segoe UI" pitchFamily="34" charset="0"/>
+                <a:ea typeface="Segoe UI" pitchFamily="34" charset="-122"/>
+                <a:cs typeface="Segoe UI" pitchFamily="34" charset="-120"/>
+              </a:rPr>
+              <a:t>09  ·  9:23–9:48</a:t>
             </a:r>
             <a:endParaRPr lang="en-US" sz="900" dirty="0"/>
           </a:p>
@@ -10081,12 +10326,13 @@
             <a:avLst/>
           </a:prstGeom>
           <a:noFill/>
-        </p:spPr>
-        <p:txBody>
-          <a:bodyPr wrap="square" lIns="0" tIns="0" rIns="0" bIns="0" rtlCol="0" anchor="ctr"/>
-          <a:lstStyle/>
-          <a:p>
-            <a:pPr marL="0" indent="0">
+          <a:ln/>
+        </p:spPr>
+        <p:txBody>
+          <a:bodyPr wrap="square" lIns="0" tIns="0" rIns="0" bIns="0" rtlCol="0" anchor="ctr"/>
+          <a:lstStyle/>
+          <a:p>
+            <a:pPr indent="0" marL="0">
               <a:buNone/>
             </a:pPr>
             <a:r>
@@ -10094,9 +10340,9 @@
                 <a:solidFill>
                   <a:srgbClr val="0891B2"/>
                 </a:solidFill>
-                <a:latin typeface="Segoe UI Semibold" panose="020B0702040204020203" pitchFamily="34" charset="0"/>
-                <a:ea typeface="Segoe UI Semibold" panose="020B0702040204020203" pitchFamily="34" charset="-122"/>
-                <a:cs typeface="Segoe UI Semibold" panose="020B0702040204020203" pitchFamily="34" charset="-120"/>
+                <a:latin typeface="Segoe UI Semibold" pitchFamily="34" charset="0"/>
+                <a:ea typeface="Segoe UI Semibold" pitchFamily="34" charset="-122"/>
+                <a:cs typeface="Segoe UI Semibold" pitchFamily="34" charset="-120"/>
               </a:rPr>
               <a:t>60</a:t>
             </a:r>
@@ -10119,12 +10365,13 @@
             <a:avLst/>
           </a:prstGeom>
           <a:noFill/>
-        </p:spPr>
-        <p:txBody>
-          <a:bodyPr wrap="square" lIns="0" tIns="0" rIns="0" bIns="0" rtlCol="0" anchor="ctr"/>
-          <a:lstStyle/>
-          <a:p>
-            <a:pPr marL="0" indent="0">
+          <a:ln/>
+        </p:spPr>
+        <p:txBody>
+          <a:bodyPr wrap="square" lIns="0" tIns="0" rIns="0" bIns="0" rtlCol="0" anchor="ctr"/>
+          <a:lstStyle/>
+          <a:p>
+            <a:pPr indent="0" marL="0">
               <a:buNone/>
             </a:pPr>
             <a:r>
@@ -10132,9 +10379,9 @@
                 <a:solidFill>
                   <a:srgbClr val="64748B"/>
                 </a:solidFill>
-                <a:latin typeface="Segoe UI" panose="020B0502040204020203" pitchFamily="34" charset="0"/>
-                <a:ea typeface="Segoe UI" panose="020B0502040204020203" pitchFamily="34" charset="-122"/>
-                <a:cs typeface="Segoe UI" panose="020B0502040204020203" pitchFamily="34" charset="-120"/>
+                <a:latin typeface="Segoe UI" pitchFamily="34" charset="0"/>
+                <a:ea typeface="Segoe UI" pitchFamily="34" charset="-122"/>
+                <a:cs typeface="Segoe UI" pitchFamily="34" charset="-120"/>
               </a:rPr>
               <a:t>test methods</a:t>
             </a:r>
@@ -10180,12 +10427,13 @@
             <a:avLst/>
           </a:prstGeom>
           <a:noFill/>
-        </p:spPr>
-        <p:txBody>
-          <a:bodyPr wrap="square" lIns="0" tIns="0" rIns="0" bIns="0" rtlCol="0" anchor="ctr"/>
-          <a:lstStyle/>
-          <a:p>
-            <a:pPr marL="0" indent="0">
+          <a:ln/>
+        </p:spPr>
+        <p:txBody>
+          <a:bodyPr wrap="square" lIns="0" tIns="0" rIns="0" bIns="0" rtlCol="0" anchor="ctr"/>
+          <a:lstStyle/>
+          <a:p>
+            <a:pPr indent="0" marL="0">
               <a:buNone/>
             </a:pPr>
             <a:r>
@@ -10193,9 +10441,9 @@
                 <a:solidFill>
                   <a:srgbClr val="0891B2"/>
                 </a:solidFill>
-                <a:latin typeface="Segoe UI Semibold" panose="020B0702040204020203" pitchFamily="34" charset="0"/>
-                <a:ea typeface="Segoe UI Semibold" panose="020B0702040204020203" pitchFamily="34" charset="-122"/>
-                <a:cs typeface="Segoe UI Semibold" panose="020B0702040204020203" pitchFamily="34" charset="-120"/>
+                <a:latin typeface="Segoe UI Semibold" pitchFamily="34" charset="0"/>
+                <a:ea typeface="Segoe UI Semibold" pitchFamily="34" charset="-122"/>
+                <a:cs typeface="Segoe UI Semibold" pitchFamily="34" charset="-120"/>
               </a:rPr>
               <a:t>7</a:t>
             </a:r>
@@ -10218,12 +10466,13 @@
             <a:avLst/>
           </a:prstGeom>
           <a:noFill/>
-        </p:spPr>
-        <p:txBody>
-          <a:bodyPr wrap="square" lIns="0" tIns="0" rIns="0" bIns="0" rtlCol="0" anchor="ctr"/>
-          <a:lstStyle/>
-          <a:p>
-            <a:pPr marL="0" indent="0">
+          <a:ln/>
+        </p:spPr>
+        <p:txBody>
+          <a:bodyPr wrap="square" lIns="0" tIns="0" rIns="0" bIns="0" rtlCol="0" anchor="ctr"/>
+          <a:lstStyle/>
+          <a:p>
+            <a:pPr indent="0" marL="0">
               <a:buNone/>
             </a:pPr>
             <a:r>
@@ -10231,9 +10480,9 @@
                 <a:solidFill>
                   <a:srgbClr val="64748B"/>
                 </a:solidFill>
-                <a:latin typeface="Segoe UI" panose="020B0502040204020203" pitchFamily="34" charset="0"/>
-                <a:ea typeface="Segoe UI" panose="020B0502040204020203" pitchFamily="34" charset="-122"/>
-                <a:cs typeface="Segoe UI" panose="020B0502040204020203" pitchFamily="34" charset="-120"/>
+                <a:latin typeface="Segoe UI" pitchFamily="34" charset="0"/>
+                <a:ea typeface="Segoe UI" pitchFamily="34" charset="-122"/>
+                <a:cs typeface="Segoe UI" pitchFamily="34" charset="-120"/>
               </a:rPr>
               <a:t>services monitored</a:t>
             </a:r>
@@ -10279,12 +10528,13 @@
             <a:avLst/>
           </a:prstGeom>
           <a:noFill/>
-        </p:spPr>
-        <p:txBody>
-          <a:bodyPr wrap="square" lIns="0" tIns="0" rIns="0" bIns="0" rtlCol="0" anchor="ctr"/>
-          <a:lstStyle/>
-          <a:p>
-            <a:pPr marL="0" indent="0">
+          <a:ln/>
+        </p:spPr>
+        <p:txBody>
+          <a:bodyPr wrap="square" lIns="0" tIns="0" rIns="0" bIns="0" rtlCol="0" anchor="ctr"/>
+          <a:lstStyle/>
+          <a:p>
+            <a:pPr indent="0" marL="0">
               <a:buNone/>
             </a:pPr>
             <a:r>
@@ -10292,9 +10542,9 @@
                 <a:solidFill>
                   <a:srgbClr val="0891B2"/>
                 </a:solidFill>
-                <a:latin typeface="Segoe UI Semibold" panose="020B0702040204020203" pitchFamily="34" charset="0"/>
-                <a:ea typeface="Segoe UI Semibold" panose="020B0702040204020203" pitchFamily="34" charset="-122"/>
-                <a:cs typeface="Segoe UI Semibold" panose="020B0702040204020203" pitchFamily="34" charset="-120"/>
+                <a:latin typeface="Segoe UI Semibold" pitchFamily="34" charset="0"/>
+                <a:ea typeface="Segoe UI Semibold" pitchFamily="34" charset="-122"/>
+                <a:cs typeface="Segoe UI Semibold" pitchFamily="34" charset="-120"/>
               </a:rPr>
               <a:t>19</a:t>
             </a:r>
@@ -10317,12 +10567,13 @@
             <a:avLst/>
           </a:prstGeom>
           <a:noFill/>
-        </p:spPr>
-        <p:txBody>
-          <a:bodyPr wrap="square" lIns="0" tIns="0" rIns="0" bIns="0" rtlCol="0" anchor="ctr"/>
-          <a:lstStyle/>
-          <a:p>
-            <a:pPr marL="0" indent="0">
+          <a:ln/>
+        </p:spPr>
+        <p:txBody>
+          <a:bodyPr wrap="square" lIns="0" tIns="0" rIns="0" bIns="0" rtlCol="0" anchor="ctr"/>
+          <a:lstStyle/>
+          <a:p>
+            <a:pPr indent="0" marL="0">
               <a:buNone/>
             </a:pPr>
             <a:r>
@@ -10330,9 +10581,9 @@
                 <a:solidFill>
                   <a:srgbClr val="64748B"/>
                 </a:solidFill>
-                <a:latin typeface="Segoe UI" panose="020B0502040204020203" pitchFamily="34" charset="0"/>
-                <a:ea typeface="Segoe UI" panose="020B0502040204020203" pitchFamily="34" charset="-122"/>
-                <a:cs typeface="Segoe UI" panose="020B0502040204020203" pitchFamily="34" charset="-120"/>
+                <a:latin typeface="Segoe UI" pitchFamily="34" charset="0"/>
+                <a:ea typeface="Segoe UI" pitchFamily="34" charset="-122"/>
+                <a:cs typeface="Segoe UI" pitchFamily="34" charset="-120"/>
               </a:rPr>
               <a:t>containers</a:t>
             </a:r>
@@ -10378,12 +10629,13 @@
             <a:avLst/>
           </a:prstGeom>
           <a:noFill/>
-        </p:spPr>
-        <p:txBody>
-          <a:bodyPr wrap="square" lIns="0" tIns="0" rIns="0" bIns="0" rtlCol="0" anchor="ctr"/>
-          <a:lstStyle/>
-          <a:p>
-            <a:pPr marL="0" indent="0">
+          <a:ln/>
+        </p:spPr>
+        <p:txBody>
+          <a:bodyPr wrap="square" lIns="0" tIns="0" rIns="0" bIns="0" rtlCol="0" anchor="ctr"/>
+          <a:lstStyle/>
+          <a:p>
+            <a:pPr indent="0" marL="0">
               <a:buNone/>
             </a:pPr>
             <a:r>
@@ -10391,9 +10643,9 @@
                 <a:solidFill>
                   <a:srgbClr val="16A34A"/>
                 </a:solidFill>
-                <a:latin typeface="Segoe UI Semibold" panose="020B0702040204020203" pitchFamily="34" charset="0"/>
-                <a:ea typeface="Segoe UI Semibold" panose="020B0702040204020203" pitchFamily="34" charset="-122"/>
-                <a:cs typeface="Segoe UI Semibold" panose="020B0702040204020203" pitchFamily="34" charset="-120"/>
+                <a:latin typeface="Segoe UI Semibold" pitchFamily="34" charset="0"/>
+                <a:ea typeface="Segoe UI Semibold" pitchFamily="34" charset="-122"/>
+                <a:cs typeface="Segoe UI Semibold" pitchFamily="34" charset="-120"/>
               </a:rPr>
               <a:t>1</a:t>
             </a:r>
@@ -10416,12 +10668,13 @@
             <a:avLst/>
           </a:prstGeom>
           <a:noFill/>
-        </p:spPr>
-        <p:txBody>
-          <a:bodyPr wrap="square" lIns="0" tIns="0" rIns="0" bIns="0" rtlCol="0" anchor="ctr"/>
-          <a:lstStyle/>
-          <a:p>
-            <a:pPr marL="0" indent="0">
+          <a:ln/>
+        </p:spPr>
+        <p:txBody>
+          <a:bodyPr wrap="square" lIns="0" tIns="0" rIns="0" bIns="0" rtlCol="0" anchor="ctr"/>
+          <a:lstStyle/>
+          <a:p>
+            <a:pPr indent="0" marL="0">
               <a:buNone/>
             </a:pPr>
             <a:r>
@@ -10429,9 +10682,9 @@
                 <a:solidFill>
                   <a:srgbClr val="64748B"/>
                 </a:solidFill>
-                <a:latin typeface="Segoe UI" panose="020B0502040204020203" pitchFamily="34" charset="0"/>
-                <a:ea typeface="Segoe UI" panose="020B0502040204020203" pitchFamily="34" charset="-122"/>
-                <a:cs typeface="Segoe UI" panose="020B0502040204020203" pitchFamily="34" charset="-120"/>
+                <a:latin typeface="Segoe UI" pitchFamily="34" charset="0"/>
+                <a:ea typeface="Segoe UI" pitchFamily="34" charset="-122"/>
+                <a:cs typeface="Segoe UI" pitchFamily="34" charset="-120"/>
               </a:rPr>
               <a:t>command to start</a:t>
             </a:r>
@@ -10481,12 +10734,13 @@
             <a:avLst/>
           </a:prstGeom>
           <a:noFill/>
-        </p:spPr>
-        <p:txBody>
-          <a:bodyPr wrap="square" lIns="0" tIns="0" rIns="0" bIns="0" rtlCol="0" anchor="ctr"/>
-          <a:lstStyle/>
-          <a:p>
-            <a:pPr marL="0" indent="0">
+          <a:ln/>
+        </p:spPr>
+        <p:txBody>
+          <a:bodyPr wrap="square" lIns="0" tIns="0" rIns="0" bIns="0" rtlCol="0" anchor="ctr"/>
+          <a:lstStyle/>
+          <a:p>
+            <a:pPr indent="0" marL="0">
               <a:buNone/>
             </a:pPr>
             <a:r>
@@ -10494,20 +10748,23 @@
                 <a:solidFill>
                   <a:srgbClr val="0891B2"/>
                 </a:solidFill>
-                <a:latin typeface="Segoe UI" panose="020B0502040204020203" pitchFamily="34" charset="0"/>
-                <a:ea typeface="Segoe UI" panose="020B0502040204020203" pitchFamily="34" charset="-122"/>
-                <a:cs typeface="Segoe UI" panose="020B0502040204020203" pitchFamily="34" charset="-120"/>
+                <a:latin typeface="Segoe UI" pitchFamily="34" charset="0"/>
+                <a:ea typeface="Segoe UI" pitchFamily="34" charset="-122"/>
+                <a:cs typeface="Segoe UI" pitchFamily="34" charset="-120"/>
               </a:rPr>
               <a:t>LIVE  </a:t>
             </a:r>
+            <a:pPr indent="0" marL="0">
+              <a:buNone/>
+            </a:pPr>
             <a:r>
               <a:rPr lang="en-US" sz="1100" dirty="0">
                 <a:solidFill>
                   <a:srgbClr val="0B1B33"/>
                 </a:solidFill>
-                <a:latin typeface="Segoe UI" panose="020B0502040204020203" pitchFamily="34" charset="0"/>
-                <a:ea typeface="Segoe UI" panose="020B0502040204020203" pitchFamily="34" charset="-122"/>
-                <a:cs typeface="Segoe UI" panose="020B0502040204020203" pitchFamily="34" charset="-120"/>
+                <a:latin typeface="Segoe UI" pitchFamily="34" charset="0"/>
+                <a:ea typeface="Segoe UI" pitchFamily="34" charset="-122"/>
+                <a:cs typeface="Segoe UI" pitchFamily="34" charset="-120"/>
               </a:rPr>
               <a:t>Grafana platform health</a:t>
             </a:r>
@@ -10599,6 +10856,23 @@
         <a:font script="Viet" typeface="Times New Roman"/>
         <a:font script="Uigh" typeface="Microsoft Uighur"/>
         <a:font script="Geor" typeface="Sylfaen"/>
+        <a:font script="Armn" typeface="Arial"/>
+        <a:font script="Bugi" typeface="Leelawadee UI"/>
+        <a:font script="Bopo" typeface="Microsoft JhengHei"/>
+        <a:font script="Java" typeface="Javanese Text"/>
+        <a:font script="Lisu" typeface="Segoe UI"/>
+        <a:font script="Mymr" typeface="Myanmar Text"/>
+        <a:font script="Nkoo" typeface="Ebrima"/>
+        <a:font script="Olck" typeface="Nirmala UI"/>
+        <a:font script="Osma" typeface="Ebrima"/>
+        <a:font script="Phag" typeface="Phagspa"/>
+        <a:font script="Syrn" typeface="Estrangelo Edessa"/>
+        <a:font script="Syrj" typeface="Estrangelo Edessa"/>
+        <a:font script="Syre" typeface="Estrangelo Edessa"/>
+        <a:font script="Sora" typeface="Nirmala UI"/>
+        <a:font script="Tale" typeface="Microsoft Tai Le"/>
+        <a:font script="Talu" typeface="Microsoft New Tai Lue"/>
+        <a:font script="Tfng" typeface="Ebrima"/>
       </a:majorFont>
       <a:minorFont>
         <a:latin typeface="Segoe UI"/>
@@ -10634,6 +10908,23 @@
         <a:font script="Viet" typeface="Arial"/>
         <a:font script="Uigh" typeface="Microsoft Uighur"/>
         <a:font script="Geor" typeface="Sylfaen"/>
+        <a:font script="Armn" typeface="Arial"/>
+        <a:font script="Bugi" typeface="Leelawadee UI"/>
+        <a:font script="Bopo" typeface="Microsoft JhengHei"/>
+        <a:font script="Java" typeface="Javanese Text"/>
+        <a:font script="Lisu" typeface="Segoe UI"/>
+        <a:font script="Mymr" typeface="Myanmar Text"/>
+        <a:font script="Nkoo" typeface="Ebrima"/>
+        <a:font script="Olck" typeface="Nirmala UI"/>
+        <a:font script="Osma" typeface="Ebrima"/>
+        <a:font script="Phag" typeface="Phagspa"/>
+        <a:font script="Syrn" typeface="Estrangelo Edessa"/>
+        <a:font script="Syrj" typeface="Estrangelo Edessa"/>
+        <a:font script="Syre" typeface="Estrangelo Edessa"/>
+        <a:font script="Sora" typeface="Nirmala UI"/>
+        <a:font script="Tale" typeface="Microsoft Tai Le"/>
+        <a:font script="Talu" typeface="Microsoft New Tai Lue"/>
+        <a:font script="Tfng" typeface="Ebrima"/>
       </a:minorFont>
     </a:fontScheme>
     <a:fmtScheme name="Office">
@@ -10774,265 +11065,8 @@
       </a:bgFillStyleLst>
     </a:fmtScheme>
   </a:themeElements>
-  <a:extLst>
-    <a:ext uri="{05A4C25C-085E-4340-85A3-A5531E510DB2}">
-      <thm15:themeFamily xmlns:thm15="http://schemas.microsoft.com/office/thememl/2012/main" name="Office Theme" id="{62F939B6-93AF-4DB8-9C6B-D6C7DFDC589F}" vid="{4A3C46E8-61CC-4603-A589-7422A47A8E4A}"/>
-    </a:ext>
-  </a:extLst>
-</a:theme>
-</file>
-
-<file path=ppt/theme/theme2.xml><?xml version="1.0" encoding="utf-8"?>
-<a:theme xmlns:a="http://schemas.openxmlformats.org/drawingml/2006/main" name="Office Theme">
-  <a:themeElements>
-    <a:clrScheme name="Office">
-      <a:dk1>
-        <a:sysClr val="windowText" lastClr="000000"/>
-      </a:dk1>
-      <a:lt1>
-        <a:sysClr val="window" lastClr="FFFFFF"/>
-      </a:lt1>
-      <a:dk2>
-        <a:srgbClr val="44546A"/>
-      </a:dk2>
-      <a:lt2>
-        <a:srgbClr val="E7E6E6"/>
-      </a:lt2>
-      <a:accent1>
-        <a:srgbClr val="4472C4"/>
-      </a:accent1>
-      <a:accent2>
-        <a:srgbClr val="ED7D31"/>
-      </a:accent2>
-      <a:accent3>
-        <a:srgbClr val="A5A5A5"/>
-      </a:accent3>
-      <a:accent4>
-        <a:srgbClr val="FFC000"/>
-      </a:accent4>
-      <a:accent5>
-        <a:srgbClr val="5B9BD5"/>
-      </a:accent5>
-      <a:accent6>
-        <a:srgbClr val="70AD47"/>
-      </a:accent6>
-      <a:hlink>
-        <a:srgbClr val="0563C1"/>
-      </a:hlink>
-      <a:folHlink>
-        <a:srgbClr val="954F72"/>
-      </a:folHlink>
-    </a:clrScheme>
-    <a:fontScheme name="Office">
-      <a:majorFont>
-        <a:latin typeface="Segoe UI Semibold"/>
-        <a:ea typeface=""/>
-        <a:cs typeface=""/>
-        <a:font script="Jpan" typeface="游ゴシック Light"/>
-        <a:font script="Hang" typeface="맑은 고딕"/>
-        <a:font script="Hans" typeface="等线 Light"/>
-        <a:font script="Hant" typeface="新細明體"/>
-        <a:font script="Arab" typeface="Times New Roman"/>
-        <a:font script="Hebr" typeface="Times New Roman"/>
-        <a:font script="Thai" typeface="Angsana New"/>
-        <a:font script="Ethi" typeface="Nyala"/>
-        <a:font script="Beng" typeface="Vrinda"/>
-        <a:font script="Gujr" typeface="Shruti"/>
-        <a:font script="Khmr" typeface="MoolBoran"/>
-        <a:font script="Knda" typeface="Tunga"/>
-        <a:font script="Guru" typeface="Raavi"/>
-        <a:font script="Cans" typeface="Euphemia"/>
-        <a:font script="Cher" typeface="Plantagenet Cherokee"/>
-        <a:font script="Yiii" typeface="Microsoft Yi Baiti"/>
-        <a:font script="Tibt" typeface="Microsoft Himalaya"/>
-        <a:font script="Thaa" typeface="MV Boli"/>
-        <a:font script="Deva" typeface="Mangal"/>
-        <a:font script="Telu" typeface="Gautami"/>
-        <a:font script="Taml" typeface="Latha"/>
-        <a:font script="Syrc" typeface="Estrangelo Edessa"/>
-        <a:font script="Orya" typeface="Kalinga"/>
-        <a:font script="Mlym" typeface="Kartika"/>
-        <a:font script="Laoo" typeface="DokChampa"/>
-        <a:font script="Sinh" typeface="Iskoola Pota"/>
-        <a:font script="Mong" typeface="Mongolian Baiti"/>
-        <a:font script="Viet" typeface="Times New Roman"/>
-        <a:font script="Uigh" typeface="Microsoft Uighur"/>
-        <a:font script="Geor" typeface="Sylfaen"/>
-      </a:majorFont>
-      <a:minorFont>
-        <a:latin typeface="Segoe UI"/>
-        <a:ea typeface=""/>
-        <a:cs typeface=""/>
-        <a:font script="Jpan" typeface="游ゴシック"/>
-        <a:font script="Hang" typeface="맑은 고딕"/>
-        <a:font script="Hans" typeface="等线"/>
-        <a:font script="Hant" typeface="新細明體"/>
-        <a:font script="Arab" typeface="Arial"/>
-        <a:font script="Hebr" typeface="Arial"/>
-        <a:font script="Thai" typeface="Cordia New"/>
-        <a:font script="Ethi" typeface="Nyala"/>
-        <a:font script="Beng" typeface="Vrinda"/>
-        <a:font script="Gujr" typeface="Shruti"/>
-        <a:font script="Khmr" typeface="DaunPenh"/>
-        <a:font script="Knda" typeface="Tunga"/>
-        <a:font script="Guru" typeface="Raavi"/>
-        <a:font script="Cans" typeface="Euphemia"/>
-        <a:font script="Cher" typeface="Plantagenet Cherokee"/>
-        <a:font script="Yiii" typeface="Microsoft Yi Baiti"/>
-        <a:font script="Tibt" typeface="Microsoft Himalaya"/>
-        <a:font script="Thaa" typeface="MV Boli"/>
-        <a:font script="Deva" typeface="Mangal"/>
-        <a:font script="Telu" typeface="Gautami"/>
-        <a:font script="Taml" typeface="Latha"/>
-        <a:font script="Syrc" typeface="Estrangelo Edessa"/>
-        <a:font script="Orya" typeface="Kalinga"/>
-        <a:font script="Mlym" typeface="Kartika"/>
-        <a:font script="Laoo" typeface="DokChampa"/>
-        <a:font script="Sinh" typeface="Iskoola Pota"/>
-        <a:font script="Mong" typeface="Mongolian Baiti"/>
-        <a:font script="Viet" typeface="Arial"/>
-        <a:font script="Uigh" typeface="Microsoft Uighur"/>
-        <a:font script="Geor" typeface="Sylfaen"/>
-      </a:minorFont>
-    </a:fontScheme>
-    <a:fmtScheme name="Office">
-      <a:fillStyleLst>
-        <a:solidFill>
-          <a:schemeClr val="phClr"/>
-        </a:solidFill>
-        <a:gradFill rotWithShape="1">
-          <a:gsLst>
-            <a:gs pos="0">
-              <a:schemeClr val="phClr">
-                <a:lumMod val="110000"/>
-                <a:satMod val="105000"/>
-                <a:tint val="67000"/>
-              </a:schemeClr>
-            </a:gs>
-            <a:gs pos="50000">
-              <a:schemeClr val="phClr">
-                <a:lumMod val="105000"/>
-                <a:satMod val="103000"/>
-                <a:tint val="73000"/>
-              </a:schemeClr>
-            </a:gs>
-            <a:gs pos="100000">
-              <a:schemeClr val="phClr">
-                <a:lumMod val="105000"/>
-                <a:satMod val="109000"/>
-                <a:tint val="81000"/>
-              </a:schemeClr>
-            </a:gs>
-          </a:gsLst>
-          <a:lin ang="5400000" scaled="0"/>
-        </a:gradFill>
-        <a:gradFill rotWithShape="1">
-          <a:gsLst>
-            <a:gs pos="0">
-              <a:schemeClr val="phClr">
-                <a:satMod val="103000"/>
-                <a:lumMod val="102000"/>
-                <a:tint val="94000"/>
-              </a:schemeClr>
-            </a:gs>
-            <a:gs pos="50000">
-              <a:schemeClr val="phClr">
-                <a:satMod val="110000"/>
-                <a:lumMod val="100000"/>
-                <a:shade val="100000"/>
-              </a:schemeClr>
-            </a:gs>
-            <a:gs pos="100000">
-              <a:schemeClr val="phClr">
-                <a:lumMod val="99000"/>
-                <a:satMod val="120000"/>
-                <a:shade val="78000"/>
-              </a:schemeClr>
-            </a:gs>
-          </a:gsLst>
-          <a:lin ang="5400000" scaled="0"/>
-        </a:gradFill>
-      </a:fillStyleLst>
-      <a:lnStyleLst>
-        <a:ln w="6350" cap="flat" cmpd="sng" algn="ctr">
-          <a:solidFill>
-            <a:schemeClr val="phClr"/>
-          </a:solidFill>
-          <a:prstDash val="solid"/>
-          <a:miter lim="800000"/>
-        </a:ln>
-        <a:ln w="12700" cap="flat" cmpd="sng" algn="ctr">
-          <a:solidFill>
-            <a:schemeClr val="phClr"/>
-          </a:solidFill>
-          <a:prstDash val="solid"/>
-          <a:miter lim="800000"/>
-        </a:ln>
-        <a:ln w="19050" cap="flat" cmpd="sng" algn="ctr">
-          <a:solidFill>
-            <a:schemeClr val="phClr"/>
-          </a:solidFill>
-          <a:prstDash val="solid"/>
-          <a:miter lim="800000"/>
-        </a:ln>
-      </a:lnStyleLst>
-      <a:effectStyleLst>
-        <a:effectStyle>
-          <a:effectLst/>
-        </a:effectStyle>
-        <a:effectStyle>
-          <a:effectLst/>
-        </a:effectStyle>
-        <a:effectStyle>
-          <a:effectLst>
-            <a:outerShdw blurRad="57150" dist="19050" dir="5400000" algn="ctr" rotWithShape="0">
-              <a:srgbClr val="000000">
-                <a:alpha val="63000"/>
-              </a:srgbClr>
-            </a:outerShdw>
-          </a:effectLst>
-        </a:effectStyle>
-      </a:effectStyleLst>
-      <a:bgFillStyleLst>
-        <a:solidFill>
-          <a:schemeClr val="phClr"/>
-        </a:solidFill>
-        <a:solidFill>
-          <a:schemeClr val="phClr">
-            <a:tint val="95000"/>
-            <a:satMod val="170000"/>
-          </a:schemeClr>
-        </a:solidFill>
-        <a:gradFill rotWithShape="1">
-          <a:gsLst>
-            <a:gs pos="0">
-              <a:schemeClr val="phClr">
-                <a:tint val="93000"/>
-                <a:satMod val="150000"/>
-                <a:shade val="98000"/>
-                <a:lumMod val="102000"/>
-              </a:schemeClr>
-            </a:gs>
-            <a:gs pos="50000">
-              <a:schemeClr val="phClr">
-                <a:tint val="98000"/>
-                <a:satMod val="130000"/>
-                <a:shade val="90000"/>
-                <a:lumMod val="103000"/>
-              </a:schemeClr>
-            </a:gs>
-            <a:gs pos="100000">
-              <a:schemeClr val="phClr">
-                <a:shade val="63000"/>
-                <a:satMod val="120000"/>
-              </a:schemeClr>
-            </a:gs>
-          </a:gsLst>
-          <a:lin ang="5400000" scaled="0"/>
-        </a:gradFill>
-      </a:bgFillStyleLst>
-    </a:fmtScheme>
-  </a:themeElements>
+  <a:objectDefaults/>
+  <a:extraClrSchemeLst/>
   <a:extLst>
     <a:ext uri="{05A4C25C-085E-4340-85A3-A5531E510DB2}">
       <thm15:themeFamily xmlns:thm15="http://schemas.microsoft.com/office/thememl/2012/main" name="Office Theme" id="{62F939B6-93AF-4DB8-9C6B-D6C7DFDC589F}" vid="{4A3C46E8-61CC-4603-A589-7422A47A8E4A}"/>

--- a/deliverables/REOAGMS-Team-Presentation.pptx
+++ b/deliverables/REOAGMS-Team-Presentation.pptx
@@ -1,25 +1,25 @@
 
 <file path=ppt/presentation.xml><?xml version="1.0" encoding="utf-8"?>
-<p:presentation xmlns:a="http://schemas.openxmlformats.org/drawingml/2006/main" xmlns:r="http://schemas.openxmlformats.org/officeDocument/2006/relationships" xmlns:p="http://schemas.openxmlformats.org/presentationml/2006/main" saveSubsetFonts="1" autoCompressPictures="0">
+<p:presentation xmlns:a="http://schemas.openxmlformats.org/drawingml/2006/main" xmlns:r="http://schemas.openxmlformats.org/officeDocument/2006/relationships" xmlns:p="http://schemas.openxmlformats.org/presentationml/2006/main" autoCompressPictures="0">
   <p:sldMasterIdLst>
     <p:sldMasterId id="2147483648" r:id="rId1"/>
   </p:sldMasterIdLst>
+  <p:notesMasterIdLst>
+    <p:notesMasterId r:id="rId4"/>
+  </p:notesMasterIdLst>
   <p:sldIdLst>
-    <p:sldId id="256" r:id="rId2"/>
-    <p:sldId id="257" r:id="rId3"/>
-    <p:sldId id="258" r:id="rId4"/>
-    <p:sldId id="259" r:id="rId5"/>
-    <p:sldId id="260" r:id="rId6"/>
-    <p:sldId id="261" r:id="rId7"/>
-    <p:sldId id="262" r:id="rId8"/>
-    <p:sldId id="263" r:id="rId9"/>
-    <p:sldId id="264" r:id="rId10"/>
-    <p:sldId id="265" r:id="rId11"/>
+    <p:sldId id="256" r:id="rId3"/>
+    <p:sldId id="257" r:id="rId5"/>
+    <p:sldId id="258" r:id="rId6"/>
+    <p:sldId id="259" r:id="rId7"/>
+    <p:sldId id="260" r:id="rId8"/>
+    <p:sldId id="261" r:id="rId9"/>
+    <p:sldId id="262" r:id="rId10"/>
+    <p:sldId id="263" r:id="rId11"/>
+    <p:sldId id="264" r:id="rId12"/>
+    <p:sldId id="265" r:id="rId13"/>
   </p:sldIdLst>
-  <p:notesMasterIdLst>
-    <p:notesMasterId r:id="rId12"/>
-  </p:notesMasterIdLst>
-  <p:sldSz cx="9144000" cy="5143500"/>
+  <p:sldSz cx="9144000" cy="5143500" type="screen16x9"/>
   <p:notesSz cx="5143500" cy="9144000"/>
   <p:defaultTextStyle>
     <a:lvl1pPr marL="0" algn="l" defTabSz="914400" rtl="0" eaLnBrk="1" latinLnBrk="0" hangingPunct="1">
@@ -138,236 +138,7 @@
           <a:chExt cx="0" cy="0"/>
         </a:xfrm>
       </p:grpSpPr>
-      <p:sp>
-        <p:nvSpPr>
-          <p:cNvPr id="2" name="Header Placeholder 1"/>
-          <p:cNvSpPr>
-            <a:spLocks noGrp="1"/>
-          </p:cNvSpPr>
-          <p:nvPr>
-            <p:ph type="hdr" sz="quarter"/>
-          </p:nvPr>
-        </p:nvSpPr>
-        <p:spPr>
-          <a:xfrm>
-            <a:off x="0" y="0"/>
-            <a:ext cx="2971800" cy="458788"/>
-          </a:xfrm>
-          <a:prstGeom prst="rect">
-            <a:avLst/>
-          </a:prstGeom>
-        </p:spPr>
-        <p:txBody>
-          <a:bodyPr vert="horz" lIns="91440" tIns="45720" rIns="91440" bIns="45720" rtlCol="0"/>
-          <a:lstStyle>
-            <a:lvl1pPr algn="l">
-              <a:defRPr sz="1200"/>
-            </a:lvl1pPr>
-          </a:lstStyle>
-          <a:p>
-            <a:endParaRPr lang="en-US"/>
-          </a:p>
-        </p:txBody>
-      </p:sp>
-      <p:sp>
-        <p:nvSpPr>
-          <p:cNvPr id="3" name="Date Placeholder 2"/>
-          <p:cNvSpPr>
-            <a:spLocks noGrp="1"/>
-          </p:cNvSpPr>
-          <p:nvPr>
-            <p:ph type="dt" idx="1"/>
-          </p:nvPr>
-        </p:nvSpPr>
-        <p:spPr>
-          <a:xfrm>
-            <a:off x="3884613" y="0"/>
-            <a:ext cx="2971800" cy="458788"/>
-          </a:xfrm>
-          <a:prstGeom prst="rect">
-            <a:avLst/>
-          </a:prstGeom>
-        </p:spPr>
-        <p:txBody>
-          <a:bodyPr vert="horz" lIns="91440" tIns="45720" rIns="91440" bIns="45720" rtlCol="0"/>
-          <a:lstStyle>
-            <a:lvl1pPr algn="r">
-              <a:defRPr sz="1200"/>
-            </a:lvl1pPr>
-          </a:lstStyle>
-          <a:p>
-            <a:fld id="{5282F153-3F37-0F45-9E97-73ACFA13230C}" type="datetimeFigureOut">
-              <a:rPr lang="en-US"/>
-              <a:t>7/23/19</a:t>
-            </a:fld>
-            <a:endParaRPr lang="en-US"/>
-          </a:p>
-        </p:txBody>
-      </p:sp>
-      <p:sp>
-        <p:nvSpPr>
-          <p:cNvPr id="4" name="Slide Image Placeholder 3"/>
-          <p:cNvSpPr>
-            <a:spLocks noGrp="1" noRot="1" noChangeAspect="1"/>
-          </p:cNvSpPr>
-          <p:nvPr>
-            <p:ph type="sldImg" idx="2"/>
-          </p:nvPr>
-        </p:nvSpPr>
-        <p:spPr>
-          <a:xfrm>
-            <a:off x="685800" y="1143000"/>
-            <a:ext cx="5486400" cy="3086100"/>
-          </a:xfrm>
-          <a:prstGeom prst="rect">
-            <a:avLst/>
-          </a:prstGeom>
-          <a:noFill/>
-          <a:ln w="12700">
-            <a:solidFill>
-              <a:prstClr val="black"/>
-            </a:solidFill>
-          </a:ln>
-        </p:spPr>
-        <p:txBody>
-          <a:bodyPr vert="horz" lIns="91440" tIns="45720" rIns="91440" bIns="45720" rtlCol="0" anchor="ctr"/>
-          <a:lstStyle/>
-          <a:p>
-            <a:endParaRPr lang="en-US"/>
-          </a:p>
-        </p:txBody>
-      </p:sp>
-      <p:sp>
-        <p:nvSpPr>
-          <p:cNvPr id="5" name="Notes Placeholder 4"/>
-          <p:cNvSpPr>
-            <a:spLocks noGrp="1"/>
-          </p:cNvSpPr>
-          <p:nvPr>
-            <p:ph type="body" sz="quarter" idx="3"/>
-          </p:nvPr>
-        </p:nvSpPr>
-        <p:spPr>
-          <a:xfrm>
-            <a:off x="685800" y="4400550"/>
-            <a:ext cx="5486400" cy="3600450"/>
-          </a:xfrm>
-          <a:prstGeom prst="rect">
-            <a:avLst/>
-          </a:prstGeom>
-        </p:spPr>
-        <p:txBody>
-          <a:bodyPr vert="horz" lIns="91440" tIns="45720" rIns="91440" bIns="45720" rtlCol="0"/>
-          <a:lstStyle/>
-          <a:p>
-            <a:pPr lvl="0"/>
-            <a:r>
-              <a:rPr lang="en-US"/>
-              <a:t>Click to edit Master text styles</a:t>
-            </a:r>
-          </a:p>
-          <a:p>
-            <a:pPr lvl="1"/>
-            <a:r>
-              <a:rPr lang="en-US"/>
-              <a:t>Second level</a:t>
-            </a:r>
-          </a:p>
-          <a:p>
-            <a:pPr lvl="2"/>
-            <a:r>
-              <a:rPr lang="en-US"/>
-              <a:t>Third level</a:t>
-            </a:r>
-          </a:p>
-          <a:p>
-            <a:pPr lvl="3"/>
-            <a:r>
-              <a:rPr lang="en-US"/>
-              <a:t>Fourth level</a:t>
-            </a:r>
-          </a:p>
-          <a:p>
-            <a:pPr lvl="4"/>
-            <a:r>
-              <a:rPr lang="en-US"/>
-              <a:t>Fifth level</a:t>
-            </a:r>
-          </a:p>
-        </p:txBody>
-      </p:sp>
-      <p:sp>
-        <p:nvSpPr>
-          <p:cNvPr id="6" name="Footer Placeholder 5"/>
-          <p:cNvSpPr>
-            <a:spLocks noGrp="1"/>
-          </p:cNvSpPr>
-          <p:nvPr>
-            <p:ph type="ftr" sz="quarter" idx="4"/>
-          </p:nvPr>
-        </p:nvSpPr>
-        <p:spPr>
-          <a:xfrm>
-            <a:off x="0" y="8685213"/>
-            <a:ext cx="2971800" cy="458787"/>
-          </a:xfrm>
-          <a:prstGeom prst="rect">
-            <a:avLst/>
-          </a:prstGeom>
-        </p:spPr>
-        <p:txBody>
-          <a:bodyPr vert="horz" lIns="91440" tIns="45720" rIns="91440" bIns="45720" rtlCol="0" anchor="b"/>
-          <a:lstStyle>
-            <a:lvl1pPr algn="l">
-              <a:defRPr sz="1200"/>
-            </a:lvl1pPr>
-          </a:lstStyle>
-          <a:p>
-            <a:endParaRPr lang="en-US"/>
-          </a:p>
-        </p:txBody>
-      </p:sp>
-      <p:sp>
-        <p:nvSpPr>
-          <p:cNvPr id="7" name="Slide Number Placeholder 6"/>
-          <p:cNvSpPr>
-            <a:spLocks noGrp="1"/>
-          </p:cNvSpPr>
-          <p:nvPr>
-            <p:ph type="sldNum" sz="quarter" idx="5"/>
-          </p:nvPr>
-        </p:nvSpPr>
-        <p:spPr>
-          <a:xfrm>
-            <a:off x="3884613" y="8685213"/>
-            <a:ext cx="2971800" cy="458787"/>
-          </a:xfrm>
-          <a:prstGeom prst="rect">
-            <a:avLst/>
-          </a:prstGeom>
-        </p:spPr>
-        <p:txBody>
-          <a:bodyPr vert="horz" lIns="91440" tIns="45720" rIns="91440" bIns="45720" rtlCol="0" anchor="b"/>
-          <a:lstStyle>
-            <a:lvl1pPr algn="r">
-              <a:defRPr sz="1200"/>
-            </a:lvl1pPr>
-          </a:lstStyle>
-          <a:p>
-            <a:fld id="{CE5E9CC1-C706-0F49-92D6-E571CC5EEA8F}" type="slidenum">
-              <a:rPr lang="en-US"/>
-              <a:t>‹#›</a:t>
-            </a:fld>
-            <a:endParaRPr lang="en-US"/>
-          </a:p>
-        </p:txBody>
-      </p:sp>
     </p:spTree>
-    <p:extLst>
-      <p:ext uri="{BB962C8B-B14F-4D97-AF65-F5344CB8AC3E}">
-        <p14:creationId xmlns:p14="http://schemas.microsoft.com/office/powerpoint/2010/main" val="1024086991"/>
-      </p:ext>
-    </p:extLst>
   </p:cSld>
   <p:clrMap bg1="lt1" tx1="dk1" bg2="lt2" tx2="dk2" accent1="accent1" accent2="accent2" accent3="accent3" accent4="accent4" accent5="accent5" accent6="accent6" hlink="hlink" folHlink="folHlink"/>
   <p:notesStyle>
@@ -534,18 +305,12 @@
           <a:p>
             <a:fld id="{F7021451-1387-4CA6-816F-3879F97B5CBC}" type="slidenum">
               <a:rPr lang="en-US"/>
-              <a:t>1</a:t>
             </a:fld>
             <a:endParaRPr lang="en-US"/>
           </a:p>
         </p:txBody>
       </p:sp>
     </p:spTree>
-    <p:extLst>
-      <p:ext uri="{BB962C8B-B14F-4D97-AF65-F5344CB8AC3E}">
-        <p14:creationId xmlns:p14="http://schemas.microsoft.com/office/powerpoint/2010/main" val="1024086991"/>
-      </p:ext>
-    </p:extLst>
   </p:cSld>
   <p:clrMapOvr>
     <a:masterClrMapping/>
@@ -622,18 +387,12 @@
           <a:p>
             <a:fld id="{F7021451-1387-4CA6-816F-3879F97B5CBC}" type="slidenum">
               <a:rPr lang="en-US"/>
-              <a:t>10</a:t>
             </a:fld>
             <a:endParaRPr lang="en-US"/>
           </a:p>
         </p:txBody>
       </p:sp>
     </p:spTree>
-    <p:extLst>
-      <p:ext uri="{BB962C8B-B14F-4D97-AF65-F5344CB8AC3E}">
-        <p14:creationId xmlns:p14="http://schemas.microsoft.com/office/powerpoint/2010/main" val="1024086991"/>
-      </p:ext>
-    </p:extLst>
   </p:cSld>
   <p:clrMapOvr>
     <a:masterClrMapping/>
@@ -710,18 +469,12 @@
           <a:p>
             <a:fld id="{F7021451-1387-4CA6-816F-3879F97B5CBC}" type="slidenum">
               <a:rPr lang="en-US"/>
-              <a:t>2</a:t>
             </a:fld>
             <a:endParaRPr lang="en-US"/>
           </a:p>
         </p:txBody>
       </p:sp>
     </p:spTree>
-    <p:extLst>
-      <p:ext uri="{BB962C8B-B14F-4D97-AF65-F5344CB8AC3E}">
-        <p14:creationId xmlns:p14="http://schemas.microsoft.com/office/powerpoint/2010/main" val="1024086991"/>
-      </p:ext>
-    </p:extLst>
   </p:cSld>
   <p:clrMapOvr>
     <a:masterClrMapping/>
@@ -798,18 +551,12 @@
           <a:p>
             <a:fld id="{F7021451-1387-4CA6-816F-3879F97B5CBC}" type="slidenum">
               <a:rPr lang="en-US"/>
-              <a:t>3</a:t>
             </a:fld>
             <a:endParaRPr lang="en-US"/>
           </a:p>
         </p:txBody>
       </p:sp>
     </p:spTree>
-    <p:extLst>
-      <p:ext uri="{BB962C8B-B14F-4D97-AF65-F5344CB8AC3E}">
-        <p14:creationId xmlns:p14="http://schemas.microsoft.com/office/powerpoint/2010/main" val="1024086991"/>
-      </p:ext>
-    </p:extLst>
   </p:cSld>
   <p:clrMapOvr>
     <a:masterClrMapping/>
@@ -886,18 +633,12 @@
           <a:p>
             <a:fld id="{F7021451-1387-4CA6-816F-3879F97B5CBC}" type="slidenum">
               <a:rPr lang="en-US"/>
-              <a:t>4</a:t>
             </a:fld>
             <a:endParaRPr lang="en-US"/>
           </a:p>
         </p:txBody>
       </p:sp>
     </p:spTree>
-    <p:extLst>
-      <p:ext uri="{BB962C8B-B14F-4D97-AF65-F5344CB8AC3E}">
-        <p14:creationId xmlns:p14="http://schemas.microsoft.com/office/powerpoint/2010/main" val="1024086991"/>
-      </p:ext>
-    </p:extLst>
   </p:cSld>
   <p:clrMapOvr>
     <a:masterClrMapping/>
@@ -974,18 +715,12 @@
           <a:p>
             <a:fld id="{F7021451-1387-4CA6-816F-3879F97B5CBC}" type="slidenum">
               <a:rPr lang="en-US"/>
-              <a:t>5</a:t>
             </a:fld>
             <a:endParaRPr lang="en-US"/>
           </a:p>
         </p:txBody>
       </p:sp>
     </p:spTree>
-    <p:extLst>
-      <p:ext uri="{BB962C8B-B14F-4D97-AF65-F5344CB8AC3E}">
-        <p14:creationId xmlns:p14="http://schemas.microsoft.com/office/powerpoint/2010/main" val="1024086991"/>
-      </p:ext>
-    </p:extLst>
   </p:cSld>
   <p:clrMapOvr>
     <a:masterClrMapping/>
@@ -1062,18 +797,12 @@
           <a:p>
             <a:fld id="{F7021451-1387-4CA6-816F-3879F97B5CBC}" type="slidenum">
               <a:rPr lang="en-US"/>
-              <a:t>6</a:t>
             </a:fld>
             <a:endParaRPr lang="en-US"/>
           </a:p>
         </p:txBody>
       </p:sp>
     </p:spTree>
-    <p:extLst>
-      <p:ext uri="{BB962C8B-B14F-4D97-AF65-F5344CB8AC3E}">
-        <p14:creationId xmlns:p14="http://schemas.microsoft.com/office/powerpoint/2010/main" val="1024086991"/>
-      </p:ext>
-    </p:extLst>
   </p:cSld>
   <p:clrMapOvr>
     <a:masterClrMapping/>
@@ -1150,18 +879,12 @@
           <a:p>
             <a:fld id="{F7021451-1387-4CA6-816F-3879F97B5CBC}" type="slidenum">
               <a:rPr lang="en-US"/>
-              <a:t>7</a:t>
             </a:fld>
             <a:endParaRPr lang="en-US"/>
           </a:p>
         </p:txBody>
       </p:sp>
     </p:spTree>
-    <p:extLst>
-      <p:ext uri="{BB962C8B-B14F-4D97-AF65-F5344CB8AC3E}">
-        <p14:creationId xmlns:p14="http://schemas.microsoft.com/office/powerpoint/2010/main" val="1024086991"/>
-      </p:ext>
-    </p:extLst>
   </p:cSld>
   <p:clrMapOvr>
     <a:masterClrMapping/>
@@ -1238,18 +961,12 @@
           <a:p>
             <a:fld id="{F7021451-1387-4CA6-816F-3879F97B5CBC}" type="slidenum">
               <a:rPr lang="en-US"/>
-              <a:t>8</a:t>
             </a:fld>
             <a:endParaRPr lang="en-US"/>
           </a:p>
         </p:txBody>
       </p:sp>
     </p:spTree>
-    <p:extLst>
-      <p:ext uri="{BB962C8B-B14F-4D97-AF65-F5344CB8AC3E}">
-        <p14:creationId xmlns:p14="http://schemas.microsoft.com/office/powerpoint/2010/main" val="1024086991"/>
-      </p:ext>
-    </p:extLst>
   </p:cSld>
   <p:clrMapOvr>
     <a:masterClrMapping/>
@@ -1326,18 +1043,12 @@
           <a:p>
             <a:fld id="{F7021451-1387-4CA6-816F-3879F97B5CBC}" type="slidenum">
               <a:rPr lang="en-US"/>
-              <a:t>9</a:t>
             </a:fld>
             <a:endParaRPr lang="en-US"/>
           </a:p>
         </p:txBody>
       </p:sp>
     </p:spTree>
-    <p:extLst>
-      <p:ext uri="{BB962C8B-B14F-4D97-AF65-F5344CB8AC3E}">
-        <p14:creationId xmlns:p14="http://schemas.microsoft.com/office/powerpoint/2010/main" val="1024086991"/>
-      </p:ext>
-    </p:extLst>
   </p:cSld>
   <p:clrMapOvr>
     <a:masterClrMapping/>
@@ -1378,6 +1089,11 @@
 <file path=ppt/slideMasters/slideMaster1.xml><?xml version="1.0" encoding="utf-8"?>
 <p:sldMaster xmlns:a="http://schemas.openxmlformats.org/drawingml/2006/main" xmlns:r="http://schemas.openxmlformats.org/officeDocument/2006/relationships" xmlns:p="http://schemas.openxmlformats.org/presentationml/2006/main">
   <p:cSld>
+    <p:bg>
+      <p:bgRef idx="1001">
+        <a:schemeClr val="bg1"/>
+      </p:bgRef>
+    </p:bg>
     <p:spTree>
       <p:nvGrpSpPr>
         <p:cNvPr id="1" name=""/>
@@ -1421,7 +1137,7 @@
         <a:spcBef>
           <a:spcPct val="20000"/>
         </a:spcBef>
-        <a:buFont typeface="Arial" pitchFamily="34" charset="0"/>
+        <a:buFont typeface="Arial" panose="020B0604020202020204" pitchFamily="34" charset="0"/>
         <a:buChar char="•"/>
         <a:defRPr sz="3200" kern="1200">
           <a:solidFill>
@@ -1436,7 +1152,7 @@
         <a:spcBef>
           <a:spcPct val="20000"/>
         </a:spcBef>
-        <a:buFont typeface="Arial" pitchFamily="34" charset="0"/>
+        <a:buFont typeface="Arial" panose="020B0604020202020204" pitchFamily="34" charset="0"/>
         <a:buChar char="–"/>
         <a:defRPr sz="2800" kern="1200">
           <a:solidFill>
@@ -1451,7 +1167,7 @@
         <a:spcBef>
           <a:spcPct val="20000"/>
         </a:spcBef>
-        <a:buFont typeface="Arial" pitchFamily="34" charset="0"/>
+        <a:buFont typeface="Arial" panose="020B0604020202020204" pitchFamily="34" charset="0"/>
         <a:buChar char="•"/>
         <a:defRPr sz="2400" kern="1200">
           <a:solidFill>
@@ -1466,7 +1182,7 @@
         <a:spcBef>
           <a:spcPct val="20000"/>
         </a:spcBef>
-        <a:buFont typeface="Arial" pitchFamily="34" charset="0"/>
+        <a:buFont typeface="Arial" panose="020B0604020202020204" pitchFamily="34" charset="0"/>
         <a:buChar char="–"/>
         <a:defRPr sz="2000" kern="1200">
           <a:solidFill>
@@ -1481,7 +1197,7 @@
         <a:spcBef>
           <a:spcPct val="20000"/>
         </a:spcBef>
-        <a:buFont typeface="Arial" pitchFamily="34" charset="0"/>
+        <a:buFont typeface="Arial" panose="020B0604020202020204" pitchFamily="34" charset="0"/>
         <a:buChar char="»"/>
         <a:defRPr sz="2000" kern="1200">
           <a:solidFill>
@@ -1496,7 +1212,7 @@
         <a:spcBef>
           <a:spcPct val="20000"/>
         </a:spcBef>
-        <a:buFont typeface="Arial" pitchFamily="34" charset="0"/>
+        <a:buFont typeface="Arial" panose="020B0604020202020204" pitchFamily="34" charset="0"/>
         <a:buChar char="•"/>
         <a:defRPr sz="2000" kern="1200">
           <a:solidFill>
@@ -1511,7 +1227,7 @@
         <a:spcBef>
           <a:spcPct val="20000"/>
         </a:spcBef>
-        <a:buFont typeface="Arial" pitchFamily="34" charset="0"/>
+        <a:buFont typeface="Arial" panose="020B0604020202020204" pitchFamily="34" charset="0"/>
         <a:buChar char="•"/>
         <a:defRPr sz="2000" kern="1200">
           <a:solidFill>
@@ -1526,7 +1242,7 @@
         <a:spcBef>
           <a:spcPct val="20000"/>
         </a:spcBef>
-        <a:buFont typeface="Arial" pitchFamily="34" charset="0"/>
+        <a:buFont typeface="Arial" panose="020B0604020202020204" pitchFamily="34" charset="0"/>
         <a:buChar char="•"/>
         <a:defRPr sz="2000" kern="1200">
           <a:solidFill>
@@ -1541,7 +1257,7 @@
         <a:spcBef>
           <a:spcPct val="20000"/>
         </a:spcBef>
-        <a:buFont typeface="Arial" pitchFamily="34" charset="0"/>
+        <a:buFont typeface="Arial" panose="020B0604020202020204" pitchFamily="34" charset="0"/>
         <a:buChar char="•"/>
         <a:defRPr sz="2000" kern="1200">
           <a:solidFill>
@@ -1654,7 +1370,7 @@
 
 <file path=ppt/slides/slide1.xml><?xml version="1.0" encoding="utf-8"?>
 <p:sld xmlns:a="http://schemas.openxmlformats.org/drawingml/2006/main" xmlns:r="http://schemas.openxmlformats.org/officeDocument/2006/relationships" xmlns:p="http://schemas.openxmlformats.org/presentationml/2006/main">
-  <p:cSld name="Slide 1">
+  <p:cSld>
     <p:bg>
       <p:bgPr>
         <a:blipFill dpi="0" rotWithShape="1">
@@ -1873,23 +1589,22 @@
             <a:avLst/>
           </a:prstGeom>
           <a:noFill/>
-          <a:ln/>
-        </p:spPr>
-        <p:txBody>
-          <a:bodyPr wrap="square" lIns="0" tIns="0" rIns="0" bIns="0" rtlCol="0" anchor="ctr"/>
-          <a:lstStyle/>
-          <a:p>
-            <a:pPr indent="0" marL="0">
-              <a:buNone/>
-            </a:pPr>
-            <a:r>
-              <a:rPr lang="en-US" sz="1200" spc="500" kern="0" dirty="0">
+        </p:spPr>
+        <p:txBody>
+          <a:bodyPr wrap="square" lIns="0" tIns="0" rIns="0" bIns="0" rtlCol="0" anchor="ctr"/>
+          <a:lstStyle/>
+          <a:p>
+            <a:pPr marL="0" indent="0">
+              <a:buNone/>
+            </a:pPr>
+            <a:r>
+              <a:rPr lang="en-US" sz="1200" kern="0" spc="500" dirty="0">
                 <a:solidFill>
                   <a:srgbClr val="8FA0FF"/>
                 </a:solidFill>
-                <a:latin typeface="Segoe UI Semibold" pitchFamily="34" charset="0"/>
-                <a:ea typeface="Segoe UI Semibold" pitchFamily="34" charset="-122"/>
-                <a:cs typeface="Segoe UI Semibold" pitchFamily="34" charset="-120"/>
+                <a:latin typeface="Segoe UI Semibold" panose="020B0702040204020203" pitchFamily="34" charset="0"/>
+                <a:ea typeface="Segoe UI Semibold" panose="020B0702040204020203" pitchFamily="34" charset="-122"/>
+                <a:cs typeface="Segoe UI Semibold" panose="020B0702040204020203" pitchFamily="34" charset="-120"/>
               </a:rPr>
               <a:t>GROUP 9  ·  EC8208  ·  SOFTWARE ARCHITECTURE</a:t>
             </a:r>
@@ -1912,13 +1627,12 @@
             <a:avLst/>
           </a:prstGeom>
           <a:noFill/>
-          <a:ln/>
-        </p:spPr>
-        <p:txBody>
-          <a:bodyPr wrap="square" lIns="0" tIns="0" rIns="0" bIns="0" rtlCol="0" anchor="ctr"/>
-          <a:lstStyle/>
-          <a:p>
-            <a:pPr indent="0" marL="0">
+        </p:spPr>
+        <p:txBody>
+          <a:bodyPr wrap="square" lIns="0" tIns="0" rIns="0" bIns="0" rtlCol="0" anchor="ctr"/>
+          <a:lstStyle/>
+          <a:p>
+            <a:pPr marL="0" indent="0">
               <a:buNone/>
             </a:pPr>
             <a:r>
@@ -1926,9 +1640,9 @@
                 <a:solidFill>
                   <a:srgbClr val="FFFFFF"/>
                 </a:solidFill>
-                <a:latin typeface="Segoe UI" pitchFamily="34" charset="0"/>
-                <a:ea typeface="Segoe UI" pitchFamily="34" charset="-122"/>
-                <a:cs typeface="Segoe UI" pitchFamily="34" charset="-120"/>
+                <a:latin typeface="Segoe UI" panose="020B0502040204020203" pitchFamily="34" charset="0"/>
+                <a:ea typeface="Segoe UI" panose="020B0502040204020203" pitchFamily="34" charset="-122"/>
+                <a:cs typeface="Segoe UI" panose="020B0502040204020203" pitchFamily="34" charset="-120"/>
               </a:rPr>
               <a:t>REOAGMS</a:t>
             </a:r>
@@ -1951,13 +1665,12 @@
             <a:avLst/>
           </a:prstGeom>
           <a:noFill/>
-          <a:ln/>
-        </p:spPr>
-        <p:txBody>
-          <a:bodyPr wrap="square" lIns="0" tIns="0" rIns="0" bIns="0" rtlCol="0" anchor="ctr"/>
-          <a:lstStyle/>
-          <a:p>
-            <a:pPr indent="0" marL="0">
+        </p:spPr>
+        <p:txBody>
+          <a:bodyPr wrap="square" lIns="0" tIns="0" rIns="0" bIns="0" rtlCol="0" anchor="ctr"/>
+          <a:lstStyle/>
+          <a:p>
+            <a:pPr marL="0" indent="0">
               <a:buNone/>
             </a:pPr>
             <a:r>
@@ -1965,9 +1678,9 @@
                 <a:solidFill>
                   <a:srgbClr val="C9D1FF"/>
                 </a:solidFill>
-                <a:latin typeface="Segoe UI Light" pitchFamily="34" charset="0"/>
-                <a:ea typeface="Segoe UI Light" pitchFamily="34" charset="-122"/>
-                <a:cs typeface="Segoe UI Light" pitchFamily="34" charset="-120"/>
+                <a:latin typeface="Segoe UI Light" panose="020B0502040204020203" pitchFamily="34" charset="0"/>
+                <a:ea typeface="Segoe UI Light" panose="020B0502040204020203" pitchFamily="34" charset="-122"/>
+                <a:cs typeface="Segoe UI Light" panose="020B0502040204020203" pitchFamily="34" charset="-120"/>
               </a:rPr>
               <a:t>Renewable Energy Operations, Asset and Grid Management System</a:t>
             </a:r>
@@ -1990,13 +1703,12 @@
             <a:avLst/>
           </a:prstGeom>
           <a:noFill/>
-          <a:ln/>
-        </p:spPr>
-        <p:txBody>
-          <a:bodyPr wrap="square" lIns="0" tIns="0" rIns="0" bIns="0" rtlCol="0" anchor="ctr"/>
-          <a:lstStyle/>
-          <a:p>
-            <a:pPr indent="0" marL="0">
+        </p:spPr>
+        <p:txBody>
+          <a:bodyPr wrap="square" lIns="0" tIns="0" rIns="0" bIns="0" rtlCol="0" anchor="ctr"/>
+          <a:lstStyle/>
+          <a:p>
+            <a:pPr marL="0" indent="0">
               <a:buNone/>
             </a:pPr>
             <a:r>
@@ -2004,23 +1716,20 @@
                 <a:solidFill>
                   <a:srgbClr val="8FA0FF"/>
                 </a:solidFill>
-                <a:latin typeface="Segoe UI" pitchFamily="34" charset="0"/>
-                <a:ea typeface="Segoe UI" pitchFamily="34" charset="-122"/>
-                <a:cs typeface="Segoe UI" pitchFamily="34" charset="-120"/>
+                <a:latin typeface="Segoe UI" panose="020B0502040204020203" pitchFamily="34" charset="0"/>
+                <a:ea typeface="Segoe UI" panose="020B0502040204020203" pitchFamily="34" charset="-122"/>
+                <a:cs typeface="Segoe UI" panose="020B0502040204020203" pitchFamily="34" charset="-120"/>
               </a:rPr>
               <a:t>EG/2021/4707   </a:t>
             </a:r>
-            <a:pPr indent="0" marL="0">
-              <a:buNone/>
-            </a:pPr>
             <a:r>
               <a:rPr lang="en-US" sz="1300" b="1" dirty="0">
                 <a:solidFill>
                   <a:srgbClr val="FFFFFF"/>
                 </a:solidFill>
-                <a:latin typeface="Segoe UI" pitchFamily="34" charset="0"/>
-                <a:ea typeface="Segoe UI" pitchFamily="34" charset="-122"/>
-                <a:cs typeface="Segoe UI" pitchFamily="34" charset="-120"/>
+                <a:latin typeface="Segoe UI" panose="020B0502040204020203" pitchFamily="34" charset="0"/>
+                <a:ea typeface="Segoe UI" panose="020B0502040204020203" pitchFamily="34" charset="-122"/>
+                <a:cs typeface="Segoe UI" panose="020B0502040204020203" pitchFamily="34" charset="-120"/>
               </a:rPr>
               <a:t>Perera G C M</a:t>
             </a:r>
@@ -2043,13 +1752,12 @@
             <a:avLst/>
           </a:prstGeom>
           <a:noFill/>
-          <a:ln/>
-        </p:spPr>
-        <p:txBody>
-          <a:bodyPr wrap="square" lIns="0" tIns="0" rIns="0" bIns="0" rtlCol="0" anchor="ctr"/>
-          <a:lstStyle/>
-          <a:p>
-            <a:pPr indent="0" marL="0">
+        </p:spPr>
+        <p:txBody>
+          <a:bodyPr wrap="square" lIns="0" tIns="0" rIns="0" bIns="0" rtlCol="0" anchor="ctr"/>
+          <a:lstStyle/>
+          <a:p>
+            <a:pPr marL="0" indent="0">
               <a:buNone/>
             </a:pPr>
             <a:r>
@@ -2057,23 +1765,20 @@
                 <a:solidFill>
                   <a:srgbClr val="8FA0FF"/>
                 </a:solidFill>
-                <a:latin typeface="Segoe UI" pitchFamily="34" charset="0"/>
-                <a:ea typeface="Segoe UI" pitchFamily="34" charset="-122"/>
-                <a:cs typeface="Segoe UI" pitchFamily="34" charset="-120"/>
+                <a:latin typeface="Segoe UI" panose="020B0502040204020203" pitchFamily="34" charset="0"/>
+                <a:ea typeface="Segoe UI" panose="020B0502040204020203" pitchFamily="34" charset="-122"/>
+                <a:cs typeface="Segoe UI" panose="020B0502040204020203" pitchFamily="34" charset="-120"/>
               </a:rPr>
               <a:t>EG/2021/4620   </a:t>
             </a:r>
-            <a:pPr indent="0" marL="0">
-              <a:buNone/>
-            </a:pPr>
             <a:r>
               <a:rPr lang="en-US" sz="1300" b="1" dirty="0">
                 <a:solidFill>
                   <a:srgbClr val="FFFFFF"/>
                 </a:solidFill>
-                <a:latin typeface="Segoe UI" pitchFamily="34" charset="0"/>
-                <a:ea typeface="Segoe UI" pitchFamily="34" charset="-122"/>
-                <a:cs typeface="Segoe UI" pitchFamily="34" charset="-120"/>
+                <a:latin typeface="Segoe UI" panose="020B0502040204020203" pitchFamily="34" charset="0"/>
+                <a:ea typeface="Segoe UI" panose="020B0502040204020203" pitchFamily="34" charset="-122"/>
+                <a:cs typeface="Segoe UI" panose="020B0502040204020203" pitchFamily="34" charset="-120"/>
               </a:rPr>
               <a:t>Kularathne MDYB</a:t>
             </a:r>
@@ -2096,13 +1801,12 @@
             <a:avLst/>
           </a:prstGeom>
           <a:noFill/>
-          <a:ln/>
-        </p:spPr>
-        <p:txBody>
-          <a:bodyPr wrap="square" lIns="0" tIns="0" rIns="0" bIns="0" rtlCol="0" anchor="ctr"/>
-          <a:lstStyle/>
-          <a:p>
-            <a:pPr indent="0" marL="0">
+        </p:spPr>
+        <p:txBody>
+          <a:bodyPr wrap="square" lIns="0" tIns="0" rIns="0" bIns="0" rtlCol="0" anchor="ctr"/>
+          <a:lstStyle/>
+          <a:p>
+            <a:pPr marL="0" indent="0">
               <a:buNone/>
             </a:pPr>
             <a:r>
@@ -2110,23 +1814,20 @@
                 <a:solidFill>
                   <a:srgbClr val="8FA0FF"/>
                 </a:solidFill>
-                <a:latin typeface="Segoe UI" pitchFamily="34" charset="0"/>
-                <a:ea typeface="Segoe UI" pitchFamily="34" charset="-122"/>
-                <a:cs typeface="Segoe UI" pitchFamily="34" charset="-120"/>
+                <a:latin typeface="Segoe UI" panose="020B0502040204020203" pitchFamily="34" charset="0"/>
+                <a:ea typeface="Segoe UI" panose="020B0502040204020203" pitchFamily="34" charset="-122"/>
+                <a:cs typeface="Segoe UI" panose="020B0502040204020203" pitchFamily="34" charset="-120"/>
               </a:rPr>
               <a:t>EG/2021/4710   </a:t>
             </a:r>
-            <a:pPr indent="0" marL="0">
-              <a:buNone/>
-            </a:pPr>
             <a:r>
               <a:rPr lang="en-US" sz="1300" b="1" dirty="0">
                 <a:solidFill>
                   <a:srgbClr val="FFFFFF"/>
                 </a:solidFill>
-                <a:latin typeface="Segoe UI" pitchFamily="34" charset="0"/>
-                <a:ea typeface="Segoe UI" pitchFamily="34" charset="-122"/>
-                <a:cs typeface="Segoe UI" pitchFamily="34" charset="-120"/>
+                <a:latin typeface="Segoe UI" panose="020B0502040204020203" pitchFamily="34" charset="0"/>
+                <a:ea typeface="Segoe UI" panose="020B0502040204020203" pitchFamily="34" charset="-122"/>
+                <a:cs typeface="Segoe UI" panose="020B0502040204020203" pitchFamily="34" charset="-120"/>
               </a:rPr>
               <a:t>Perera K P D N</a:t>
             </a:r>
@@ -2149,13 +1850,12 @@
             <a:avLst/>
           </a:prstGeom>
           <a:noFill/>
-          <a:ln/>
-        </p:spPr>
-        <p:txBody>
-          <a:bodyPr wrap="square" lIns="0" tIns="0" rIns="0" bIns="0" rtlCol="0" anchor="ctr"/>
-          <a:lstStyle/>
-          <a:p>
-            <a:pPr indent="0" marL="0">
+        </p:spPr>
+        <p:txBody>
+          <a:bodyPr wrap="square" lIns="0" tIns="0" rIns="0" bIns="0" rtlCol="0" anchor="ctr"/>
+          <a:lstStyle/>
+          <a:p>
+            <a:pPr marL="0" indent="0">
               <a:buNone/>
             </a:pPr>
             <a:r>
@@ -2163,23 +1863,20 @@
                 <a:solidFill>
                   <a:srgbClr val="8FA0FF"/>
                 </a:solidFill>
-                <a:latin typeface="Segoe UI" pitchFamily="34" charset="0"/>
-                <a:ea typeface="Segoe UI" pitchFamily="34" charset="-122"/>
-                <a:cs typeface="Segoe UI" pitchFamily="34" charset="-120"/>
+                <a:latin typeface="Segoe UI" panose="020B0502040204020203" pitchFamily="34" charset="0"/>
+                <a:ea typeface="Segoe UI" panose="020B0502040204020203" pitchFamily="34" charset="-122"/>
+                <a:cs typeface="Segoe UI" panose="020B0502040204020203" pitchFamily="34" charset="-120"/>
               </a:rPr>
               <a:t>EG/2021/4828   </a:t>
             </a:r>
-            <a:pPr indent="0" marL="0">
-              <a:buNone/>
-            </a:pPr>
             <a:r>
               <a:rPr lang="en-US" sz="1300" b="1" dirty="0">
                 <a:solidFill>
                   <a:srgbClr val="FFFFFF"/>
                 </a:solidFill>
-                <a:latin typeface="Segoe UI" pitchFamily="34" charset="0"/>
-                <a:ea typeface="Segoe UI" pitchFamily="34" charset="-122"/>
-                <a:cs typeface="Segoe UI" pitchFamily="34" charset="-120"/>
+                <a:latin typeface="Segoe UI" panose="020B0502040204020203" pitchFamily="34" charset="0"/>
+                <a:ea typeface="Segoe UI" panose="020B0502040204020203" pitchFamily="34" charset="-122"/>
+                <a:cs typeface="Segoe UI" panose="020B0502040204020203" pitchFamily="34" charset="-120"/>
               </a:rPr>
               <a:t>Thejana BPGL</a:t>
             </a:r>
@@ -2202,13 +1899,12 @@
             <a:avLst/>
           </a:prstGeom>
           <a:noFill/>
-          <a:ln/>
-        </p:spPr>
-        <p:txBody>
-          <a:bodyPr wrap="square" lIns="0" tIns="0" rIns="0" bIns="0" rtlCol="0" anchor="ctr"/>
-          <a:lstStyle/>
-          <a:p>
-            <a:pPr indent="0" marL="0">
+        </p:spPr>
+        <p:txBody>
+          <a:bodyPr wrap="square" lIns="0" tIns="0" rIns="0" bIns="0" rtlCol="0" anchor="ctr"/>
+          <a:lstStyle/>
+          <a:p>
+            <a:pPr marL="0" indent="0">
               <a:buNone/>
             </a:pPr>
             <a:r>
@@ -2216,23 +1912,20 @@
                 <a:solidFill>
                   <a:srgbClr val="8FA0FF"/>
                 </a:solidFill>
-                <a:latin typeface="Segoe UI" pitchFamily="34" charset="0"/>
-                <a:ea typeface="Segoe UI" pitchFamily="34" charset="-122"/>
-                <a:cs typeface="Segoe UI" pitchFamily="34" charset="-120"/>
+                <a:latin typeface="Segoe UI" panose="020B0502040204020203" pitchFamily="34" charset="0"/>
+                <a:ea typeface="Segoe UI" panose="020B0502040204020203" pitchFamily="34" charset="-122"/>
+                <a:cs typeface="Segoe UI" panose="020B0502040204020203" pitchFamily="34" charset="-120"/>
               </a:rPr>
               <a:t>EG/2021/4701   </a:t>
             </a:r>
-            <a:pPr indent="0" marL="0">
-              <a:buNone/>
-            </a:pPr>
             <a:r>
               <a:rPr lang="en-US" sz="1300" b="1" dirty="0">
                 <a:solidFill>
                   <a:srgbClr val="FFFFFF"/>
                 </a:solidFill>
-                <a:latin typeface="Segoe UI" pitchFamily="34" charset="0"/>
-                <a:ea typeface="Segoe UI" pitchFamily="34" charset="-122"/>
-                <a:cs typeface="Segoe UI" pitchFamily="34" charset="-120"/>
+                <a:latin typeface="Segoe UI" panose="020B0502040204020203" pitchFamily="34" charset="0"/>
+                <a:ea typeface="Segoe UI" panose="020B0502040204020203" pitchFamily="34" charset="-122"/>
+                <a:cs typeface="Segoe UI" panose="020B0502040204020203" pitchFamily="34" charset="-120"/>
               </a:rPr>
               <a:t>Pabasara PMGT</a:t>
             </a:r>
@@ -2255,13 +1948,12 @@
             <a:avLst/>
           </a:prstGeom>
           <a:noFill/>
-          <a:ln/>
-        </p:spPr>
-        <p:txBody>
-          <a:bodyPr wrap="square" lIns="0" tIns="0" rIns="0" bIns="0" rtlCol="0" anchor="ctr"/>
-          <a:lstStyle/>
-          <a:p>
-            <a:pPr indent="0" marL="0">
+        </p:spPr>
+        <p:txBody>
+          <a:bodyPr wrap="square" lIns="0" tIns="0" rIns="0" bIns="0" rtlCol="0" anchor="ctr"/>
+          <a:lstStyle/>
+          <a:p>
+            <a:pPr marL="0" indent="0">
               <a:buNone/>
             </a:pPr>
             <a:r>
@@ -2269,23 +1961,20 @@
                 <a:solidFill>
                   <a:srgbClr val="8FA0FF"/>
                 </a:solidFill>
-                <a:latin typeface="Segoe UI" pitchFamily="34" charset="0"/>
-                <a:ea typeface="Segoe UI" pitchFamily="34" charset="-122"/>
-                <a:cs typeface="Segoe UI" pitchFamily="34" charset="-120"/>
+                <a:latin typeface="Segoe UI" panose="020B0502040204020203" pitchFamily="34" charset="0"/>
+                <a:ea typeface="Segoe UI" panose="020B0502040204020203" pitchFamily="34" charset="-122"/>
+                <a:cs typeface="Segoe UI" panose="020B0502040204020203" pitchFamily="34" charset="-120"/>
               </a:rPr>
               <a:t>EG/2021/4770   </a:t>
             </a:r>
-            <a:pPr indent="0" marL="0">
-              <a:buNone/>
-            </a:pPr>
             <a:r>
               <a:rPr lang="en-US" sz="1300" b="1" dirty="0">
                 <a:solidFill>
                   <a:srgbClr val="FFFFFF"/>
                 </a:solidFill>
-                <a:latin typeface="Segoe UI" pitchFamily="34" charset="0"/>
-                <a:ea typeface="Segoe UI" pitchFamily="34" charset="-122"/>
-                <a:cs typeface="Segoe UI" pitchFamily="34" charset="-120"/>
+                <a:latin typeface="Segoe UI" panose="020B0502040204020203" pitchFamily="34" charset="0"/>
+                <a:ea typeface="Segoe UI" panose="020B0502040204020203" pitchFamily="34" charset="-122"/>
+                <a:cs typeface="Segoe UI" panose="020B0502040204020203" pitchFamily="34" charset="-120"/>
               </a:rPr>
               <a:t>Sachinthana K AD</a:t>
             </a:r>
@@ -2308,13 +1997,12 @@
             <a:avLst/>
           </a:prstGeom>
           <a:noFill/>
-          <a:ln/>
-        </p:spPr>
-        <p:txBody>
-          <a:bodyPr wrap="square" lIns="0" tIns="0" rIns="0" bIns="0" rtlCol="0" anchor="ctr"/>
-          <a:lstStyle/>
-          <a:p>
-            <a:pPr indent="0" marL="0">
+        </p:spPr>
+        <p:txBody>
+          <a:bodyPr wrap="square" lIns="0" tIns="0" rIns="0" bIns="0" rtlCol="0" anchor="ctr"/>
+          <a:lstStyle/>
+          <a:p>
+            <a:pPr marL="0" indent="0">
               <a:buNone/>
             </a:pPr>
             <a:r>
@@ -2322,9 +2010,9 @@
                 <a:solidFill>
                   <a:srgbClr val="C9D1FF"/>
                 </a:solidFill>
-                <a:latin typeface="Segoe UI" pitchFamily="34" charset="0"/>
-                <a:ea typeface="Segoe UI" pitchFamily="34" charset="-122"/>
-                <a:cs typeface="Segoe UI" pitchFamily="34" charset="-120"/>
+                <a:latin typeface="Segoe UI" panose="020B0502040204020203" pitchFamily="34" charset="0"/>
+                <a:ea typeface="Segoe UI" panose="020B0502040204020203" pitchFamily="34" charset="-122"/>
+                <a:cs typeface="Segoe UI" panose="020B0502040204020203" pitchFamily="34" charset="-120"/>
               </a:rPr>
               <a:t>Department of Electrical and Information Engineering  ·  University of Ruhuna</a:t>
             </a:r>
@@ -2342,7 +2030,7 @@
 
 <file path=ppt/slides/slide10.xml><?xml version="1.0" encoding="utf-8"?>
 <p:sld xmlns:a="http://schemas.openxmlformats.org/drawingml/2006/main" xmlns:r="http://schemas.openxmlformats.org/officeDocument/2006/relationships" xmlns:p="http://schemas.openxmlformats.org/presentationml/2006/main">
-  <p:cSld name="Slide 10">
+  <p:cSld>
     <p:bg>
       <p:bgPr>
         <a:blipFill dpi="0" rotWithShape="1">
@@ -2561,13 +2249,12 @@
             <a:avLst/>
           </a:prstGeom>
           <a:noFill/>
-          <a:ln/>
-        </p:spPr>
-        <p:txBody>
-          <a:bodyPr wrap="square" lIns="0" tIns="0" rIns="0" bIns="0" rtlCol="0" anchor="ctr"/>
-          <a:lstStyle/>
-          <a:p>
-            <a:pPr indent="0" marL="0">
+        </p:spPr>
+        <p:txBody>
+          <a:bodyPr wrap="square" lIns="0" tIns="0" rIns="0" bIns="0" rtlCol="0" anchor="ctr"/>
+          <a:lstStyle/>
+          <a:p>
+            <a:pPr marL="0" indent="0">
               <a:buNone/>
             </a:pPr>
             <a:r>
@@ -2575,9 +2262,9 @@
                 <a:solidFill>
                   <a:srgbClr val="FFFFFF"/>
                 </a:solidFill>
-                <a:latin typeface="Segoe UI" pitchFamily="34" charset="0"/>
-                <a:ea typeface="Segoe UI" pitchFamily="34" charset="-122"/>
-                <a:cs typeface="Segoe UI" pitchFamily="34" charset="-120"/>
+                <a:latin typeface="Segoe UI" panose="020B0502040204020203" pitchFamily="34" charset="0"/>
+                <a:ea typeface="Segoe UI" panose="020B0502040204020203" pitchFamily="34" charset="-122"/>
+                <a:cs typeface="Segoe UI" panose="020B0502040204020203" pitchFamily="34" charset="-120"/>
               </a:rPr>
               <a:t>Thank you</a:t>
             </a:r>
@@ -2600,13 +2287,12 @@
             <a:avLst/>
           </a:prstGeom>
           <a:noFill/>
-          <a:ln/>
-        </p:spPr>
-        <p:txBody>
-          <a:bodyPr wrap="square" lIns="0" tIns="0" rIns="0" bIns="0" rtlCol="0" anchor="ctr"/>
-          <a:lstStyle/>
-          <a:p>
-            <a:pPr indent="0" marL="0">
+        </p:spPr>
+        <p:txBody>
+          <a:bodyPr wrap="square" lIns="0" tIns="0" rIns="0" bIns="0" rtlCol="0" anchor="ctr"/>
+          <a:lstStyle/>
+          <a:p>
+            <a:pPr marL="0" indent="0">
               <a:buNone/>
             </a:pPr>
             <a:r>
@@ -2614,9 +2300,9 @@
                 <a:solidFill>
                   <a:srgbClr val="8FA0FF"/>
                 </a:solidFill>
-                <a:latin typeface="Segoe UI Light" pitchFamily="34" charset="0"/>
-                <a:ea typeface="Segoe UI Light" pitchFamily="34" charset="-122"/>
-                <a:cs typeface="Segoe UI Light" pitchFamily="34" charset="-120"/>
+                <a:latin typeface="Segoe UI Light" panose="020B0502040204020203" pitchFamily="34" charset="0"/>
+                <a:ea typeface="Segoe UI Light" panose="020B0502040204020203" pitchFamily="34" charset="-122"/>
+                <a:cs typeface="Segoe UI Light" panose="020B0502040204020203" pitchFamily="34" charset="-120"/>
               </a:rPr>
               <a:t>Questions and discussion</a:t>
             </a:r>
@@ -2639,13 +2325,12 @@
             <a:avLst/>
           </a:prstGeom>
           <a:noFill/>
-          <a:ln/>
-        </p:spPr>
-        <p:txBody>
-          <a:bodyPr wrap="square" lIns="0" tIns="0" rIns="0" bIns="0" rtlCol="0" anchor="ctr"/>
-          <a:lstStyle/>
-          <a:p>
-            <a:pPr indent="0" marL="0">
+        </p:spPr>
+        <p:txBody>
+          <a:bodyPr wrap="square" lIns="0" tIns="0" rIns="0" bIns="0" rtlCol="0" anchor="ctr"/>
+          <a:lstStyle/>
+          <a:p>
+            <a:pPr marL="0" indent="0">
               <a:buNone/>
             </a:pPr>
             <a:r>
@@ -2653,9 +2338,9 @@
                 <a:solidFill>
                   <a:srgbClr val="C9D1FF"/>
                 </a:solidFill>
-                <a:latin typeface="Segoe UI" pitchFamily="34" charset="0"/>
-                <a:ea typeface="Segoe UI" pitchFamily="34" charset="-122"/>
-                <a:cs typeface="Segoe UI" pitchFamily="34" charset="-120"/>
+                <a:latin typeface="Segoe UI" panose="020B0502040204020203" pitchFamily="34" charset="0"/>
+                <a:ea typeface="Segoe UI" panose="020B0502040204020203" pitchFamily="34" charset="-122"/>
+                <a:cs typeface="Segoe UI" panose="020B0502040204020203" pitchFamily="34" charset="-120"/>
               </a:rPr>
               <a:t>REOAGMS  ·  EC8208 Software Architecture  ·  University of Ruhuna</a:t>
             </a:r>
@@ -2673,7 +2358,7 @@
 
 <file path=ppt/slides/slide2.xml><?xml version="1.0" encoding="utf-8"?>
 <p:sld xmlns:a="http://schemas.openxmlformats.org/drawingml/2006/main" xmlns:r="http://schemas.openxmlformats.org/officeDocument/2006/relationships" xmlns:p="http://schemas.openxmlformats.org/presentationml/2006/main">
-  <p:cSld name="Slide 2">
+  <p:cSld>
     <p:bg>
       <p:bgPr>
         <a:blipFill dpi="0" rotWithShape="1">
@@ -2892,25 +2577,24 @@
             <a:avLst/>
           </a:prstGeom>
           <a:noFill/>
-          <a:ln/>
-        </p:spPr>
-        <p:txBody>
-          <a:bodyPr wrap="square" lIns="0" tIns="0" rIns="0" bIns="0" rtlCol="0" anchor="ctr"/>
-          <a:lstStyle/>
-          <a:p>
-            <a:pPr indent="0" marL="0">
-              <a:buNone/>
-            </a:pPr>
-            <a:r>
-              <a:rPr lang="en-US" sz="1050" spc="300" kern="0" dirty="0">
+        </p:spPr>
+        <p:txBody>
+          <a:bodyPr wrap="square" lIns="0" tIns="0" rIns="0" bIns="0" rtlCol="0" anchor="ctr"/>
+          <a:lstStyle/>
+          <a:p>
+            <a:pPr marL="0" indent="0">
+              <a:buNone/>
+            </a:pPr>
+            <a:r>
+              <a:rPr lang="en-US" sz="1050" kern="0" spc="300" dirty="0">
                 <a:solidFill>
                   <a:srgbClr val="8FA0FF"/>
                 </a:solidFill>
-                <a:latin typeface="Segoe UI Semibold" pitchFamily="34" charset="0"/>
-                <a:ea typeface="Segoe UI Semibold" pitchFamily="34" charset="-122"/>
-                <a:cs typeface="Segoe UI Semibold" pitchFamily="34" charset="-120"/>
-              </a:rPr>
-              <a:t>02 · CHARITH · ARCHITECTURE</a:t>
+                <a:latin typeface="Segoe UI Semibold" panose="020B0702040204020203" pitchFamily="34" charset="0"/>
+                <a:ea typeface="Segoe UI Semibold" panose="020B0702040204020203" pitchFamily="34" charset="-122"/>
+                <a:cs typeface="Segoe UI Semibold" panose="020B0702040204020203" pitchFamily="34" charset="-120"/>
+              </a:rPr>
+              <a:t>02 · ARCHITECTURE</a:t>
             </a:r>
             <a:endParaRPr lang="en-US" sz="1050" dirty="0"/>
           </a:p>
@@ -2931,13 +2615,12 @@
             <a:avLst/>
           </a:prstGeom>
           <a:noFill/>
-          <a:ln/>
-        </p:spPr>
-        <p:txBody>
-          <a:bodyPr wrap="square" lIns="0" tIns="0" rIns="0" bIns="0" rtlCol="0" anchor="ctr"/>
-          <a:lstStyle/>
-          <a:p>
-            <a:pPr indent="0" marL="0">
+        </p:spPr>
+        <p:txBody>
+          <a:bodyPr wrap="square" lIns="0" tIns="0" rIns="0" bIns="0" rtlCol="0" anchor="ctr"/>
+          <a:lstStyle/>
+          <a:p>
+            <a:pPr marL="0" indent="0">
               <a:buNone/>
             </a:pPr>
             <a:r>
@@ -2945,23 +2628,20 @@
                 <a:solidFill>
                   <a:srgbClr val="FFFFFF"/>
                 </a:solidFill>
-                <a:latin typeface="Segoe UI Light" pitchFamily="34" charset="0"/>
-                <a:ea typeface="Segoe UI Light" pitchFamily="34" charset="-122"/>
-                <a:cs typeface="Segoe UI Light" pitchFamily="34" charset="-120"/>
+                <a:latin typeface="Segoe UI Light" panose="020B0502040204020203" pitchFamily="34" charset="0"/>
+                <a:ea typeface="Segoe UI Light" panose="020B0502040204020203" pitchFamily="34" charset="-122"/>
+                <a:cs typeface="Segoe UI Light" panose="020B0502040204020203" pitchFamily="34" charset="-120"/>
               </a:rPr>
               <a:t>One gateway, </a:t>
             </a:r>
-            <a:pPr indent="0" marL="0">
-              <a:buNone/>
-            </a:pPr>
             <a:r>
               <a:rPr lang="en-US" sz="3200" dirty="0">
                 <a:solidFill>
                   <a:srgbClr val="8FA0FF"/>
                 </a:solidFill>
-                <a:latin typeface="Segoe UI Light" pitchFamily="34" charset="0"/>
-                <a:ea typeface="Segoe UI Light" pitchFamily="34" charset="-122"/>
-                <a:cs typeface="Segoe UI Light" pitchFamily="34" charset="-120"/>
+                <a:latin typeface="Segoe UI Light" panose="020B0502040204020203" pitchFamily="34" charset="0"/>
+                <a:ea typeface="Segoe UI Light" panose="020B0502040204020203" pitchFamily="34" charset="-122"/>
+                <a:cs typeface="Segoe UI Light" panose="020B0502040204020203" pitchFamily="34" charset="-120"/>
               </a:rPr>
               <a:t>six independent services</a:t>
             </a:r>
@@ -3009,13 +2689,12 @@
             <a:avLst/>
           </a:prstGeom>
           <a:noFill/>
-          <a:ln/>
-        </p:spPr>
-        <p:txBody>
-          <a:bodyPr wrap="square" lIns="0" tIns="0" rIns="0" bIns="0" rtlCol="0" anchor="ctr"/>
-          <a:lstStyle/>
-          <a:p>
-            <a:pPr indent="0" marL="0">
+        </p:spPr>
+        <p:txBody>
+          <a:bodyPr wrap="square" lIns="0" tIns="0" rIns="0" bIns="0" rtlCol="0" anchor="ctr"/>
+          <a:lstStyle/>
+          <a:p>
+            <a:pPr marL="0" indent="0">
               <a:buNone/>
             </a:pPr>
             <a:r>
@@ -3023,9 +2702,9 @@
                 <a:solidFill>
                   <a:srgbClr val="C9D1FF"/>
                 </a:solidFill>
-                <a:latin typeface="Segoe UI" pitchFamily="34" charset="0"/>
-                <a:ea typeface="Segoe UI" pitchFamily="34" charset="-122"/>
-                <a:cs typeface="Segoe UI" pitchFamily="34" charset="-120"/>
+                <a:latin typeface="Segoe UI" panose="020B0502040204020203" pitchFamily="34" charset="0"/>
+                <a:ea typeface="Segoe UI" panose="020B0502040204020203" pitchFamily="34" charset="-122"/>
+                <a:cs typeface="Segoe UI" panose="020B0502040204020203" pitchFamily="34" charset="-120"/>
               </a:rPr>
               <a:t>EC8208 Software Architecture  ·  University of Ruhuna</a:t>
             </a:r>
@@ -3048,13 +2727,12 @@
             <a:avLst/>
           </a:prstGeom>
           <a:noFill/>
-          <a:ln/>
-        </p:spPr>
-        <p:txBody>
-          <a:bodyPr wrap="square" lIns="0" tIns="0" rIns="0" bIns="0" rtlCol="0" anchor="ctr"/>
-          <a:lstStyle/>
-          <a:p>
-            <a:pPr algn="r" indent="0" marL="0">
+        </p:spPr>
+        <p:txBody>
+          <a:bodyPr wrap="square" lIns="0" tIns="0" rIns="0" bIns="0" rtlCol="0" anchor="ctr"/>
+          <a:lstStyle/>
+          <a:p>
+            <a:pPr marL="0" indent="0" algn="r">
               <a:buNone/>
             </a:pPr>
             <a:r>
@@ -3062,9 +2740,9 @@
                 <a:solidFill>
                   <a:srgbClr val="C9D1FF"/>
                 </a:solidFill>
-                <a:latin typeface="Segoe UI" pitchFamily="34" charset="0"/>
-                <a:ea typeface="Segoe UI" pitchFamily="34" charset="-122"/>
-                <a:cs typeface="Segoe UI" pitchFamily="34" charset="-120"/>
+                <a:latin typeface="Segoe UI" panose="020B0502040204020203" pitchFamily="34" charset="0"/>
+                <a:ea typeface="Segoe UI" panose="020B0502040204020203" pitchFamily="34" charset="-122"/>
+                <a:cs typeface="Segoe UI" panose="020B0502040204020203" pitchFamily="34" charset="-120"/>
               </a:rPr>
               <a:t>02  ·  0:15–1:13</a:t>
             </a:r>
@@ -3118,13 +2796,12 @@
             <a:avLst/>
           </a:prstGeom>
           <a:noFill/>
-          <a:ln/>
-        </p:spPr>
-        <p:txBody>
-          <a:bodyPr wrap="square" lIns="0" tIns="0" rIns="0" bIns="0" rtlCol="0" anchor="ctr"/>
-          <a:lstStyle/>
-          <a:p>
-            <a:pPr algn="ctr" indent="0" marL="0">
+        </p:spPr>
+        <p:txBody>
+          <a:bodyPr wrap="square" lIns="0" tIns="0" rIns="0" bIns="0" rtlCol="0" anchor="ctr"/>
+          <a:lstStyle/>
+          <a:p>
+            <a:pPr marL="0" indent="0" algn="ctr">
               <a:buNone/>
             </a:pPr>
             <a:r>
@@ -3132,9 +2809,9 @@
                 <a:solidFill>
                   <a:srgbClr val="FFFFFF"/>
                 </a:solidFill>
-                <a:latin typeface="Segoe UI" pitchFamily="34" charset="0"/>
-                <a:ea typeface="Segoe UI" pitchFamily="34" charset="-122"/>
-                <a:cs typeface="Segoe UI" pitchFamily="34" charset="-120"/>
+                <a:latin typeface="Segoe UI" panose="020B0502040204020203" pitchFamily="34" charset="0"/>
+                <a:ea typeface="Segoe UI" panose="020B0502040204020203" pitchFamily="34" charset="-122"/>
+                <a:cs typeface="Segoe UI" panose="020B0502040204020203" pitchFamily="34" charset="-120"/>
               </a:rPr>
               <a:t>React console  ·  nginx  ·  live updates over WebSocket</a:t>
             </a:r>
@@ -3184,13 +2861,12 @@
             <a:avLst/>
           </a:prstGeom>
           <a:noFill/>
-          <a:ln/>
-        </p:spPr>
-        <p:txBody>
-          <a:bodyPr wrap="square" lIns="0" tIns="0" rIns="0" bIns="0" rtlCol="0" anchor="ctr"/>
-          <a:lstStyle/>
-          <a:p>
-            <a:pPr algn="ctr" indent="0" marL="0">
+        </p:spPr>
+        <p:txBody>
+          <a:bodyPr wrap="square" lIns="0" tIns="0" rIns="0" bIns="0" rtlCol="0" anchor="ctr"/>
+          <a:lstStyle/>
+          <a:p>
+            <a:pPr marL="0" indent="0" algn="ctr">
               <a:buNone/>
             </a:pPr>
             <a:r>
@@ -3198,9 +2874,9 @@
                 <a:solidFill>
                   <a:srgbClr val="FFFFFF"/>
                 </a:solidFill>
-                <a:latin typeface="Segoe UI Semibold" pitchFamily="34" charset="0"/>
-                <a:ea typeface="Segoe UI Semibold" pitchFamily="34" charset="-122"/>
-                <a:cs typeface="Segoe UI Semibold" pitchFamily="34" charset="-120"/>
+                <a:latin typeface="Segoe UI Semibold" panose="020B0702040204020203" pitchFamily="34" charset="0"/>
+                <a:ea typeface="Segoe UI Semibold" panose="020B0702040204020203" pitchFamily="34" charset="-122"/>
+                <a:cs typeface="Segoe UI Semibold" panose="020B0702040204020203" pitchFamily="34" charset="-120"/>
               </a:rPr>
               <a:t>API Gateway  ·  JWT validation  ·  role policy</a:t>
             </a:r>
@@ -3254,13 +2930,12 @@
             <a:avLst/>
           </a:prstGeom>
           <a:noFill/>
-          <a:ln/>
-        </p:spPr>
-        <p:txBody>
-          <a:bodyPr wrap="square" lIns="0" tIns="0" rIns="0" bIns="0" rtlCol="0" anchor="ctr"/>
-          <a:lstStyle/>
-          <a:p>
-            <a:pPr algn="ctr" indent="0" marL="0">
+        </p:spPr>
+        <p:txBody>
+          <a:bodyPr wrap="square" lIns="0" tIns="0" rIns="0" bIns="0" rtlCol="0" anchor="ctr"/>
+          <a:lstStyle/>
+          <a:p>
+            <a:pPr marL="0" indent="0" algn="ctr">
               <a:buNone/>
             </a:pPr>
             <a:r>
@@ -3268,9 +2943,9 @@
                 <a:solidFill>
                   <a:srgbClr val="FFFFFF"/>
                 </a:solidFill>
-                <a:latin typeface="Segoe UI Semibold" pitchFamily="34" charset="0"/>
-                <a:ea typeface="Segoe UI Semibold" pitchFamily="34" charset="-122"/>
-                <a:cs typeface="Segoe UI Semibold" pitchFamily="34" charset="-120"/>
+                <a:latin typeface="Segoe UI Semibold" panose="020B0702040204020203" pitchFamily="34" charset="0"/>
+                <a:ea typeface="Segoe UI Semibold" panose="020B0702040204020203" pitchFamily="34" charset="-122"/>
+                <a:cs typeface="Segoe UI Semibold" panose="020B0702040204020203" pitchFamily="34" charset="-120"/>
               </a:rPr>
               <a:t>Identity</a:t>
             </a:r>
@@ -3293,13 +2968,12 @@
             <a:avLst/>
           </a:prstGeom>
           <a:noFill/>
-          <a:ln/>
-        </p:spPr>
-        <p:txBody>
-          <a:bodyPr wrap="square" lIns="0" tIns="0" rIns="0" bIns="0" rtlCol="0" anchor="ctr"/>
-          <a:lstStyle/>
-          <a:p>
-            <a:pPr algn="ctr" indent="0" marL="0">
+        </p:spPr>
+        <p:txBody>
+          <a:bodyPr wrap="square" lIns="0" tIns="0" rIns="0" bIns="0" rtlCol="0" anchor="ctr"/>
+          <a:lstStyle/>
+          <a:p>
+            <a:pPr marL="0" indent="0" algn="ctr">
               <a:buNone/>
             </a:pPr>
             <a:r>
@@ -3307,9 +2981,9 @@
                 <a:solidFill>
                   <a:srgbClr val="C9D1FF"/>
                 </a:solidFill>
-                <a:latin typeface="Segoe UI" pitchFamily="34" charset="0"/>
-                <a:ea typeface="Segoe UI" pitchFamily="34" charset="-122"/>
-                <a:cs typeface="Segoe UI" pitchFamily="34" charset="-120"/>
+                <a:latin typeface="Segoe UI" panose="020B0502040204020203" pitchFamily="34" charset="0"/>
+                <a:ea typeface="Segoe UI" panose="020B0502040204020203" pitchFamily="34" charset="-122"/>
+                <a:cs typeface="Segoe UI" panose="020B0502040204020203" pitchFamily="34" charset="-120"/>
               </a:rPr>
               <a:t>PostgreSQL</a:t>
             </a:r>
@@ -3363,13 +3037,12 @@
             <a:avLst/>
           </a:prstGeom>
           <a:noFill/>
-          <a:ln/>
-        </p:spPr>
-        <p:txBody>
-          <a:bodyPr wrap="square" lIns="0" tIns="0" rIns="0" bIns="0" rtlCol="0" anchor="ctr"/>
-          <a:lstStyle/>
-          <a:p>
-            <a:pPr algn="ctr" indent="0" marL="0">
+        </p:spPr>
+        <p:txBody>
+          <a:bodyPr wrap="square" lIns="0" tIns="0" rIns="0" bIns="0" rtlCol="0" anchor="ctr"/>
+          <a:lstStyle/>
+          <a:p>
+            <a:pPr marL="0" indent="0" algn="ctr">
               <a:buNone/>
             </a:pPr>
             <a:r>
@@ -3377,9 +3050,9 @@
                 <a:solidFill>
                   <a:srgbClr val="FFFFFF"/>
                 </a:solidFill>
-                <a:latin typeface="Segoe UI Semibold" pitchFamily="34" charset="0"/>
-                <a:ea typeface="Segoe UI Semibold" pitchFamily="34" charset="-122"/>
-                <a:cs typeface="Segoe UI Semibold" pitchFamily="34" charset="-120"/>
+                <a:latin typeface="Segoe UI Semibold" panose="020B0702040204020203" pitchFamily="34" charset="0"/>
+                <a:ea typeface="Segoe UI Semibold" panose="020B0702040204020203" pitchFamily="34" charset="-122"/>
+                <a:cs typeface="Segoe UI Semibold" panose="020B0702040204020203" pitchFamily="34" charset="-120"/>
               </a:rPr>
               <a:t>Asset</a:t>
             </a:r>
@@ -3402,13 +3075,12 @@
             <a:avLst/>
           </a:prstGeom>
           <a:noFill/>
-          <a:ln/>
-        </p:spPr>
-        <p:txBody>
-          <a:bodyPr wrap="square" lIns="0" tIns="0" rIns="0" bIns="0" rtlCol="0" anchor="ctr"/>
-          <a:lstStyle/>
-          <a:p>
-            <a:pPr algn="ctr" indent="0" marL="0">
+        </p:spPr>
+        <p:txBody>
+          <a:bodyPr wrap="square" lIns="0" tIns="0" rIns="0" bIns="0" rtlCol="0" anchor="ctr"/>
+          <a:lstStyle/>
+          <a:p>
+            <a:pPr marL="0" indent="0" algn="ctr">
               <a:buNone/>
             </a:pPr>
             <a:r>
@@ -3416,9 +3088,9 @@
                 <a:solidFill>
                   <a:srgbClr val="C9D1FF"/>
                 </a:solidFill>
-                <a:latin typeface="Segoe UI" pitchFamily="34" charset="0"/>
-                <a:ea typeface="Segoe UI" pitchFamily="34" charset="-122"/>
-                <a:cs typeface="Segoe UI" pitchFamily="34" charset="-120"/>
+                <a:latin typeface="Segoe UI" panose="020B0502040204020203" pitchFamily="34" charset="0"/>
+                <a:ea typeface="Segoe UI" panose="020B0502040204020203" pitchFamily="34" charset="-122"/>
+                <a:cs typeface="Segoe UI" panose="020B0502040204020203" pitchFamily="34" charset="-120"/>
               </a:rPr>
               <a:t>PostgreSQL</a:t>
             </a:r>
@@ -3472,13 +3144,12 @@
             <a:avLst/>
           </a:prstGeom>
           <a:noFill/>
-          <a:ln/>
-        </p:spPr>
-        <p:txBody>
-          <a:bodyPr wrap="square" lIns="0" tIns="0" rIns="0" bIns="0" rtlCol="0" anchor="ctr"/>
-          <a:lstStyle/>
-          <a:p>
-            <a:pPr algn="ctr" indent="0" marL="0">
+        </p:spPr>
+        <p:txBody>
+          <a:bodyPr wrap="square" lIns="0" tIns="0" rIns="0" bIns="0" rtlCol="0" anchor="ctr"/>
+          <a:lstStyle/>
+          <a:p>
+            <a:pPr marL="0" indent="0" algn="ctr">
               <a:buNone/>
             </a:pPr>
             <a:r>
@@ -3486,9 +3157,9 @@
                 <a:solidFill>
                   <a:srgbClr val="FFFFFF"/>
                 </a:solidFill>
-                <a:latin typeface="Segoe UI Semibold" pitchFamily="34" charset="0"/>
-                <a:ea typeface="Segoe UI Semibold" pitchFamily="34" charset="-122"/>
-                <a:cs typeface="Segoe UI Semibold" pitchFamily="34" charset="-120"/>
+                <a:latin typeface="Segoe UI Semibold" panose="020B0702040204020203" pitchFamily="34" charset="0"/>
+                <a:ea typeface="Segoe UI Semibold" panose="020B0702040204020203" pitchFamily="34" charset="-122"/>
+                <a:cs typeface="Segoe UI Semibold" panose="020B0702040204020203" pitchFamily="34" charset="-120"/>
               </a:rPr>
               <a:t>Monitoring</a:t>
             </a:r>
@@ -3511,13 +3182,12 @@
             <a:avLst/>
           </a:prstGeom>
           <a:noFill/>
-          <a:ln/>
-        </p:spPr>
-        <p:txBody>
-          <a:bodyPr wrap="square" lIns="0" tIns="0" rIns="0" bIns="0" rtlCol="0" anchor="ctr"/>
-          <a:lstStyle/>
-          <a:p>
-            <a:pPr algn="ctr" indent="0" marL="0">
+        </p:spPr>
+        <p:txBody>
+          <a:bodyPr wrap="square" lIns="0" tIns="0" rIns="0" bIns="0" rtlCol="0" anchor="ctr"/>
+          <a:lstStyle/>
+          <a:p>
+            <a:pPr marL="0" indent="0" algn="ctr">
               <a:buNone/>
             </a:pPr>
             <a:r>
@@ -3525,9 +3195,9 @@
                 <a:solidFill>
                   <a:srgbClr val="C9D1FF"/>
                 </a:solidFill>
-                <a:latin typeface="Segoe UI" pitchFamily="34" charset="0"/>
-                <a:ea typeface="Segoe UI" pitchFamily="34" charset="-122"/>
-                <a:cs typeface="Segoe UI" pitchFamily="34" charset="-120"/>
+                <a:latin typeface="Segoe UI" panose="020B0502040204020203" pitchFamily="34" charset="0"/>
+                <a:ea typeface="Segoe UI" panose="020B0502040204020203" pitchFamily="34" charset="-122"/>
+                <a:cs typeface="Segoe UI" panose="020B0502040204020203" pitchFamily="34" charset="-120"/>
               </a:rPr>
               <a:t>PostgreSQL</a:t>
             </a:r>
@@ -3581,13 +3251,12 @@
             <a:avLst/>
           </a:prstGeom>
           <a:noFill/>
-          <a:ln/>
-        </p:spPr>
-        <p:txBody>
-          <a:bodyPr wrap="square" lIns="0" tIns="0" rIns="0" bIns="0" rtlCol="0" anchor="ctr"/>
-          <a:lstStyle/>
-          <a:p>
-            <a:pPr algn="ctr" indent="0" marL="0">
+        </p:spPr>
+        <p:txBody>
+          <a:bodyPr wrap="square" lIns="0" tIns="0" rIns="0" bIns="0" rtlCol="0" anchor="ctr"/>
+          <a:lstStyle/>
+          <a:p>
+            <a:pPr marL="0" indent="0" algn="ctr">
               <a:buNone/>
             </a:pPr>
             <a:r>
@@ -3595,9 +3264,9 @@
                 <a:solidFill>
                   <a:srgbClr val="FFFFFF"/>
                 </a:solidFill>
-                <a:latin typeface="Segoe UI Semibold" pitchFamily="34" charset="0"/>
-                <a:ea typeface="Segoe UI Semibold" pitchFamily="34" charset="-122"/>
-                <a:cs typeface="Segoe UI Semibold" pitchFamily="34" charset="-120"/>
+                <a:latin typeface="Segoe UI Semibold" panose="020B0702040204020203" pitchFamily="34" charset="0"/>
+                <a:ea typeface="Segoe UI Semibold" panose="020B0702040204020203" pitchFamily="34" charset="-122"/>
+                <a:cs typeface="Segoe UI Semibold" panose="020B0702040204020203" pitchFamily="34" charset="-120"/>
               </a:rPr>
               <a:t>Maintenance</a:t>
             </a:r>
@@ -3620,13 +3289,12 @@
             <a:avLst/>
           </a:prstGeom>
           <a:noFill/>
-          <a:ln/>
-        </p:spPr>
-        <p:txBody>
-          <a:bodyPr wrap="square" lIns="0" tIns="0" rIns="0" bIns="0" rtlCol="0" anchor="ctr"/>
-          <a:lstStyle/>
-          <a:p>
-            <a:pPr algn="ctr" indent="0" marL="0">
+        </p:spPr>
+        <p:txBody>
+          <a:bodyPr wrap="square" lIns="0" tIns="0" rIns="0" bIns="0" rtlCol="0" anchor="ctr"/>
+          <a:lstStyle/>
+          <a:p>
+            <a:pPr marL="0" indent="0" algn="ctr">
               <a:buNone/>
             </a:pPr>
             <a:r>
@@ -3634,9 +3302,9 @@
                 <a:solidFill>
                   <a:srgbClr val="C9D1FF"/>
                 </a:solidFill>
-                <a:latin typeface="Segoe UI" pitchFamily="34" charset="0"/>
-                <a:ea typeface="Segoe UI" pitchFamily="34" charset="-122"/>
-                <a:cs typeface="Segoe UI" pitchFamily="34" charset="-120"/>
+                <a:latin typeface="Segoe UI" panose="020B0502040204020203" pitchFamily="34" charset="0"/>
+                <a:ea typeface="Segoe UI" panose="020B0502040204020203" pitchFamily="34" charset="-122"/>
+                <a:cs typeface="Segoe UI" panose="020B0502040204020203" pitchFamily="34" charset="-120"/>
               </a:rPr>
               <a:t>PostgreSQL</a:t>
             </a:r>
@@ -3690,13 +3358,12 @@
             <a:avLst/>
           </a:prstGeom>
           <a:noFill/>
-          <a:ln/>
-        </p:spPr>
-        <p:txBody>
-          <a:bodyPr wrap="square" lIns="0" tIns="0" rIns="0" bIns="0" rtlCol="0" anchor="ctr"/>
-          <a:lstStyle/>
-          <a:p>
-            <a:pPr algn="ctr" indent="0" marL="0">
+        </p:spPr>
+        <p:txBody>
+          <a:bodyPr wrap="square" lIns="0" tIns="0" rIns="0" bIns="0" rtlCol="0" anchor="ctr"/>
+          <a:lstStyle/>
+          <a:p>
+            <a:pPr marL="0" indent="0" algn="ctr">
               <a:buNone/>
             </a:pPr>
             <a:r>
@@ -3704,9 +3371,9 @@
                 <a:solidFill>
                   <a:srgbClr val="FFFFFF"/>
                 </a:solidFill>
-                <a:latin typeface="Segoe UI Semibold" pitchFamily="34" charset="0"/>
-                <a:ea typeface="Segoe UI Semibold" pitchFamily="34" charset="-122"/>
-                <a:cs typeface="Segoe UI Semibold" pitchFamily="34" charset="-120"/>
+                <a:latin typeface="Segoe UI Semibold" panose="020B0702040204020203" pitchFamily="34" charset="0"/>
+                <a:ea typeface="Segoe UI Semibold" panose="020B0702040204020203" pitchFamily="34" charset="-122"/>
+                <a:cs typeface="Segoe UI Semibold" panose="020B0702040204020203" pitchFamily="34" charset="-120"/>
               </a:rPr>
               <a:t>Notification</a:t>
             </a:r>
@@ -3729,13 +3396,12 @@
             <a:avLst/>
           </a:prstGeom>
           <a:noFill/>
-          <a:ln/>
-        </p:spPr>
-        <p:txBody>
-          <a:bodyPr wrap="square" lIns="0" tIns="0" rIns="0" bIns="0" rtlCol="0" anchor="ctr"/>
-          <a:lstStyle/>
-          <a:p>
-            <a:pPr algn="ctr" indent="0" marL="0">
+        </p:spPr>
+        <p:txBody>
+          <a:bodyPr wrap="square" lIns="0" tIns="0" rIns="0" bIns="0" rtlCol="0" anchor="ctr"/>
+          <a:lstStyle/>
+          <a:p>
+            <a:pPr marL="0" indent="0" algn="ctr">
               <a:buNone/>
             </a:pPr>
             <a:r>
@@ -3743,9 +3409,9 @@
                 <a:solidFill>
                   <a:srgbClr val="C9D1FF"/>
                 </a:solidFill>
-                <a:latin typeface="Segoe UI" pitchFamily="34" charset="0"/>
-                <a:ea typeface="Segoe UI" pitchFamily="34" charset="-122"/>
-                <a:cs typeface="Segoe UI" pitchFamily="34" charset="-120"/>
+                <a:latin typeface="Segoe UI" panose="020B0502040204020203" pitchFamily="34" charset="0"/>
+                <a:ea typeface="Segoe UI" panose="020B0502040204020203" pitchFamily="34" charset="-122"/>
+                <a:cs typeface="Segoe UI" panose="020B0502040204020203" pitchFamily="34" charset="-120"/>
               </a:rPr>
               <a:t>PostgreSQL</a:t>
             </a:r>
@@ -3799,13 +3465,12 @@
             <a:avLst/>
           </a:prstGeom>
           <a:noFill/>
-          <a:ln/>
-        </p:spPr>
-        <p:txBody>
-          <a:bodyPr wrap="square" lIns="0" tIns="0" rIns="0" bIns="0" rtlCol="0" anchor="ctr"/>
-          <a:lstStyle/>
-          <a:p>
-            <a:pPr algn="ctr" indent="0" marL="0">
+        </p:spPr>
+        <p:txBody>
+          <a:bodyPr wrap="square" lIns="0" tIns="0" rIns="0" bIns="0" rtlCol="0" anchor="ctr"/>
+          <a:lstStyle/>
+          <a:p>
+            <a:pPr marL="0" indent="0" algn="ctr">
               <a:buNone/>
             </a:pPr>
             <a:r>
@@ -3813,9 +3478,9 @@
                 <a:solidFill>
                   <a:srgbClr val="FFFFFF"/>
                 </a:solidFill>
-                <a:latin typeface="Segoe UI Semibold" pitchFamily="34" charset="0"/>
-                <a:ea typeface="Segoe UI Semibold" pitchFamily="34" charset="-122"/>
-                <a:cs typeface="Segoe UI Semibold" pitchFamily="34" charset="-120"/>
+                <a:latin typeface="Segoe UI Semibold" panose="020B0702040204020203" pitchFamily="34" charset="0"/>
+                <a:ea typeface="Segoe UI Semibold" panose="020B0702040204020203" pitchFamily="34" charset="-122"/>
+                <a:cs typeface="Segoe UI Semibold" panose="020B0702040204020203" pitchFamily="34" charset="-120"/>
               </a:rPr>
               <a:t>Analytics</a:t>
             </a:r>
@@ -3838,13 +3503,12 @@
             <a:avLst/>
           </a:prstGeom>
           <a:noFill/>
-          <a:ln/>
-        </p:spPr>
-        <p:txBody>
-          <a:bodyPr wrap="square" lIns="0" tIns="0" rIns="0" bIns="0" rtlCol="0" anchor="ctr"/>
-          <a:lstStyle/>
-          <a:p>
-            <a:pPr algn="ctr" indent="0" marL="0">
+        </p:spPr>
+        <p:txBody>
+          <a:bodyPr wrap="square" lIns="0" tIns="0" rIns="0" bIns="0" rtlCol="0" anchor="ctr"/>
+          <a:lstStyle/>
+          <a:p>
+            <a:pPr marL="0" indent="0" algn="ctr">
               <a:buNone/>
             </a:pPr>
             <a:r>
@@ -3852,9 +3516,9 @@
                 <a:solidFill>
                   <a:srgbClr val="C9D1FF"/>
                 </a:solidFill>
-                <a:latin typeface="Segoe UI" pitchFamily="34" charset="0"/>
-                <a:ea typeface="Segoe UI" pitchFamily="34" charset="-122"/>
-                <a:cs typeface="Segoe UI" pitchFamily="34" charset="-120"/>
+                <a:latin typeface="Segoe UI" panose="020B0502040204020203" pitchFamily="34" charset="0"/>
+                <a:ea typeface="Segoe UI" panose="020B0502040204020203" pitchFamily="34" charset="-122"/>
+                <a:cs typeface="Segoe UI" panose="020B0502040204020203" pitchFamily="34" charset="-120"/>
               </a:rPr>
               <a:t>PostgreSQL</a:t>
             </a:r>
@@ -3908,13 +3572,12 @@
             <a:avLst/>
           </a:prstGeom>
           <a:noFill/>
-          <a:ln/>
-        </p:spPr>
-        <p:txBody>
-          <a:bodyPr wrap="square" lIns="0" tIns="0" rIns="0" bIns="0" rtlCol="0" anchor="ctr"/>
-          <a:lstStyle/>
-          <a:p>
-            <a:pPr algn="ctr" indent="0" marL="0">
+        </p:spPr>
+        <p:txBody>
+          <a:bodyPr wrap="square" lIns="0" tIns="0" rIns="0" bIns="0" rtlCol="0" anchor="ctr"/>
+          <a:lstStyle/>
+          <a:p>
+            <a:pPr marL="0" indent="0" algn="ctr">
               <a:buNone/>
             </a:pPr>
             <a:r>
@@ -3922,9 +3585,9 @@
                 <a:solidFill>
                   <a:srgbClr val="FFFFFF"/>
                 </a:solidFill>
-                <a:latin typeface="Segoe UI" pitchFamily="34" charset="0"/>
-                <a:ea typeface="Segoe UI" pitchFamily="34" charset="-122"/>
-                <a:cs typeface="Segoe UI" pitchFamily="34" charset="-120"/>
+                <a:latin typeface="Segoe UI" panose="020B0502040204020203" pitchFamily="34" charset="0"/>
+                <a:ea typeface="Segoe UI" panose="020B0502040204020203" pitchFamily="34" charset="-122"/>
+                <a:cs typeface="Segoe UI" panose="020B0502040204020203" pitchFamily="34" charset="-120"/>
               </a:rPr>
               <a:t>RabbitMQ events  ·  Redis cache  ·  Prometheus and Grafana</a:t>
             </a:r>
@@ -3978,13 +3641,12 @@
             <a:avLst/>
           </a:prstGeom>
           <a:noFill/>
-          <a:ln/>
-        </p:spPr>
-        <p:txBody>
-          <a:bodyPr wrap="square" lIns="0" tIns="0" rIns="0" bIns="0" rtlCol="0" anchor="ctr"/>
-          <a:lstStyle/>
-          <a:p>
-            <a:pPr indent="0" marL="0">
+        </p:spPr>
+        <p:txBody>
+          <a:bodyPr wrap="square" lIns="0" tIns="0" rIns="0" bIns="0" rtlCol="0" anchor="ctr"/>
+          <a:lstStyle/>
+          <a:p>
+            <a:pPr marL="0" indent="0">
               <a:buNone/>
             </a:pPr>
             <a:r>
@@ -3992,23 +3654,20 @@
                 <a:solidFill>
                   <a:srgbClr val="8FA0FF"/>
                 </a:solidFill>
-                <a:latin typeface="Segoe UI" pitchFamily="34" charset="0"/>
-                <a:ea typeface="Segoe UI" pitchFamily="34" charset="-122"/>
-                <a:cs typeface="Segoe UI" pitchFamily="34" charset="-120"/>
+                <a:latin typeface="Segoe UI" panose="020B0502040204020203" pitchFamily="34" charset="0"/>
+                <a:ea typeface="Segoe UI" panose="020B0502040204020203" pitchFamily="34" charset="-122"/>
+                <a:cs typeface="Segoe UI" panose="020B0502040204020203" pitchFamily="34" charset="-120"/>
               </a:rPr>
               <a:t>LIVE  </a:t>
             </a:r>
-            <a:pPr indent="0" marL="0">
-              <a:buNone/>
-            </a:pPr>
             <a:r>
               <a:rPr lang="en-US" sz="1100" dirty="0">
                 <a:solidFill>
                   <a:srgbClr val="FFFFFF"/>
                 </a:solidFill>
-                <a:latin typeface="Segoe UI" pitchFamily="34" charset="0"/>
-                <a:ea typeface="Segoe UI" pitchFamily="34" charset="-122"/>
-                <a:cs typeface="Segoe UI" pitchFamily="34" charset="-120"/>
+                <a:latin typeface="Segoe UI" panose="020B0502040204020203" pitchFamily="34" charset="0"/>
+                <a:ea typeface="Segoe UI" panose="020B0502040204020203" pitchFamily="34" charset="-122"/>
+                <a:cs typeface="Segoe UI" panose="020B0502040204020203" pitchFamily="34" charset="-120"/>
               </a:rPr>
               <a:t>Console: sign in, Control room</a:t>
             </a:r>
@@ -4026,7 +3685,7 @@
 
 <file path=ppt/slides/slide3.xml><?xml version="1.0" encoding="utf-8"?>
 <p:sld xmlns:a="http://schemas.openxmlformats.org/drawingml/2006/main" xmlns:r="http://schemas.openxmlformats.org/officeDocument/2006/relationships" xmlns:p="http://schemas.openxmlformats.org/presentationml/2006/main">
-  <p:cSld name="Slide 3">
+  <p:cSld>
     <p:bg>
       <p:bgPr>
         <a:blipFill dpi="0" rotWithShape="1">
@@ -4245,25 +3904,24 @@
             <a:avLst/>
           </a:prstGeom>
           <a:noFill/>
-          <a:ln/>
-        </p:spPr>
-        <p:txBody>
-          <a:bodyPr wrap="square" lIns="0" tIns="0" rIns="0" bIns="0" rtlCol="0" anchor="ctr"/>
-          <a:lstStyle/>
-          <a:p>
-            <a:pPr indent="0" marL="0">
-              <a:buNone/>
-            </a:pPr>
-            <a:r>
-              <a:rPr lang="en-US" sz="1050" spc="300" kern="0" dirty="0">
+        </p:spPr>
+        <p:txBody>
+          <a:bodyPr wrap="square" lIns="0" tIns="0" rIns="0" bIns="0" rtlCol="0" anchor="ctr"/>
+          <a:lstStyle/>
+          <a:p>
+            <a:pPr marL="0" indent="0">
+              <a:buNone/>
+            </a:pPr>
+            <a:r>
+              <a:rPr lang="en-US" sz="1050" kern="0" spc="300" dirty="0">
                 <a:solidFill>
                   <a:srgbClr val="2B3DFF"/>
                 </a:solidFill>
-                <a:latin typeface="Segoe UI Semibold" pitchFamily="34" charset="0"/>
-                <a:ea typeface="Segoe UI Semibold" pitchFamily="34" charset="-122"/>
-                <a:cs typeface="Segoe UI Semibold" pitchFamily="34" charset="-120"/>
-              </a:rPr>
-              <a:t>03 · NEMAL · ASSET SERVICE</a:t>
+                <a:latin typeface="Segoe UI Semibold" panose="020B0702040204020203" pitchFamily="34" charset="0"/>
+                <a:ea typeface="Segoe UI Semibold" panose="020B0702040204020203" pitchFamily="34" charset="-122"/>
+                <a:cs typeface="Segoe UI Semibold" panose="020B0702040204020203" pitchFamily="34" charset="-120"/>
+              </a:rPr>
+              <a:t>03 · ASSET SERVICE</a:t>
             </a:r>
             <a:endParaRPr lang="en-US" sz="1050" dirty="0"/>
           </a:p>
@@ -4284,13 +3942,12 @@
             <a:avLst/>
           </a:prstGeom>
           <a:noFill/>
-          <a:ln/>
-        </p:spPr>
-        <p:txBody>
-          <a:bodyPr wrap="square" lIns="0" tIns="0" rIns="0" bIns="0" rtlCol="0" anchor="ctr"/>
-          <a:lstStyle/>
-          <a:p>
-            <a:pPr indent="0" marL="0">
+        </p:spPr>
+        <p:txBody>
+          <a:bodyPr wrap="square" lIns="0" tIns="0" rIns="0" bIns="0" rtlCol="0" anchor="ctr"/>
+          <a:lstStyle/>
+          <a:p>
+            <a:pPr marL="0" indent="0">
               <a:buNone/>
             </a:pPr>
             <a:r>
@@ -4298,23 +3955,20 @@
                 <a:solidFill>
                   <a:srgbClr val="05060C"/>
                 </a:solidFill>
-                <a:latin typeface="Segoe UI Light" pitchFamily="34" charset="0"/>
-                <a:ea typeface="Segoe UI Light" pitchFamily="34" charset="-122"/>
-                <a:cs typeface="Segoe UI Light" pitchFamily="34" charset="-120"/>
+                <a:latin typeface="Segoe UI Light" panose="020B0502040204020203" pitchFamily="34" charset="0"/>
+                <a:ea typeface="Segoe UI Light" panose="020B0502040204020203" pitchFamily="34" charset="-122"/>
+                <a:cs typeface="Segoe UI Light" panose="020B0502040204020203" pitchFamily="34" charset="-120"/>
               </a:rPr>
               <a:t>The registry every </a:t>
             </a:r>
-            <a:pPr indent="0" marL="0">
-              <a:buNone/>
-            </a:pPr>
             <a:r>
               <a:rPr lang="en-US" sz="3200" dirty="0">
                 <a:solidFill>
                   <a:srgbClr val="2B3DFF"/>
                 </a:solidFill>
-                <a:latin typeface="Segoe UI Light" pitchFamily="34" charset="0"/>
-                <a:ea typeface="Segoe UI Light" pitchFamily="34" charset="-122"/>
-                <a:cs typeface="Segoe UI Light" pitchFamily="34" charset="-120"/>
+                <a:latin typeface="Segoe UI Light" panose="020B0502040204020203" pitchFamily="34" charset="0"/>
+                <a:ea typeface="Segoe UI Light" panose="020B0502040204020203" pitchFamily="34" charset="-122"/>
+                <a:cs typeface="Segoe UI Light" panose="020B0502040204020203" pitchFamily="34" charset="-120"/>
               </a:rPr>
               <a:t>service relies on</a:t>
             </a:r>
@@ -4362,13 +4016,12 @@
             <a:avLst/>
           </a:prstGeom>
           <a:noFill/>
-          <a:ln/>
-        </p:spPr>
-        <p:txBody>
-          <a:bodyPr wrap="square" lIns="0" tIns="0" rIns="0" bIns="0" rtlCol="0" anchor="ctr"/>
-          <a:lstStyle/>
-          <a:p>
-            <a:pPr indent="0" marL="0">
+        </p:spPr>
+        <p:txBody>
+          <a:bodyPr wrap="square" lIns="0" tIns="0" rIns="0" bIns="0" rtlCol="0" anchor="ctr"/>
+          <a:lstStyle/>
+          <a:p>
+            <a:pPr marL="0" indent="0">
               <a:buNone/>
             </a:pPr>
             <a:r>
@@ -4376,9 +4029,9 @@
                 <a:solidFill>
                   <a:srgbClr val="C9D1FF"/>
                 </a:solidFill>
-                <a:latin typeface="Segoe UI" pitchFamily="34" charset="0"/>
-                <a:ea typeface="Segoe UI" pitchFamily="34" charset="-122"/>
-                <a:cs typeface="Segoe UI" pitchFamily="34" charset="-120"/>
+                <a:latin typeface="Segoe UI" panose="020B0502040204020203" pitchFamily="34" charset="0"/>
+                <a:ea typeface="Segoe UI" panose="020B0502040204020203" pitchFamily="34" charset="-122"/>
+                <a:cs typeface="Segoe UI" panose="020B0502040204020203" pitchFamily="34" charset="-120"/>
               </a:rPr>
               <a:t>EC8208 Software Architecture  ·  University of Ruhuna</a:t>
             </a:r>
@@ -4401,13 +4054,12 @@
             <a:avLst/>
           </a:prstGeom>
           <a:noFill/>
-          <a:ln/>
-        </p:spPr>
-        <p:txBody>
-          <a:bodyPr wrap="square" lIns="0" tIns="0" rIns="0" bIns="0" rtlCol="0" anchor="ctr"/>
-          <a:lstStyle/>
-          <a:p>
-            <a:pPr algn="r" indent="0" marL="0">
+        </p:spPr>
+        <p:txBody>
+          <a:bodyPr wrap="square" lIns="0" tIns="0" rIns="0" bIns="0" rtlCol="0" anchor="ctr"/>
+          <a:lstStyle/>
+          <a:p>
+            <a:pPr marL="0" indent="0" algn="r">
               <a:buNone/>
             </a:pPr>
             <a:r>
@@ -4415,9 +4067,9 @@
                 <a:solidFill>
                   <a:srgbClr val="C9D1FF"/>
                 </a:solidFill>
-                <a:latin typeface="Segoe UI" pitchFamily="34" charset="0"/>
-                <a:ea typeface="Segoe UI" pitchFamily="34" charset="-122"/>
-                <a:cs typeface="Segoe UI" pitchFamily="34" charset="-120"/>
+                <a:latin typeface="Segoe UI" panose="020B0502040204020203" pitchFamily="34" charset="0"/>
+                <a:ea typeface="Segoe UI" panose="020B0502040204020203" pitchFamily="34" charset="-122"/>
+                <a:cs typeface="Segoe UI" panose="020B0502040204020203" pitchFamily="34" charset="-120"/>
               </a:rPr>
               <a:t>03  ·  1:13–2:08</a:t>
             </a:r>
@@ -4467,13 +4119,12 @@
             <a:avLst/>
           </a:prstGeom>
           <a:noFill/>
-          <a:ln/>
-        </p:spPr>
-        <p:txBody>
-          <a:bodyPr wrap="square" lIns="0" tIns="0" rIns="0" bIns="0" rtlCol="0" anchor="ctr"/>
-          <a:lstStyle/>
-          <a:p>
-            <a:pPr algn="ctr" indent="0" marL="0">
+        </p:spPr>
+        <p:txBody>
+          <a:bodyPr wrap="square" lIns="0" tIns="0" rIns="0" bIns="0" rtlCol="0" anchor="ctr"/>
+          <a:lstStyle/>
+          <a:p>
+            <a:pPr marL="0" indent="0" algn="ctr">
               <a:buNone/>
             </a:pPr>
             <a:r>
@@ -4481,9 +4132,9 @@
                 <a:solidFill>
                   <a:srgbClr val="FFFFFF"/>
                 </a:solidFill>
-                <a:latin typeface="Segoe UI Semibold" pitchFamily="34" charset="0"/>
-                <a:ea typeface="Segoe UI Semibold" pitchFamily="34" charset="-122"/>
-                <a:cs typeface="Segoe UI Semibold" pitchFamily="34" charset="-120"/>
+                <a:latin typeface="Segoe UI Semibold" panose="020B0702040204020203" pitchFamily="34" charset="0"/>
+                <a:ea typeface="Segoe UI Semibold" panose="020B0702040204020203" pitchFamily="34" charset="-122"/>
+                <a:cs typeface="Segoe UI Semibold" panose="020B0702040204020203" pitchFamily="34" charset="-120"/>
               </a:rPr>
               <a:t>Facility</a:t>
             </a:r>
@@ -4506,13 +4157,12 @@
             <a:avLst/>
           </a:prstGeom>
           <a:noFill/>
-          <a:ln/>
-        </p:spPr>
-        <p:txBody>
-          <a:bodyPr wrap="square" lIns="0" tIns="0" rIns="0" bIns="0" rtlCol="0" anchor="ctr"/>
-          <a:lstStyle/>
-          <a:p>
-            <a:pPr algn="ctr" indent="0" marL="0">
+        </p:spPr>
+        <p:txBody>
+          <a:bodyPr wrap="square" lIns="0" tIns="0" rIns="0" bIns="0" rtlCol="0" anchor="ctr"/>
+          <a:lstStyle/>
+          <a:p>
+            <a:pPr marL="0" indent="0" algn="ctr">
               <a:buNone/>
             </a:pPr>
             <a:r>
@@ -4520,9 +4170,9 @@
                 <a:solidFill>
                   <a:srgbClr val="C9D1FF"/>
                 </a:solidFill>
-                <a:latin typeface="Segoe UI" pitchFamily="34" charset="0"/>
-                <a:ea typeface="Segoe UI" pitchFamily="34" charset="-122"/>
-                <a:cs typeface="Segoe UI" pitchFamily="34" charset="-120"/>
+                <a:latin typeface="Segoe UI" panose="020B0502040204020203" pitchFamily="34" charset="0"/>
+                <a:ea typeface="Segoe UI" panose="020B0502040204020203" pitchFamily="34" charset="-122"/>
+                <a:cs typeface="Segoe UI" panose="020B0502040204020203" pitchFamily="34" charset="-120"/>
               </a:rPr>
               <a:t>5 types</a:t>
             </a:r>
@@ -4545,13 +4195,12 @@
             <a:avLst/>
           </a:prstGeom>
           <a:noFill/>
-          <a:ln/>
-        </p:spPr>
-        <p:txBody>
-          <a:bodyPr wrap="square" lIns="0" tIns="0" rIns="0" bIns="0" rtlCol="0" anchor="ctr"/>
-          <a:lstStyle/>
-          <a:p>
-            <a:pPr algn="ctr" indent="0" marL="0">
+        </p:spPr>
+        <p:txBody>
+          <a:bodyPr wrap="square" lIns="0" tIns="0" rIns="0" bIns="0" rtlCol="0" anchor="ctr"/>
+          <a:lstStyle/>
+          <a:p>
+            <a:pPr marL="0" indent="0" algn="ctr">
               <a:buNone/>
             </a:pPr>
             <a:r>
@@ -4559,9 +4208,9 @@
                 <a:solidFill>
                   <a:srgbClr val="2B3DFF"/>
                 </a:solidFill>
-                <a:latin typeface="Segoe UI Semibold" pitchFamily="34" charset="0"/>
-                <a:ea typeface="Segoe UI Semibold" pitchFamily="34" charset="-122"/>
-                <a:cs typeface="Segoe UI Semibold" pitchFamily="34" charset="-120"/>
+                <a:latin typeface="Segoe UI Semibold" panose="020B0702040204020203" pitchFamily="34" charset="0"/>
+                <a:ea typeface="Segoe UI Semibold" panose="020B0702040204020203" pitchFamily="34" charset="-122"/>
+                <a:cs typeface="Segoe UI Semibold" panose="020B0702040204020203" pitchFamily="34" charset="-120"/>
               </a:rPr>
               <a:t>›</a:t>
             </a:r>
@@ -4611,13 +4260,12 @@
             <a:avLst/>
           </a:prstGeom>
           <a:noFill/>
-          <a:ln/>
-        </p:spPr>
-        <p:txBody>
-          <a:bodyPr wrap="square" lIns="0" tIns="0" rIns="0" bIns="0" rtlCol="0" anchor="ctr"/>
-          <a:lstStyle/>
-          <a:p>
-            <a:pPr algn="ctr" indent="0" marL="0">
+        </p:spPr>
+        <p:txBody>
+          <a:bodyPr wrap="square" lIns="0" tIns="0" rIns="0" bIns="0" rtlCol="0" anchor="ctr"/>
+          <a:lstStyle/>
+          <a:p>
+            <a:pPr marL="0" indent="0" algn="ctr">
               <a:buNone/>
             </a:pPr>
             <a:r>
@@ -4625,9 +4273,9 @@
                 <a:solidFill>
                   <a:srgbClr val="05060C"/>
                 </a:solidFill>
-                <a:latin typeface="Segoe UI Semibold" pitchFamily="34" charset="0"/>
-                <a:ea typeface="Segoe UI Semibold" pitchFamily="34" charset="-122"/>
-                <a:cs typeface="Segoe UI Semibold" pitchFamily="34" charset="-120"/>
+                <a:latin typeface="Segoe UI Semibold" panose="020B0702040204020203" pitchFamily="34" charset="0"/>
+                <a:ea typeface="Segoe UI Semibold" panose="020B0702040204020203" pitchFamily="34" charset="-122"/>
+                <a:cs typeface="Segoe UI Semibold" panose="020B0702040204020203" pitchFamily="34" charset="-120"/>
               </a:rPr>
               <a:t>Asset</a:t>
             </a:r>
@@ -4650,13 +4298,12 @@
             <a:avLst/>
           </a:prstGeom>
           <a:noFill/>
-          <a:ln/>
-        </p:spPr>
-        <p:txBody>
-          <a:bodyPr wrap="square" lIns="0" tIns="0" rIns="0" bIns="0" rtlCol="0" anchor="ctr"/>
-          <a:lstStyle/>
-          <a:p>
-            <a:pPr algn="ctr" indent="0" marL="0">
+        </p:spPr>
+        <p:txBody>
+          <a:bodyPr wrap="square" lIns="0" tIns="0" rIns="0" bIns="0" rtlCol="0" anchor="ctr"/>
+          <a:lstStyle/>
+          <a:p>
+            <a:pPr marL="0" indent="0" algn="ctr">
               <a:buNone/>
             </a:pPr>
             <a:r>
@@ -4664,9 +4311,9 @@
                 <a:solidFill>
                   <a:srgbClr val="5B6478"/>
                 </a:solidFill>
-                <a:latin typeface="Segoe UI" pitchFamily="34" charset="0"/>
-                <a:ea typeface="Segoe UI" pitchFamily="34" charset="-122"/>
-                <a:cs typeface="Segoe UI" pitchFamily="34" charset="-120"/>
+                <a:latin typeface="Segoe UI" panose="020B0502040204020203" pitchFamily="34" charset="0"/>
+                <a:ea typeface="Segoe UI" panose="020B0502040204020203" pitchFamily="34" charset="-122"/>
+                <a:cs typeface="Segoe UI" panose="020B0502040204020203" pitchFamily="34" charset="-120"/>
               </a:rPr>
               <a:t>7 types</a:t>
             </a:r>
@@ -4689,13 +4336,12 @@
             <a:avLst/>
           </a:prstGeom>
           <a:noFill/>
-          <a:ln/>
-        </p:spPr>
-        <p:txBody>
-          <a:bodyPr wrap="square" lIns="0" tIns="0" rIns="0" bIns="0" rtlCol="0" anchor="ctr"/>
-          <a:lstStyle/>
-          <a:p>
-            <a:pPr algn="ctr" indent="0" marL="0">
+        </p:spPr>
+        <p:txBody>
+          <a:bodyPr wrap="square" lIns="0" tIns="0" rIns="0" bIns="0" rtlCol="0" anchor="ctr"/>
+          <a:lstStyle/>
+          <a:p>
+            <a:pPr marL="0" indent="0" algn="ctr">
               <a:buNone/>
             </a:pPr>
             <a:r>
@@ -4703,9 +4349,9 @@
                 <a:solidFill>
                   <a:srgbClr val="2B3DFF"/>
                 </a:solidFill>
-                <a:latin typeface="Segoe UI Semibold" pitchFamily="34" charset="0"/>
-                <a:ea typeface="Segoe UI Semibold" pitchFamily="34" charset="-122"/>
-                <a:cs typeface="Segoe UI Semibold" pitchFamily="34" charset="-120"/>
+                <a:latin typeface="Segoe UI Semibold" panose="020B0702040204020203" pitchFamily="34" charset="0"/>
+                <a:ea typeface="Segoe UI Semibold" panose="020B0702040204020203" pitchFamily="34" charset="-122"/>
+                <a:cs typeface="Segoe UI Semibold" panose="020B0702040204020203" pitchFamily="34" charset="-120"/>
               </a:rPr>
               <a:t>›</a:t>
             </a:r>
@@ -4755,13 +4401,12 @@
             <a:avLst/>
           </a:prstGeom>
           <a:noFill/>
-          <a:ln/>
-        </p:spPr>
-        <p:txBody>
-          <a:bodyPr wrap="square" lIns="0" tIns="0" rIns="0" bIns="0" rtlCol="0" anchor="ctr"/>
-          <a:lstStyle/>
-          <a:p>
-            <a:pPr algn="ctr" indent="0" marL="0">
+        </p:spPr>
+        <p:txBody>
+          <a:bodyPr wrap="square" lIns="0" tIns="0" rIns="0" bIns="0" rtlCol="0" anchor="ctr"/>
+          <a:lstStyle/>
+          <a:p>
+            <a:pPr marL="0" indent="0" algn="ctr">
               <a:buNone/>
             </a:pPr>
             <a:r>
@@ -4769,9 +4414,9 @@
                 <a:solidFill>
                   <a:srgbClr val="05060C"/>
                 </a:solidFill>
-                <a:latin typeface="Segoe UI Semibold" pitchFamily="34" charset="0"/>
-                <a:ea typeface="Segoe UI Semibold" pitchFamily="34" charset="-122"/>
-                <a:cs typeface="Segoe UI Semibold" pitchFamily="34" charset="-120"/>
+                <a:latin typeface="Segoe UI Semibold" panose="020B0702040204020203" pitchFamily="34" charset="0"/>
+                <a:ea typeface="Segoe UI Semibold" panose="020B0702040204020203" pitchFamily="34" charset="-122"/>
+                <a:cs typeface="Segoe UI Semibold" panose="020B0702040204020203" pitchFamily="34" charset="-120"/>
               </a:rPr>
               <a:t>Sensor</a:t>
             </a:r>
@@ -4794,13 +4439,12 @@
             <a:avLst/>
           </a:prstGeom>
           <a:noFill/>
-          <a:ln/>
-        </p:spPr>
-        <p:txBody>
-          <a:bodyPr wrap="square" lIns="0" tIns="0" rIns="0" bIns="0" rtlCol="0" anchor="ctr"/>
-          <a:lstStyle/>
-          <a:p>
-            <a:pPr algn="ctr" indent="0" marL="0">
+        </p:spPr>
+        <p:txBody>
+          <a:bodyPr wrap="square" lIns="0" tIns="0" rIns="0" bIns="0" rtlCol="0" anchor="ctr"/>
+          <a:lstStyle/>
+          <a:p>
+            <a:pPr marL="0" indent="0" algn="ctr">
               <a:buNone/>
             </a:pPr>
             <a:r>
@@ -4808,9 +4452,9 @@
                 <a:solidFill>
                   <a:srgbClr val="5B6478"/>
                 </a:solidFill>
-                <a:latin typeface="Segoe UI" pitchFamily="34" charset="0"/>
-                <a:ea typeface="Segoe UI" pitchFamily="34" charset="-122"/>
-                <a:cs typeface="Segoe UI" pitchFamily="34" charset="-120"/>
+                <a:latin typeface="Segoe UI" panose="020B0502040204020203" pitchFamily="34" charset="0"/>
+                <a:ea typeface="Segoe UI" panose="020B0502040204020203" pitchFamily="34" charset="-122"/>
+                <a:cs typeface="Segoe UI" panose="020B0502040204020203" pitchFamily="34" charset="-120"/>
               </a:rPr>
               <a:t>9 metrics</a:t>
             </a:r>
@@ -4856,13 +4500,12 @@
             <a:avLst/>
           </a:prstGeom>
           <a:noFill/>
-          <a:ln/>
-        </p:spPr>
-        <p:txBody>
-          <a:bodyPr wrap="square" lIns="0" tIns="0" rIns="0" bIns="0" rtlCol="0" anchor="ctr"/>
-          <a:lstStyle/>
-          <a:p>
-            <a:pPr indent="0" marL="0">
+        </p:spPr>
+        <p:txBody>
+          <a:bodyPr wrap="square" lIns="0" tIns="0" rIns="0" bIns="0" rtlCol="0" anchor="ctr"/>
+          <a:lstStyle/>
+          <a:p>
+            <a:pPr marL="0" indent="0">
               <a:buNone/>
             </a:pPr>
             <a:r>
@@ -4870,9 +4513,9 @@
                 <a:solidFill>
                   <a:srgbClr val="FFFFFF"/>
                 </a:solidFill>
-                <a:latin typeface="Segoe UI Light" pitchFamily="34" charset="0"/>
-                <a:ea typeface="Segoe UI Light" pitchFamily="34" charset="-122"/>
-                <a:cs typeface="Segoe UI Light" pitchFamily="34" charset="-120"/>
+                <a:latin typeface="Segoe UI Light" panose="020B0502040204020203" pitchFamily="34" charset="0"/>
+                <a:ea typeface="Segoe UI Light" panose="020B0502040204020203" pitchFamily="34" charset="-122"/>
+                <a:cs typeface="Segoe UI Light" panose="020B0502040204020203" pitchFamily="34" charset="-120"/>
               </a:rPr>
               <a:t>5 · 11 · 32</a:t>
             </a:r>
@@ -4895,13 +4538,12 @@
             <a:avLst/>
           </a:prstGeom>
           <a:noFill/>
-          <a:ln/>
         </p:spPr>
         <p:txBody>
           <a:bodyPr wrap="square" lIns="0" tIns="0" rIns="0" bIns="0" rtlCol="0" anchor="t"/>
           <a:lstStyle/>
           <a:p>
-            <a:pPr indent="0" marL="0">
+            <a:pPr marL="0" indent="0">
               <a:buNone/>
             </a:pPr>
             <a:r>
@@ -4909,9 +4551,9 @@
                 <a:solidFill>
                   <a:srgbClr val="C9D1FF"/>
                 </a:solidFill>
-                <a:latin typeface="Segoe UI" pitchFamily="34" charset="0"/>
-                <a:ea typeface="Segoe UI" pitchFamily="34" charset="-122"/>
-                <a:cs typeface="Segoe UI" pitchFamily="34" charset="-120"/>
+                <a:latin typeface="Segoe UI" panose="020B0502040204020203" pitchFamily="34" charset="0"/>
+                <a:ea typeface="Segoe UI" panose="020B0502040204020203" pitchFamily="34" charset="-122"/>
+                <a:cs typeface="Segoe UI" panose="020B0502040204020203" pitchFamily="34" charset="-120"/>
               </a:rPr>
               <a:t>facilities · assets · sensors</a:t>
             </a:r>
@@ -4957,13 +4599,12 @@
             <a:avLst/>
           </a:prstGeom>
           <a:noFill/>
-          <a:ln/>
-        </p:spPr>
-        <p:txBody>
-          <a:bodyPr wrap="square" lIns="0" tIns="0" rIns="0" bIns="0" rtlCol="0" anchor="ctr"/>
-          <a:lstStyle/>
-          <a:p>
-            <a:pPr indent="0" marL="0">
+        </p:spPr>
+        <p:txBody>
+          <a:bodyPr wrap="square" lIns="0" tIns="0" rIns="0" bIns="0" rtlCol="0" anchor="ctr"/>
+          <a:lstStyle/>
+          <a:p>
+            <a:pPr marL="0" indent="0">
               <a:buNone/>
             </a:pPr>
             <a:r>
@@ -4971,9 +4612,9 @@
                 <a:solidFill>
                   <a:srgbClr val="FFFFFF"/>
                 </a:solidFill>
-                <a:latin typeface="Segoe UI Light" pitchFamily="34" charset="0"/>
-                <a:ea typeface="Segoe UI Light" pitchFamily="34" charset="-122"/>
-                <a:cs typeface="Segoe UI Light" pitchFamily="34" charset="-120"/>
+                <a:latin typeface="Segoe UI Light" panose="020B0502040204020203" pitchFamily="34" charset="0"/>
+                <a:ea typeface="Segoe UI Light" panose="020B0502040204020203" pitchFamily="34" charset="-122"/>
+                <a:cs typeface="Segoe UI Light" panose="020B0502040204020203" pitchFamily="34" charset="-120"/>
               </a:rPr>
               <a:t>Server-side</a:t>
             </a:r>
@@ -4996,13 +4637,12 @@
             <a:avLst/>
           </a:prstGeom>
           <a:noFill/>
-          <a:ln/>
         </p:spPr>
         <p:txBody>
           <a:bodyPr wrap="square" lIns="0" tIns="0" rIns="0" bIns="0" rtlCol="0" anchor="t"/>
           <a:lstStyle/>
           <a:p>
-            <a:pPr indent="0" marL="0">
+            <a:pPr marL="0" indent="0">
               <a:buNone/>
             </a:pPr>
             <a:r>
@@ -5010,9 +4650,9 @@
                 <a:solidFill>
                   <a:srgbClr val="C9D1FF"/>
                 </a:solidFill>
-                <a:latin typeface="Segoe UI" pitchFamily="34" charset="0"/>
-                <a:ea typeface="Segoe UI" pitchFamily="34" charset="-122"/>
-                <a:cs typeface="Segoe UI" pitchFamily="34" charset="-120"/>
+                <a:latin typeface="Segoe UI" panose="020B0502040204020203" pitchFamily="34" charset="0"/>
+                <a:ea typeface="Segoe UI" panose="020B0502040204020203" pitchFamily="34" charset="-122"/>
+                <a:cs typeface="Segoe UI" panose="020B0502040204020203" pitchFamily="34" charset="-120"/>
               </a:rPr>
               <a:t>search and paging</a:t>
             </a:r>
@@ -5058,13 +4698,12 @@
             <a:avLst/>
           </a:prstGeom>
           <a:noFill/>
-          <a:ln/>
-        </p:spPr>
-        <p:txBody>
-          <a:bodyPr wrap="square" lIns="0" tIns="0" rIns="0" bIns="0" rtlCol="0" anchor="ctr"/>
-          <a:lstStyle/>
-          <a:p>
-            <a:pPr indent="0" marL="0">
+        </p:spPr>
+        <p:txBody>
+          <a:bodyPr wrap="square" lIns="0" tIns="0" rIns="0" bIns="0" rtlCol="0" anchor="ctr"/>
+          <a:lstStyle/>
+          <a:p>
+            <a:pPr marL="0" indent="0">
               <a:buNone/>
             </a:pPr>
             <a:r>
@@ -5072,9 +4711,9 @@
                 <a:solidFill>
                   <a:srgbClr val="FFFFFF"/>
                 </a:solidFill>
-                <a:latin typeface="Segoe UI Light" pitchFamily="34" charset="0"/>
-                <a:ea typeface="Segoe UI Light" pitchFamily="34" charset="-122"/>
-                <a:cs typeface="Segoe UI Light" pitchFamily="34" charset="-120"/>
+                <a:latin typeface="Segoe UI Light" panose="020B0502040204020203" pitchFamily="34" charset="0"/>
+                <a:ea typeface="Segoe UI Light" panose="020B0502040204020203" pitchFamily="34" charset="-122"/>
+                <a:cs typeface="Segoe UI Light" panose="020B0502040204020203" pitchFamily="34" charset="-120"/>
               </a:rPr>
               <a:t>Validated</a:t>
             </a:r>
@@ -5097,13 +4736,12 @@
             <a:avLst/>
           </a:prstGeom>
           <a:noFill/>
-          <a:ln/>
         </p:spPr>
         <p:txBody>
           <a:bodyPr wrap="square" lIns="0" tIns="0" rIns="0" bIns="0" rtlCol="0" anchor="t"/>
           <a:lstStyle/>
           <a:p>
-            <a:pPr indent="0" marL="0">
+            <a:pPr marL="0" indent="0">
               <a:buNone/>
             </a:pPr>
             <a:r>
@@ -5111,9 +4749,9 @@
                 <a:solidFill>
                   <a:srgbClr val="C9D1FF"/>
                 </a:solidFill>
-                <a:latin typeface="Segoe UI" pitchFamily="34" charset="0"/>
-                <a:ea typeface="Segoe UI" pitchFamily="34" charset="-122"/>
-                <a:cs typeface="Segoe UI" pitchFamily="34" charset="-120"/>
+                <a:latin typeface="Segoe UI" panose="020B0502040204020203" pitchFamily="34" charset="0"/>
+                <a:ea typeface="Segoe UI" panose="020B0502040204020203" pitchFamily="34" charset="-122"/>
+                <a:cs typeface="Segoe UI" panose="020B0502040204020203" pitchFamily="34" charset="-120"/>
               </a:rPr>
               <a:t>every form</a:t>
             </a:r>
@@ -5167,13 +4805,12 @@
             <a:avLst/>
           </a:prstGeom>
           <a:noFill/>
-          <a:ln/>
-        </p:spPr>
-        <p:txBody>
-          <a:bodyPr wrap="square" lIns="0" tIns="0" rIns="0" bIns="0" rtlCol="0" anchor="ctr"/>
-          <a:lstStyle/>
-          <a:p>
-            <a:pPr indent="0" marL="0">
+        </p:spPr>
+        <p:txBody>
+          <a:bodyPr wrap="square" lIns="0" tIns="0" rIns="0" bIns="0" rtlCol="0" anchor="ctr"/>
+          <a:lstStyle/>
+          <a:p>
+            <a:pPr marL="0" indent="0">
               <a:buNone/>
             </a:pPr>
             <a:r>
@@ -5181,23 +4818,20 @@
                 <a:solidFill>
                   <a:srgbClr val="8FA0FF"/>
                 </a:solidFill>
-                <a:latin typeface="Segoe UI" pitchFamily="34" charset="0"/>
-                <a:ea typeface="Segoe UI" pitchFamily="34" charset="-122"/>
-                <a:cs typeface="Segoe UI" pitchFamily="34" charset="-120"/>
+                <a:latin typeface="Segoe UI" panose="020B0502040204020203" pitchFamily="34" charset="0"/>
+                <a:ea typeface="Segoe UI" panose="020B0502040204020203" pitchFamily="34" charset="-122"/>
+                <a:cs typeface="Segoe UI" panose="020B0502040204020203" pitchFamily="34" charset="-120"/>
               </a:rPr>
               <a:t>LIVE  </a:t>
             </a:r>
-            <a:pPr indent="0" marL="0">
-              <a:buNone/>
-            </a:pPr>
             <a:r>
               <a:rPr lang="en-US" sz="1100" dirty="0">
                 <a:solidFill>
                   <a:srgbClr val="FFFFFF"/>
                 </a:solidFill>
-                <a:latin typeface="Segoe UI" pitchFamily="34" charset="0"/>
-                <a:ea typeface="Segoe UI" pitchFamily="34" charset="-122"/>
-                <a:cs typeface="Segoe UI" pitchFamily="34" charset="-120"/>
+                <a:latin typeface="Segoe UI" panose="020B0502040204020203" pitchFamily="34" charset="0"/>
+                <a:ea typeface="Segoe UI" panose="020B0502040204020203" pitchFamily="34" charset="-122"/>
+                <a:cs typeface="Segoe UI" panose="020B0502040204020203" pitchFamily="34" charset="-120"/>
               </a:rPr>
               <a:t>Assets page</a:t>
             </a:r>
@@ -5215,7 +4849,7 @@
 
 <file path=ppt/slides/slide4.xml><?xml version="1.0" encoding="utf-8"?>
 <p:sld xmlns:a="http://schemas.openxmlformats.org/drawingml/2006/main" xmlns:r="http://schemas.openxmlformats.org/officeDocument/2006/relationships" xmlns:p="http://schemas.openxmlformats.org/presentationml/2006/main">
-  <p:cSld name="Slide 4">
+  <p:cSld>
     <p:bg>
       <p:bgPr>
         <a:blipFill dpi="0" rotWithShape="1">
@@ -5434,25 +5068,24 @@
             <a:avLst/>
           </a:prstGeom>
           <a:noFill/>
-          <a:ln/>
-        </p:spPr>
-        <p:txBody>
-          <a:bodyPr wrap="square" lIns="0" tIns="0" rIns="0" bIns="0" rtlCol="0" anchor="ctr"/>
-          <a:lstStyle/>
-          <a:p>
-            <a:pPr indent="0" marL="0">
-              <a:buNone/>
-            </a:pPr>
-            <a:r>
-              <a:rPr lang="en-US" sz="1050" spc="300" kern="0" dirty="0">
+        </p:spPr>
+        <p:txBody>
+          <a:bodyPr wrap="square" lIns="0" tIns="0" rIns="0" bIns="0" rtlCol="0" anchor="ctr"/>
+          <a:lstStyle/>
+          <a:p>
+            <a:pPr marL="0" indent="0">
+              <a:buNone/>
+            </a:pPr>
+            <a:r>
+              <a:rPr lang="en-US" sz="1050" kern="0" spc="300" dirty="0">
                 <a:solidFill>
                   <a:srgbClr val="2B3DFF"/>
                 </a:solidFill>
-                <a:latin typeface="Segoe UI Semibold" pitchFamily="34" charset="0"/>
-                <a:ea typeface="Segoe UI Semibold" pitchFamily="34" charset="-122"/>
-                <a:cs typeface="Segoe UI Semibold" pitchFamily="34" charset="-120"/>
-              </a:rPr>
-              <a:t>04 · GOVINDU · MONITORING SERVICE</a:t>
+                <a:latin typeface="Segoe UI Semibold" panose="020B0702040204020203" pitchFamily="34" charset="0"/>
+                <a:ea typeface="Segoe UI Semibold" panose="020B0702040204020203" pitchFamily="34" charset="-122"/>
+                <a:cs typeface="Segoe UI Semibold" panose="020B0702040204020203" pitchFamily="34" charset="-120"/>
+              </a:rPr>
+              <a:t>04 · MONITORING SERVICE</a:t>
             </a:r>
             <a:endParaRPr lang="en-US" sz="1050" dirty="0"/>
           </a:p>
@@ -5473,13 +5106,12 @@
             <a:avLst/>
           </a:prstGeom>
           <a:noFill/>
-          <a:ln/>
-        </p:spPr>
-        <p:txBody>
-          <a:bodyPr wrap="square" lIns="0" tIns="0" rIns="0" bIns="0" rtlCol="0" anchor="ctr"/>
-          <a:lstStyle/>
-          <a:p>
-            <a:pPr indent="0" marL="0">
+        </p:spPr>
+        <p:txBody>
+          <a:bodyPr wrap="square" lIns="0" tIns="0" rIns="0" bIns="0" rtlCol="0" anchor="ctr"/>
+          <a:lstStyle/>
+          <a:p>
+            <a:pPr marL="0" indent="0">
               <a:buNone/>
             </a:pPr>
             <a:r>
@@ -5487,23 +5119,20 @@
                 <a:solidFill>
                   <a:srgbClr val="05060C"/>
                 </a:solidFill>
-                <a:latin typeface="Segoe UI Light" pitchFamily="34" charset="0"/>
-                <a:ea typeface="Segoe UI Light" pitchFamily="34" charset="-122"/>
-                <a:cs typeface="Segoe UI Light" pitchFamily="34" charset="-120"/>
+                <a:latin typeface="Segoe UI Light" panose="020B0502040204020203" pitchFamily="34" charset="0"/>
+                <a:ea typeface="Segoe UI Light" panose="020B0502040204020203" pitchFamily="34" charset="-122"/>
+                <a:cs typeface="Segoe UI Light" panose="020B0502040204020203" pitchFamily="34" charset="-120"/>
               </a:rPr>
               <a:t>From a sensor reading to </a:t>
             </a:r>
-            <a:pPr indent="0" marL="0">
-              <a:buNone/>
-            </a:pPr>
             <a:r>
               <a:rPr lang="en-US" sz="3200" dirty="0">
                 <a:solidFill>
                   <a:srgbClr val="2B3DFF"/>
                 </a:solidFill>
-                <a:latin typeface="Segoe UI Light" pitchFamily="34" charset="0"/>
-                <a:ea typeface="Segoe UI Light" pitchFamily="34" charset="-122"/>
-                <a:cs typeface="Segoe UI Light" pitchFamily="34" charset="-120"/>
+                <a:latin typeface="Segoe UI Light" panose="020B0502040204020203" pitchFamily="34" charset="0"/>
+                <a:ea typeface="Segoe UI Light" panose="020B0502040204020203" pitchFamily="34" charset="-122"/>
+                <a:cs typeface="Segoe UI Light" panose="020B0502040204020203" pitchFamily="34" charset="-120"/>
               </a:rPr>
               <a:t>an instant alert</a:t>
             </a:r>
@@ -5551,13 +5180,12 @@
             <a:avLst/>
           </a:prstGeom>
           <a:noFill/>
-          <a:ln/>
-        </p:spPr>
-        <p:txBody>
-          <a:bodyPr wrap="square" lIns="0" tIns="0" rIns="0" bIns="0" rtlCol="0" anchor="ctr"/>
-          <a:lstStyle/>
-          <a:p>
-            <a:pPr indent="0" marL="0">
+        </p:spPr>
+        <p:txBody>
+          <a:bodyPr wrap="square" lIns="0" tIns="0" rIns="0" bIns="0" rtlCol="0" anchor="ctr"/>
+          <a:lstStyle/>
+          <a:p>
+            <a:pPr marL="0" indent="0">
               <a:buNone/>
             </a:pPr>
             <a:r>
@@ -5565,9 +5193,9 @@
                 <a:solidFill>
                   <a:srgbClr val="C9D1FF"/>
                 </a:solidFill>
-                <a:latin typeface="Segoe UI" pitchFamily="34" charset="0"/>
-                <a:ea typeface="Segoe UI" pitchFamily="34" charset="-122"/>
-                <a:cs typeface="Segoe UI" pitchFamily="34" charset="-120"/>
+                <a:latin typeface="Segoe UI" panose="020B0502040204020203" pitchFamily="34" charset="0"/>
+                <a:ea typeface="Segoe UI" panose="020B0502040204020203" pitchFamily="34" charset="-122"/>
+                <a:cs typeface="Segoe UI" panose="020B0502040204020203" pitchFamily="34" charset="-120"/>
               </a:rPr>
               <a:t>EC8208 Software Architecture  ·  University of Ruhuna</a:t>
             </a:r>
@@ -5590,13 +5218,12 @@
             <a:avLst/>
           </a:prstGeom>
           <a:noFill/>
-          <a:ln/>
-        </p:spPr>
-        <p:txBody>
-          <a:bodyPr wrap="square" lIns="0" tIns="0" rIns="0" bIns="0" rtlCol="0" anchor="ctr"/>
-          <a:lstStyle/>
-          <a:p>
-            <a:pPr algn="r" indent="0" marL="0">
+        </p:spPr>
+        <p:txBody>
+          <a:bodyPr wrap="square" lIns="0" tIns="0" rIns="0" bIns="0" rtlCol="0" anchor="ctr"/>
+          <a:lstStyle/>
+          <a:p>
+            <a:pPr marL="0" indent="0" algn="r">
               <a:buNone/>
             </a:pPr>
             <a:r>
@@ -5604,9 +5231,9 @@
                 <a:solidFill>
                   <a:srgbClr val="C9D1FF"/>
                 </a:solidFill>
-                <a:latin typeface="Segoe UI" pitchFamily="34" charset="0"/>
-                <a:ea typeface="Segoe UI" pitchFamily="34" charset="-122"/>
-                <a:cs typeface="Segoe UI" pitchFamily="34" charset="-120"/>
+                <a:latin typeface="Segoe UI" panose="020B0502040204020203" pitchFamily="34" charset="0"/>
+                <a:ea typeface="Segoe UI" panose="020B0502040204020203" pitchFamily="34" charset="-122"/>
+                <a:cs typeface="Segoe UI" panose="020B0502040204020203" pitchFamily="34" charset="-120"/>
               </a:rPr>
               <a:t>04  ·  2:08–3:46</a:t>
             </a:r>
@@ -5656,13 +5283,12 @@
             <a:avLst/>
           </a:prstGeom>
           <a:noFill/>
-          <a:ln/>
-        </p:spPr>
-        <p:txBody>
-          <a:bodyPr wrap="square" lIns="0" tIns="0" rIns="0" bIns="0" rtlCol="0" anchor="ctr"/>
-          <a:lstStyle/>
-          <a:p>
-            <a:pPr algn="ctr" indent="0" marL="0">
+        </p:spPr>
+        <p:txBody>
+          <a:bodyPr wrap="square" lIns="0" tIns="0" rIns="0" bIns="0" rtlCol="0" anchor="ctr"/>
+          <a:lstStyle/>
+          <a:p>
+            <a:pPr marL="0" indent="0" algn="ctr">
               <a:buNone/>
             </a:pPr>
             <a:r>
@@ -5670,9 +5296,9 @@
                 <a:solidFill>
                   <a:srgbClr val="FFFFFF"/>
                 </a:solidFill>
-                <a:latin typeface="Segoe UI Semibold" pitchFamily="34" charset="0"/>
-                <a:ea typeface="Segoe UI Semibold" pitchFamily="34" charset="-122"/>
-                <a:cs typeface="Segoe UI Semibold" pitchFamily="34" charset="-120"/>
+                <a:latin typeface="Segoe UI Semibold" panose="020B0702040204020203" pitchFamily="34" charset="0"/>
+                <a:ea typeface="Segoe UI Semibold" panose="020B0702040204020203" pitchFamily="34" charset="-122"/>
+                <a:cs typeface="Segoe UI Semibold" panose="020B0702040204020203" pitchFamily="34" charset="-120"/>
               </a:rPr>
               <a:t>Reading</a:t>
             </a:r>
@@ -5695,13 +5321,12 @@
             <a:avLst/>
           </a:prstGeom>
           <a:noFill/>
-          <a:ln/>
-        </p:spPr>
-        <p:txBody>
-          <a:bodyPr wrap="square" lIns="0" tIns="0" rIns="0" bIns="0" rtlCol="0" anchor="ctr"/>
-          <a:lstStyle/>
-          <a:p>
-            <a:pPr algn="ctr" indent="0" marL="0">
+        </p:spPr>
+        <p:txBody>
+          <a:bodyPr wrap="square" lIns="0" tIns="0" rIns="0" bIns="0" rtlCol="0" anchor="ctr"/>
+          <a:lstStyle/>
+          <a:p>
+            <a:pPr marL="0" indent="0" algn="ctr">
               <a:buNone/>
             </a:pPr>
             <a:r>
@@ -5709,9 +5334,9 @@
                 <a:solidFill>
                   <a:srgbClr val="C9D1FF"/>
                 </a:solidFill>
-                <a:latin typeface="Segoe UI" pitchFamily="34" charset="0"/>
-                <a:ea typeface="Segoe UI" pitchFamily="34" charset="-122"/>
-                <a:cs typeface="Segoe UI" pitchFamily="34" charset="-120"/>
+                <a:latin typeface="Segoe UI" panose="020B0502040204020203" pitchFamily="34" charset="0"/>
+                <a:ea typeface="Segoe UI" panose="020B0502040204020203" pitchFamily="34" charset="-122"/>
+                <a:cs typeface="Segoe UI" panose="020B0502040204020203" pitchFamily="34" charset="-120"/>
               </a:rPr>
               <a:t>every few seconds</a:t>
             </a:r>
@@ -5734,13 +5359,12 @@
             <a:avLst/>
           </a:prstGeom>
           <a:noFill/>
-          <a:ln/>
-        </p:spPr>
-        <p:txBody>
-          <a:bodyPr wrap="square" lIns="0" tIns="0" rIns="0" bIns="0" rtlCol="0" anchor="ctr"/>
-          <a:lstStyle/>
-          <a:p>
-            <a:pPr algn="ctr" indent="0" marL="0">
+        </p:spPr>
+        <p:txBody>
+          <a:bodyPr wrap="square" lIns="0" tIns="0" rIns="0" bIns="0" rtlCol="0" anchor="ctr"/>
+          <a:lstStyle/>
+          <a:p>
+            <a:pPr marL="0" indent="0" algn="ctr">
               <a:buNone/>
             </a:pPr>
             <a:r>
@@ -5748,9 +5372,9 @@
                 <a:solidFill>
                   <a:srgbClr val="2B3DFF"/>
                 </a:solidFill>
-                <a:latin typeface="Segoe UI Semibold" pitchFamily="34" charset="0"/>
-                <a:ea typeface="Segoe UI Semibold" pitchFamily="34" charset="-122"/>
-                <a:cs typeface="Segoe UI Semibold" pitchFamily="34" charset="-120"/>
+                <a:latin typeface="Segoe UI Semibold" panose="020B0702040204020203" pitchFamily="34" charset="0"/>
+                <a:ea typeface="Segoe UI Semibold" panose="020B0702040204020203" pitchFamily="34" charset="-122"/>
+                <a:cs typeface="Segoe UI Semibold" panose="020B0702040204020203" pitchFamily="34" charset="-120"/>
               </a:rPr>
               <a:t>›</a:t>
             </a:r>
@@ -5800,13 +5424,12 @@
             <a:avLst/>
           </a:prstGeom>
           <a:noFill/>
-          <a:ln/>
-        </p:spPr>
-        <p:txBody>
-          <a:bodyPr wrap="square" lIns="0" tIns="0" rIns="0" bIns="0" rtlCol="0" anchor="ctr"/>
-          <a:lstStyle/>
-          <a:p>
-            <a:pPr algn="ctr" indent="0" marL="0">
+        </p:spPr>
+        <p:txBody>
+          <a:bodyPr wrap="square" lIns="0" tIns="0" rIns="0" bIns="0" rtlCol="0" anchor="ctr"/>
+          <a:lstStyle/>
+          <a:p>
+            <a:pPr marL="0" indent="0" algn="ctr">
               <a:buNone/>
             </a:pPr>
             <a:r>
@@ -5814,9 +5437,9 @@
                 <a:solidFill>
                   <a:srgbClr val="05060C"/>
                 </a:solidFill>
-                <a:latin typeface="Segoe UI Semibold" pitchFamily="34" charset="0"/>
-                <a:ea typeface="Segoe UI Semibold" pitchFamily="34" charset="-122"/>
-                <a:cs typeface="Segoe UI Semibold" pitchFamily="34" charset="-120"/>
+                <a:latin typeface="Segoe UI Semibold" panose="020B0702040204020203" pitchFamily="34" charset="0"/>
+                <a:ea typeface="Segoe UI Semibold" panose="020B0702040204020203" pitchFamily="34" charset="-122"/>
+                <a:cs typeface="Segoe UI Semibold" panose="020B0702040204020203" pitchFamily="34" charset="-120"/>
               </a:rPr>
               <a:t>Rule check</a:t>
             </a:r>
@@ -5839,13 +5462,12 @@
             <a:avLst/>
           </a:prstGeom>
           <a:noFill/>
-          <a:ln/>
-        </p:spPr>
-        <p:txBody>
-          <a:bodyPr wrap="square" lIns="0" tIns="0" rIns="0" bIns="0" rtlCol="0" anchor="ctr"/>
-          <a:lstStyle/>
-          <a:p>
-            <a:pPr algn="ctr" indent="0" marL="0">
+        </p:spPr>
+        <p:txBody>
+          <a:bodyPr wrap="square" lIns="0" tIns="0" rIns="0" bIns="0" rtlCol="0" anchor="ctr"/>
+          <a:lstStyle/>
+          <a:p>
+            <a:pPr marL="0" indent="0" algn="ctr">
               <a:buNone/>
             </a:pPr>
             <a:r>
@@ -5853,9 +5475,9 @@
                 <a:solidFill>
                   <a:srgbClr val="5B6478"/>
                 </a:solidFill>
-                <a:latin typeface="Segoe UI" pitchFamily="34" charset="0"/>
-                <a:ea typeface="Segoe UI" pitchFamily="34" charset="-122"/>
-                <a:cs typeface="Segoe UI" pitchFamily="34" charset="-120"/>
+                <a:latin typeface="Segoe UI" panose="020B0502040204020203" pitchFamily="34" charset="0"/>
+                <a:ea typeface="Segoe UI" panose="020B0502040204020203" pitchFamily="34" charset="-122"/>
+                <a:cs typeface="Segoe UI" panose="020B0502040204020203" pitchFamily="34" charset="-120"/>
               </a:rPr>
               <a:t>threshold</a:t>
             </a:r>
@@ -5878,13 +5500,12 @@
             <a:avLst/>
           </a:prstGeom>
           <a:noFill/>
-          <a:ln/>
-        </p:spPr>
-        <p:txBody>
-          <a:bodyPr wrap="square" lIns="0" tIns="0" rIns="0" bIns="0" rtlCol="0" anchor="ctr"/>
-          <a:lstStyle/>
-          <a:p>
-            <a:pPr algn="ctr" indent="0" marL="0">
+        </p:spPr>
+        <p:txBody>
+          <a:bodyPr wrap="square" lIns="0" tIns="0" rIns="0" bIns="0" rtlCol="0" anchor="ctr"/>
+          <a:lstStyle/>
+          <a:p>
+            <a:pPr marL="0" indent="0" algn="ctr">
               <a:buNone/>
             </a:pPr>
             <a:r>
@@ -5892,9 +5513,9 @@
                 <a:solidFill>
                   <a:srgbClr val="2B3DFF"/>
                 </a:solidFill>
-                <a:latin typeface="Segoe UI Semibold" pitchFamily="34" charset="0"/>
-                <a:ea typeface="Segoe UI Semibold" pitchFamily="34" charset="-122"/>
-                <a:cs typeface="Segoe UI Semibold" pitchFamily="34" charset="-120"/>
+                <a:latin typeface="Segoe UI Semibold" panose="020B0702040204020203" pitchFamily="34" charset="0"/>
+                <a:ea typeface="Segoe UI Semibold" panose="020B0702040204020203" pitchFamily="34" charset="-122"/>
+                <a:cs typeface="Segoe UI Semibold" panose="020B0702040204020203" pitchFamily="34" charset="-120"/>
               </a:rPr>
               <a:t>›</a:t>
             </a:r>
@@ -5944,13 +5565,12 @@
             <a:avLst/>
           </a:prstGeom>
           <a:noFill/>
-          <a:ln/>
-        </p:spPr>
-        <p:txBody>
-          <a:bodyPr wrap="square" lIns="0" tIns="0" rIns="0" bIns="0" rtlCol="0" anchor="ctr"/>
-          <a:lstStyle/>
-          <a:p>
-            <a:pPr algn="ctr" indent="0" marL="0">
+        </p:spPr>
+        <p:txBody>
+          <a:bodyPr wrap="square" lIns="0" tIns="0" rIns="0" bIns="0" rtlCol="0" anchor="ctr"/>
+          <a:lstStyle/>
+          <a:p>
+            <a:pPr marL="0" indent="0" algn="ctr">
               <a:buNone/>
             </a:pPr>
             <a:r>
@@ -5958,9 +5578,9 @@
                 <a:solidFill>
                   <a:srgbClr val="05060C"/>
                 </a:solidFill>
-                <a:latin typeface="Segoe UI Semibold" pitchFamily="34" charset="0"/>
-                <a:ea typeface="Segoe UI Semibold" pitchFamily="34" charset="-122"/>
-                <a:cs typeface="Segoe UI Semibold" pitchFamily="34" charset="-120"/>
+                <a:latin typeface="Segoe UI Semibold" panose="020B0702040204020203" pitchFamily="34" charset="0"/>
+                <a:ea typeface="Segoe UI Semibold" panose="020B0702040204020203" pitchFamily="34" charset="-122"/>
+                <a:cs typeface="Segoe UI Semibold" panose="020B0702040204020203" pitchFamily="34" charset="-120"/>
               </a:rPr>
               <a:t>Alert</a:t>
             </a:r>
@@ -5983,13 +5603,12 @@
             <a:avLst/>
           </a:prstGeom>
           <a:noFill/>
-          <a:ln/>
-        </p:spPr>
-        <p:txBody>
-          <a:bodyPr wrap="square" lIns="0" tIns="0" rIns="0" bIns="0" rtlCol="0" anchor="ctr"/>
-          <a:lstStyle/>
-          <a:p>
-            <a:pPr algn="ctr" indent="0" marL="0">
+        </p:spPr>
+        <p:txBody>
+          <a:bodyPr wrap="square" lIns="0" tIns="0" rIns="0" bIns="0" rtlCol="0" anchor="ctr"/>
+          <a:lstStyle/>
+          <a:p>
+            <a:pPr marL="0" indent="0" algn="ctr">
               <a:buNone/>
             </a:pPr>
             <a:r>
@@ -5997,9 +5616,9 @@
                 <a:solidFill>
                   <a:srgbClr val="5B6478"/>
                 </a:solidFill>
-                <a:latin typeface="Segoe UI" pitchFamily="34" charset="0"/>
-                <a:ea typeface="Segoe UI" pitchFamily="34" charset="-122"/>
-                <a:cs typeface="Segoe UI" pitchFamily="34" charset="-120"/>
+                <a:latin typeface="Segoe UI" panose="020B0502040204020203" pitchFamily="34" charset="0"/>
+                <a:ea typeface="Segoe UI" panose="020B0502040204020203" pitchFamily="34" charset="-122"/>
+                <a:cs typeface="Segoe UI" panose="020B0502040204020203" pitchFamily="34" charset="-120"/>
               </a:rPr>
               <a:t>one per asset</a:t>
             </a:r>
@@ -6022,13 +5641,12 @@
             <a:avLst/>
           </a:prstGeom>
           <a:noFill/>
-          <a:ln/>
-        </p:spPr>
-        <p:txBody>
-          <a:bodyPr wrap="square" lIns="0" tIns="0" rIns="0" bIns="0" rtlCol="0" anchor="ctr"/>
-          <a:lstStyle/>
-          <a:p>
-            <a:pPr algn="ctr" indent="0" marL="0">
+        </p:spPr>
+        <p:txBody>
+          <a:bodyPr wrap="square" lIns="0" tIns="0" rIns="0" bIns="0" rtlCol="0" anchor="ctr"/>
+          <a:lstStyle/>
+          <a:p>
+            <a:pPr marL="0" indent="0" algn="ctr">
               <a:buNone/>
             </a:pPr>
             <a:r>
@@ -6036,9 +5654,9 @@
                 <a:solidFill>
                   <a:srgbClr val="2B3DFF"/>
                 </a:solidFill>
-                <a:latin typeface="Segoe UI Semibold" pitchFamily="34" charset="0"/>
-                <a:ea typeface="Segoe UI Semibold" pitchFamily="34" charset="-122"/>
-                <a:cs typeface="Segoe UI Semibold" pitchFamily="34" charset="-120"/>
+                <a:latin typeface="Segoe UI Semibold" panose="020B0702040204020203" pitchFamily="34" charset="0"/>
+                <a:ea typeface="Segoe UI Semibold" panose="020B0702040204020203" pitchFamily="34" charset="-122"/>
+                <a:cs typeface="Segoe UI Semibold" panose="020B0702040204020203" pitchFamily="34" charset="-120"/>
               </a:rPr>
               <a:t>›</a:t>
             </a:r>
@@ -6088,13 +5706,12 @@
             <a:avLst/>
           </a:prstGeom>
           <a:noFill/>
-          <a:ln/>
-        </p:spPr>
-        <p:txBody>
-          <a:bodyPr wrap="square" lIns="0" tIns="0" rIns="0" bIns="0" rtlCol="0" anchor="ctr"/>
-          <a:lstStyle/>
-          <a:p>
-            <a:pPr algn="ctr" indent="0" marL="0">
+        </p:spPr>
+        <p:txBody>
+          <a:bodyPr wrap="square" lIns="0" tIns="0" rIns="0" bIns="0" rtlCol="0" anchor="ctr"/>
+          <a:lstStyle/>
+          <a:p>
+            <a:pPr marL="0" indent="0" algn="ctr">
               <a:buNone/>
             </a:pPr>
             <a:r>
@@ -6102,9 +5719,9 @@
                 <a:solidFill>
                   <a:srgbClr val="05060C"/>
                 </a:solidFill>
-                <a:latin typeface="Segoe UI Semibold" pitchFamily="34" charset="0"/>
-                <a:ea typeface="Segoe UI Semibold" pitchFamily="34" charset="-122"/>
-                <a:cs typeface="Segoe UI Semibold" pitchFamily="34" charset="-120"/>
+                <a:latin typeface="Segoe UI Semibold" panose="020B0702040204020203" pitchFamily="34" charset="0"/>
+                <a:ea typeface="Segoe UI Semibold" panose="020B0702040204020203" pitchFamily="34" charset="-122"/>
+                <a:cs typeface="Segoe UI Semibold" panose="020B0702040204020203" pitchFamily="34" charset="-120"/>
               </a:rPr>
               <a:t>RabbitMQ</a:t>
             </a:r>
@@ -6127,13 +5744,12 @@
             <a:avLst/>
           </a:prstGeom>
           <a:noFill/>
-          <a:ln/>
-        </p:spPr>
-        <p:txBody>
-          <a:bodyPr wrap="square" lIns="0" tIns="0" rIns="0" bIns="0" rtlCol="0" anchor="ctr"/>
-          <a:lstStyle/>
-          <a:p>
-            <a:pPr algn="ctr" indent="0" marL="0">
+        </p:spPr>
+        <p:txBody>
+          <a:bodyPr wrap="square" lIns="0" tIns="0" rIns="0" bIns="0" rtlCol="0" anchor="ctr"/>
+          <a:lstStyle/>
+          <a:p>
+            <a:pPr marL="0" indent="0" algn="ctr">
               <a:buNone/>
             </a:pPr>
             <a:r>
@@ -6141,9 +5757,9 @@
                 <a:solidFill>
                   <a:srgbClr val="5B6478"/>
                 </a:solidFill>
-                <a:latin typeface="Segoe UI" pitchFamily="34" charset="0"/>
-                <a:ea typeface="Segoe UI" pitchFamily="34" charset="-122"/>
-                <a:cs typeface="Segoe UI" pitchFamily="34" charset="-120"/>
+                <a:latin typeface="Segoe UI" panose="020B0502040204020203" pitchFamily="34" charset="0"/>
+                <a:ea typeface="Segoe UI" panose="020B0502040204020203" pitchFamily="34" charset="-122"/>
+                <a:cs typeface="Segoe UI" panose="020B0502040204020203" pitchFamily="34" charset="-120"/>
               </a:rPr>
               <a:t>event</a:t>
             </a:r>
@@ -6189,13 +5805,12 @@
             <a:avLst/>
           </a:prstGeom>
           <a:noFill/>
-          <a:ln/>
-        </p:spPr>
-        <p:txBody>
-          <a:bodyPr wrap="square" lIns="0" tIns="0" rIns="0" bIns="0" rtlCol="0" anchor="ctr"/>
-          <a:lstStyle/>
-          <a:p>
-            <a:pPr indent="0" marL="0">
+        </p:spPr>
+        <p:txBody>
+          <a:bodyPr wrap="square" lIns="0" tIns="0" rIns="0" bIns="0" rtlCol="0" anchor="ctr"/>
+          <a:lstStyle/>
+          <a:p>
+            <a:pPr marL="0" indent="0">
               <a:buNone/>
             </a:pPr>
             <a:r>
@@ -6203,9 +5818,9 @@
                 <a:solidFill>
                   <a:srgbClr val="FFFFFF"/>
                 </a:solidFill>
-                <a:latin typeface="Segoe UI Light" pitchFamily="34" charset="0"/>
-                <a:ea typeface="Segoe UI Light" pitchFamily="34" charset="-122"/>
-                <a:cs typeface="Segoe UI Light" pitchFamily="34" charset="-120"/>
+                <a:latin typeface="Segoe UI Light" panose="020B0502040204020203" pitchFamily="34" charset="0"/>
+                <a:ea typeface="Segoe UI Light" panose="020B0502040204020203" pitchFamily="34" charset="-122"/>
+                <a:cs typeface="Segoe UI Light" panose="020B0502040204020203" pitchFamily="34" charset="-120"/>
               </a:rPr>
               <a:t>16,000+</a:t>
             </a:r>
@@ -6228,13 +5843,12 @@
             <a:avLst/>
           </a:prstGeom>
           <a:noFill/>
-          <a:ln/>
         </p:spPr>
         <p:txBody>
           <a:bodyPr wrap="square" lIns="0" tIns="0" rIns="0" bIns="0" rtlCol="0" anchor="t"/>
           <a:lstStyle/>
           <a:p>
-            <a:pPr indent="0" marL="0">
+            <a:pPr marL="0" indent="0">
               <a:buNone/>
             </a:pPr>
             <a:r>
@@ -6242,9 +5856,9 @@
                 <a:solidFill>
                   <a:srgbClr val="C9D1FF"/>
                 </a:solidFill>
-                <a:latin typeface="Segoe UI" pitchFamily="34" charset="0"/>
-                <a:ea typeface="Segoe UI" pitchFamily="34" charset="-122"/>
-                <a:cs typeface="Segoe UI" pitchFamily="34" charset="-120"/>
+                <a:latin typeface="Segoe UI" panose="020B0502040204020203" pitchFamily="34" charset="0"/>
+                <a:ea typeface="Segoe UI" panose="020B0502040204020203" pitchFamily="34" charset="-122"/>
+                <a:cs typeface="Segoe UI" panose="020B0502040204020203" pitchFamily="34" charset="-120"/>
               </a:rPr>
               <a:t>readings stored</a:t>
             </a:r>
@@ -6290,13 +5904,12 @@
             <a:avLst/>
           </a:prstGeom>
           <a:noFill/>
-          <a:ln/>
-        </p:spPr>
-        <p:txBody>
-          <a:bodyPr wrap="square" lIns="0" tIns="0" rIns="0" bIns="0" rtlCol="0" anchor="ctr"/>
-          <a:lstStyle/>
-          <a:p>
-            <a:pPr indent="0" marL="0">
+        </p:spPr>
+        <p:txBody>
+          <a:bodyPr wrap="square" lIns="0" tIns="0" rIns="0" bIns="0" rtlCol="0" anchor="ctr"/>
+          <a:lstStyle/>
+          <a:p>
+            <a:pPr marL="0" indent="0">
               <a:buNone/>
             </a:pPr>
             <a:r>
@@ -6304,9 +5917,9 @@
                 <a:solidFill>
                   <a:srgbClr val="FFFFFF"/>
                 </a:solidFill>
-                <a:latin typeface="Segoe UI Light" pitchFamily="34" charset="0"/>
-                <a:ea typeface="Segoe UI Light" pitchFamily="34" charset="-122"/>
-                <a:cs typeface="Segoe UI Light" pitchFamily="34" charset="-120"/>
+                <a:latin typeface="Segoe UI Light" panose="020B0502040204020203" pitchFamily="34" charset="0"/>
+                <a:ea typeface="Segoe UI Light" panose="020B0502040204020203" pitchFamily="34" charset="-122"/>
+                <a:cs typeface="Segoe UI Light" panose="020B0502040204020203" pitchFamily="34" charset="-120"/>
               </a:rPr>
               <a:t>7</a:t>
             </a:r>
@@ -6329,13 +5942,12 @@
             <a:avLst/>
           </a:prstGeom>
           <a:noFill/>
-          <a:ln/>
         </p:spPr>
         <p:txBody>
           <a:bodyPr wrap="square" lIns="0" tIns="0" rIns="0" bIns="0" rtlCol="0" anchor="t"/>
           <a:lstStyle/>
           <a:p>
-            <a:pPr indent="0" marL="0">
+            <a:pPr marL="0" indent="0">
               <a:buNone/>
             </a:pPr>
             <a:r>
@@ -6343,9 +5955,9 @@
                 <a:solidFill>
                   <a:srgbClr val="C9D1FF"/>
                 </a:solidFill>
-                <a:latin typeface="Segoe UI" pitchFamily="34" charset="0"/>
-                <a:ea typeface="Segoe UI" pitchFamily="34" charset="-122"/>
-                <a:cs typeface="Segoe UI" pitchFamily="34" charset="-120"/>
+                <a:latin typeface="Segoe UI" panose="020B0502040204020203" pitchFamily="34" charset="0"/>
+                <a:ea typeface="Segoe UI" panose="020B0502040204020203" pitchFamily="34" charset="-122"/>
+                <a:cs typeface="Segoe UI" panose="020B0502040204020203" pitchFamily="34" charset="-120"/>
               </a:rPr>
               <a:t>alert rules</a:t>
             </a:r>
@@ -6391,13 +6003,12 @@
             <a:avLst/>
           </a:prstGeom>
           <a:noFill/>
-          <a:ln/>
-        </p:spPr>
-        <p:txBody>
-          <a:bodyPr wrap="square" lIns="0" tIns="0" rIns="0" bIns="0" rtlCol="0" anchor="ctr"/>
-          <a:lstStyle/>
-          <a:p>
-            <a:pPr indent="0" marL="0">
+        </p:spPr>
+        <p:txBody>
+          <a:bodyPr wrap="square" lIns="0" tIns="0" rIns="0" bIns="0" rtlCol="0" anchor="ctr"/>
+          <a:lstStyle/>
+          <a:p>
+            <a:pPr marL="0" indent="0">
               <a:buNone/>
             </a:pPr>
             <a:r>
@@ -6405,9 +6016,9 @@
                 <a:solidFill>
                   <a:srgbClr val="FFFFFF"/>
                 </a:solidFill>
-                <a:latin typeface="Segoe UI Light" pitchFamily="34" charset="0"/>
-                <a:ea typeface="Segoe UI Light" pitchFamily="34" charset="-122"/>
-                <a:cs typeface="Segoe UI Light" pitchFamily="34" charset="-120"/>
+                <a:latin typeface="Segoe UI Light" panose="020B0502040204020203" pitchFamily="34" charset="0"/>
+                <a:ea typeface="Segoe UI Light" panose="020B0502040204020203" pitchFamily="34" charset="-122"/>
+                <a:cs typeface="Segoe UI Light" panose="020B0502040204020203" pitchFamily="34" charset="-120"/>
               </a:rPr>
               <a:t>10 s</a:t>
             </a:r>
@@ -6430,13 +6041,12 @@
             <a:avLst/>
           </a:prstGeom>
           <a:noFill/>
-          <a:ln/>
         </p:spPr>
         <p:txBody>
           <a:bodyPr wrap="square" lIns="0" tIns="0" rIns="0" bIns="0" rtlCol="0" anchor="t"/>
           <a:lstStyle/>
           <a:p>
-            <a:pPr indent="0" marL="0">
+            <a:pPr marL="0" indent="0">
               <a:buNone/>
             </a:pPr>
             <a:r>
@@ -6444,9 +6054,9 @@
                 <a:solidFill>
                   <a:srgbClr val="C9D1FF"/>
                 </a:solidFill>
-                <a:latin typeface="Segoe UI" pitchFamily="34" charset="0"/>
-                <a:ea typeface="Segoe UI" pitchFamily="34" charset="-122"/>
-                <a:cs typeface="Segoe UI" pitchFamily="34" charset="-120"/>
+                <a:latin typeface="Segoe UI" panose="020B0502040204020203" pitchFamily="34" charset="0"/>
+                <a:ea typeface="Segoe UI" panose="020B0502040204020203" pitchFamily="34" charset="-122"/>
+                <a:cs typeface="Segoe UI" panose="020B0502040204020203" pitchFamily="34" charset="-120"/>
               </a:rPr>
               <a:t>Redis cached dashboard</a:t>
             </a:r>
@@ -6500,13 +6110,12 @@
             <a:avLst/>
           </a:prstGeom>
           <a:noFill/>
-          <a:ln/>
-        </p:spPr>
-        <p:txBody>
-          <a:bodyPr wrap="square" lIns="0" tIns="0" rIns="0" bIns="0" rtlCol="0" anchor="ctr"/>
-          <a:lstStyle/>
-          <a:p>
-            <a:pPr indent="0" marL="0">
+        </p:spPr>
+        <p:txBody>
+          <a:bodyPr wrap="square" lIns="0" tIns="0" rIns="0" bIns="0" rtlCol="0" anchor="ctr"/>
+          <a:lstStyle/>
+          <a:p>
+            <a:pPr marL="0" indent="0">
               <a:buNone/>
             </a:pPr>
             <a:r>
@@ -6514,23 +6123,20 @@
                 <a:solidFill>
                   <a:srgbClr val="8FA0FF"/>
                 </a:solidFill>
-                <a:latin typeface="Segoe UI" pitchFamily="34" charset="0"/>
-                <a:ea typeface="Segoe UI" pitchFamily="34" charset="-122"/>
-                <a:cs typeface="Segoe UI" pitchFamily="34" charset="-120"/>
+                <a:latin typeface="Segoe UI" panose="020B0502040204020203" pitchFamily="34" charset="0"/>
+                <a:ea typeface="Segoe UI" panose="020B0502040204020203" pitchFamily="34" charset="-122"/>
+                <a:cs typeface="Segoe UI" panose="020B0502040204020203" pitchFamily="34" charset="-120"/>
               </a:rPr>
               <a:t>LIVE  </a:t>
             </a:r>
-            <a:pPr indent="0" marL="0">
-              <a:buNone/>
-            </a:pPr>
             <a:r>
               <a:rPr lang="en-US" sz="1100" dirty="0">
                 <a:solidFill>
                   <a:srgbClr val="FFFFFF"/>
                 </a:solidFill>
-                <a:latin typeface="Segoe UI" pitchFamily="34" charset="0"/>
-                <a:ea typeface="Segoe UI" pitchFamily="34" charset="-122"/>
-                <a:cs typeface="Segoe UI" pitchFamily="34" charset="-120"/>
+                <a:latin typeface="Segoe UI" panose="020B0502040204020203" pitchFamily="34" charset="0"/>
+                <a:ea typeface="Segoe UI" panose="020B0502040204020203" pitchFamily="34" charset="-122"/>
+                <a:cs typeface="Segoe UI" panose="020B0502040204020203" pitchFamily="34" charset="-120"/>
               </a:rPr>
               <a:t>Live monitoring page (tiles and dashed threshold)</a:t>
             </a:r>
@@ -6548,7 +6154,7 @@
 
 <file path=ppt/slides/slide5.xml><?xml version="1.0" encoding="utf-8"?>
 <p:sld xmlns:a="http://schemas.openxmlformats.org/drawingml/2006/main" xmlns:r="http://schemas.openxmlformats.org/officeDocument/2006/relationships" xmlns:p="http://schemas.openxmlformats.org/presentationml/2006/main">
-  <p:cSld name="Slide 5">
+  <p:cSld>
     <p:bg>
       <p:bgPr>
         <a:blipFill dpi="0" rotWithShape="1">
@@ -6767,25 +6373,24 @@
             <a:avLst/>
           </a:prstGeom>
           <a:noFill/>
-          <a:ln/>
-        </p:spPr>
-        <p:txBody>
-          <a:bodyPr wrap="square" lIns="0" tIns="0" rIns="0" bIns="0" rtlCol="0" anchor="ctr"/>
-          <a:lstStyle/>
-          <a:p>
-            <a:pPr indent="0" marL="0">
-              <a:buNone/>
-            </a:pPr>
-            <a:r>
-              <a:rPr lang="en-US" sz="1050" spc="300" kern="0" dirty="0">
+        </p:spPr>
+        <p:txBody>
+          <a:bodyPr wrap="square" lIns="0" tIns="0" rIns="0" bIns="0" rtlCol="0" anchor="ctr"/>
+          <a:lstStyle/>
+          <a:p>
+            <a:pPr marL="0" indent="0">
+              <a:buNone/>
+            </a:pPr>
+            <a:r>
+              <a:rPr lang="en-US" sz="1050" kern="0" spc="300" dirty="0">
                 <a:solidFill>
                   <a:srgbClr val="2B3DFF"/>
                 </a:solidFill>
-                <a:latin typeface="Segoe UI Semibold" pitchFamily="34" charset="0"/>
-                <a:ea typeface="Segoe UI Semibold" pitchFamily="34" charset="-122"/>
-                <a:cs typeface="Segoe UI Semibold" pitchFamily="34" charset="-120"/>
-              </a:rPr>
-              <a:t>05 · THURUNU · MAINTENANCE SERVICE</a:t>
+                <a:latin typeface="Segoe UI Semibold" panose="020B0702040204020203" pitchFamily="34" charset="0"/>
+                <a:ea typeface="Segoe UI Semibold" panose="020B0702040204020203" pitchFamily="34" charset="-122"/>
+                <a:cs typeface="Segoe UI Semibold" panose="020B0702040204020203" pitchFamily="34" charset="-120"/>
+              </a:rPr>
+              <a:t>05 · MAINTENANCE SERVICE</a:t>
             </a:r>
             <a:endParaRPr lang="en-US" sz="1050" dirty="0"/>
           </a:p>
@@ -6806,13 +6411,12 @@
             <a:avLst/>
           </a:prstGeom>
           <a:noFill/>
-          <a:ln/>
-        </p:spPr>
-        <p:txBody>
-          <a:bodyPr wrap="square" lIns="0" tIns="0" rIns="0" bIns="0" rtlCol="0" anchor="ctr"/>
-          <a:lstStyle/>
-          <a:p>
-            <a:pPr indent="0" marL="0">
+        </p:spPr>
+        <p:txBody>
+          <a:bodyPr wrap="square" lIns="0" tIns="0" rIns="0" bIns="0" rtlCol="0" anchor="ctr"/>
+          <a:lstStyle/>
+          <a:p>
+            <a:pPr marL="0" indent="0">
               <a:buNone/>
             </a:pPr>
             <a:r>
@@ -6820,23 +6424,20 @@
                 <a:solidFill>
                   <a:srgbClr val="05060C"/>
                 </a:solidFill>
-                <a:latin typeface="Segoe UI Light" pitchFamily="34" charset="0"/>
-                <a:ea typeface="Segoe UI Light" pitchFamily="34" charset="-122"/>
-                <a:cs typeface="Segoe UI Light" pitchFamily="34" charset="-120"/>
+                <a:latin typeface="Segoe UI Light" panose="020B0502040204020203" pitchFamily="34" charset="0"/>
+                <a:ea typeface="Segoe UI Light" panose="020B0502040204020203" pitchFamily="34" charset="-122"/>
+                <a:cs typeface="Segoe UI Light" panose="020B0502040204020203" pitchFamily="34" charset="-120"/>
               </a:rPr>
               <a:t>Faults become </a:t>
             </a:r>
-            <a:pPr indent="0" marL="0">
-              <a:buNone/>
-            </a:pPr>
             <a:r>
               <a:rPr lang="en-US" sz="3200" dirty="0">
                 <a:solidFill>
                   <a:srgbClr val="2B3DFF"/>
                 </a:solidFill>
-                <a:latin typeface="Segoe UI Light" pitchFamily="34" charset="0"/>
-                <a:ea typeface="Segoe UI Light" pitchFamily="34" charset="-122"/>
-                <a:cs typeface="Segoe UI Light" pitchFamily="34" charset="-120"/>
+                <a:latin typeface="Segoe UI Light" panose="020B0502040204020203" pitchFamily="34" charset="0"/>
+                <a:ea typeface="Segoe UI Light" panose="020B0502040204020203" pitchFamily="34" charset="-122"/>
+                <a:cs typeface="Segoe UI Light" panose="020B0502040204020203" pitchFamily="34" charset="-120"/>
               </a:rPr>
               <a:t>tracked work automatically</a:t>
             </a:r>
@@ -6884,13 +6485,12 @@
             <a:avLst/>
           </a:prstGeom>
           <a:noFill/>
-          <a:ln/>
-        </p:spPr>
-        <p:txBody>
-          <a:bodyPr wrap="square" lIns="0" tIns="0" rIns="0" bIns="0" rtlCol="0" anchor="ctr"/>
-          <a:lstStyle/>
-          <a:p>
-            <a:pPr indent="0" marL="0">
+        </p:spPr>
+        <p:txBody>
+          <a:bodyPr wrap="square" lIns="0" tIns="0" rIns="0" bIns="0" rtlCol="0" anchor="ctr"/>
+          <a:lstStyle/>
+          <a:p>
+            <a:pPr marL="0" indent="0">
               <a:buNone/>
             </a:pPr>
             <a:r>
@@ -6898,9 +6498,9 @@
                 <a:solidFill>
                   <a:srgbClr val="C9D1FF"/>
                 </a:solidFill>
-                <a:latin typeface="Segoe UI" pitchFamily="34" charset="0"/>
-                <a:ea typeface="Segoe UI" pitchFamily="34" charset="-122"/>
-                <a:cs typeface="Segoe UI" pitchFamily="34" charset="-120"/>
+                <a:latin typeface="Segoe UI" panose="020B0502040204020203" pitchFamily="34" charset="0"/>
+                <a:ea typeface="Segoe UI" panose="020B0502040204020203" pitchFamily="34" charset="-122"/>
+                <a:cs typeface="Segoe UI" panose="020B0502040204020203" pitchFamily="34" charset="-120"/>
               </a:rPr>
               <a:t>EC8208 Software Architecture  ·  University of Ruhuna</a:t>
             </a:r>
@@ -6923,13 +6523,12 @@
             <a:avLst/>
           </a:prstGeom>
           <a:noFill/>
-          <a:ln/>
-        </p:spPr>
-        <p:txBody>
-          <a:bodyPr wrap="square" lIns="0" tIns="0" rIns="0" bIns="0" rtlCol="0" anchor="ctr"/>
-          <a:lstStyle/>
-          <a:p>
-            <a:pPr algn="r" indent="0" marL="0">
+        </p:spPr>
+        <p:txBody>
+          <a:bodyPr wrap="square" lIns="0" tIns="0" rIns="0" bIns="0" rtlCol="0" anchor="ctr"/>
+          <a:lstStyle/>
+          <a:p>
+            <a:pPr marL="0" indent="0" algn="r">
               <a:buNone/>
             </a:pPr>
             <a:r>
@@ -6937,9 +6536,9 @@
                 <a:solidFill>
                   <a:srgbClr val="C9D1FF"/>
                 </a:solidFill>
-                <a:latin typeface="Segoe UI" pitchFamily="34" charset="0"/>
-                <a:ea typeface="Segoe UI" pitchFamily="34" charset="-122"/>
-                <a:cs typeface="Segoe UI" pitchFamily="34" charset="-120"/>
+                <a:latin typeface="Segoe UI" panose="020B0502040204020203" pitchFamily="34" charset="0"/>
+                <a:ea typeface="Segoe UI" panose="020B0502040204020203" pitchFamily="34" charset="-122"/>
+                <a:cs typeface="Segoe UI" panose="020B0502040204020203" pitchFamily="34" charset="-120"/>
               </a:rPr>
               <a:t>05  ·  3:46–5:24</a:t>
             </a:r>
@@ -6989,13 +6588,12 @@
             <a:avLst/>
           </a:prstGeom>
           <a:noFill/>
-          <a:ln/>
-        </p:spPr>
-        <p:txBody>
-          <a:bodyPr wrap="square" lIns="0" tIns="0" rIns="0" bIns="0" rtlCol="0" anchor="ctr"/>
-          <a:lstStyle/>
-          <a:p>
-            <a:pPr algn="ctr" indent="0" marL="0">
+        </p:spPr>
+        <p:txBody>
+          <a:bodyPr wrap="square" lIns="0" tIns="0" rIns="0" bIns="0" rtlCol="0" anchor="ctr"/>
+          <a:lstStyle/>
+          <a:p>
+            <a:pPr marL="0" indent="0" algn="ctr">
               <a:buNone/>
             </a:pPr>
             <a:r>
@@ -7003,9 +6601,9 @@
                 <a:solidFill>
                   <a:srgbClr val="FFFFFF"/>
                 </a:solidFill>
-                <a:latin typeface="Segoe UI Semibold" pitchFamily="34" charset="0"/>
-                <a:ea typeface="Segoe UI Semibold" pitchFamily="34" charset="-122"/>
-                <a:cs typeface="Segoe UI Semibold" pitchFamily="34" charset="-120"/>
+                <a:latin typeface="Segoe UI Semibold" panose="020B0702040204020203" pitchFamily="34" charset="0"/>
+                <a:ea typeface="Segoe UI Semibold" panose="020B0702040204020203" pitchFamily="34" charset="-122"/>
+                <a:cs typeface="Segoe UI Semibold" panose="020B0702040204020203" pitchFamily="34" charset="-120"/>
               </a:rPr>
               <a:t>Alert event</a:t>
             </a:r>
@@ -7028,13 +6626,12 @@
             <a:avLst/>
           </a:prstGeom>
           <a:noFill/>
-          <a:ln/>
-        </p:spPr>
-        <p:txBody>
-          <a:bodyPr wrap="square" lIns="0" tIns="0" rIns="0" bIns="0" rtlCol="0" anchor="ctr"/>
-          <a:lstStyle/>
-          <a:p>
-            <a:pPr algn="ctr" indent="0" marL="0">
+        </p:spPr>
+        <p:txBody>
+          <a:bodyPr wrap="square" lIns="0" tIns="0" rIns="0" bIns="0" rtlCol="0" anchor="ctr"/>
+          <a:lstStyle/>
+          <a:p>
+            <a:pPr marL="0" indent="0" algn="ctr">
               <a:buNone/>
             </a:pPr>
             <a:r>
@@ -7042,9 +6639,9 @@
                 <a:solidFill>
                   <a:srgbClr val="C9D1FF"/>
                 </a:solidFill>
-                <a:latin typeface="Segoe UI" pitchFamily="34" charset="0"/>
-                <a:ea typeface="Segoe UI" pitchFamily="34" charset="-122"/>
-                <a:cs typeface="Segoe UI" pitchFamily="34" charset="-120"/>
+                <a:latin typeface="Segoe UI" panose="020B0502040204020203" pitchFamily="34" charset="0"/>
+                <a:ea typeface="Segoe UI" panose="020B0502040204020203" pitchFamily="34" charset="-122"/>
+                <a:cs typeface="Segoe UI" panose="020B0502040204020203" pitchFamily="34" charset="-120"/>
               </a:rPr>
               <a:t>high or critical</a:t>
             </a:r>
@@ -7067,13 +6664,12 @@
             <a:avLst/>
           </a:prstGeom>
           <a:noFill/>
-          <a:ln/>
-        </p:spPr>
-        <p:txBody>
-          <a:bodyPr wrap="square" lIns="0" tIns="0" rIns="0" bIns="0" rtlCol="0" anchor="ctr"/>
-          <a:lstStyle/>
-          <a:p>
-            <a:pPr algn="ctr" indent="0" marL="0">
+        </p:spPr>
+        <p:txBody>
+          <a:bodyPr wrap="square" lIns="0" tIns="0" rIns="0" bIns="0" rtlCol="0" anchor="ctr"/>
+          <a:lstStyle/>
+          <a:p>
+            <a:pPr marL="0" indent="0" algn="ctr">
               <a:buNone/>
             </a:pPr>
             <a:r>
@@ -7081,9 +6677,9 @@
                 <a:solidFill>
                   <a:srgbClr val="2B3DFF"/>
                 </a:solidFill>
-                <a:latin typeface="Segoe UI Semibold" pitchFamily="34" charset="0"/>
-                <a:ea typeface="Segoe UI Semibold" pitchFamily="34" charset="-122"/>
-                <a:cs typeface="Segoe UI Semibold" pitchFamily="34" charset="-120"/>
+                <a:latin typeface="Segoe UI Semibold" panose="020B0702040204020203" pitchFamily="34" charset="0"/>
+                <a:ea typeface="Segoe UI Semibold" panose="020B0702040204020203" pitchFamily="34" charset="-122"/>
+                <a:cs typeface="Segoe UI Semibold" panose="020B0702040204020203" pitchFamily="34" charset="-120"/>
               </a:rPr>
               <a:t>›</a:t>
             </a:r>
@@ -7133,13 +6729,12 @@
             <a:avLst/>
           </a:prstGeom>
           <a:noFill/>
-          <a:ln/>
-        </p:spPr>
-        <p:txBody>
-          <a:bodyPr wrap="square" lIns="0" tIns="0" rIns="0" bIns="0" rtlCol="0" anchor="ctr"/>
-          <a:lstStyle/>
-          <a:p>
-            <a:pPr algn="ctr" indent="0" marL="0">
+        </p:spPr>
+        <p:txBody>
+          <a:bodyPr wrap="square" lIns="0" tIns="0" rIns="0" bIns="0" rtlCol="0" anchor="ctr"/>
+          <a:lstStyle/>
+          <a:p>
+            <a:pPr marL="0" indent="0" algn="ctr">
               <a:buNone/>
             </a:pPr>
             <a:r>
@@ -7147,9 +6742,9 @@
                 <a:solidFill>
                   <a:srgbClr val="05060C"/>
                 </a:solidFill>
-                <a:latin typeface="Segoe UI Semibold" pitchFamily="34" charset="0"/>
-                <a:ea typeface="Segoe UI Semibold" pitchFamily="34" charset="-122"/>
-                <a:cs typeface="Segoe UI Semibold" pitchFamily="34" charset="-120"/>
+                <a:latin typeface="Segoe UI Semibold" panose="020B0702040204020203" pitchFamily="34" charset="0"/>
+                <a:ea typeface="Segoe UI Semibold" panose="020B0702040204020203" pitchFamily="34" charset="-122"/>
+                <a:cs typeface="Segoe UI Semibold" panose="020B0702040204020203" pitchFamily="34" charset="-120"/>
               </a:rPr>
               <a:t>Work order</a:t>
             </a:r>
@@ -7172,13 +6767,12 @@
             <a:avLst/>
           </a:prstGeom>
           <a:noFill/>
-          <a:ln/>
-        </p:spPr>
-        <p:txBody>
-          <a:bodyPr wrap="square" lIns="0" tIns="0" rIns="0" bIns="0" rtlCol="0" anchor="ctr"/>
-          <a:lstStyle/>
-          <a:p>
-            <a:pPr algn="ctr" indent="0" marL="0">
+        </p:spPr>
+        <p:txBody>
+          <a:bodyPr wrap="square" lIns="0" tIns="0" rIns="0" bIns="0" rtlCol="0" anchor="ctr"/>
+          <a:lstStyle/>
+          <a:p>
+            <a:pPr marL="0" indent="0" algn="ctr">
               <a:buNone/>
             </a:pPr>
             <a:r>
@@ -7186,9 +6780,9 @@
                 <a:solidFill>
                   <a:srgbClr val="5B6478"/>
                 </a:solidFill>
-                <a:latin typeface="Segoe UI" pitchFamily="34" charset="0"/>
-                <a:ea typeface="Segoe UI" pitchFamily="34" charset="-122"/>
-                <a:cs typeface="Segoe UI" pitchFamily="34" charset="-120"/>
+                <a:latin typeface="Segoe UI" panose="020B0502040204020203" pitchFamily="34" charset="0"/>
+                <a:ea typeface="Segoe UI" panose="020B0502040204020203" pitchFamily="34" charset="-122"/>
+                <a:cs typeface="Segoe UI" panose="020B0502040204020203" pitchFamily="34" charset="-120"/>
               </a:rPr>
               <a:t>created</a:t>
             </a:r>
@@ -7211,13 +6805,12 @@
             <a:avLst/>
           </a:prstGeom>
           <a:noFill/>
-          <a:ln/>
-        </p:spPr>
-        <p:txBody>
-          <a:bodyPr wrap="square" lIns="0" tIns="0" rIns="0" bIns="0" rtlCol="0" anchor="ctr"/>
-          <a:lstStyle/>
-          <a:p>
-            <a:pPr algn="ctr" indent="0" marL="0">
+        </p:spPr>
+        <p:txBody>
+          <a:bodyPr wrap="square" lIns="0" tIns="0" rIns="0" bIns="0" rtlCol="0" anchor="ctr"/>
+          <a:lstStyle/>
+          <a:p>
+            <a:pPr marL="0" indent="0" algn="ctr">
               <a:buNone/>
             </a:pPr>
             <a:r>
@@ -7225,9 +6818,9 @@
                 <a:solidFill>
                   <a:srgbClr val="2B3DFF"/>
                 </a:solidFill>
-                <a:latin typeface="Segoe UI Semibold" pitchFamily="34" charset="0"/>
-                <a:ea typeface="Segoe UI Semibold" pitchFamily="34" charset="-122"/>
-                <a:cs typeface="Segoe UI Semibold" pitchFamily="34" charset="-120"/>
+                <a:latin typeface="Segoe UI Semibold" panose="020B0702040204020203" pitchFamily="34" charset="0"/>
+                <a:ea typeface="Segoe UI Semibold" panose="020B0702040204020203" pitchFamily="34" charset="-122"/>
+                <a:cs typeface="Segoe UI Semibold" panose="020B0702040204020203" pitchFamily="34" charset="-120"/>
               </a:rPr>
               <a:t>›</a:t>
             </a:r>
@@ -7277,13 +6870,12 @@
             <a:avLst/>
           </a:prstGeom>
           <a:noFill/>
-          <a:ln/>
-        </p:spPr>
-        <p:txBody>
-          <a:bodyPr wrap="square" lIns="0" tIns="0" rIns="0" bIns="0" rtlCol="0" anchor="ctr"/>
-          <a:lstStyle/>
-          <a:p>
-            <a:pPr algn="ctr" indent="0" marL="0">
+        </p:spPr>
+        <p:txBody>
+          <a:bodyPr wrap="square" lIns="0" tIns="0" rIns="0" bIns="0" rtlCol="0" anchor="ctr"/>
+          <a:lstStyle/>
+          <a:p>
+            <a:pPr marL="0" indent="0" algn="ctr">
               <a:buNone/>
             </a:pPr>
             <a:r>
@@ -7291,9 +6883,9 @@
                 <a:solidFill>
                   <a:srgbClr val="05060C"/>
                 </a:solidFill>
-                <a:latin typeface="Segoe UI Semibold" pitchFamily="34" charset="0"/>
-                <a:ea typeface="Segoe UI Semibold" pitchFamily="34" charset="-122"/>
-                <a:cs typeface="Segoe UI Semibold" pitchFamily="34" charset="-120"/>
+                <a:latin typeface="Segoe UI Semibold" panose="020B0702040204020203" pitchFamily="34" charset="0"/>
+                <a:ea typeface="Segoe UI Semibold" panose="020B0702040204020203" pitchFamily="34" charset="-122"/>
+                <a:cs typeface="Segoe UI Semibold" panose="020B0702040204020203" pitchFamily="34" charset="-120"/>
               </a:rPr>
               <a:t>Technician</a:t>
             </a:r>
@@ -7316,13 +6908,12 @@
             <a:avLst/>
           </a:prstGeom>
           <a:noFill/>
-          <a:ln/>
-        </p:spPr>
-        <p:txBody>
-          <a:bodyPr wrap="square" lIns="0" tIns="0" rIns="0" bIns="0" rtlCol="0" anchor="ctr"/>
-          <a:lstStyle/>
-          <a:p>
-            <a:pPr algn="ctr" indent="0" marL="0">
+        </p:spPr>
+        <p:txBody>
+          <a:bodyPr wrap="square" lIns="0" tIns="0" rIns="0" bIns="0" rtlCol="0" anchor="ctr"/>
+          <a:lstStyle/>
+          <a:p>
+            <a:pPr marL="0" indent="0" algn="ctr">
               <a:buNone/>
             </a:pPr>
             <a:r>
@@ -7330,9 +6921,9 @@
                 <a:solidFill>
                   <a:srgbClr val="5B6478"/>
                 </a:solidFill>
-                <a:latin typeface="Segoe UI" pitchFamily="34" charset="0"/>
-                <a:ea typeface="Segoe UI" pitchFamily="34" charset="-122"/>
-                <a:cs typeface="Segoe UI" pitchFamily="34" charset="-120"/>
+                <a:latin typeface="Segoe UI" panose="020B0502040204020203" pitchFamily="34" charset="0"/>
+                <a:ea typeface="Segoe UI" panose="020B0502040204020203" pitchFamily="34" charset="-122"/>
+                <a:cs typeface="Segoe UI" panose="020B0502040204020203" pitchFamily="34" charset="-120"/>
               </a:rPr>
               <a:t>assigned</a:t>
             </a:r>
@@ -7355,13 +6946,12 @@
             <a:avLst/>
           </a:prstGeom>
           <a:noFill/>
-          <a:ln/>
-        </p:spPr>
-        <p:txBody>
-          <a:bodyPr wrap="square" lIns="0" tIns="0" rIns="0" bIns="0" rtlCol="0" anchor="ctr"/>
-          <a:lstStyle/>
-          <a:p>
-            <a:pPr algn="ctr" indent="0" marL="0">
+        </p:spPr>
+        <p:txBody>
+          <a:bodyPr wrap="square" lIns="0" tIns="0" rIns="0" bIns="0" rtlCol="0" anchor="ctr"/>
+          <a:lstStyle/>
+          <a:p>
+            <a:pPr marL="0" indent="0" algn="ctr">
               <a:buNone/>
             </a:pPr>
             <a:r>
@@ -7369,9 +6959,9 @@
                 <a:solidFill>
                   <a:srgbClr val="2B3DFF"/>
                 </a:solidFill>
-                <a:latin typeface="Segoe UI Semibold" pitchFamily="34" charset="0"/>
-                <a:ea typeface="Segoe UI Semibold" pitchFamily="34" charset="-122"/>
-                <a:cs typeface="Segoe UI Semibold" pitchFamily="34" charset="-120"/>
+                <a:latin typeface="Segoe UI Semibold" panose="020B0702040204020203" pitchFamily="34" charset="0"/>
+                <a:ea typeface="Segoe UI Semibold" panose="020B0702040204020203" pitchFamily="34" charset="-122"/>
+                <a:cs typeface="Segoe UI Semibold" panose="020B0702040204020203" pitchFamily="34" charset="-120"/>
               </a:rPr>
               <a:t>›</a:t>
             </a:r>
@@ -7421,13 +7011,12 @@
             <a:avLst/>
           </a:prstGeom>
           <a:noFill/>
-          <a:ln/>
-        </p:spPr>
-        <p:txBody>
-          <a:bodyPr wrap="square" lIns="0" tIns="0" rIns="0" bIns="0" rtlCol="0" anchor="ctr"/>
-          <a:lstStyle/>
-          <a:p>
-            <a:pPr algn="ctr" indent="0" marL="0">
+        </p:spPr>
+        <p:txBody>
+          <a:bodyPr wrap="square" lIns="0" tIns="0" rIns="0" bIns="0" rtlCol="0" anchor="ctr"/>
+          <a:lstStyle/>
+          <a:p>
+            <a:pPr marL="0" indent="0" algn="ctr">
               <a:buNone/>
             </a:pPr>
             <a:r>
@@ -7435,9 +7024,9 @@
                 <a:solidFill>
                   <a:srgbClr val="05060C"/>
                 </a:solidFill>
-                <a:latin typeface="Segoe UI Semibold" pitchFamily="34" charset="0"/>
-                <a:ea typeface="Segoe UI Semibold" pitchFamily="34" charset="-122"/>
-                <a:cs typeface="Segoe UI Semibold" pitchFamily="34" charset="-120"/>
+                <a:latin typeface="Segoe UI Semibold" panose="020B0702040204020203" pitchFamily="34" charset="0"/>
+                <a:ea typeface="Segoe UI Semibold" panose="020B0702040204020203" pitchFamily="34" charset="-122"/>
+                <a:cs typeface="Segoe UI Semibold" panose="020B0702040204020203" pitchFamily="34" charset="-120"/>
               </a:rPr>
               <a:t>Completed</a:t>
             </a:r>
@@ -7460,13 +7049,12 @@
             <a:avLst/>
           </a:prstGeom>
           <a:noFill/>
-          <a:ln/>
-        </p:spPr>
-        <p:txBody>
-          <a:bodyPr wrap="square" lIns="0" tIns="0" rIns="0" bIns="0" rtlCol="0" anchor="ctr"/>
-          <a:lstStyle/>
-          <a:p>
-            <a:pPr algn="ctr" indent="0" marL="0">
+        </p:spPr>
+        <p:txBody>
+          <a:bodyPr wrap="square" lIns="0" tIns="0" rIns="0" bIns="0" rtlCol="0" anchor="ctr"/>
+          <a:lstStyle/>
+          <a:p>
+            <a:pPr marL="0" indent="0" algn="ctr">
               <a:buNone/>
             </a:pPr>
             <a:r>
@@ -7474,9 +7062,9 @@
                 <a:solidFill>
                   <a:srgbClr val="5B6478"/>
                 </a:solidFill>
-                <a:latin typeface="Segoe UI" pitchFamily="34" charset="0"/>
-                <a:ea typeface="Segoe UI" pitchFamily="34" charset="-122"/>
-                <a:cs typeface="Segoe UI" pitchFamily="34" charset="-120"/>
+                <a:latin typeface="Segoe UI" panose="020B0502040204020203" pitchFamily="34" charset="0"/>
+                <a:ea typeface="Segoe UI" panose="020B0502040204020203" pitchFamily="34" charset="-122"/>
+                <a:cs typeface="Segoe UI" panose="020B0502040204020203" pitchFamily="34" charset="-120"/>
               </a:rPr>
               <a:t>in history</a:t>
             </a:r>
@@ -7522,13 +7110,12 @@
             <a:avLst/>
           </a:prstGeom>
           <a:noFill/>
-          <a:ln/>
-        </p:spPr>
-        <p:txBody>
-          <a:bodyPr wrap="square" lIns="0" tIns="0" rIns="0" bIns="0" rtlCol="0" anchor="ctr"/>
-          <a:lstStyle/>
-          <a:p>
-            <a:pPr indent="0" marL="0">
+        </p:spPr>
+        <p:txBody>
+          <a:bodyPr wrap="square" lIns="0" tIns="0" rIns="0" bIns="0" rtlCol="0" anchor="ctr"/>
+          <a:lstStyle/>
+          <a:p>
+            <a:pPr marL="0" indent="0">
               <a:buNone/>
             </a:pPr>
             <a:r>
@@ -7536,9 +7123,9 @@
                 <a:solidFill>
                   <a:srgbClr val="FFFFFF"/>
                 </a:solidFill>
-                <a:latin typeface="Segoe UI Light" pitchFamily="34" charset="0"/>
-                <a:ea typeface="Segoe UI Light" pitchFamily="34" charset="-122"/>
-                <a:cs typeface="Segoe UI Light" pitchFamily="34" charset="-120"/>
+                <a:latin typeface="Segoe UI Light" panose="020B0502040204020203" pitchFamily="34" charset="0"/>
+                <a:ea typeface="Segoe UI Light" panose="020B0502040204020203" pitchFamily="34" charset="-122"/>
+                <a:cs typeface="Segoe UI Light" panose="020B0502040204020203" pitchFamily="34" charset="-120"/>
               </a:rPr>
               <a:t>0 clicks</a:t>
             </a:r>
@@ -7561,13 +7148,12 @@
             <a:avLst/>
           </a:prstGeom>
           <a:noFill/>
-          <a:ln/>
         </p:spPr>
         <p:txBody>
           <a:bodyPr wrap="square" lIns="0" tIns="0" rIns="0" bIns="0" rtlCol="0" anchor="t"/>
           <a:lstStyle/>
           <a:p>
-            <a:pPr indent="0" marL="0">
+            <a:pPr marL="0" indent="0">
               <a:buNone/>
             </a:pPr>
             <a:r>
@@ -7575,9 +7161,9 @@
                 <a:solidFill>
                   <a:srgbClr val="C9D1FF"/>
                 </a:solidFill>
-                <a:latin typeface="Segoe UI" pitchFamily="34" charset="0"/>
-                <a:ea typeface="Segoe UI" pitchFamily="34" charset="-122"/>
-                <a:cs typeface="Segoe UI" pitchFamily="34" charset="-120"/>
+                <a:latin typeface="Segoe UI" panose="020B0502040204020203" pitchFamily="34" charset="0"/>
+                <a:ea typeface="Segoe UI" panose="020B0502040204020203" pitchFamily="34" charset="-122"/>
+                <a:cs typeface="Segoe UI" panose="020B0502040204020203" pitchFamily="34" charset="-120"/>
               </a:rPr>
               <a:t>to open a corrective order</a:t>
             </a:r>
@@ -7623,13 +7209,12 @@
             <a:avLst/>
           </a:prstGeom>
           <a:noFill/>
-          <a:ln/>
-        </p:spPr>
-        <p:txBody>
-          <a:bodyPr wrap="square" lIns="0" tIns="0" rIns="0" bIns="0" rtlCol="0" anchor="ctr"/>
-          <a:lstStyle/>
-          <a:p>
-            <a:pPr indent="0" marL="0">
+        </p:spPr>
+        <p:txBody>
+          <a:bodyPr wrap="square" lIns="0" tIns="0" rIns="0" bIns="0" rtlCol="0" anchor="ctr"/>
+          <a:lstStyle/>
+          <a:p>
+            <a:pPr marL="0" indent="0">
               <a:buNone/>
             </a:pPr>
             <a:r>
@@ -7637,9 +7222,9 @@
                 <a:solidFill>
                   <a:srgbClr val="FFFFFF"/>
                 </a:solidFill>
-                <a:latin typeface="Segoe UI Light" pitchFamily="34" charset="0"/>
-                <a:ea typeface="Segoe UI Light" pitchFamily="34" charset="-122"/>
-                <a:cs typeface="Segoe UI Light" pitchFamily="34" charset="-120"/>
+                <a:latin typeface="Segoe UI Light" panose="020B0502040204020203" pitchFamily="34" charset="0"/>
+                <a:ea typeface="Segoe UI Light" panose="020B0502040204020203" pitchFamily="34" charset="-122"/>
+                <a:cs typeface="Segoe UI Light" panose="020B0502040204020203" pitchFamily="34" charset="-120"/>
               </a:rPr>
               <a:t>4</a:t>
             </a:r>
@@ -7662,13 +7247,12 @@
             <a:avLst/>
           </a:prstGeom>
           <a:noFill/>
-          <a:ln/>
         </p:spPr>
         <p:txBody>
           <a:bodyPr wrap="square" lIns="0" tIns="0" rIns="0" bIns="0" rtlCol="0" anchor="t"/>
           <a:lstStyle/>
           <a:p>
-            <a:pPr indent="0" marL="0">
+            <a:pPr marL="0" indent="0">
               <a:buNone/>
             </a:pPr>
             <a:r>
@@ -7676,9 +7260,9 @@
                 <a:solidFill>
                   <a:srgbClr val="C9D1FF"/>
                 </a:solidFill>
-                <a:latin typeface="Segoe UI" pitchFamily="34" charset="0"/>
-                <a:ea typeface="Segoe UI" pitchFamily="34" charset="-122"/>
-                <a:cs typeface="Segoe UI" pitchFamily="34" charset="-120"/>
+                <a:latin typeface="Segoe UI" panose="020B0502040204020203" pitchFamily="34" charset="0"/>
+                <a:ea typeface="Segoe UI" panose="020B0502040204020203" pitchFamily="34" charset="-122"/>
+                <a:cs typeface="Segoe UI" panose="020B0502040204020203" pitchFamily="34" charset="-120"/>
               </a:rPr>
               <a:t>technicians</a:t>
             </a:r>
@@ -7724,13 +7308,12 @@
             <a:avLst/>
           </a:prstGeom>
           <a:noFill/>
-          <a:ln/>
-        </p:spPr>
-        <p:txBody>
-          <a:bodyPr wrap="square" lIns="0" tIns="0" rIns="0" bIns="0" rtlCol="0" anchor="ctr"/>
-          <a:lstStyle/>
-          <a:p>
-            <a:pPr indent="0" marL="0">
+        </p:spPr>
+        <p:txBody>
+          <a:bodyPr wrap="square" lIns="0" tIns="0" rIns="0" bIns="0" rtlCol="0" anchor="ctr"/>
+          <a:lstStyle/>
+          <a:p>
+            <a:pPr marL="0" indent="0">
               <a:buNone/>
             </a:pPr>
             <a:r>
@@ -7738,9 +7321,9 @@
                 <a:solidFill>
                   <a:srgbClr val="FFFFFF"/>
                 </a:solidFill>
-                <a:latin typeface="Segoe UI Light" pitchFamily="34" charset="0"/>
-                <a:ea typeface="Segoe UI Light" pitchFamily="34" charset="-122"/>
-                <a:cs typeface="Segoe UI Light" pitchFamily="34" charset="-120"/>
+                <a:latin typeface="Segoe UI Light" panose="020B0502040204020203" pitchFamily="34" charset="0"/>
+                <a:ea typeface="Segoe UI Light" panose="020B0502040204020203" pitchFamily="34" charset="-122"/>
+                <a:cs typeface="Segoe UI Light" panose="020B0502040204020203" pitchFamily="34" charset="-120"/>
               </a:rPr>
               <a:t>1</a:t>
             </a:r>
@@ -7763,13 +7346,12 @@
             <a:avLst/>
           </a:prstGeom>
           <a:noFill/>
-          <a:ln/>
         </p:spPr>
         <p:txBody>
           <a:bodyPr wrap="square" lIns="0" tIns="0" rIns="0" bIns="0" rtlCol="0" anchor="t"/>
           <a:lstStyle/>
           <a:p>
-            <a:pPr indent="0" marL="0">
+            <a:pPr marL="0" indent="0">
               <a:buNone/>
             </a:pPr>
             <a:r>
@@ -7777,9 +7359,9 @@
                 <a:solidFill>
                   <a:srgbClr val="C9D1FF"/>
                 </a:solidFill>
-                <a:latin typeface="Segoe UI" pitchFamily="34" charset="0"/>
-                <a:ea typeface="Segoe UI" pitchFamily="34" charset="-122"/>
-                <a:cs typeface="Segoe UI" pitchFamily="34" charset="-120"/>
+                <a:latin typeface="Segoe UI" panose="020B0502040204020203" pitchFamily="34" charset="0"/>
+                <a:ea typeface="Segoe UI" panose="020B0502040204020203" pitchFamily="34" charset="-122"/>
+                <a:cs typeface="Segoe UI" panose="020B0502040204020203" pitchFamily="34" charset="-120"/>
               </a:rPr>
               <a:t>active order per asset</a:t>
             </a:r>
@@ -7833,13 +7415,12 @@
             <a:avLst/>
           </a:prstGeom>
           <a:noFill/>
-          <a:ln/>
-        </p:spPr>
-        <p:txBody>
-          <a:bodyPr wrap="square" lIns="0" tIns="0" rIns="0" bIns="0" rtlCol="0" anchor="ctr"/>
-          <a:lstStyle/>
-          <a:p>
-            <a:pPr indent="0" marL="0">
+        </p:spPr>
+        <p:txBody>
+          <a:bodyPr wrap="square" lIns="0" tIns="0" rIns="0" bIns="0" rtlCol="0" anchor="ctr"/>
+          <a:lstStyle/>
+          <a:p>
+            <a:pPr marL="0" indent="0">
               <a:buNone/>
             </a:pPr>
             <a:r>
@@ -7847,23 +7428,20 @@
                 <a:solidFill>
                   <a:srgbClr val="8FA0FF"/>
                 </a:solidFill>
-                <a:latin typeface="Segoe UI" pitchFamily="34" charset="0"/>
-                <a:ea typeface="Segoe UI" pitchFamily="34" charset="-122"/>
-                <a:cs typeface="Segoe UI" pitchFamily="34" charset="-120"/>
+                <a:latin typeface="Segoe UI" panose="020B0502040204020203" pitchFamily="34" charset="0"/>
+                <a:ea typeface="Segoe UI" panose="020B0502040204020203" pitchFamily="34" charset="-122"/>
+                <a:cs typeface="Segoe UI" panose="020B0502040204020203" pitchFamily="34" charset="-120"/>
               </a:rPr>
               <a:t>LIVE  </a:t>
             </a:r>
-            <a:pPr indent="0" marL="0">
-              <a:buNone/>
-            </a:pPr>
             <a:r>
               <a:rPr lang="en-US" sz="1100" dirty="0">
                 <a:solidFill>
                   <a:srgbClr val="FFFFFF"/>
                 </a:solidFill>
-                <a:latin typeface="Segoe UI" pitchFamily="34" charset="0"/>
-                <a:ea typeface="Segoe UI" pitchFamily="34" charset="-122"/>
-                <a:cs typeface="Segoe UI" pitchFamily="34" charset="-120"/>
+                <a:latin typeface="Segoe UI" panose="020B0502040204020203" pitchFamily="34" charset="0"/>
+                <a:ea typeface="Segoe UI" panose="020B0502040204020203" pitchFamily="34" charset="-122"/>
+                <a:cs typeface="Segoe UI" panose="020B0502040204020203" pitchFamily="34" charset="-120"/>
               </a:rPr>
               <a:t>Maintenance board</a:t>
             </a:r>
@@ -7881,7 +7459,7 @@
 
 <file path=ppt/slides/slide6.xml><?xml version="1.0" encoding="utf-8"?>
 <p:sld xmlns:a="http://schemas.openxmlformats.org/drawingml/2006/main" xmlns:r="http://schemas.openxmlformats.org/officeDocument/2006/relationships" xmlns:p="http://schemas.openxmlformats.org/presentationml/2006/main">
-  <p:cSld name="Slide 6">
+  <p:cSld>
     <p:bg>
       <p:bgPr>
         <a:blipFill dpi="0" rotWithShape="1">
@@ -8100,25 +7678,24 @@
             <a:avLst/>
           </a:prstGeom>
           <a:noFill/>
-          <a:ln/>
-        </p:spPr>
-        <p:txBody>
-          <a:bodyPr wrap="square" lIns="0" tIns="0" rIns="0" bIns="0" rtlCol="0" anchor="ctr"/>
-          <a:lstStyle/>
-          <a:p>
-            <a:pPr indent="0" marL="0">
-              <a:buNone/>
-            </a:pPr>
-            <a:r>
-              <a:rPr lang="en-US" sz="1050" spc="300" kern="0" dirty="0">
+        </p:spPr>
+        <p:txBody>
+          <a:bodyPr wrap="square" lIns="0" tIns="0" rIns="0" bIns="0" rtlCol="0" anchor="ctr"/>
+          <a:lstStyle/>
+          <a:p>
+            <a:pPr marL="0" indent="0">
+              <a:buNone/>
+            </a:pPr>
+            <a:r>
+              <a:rPr lang="en-US" sz="1050" kern="0" spc="300" dirty="0">
                 <a:solidFill>
                   <a:srgbClr val="2B3DFF"/>
                 </a:solidFill>
-                <a:latin typeface="Segoe UI Semibold" pitchFamily="34" charset="0"/>
-                <a:ea typeface="Segoe UI Semibold" pitchFamily="34" charset="-122"/>
-                <a:cs typeface="Segoe UI Semibold" pitchFamily="34" charset="-120"/>
-              </a:rPr>
-              <a:t>06 · YASIRU · NOTIFICATION SERVICE</a:t>
+                <a:latin typeface="Segoe UI Semibold" panose="020B0702040204020203" pitchFamily="34" charset="0"/>
+                <a:ea typeface="Segoe UI Semibold" panose="020B0702040204020203" pitchFamily="34" charset="-122"/>
+                <a:cs typeface="Segoe UI Semibold" panose="020B0702040204020203" pitchFamily="34" charset="-120"/>
+              </a:rPr>
+              <a:t>06 · NOTIFICATION SERVICE</a:t>
             </a:r>
             <a:endParaRPr lang="en-US" sz="1050" dirty="0"/>
           </a:p>
@@ -8139,13 +7716,12 @@
             <a:avLst/>
           </a:prstGeom>
           <a:noFill/>
-          <a:ln/>
-        </p:spPr>
-        <p:txBody>
-          <a:bodyPr wrap="square" lIns="0" tIns="0" rIns="0" bIns="0" rtlCol="0" anchor="ctr"/>
-          <a:lstStyle/>
-          <a:p>
-            <a:pPr indent="0" marL="0">
+        </p:spPr>
+        <p:txBody>
+          <a:bodyPr wrap="square" lIns="0" tIns="0" rIns="0" bIns="0" rtlCol="0" anchor="ctr"/>
+          <a:lstStyle/>
+          <a:p>
+            <a:pPr marL="0" indent="0">
               <a:buNone/>
             </a:pPr>
             <a:r>
@@ -8153,23 +7729,20 @@
                 <a:solidFill>
                   <a:srgbClr val="05060C"/>
                 </a:solidFill>
-                <a:latin typeface="Segoe UI Light" pitchFamily="34" charset="0"/>
-                <a:ea typeface="Segoe UI Light" pitchFamily="34" charset="-122"/>
-                <a:cs typeface="Segoe UI Light" pitchFamily="34" charset="-120"/>
+                <a:latin typeface="Segoe UI Light" panose="020B0502040204020203" pitchFamily="34" charset="0"/>
+                <a:ea typeface="Segoe UI Light" panose="020B0502040204020203" pitchFamily="34" charset="-122"/>
+                <a:cs typeface="Segoe UI Light" panose="020B0502040204020203" pitchFamily="34" charset="-120"/>
               </a:rPr>
               <a:t>Every alert </a:t>
             </a:r>
-            <a:pPr indent="0" marL="0">
-              <a:buNone/>
-            </a:pPr>
             <a:r>
               <a:rPr lang="en-US" sz="3200" dirty="0">
                 <a:solidFill>
                   <a:srgbClr val="2B3DFF"/>
                 </a:solidFill>
-                <a:latin typeface="Segoe UI Light" pitchFamily="34" charset="0"/>
-                <a:ea typeface="Segoe UI Light" pitchFamily="34" charset="-122"/>
-                <a:cs typeface="Segoe UI Light" pitchFamily="34" charset="-120"/>
+                <a:latin typeface="Segoe UI Light" panose="020B0502040204020203" pitchFamily="34" charset="0"/>
+                <a:ea typeface="Segoe UI Light" panose="020B0502040204020203" pitchFamily="34" charset="-122"/>
+                <a:cs typeface="Segoe UI Light" panose="020B0502040204020203" pitchFamily="34" charset="-120"/>
               </a:rPr>
               <a:t>delivered and recorded</a:t>
             </a:r>
@@ -8217,13 +7790,12 @@
             <a:avLst/>
           </a:prstGeom>
           <a:noFill/>
-          <a:ln/>
-        </p:spPr>
-        <p:txBody>
-          <a:bodyPr wrap="square" lIns="0" tIns="0" rIns="0" bIns="0" rtlCol="0" anchor="ctr"/>
-          <a:lstStyle/>
-          <a:p>
-            <a:pPr indent="0" marL="0">
+        </p:spPr>
+        <p:txBody>
+          <a:bodyPr wrap="square" lIns="0" tIns="0" rIns="0" bIns="0" rtlCol="0" anchor="ctr"/>
+          <a:lstStyle/>
+          <a:p>
+            <a:pPr marL="0" indent="0">
               <a:buNone/>
             </a:pPr>
             <a:r>
@@ -8231,9 +7803,9 @@
                 <a:solidFill>
                   <a:srgbClr val="C9D1FF"/>
                 </a:solidFill>
-                <a:latin typeface="Segoe UI" pitchFamily="34" charset="0"/>
-                <a:ea typeface="Segoe UI" pitchFamily="34" charset="-122"/>
-                <a:cs typeface="Segoe UI" pitchFamily="34" charset="-120"/>
+                <a:latin typeface="Segoe UI" panose="020B0502040204020203" pitchFamily="34" charset="0"/>
+                <a:ea typeface="Segoe UI" panose="020B0502040204020203" pitchFamily="34" charset="-122"/>
+                <a:cs typeface="Segoe UI" panose="020B0502040204020203" pitchFamily="34" charset="-120"/>
               </a:rPr>
               <a:t>EC8208 Software Architecture  ·  University of Ruhuna</a:t>
             </a:r>
@@ -8256,13 +7828,12 @@
             <a:avLst/>
           </a:prstGeom>
           <a:noFill/>
-          <a:ln/>
-        </p:spPr>
-        <p:txBody>
-          <a:bodyPr wrap="square" lIns="0" tIns="0" rIns="0" bIns="0" rtlCol="0" anchor="ctr"/>
-          <a:lstStyle/>
-          <a:p>
-            <a:pPr algn="r" indent="0" marL="0">
+        </p:spPr>
+        <p:txBody>
+          <a:bodyPr wrap="square" lIns="0" tIns="0" rIns="0" bIns="0" rtlCol="0" anchor="ctr"/>
+          <a:lstStyle/>
+          <a:p>
+            <a:pPr marL="0" indent="0" algn="r">
               <a:buNone/>
             </a:pPr>
             <a:r>
@@ -8270,9 +7841,9 @@
                 <a:solidFill>
                   <a:srgbClr val="C9D1FF"/>
                 </a:solidFill>
-                <a:latin typeface="Segoe UI" pitchFamily="34" charset="0"/>
-                <a:ea typeface="Segoe UI" pitchFamily="34" charset="-122"/>
-                <a:cs typeface="Segoe UI" pitchFamily="34" charset="-120"/>
+                <a:latin typeface="Segoe UI" panose="020B0502040204020203" pitchFamily="34" charset="0"/>
+                <a:ea typeface="Segoe UI" panose="020B0502040204020203" pitchFamily="34" charset="-122"/>
+                <a:cs typeface="Segoe UI" panose="020B0502040204020203" pitchFamily="34" charset="-120"/>
               </a:rPr>
               <a:t>06  ·  5:24–7:02</a:t>
             </a:r>
@@ -8322,13 +7893,12 @@
             <a:avLst/>
           </a:prstGeom>
           <a:noFill/>
-          <a:ln/>
-        </p:spPr>
-        <p:txBody>
-          <a:bodyPr wrap="square" lIns="0" tIns="0" rIns="0" bIns="0" rtlCol="0" anchor="ctr"/>
-          <a:lstStyle/>
-          <a:p>
-            <a:pPr algn="ctr" indent="0" marL="0">
+        </p:spPr>
+        <p:txBody>
+          <a:bodyPr wrap="square" lIns="0" tIns="0" rIns="0" bIns="0" rtlCol="0" anchor="ctr"/>
+          <a:lstStyle/>
+          <a:p>
+            <a:pPr marL="0" indent="0" algn="ctr">
               <a:buNone/>
             </a:pPr>
             <a:r>
@@ -8336,9 +7906,9 @@
                 <a:solidFill>
                   <a:srgbClr val="FFFFFF"/>
                 </a:solidFill>
-                <a:latin typeface="Segoe UI Semibold" pitchFamily="34" charset="0"/>
-                <a:ea typeface="Segoe UI Semibold" pitchFamily="34" charset="-122"/>
-                <a:cs typeface="Segoe UI Semibold" pitchFamily="34" charset="-120"/>
+                <a:latin typeface="Segoe UI Semibold" panose="020B0702040204020203" pitchFamily="34" charset="0"/>
+                <a:ea typeface="Segoe UI Semibold" panose="020B0702040204020203" pitchFamily="34" charset="-122"/>
+                <a:cs typeface="Segoe UI Semibold" panose="020B0702040204020203" pitchFamily="34" charset="-120"/>
               </a:rPr>
               <a:t>Queue</a:t>
             </a:r>
@@ -8361,13 +7931,12 @@
             <a:avLst/>
           </a:prstGeom>
           <a:noFill/>
-          <a:ln/>
-        </p:spPr>
-        <p:txBody>
-          <a:bodyPr wrap="square" lIns="0" tIns="0" rIns="0" bIns="0" rtlCol="0" anchor="ctr"/>
-          <a:lstStyle/>
-          <a:p>
-            <a:pPr algn="ctr" indent="0" marL="0">
+        </p:spPr>
+        <p:txBody>
+          <a:bodyPr wrap="square" lIns="0" tIns="0" rIns="0" bIns="0" rtlCol="0" anchor="ctr"/>
+          <a:lstStyle/>
+          <a:p>
+            <a:pPr marL="0" indent="0" algn="ctr">
               <a:buNone/>
             </a:pPr>
             <a:r>
@@ -8375,9 +7944,9 @@
                 <a:solidFill>
                   <a:srgbClr val="C9D1FF"/>
                 </a:solidFill>
-                <a:latin typeface="Segoe UI" pitchFamily="34" charset="0"/>
-                <a:ea typeface="Segoe UI" pitchFamily="34" charset="-122"/>
-                <a:cs typeface="Segoe UI" pitchFamily="34" charset="-120"/>
+                <a:latin typeface="Segoe UI" panose="020B0502040204020203" pitchFamily="34" charset="0"/>
+                <a:ea typeface="Segoe UI" panose="020B0502040204020203" pitchFamily="34" charset="-122"/>
+                <a:cs typeface="Segoe UI" panose="020B0502040204020203" pitchFamily="34" charset="-120"/>
               </a:rPr>
               <a:t>durable</a:t>
             </a:r>
@@ -8400,13 +7969,12 @@
             <a:avLst/>
           </a:prstGeom>
           <a:noFill/>
-          <a:ln/>
-        </p:spPr>
-        <p:txBody>
-          <a:bodyPr wrap="square" lIns="0" tIns="0" rIns="0" bIns="0" rtlCol="0" anchor="ctr"/>
-          <a:lstStyle/>
-          <a:p>
-            <a:pPr algn="ctr" indent="0" marL="0">
+        </p:spPr>
+        <p:txBody>
+          <a:bodyPr wrap="square" lIns="0" tIns="0" rIns="0" bIns="0" rtlCol="0" anchor="ctr"/>
+          <a:lstStyle/>
+          <a:p>
+            <a:pPr marL="0" indent="0" algn="ctr">
               <a:buNone/>
             </a:pPr>
             <a:r>
@@ -8414,9 +7982,9 @@
                 <a:solidFill>
                   <a:srgbClr val="2B3DFF"/>
                 </a:solidFill>
-                <a:latin typeface="Segoe UI Semibold" pitchFamily="34" charset="0"/>
-                <a:ea typeface="Segoe UI Semibold" pitchFamily="34" charset="-122"/>
-                <a:cs typeface="Segoe UI Semibold" pitchFamily="34" charset="-120"/>
+                <a:latin typeface="Segoe UI Semibold" panose="020B0702040204020203" pitchFamily="34" charset="0"/>
+                <a:ea typeface="Segoe UI Semibold" panose="020B0702040204020203" pitchFamily="34" charset="-122"/>
+                <a:cs typeface="Segoe UI Semibold" panose="020B0702040204020203" pitchFamily="34" charset="-120"/>
               </a:rPr>
               <a:t>›</a:t>
             </a:r>
@@ -8466,13 +8034,12 @@
             <a:avLst/>
           </a:prstGeom>
           <a:noFill/>
-          <a:ln/>
-        </p:spPr>
-        <p:txBody>
-          <a:bodyPr wrap="square" lIns="0" tIns="0" rIns="0" bIns="0" rtlCol="0" anchor="ctr"/>
-          <a:lstStyle/>
-          <a:p>
-            <a:pPr algn="ctr" indent="0" marL="0">
+        </p:spPr>
+        <p:txBody>
+          <a:bodyPr wrap="square" lIns="0" tIns="0" rIns="0" bIns="0" rtlCol="0" anchor="ctr"/>
+          <a:lstStyle/>
+          <a:p>
+            <a:pPr marL="0" indent="0" algn="ctr">
               <a:buNone/>
             </a:pPr>
             <a:r>
@@ -8480,9 +8047,9 @@
                 <a:solidFill>
                   <a:srgbClr val="05060C"/>
                 </a:solidFill>
-                <a:latin typeface="Segoe UI Semibold" pitchFamily="34" charset="0"/>
-                <a:ea typeface="Segoe UI Semibold" pitchFamily="34" charset="-122"/>
-                <a:cs typeface="Segoe UI Semibold" pitchFamily="34" charset="-120"/>
+                <a:latin typeface="Segoe UI Semibold" panose="020B0702040204020203" pitchFamily="34" charset="0"/>
+                <a:ea typeface="Segoe UI Semibold" panose="020B0702040204020203" pitchFamily="34" charset="-122"/>
+                <a:cs typeface="Segoe UI Semibold" panose="020B0702040204020203" pitchFamily="34" charset="-120"/>
               </a:rPr>
               <a:t>Consumer</a:t>
             </a:r>
@@ -8505,13 +8072,12 @@
             <a:avLst/>
           </a:prstGeom>
           <a:noFill/>
-          <a:ln/>
-        </p:spPr>
-        <p:txBody>
-          <a:bodyPr wrap="square" lIns="0" tIns="0" rIns="0" bIns="0" rtlCol="0" anchor="ctr"/>
-          <a:lstStyle/>
-          <a:p>
-            <a:pPr algn="ctr" indent="0" marL="0">
+        </p:spPr>
+        <p:txBody>
+          <a:bodyPr wrap="square" lIns="0" tIns="0" rIns="0" bIns="0" rtlCol="0" anchor="ctr"/>
+          <a:lstStyle/>
+          <a:p>
+            <a:pPr marL="0" indent="0" algn="ctr">
               <a:buNone/>
             </a:pPr>
             <a:r>
@@ -8519,9 +8085,9 @@
                 <a:solidFill>
                   <a:srgbClr val="5B6478"/>
                 </a:solidFill>
-                <a:latin typeface="Segoe UI" pitchFamily="34" charset="0"/>
-                <a:ea typeface="Segoe UI" pitchFamily="34" charset="-122"/>
-                <a:cs typeface="Segoe UI" pitchFamily="34" charset="-120"/>
+                <a:latin typeface="Segoe UI" panose="020B0502040204020203" pitchFamily="34" charset="0"/>
+                <a:ea typeface="Segoe UI" panose="020B0502040204020203" pitchFamily="34" charset="-122"/>
+                <a:cs typeface="Segoe UI" panose="020B0502040204020203" pitchFamily="34" charset="-120"/>
               </a:rPr>
               <a:t>schema check</a:t>
             </a:r>
@@ -8544,13 +8110,12 @@
             <a:avLst/>
           </a:prstGeom>
           <a:noFill/>
-          <a:ln/>
-        </p:spPr>
-        <p:txBody>
-          <a:bodyPr wrap="square" lIns="0" tIns="0" rIns="0" bIns="0" rtlCol="0" anchor="ctr"/>
-          <a:lstStyle/>
-          <a:p>
-            <a:pPr algn="ctr" indent="0" marL="0">
+        </p:spPr>
+        <p:txBody>
+          <a:bodyPr wrap="square" lIns="0" tIns="0" rIns="0" bIns="0" rtlCol="0" anchor="ctr"/>
+          <a:lstStyle/>
+          <a:p>
+            <a:pPr marL="0" indent="0" algn="ctr">
               <a:buNone/>
             </a:pPr>
             <a:r>
@@ -8558,9 +8123,9 @@
                 <a:solidFill>
                   <a:srgbClr val="2B3DFF"/>
                 </a:solidFill>
-                <a:latin typeface="Segoe UI Semibold" pitchFamily="34" charset="0"/>
-                <a:ea typeface="Segoe UI Semibold" pitchFamily="34" charset="-122"/>
-                <a:cs typeface="Segoe UI Semibold" pitchFamily="34" charset="-120"/>
+                <a:latin typeface="Segoe UI Semibold" panose="020B0702040204020203" pitchFamily="34" charset="0"/>
+                <a:ea typeface="Segoe UI Semibold" panose="020B0702040204020203" pitchFamily="34" charset="-122"/>
+                <a:cs typeface="Segoe UI Semibold" panose="020B0702040204020203" pitchFamily="34" charset="-120"/>
               </a:rPr>
               <a:t>›</a:t>
             </a:r>
@@ -8610,13 +8175,12 @@
             <a:avLst/>
           </a:prstGeom>
           <a:noFill/>
-          <a:ln/>
-        </p:spPr>
-        <p:txBody>
-          <a:bodyPr wrap="square" lIns="0" tIns="0" rIns="0" bIns="0" rtlCol="0" anchor="ctr"/>
-          <a:lstStyle/>
-          <a:p>
-            <a:pPr algn="ctr" indent="0" marL="0">
+        </p:spPr>
+        <p:txBody>
+          <a:bodyPr wrap="square" lIns="0" tIns="0" rIns="0" bIns="0" rtlCol="0" anchor="ctr"/>
+          <a:lstStyle/>
+          <a:p>
+            <a:pPr marL="0" indent="0" algn="ctr">
               <a:buNone/>
             </a:pPr>
             <a:r>
@@ -8624,9 +8188,9 @@
                 <a:solidFill>
                   <a:srgbClr val="05060C"/>
                 </a:solidFill>
-                <a:latin typeface="Segoe UI Semibold" pitchFamily="34" charset="0"/>
-                <a:ea typeface="Segoe UI Semibold" pitchFamily="34" charset="-122"/>
-                <a:cs typeface="Segoe UI Semibold" pitchFamily="34" charset="-120"/>
+                <a:latin typeface="Segoe UI Semibold" panose="020B0702040204020203" pitchFamily="34" charset="0"/>
+                <a:ea typeface="Segoe UI Semibold" panose="020B0702040204020203" pitchFamily="34" charset="-122"/>
+                <a:cs typeface="Segoe UI Semibold" panose="020B0702040204020203" pitchFamily="34" charset="-120"/>
               </a:rPr>
               <a:t>Channels</a:t>
             </a:r>
@@ -8649,13 +8213,12 @@
             <a:avLst/>
           </a:prstGeom>
           <a:noFill/>
-          <a:ln/>
-        </p:spPr>
-        <p:txBody>
-          <a:bodyPr wrap="square" lIns="0" tIns="0" rIns="0" bIns="0" rtlCol="0" anchor="ctr"/>
-          <a:lstStyle/>
-          <a:p>
-            <a:pPr algn="ctr" indent="0" marL="0">
+        </p:spPr>
+        <p:txBody>
+          <a:bodyPr wrap="square" lIns="0" tIns="0" rIns="0" bIns="0" rtlCol="0" anchor="ctr"/>
+          <a:lstStyle/>
+          <a:p>
+            <a:pPr marL="0" indent="0" algn="ctr">
               <a:buNone/>
             </a:pPr>
             <a:r>
@@ -8663,9 +8226,9 @@
                 <a:solidFill>
                   <a:srgbClr val="5B6478"/>
                 </a:solidFill>
-                <a:latin typeface="Segoe UI" pitchFamily="34" charset="0"/>
-                <a:ea typeface="Segoe UI" pitchFamily="34" charset="-122"/>
-                <a:cs typeface="Segoe UI" pitchFamily="34" charset="-120"/>
+                <a:latin typeface="Segoe UI" panose="020B0502040204020203" pitchFamily="34" charset="0"/>
+                <a:ea typeface="Segoe UI" panose="020B0502040204020203" pitchFamily="34" charset="-122"/>
+                <a:cs typeface="Segoe UI" panose="020B0502040204020203" pitchFamily="34" charset="-120"/>
               </a:rPr>
               <a:t>email · push</a:t>
             </a:r>
@@ -8688,13 +8251,12 @@
             <a:avLst/>
           </a:prstGeom>
           <a:noFill/>
-          <a:ln/>
-        </p:spPr>
-        <p:txBody>
-          <a:bodyPr wrap="square" lIns="0" tIns="0" rIns="0" bIns="0" rtlCol="0" anchor="ctr"/>
-          <a:lstStyle/>
-          <a:p>
-            <a:pPr algn="ctr" indent="0" marL="0">
+        </p:spPr>
+        <p:txBody>
+          <a:bodyPr wrap="square" lIns="0" tIns="0" rIns="0" bIns="0" rtlCol="0" anchor="ctr"/>
+          <a:lstStyle/>
+          <a:p>
+            <a:pPr marL="0" indent="0" algn="ctr">
               <a:buNone/>
             </a:pPr>
             <a:r>
@@ -8702,9 +8264,9 @@
                 <a:solidFill>
                   <a:srgbClr val="2B3DFF"/>
                 </a:solidFill>
-                <a:latin typeface="Segoe UI Semibold" pitchFamily="34" charset="0"/>
-                <a:ea typeface="Segoe UI Semibold" pitchFamily="34" charset="-122"/>
-                <a:cs typeface="Segoe UI Semibold" pitchFamily="34" charset="-120"/>
+                <a:latin typeface="Segoe UI Semibold" panose="020B0702040204020203" pitchFamily="34" charset="0"/>
+                <a:ea typeface="Segoe UI Semibold" panose="020B0702040204020203" pitchFamily="34" charset="-122"/>
+                <a:cs typeface="Segoe UI Semibold" panose="020B0702040204020203" pitchFamily="34" charset="-120"/>
               </a:rPr>
               <a:t>›</a:t>
             </a:r>
@@ -8754,13 +8316,12 @@
             <a:avLst/>
           </a:prstGeom>
           <a:noFill/>
-          <a:ln/>
-        </p:spPr>
-        <p:txBody>
-          <a:bodyPr wrap="square" lIns="0" tIns="0" rIns="0" bIns="0" rtlCol="0" anchor="ctr"/>
-          <a:lstStyle/>
-          <a:p>
-            <a:pPr algn="ctr" indent="0" marL="0">
+        </p:spPr>
+        <p:txBody>
+          <a:bodyPr wrap="square" lIns="0" tIns="0" rIns="0" bIns="0" rtlCol="0" anchor="ctr"/>
+          <a:lstStyle/>
+          <a:p>
+            <a:pPr marL="0" indent="0" algn="ctr">
               <a:buNone/>
             </a:pPr>
             <a:r>
@@ -8768,9 +8329,9 @@
                 <a:solidFill>
                   <a:srgbClr val="05060C"/>
                 </a:solidFill>
-                <a:latin typeface="Segoe UI Semibold" pitchFamily="34" charset="0"/>
-                <a:ea typeface="Segoe UI Semibold" pitchFamily="34" charset="-122"/>
-                <a:cs typeface="Segoe UI Semibold" pitchFamily="34" charset="-120"/>
+                <a:latin typeface="Segoe UI Semibold" panose="020B0702040204020203" pitchFamily="34" charset="0"/>
+                <a:ea typeface="Segoe UI Semibold" panose="020B0702040204020203" pitchFamily="34" charset="-122"/>
+                <a:cs typeface="Segoe UI Semibold" panose="020B0702040204020203" pitchFamily="34" charset="-120"/>
               </a:rPr>
               <a:t>History</a:t>
             </a:r>
@@ -8793,13 +8354,12 @@
             <a:avLst/>
           </a:prstGeom>
           <a:noFill/>
-          <a:ln/>
-        </p:spPr>
-        <p:txBody>
-          <a:bodyPr wrap="square" lIns="0" tIns="0" rIns="0" bIns="0" rtlCol="0" anchor="ctr"/>
-          <a:lstStyle/>
-          <a:p>
-            <a:pPr algn="ctr" indent="0" marL="0">
+        </p:spPr>
+        <p:txBody>
+          <a:bodyPr wrap="square" lIns="0" tIns="0" rIns="0" bIns="0" rtlCol="0" anchor="ctr"/>
+          <a:lstStyle/>
+          <a:p>
+            <a:pPr marL="0" indent="0" algn="ctr">
               <a:buNone/>
             </a:pPr>
             <a:r>
@@ -8807,9 +8367,9 @@
                 <a:solidFill>
                   <a:srgbClr val="5B6478"/>
                 </a:solidFill>
-                <a:latin typeface="Segoe UI" pitchFamily="34" charset="0"/>
-                <a:ea typeface="Segoe UI" pitchFamily="34" charset="-122"/>
-                <a:cs typeface="Segoe UI" pitchFamily="34" charset="-120"/>
+                <a:latin typeface="Segoe UI" panose="020B0502040204020203" pitchFamily="34" charset="0"/>
+                <a:ea typeface="Segoe UI" panose="020B0502040204020203" pitchFamily="34" charset="-122"/>
+                <a:cs typeface="Segoe UI" panose="020B0502040204020203" pitchFamily="34" charset="-120"/>
               </a:rPr>
               <a:t>stored</a:t>
             </a:r>
@@ -8855,13 +8415,12 @@
             <a:avLst/>
           </a:prstGeom>
           <a:noFill/>
-          <a:ln/>
-        </p:spPr>
-        <p:txBody>
-          <a:bodyPr wrap="square" lIns="0" tIns="0" rIns="0" bIns="0" rtlCol="0" anchor="ctr"/>
-          <a:lstStyle/>
-          <a:p>
-            <a:pPr indent="0" marL="0">
+        </p:spPr>
+        <p:txBody>
+          <a:bodyPr wrap="square" lIns="0" tIns="0" rIns="0" bIns="0" rtlCol="0" anchor="ctr"/>
+          <a:lstStyle/>
+          <a:p>
+            <a:pPr marL="0" indent="0">
               <a:buNone/>
             </a:pPr>
             <a:r>
@@ -8869,9 +8428,9 @@
                 <a:solidFill>
                   <a:srgbClr val="FFFFFF"/>
                 </a:solidFill>
-                <a:latin typeface="Segoe UI Light" pitchFamily="34" charset="0"/>
-                <a:ea typeface="Segoe UI Light" pitchFamily="34" charset="-122"/>
-                <a:cs typeface="Segoe UI Light" pitchFamily="34" charset="-120"/>
+                <a:latin typeface="Segoe UI Light" panose="020B0502040204020203" pitchFamily="34" charset="0"/>
+                <a:ea typeface="Segoe UI Light" panose="020B0502040204020203" pitchFamily="34" charset="-122"/>
+                <a:cs typeface="Segoe UI Light" panose="020B0502040204020203" pitchFamily="34" charset="-120"/>
               </a:rPr>
               <a:t>Instant</a:t>
             </a:r>
@@ -8894,13 +8453,12 @@
             <a:avLst/>
           </a:prstGeom>
           <a:noFill/>
-          <a:ln/>
         </p:spPr>
         <p:txBody>
           <a:bodyPr wrap="square" lIns="0" tIns="0" rIns="0" bIns="0" rtlCol="0" anchor="t"/>
           <a:lstStyle/>
           <a:p>
-            <a:pPr indent="0" marL="0">
+            <a:pPr marL="0" indent="0">
               <a:buNone/>
             </a:pPr>
             <a:r>
@@ -8908,9 +8466,9 @@
                 <a:solidFill>
                   <a:srgbClr val="C9D1FF"/>
                 </a:solidFill>
-                <a:latin typeface="Segoe UI" pitchFamily="34" charset="0"/>
-                <a:ea typeface="Segoe UI" pitchFamily="34" charset="-122"/>
-                <a:cs typeface="Segoe UI" pitchFamily="34" charset="-120"/>
+                <a:latin typeface="Segoe UI" panose="020B0502040204020203" pitchFamily="34" charset="0"/>
+                <a:ea typeface="Segoe UI" panose="020B0502040204020203" pitchFamily="34" charset="-122"/>
+                <a:cs typeface="Segoe UI" panose="020B0502040204020203" pitchFamily="34" charset="-120"/>
               </a:rPr>
               <a:t>in-app push</a:t>
             </a:r>
@@ -8956,13 +8514,12 @@
             <a:avLst/>
           </a:prstGeom>
           <a:noFill/>
-          <a:ln/>
-        </p:spPr>
-        <p:txBody>
-          <a:bodyPr wrap="square" lIns="0" tIns="0" rIns="0" bIns="0" rtlCol="0" anchor="ctr"/>
-          <a:lstStyle/>
-          <a:p>
-            <a:pPr indent="0" marL="0">
+        </p:spPr>
+        <p:txBody>
+          <a:bodyPr wrap="square" lIns="0" tIns="0" rIns="0" bIns="0" rtlCol="0" anchor="ctr"/>
+          <a:lstStyle/>
+          <a:p>
+            <a:pPr marL="0" indent="0">
               <a:buNone/>
             </a:pPr>
             <a:r>
@@ -8970,9 +8527,9 @@
                 <a:solidFill>
                   <a:srgbClr val="FFFFFF"/>
                 </a:solidFill>
-                <a:latin typeface="Segoe UI Light" pitchFamily="34" charset="0"/>
-                <a:ea typeface="Segoe UI Light" pitchFamily="34" charset="-122"/>
-                <a:cs typeface="Segoe UI Light" pitchFamily="34" charset="-120"/>
+                <a:latin typeface="Segoe UI Light" panose="020B0502040204020203" pitchFamily="34" charset="0"/>
+                <a:ea typeface="Segoe UI Light" panose="020B0502040204020203" pitchFamily="34" charset="-122"/>
+                <a:cs typeface="Segoe UI Light" panose="020B0502040204020203" pitchFamily="34" charset="-120"/>
               </a:rPr>
               <a:t>3</a:t>
             </a:r>
@@ -8995,13 +8552,12 @@
             <a:avLst/>
           </a:prstGeom>
           <a:noFill/>
-          <a:ln/>
         </p:spPr>
         <p:txBody>
           <a:bodyPr wrap="square" lIns="0" tIns="0" rIns="0" bIns="0" rtlCol="0" anchor="t"/>
           <a:lstStyle/>
           <a:p>
-            <a:pPr indent="0" marL="0">
+            <a:pPr marL="0" indent="0">
               <a:buNone/>
             </a:pPr>
             <a:r>
@@ -9009,9 +8565,9 @@
                 <a:solidFill>
                   <a:srgbClr val="C9D1FF"/>
                 </a:solidFill>
-                <a:latin typeface="Segoe UI" pitchFamily="34" charset="0"/>
-                <a:ea typeface="Segoe UI" pitchFamily="34" charset="-122"/>
-                <a:cs typeface="Segoe UI" pitchFamily="34" charset="-120"/>
+                <a:latin typeface="Segoe UI" panose="020B0502040204020203" pitchFamily="34" charset="0"/>
+                <a:ea typeface="Segoe UI" panose="020B0502040204020203" pitchFamily="34" charset="-122"/>
+                <a:cs typeface="Segoe UI" panose="020B0502040204020203" pitchFamily="34" charset="-120"/>
               </a:rPr>
               <a:t>automatic retries</a:t>
             </a:r>
@@ -9057,13 +8613,12 @@
             <a:avLst/>
           </a:prstGeom>
           <a:noFill/>
-          <a:ln/>
-        </p:spPr>
-        <p:txBody>
-          <a:bodyPr wrap="square" lIns="0" tIns="0" rIns="0" bIns="0" rtlCol="0" anchor="ctr"/>
-          <a:lstStyle/>
-          <a:p>
-            <a:pPr indent="0" marL="0">
+        </p:spPr>
+        <p:txBody>
+          <a:bodyPr wrap="square" lIns="0" tIns="0" rIns="0" bIns="0" rtlCol="0" anchor="ctr"/>
+          <a:lstStyle/>
+          <a:p>
+            <a:pPr marL="0" indent="0">
               <a:buNone/>
             </a:pPr>
             <a:r>
@@ -9071,9 +8626,9 @@
                 <a:solidFill>
                   <a:srgbClr val="FFFFFF"/>
                 </a:solidFill>
-                <a:latin typeface="Segoe UI Light" pitchFamily="34" charset="0"/>
-                <a:ea typeface="Segoe UI Light" pitchFamily="34" charset="-122"/>
-                <a:cs typeface="Segoe UI Light" pitchFamily="34" charset="-120"/>
+                <a:latin typeface="Segoe UI Light" panose="020B0502040204020203" pitchFamily="34" charset="0"/>
+                <a:ea typeface="Segoe UI Light" panose="020B0502040204020203" pitchFamily="34" charset="-122"/>
+                <a:cs typeface="Segoe UI Light" panose="020B0502040204020203" pitchFamily="34" charset="-120"/>
               </a:rPr>
               <a:t>100%</a:t>
             </a:r>
@@ -9096,13 +8651,12 @@
             <a:avLst/>
           </a:prstGeom>
           <a:noFill/>
-          <a:ln/>
         </p:spPr>
         <p:txBody>
           <a:bodyPr wrap="square" lIns="0" tIns="0" rIns="0" bIns="0" rtlCol="0" anchor="t"/>
           <a:lstStyle/>
           <a:p>
-            <a:pPr indent="0" marL="0">
+            <a:pPr marL="0" indent="0">
               <a:buNone/>
             </a:pPr>
             <a:r>
@@ -9110,9 +8664,9 @@
                 <a:solidFill>
                   <a:srgbClr val="C9D1FF"/>
                 </a:solidFill>
-                <a:latin typeface="Segoe UI" pitchFamily="34" charset="0"/>
-                <a:ea typeface="Segoe UI" pitchFamily="34" charset="-122"/>
-                <a:cs typeface="Segoe UI" pitchFamily="34" charset="-120"/>
+                <a:latin typeface="Segoe UI" panose="020B0502040204020203" pitchFamily="34" charset="0"/>
+                <a:ea typeface="Segoe UI" panose="020B0502040204020203" pitchFamily="34" charset="-122"/>
+                <a:cs typeface="Segoe UI" panose="020B0502040204020203" pitchFamily="34" charset="-120"/>
               </a:rPr>
               <a:t>deliveries recorded</a:t>
             </a:r>
@@ -9166,13 +8720,12 @@
             <a:avLst/>
           </a:prstGeom>
           <a:noFill/>
-          <a:ln/>
-        </p:spPr>
-        <p:txBody>
-          <a:bodyPr wrap="square" lIns="0" tIns="0" rIns="0" bIns="0" rtlCol="0" anchor="ctr"/>
-          <a:lstStyle/>
-          <a:p>
-            <a:pPr indent="0" marL="0">
+        </p:spPr>
+        <p:txBody>
+          <a:bodyPr wrap="square" lIns="0" tIns="0" rIns="0" bIns="0" rtlCol="0" anchor="ctr"/>
+          <a:lstStyle/>
+          <a:p>
+            <a:pPr marL="0" indent="0">
               <a:buNone/>
             </a:pPr>
             <a:r>
@@ -9180,23 +8733,20 @@
                 <a:solidFill>
                   <a:srgbClr val="8FA0FF"/>
                 </a:solidFill>
-                <a:latin typeface="Segoe UI" pitchFamily="34" charset="0"/>
-                <a:ea typeface="Segoe UI" pitchFamily="34" charset="-122"/>
-                <a:cs typeface="Segoe UI" pitchFamily="34" charset="-120"/>
+                <a:latin typeface="Segoe UI" panose="020B0502040204020203" pitchFamily="34" charset="0"/>
+                <a:ea typeface="Segoe UI" panose="020B0502040204020203" pitchFamily="34" charset="-122"/>
+                <a:cs typeface="Segoe UI" panose="020B0502040204020203" pitchFamily="34" charset="-120"/>
               </a:rPr>
               <a:t>LIVE  </a:t>
             </a:r>
-            <a:pPr indent="0" marL="0">
-              <a:buNone/>
-            </a:pPr>
             <a:r>
               <a:rPr lang="en-US" sz="1100" dirty="0">
                 <a:solidFill>
                   <a:srgbClr val="FFFFFF"/>
                 </a:solidFill>
-                <a:latin typeface="Segoe UI" pitchFamily="34" charset="0"/>
-                <a:ea typeface="Segoe UI" pitchFamily="34" charset="-122"/>
-                <a:cs typeface="Segoe UI" pitchFamily="34" charset="-120"/>
+                <a:latin typeface="Segoe UI" panose="020B0502040204020203" pitchFamily="34" charset="0"/>
+                <a:ea typeface="Segoe UI" panose="020B0502040204020203" pitchFamily="34" charset="-122"/>
+                <a:cs typeface="Segoe UI" panose="020B0502040204020203" pitchFamily="34" charset="-120"/>
               </a:rPr>
               <a:t>Notifications page</a:t>
             </a:r>
@@ -9214,7 +8764,7 @@
 
 <file path=ppt/slides/slide7.xml><?xml version="1.0" encoding="utf-8"?>
 <p:sld xmlns:a="http://schemas.openxmlformats.org/drawingml/2006/main" xmlns:r="http://schemas.openxmlformats.org/officeDocument/2006/relationships" xmlns:p="http://schemas.openxmlformats.org/presentationml/2006/main">
-  <p:cSld name="Slide 7">
+  <p:cSld>
     <p:bg>
       <p:bgPr>
         <a:blipFill dpi="0" rotWithShape="1">
@@ -9433,25 +8983,24 @@
             <a:avLst/>
           </a:prstGeom>
           <a:noFill/>
-          <a:ln/>
-        </p:spPr>
-        <p:txBody>
-          <a:bodyPr wrap="square" lIns="0" tIns="0" rIns="0" bIns="0" rtlCol="0" anchor="ctr"/>
-          <a:lstStyle/>
-          <a:p>
-            <a:pPr indent="0" marL="0">
-              <a:buNone/>
-            </a:pPr>
-            <a:r>
-              <a:rPr lang="en-US" sz="1050" spc="300" kern="0" dirty="0">
+        </p:spPr>
+        <p:txBody>
+          <a:bodyPr wrap="square" lIns="0" tIns="0" rIns="0" bIns="0" rtlCol="0" anchor="ctr"/>
+          <a:lstStyle/>
+          <a:p>
+            <a:pPr marL="0" indent="0">
+              <a:buNone/>
+            </a:pPr>
+            <a:r>
+              <a:rPr lang="en-US" sz="1050" kern="0" spc="300" dirty="0">
                 <a:solidFill>
                   <a:srgbClr val="2B3DFF"/>
                 </a:solidFill>
-                <a:latin typeface="Segoe UI Semibold" pitchFamily="34" charset="0"/>
-                <a:ea typeface="Segoe UI Semibold" pitchFamily="34" charset="-122"/>
-                <a:cs typeface="Segoe UI Semibold" pitchFamily="34" charset="-120"/>
-              </a:rPr>
-              <a:t>07 · SACHINTHANA · ANALYTICS SERVICE</a:t>
+                <a:latin typeface="Segoe UI Semibold" panose="020B0702040204020203" pitchFamily="34" charset="0"/>
+                <a:ea typeface="Segoe UI Semibold" panose="020B0702040204020203" pitchFamily="34" charset="-122"/>
+                <a:cs typeface="Segoe UI Semibold" panose="020B0702040204020203" pitchFamily="34" charset="-120"/>
+              </a:rPr>
+              <a:t>07 · ANALYTICS SERVICE</a:t>
             </a:r>
             <a:endParaRPr lang="en-US" sz="1050" dirty="0"/>
           </a:p>
@@ -9472,13 +9021,12 @@
             <a:avLst/>
           </a:prstGeom>
           <a:noFill/>
-          <a:ln/>
-        </p:spPr>
-        <p:txBody>
-          <a:bodyPr wrap="square" lIns="0" tIns="0" rIns="0" bIns="0" rtlCol="0" anchor="ctr"/>
-          <a:lstStyle/>
-          <a:p>
-            <a:pPr indent="0" marL="0">
+        </p:spPr>
+        <p:txBody>
+          <a:bodyPr wrap="square" lIns="0" tIns="0" rIns="0" bIns="0" rtlCol="0" anchor="ctr"/>
+          <a:lstStyle/>
+          <a:p>
+            <a:pPr marL="0" indent="0">
               <a:buNone/>
             </a:pPr>
             <a:r>
@@ -9486,23 +9034,20 @@
                 <a:solidFill>
                   <a:srgbClr val="05060C"/>
                 </a:solidFill>
-                <a:latin typeface="Segoe UI Light" pitchFamily="34" charset="0"/>
-                <a:ea typeface="Segoe UI Light" pitchFamily="34" charset="-122"/>
-                <a:cs typeface="Segoe UI Light" pitchFamily="34" charset="-120"/>
+                <a:latin typeface="Segoe UI Light" panose="020B0502040204020203" pitchFamily="34" charset="0"/>
+                <a:ea typeface="Segoe UI Light" panose="020B0502040204020203" pitchFamily="34" charset="-122"/>
+                <a:cs typeface="Segoe UI Light" panose="020B0502040204020203" pitchFamily="34" charset="-120"/>
               </a:rPr>
               <a:t>Trustworthy energy </a:t>
             </a:r>
-            <a:pPr indent="0" marL="0">
-              <a:buNone/>
-            </a:pPr>
             <a:r>
               <a:rPr lang="en-US" sz="3200" dirty="0">
                 <a:solidFill>
                   <a:srgbClr val="2B3DFF"/>
                 </a:solidFill>
-                <a:latin typeface="Segoe UI Light" pitchFamily="34" charset="0"/>
-                <a:ea typeface="Segoe UI Light" pitchFamily="34" charset="-122"/>
-                <a:cs typeface="Segoe UI Light" pitchFamily="34" charset="-120"/>
+                <a:latin typeface="Segoe UI Light" panose="020B0502040204020203" pitchFamily="34" charset="0"/>
+                <a:ea typeface="Segoe UI Light" panose="020B0502040204020203" pitchFamily="34" charset="-122"/>
+                <a:cs typeface="Segoe UI Light" panose="020B0502040204020203" pitchFamily="34" charset="-120"/>
               </a:rPr>
               <a:t>figures and reports</a:t>
             </a:r>
@@ -9550,13 +9095,12 @@
             <a:avLst/>
           </a:prstGeom>
           <a:noFill/>
-          <a:ln/>
-        </p:spPr>
-        <p:txBody>
-          <a:bodyPr wrap="square" lIns="0" tIns="0" rIns="0" bIns="0" rtlCol="0" anchor="ctr"/>
-          <a:lstStyle/>
-          <a:p>
-            <a:pPr indent="0" marL="0">
+        </p:spPr>
+        <p:txBody>
+          <a:bodyPr wrap="square" lIns="0" tIns="0" rIns="0" bIns="0" rtlCol="0" anchor="ctr"/>
+          <a:lstStyle/>
+          <a:p>
+            <a:pPr marL="0" indent="0">
               <a:buNone/>
             </a:pPr>
             <a:r>
@@ -9564,9 +9108,9 @@
                 <a:solidFill>
                   <a:srgbClr val="C9D1FF"/>
                 </a:solidFill>
-                <a:latin typeface="Segoe UI" pitchFamily="34" charset="0"/>
-                <a:ea typeface="Segoe UI" pitchFamily="34" charset="-122"/>
-                <a:cs typeface="Segoe UI" pitchFamily="34" charset="-120"/>
+                <a:latin typeface="Segoe UI" panose="020B0502040204020203" pitchFamily="34" charset="0"/>
+                <a:ea typeface="Segoe UI" panose="020B0502040204020203" pitchFamily="34" charset="-122"/>
+                <a:cs typeface="Segoe UI" panose="020B0502040204020203" pitchFamily="34" charset="-120"/>
               </a:rPr>
               <a:t>EC8208 Software Architecture  ·  University of Ruhuna</a:t>
             </a:r>
@@ -9589,13 +9133,12 @@
             <a:avLst/>
           </a:prstGeom>
           <a:noFill/>
-          <a:ln/>
-        </p:spPr>
-        <p:txBody>
-          <a:bodyPr wrap="square" lIns="0" tIns="0" rIns="0" bIns="0" rtlCol="0" anchor="ctr"/>
-          <a:lstStyle/>
-          <a:p>
-            <a:pPr algn="r" indent="0" marL="0">
+        </p:spPr>
+        <p:txBody>
+          <a:bodyPr wrap="square" lIns="0" tIns="0" rIns="0" bIns="0" rtlCol="0" anchor="ctr"/>
+          <a:lstStyle/>
+          <a:p>
+            <a:pPr marL="0" indent="0" algn="r">
               <a:buNone/>
             </a:pPr>
             <a:r>
@@ -9603,9 +9146,9 @@
                 <a:solidFill>
                   <a:srgbClr val="C9D1FF"/>
                 </a:solidFill>
-                <a:latin typeface="Segoe UI" pitchFamily="34" charset="0"/>
-                <a:ea typeface="Segoe UI" pitchFamily="34" charset="-122"/>
-                <a:cs typeface="Segoe UI" pitchFamily="34" charset="-120"/>
+                <a:latin typeface="Segoe UI" panose="020B0502040204020203" pitchFamily="34" charset="0"/>
+                <a:ea typeface="Segoe UI" panose="020B0502040204020203" pitchFamily="34" charset="-122"/>
+                <a:cs typeface="Segoe UI" panose="020B0502040204020203" pitchFamily="34" charset="-120"/>
               </a:rPr>
               <a:t>07  ·  7:02–8:40</a:t>
             </a:r>
@@ -9655,13 +9198,12 @@
             <a:avLst/>
           </a:prstGeom>
           <a:noFill/>
-          <a:ln/>
-        </p:spPr>
-        <p:txBody>
-          <a:bodyPr wrap="square" lIns="0" tIns="0" rIns="0" bIns="0" rtlCol="0" anchor="ctr"/>
-          <a:lstStyle/>
-          <a:p>
-            <a:pPr algn="ctr" indent="0" marL="0">
+        </p:spPr>
+        <p:txBody>
+          <a:bodyPr wrap="square" lIns="0" tIns="0" rIns="0" bIns="0" rtlCol="0" anchor="ctr"/>
+          <a:lstStyle/>
+          <a:p>
+            <a:pPr marL="0" indent="0" algn="ctr">
               <a:buNone/>
             </a:pPr>
             <a:r>
@@ -9669,9 +9211,9 @@
                 <a:solidFill>
                   <a:srgbClr val="FFFFFF"/>
                 </a:solidFill>
-                <a:latin typeface="Segoe UI Semibold" pitchFamily="34" charset="0"/>
-                <a:ea typeface="Segoe UI Semibold" pitchFamily="34" charset="-122"/>
-                <a:cs typeface="Segoe UI Semibold" pitchFamily="34" charset="-120"/>
+                <a:latin typeface="Segoe UI Semibold" panose="020B0702040204020203" pitchFamily="34" charset="0"/>
+                <a:ea typeface="Segoe UI Semibold" panose="020B0702040204020203" pitchFamily="34" charset="-122"/>
+                <a:cs typeface="Segoe UI Semibold" panose="020B0702040204020203" pitchFamily="34" charset="-120"/>
               </a:rPr>
               <a:t>Source APIs</a:t>
             </a:r>
@@ -9694,13 +9236,12 @@
             <a:avLst/>
           </a:prstGeom>
           <a:noFill/>
-          <a:ln/>
-        </p:spPr>
-        <p:txBody>
-          <a:bodyPr wrap="square" lIns="0" tIns="0" rIns="0" bIns="0" rtlCol="0" anchor="ctr"/>
-          <a:lstStyle/>
-          <a:p>
-            <a:pPr algn="ctr" indent="0" marL="0">
+        </p:spPr>
+        <p:txBody>
+          <a:bodyPr wrap="square" lIns="0" tIns="0" rIns="0" bIns="0" rtlCol="0" anchor="ctr"/>
+          <a:lstStyle/>
+          <a:p>
+            <a:pPr marL="0" indent="0" algn="ctr">
               <a:buNone/>
             </a:pPr>
             <a:r>
@@ -9708,9 +9249,9 @@
                 <a:solidFill>
                   <a:srgbClr val="C9D1FF"/>
                 </a:solidFill>
-                <a:latin typeface="Segoe UI" pitchFamily="34" charset="0"/>
-                <a:ea typeface="Segoe UI" pitchFamily="34" charset="-122"/>
-                <a:cs typeface="Segoe UI" pitchFamily="34" charset="-120"/>
+                <a:latin typeface="Segoe UI" panose="020B0502040204020203" pitchFamily="34" charset="0"/>
+                <a:ea typeface="Segoe UI" panose="020B0502040204020203" pitchFamily="34" charset="-122"/>
+                <a:cs typeface="Segoe UI" panose="020B0502040204020203" pitchFamily="34" charset="-120"/>
               </a:rPr>
               <a:t>REST only</a:t>
             </a:r>
@@ -9733,13 +9274,12 @@
             <a:avLst/>
           </a:prstGeom>
           <a:noFill/>
-          <a:ln/>
-        </p:spPr>
-        <p:txBody>
-          <a:bodyPr wrap="square" lIns="0" tIns="0" rIns="0" bIns="0" rtlCol="0" anchor="ctr"/>
-          <a:lstStyle/>
-          <a:p>
-            <a:pPr algn="ctr" indent="0" marL="0">
+        </p:spPr>
+        <p:txBody>
+          <a:bodyPr wrap="square" lIns="0" tIns="0" rIns="0" bIns="0" rtlCol="0" anchor="ctr"/>
+          <a:lstStyle/>
+          <a:p>
+            <a:pPr marL="0" indent="0" algn="ctr">
               <a:buNone/>
             </a:pPr>
             <a:r>
@@ -9747,9 +9287,9 @@
                 <a:solidFill>
                   <a:srgbClr val="2B3DFF"/>
                 </a:solidFill>
-                <a:latin typeface="Segoe UI Semibold" pitchFamily="34" charset="0"/>
-                <a:ea typeface="Segoe UI Semibold" pitchFamily="34" charset="-122"/>
-                <a:cs typeface="Segoe UI Semibold" pitchFamily="34" charset="-120"/>
+                <a:latin typeface="Segoe UI Semibold" panose="020B0702040204020203" pitchFamily="34" charset="0"/>
+                <a:ea typeface="Segoe UI Semibold" panose="020B0702040204020203" pitchFamily="34" charset="-122"/>
+                <a:cs typeface="Segoe UI Semibold" panose="020B0702040204020203" pitchFamily="34" charset="-120"/>
               </a:rPr>
               <a:t>›</a:t>
             </a:r>
@@ -9799,13 +9339,12 @@
             <a:avLst/>
           </a:prstGeom>
           <a:noFill/>
-          <a:ln/>
-        </p:spPr>
-        <p:txBody>
-          <a:bodyPr wrap="square" lIns="0" tIns="0" rIns="0" bIns="0" rtlCol="0" anchor="ctr"/>
-          <a:lstStyle/>
-          <a:p>
-            <a:pPr algn="ctr" indent="0" marL="0">
+        </p:spPr>
+        <p:txBody>
+          <a:bodyPr wrap="square" lIns="0" tIns="0" rIns="0" bIns="0" rtlCol="0" anchor="ctr"/>
+          <a:lstStyle/>
+          <a:p>
+            <a:pPr marL="0" indent="0" algn="ctr">
               <a:buNone/>
             </a:pPr>
             <a:r>
@@ -9813,9 +9352,9 @@
                 <a:solidFill>
                   <a:srgbClr val="05060C"/>
                 </a:solidFill>
-                <a:latin typeface="Segoe UI Semibold" pitchFamily="34" charset="0"/>
-                <a:ea typeface="Segoe UI Semibold" pitchFamily="34" charset="-122"/>
-                <a:cs typeface="Segoe UI Semibold" pitchFamily="34" charset="-120"/>
+                <a:latin typeface="Segoe UI Semibold" panose="020B0702040204020203" pitchFamily="34" charset="0"/>
+                <a:ea typeface="Segoe UI Semibold" panose="020B0702040204020203" pitchFamily="34" charset="-122"/>
+                <a:cs typeface="Segoe UI Semibold" panose="020B0702040204020203" pitchFamily="34" charset="-120"/>
               </a:rPr>
               <a:t>Calculation</a:t>
             </a:r>
@@ -9838,13 +9377,12 @@
             <a:avLst/>
           </a:prstGeom>
           <a:noFill/>
-          <a:ln/>
-        </p:spPr>
-        <p:txBody>
-          <a:bodyPr wrap="square" lIns="0" tIns="0" rIns="0" bIns="0" rtlCol="0" anchor="ctr"/>
-          <a:lstStyle/>
-          <a:p>
-            <a:pPr algn="ctr" indent="0" marL="0">
+        </p:spPr>
+        <p:txBody>
+          <a:bodyPr wrap="square" lIns="0" tIns="0" rIns="0" bIns="0" rtlCol="0" anchor="ctr"/>
+          <a:lstStyle/>
+          <a:p>
+            <a:pPr marL="0" indent="0" algn="ctr">
               <a:buNone/>
             </a:pPr>
             <a:r>
@@ -9852,9 +9390,9 @@
                 <a:solidFill>
                   <a:srgbClr val="5B6478"/>
                 </a:solidFill>
-                <a:latin typeface="Segoe UI" pitchFamily="34" charset="0"/>
-                <a:ea typeface="Segoe UI" pitchFamily="34" charset="-122"/>
-                <a:cs typeface="Segoe UI" pitchFamily="34" charset="-120"/>
+                <a:latin typeface="Segoe UI" panose="020B0502040204020203" pitchFamily="34" charset="0"/>
+                <a:ea typeface="Segoe UI" panose="020B0502040204020203" pitchFamily="34" charset="-122"/>
+                <a:cs typeface="Segoe UI" panose="020B0502040204020203" pitchFamily="34" charset="-120"/>
               </a:rPr>
               <a:t>power to kWh</a:t>
             </a:r>
@@ -9877,13 +9415,12 @@
             <a:avLst/>
           </a:prstGeom>
           <a:noFill/>
-          <a:ln/>
-        </p:spPr>
-        <p:txBody>
-          <a:bodyPr wrap="square" lIns="0" tIns="0" rIns="0" bIns="0" rtlCol="0" anchor="ctr"/>
-          <a:lstStyle/>
-          <a:p>
-            <a:pPr algn="ctr" indent="0" marL="0">
+        </p:spPr>
+        <p:txBody>
+          <a:bodyPr wrap="square" lIns="0" tIns="0" rIns="0" bIns="0" rtlCol="0" anchor="ctr"/>
+          <a:lstStyle/>
+          <a:p>
+            <a:pPr marL="0" indent="0" algn="ctr">
               <a:buNone/>
             </a:pPr>
             <a:r>
@@ -9891,9 +9428,9 @@
                 <a:solidFill>
                   <a:srgbClr val="2B3DFF"/>
                 </a:solidFill>
-                <a:latin typeface="Segoe UI Semibold" pitchFamily="34" charset="0"/>
-                <a:ea typeface="Segoe UI Semibold" pitchFamily="34" charset="-122"/>
-                <a:cs typeface="Segoe UI Semibold" pitchFamily="34" charset="-120"/>
+                <a:latin typeface="Segoe UI Semibold" panose="020B0702040204020203" pitchFamily="34" charset="0"/>
+                <a:ea typeface="Segoe UI Semibold" panose="020B0702040204020203" pitchFamily="34" charset="-122"/>
+                <a:cs typeface="Segoe UI Semibold" panose="020B0702040204020203" pitchFamily="34" charset="-120"/>
               </a:rPr>
               <a:t>›</a:t>
             </a:r>
@@ -9943,13 +9480,12 @@
             <a:avLst/>
           </a:prstGeom>
           <a:noFill/>
-          <a:ln/>
-        </p:spPr>
-        <p:txBody>
-          <a:bodyPr wrap="square" lIns="0" tIns="0" rIns="0" bIns="0" rtlCol="0" anchor="ctr"/>
-          <a:lstStyle/>
-          <a:p>
-            <a:pPr algn="ctr" indent="0" marL="0">
+        </p:spPr>
+        <p:txBody>
+          <a:bodyPr wrap="square" lIns="0" tIns="0" rIns="0" bIns="0" rtlCol="0" anchor="ctr"/>
+          <a:lstStyle/>
+          <a:p>
+            <a:pPr marL="0" indent="0" algn="ctr">
               <a:buNone/>
             </a:pPr>
             <a:r>
@@ -9957,9 +9493,9 @@
                 <a:solidFill>
                   <a:srgbClr val="05060C"/>
                 </a:solidFill>
-                <a:latin typeface="Segoe UI Semibold" pitchFamily="34" charset="0"/>
-                <a:ea typeface="Segoe UI Semibold" pitchFamily="34" charset="-122"/>
-                <a:cs typeface="Segoe UI Semibold" pitchFamily="34" charset="-120"/>
+                <a:latin typeface="Segoe UI Semibold" panose="020B0702040204020203" pitchFamily="34" charset="0"/>
+                <a:ea typeface="Segoe UI Semibold" panose="020B0702040204020203" pitchFamily="34" charset="-122"/>
+                <a:cs typeface="Segoe UI Semibold" panose="020B0702040204020203" pitchFamily="34" charset="-120"/>
               </a:rPr>
               <a:t>Reports</a:t>
             </a:r>
@@ -9982,13 +9518,12 @@
             <a:avLst/>
           </a:prstGeom>
           <a:noFill/>
-          <a:ln/>
-        </p:spPr>
-        <p:txBody>
-          <a:bodyPr wrap="square" lIns="0" tIns="0" rIns="0" bIns="0" rtlCol="0" anchor="ctr"/>
-          <a:lstStyle/>
-          <a:p>
-            <a:pPr algn="ctr" indent="0" marL="0">
+        </p:spPr>
+        <p:txBody>
+          <a:bodyPr wrap="square" lIns="0" tIns="0" rIns="0" bIns="0" rtlCol="0" anchor="ctr"/>
+          <a:lstStyle/>
+          <a:p>
+            <a:pPr marL="0" indent="0" algn="ctr">
               <a:buNone/>
             </a:pPr>
             <a:r>
@@ -9996,9 +9531,9 @@
                 <a:solidFill>
                   <a:srgbClr val="5B6478"/>
                 </a:solidFill>
-                <a:latin typeface="Segoe UI" pitchFamily="34" charset="0"/>
-                <a:ea typeface="Segoe UI" pitchFamily="34" charset="-122"/>
-                <a:cs typeface="Segoe UI" pitchFamily="34" charset="-120"/>
+                <a:latin typeface="Segoe UI" panose="020B0502040204020203" pitchFamily="34" charset="0"/>
+                <a:ea typeface="Segoe UI" panose="020B0502040204020203" pitchFamily="34" charset="-122"/>
+                <a:cs typeface="Segoe UI" panose="020B0502040204020203" pitchFamily="34" charset="-120"/>
               </a:rPr>
               <a:t>stored</a:t>
             </a:r>
@@ -10021,13 +9556,12 @@
             <a:avLst/>
           </a:prstGeom>
           <a:noFill/>
-          <a:ln/>
-        </p:spPr>
-        <p:txBody>
-          <a:bodyPr wrap="square" lIns="0" tIns="0" rIns="0" bIns="0" rtlCol="0" anchor="ctr"/>
-          <a:lstStyle/>
-          <a:p>
-            <a:pPr algn="ctr" indent="0" marL="0">
+        </p:spPr>
+        <p:txBody>
+          <a:bodyPr wrap="square" lIns="0" tIns="0" rIns="0" bIns="0" rtlCol="0" anchor="ctr"/>
+          <a:lstStyle/>
+          <a:p>
+            <a:pPr marL="0" indent="0" algn="ctr">
               <a:buNone/>
             </a:pPr>
             <a:r>
@@ -10035,9 +9569,9 @@
                 <a:solidFill>
                   <a:srgbClr val="2B3DFF"/>
                 </a:solidFill>
-                <a:latin typeface="Segoe UI Semibold" pitchFamily="34" charset="0"/>
-                <a:ea typeface="Segoe UI Semibold" pitchFamily="34" charset="-122"/>
-                <a:cs typeface="Segoe UI Semibold" pitchFamily="34" charset="-120"/>
+                <a:latin typeface="Segoe UI Semibold" panose="020B0702040204020203" pitchFamily="34" charset="0"/>
+                <a:ea typeface="Segoe UI Semibold" panose="020B0702040204020203" pitchFamily="34" charset="-122"/>
+                <a:cs typeface="Segoe UI Semibold" panose="020B0702040204020203" pitchFamily="34" charset="-120"/>
               </a:rPr>
               <a:t>›</a:t>
             </a:r>
@@ -10087,13 +9621,12 @@
             <a:avLst/>
           </a:prstGeom>
           <a:noFill/>
-          <a:ln/>
-        </p:spPr>
-        <p:txBody>
-          <a:bodyPr wrap="square" lIns="0" tIns="0" rIns="0" bIns="0" rtlCol="0" anchor="ctr"/>
-          <a:lstStyle/>
-          <a:p>
-            <a:pPr algn="ctr" indent="0" marL="0">
+        </p:spPr>
+        <p:txBody>
+          <a:bodyPr wrap="square" lIns="0" tIns="0" rIns="0" bIns="0" rtlCol="0" anchor="ctr"/>
+          <a:lstStyle/>
+          <a:p>
+            <a:pPr marL="0" indent="0" algn="ctr">
               <a:buNone/>
             </a:pPr>
             <a:r>
@@ -10101,9 +9634,9 @@
                 <a:solidFill>
                   <a:srgbClr val="05060C"/>
                 </a:solidFill>
-                <a:latin typeface="Segoe UI Semibold" pitchFamily="34" charset="0"/>
-                <a:ea typeface="Segoe UI Semibold" pitchFamily="34" charset="-122"/>
-                <a:cs typeface="Segoe UI Semibold" pitchFamily="34" charset="-120"/>
+                <a:latin typeface="Segoe UI Semibold" panose="020B0702040204020203" pitchFamily="34" charset="0"/>
+                <a:ea typeface="Segoe UI Semibold" panose="020B0702040204020203" pitchFamily="34" charset="-122"/>
+                <a:cs typeface="Segoe UI Semibold" panose="020B0702040204020203" pitchFamily="34" charset="-120"/>
               </a:rPr>
               <a:t>CSV</a:t>
             </a:r>
@@ -10126,13 +9659,12 @@
             <a:avLst/>
           </a:prstGeom>
           <a:noFill/>
-          <a:ln/>
-        </p:spPr>
-        <p:txBody>
-          <a:bodyPr wrap="square" lIns="0" tIns="0" rIns="0" bIns="0" rtlCol="0" anchor="ctr"/>
-          <a:lstStyle/>
-          <a:p>
-            <a:pPr algn="ctr" indent="0" marL="0">
+        </p:spPr>
+        <p:txBody>
+          <a:bodyPr wrap="square" lIns="0" tIns="0" rIns="0" bIns="0" rtlCol="0" anchor="ctr"/>
+          <a:lstStyle/>
+          <a:p>
+            <a:pPr marL="0" indent="0" algn="ctr">
               <a:buNone/>
             </a:pPr>
             <a:r>
@@ -10140,9 +9672,9 @@
                 <a:solidFill>
                   <a:srgbClr val="5B6478"/>
                 </a:solidFill>
-                <a:latin typeface="Segoe UI" pitchFamily="34" charset="0"/>
-                <a:ea typeface="Segoe UI" pitchFamily="34" charset="-122"/>
-                <a:cs typeface="Segoe UI" pitchFamily="34" charset="-120"/>
+                <a:latin typeface="Segoe UI" panose="020B0502040204020203" pitchFamily="34" charset="0"/>
+                <a:ea typeface="Segoe UI" panose="020B0502040204020203" pitchFamily="34" charset="-122"/>
+                <a:cs typeface="Segoe UI" panose="020B0502040204020203" pitchFamily="34" charset="-120"/>
               </a:rPr>
               <a:t>export</a:t>
             </a:r>
@@ -10181,20 +9713,19 @@
         </p:nvSpPr>
         <p:spPr>
           <a:xfrm>
-            <a:off x="548640" y="3200400"/>
-            <a:ext cx="2499360" cy="731520"/>
-          </a:xfrm>
-          <a:prstGeom prst="rect">
-            <a:avLst/>
-          </a:prstGeom>
-          <a:noFill/>
-          <a:ln/>
-        </p:spPr>
-        <p:txBody>
-          <a:bodyPr wrap="square" lIns="0" tIns="0" rIns="0" bIns="0" rtlCol="0" anchor="ctr"/>
-          <a:lstStyle/>
-          <a:p>
-            <a:pPr indent="0" marL="0">
+            <a:off x="548639" y="3032760"/>
+            <a:ext cx="3833707" cy="731520"/>
+          </a:xfrm>
+          <a:prstGeom prst="rect">
+            <a:avLst/>
+          </a:prstGeom>
+          <a:noFill/>
+        </p:spPr>
+        <p:txBody>
+          <a:bodyPr wrap="square" lIns="0" tIns="0" rIns="0" bIns="0" rtlCol="0" anchor="ctr"/>
+          <a:lstStyle/>
+          <a:p>
+            <a:pPr marL="0" indent="0">
               <a:buNone/>
             </a:pPr>
             <a:r>
@@ -10202,13 +9733,20 @@
                 <a:solidFill>
                   <a:srgbClr val="FFFFFF"/>
                 </a:solidFill>
-                <a:latin typeface="Segoe UI Light" pitchFamily="34" charset="0"/>
-                <a:ea typeface="Segoe UI Light" pitchFamily="34" charset="-122"/>
-                <a:cs typeface="Segoe UI Light" pitchFamily="34" charset="-120"/>
-              </a:rPr>
-              <a:t>kWh</a:t>
-            </a:r>
-            <a:endParaRPr lang="en-US" sz="3600" dirty="0"/>
+                <a:latin typeface="Segoe UI Light" panose="020B0502040204020203" pitchFamily="34" charset="0"/>
+                <a:ea typeface="Segoe UI Light" panose="020B0502040204020203" pitchFamily="34" charset="-122"/>
+                <a:cs typeface="Segoe UI Light" panose="020B0502040204020203" pitchFamily="34" charset="-120"/>
+              </a:rPr>
+              <a:t>4 domain models</a:t>
+            </a:r>
+            <a:endParaRPr lang="en-US" sz="3600" dirty="0">
+              <a:solidFill>
+                <a:srgbClr val="FFFFFF"/>
+              </a:solidFill>
+              <a:latin typeface="Segoe UI Light" panose="020B0502040204020203" pitchFamily="34" charset="0"/>
+              <a:ea typeface="Segoe UI Light" panose="020B0502040204020203" pitchFamily="34" charset="-122"/>
+              <a:cs typeface="Segoe UI Light" panose="020B0502040204020203" pitchFamily="34" charset="-120"/>
+            </a:endParaRPr>
           </a:p>
         </p:txBody>
       </p:sp>
@@ -10220,20 +9758,19 @@
         </p:nvSpPr>
         <p:spPr>
           <a:xfrm>
-            <a:off x="548640" y="3931920"/>
+            <a:off x="548640" y="3760893"/>
             <a:ext cx="2499360" cy="292608"/>
           </a:xfrm>
           <a:prstGeom prst="rect">
             <a:avLst/>
           </a:prstGeom>
           <a:noFill/>
-          <a:ln/>
         </p:spPr>
         <p:txBody>
           <a:bodyPr wrap="square" lIns="0" tIns="0" rIns="0" bIns="0" rtlCol="0" anchor="t"/>
           <a:lstStyle/>
           <a:p>
-            <a:pPr indent="0" marL="0">
+            <a:pPr marL="0" indent="0">
               <a:buNone/>
             </a:pPr>
             <a:r>
@@ -10241,13 +9778,92 @@
                 <a:solidFill>
                   <a:srgbClr val="C9D1FF"/>
                 </a:solidFill>
-                <a:latin typeface="Segoe UI" pitchFamily="34" charset="0"/>
-                <a:ea typeface="Segoe UI" pitchFamily="34" charset="-122"/>
-                <a:cs typeface="Segoe UI" pitchFamily="34" charset="-120"/>
-              </a:rPr>
-              <a:t>integrated from power</a:t>
-            </a:r>
-            <a:endParaRPr lang="en-US" sz="1200" dirty="0"/>
+                <a:latin typeface="Segoe UI" panose="020B0502040204020203" pitchFamily="34" charset="0"/>
+                <a:ea typeface="Segoe UI" panose="020B0502040204020203" pitchFamily="34" charset="-122"/>
+                <a:cs typeface="Segoe UI" panose="020B0502040204020203" pitchFamily="34" charset="-120"/>
+              </a:rPr>
+              <a:t>Dashboards </a:t>
+            </a:r>
+            <a:endParaRPr lang="en-US" sz="1200" dirty="0">
+              <a:solidFill>
+                <a:srgbClr val="C9D1FF"/>
+              </a:solidFill>
+              <a:latin typeface="Segoe UI" panose="020B0502040204020203" pitchFamily="34" charset="0"/>
+              <a:ea typeface="Segoe UI" panose="020B0502040204020203" pitchFamily="34" charset="-122"/>
+              <a:cs typeface="Segoe UI" panose="020B0502040204020203" pitchFamily="34" charset="-120"/>
+            </a:endParaRPr>
+          </a:p>
+          <a:p>
+            <a:pPr marL="0" indent="0">
+              <a:buNone/>
+            </a:pPr>
+            <a:r>
+              <a:rPr lang="en-US" sz="1200" dirty="0">
+                <a:solidFill>
+                  <a:srgbClr val="C9D1FF"/>
+                </a:solidFill>
+                <a:latin typeface="Segoe UI" panose="020B0502040204020203" pitchFamily="34" charset="0"/>
+                <a:ea typeface="Segoe UI" panose="020B0502040204020203" pitchFamily="34" charset="-122"/>
+                <a:cs typeface="Segoe UI" panose="020B0502040204020203" pitchFamily="34" charset="-120"/>
+              </a:rPr>
+              <a:t>Energy Reports</a:t>
+            </a:r>
+            <a:endParaRPr lang="en-US" sz="1200" dirty="0">
+              <a:solidFill>
+                <a:srgbClr val="C9D1FF"/>
+              </a:solidFill>
+              <a:latin typeface="Segoe UI" panose="020B0502040204020203" pitchFamily="34" charset="0"/>
+              <a:ea typeface="Segoe UI" panose="020B0502040204020203" pitchFamily="34" charset="-122"/>
+              <a:cs typeface="Segoe UI" panose="020B0502040204020203" pitchFamily="34" charset="-120"/>
+            </a:endParaRPr>
+          </a:p>
+          <a:p>
+            <a:pPr marL="0" indent="0">
+              <a:buNone/>
+            </a:pPr>
+            <a:r>
+              <a:rPr lang="en-US" sz="1200" dirty="0">
+                <a:solidFill>
+                  <a:srgbClr val="C9D1FF"/>
+                </a:solidFill>
+                <a:latin typeface="Segoe UI" panose="020B0502040204020203" pitchFamily="34" charset="0"/>
+                <a:ea typeface="Segoe UI" panose="020B0502040204020203" pitchFamily="34" charset="-122"/>
+                <a:cs typeface="Segoe UI" panose="020B0502040204020203" pitchFamily="34" charset="-120"/>
+              </a:rPr>
+              <a:t>Performance reports </a:t>
+            </a:r>
+            <a:endParaRPr lang="en-US" sz="1200" dirty="0">
+              <a:solidFill>
+                <a:srgbClr val="C9D1FF"/>
+              </a:solidFill>
+              <a:latin typeface="Segoe UI" panose="020B0502040204020203" pitchFamily="34" charset="0"/>
+              <a:ea typeface="Segoe UI" panose="020B0502040204020203" pitchFamily="34" charset="-122"/>
+              <a:cs typeface="Segoe UI" panose="020B0502040204020203" pitchFamily="34" charset="-120"/>
+            </a:endParaRPr>
+          </a:p>
+          <a:p>
+            <a:pPr marL="0" indent="0">
+              <a:buNone/>
+            </a:pPr>
+            <a:r>
+              <a:rPr lang="en-US" sz="1200" dirty="0">
+                <a:solidFill>
+                  <a:srgbClr val="C9D1FF"/>
+                </a:solidFill>
+                <a:latin typeface="Segoe UI" panose="020B0502040204020203" pitchFamily="34" charset="0"/>
+                <a:ea typeface="Segoe UI" panose="020B0502040204020203" pitchFamily="34" charset="-122"/>
+                <a:cs typeface="Segoe UI" panose="020B0502040204020203" pitchFamily="34" charset="-120"/>
+              </a:rPr>
+              <a:t>KPIs</a:t>
+            </a:r>
+            <a:endParaRPr lang="en-US" sz="1200" dirty="0">
+              <a:solidFill>
+                <a:srgbClr val="C9D1FF"/>
+              </a:solidFill>
+              <a:latin typeface="Segoe UI" panose="020B0502040204020203" pitchFamily="34" charset="0"/>
+              <a:ea typeface="Segoe UI" panose="020B0502040204020203" pitchFamily="34" charset="-122"/>
+              <a:cs typeface="Segoe UI" panose="020B0502040204020203" pitchFamily="34" charset="-120"/>
+            </a:endParaRPr>
           </a:p>
         </p:txBody>
       </p:sp>
@@ -10282,73 +9898,113 @@
         </p:nvSpPr>
         <p:spPr>
           <a:xfrm>
-            <a:off x="3322320" y="3200400"/>
-            <a:ext cx="2499360" cy="731520"/>
-          </a:xfrm>
-          <a:prstGeom prst="rect">
-            <a:avLst/>
-          </a:prstGeom>
-          <a:noFill/>
-          <a:ln/>
-        </p:spPr>
-        <p:txBody>
-          <a:bodyPr wrap="square" lIns="0" tIns="0" rIns="0" bIns="0" rtlCol="0" anchor="ctr"/>
-          <a:lstStyle/>
-          <a:p>
-            <a:pPr indent="0" marL="0">
-              <a:buNone/>
-            </a:pPr>
-            <a:r>
-              <a:rPr lang="en-US" sz="3600" dirty="0">
+            <a:off x="4357791" y="3359232"/>
+            <a:ext cx="4761654" cy="1636776"/>
+          </a:xfrm>
+          <a:prstGeom prst="rect">
+            <a:avLst/>
+          </a:prstGeom>
+          <a:noFill/>
+        </p:spPr>
+        <p:txBody>
+          <a:bodyPr wrap="square" lIns="0" tIns="0" rIns="0" bIns="0" rtlCol="0" anchor="ctr"/>
+          <a:lstStyle/>
+          <a:p>
+            <a:pPr marL="0" indent="0">
+              <a:lnSpc>
+                <a:spcPct val="150000"/>
+              </a:lnSpc>
+              <a:buNone/>
+            </a:pPr>
+            <a:r>
+              <a:rPr lang="en-US" sz="2400" dirty="0">
                 <a:solidFill>
                   <a:srgbClr val="FFFFFF"/>
                 </a:solidFill>
-                <a:latin typeface="Segoe UI Light" pitchFamily="34" charset="0"/>
-                <a:ea typeface="Segoe UI Light" pitchFamily="34" charset="-122"/>
-                <a:cs typeface="Segoe UI Light" pitchFamily="34" charset="-120"/>
-              </a:rPr>
-              <a:t>6</a:t>
-            </a:r>
-            <a:endParaRPr lang="en-US" sz="3600" dirty="0"/>
-          </a:p>
-        </p:txBody>
-      </p:sp>
-      <p:sp>
-        <p:nvSpPr>
-          <p:cNvPr id="35" name="Text 32"/>
-          <p:cNvSpPr txBox="1"/>
-          <p:nvPr/>
-        </p:nvSpPr>
-        <p:spPr>
-          <a:xfrm>
-            <a:off x="3322320" y="3931920"/>
-            <a:ext cx="2499360" cy="292608"/>
-          </a:xfrm>
-          <a:prstGeom prst="rect">
-            <a:avLst/>
-          </a:prstGeom>
-          <a:noFill/>
-          <a:ln/>
-        </p:spPr>
-        <p:txBody>
-          <a:bodyPr wrap="square" lIns="0" tIns="0" rIns="0" bIns="0" rtlCol="0" anchor="t"/>
-          <a:lstStyle/>
-          <a:p>
-            <a:pPr indent="0" marL="0">
-              <a:buNone/>
-            </a:pPr>
-            <a:r>
-              <a:rPr lang="en-US" sz="1200" dirty="0">
-                <a:solidFill>
-                  <a:srgbClr val="C9D1FF"/>
-                </a:solidFill>
-                <a:latin typeface="Segoe UI" pitchFamily="34" charset="0"/>
-                <a:ea typeface="Segoe UI" pitchFamily="34" charset="-122"/>
-                <a:cs typeface="Segoe UI" pitchFamily="34" charset="-120"/>
+                <a:latin typeface="Segoe UI Light" panose="020B0502040204020203" pitchFamily="34" charset="0"/>
+                <a:ea typeface="Segoe UI Light" panose="020B0502040204020203" pitchFamily="34" charset="-122"/>
+                <a:cs typeface="Segoe UI Light" panose="020B0502040204020203" pitchFamily="34" charset="-120"/>
+              </a:rPr>
+              <a:t>Dedicated PostgreSQL database</a:t>
+            </a:r>
+            <a:endParaRPr lang="en-US" sz="2400" dirty="0">
+              <a:solidFill>
+                <a:srgbClr val="FFFFFF"/>
+              </a:solidFill>
+              <a:latin typeface="Segoe UI Light" panose="020B0502040204020203" pitchFamily="34" charset="0"/>
+              <a:ea typeface="Segoe UI Light" panose="020B0502040204020203" pitchFamily="34" charset="-122"/>
+              <a:cs typeface="Segoe UI Light" panose="020B0502040204020203" pitchFamily="34" charset="-120"/>
+            </a:endParaRPr>
+          </a:p>
+          <a:p>
+            <a:pPr marL="0" indent="0">
+              <a:lnSpc>
+                <a:spcPct val="150000"/>
+              </a:lnSpc>
+              <a:buNone/>
+            </a:pPr>
+            <a:r>
+              <a:rPr lang="en-US" sz="2400" dirty="0">
+                <a:solidFill>
+                  <a:srgbClr val="FFFFFF"/>
+                </a:solidFill>
+                <a:latin typeface="Segoe UI Light" panose="020B0502040204020203" pitchFamily="34" charset="0"/>
+                <a:ea typeface="Segoe UI Light" panose="020B0502040204020203" pitchFamily="34" charset="-122"/>
+                <a:cs typeface="Segoe UI Light" panose="020B0502040204020203" pitchFamily="34" charset="-120"/>
+              </a:rPr>
+              <a:t>Pure Calculation engine </a:t>
+            </a:r>
+            <a:endParaRPr lang="en-US" sz="2400" dirty="0">
+              <a:solidFill>
+                <a:srgbClr val="FFFFFF"/>
+              </a:solidFill>
+              <a:latin typeface="Segoe UI Light" panose="020B0502040204020203" pitchFamily="34" charset="0"/>
+              <a:ea typeface="Segoe UI Light" panose="020B0502040204020203" pitchFamily="34" charset="-122"/>
+              <a:cs typeface="Segoe UI Light" panose="020B0502040204020203" pitchFamily="34" charset="-120"/>
+            </a:endParaRPr>
+          </a:p>
+          <a:p>
+            <a:pPr marL="0" indent="0">
+              <a:lnSpc>
+                <a:spcPct val="150000"/>
+              </a:lnSpc>
+              <a:buNone/>
+            </a:pPr>
+            <a:r>
+              <a:rPr lang="en-US" sz="2400" dirty="0">
+                <a:solidFill>
+                  <a:srgbClr val="FFFFFF"/>
+                </a:solidFill>
+                <a:latin typeface="Segoe UI Light" panose="020B0502040204020203" pitchFamily="34" charset="0"/>
+                <a:ea typeface="Segoe UI Light" panose="020B0502040204020203" pitchFamily="34" charset="-122"/>
+                <a:cs typeface="Segoe UI Light" panose="020B0502040204020203" pitchFamily="34" charset="-120"/>
               </a:rPr>
               <a:t>KPIs with targets</a:t>
             </a:r>
-            <a:endParaRPr lang="en-US" sz="1200" dirty="0"/>
+            <a:endParaRPr lang="en-US" sz="2400" dirty="0">
+              <a:solidFill>
+                <a:srgbClr val="FFFFFF"/>
+              </a:solidFill>
+              <a:latin typeface="Segoe UI Light" panose="020B0502040204020203" pitchFamily="34" charset="0"/>
+              <a:ea typeface="Segoe UI Light" panose="020B0502040204020203" pitchFamily="34" charset="-122"/>
+              <a:cs typeface="Segoe UI Light" panose="020B0502040204020203" pitchFamily="34" charset="-120"/>
+            </a:endParaRPr>
+          </a:p>
+          <a:p>
+            <a:pPr marL="0" indent="0">
+              <a:lnSpc>
+                <a:spcPct val="150000"/>
+              </a:lnSpc>
+              <a:buNone/>
+            </a:pPr>
+            <a:endParaRPr lang="en-US" sz="2400" dirty="0">
+              <a:solidFill>
+                <a:srgbClr val="FFFFFF"/>
+              </a:solidFill>
+              <a:latin typeface="Segoe UI Light" panose="020B0502040204020203" pitchFamily="34" charset="0"/>
+              <a:ea typeface="Segoe UI Light" panose="020B0502040204020203" pitchFamily="34" charset="-122"/>
+              <a:cs typeface="Segoe UI Light" panose="020B0502040204020203" pitchFamily="34" charset="-120"/>
+            </a:endParaRPr>
           </a:p>
         </p:txBody>
       </p:sp>
@@ -10374,168 +10030,6 @@
             <a:prstDash val="solid"/>
           </a:ln>
         </p:spPr>
-      </p:sp>
-      <p:sp>
-        <p:nvSpPr>
-          <p:cNvPr id="37" name="Text 34"/>
-          <p:cNvSpPr txBox="1"/>
-          <p:nvPr/>
-        </p:nvSpPr>
-        <p:spPr>
-          <a:xfrm>
-            <a:off x="6096000" y="3200400"/>
-            <a:ext cx="2499360" cy="731520"/>
-          </a:xfrm>
-          <a:prstGeom prst="rect">
-            <a:avLst/>
-          </a:prstGeom>
-          <a:noFill/>
-          <a:ln/>
-        </p:spPr>
-        <p:txBody>
-          <a:bodyPr wrap="square" lIns="0" tIns="0" rIns="0" bIns="0" rtlCol="0" anchor="ctr"/>
-          <a:lstStyle/>
-          <a:p>
-            <a:pPr indent="0" marL="0">
-              <a:buNone/>
-            </a:pPr>
-            <a:r>
-              <a:rPr lang="en-US" sz="3600" dirty="0">
-                <a:solidFill>
-                  <a:srgbClr val="FFFFFF"/>
-                </a:solidFill>
-                <a:latin typeface="Segoe UI Light" pitchFamily="34" charset="0"/>
-                <a:ea typeface="Segoe UI Light" pitchFamily="34" charset="-122"/>
-                <a:cs typeface="Segoe UI Light" pitchFamily="34" charset="-120"/>
-              </a:rPr>
-              <a:t>5 + 5</a:t>
-            </a:r>
-            <a:endParaRPr lang="en-US" sz="3600" dirty="0"/>
-          </a:p>
-        </p:txBody>
-      </p:sp>
-      <p:sp>
-        <p:nvSpPr>
-          <p:cNvPr id="38" name="Text 35"/>
-          <p:cNvSpPr txBox="1"/>
-          <p:nvPr/>
-        </p:nvSpPr>
-        <p:spPr>
-          <a:xfrm>
-            <a:off x="6096000" y="3931920"/>
-            <a:ext cx="2499360" cy="292608"/>
-          </a:xfrm>
-          <a:prstGeom prst="rect">
-            <a:avLst/>
-          </a:prstGeom>
-          <a:noFill/>
-          <a:ln/>
-        </p:spPr>
-        <p:txBody>
-          <a:bodyPr wrap="square" lIns="0" tIns="0" rIns="0" bIns="0" rtlCol="0" anchor="t"/>
-          <a:lstStyle/>
-          <a:p>
-            <a:pPr indent="0" marL="0">
-              <a:buNone/>
-            </a:pPr>
-            <a:r>
-              <a:rPr lang="en-US" sz="1200" dirty="0">
-                <a:solidFill>
-                  <a:srgbClr val="C9D1FF"/>
-                </a:solidFill>
-                <a:latin typeface="Segoe UI" pitchFamily="34" charset="0"/>
-                <a:ea typeface="Segoe UI" pitchFamily="34" charset="-122"/>
-                <a:cs typeface="Segoe UI" pitchFamily="34" charset="-120"/>
-              </a:rPr>
-              <a:t>energy and performance reports</a:t>
-            </a:r>
-            <a:endParaRPr lang="en-US" sz="1200" dirty="0"/>
-          </a:p>
-        </p:txBody>
-      </p:sp>
-      <p:sp>
-        <p:nvSpPr>
-          <p:cNvPr id="39" name="Shape 36"/>
-          <p:cNvSpPr/>
-          <p:nvPr/>
-        </p:nvSpPr>
-        <p:spPr>
-          <a:xfrm>
-            <a:off x="548640" y="4297680"/>
-            <a:ext cx="4206240" cy="329184"/>
-          </a:xfrm>
-          <a:prstGeom prst="roundRect">
-            <a:avLst>
-              <a:gd name="adj" fmla="val 50000"/>
-            </a:avLst>
-          </a:prstGeom>
-          <a:solidFill>
-            <a:srgbClr val="FFFFFF">
-              <a:alpha val="12000"/>
-            </a:srgbClr>
-          </a:solidFill>
-          <a:ln w="9525">
-            <a:solidFill>
-              <a:srgbClr val="FFFFFF">
-                <a:alpha val="30000"/>
-              </a:srgbClr>
-            </a:solidFill>
-            <a:prstDash val="solid"/>
-          </a:ln>
-        </p:spPr>
-      </p:sp>
-      <p:sp>
-        <p:nvSpPr>
-          <p:cNvPr id="40" name="Text 37"/>
-          <p:cNvSpPr txBox="1"/>
-          <p:nvPr/>
-        </p:nvSpPr>
-        <p:spPr>
-          <a:xfrm>
-            <a:off x="731520" y="4297680"/>
-            <a:ext cx="3931920" cy="329184"/>
-          </a:xfrm>
-          <a:prstGeom prst="rect">
-            <a:avLst/>
-          </a:prstGeom>
-          <a:noFill/>
-          <a:ln/>
-        </p:spPr>
-        <p:txBody>
-          <a:bodyPr wrap="square" lIns="0" tIns="0" rIns="0" bIns="0" rtlCol="0" anchor="ctr"/>
-          <a:lstStyle/>
-          <a:p>
-            <a:pPr indent="0" marL="0">
-              <a:buNone/>
-            </a:pPr>
-            <a:r>
-              <a:rPr lang="en-US" sz="1100" b="1" dirty="0">
-                <a:solidFill>
-                  <a:srgbClr val="8FA0FF"/>
-                </a:solidFill>
-                <a:latin typeface="Segoe UI" pitchFamily="34" charset="0"/>
-                <a:ea typeface="Segoe UI" pitchFamily="34" charset="-122"/>
-                <a:cs typeface="Segoe UI" pitchFamily="34" charset="-120"/>
-              </a:rPr>
-              <a:t>LIVE  </a:t>
-            </a:r>
-            <a:pPr indent="0" marL="0">
-              <a:buNone/>
-            </a:pPr>
-            <a:r>
-              <a:rPr lang="en-US" sz="1100" dirty="0">
-                <a:solidFill>
-                  <a:srgbClr val="FFFFFF"/>
-                </a:solidFill>
-                <a:latin typeface="Segoe UI" pitchFamily="34" charset="0"/>
-                <a:ea typeface="Segoe UI" pitchFamily="34" charset="-122"/>
-                <a:cs typeface="Segoe UI" pitchFamily="34" charset="-120"/>
-              </a:rPr>
-              <a:t>Analytics page</a:t>
-            </a:r>
-            <a:endParaRPr lang="en-US" sz="1100" dirty="0"/>
-          </a:p>
-        </p:txBody>
       </p:sp>
     </p:spTree>
   </p:cSld>
@@ -10547,7 +10041,7 @@
 
 <file path=ppt/slides/slide8.xml><?xml version="1.0" encoding="utf-8"?>
 <p:sld xmlns:a="http://schemas.openxmlformats.org/drawingml/2006/main" xmlns:r="http://schemas.openxmlformats.org/officeDocument/2006/relationships" xmlns:p="http://schemas.openxmlformats.org/presentationml/2006/main">
-  <p:cSld name="Slide 8">
+  <p:cSld>
     <p:bg>
       <p:bgPr>
         <a:blipFill dpi="0" rotWithShape="1">
@@ -10766,25 +10260,24 @@
             <a:avLst/>
           </a:prstGeom>
           <a:noFill/>
-          <a:ln/>
-        </p:spPr>
-        <p:txBody>
-          <a:bodyPr wrap="square" lIns="0" tIns="0" rIns="0" bIns="0" rtlCol="0" anchor="ctr"/>
-          <a:lstStyle/>
-          <a:p>
-            <a:pPr indent="0" marL="0">
-              <a:buNone/>
-            </a:pPr>
-            <a:r>
-              <a:rPr lang="en-US" sz="1050" spc="300" kern="0" dirty="0">
+        </p:spPr>
+        <p:txBody>
+          <a:bodyPr wrap="square" lIns="0" tIns="0" rIns="0" bIns="0" rtlCol="0" anchor="ctr"/>
+          <a:lstStyle/>
+          <a:p>
+            <a:pPr marL="0" indent="0">
+              <a:buNone/>
+            </a:pPr>
+            <a:r>
+              <a:rPr lang="en-US" sz="1050" kern="0" spc="300" dirty="0">
                 <a:solidFill>
                   <a:srgbClr val="8FA0FF"/>
                 </a:solidFill>
-                <a:latin typeface="Segoe UI Semibold" pitchFamily="34" charset="0"/>
-                <a:ea typeface="Segoe UI Semibold" pitchFamily="34" charset="-122"/>
-                <a:cs typeface="Segoe UI Semibold" pitchFamily="34" charset="-120"/>
-              </a:rPr>
-              <a:t>08 · NEMAL · SECURITY</a:t>
+                <a:latin typeface="Segoe UI Semibold" panose="020B0702040204020203" pitchFamily="34" charset="0"/>
+                <a:ea typeface="Segoe UI Semibold" panose="020B0702040204020203" pitchFamily="34" charset="-122"/>
+                <a:cs typeface="Segoe UI Semibold" panose="020B0702040204020203" pitchFamily="34" charset="-120"/>
+              </a:rPr>
+              <a:t>08 · SECURITY</a:t>
             </a:r>
             <a:endParaRPr lang="en-US" sz="1050" dirty="0"/>
           </a:p>
@@ -10805,13 +10298,12 @@
             <a:avLst/>
           </a:prstGeom>
           <a:noFill/>
-          <a:ln/>
-        </p:spPr>
-        <p:txBody>
-          <a:bodyPr wrap="square" lIns="0" tIns="0" rIns="0" bIns="0" rtlCol="0" anchor="ctr"/>
-          <a:lstStyle/>
-          <a:p>
-            <a:pPr indent="0" marL="0">
+        </p:spPr>
+        <p:txBody>
+          <a:bodyPr wrap="square" lIns="0" tIns="0" rIns="0" bIns="0" rtlCol="0" anchor="ctr"/>
+          <a:lstStyle/>
+          <a:p>
+            <a:pPr marL="0" indent="0">
               <a:buNone/>
             </a:pPr>
             <a:r>
@@ -10819,23 +10311,20 @@
                 <a:solidFill>
                   <a:srgbClr val="FFFFFF"/>
                 </a:solidFill>
-                <a:latin typeface="Segoe UI Light" pitchFamily="34" charset="0"/>
-                <a:ea typeface="Segoe UI Light" pitchFamily="34" charset="-122"/>
-                <a:cs typeface="Segoe UI Light" pitchFamily="34" charset="-120"/>
+                <a:latin typeface="Segoe UI Light" panose="020B0502040204020203" pitchFamily="34" charset="0"/>
+                <a:ea typeface="Segoe UI Light" panose="020B0502040204020203" pitchFamily="34" charset="-122"/>
+                <a:cs typeface="Segoe UI Light" panose="020B0502040204020203" pitchFamily="34" charset="-120"/>
               </a:rPr>
               <a:t>Five roles, enforced </a:t>
             </a:r>
-            <a:pPr indent="0" marL="0">
-              <a:buNone/>
-            </a:pPr>
             <a:r>
               <a:rPr lang="en-US" sz="3200" dirty="0">
                 <a:solidFill>
                   <a:srgbClr val="8FA0FF"/>
                 </a:solidFill>
-                <a:latin typeface="Segoe UI Light" pitchFamily="34" charset="0"/>
-                <a:ea typeface="Segoe UI Light" pitchFamily="34" charset="-122"/>
-                <a:cs typeface="Segoe UI Light" pitchFamily="34" charset="-120"/>
+                <a:latin typeface="Segoe UI Light" panose="020B0502040204020203" pitchFamily="34" charset="0"/>
+                <a:ea typeface="Segoe UI Light" panose="020B0502040204020203" pitchFamily="34" charset="-122"/>
+                <a:cs typeface="Segoe UI Light" panose="020B0502040204020203" pitchFamily="34" charset="-120"/>
               </a:rPr>
               <a:t>at the gateway</a:t>
             </a:r>
@@ -10883,13 +10372,12 @@
             <a:avLst/>
           </a:prstGeom>
           <a:noFill/>
-          <a:ln/>
-        </p:spPr>
-        <p:txBody>
-          <a:bodyPr wrap="square" lIns="0" tIns="0" rIns="0" bIns="0" rtlCol="0" anchor="ctr"/>
-          <a:lstStyle/>
-          <a:p>
-            <a:pPr indent="0" marL="0">
+        </p:spPr>
+        <p:txBody>
+          <a:bodyPr wrap="square" lIns="0" tIns="0" rIns="0" bIns="0" rtlCol="0" anchor="ctr"/>
+          <a:lstStyle/>
+          <a:p>
+            <a:pPr marL="0" indent="0">
               <a:buNone/>
             </a:pPr>
             <a:r>
@@ -10897,9 +10385,9 @@
                 <a:solidFill>
                   <a:srgbClr val="C9D1FF"/>
                 </a:solidFill>
-                <a:latin typeface="Segoe UI" pitchFamily="34" charset="0"/>
-                <a:ea typeface="Segoe UI" pitchFamily="34" charset="-122"/>
-                <a:cs typeface="Segoe UI" pitchFamily="34" charset="-120"/>
+                <a:latin typeface="Segoe UI" panose="020B0502040204020203" pitchFamily="34" charset="0"/>
+                <a:ea typeface="Segoe UI" panose="020B0502040204020203" pitchFamily="34" charset="-122"/>
+                <a:cs typeface="Segoe UI" panose="020B0502040204020203" pitchFamily="34" charset="-120"/>
               </a:rPr>
               <a:t>EC8208 Software Architecture  ·  University of Ruhuna</a:t>
             </a:r>
@@ -10922,13 +10410,12 @@
             <a:avLst/>
           </a:prstGeom>
           <a:noFill/>
-          <a:ln/>
-        </p:spPr>
-        <p:txBody>
-          <a:bodyPr wrap="square" lIns="0" tIns="0" rIns="0" bIns="0" rtlCol="0" anchor="ctr"/>
-          <a:lstStyle/>
-          <a:p>
-            <a:pPr algn="r" indent="0" marL="0">
+        </p:spPr>
+        <p:txBody>
+          <a:bodyPr wrap="square" lIns="0" tIns="0" rIns="0" bIns="0" rtlCol="0" anchor="ctr"/>
+          <a:lstStyle/>
+          <a:p>
+            <a:pPr marL="0" indent="0" algn="r">
               <a:buNone/>
             </a:pPr>
             <a:r>
@@ -10936,9 +10423,9 @@
                 <a:solidFill>
                   <a:srgbClr val="C9D1FF"/>
                 </a:solidFill>
-                <a:latin typeface="Segoe UI" pitchFamily="34" charset="0"/>
-                <a:ea typeface="Segoe UI" pitchFamily="34" charset="-122"/>
-                <a:cs typeface="Segoe UI" pitchFamily="34" charset="-120"/>
+                <a:latin typeface="Segoe UI" panose="020B0502040204020203" pitchFamily="34" charset="0"/>
+                <a:ea typeface="Segoe UI" panose="020B0502040204020203" pitchFamily="34" charset="-122"/>
+                <a:cs typeface="Segoe UI" panose="020B0502040204020203" pitchFamily="34" charset="-120"/>
               </a:rPr>
               <a:t>08  ·  8:40–9:23</a:t>
             </a:r>
@@ -10992,13 +10479,12 @@
             <a:avLst/>
           </a:prstGeom>
           <a:noFill/>
-          <a:ln/>
-        </p:spPr>
-        <p:txBody>
-          <a:bodyPr wrap="square" lIns="0" tIns="0" rIns="0" bIns="0" rtlCol="0" anchor="ctr"/>
-          <a:lstStyle/>
-          <a:p>
-            <a:pPr indent="0" marL="0">
+        </p:spPr>
+        <p:txBody>
+          <a:bodyPr wrap="square" lIns="0" tIns="0" rIns="0" bIns="0" rtlCol="0" anchor="ctr"/>
+          <a:lstStyle/>
+          <a:p>
+            <a:pPr marL="0" indent="0">
               <a:buNone/>
             </a:pPr>
             <a:r>
@@ -11006,9 +10492,9 @@
                 <a:solidFill>
                   <a:srgbClr val="8FA0FF"/>
                 </a:solidFill>
-                <a:latin typeface="Segoe UI Semibold" pitchFamily="34" charset="0"/>
-                <a:ea typeface="Segoe UI Semibold" pitchFamily="34" charset="-122"/>
-                <a:cs typeface="Segoe UI Semibold" pitchFamily="34" charset="-120"/>
+                <a:latin typeface="Segoe UI Semibold" panose="020B0702040204020203" pitchFamily="34" charset="0"/>
+                <a:ea typeface="Segoe UI Semibold" panose="020B0702040204020203" pitchFamily="34" charset="-122"/>
+                <a:cs typeface="Segoe UI Semibold" panose="020B0702040204020203" pitchFamily="34" charset="-120"/>
               </a:rPr>
               <a:t>Administrator</a:t>
             </a:r>
@@ -11031,13 +10517,12 @@
             <a:avLst/>
           </a:prstGeom>
           <a:noFill/>
-          <a:ln/>
-        </p:spPr>
-        <p:txBody>
-          <a:bodyPr wrap="square" lIns="0" tIns="0" rIns="0" bIns="0" rtlCol="0" anchor="ctr"/>
-          <a:lstStyle/>
-          <a:p>
-            <a:pPr indent="0" marL="0">
+        </p:spPr>
+        <p:txBody>
+          <a:bodyPr wrap="square" lIns="0" tIns="0" rIns="0" bIns="0" rtlCol="0" anchor="ctr"/>
+          <a:lstStyle/>
+          <a:p>
+            <a:pPr marL="0" indent="0">
               <a:buNone/>
             </a:pPr>
             <a:r>
@@ -11045,9 +10530,9 @@
                 <a:solidFill>
                   <a:srgbClr val="FFFFFF"/>
                 </a:solidFill>
-                <a:latin typeface="Segoe UI" pitchFamily="34" charset="0"/>
-                <a:ea typeface="Segoe UI" pitchFamily="34" charset="-122"/>
-                <a:cs typeface="Segoe UI" pitchFamily="34" charset="-120"/>
+                <a:latin typeface="Segoe UI" panose="020B0502040204020203" pitchFamily="34" charset="0"/>
+                <a:ea typeface="Segoe UI" panose="020B0502040204020203" pitchFamily="34" charset="-122"/>
+                <a:cs typeface="Segoe UI" panose="020B0502040204020203" pitchFamily="34" charset="-120"/>
               </a:rPr>
               <a:t>Everything, users and audit log</a:t>
             </a:r>
@@ -11101,13 +10586,12 @@
             <a:avLst/>
           </a:prstGeom>
           <a:noFill/>
-          <a:ln/>
-        </p:spPr>
-        <p:txBody>
-          <a:bodyPr wrap="square" lIns="0" tIns="0" rIns="0" bIns="0" rtlCol="0" anchor="ctr"/>
-          <a:lstStyle/>
-          <a:p>
-            <a:pPr indent="0" marL="0">
+        </p:spPr>
+        <p:txBody>
+          <a:bodyPr wrap="square" lIns="0" tIns="0" rIns="0" bIns="0" rtlCol="0" anchor="ctr"/>
+          <a:lstStyle/>
+          <a:p>
+            <a:pPr marL="0" indent="0">
               <a:buNone/>
             </a:pPr>
             <a:r>
@@ -11115,9 +10599,9 @@
                 <a:solidFill>
                   <a:srgbClr val="8FA0FF"/>
                 </a:solidFill>
-                <a:latin typeface="Segoe UI Semibold" pitchFamily="34" charset="0"/>
-                <a:ea typeface="Segoe UI Semibold" pitchFamily="34" charset="-122"/>
-                <a:cs typeface="Segoe UI Semibold" pitchFamily="34" charset="-120"/>
+                <a:latin typeface="Segoe UI Semibold" panose="020B0702040204020203" pitchFamily="34" charset="0"/>
+                <a:ea typeface="Segoe UI Semibold" panose="020B0702040204020203" pitchFamily="34" charset="-122"/>
+                <a:cs typeface="Segoe UI Semibold" panose="020B0702040204020203" pitchFamily="34" charset="-120"/>
               </a:rPr>
               <a:t>Operations Manager</a:t>
             </a:r>
@@ -11140,13 +10624,12 @@
             <a:avLst/>
           </a:prstGeom>
           <a:noFill/>
-          <a:ln/>
-        </p:spPr>
-        <p:txBody>
-          <a:bodyPr wrap="square" lIns="0" tIns="0" rIns="0" bIns="0" rtlCol="0" anchor="ctr"/>
-          <a:lstStyle/>
-          <a:p>
-            <a:pPr indent="0" marL="0">
+        </p:spPr>
+        <p:txBody>
+          <a:bodyPr wrap="square" lIns="0" tIns="0" rIns="0" bIns="0" rtlCol="0" anchor="ctr"/>
+          <a:lstStyle/>
+          <a:p>
+            <a:pPr marL="0" indent="0">
               <a:buNone/>
             </a:pPr>
             <a:r>
@@ -11154,9 +10637,9 @@
                 <a:solidFill>
                   <a:srgbClr val="FFFFFF"/>
                 </a:solidFill>
-                <a:latin typeface="Segoe UI" pitchFamily="34" charset="0"/>
-                <a:ea typeface="Segoe UI" pitchFamily="34" charset="-122"/>
-                <a:cs typeface="Segoe UI" pitchFamily="34" charset="-120"/>
+                <a:latin typeface="Segoe UI" panose="020B0502040204020203" pitchFamily="34" charset="0"/>
+                <a:ea typeface="Segoe UI" panose="020B0502040204020203" pitchFamily="34" charset="-122"/>
+                <a:cs typeface="Segoe UI" panose="020B0502040204020203" pitchFamily="34" charset="-120"/>
               </a:rPr>
               <a:t>Assets, rules, work orders, reports</a:t>
             </a:r>
@@ -11210,13 +10693,12 @@
             <a:avLst/>
           </a:prstGeom>
           <a:noFill/>
-          <a:ln/>
-        </p:spPr>
-        <p:txBody>
-          <a:bodyPr wrap="square" lIns="0" tIns="0" rIns="0" bIns="0" rtlCol="0" anchor="ctr"/>
-          <a:lstStyle/>
-          <a:p>
-            <a:pPr indent="0" marL="0">
+        </p:spPr>
+        <p:txBody>
+          <a:bodyPr wrap="square" lIns="0" tIns="0" rIns="0" bIns="0" rtlCol="0" anchor="ctr"/>
+          <a:lstStyle/>
+          <a:p>
+            <a:pPr marL="0" indent="0">
               <a:buNone/>
             </a:pPr>
             <a:r>
@@ -11224,9 +10706,9 @@
                 <a:solidFill>
                   <a:srgbClr val="8FA0FF"/>
                 </a:solidFill>
-                <a:latin typeface="Segoe UI Semibold" pitchFamily="34" charset="0"/>
-                <a:ea typeface="Segoe UI Semibold" pitchFamily="34" charset="-122"/>
-                <a:cs typeface="Segoe UI Semibold" pitchFamily="34" charset="-120"/>
+                <a:latin typeface="Segoe UI Semibold" panose="020B0702040204020203" pitchFamily="34" charset="0"/>
+                <a:ea typeface="Segoe UI Semibold" panose="020B0702040204020203" pitchFamily="34" charset="-122"/>
+                <a:cs typeface="Segoe UI Semibold" panose="020B0702040204020203" pitchFamily="34" charset="-120"/>
               </a:rPr>
               <a:t>Plant Operator</a:t>
             </a:r>
@@ -11249,13 +10731,12 @@
             <a:avLst/>
           </a:prstGeom>
           <a:noFill/>
-          <a:ln/>
-        </p:spPr>
-        <p:txBody>
-          <a:bodyPr wrap="square" lIns="0" tIns="0" rIns="0" bIns="0" rtlCol="0" anchor="ctr"/>
-          <a:lstStyle/>
-          <a:p>
-            <a:pPr indent="0" marL="0">
+        </p:spPr>
+        <p:txBody>
+          <a:bodyPr wrap="square" lIns="0" tIns="0" rIns="0" bIns="0" rtlCol="0" anchor="ctr"/>
+          <a:lstStyle/>
+          <a:p>
+            <a:pPr marL="0" indent="0">
               <a:buNone/>
             </a:pPr>
             <a:r>
@@ -11263,9 +10744,9 @@
                 <a:solidFill>
                   <a:srgbClr val="FFFFFF"/>
                 </a:solidFill>
-                <a:latin typeface="Segoe UI" pitchFamily="34" charset="0"/>
-                <a:ea typeface="Segoe UI" pitchFamily="34" charset="-122"/>
-                <a:cs typeface="Segoe UI" pitchFamily="34" charset="-120"/>
+                <a:latin typeface="Segoe UI" panose="020B0502040204020203" pitchFamily="34" charset="0"/>
+                <a:ea typeface="Segoe UI" panose="020B0502040204020203" pitchFamily="34" charset="-122"/>
+                <a:cs typeface="Segoe UI" panose="020B0502040204020203" pitchFamily="34" charset="-120"/>
               </a:rPr>
               <a:t>Monitor and handle alerts</a:t>
             </a:r>
@@ -11319,13 +10800,12 @@
             <a:avLst/>
           </a:prstGeom>
           <a:noFill/>
-          <a:ln/>
-        </p:spPr>
-        <p:txBody>
-          <a:bodyPr wrap="square" lIns="0" tIns="0" rIns="0" bIns="0" rtlCol="0" anchor="ctr"/>
-          <a:lstStyle/>
-          <a:p>
-            <a:pPr indent="0" marL="0">
+        </p:spPr>
+        <p:txBody>
+          <a:bodyPr wrap="square" lIns="0" tIns="0" rIns="0" bIns="0" rtlCol="0" anchor="ctr"/>
+          <a:lstStyle/>
+          <a:p>
+            <a:pPr marL="0" indent="0">
               <a:buNone/>
             </a:pPr>
             <a:r>
@@ -11333,9 +10813,9 @@
                 <a:solidFill>
                   <a:srgbClr val="8FA0FF"/>
                 </a:solidFill>
-                <a:latin typeface="Segoe UI Semibold" pitchFamily="34" charset="0"/>
-                <a:ea typeface="Segoe UI Semibold" pitchFamily="34" charset="-122"/>
-                <a:cs typeface="Segoe UI Semibold" pitchFamily="34" charset="-120"/>
+                <a:latin typeface="Segoe UI Semibold" panose="020B0702040204020203" pitchFamily="34" charset="0"/>
+                <a:ea typeface="Segoe UI Semibold" panose="020B0702040204020203" pitchFamily="34" charset="-122"/>
+                <a:cs typeface="Segoe UI Semibold" panose="020B0702040204020203" pitchFamily="34" charset="-120"/>
               </a:rPr>
               <a:t>Maintenance Engineer</a:t>
             </a:r>
@@ -11358,13 +10838,12 @@
             <a:avLst/>
           </a:prstGeom>
           <a:noFill/>
-          <a:ln/>
-        </p:spPr>
-        <p:txBody>
-          <a:bodyPr wrap="square" lIns="0" tIns="0" rIns="0" bIns="0" rtlCol="0" anchor="ctr"/>
-          <a:lstStyle/>
-          <a:p>
-            <a:pPr indent="0" marL="0">
+        </p:spPr>
+        <p:txBody>
+          <a:bodyPr wrap="square" lIns="0" tIns="0" rIns="0" bIns="0" rtlCol="0" anchor="ctr"/>
+          <a:lstStyle/>
+          <a:p>
+            <a:pPr marL="0" indent="0">
               <a:buNone/>
             </a:pPr>
             <a:r>
@@ -11372,9 +10851,9 @@
                 <a:solidFill>
                   <a:srgbClr val="FFFFFF"/>
                 </a:solidFill>
-                <a:latin typeface="Segoe UI" pitchFamily="34" charset="0"/>
-                <a:ea typeface="Segoe UI" pitchFamily="34" charset="-122"/>
-                <a:cs typeface="Segoe UI" pitchFamily="34" charset="-120"/>
+                <a:latin typeface="Segoe UI" panose="020B0502040204020203" pitchFamily="34" charset="0"/>
+                <a:ea typeface="Segoe UI" panose="020B0502040204020203" pitchFamily="34" charset="-122"/>
+                <a:cs typeface="Segoe UI" panose="020B0502040204020203" pitchFamily="34" charset="-120"/>
               </a:rPr>
               <a:t>Assign and complete work orders</a:t>
             </a:r>
@@ -11428,13 +10907,12 @@
             <a:avLst/>
           </a:prstGeom>
           <a:noFill/>
-          <a:ln/>
-        </p:spPr>
-        <p:txBody>
-          <a:bodyPr wrap="square" lIns="0" tIns="0" rIns="0" bIns="0" rtlCol="0" anchor="ctr"/>
-          <a:lstStyle/>
-          <a:p>
-            <a:pPr indent="0" marL="0">
+        </p:spPr>
+        <p:txBody>
+          <a:bodyPr wrap="square" lIns="0" tIns="0" rIns="0" bIns="0" rtlCol="0" anchor="ctr"/>
+          <a:lstStyle/>
+          <a:p>
+            <a:pPr marL="0" indent="0">
               <a:buNone/>
             </a:pPr>
             <a:r>
@@ -11442,9 +10920,9 @@
                 <a:solidFill>
                   <a:srgbClr val="8FA0FF"/>
                 </a:solidFill>
-                <a:latin typeface="Segoe UI Semibold" pitchFamily="34" charset="0"/>
-                <a:ea typeface="Segoe UI Semibold" pitchFamily="34" charset="-122"/>
-                <a:cs typeface="Segoe UI Semibold" pitchFamily="34" charset="-120"/>
+                <a:latin typeface="Segoe UI Semibold" panose="020B0702040204020203" pitchFamily="34" charset="0"/>
+                <a:ea typeface="Segoe UI Semibold" panose="020B0702040204020203" pitchFamily="34" charset="-122"/>
+                <a:cs typeface="Segoe UI Semibold" panose="020B0702040204020203" pitchFamily="34" charset="-120"/>
               </a:rPr>
               <a:t>Executive</a:t>
             </a:r>
@@ -11467,13 +10945,12 @@
             <a:avLst/>
           </a:prstGeom>
           <a:noFill/>
-          <a:ln/>
-        </p:spPr>
-        <p:txBody>
-          <a:bodyPr wrap="square" lIns="0" tIns="0" rIns="0" bIns="0" rtlCol="0" anchor="ctr"/>
-          <a:lstStyle/>
-          <a:p>
-            <a:pPr indent="0" marL="0">
+        </p:spPr>
+        <p:txBody>
+          <a:bodyPr wrap="square" lIns="0" tIns="0" rIns="0" bIns="0" rtlCol="0" anchor="ctr"/>
+          <a:lstStyle/>
+          <a:p>
+            <a:pPr marL="0" indent="0">
               <a:buNone/>
             </a:pPr>
             <a:r>
@@ -11481,9 +10958,9 @@
                 <a:solidFill>
                   <a:srgbClr val="FFFFFF"/>
                 </a:solidFill>
-                <a:latin typeface="Segoe UI" pitchFamily="34" charset="0"/>
-                <a:ea typeface="Segoe UI" pitchFamily="34" charset="-122"/>
-                <a:cs typeface="Segoe UI" pitchFamily="34" charset="-120"/>
+                <a:latin typeface="Segoe UI" panose="020B0502040204020203" pitchFamily="34" charset="0"/>
+                <a:ea typeface="Segoe UI" panose="020B0502040204020203" pitchFamily="34" charset="-122"/>
+                <a:cs typeface="Segoe UI" panose="020B0502040204020203" pitchFamily="34" charset="-120"/>
               </a:rPr>
               <a:t>Read-only dashboards and reports</a:t>
             </a:r>
@@ -11537,13 +11014,12 @@
             <a:avLst/>
           </a:prstGeom>
           <a:noFill/>
-          <a:ln/>
-        </p:spPr>
-        <p:txBody>
-          <a:bodyPr wrap="square" lIns="0" tIns="0" rIns="0" bIns="0" rtlCol="0" anchor="ctr"/>
-          <a:lstStyle/>
-          <a:p>
-            <a:pPr indent="0" marL="0">
+        </p:spPr>
+        <p:txBody>
+          <a:bodyPr wrap="square" lIns="0" tIns="0" rIns="0" bIns="0" rtlCol="0" anchor="ctr"/>
+          <a:lstStyle/>
+          <a:p>
+            <a:pPr marL="0" indent="0">
               <a:buNone/>
             </a:pPr>
             <a:r>
@@ -11551,23 +11027,20 @@
                 <a:solidFill>
                   <a:srgbClr val="8FA0FF"/>
                 </a:solidFill>
-                <a:latin typeface="Segoe UI" pitchFamily="34" charset="0"/>
-                <a:ea typeface="Segoe UI" pitchFamily="34" charset="-122"/>
-                <a:cs typeface="Segoe UI" pitchFamily="34" charset="-120"/>
+                <a:latin typeface="Segoe UI" panose="020B0502040204020203" pitchFamily="34" charset="0"/>
+                <a:ea typeface="Segoe UI" panose="020B0502040204020203" pitchFamily="34" charset="-122"/>
+                <a:cs typeface="Segoe UI" panose="020B0502040204020203" pitchFamily="34" charset="-120"/>
               </a:rPr>
               <a:t>LIVE  </a:t>
             </a:r>
-            <a:pPr indent="0" marL="0">
-              <a:buNone/>
-            </a:pPr>
             <a:r>
               <a:rPr lang="en-US" sz="1100" dirty="0">
                 <a:solidFill>
                   <a:srgbClr val="FFFFFF"/>
                 </a:solidFill>
-                <a:latin typeface="Segoe UI" pitchFamily="34" charset="0"/>
-                <a:ea typeface="Segoe UI" pitchFamily="34" charset="-122"/>
-                <a:cs typeface="Segoe UI" pitchFamily="34" charset="-120"/>
+                <a:latin typeface="Segoe UI" panose="020B0502040204020203" pitchFamily="34" charset="0"/>
+                <a:ea typeface="Segoe UI" panose="020B0502040204020203" pitchFamily="34" charset="-122"/>
+                <a:cs typeface="Segoe UI" panose="020B0502040204020203" pitchFamily="34" charset="-120"/>
               </a:rPr>
               <a:t>executive sign-in, read-only</a:t>
             </a:r>
@@ -11585,7 +11058,7 @@
 
 <file path=ppt/slides/slide9.xml><?xml version="1.0" encoding="utf-8"?>
 <p:sld xmlns:a="http://schemas.openxmlformats.org/drawingml/2006/main" xmlns:r="http://schemas.openxmlformats.org/officeDocument/2006/relationships" xmlns:p="http://schemas.openxmlformats.org/presentationml/2006/main">
-  <p:cSld name="Slide 9">
+  <p:cSld>
     <p:bg>
       <p:bgPr>
         <a:blipFill dpi="0" rotWithShape="1">
@@ -11804,25 +11277,24 @@
             <a:avLst/>
           </a:prstGeom>
           <a:noFill/>
-          <a:ln/>
-        </p:spPr>
-        <p:txBody>
-          <a:bodyPr wrap="square" lIns="0" tIns="0" rIns="0" bIns="0" rtlCol="0" anchor="ctr"/>
-          <a:lstStyle/>
-          <a:p>
-            <a:pPr indent="0" marL="0">
-              <a:buNone/>
-            </a:pPr>
-            <a:r>
-              <a:rPr lang="en-US" sz="1050" spc="300" kern="0" dirty="0">
+        </p:spPr>
+        <p:txBody>
+          <a:bodyPr wrap="square" lIns="0" tIns="0" rIns="0" bIns="0" rtlCol="0" anchor="ctr"/>
+          <a:lstStyle/>
+          <a:p>
+            <a:pPr marL="0" indent="0">
+              <a:buNone/>
+            </a:pPr>
+            <a:r>
+              <a:rPr lang="en-US" sz="1050" kern="0" spc="300" dirty="0">
                 <a:solidFill>
                   <a:srgbClr val="2B3DFF"/>
                 </a:solidFill>
-                <a:latin typeface="Segoe UI Semibold" pitchFamily="34" charset="0"/>
-                <a:ea typeface="Segoe UI Semibold" pitchFamily="34" charset="-122"/>
-                <a:cs typeface="Segoe UI Semibold" pitchFamily="34" charset="-120"/>
-              </a:rPr>
-              <a:t>09 · CHARITH · OPERATIONS AND QUALITY</a:t>
+                <a:latin typeface="Segoe UI Semibold" panose="020B0702040204020203" pitchFamily="34" charset="0"/>
+                <a:ea typeface="Segoe UI Semibold" panose="020B0702040204020203" pitchFamily="34" charset="-122"/>
+                <a:cs typeface="Segoe UI Semibold" panose="020B0702040204020203" pitchFamily="34" charset="-120"/>
+              </a:rPr>
+              <a:t>09 · OPERATIONS AND QUALITY</a:t>
             </a:r>
             <a:endParaRPr lang="en-US" sz="1050" dirty="0"/>
           </a:p>
@@ -11843,13 +11315,12 @@
             <a:avLst/>
           </a:prstGeom>
           <a:noFill/>
-          <a:ln/>
-        </p:spPr>
-        <p:txBody>
-          <a:bodyPr wrap="square" lIns="0" tIns="0" rIns="0" bIns="0" rtlCol="0" anchor="ctr"/>
-          <a:lstStyle/>
-          <a:p>
-            <a:pPr indent="0" marL="0">
+        </p:spPr>
+        <p:txBody>
+          <a:bodyPr wrap="square" lIns="0" tIns="0" rIns="0" bIns="0" rtlCol="0" anchor="ctr"/>
+          <a:lstStyle/>
+          <a:p>
+            <a:pPr marL="0" indent="0">
               <a:buNone/>
             </a:pPr>
             <a:r>
@@ -11857,23 +11328,20 @@
                 <a:solidFill>
                   <a:srgbClr val="05060C"/>
                 </a:solidFill>
-                <a:latin typeface="Segoe UI Light" pitchFamily="34" charset="0"/>
-                <a:ea typeface="Segoe UI Light" pitchFamily="34" charset="-122"/>
-                <a:cs typeface="Segoe UI Light" pitchFamily="34" charset="-120"/>
+                <a:latin typeface="Segoe UI Light" panose="020B0502040204020203" pitchFamily="34" charset="0"/>
+                <a:ea typeface="Segoe UI Light" panose="020B0502040204020203" pitchFamily="34" charset="-122"/>
+                <a:cs typeface="Segoe UI Light" panose="020B0502040204020203" pitchFamily="34" charset="-120"/>
               </a:rPr>
               <a:t>Observable, tested, one </a:t>
             </a:r>
-            <a:pPr indent="0" marL="0">
-              <a:buNone/>
-            </a:pPr>
             <a:r>
               <a:rPr lang="en-US" sz="3400" dirty="0">
                 <a:solidFill>
                   <a:srgbClr val="2B3DFF"/>
                 </a:solidFill>
-                <a:latin typeface="Segoe UI Light" pitchFamily="34" charset="0"/>
-                <a:ea typeface="Segoe UI Light" pitchFamily="34" charset="-122"/>
-                <a:cs typeface="Segoe UI Light" pitchFamily="34" charset="-120"/>
+                <a:latin typeface="Segoe UI Light" panose="020B0502040204020203" pitchFamily="34" charset="0"/>
+                <a:ea typeface="Segoe UI Light" panose="020B0502040204020203" pitchFamily="34" charset="-122"/>
+                <a:cs typeface="Segoe UI Light" panose="020B0502040204020203" pitchFamily="34" charset="-120"/>
               </a:rPr>
               <a:t>command to run</a:t>
             </a:r>
@@ -11921,13 +11389,12 @@
             <a:avLst/>
           </a:prstGeom>
           <a:noFill/>
-          <a:ln/>
-        </p:spPr>
-        <p:txBody>
-          <a:bodyPr wrap="square" lIns="0" tIns="0" rIns="0" bIns="0" rtlCol="0" anchor="ctr"/>
-          <a:lstStyle/>
-          <a:p>
-            <a:pPr indent="0" marL="0">
+        </p:spPr>
+        <p:txBody>
+          <a:bodyPr wrap="square" lIns="0" tIns="0" rIns="0" bIns="0" rtlCol="0" anchor="ctr"/>
+          <a:lstStyle/>
+          <a:p>
+            <a:pPr marL="0" indent="0">
               <a:buNone/>
             </a:pPr>
             <a:r>
@@ -11935,9 +11402,9 @@
                 <a:solidFill>
                   <a:srgbClr val="C9D1FF"/>
                 </a:solidFill>
-                <a:latin typeface="Segoe UI" pitchFamily="34" charset="0"/>
-                <a:ea typeface="Segoe UI" pitchFamily="34" charset="-122"/>
-                <a:cs typeface="Segoe UI" pitchFamily="34" charset="-120"/>
+                <a:latin typeface="Segoe UI" panose="020B0502040204020203" pitchFamily="34" charset="0"/>
+                <a:ea typeface="Segoe UI" panose="020B0502040204020203" pitchFamily="34" charset="-122"/>
+                <a:cs typeface="Segoe UI" panose="020B0502040204020203" pitchFamily="34" charset="-120"/>
               </a:rPr>
               <a:t>EC8208 Software Architecture  ·  University of Ruhuna</a:t>
             </a:r>
@@ -11960,13 +11427,12 @@
             <a:avLst/>
           </a:prstGeom>
           <a:noFill/>
-          <a:ln/>
-        </p:spPr>
-        <p:txBody>
-          <a:bodyPr wrap="square" lIns="0" tIns="0" rIns="0" bIns="0" rtlCol="0" anchor="ctr"/>
-          <a:lstStyle/>
-          <a:p>
-            <a:pPr algn="r" indent="0" marL="0">
+        </p:spPr>
+        <p:txBody>
+          <a:bodyPr wrap="square" lIns="0" tIns="0" rIns="0" bIns="0" rtlCol="0" anchor="ctr"/>
+          <a:lstStyle/>
+          <a:p>
+            <a:pPr marL="0" indent="0" algn="r">
               <a:buNone/>
             </a:pPr>
             <a:r>
@@ -11974,9 +11440,9 @@
                 <a:solidFill>
                   <a:srgbClr val="C9D1FF"/>
                 </a:solidFill>
-                <a:latin typeface="Segoe UI" pitchFamily="34" charset="0"/>
-                <a:ea typeface="Segoe UI" pitchFamily="34" charset="-122"/>
-                <a:cs typeface="Segoe UI" pitchFamily="34" charset="-120"/>
+                <a:latin typeface="Segoe UI" panose="020B0502040204020203" pitchFamily="34" charset="0"/>
+                <a:ea typeface="Segoe UI" panose="020B0502040204020203" pitchFamily="34" charset="-122"/>
+                <a:cs typeface="Segoe UI" panose="020B0502040204020203" pitchFamily="34" charset="-120"/>
               </a:rPr>
               <a:t>09  ·  9:23–9:48</a:t>
             </a:r>
@@ -12022,13 +11488,12 @@
             <a:avLst/>
           </a:prstGeom>
           <a:noFill/>
-          <a:ln/>
-        </p:spPr>
-        <p:txBody>
-          <a:bodyPr wrap="square" lIns="0" tIns="0" rIns="0" bIns="0" rtlCol="0" anchor="ctr"/>
-          <a:lstStyle/>
-          <a:p>
-            <a:pPr indent="0" marL="0">
+        </p:spPr>
+        <p:txBody>
+          <a:bodyPr wrap="square" lIns="0" tIns="0" rIns="0" bIns="0" rtlCol="0" anchor="ctr"/>
+          <a:lstStyle/>
+          <a:p>
+            <a:pPr marL="0" indent="0">
               <a:buNone/>
             </a:pPr>
             <a:r>
@@ -12036,9 +11501,9 @@
                 <a:solidFill>
                   <a:srgbClr val="FFFFFF"/>
                 </a:solidFill>
-                <a:latin typeface="Segoe UI Light" pitchFamily="34" charset="0"/>
-                <a:ea typeface="Segoe UI Light" pitchFamily="34" charset="-122"/>
-                <a:cs typeface="Segoe UI Light" pitchFamily="34" charset="-120"/>
+                <a:latin typeface="Segoe UI Light" panose="020B0502040204020203" pitchFamily="34" charset="0"/>
+                <a:ea typeface="Segoe UI Light" panose="020B0502040204020203" pitchFamily="34" charset="-122"/>
+                <a:cs typeface="Segoe UI Light" panose="020B0502040204020203" pitchFamily="34" charset="-120"/>
               </a:rPr>
               <a:t>60</a:t>
             </a:r>
@@ -12061,13 +11526,12 @@
             <a:avLst/>
           </a:prstGeom>
           <a:noFill/>
-          <a:ln/>
         </p:spPr>
         <p:txBody>
           <a:bodyPr wrap="square" lIns="0" tIns="0" rIns="0" bIns="0" rtlCol="0" anchor="t"/>
           <a:lstStyle/>
           <a:p>
-            <a:pPr indent="0" marL="0">
+            <a:pPr marL="0" indent="0">
               <a:buNone/>
             </a:pPr>
             <a:r>
@@ -12075,9 +11539,9 @@
                 <a:solidFill>
                   <a:srgbClr val="C9D1FF"/>
                 </a:solidFill>
-                <a:latin typeface="Segoe UI" pitchFamily="34" charset="0"/>
-                <a:ea typeface="Segoe UI" pitchFamily="34" charset="-122"/>
-                <a:cs typeface="Segoe UI" pitchFamily="34" charset="-120"/>
+                <a:latin typeface="Segoe UI" panose="020B0502040204020203" pitchFamily="34" charset="0"/>
+                <a:ea typeface="Segoe UI" panose="020B0502040204020203" pitchFamily="34" charset="-122"/>
+                <a:cs typeface="Segoe UI" panose="020B0502040204020203" pitchFamily="34" charset="-120"/>
               </a:rPr>
               <a:t>test methods</a:t>
             </a:r>
@@ -12123,13 +11587,12 @@
             <a:avLst/>
           </a:prstGeom>
           <a:noFill/>
-          <a:ln/>
-        </p:spPr>
-        <p:txBody>
-          <a:bodyPr wrap="square" lIns="0" tIns="0" rIns="0" bIns="0" rtlCol="0" anchor="ctr"/>
-          <a:lstStyle/>
-          <a:p>
-            <a:pPr indent="0" marL="0">
+        </p:spPr>
+        <p:txBody>
+          <a:bodyPr wrap="square" lIns="0" tIns="0" rIns="0" bIns="0" rtlCol="0" anchor="ctr"/>
+          <a:lstStyle/>
+          <a:p>
+            <a:pPr marL="0" indent="0">
               <a:buNone/>
             </a:pPr>
             <a:r>
@@ -12137,9 +11600,9 @@
                 <a:solidFill>
                   <a:srgbClr val="FFFFFF"/>
                 </a:solidFill>
-                <a:latin typeface="Segoe UI Light" pitchFamily="34" charset="0"/>
-                <a:ea typeface="Segoe UI Light" pitchFamily="34" charset="-122"/>
-                <a:cs typeface="Segoe UI Light" pitchFamily="34" charset="-120"/>
+                <a:latin typeface="Segoe UI Light" panose="020B0502040204020203" pitchFamily="34" charset="0"/>
+                <a:ea typeface="Segoe UI Light" panose="020B0502040204020203" pitchFamily="34" charset="-122"/>
+                <a:cs typeface="Segoe UI Light" panose="020B0502040204020203" pitchFamily="34" charset="-120"/>
               </a:rPr>
               <a:t>7</a:t>
             </a:r>
@@ -12162,13 +11625,12 @@
             <a:avLst/>
           </a:prstGeom>
           <a:noFill/>
-          <a:ln/>
         </p:spPr>
         <p:txBody>
           <a:bodyPr wrap="square" lIns="0" tIns="0" rIns="0" bIns="0" rtlCol="0" anchor="t"/>
           <a:lstStyle/>
           <a:p>
-            <a:pPr indent="0" marL="0">
+            <a:pPr marL="0" indent="0">
               <a:buNone/>
             </a:pPr>
             <a:r>
@@ -12176,9 +11638,9 @@
                 <a:solidFill>
                   <a:srgbClr val="C9D1FF"/>
                 </a:solidFill>
-                <a:latin typeface="Segoe UI" pitchFamily="34" charset="0"/>
-                <a:ea typeface="Segoe UI" pitchFamily="34" charset="-122"/>
-                <a:cs typeface="Segoe UI" pitchFamily="34" charset="-120"/>
+                <a:latin typeface="Segoe UI" panose="020B0502040204020203" pitchFamily="34" charset="0"/>
+                <a:ea typeface="Segoe UI" panose="020B0502040204020203" pitchFamily="34" charset="-122"/>
+                <a:cs typeface="Segoe UI" panose="020B0502040204020203" pitchFamily="34" charset="-120"/>
               </a:rPr>
               <a:t>services monitored</a:t>
             </a:r>
@@ -12224,13 +11686,12 @@
             <a:avLst/>
           </a:prstGeom>
           <a:noFill/>
-          <a:ln/>
-        </p:spPr>
-        <p:txBody>
-          <a:bodyPr wrap="square" lIns="0" tIns="0" rIns="0" bIns="0" rtlCol="0" anchor="ctr"/>
-          <a:lstStyle/>
-          <a:p>
-            <a:pPr indent="0" marL="0">
+        </p:spPr>
+        <p:txBody>
+          <a:bodyPr wrap="square" lIns="0" tIns="0" rIns="0" bIns="0" rtlCol="0" anchor="ctr"/>
+          <a:lstStyle/>
+          <a:p>
+            <a:pPr marL="0" indent="0">
               <a:buNone/>
             </a:pPr>
             <a:r>
@@ -12238,9 +11699,9 @@
                 <a:solidFill>
                   <a:srgbClr val="FFFFFF"/>
                 </a:solidFill>
-                <a:latin typeface="Segoe UI Light" pitchFamily="34" charset="0"/>
-                <a:ea typeface="Segoe UI Light" pitchFamily="34" charset="-122"/>
-                <a:cs typeface="Segoe UI Light" pitchFamily="34" charset="-120"/>
+                <a:latin typeface="Segoe UI Light" panose="020B0502040204020203" pitchFamily="34" charset="0"/>
+                <a:ea typeface="Segoe UI Light" panose="020B0502040204020203" pitchFamily="34" charset="-122"/>
+                <a:cs typeface="Segoe UI Light" panose="020B0502040204020203" pitchFamily="34" charset="-120"/>
               </a:rPr>
               <a:t>19</a:t>
             </a:r>
@@ -12263,13 +11724,12 @@
             <a:avLst/>
           </a:prstGeom>
           <a:noFill/>
-          <a:ln/>
         </p:spPr>
         <p:txBody>
           <a:bodyPr wrap="square" lIns="0" tIns="0" rIns="0" bIns="0" rtlCol="0" anchor="t"/>
           <a:lstStyle/>
           <a:p>
-            <a:pPr indent="0" marL="0">
+            <a:pPr marL="0" indent="0">
               <a:buNone/>
             </a:pPr>
             <a:r>
@@ -12277,9 +11737,9 @@
                 <a:solidFill>
                   <a:srgbClr val="C9D1FF"/>
                 </a:solidFill>
-                <a:latin typeface="Segoe UI" pitchFamily="34" charset="0"/>
-                <a:ea typeface="Segoe UI" pitchFamily="34" charset="-122"/>
-                <a:cs typeface="Segoe UI" pitchFamily="34" charset="-120"/>
+                <a:latin typeface="Segoe UI" panose="020B0502040204020203" pitchFamily="34" charset="0"/>
+                <a:ea typeface="Segoe UI" panose="020B0502040204020203" pitchFamily="34" charset="-122"/>
+                <a:cs typeface="Segoe UI" panose="020B0502040204020203" pitchFamily="34" charset="-120"/>
               </a:rPr>
               <a:t>containers</a:t>
             </a:r>
@@ -12325,13 +11785,12 @@
             <a:avLst/>
           </a:prstGeom>
           <a:noFill/>
-          <a:ln/>
-        </p:spPr>
-        <p:txBody>
-          <a:bodyPr wrap="square" lIns="0" tIns="0" rIns="0" bIns="0" rtlCol="0" anchor="ctr"/>
-          <a:lstStyle/>
-          <a:p>
-            <a:pPr indent="0" marL="0">
+        </p:spPr>
+        <p:txBody>
+          <a:bodyPr wrap="square" lIns="0" tIns="0" rIns="0" bIns="0" rtlCol="0" anchor="ctr"/>
+          <a:lstStyle/>
+          <a:p>
+            <a:pPr marL="0" indent="0">
               <a:buNone/>
             </a:pPr>
             <a:r>
@@ -12339,9 +11798,9 @@
                 <a:solidFill>
                   <a:srgbClr val="FFFFFF"/>
                 </a:solidFill>
-                <a:latin typeface="Segoe UI Light" pitchFamily="34" charset="0"/>
-                <a:ea typeface="Segoe UI Light" pitchFamily="34" charset="-122"/>
-                <a:cs typeface="Segoe UI Light" pitchFamily="34" charset="-120"/>
+                <a:latin typeface="Segoe UI Light" panose="020B0502040204020203" pitchFamily="34" charset="0"/>
+                <a:ea typeface="Segoe UI Light" panose="020B0502040204020203" pitchFamily="34" charset="-122"/>
+                <a:cs typeface="Segoe UI Light" panose="020B0502040204020203" pitchFamily="34" charset="-120"/>
               </a:rPr>
               <a:t>1</a:t>
             </a:r>
@@ -12364,13 +11823,12 @@
             <a:avLst/>
           </a:prstGeom>
           <a:noFill/>
-          <a:ln/>
         </p:spPr>
         <p:txBody>
           <a:bodyPr wrap="square" lIns="0" tIns="0" rIns="0" bIns="0" rtlCol="0" anchor="t"/>
           <a:lstStyle/>
           <a:p>
-            <a:pPr indent="0" marL="0">
+            <a:pPr marL="0" indent="0">
               <a:buNone/>
             </a:pPr>
             <a:r>
@@ -12378,9 +11836,9 @@
                 <a:solidFill>
                   <a:srgbClr val="C9D1FF"/>
                 </a:solidFill>
-                <a:latin typeface="Segoe UI" pitchFamily="34" charset="0"/>
-                <a:ea typeface="Segoe UI" pitchFamily="34" charset="-122"/>
-                <a:cs typeface="Segoe UI" pitchFamily="34" charset="-120"/>
+                <a:latin typeface="Segoe UI" panose="020B0502040204020203" pitchFamily="34" charset="0"/>
+                <a:ea typeface="Segoe UI" panose="020B0502040204020203" pitchFamily="34" charset="-122"/>
+                <a:cs typeface="Segoe UI" panose="020B0502040204020203" pitchFamily="34" charset="-120"/>
               </a:rPr>
               <a:t>command to start</a:t>
             </a:r>
@@ -12434,13 +11892,12 @@
             <a:avLst/>
           </a:prstGeom>
           <a:noFill/>
-          <a:ln/>
-        </p:spPr>
-        <p:txBody>
-          <a:bodyPr wrap="square" lIns="0" tIns="0" rIns="0" bIns="0" rtlCol="0" anchor="ctr"/>
-          <a:lstStyle/>
-          <a:p>
-            <a:pPr indent="0" marL="0">
+        </p:spPr>
+        <p:txBody>
+          <a:bodyPr wrap="square" lIns="0" tIns="0" rIns="0" bIns="0" rtlCol="0" anchor="ctr"/>
+          <a:lstStyle/>
+          <a:p>
+            <a:pPr marL="0" indent="0">
               <a:buNone/>
             </a:pPr>
             <a:r>
@@ -12448,23 +11905,20 @@
                 <a:solidFill>
                   <a:srgbClr val="8FA0FF"/>
                 </a:solidFill>
-                <a:latin typeface="Segoe UI" pitchFamily="34" charset="0"/>
-                <a:ea typeface="Segoe UI" pitchFamily="34" charset="-122"/>
-                <a:cs typeface="Segoe UI" pitchFamily="34" charset="-120"/>
+                <a:latin typeface="Segoe UI" panose="020B0502040204020203" pitchFamily="34" charset="0"/>
+                <a:ea typeface="Segoe UI" panose="020B0502040204020203" pitchFamily="34" charset="-122"/>
+                <a:cs typeface="Segoe UI" panose="020B0502040204020203" pitchFamily="34" charset="-120"/>
               </a:rPr>
               <a:t>LIVE  </a:t>
             </a:r>
-            <a:pPr indent="0" marL="0">
-              <a:buNone/>
-            </a:pPr>
             <a:r>
               <a:rPr lang="en-US" sz="1100" dirty="0">
                 <a:solidFill>
                   <a:srgbClr val="FFFFFF"/>
                 </a:solidFill>
-                <a:latin typeface="Segoe UI" pitchFamily="34" charset="0"/>
-                <a:ea typeface="Segoe UI" pitchFamily="34" charset="-122"/>
-                <a:cs typeface="Segoe UI" pitchFamily="34" charset="-120"/>
+                <a:latin typeface="Segoe UI" panose="020B0502040204020203" pitchFamily="34" charset="0"/>
+                <a:ea typeface="Segoe UI" panose="020B0502040204020203" pitchFamily="34" charset="-122"/>
+                <a:cs typeface="Segoe UI" panose="020B0502040204020203" pitchFamily="34" charset="-120"/>
               </a:rPr>
               <a:t>Grafana platform health</a:t>
             </a:r>
@@ -12556,23 +12010,6 @@
         <a:font script="Viet" typeface="Times New Roman"/>
         <a:font script="Uigh" typeface="Microsoft Uighur"/>
         <a:font script="Geor" typeface="Sylfaen"/>
-        <a:font script="Armn" typeface="Arial"/>
-        <a:font script="Bugi" typeface="Leelawadee UI"/>
-        <a:font script="Bopo" typeface="Microsoft JhengHei"/>
-        <a:font script="Java" typeface="Javanese Text"/>
-        <a:font script="Lisu" typeface="Segoe UI"/>
-        <a:font script="Mymr" typeface="Myanmar Text"/>
-        <a:font script="Nkoo" typeface="Ebrima"/>
-        <a:font script="Olck" typeface="Nirmala UI"/>
-        <a:font script="Osma" typeface="Ebrima"/>
-        <a:font script="Phag" typeface="Phagspa"/>
-        <a:font script="Syrn" typeface="Estrangelo Edessa"/>
-        <a:font script="Syrj" typeface="Estrangelo Edessa"/>
-        <a:font script="Syre" typeface="Estrangelo Edessa"/>
-        <a:font script="Sora" typeface="Nirmala UI"/>
-        <a:font script="Tale" typeface="Microsoft Tai Le"/>
-        <a:font script="Talu" typeface="Microsoft New Tai Lue"/>
-        <a:font script="Tfng" typeface="Ebrima"/>
       </a:majorFont>
       <a:minorFont>
         <a:latin typeface="Segoe UI"/>
@@ -12608,23 +12045,6 @@
         <a:font script="Viet" typeface="Arial"/>
         <a:font script="Uigh" typeface="Microsoft Uighur"/>
         <a:font script="Geor" typeface="Sylfaen"/>
-        <a:font script="Armn" typeface="Arial"/>
-        <a:font script="Bugi" typeface="Leelawadee UI"/>
-        <a:font script="Bopo" typeface="Microsoft JhengHei"/>
-        <a:font script="Java" typeface="Javanese Text"/>
-        <a:font script="Lisu" typeface="Segoe UI"/>
-        <a:font script="Mymr" typeface="Myanmar Text"/>
-        <a:font script="Nkoo" typeface="Ebrima"/>
-        <a:font script="Olck" typeface="Nirmala UI"/>
-        <a:font script="Osma" typeface="Ebrima"/>
-        <a:font script="Phag" typeface="Phagspa"/>
-        <a:font script="Syrn" typeface="Estrangelo Edessa"/>
-        <a:font script="Syrj" typeface="Estrangelo Edessa"/>
-        <a:font script="Syre" typeface="Estrangelo Edessa"/>
-        <a:font script="Sora" typeface="Nirmala UI"/>
-        <a:font script="Tale" typeface="Microsoft Tai Le"/>
-        <a:font script="Talu" typeface="Microsoft New Tai Lue"/>
-        <a:font script="Tfng" typeface="Ebrima"/>
       </a:minorFont>
     </a:fontScheme>
     <a:fmtScheme name="Office">
@@ -12765,8 +12185,265 @@
       </a:bgFillStyleLst>
     </a:fmtScheme>
   </a:themeElements>
-  <a:objectDefaults/>
-  <a:extraClrSchemeLst/>
+  <a:extLst>
+    <a:ext uri="{05A4C25C-085E-4340-85A3-A5531E510DB2}">
+      <thm15:themeFamily xmlns:thm15="http://schemas.microsoft.com/office/thememl/2012/main" name="Office Theme" id="{62F939B6-93AF-4DB8-9C6B-D6C7DFDC589F}" vid="{4A3C46E8-61CC-4603-A589-7422A47A8E4A}"/>
+    </a:ext>
+  </a:extLst>
+</a:theme>
+</file>
+
+<file path=ppt/theme/theme2.xml><?xml version="1.0" encoding="utf-8"?>
+<a:theme xmlns:a="http://schemas.openxmlformats.org/drawingml/2006/main" name="Office Theme">
+  <a:themeElements>
+    <a:clrScheme name="Office">
+      <a:dk1>
+        <a:sysClr val="windowText" lastClr="000000"/>
+      </a:dk1>
+      <a:lt1>
+        <a:sysClr val="window" lastClr="FFFFFF"/>
+      </a:lt1>
+      <a:dk2>
+        <a:srgbClr val="44546A"/>
+      </a:dk2>
+      <a:lt2>
+        <a:srgbClr val="E7E6E6"/>
+      </a:lt2>
+      <a:accent1>
+        <a:srgbClr val="4472C4"/>
+      </a:accent1>
+      <a:accent2>
+        <a:srgbClr val="ED7D31"/>
+      </a:accent2>
+      <a:accent3>
+        <a:srgbClr val="A5A5A5"/>
+      </a:accent3>
+      <a:accent4>
+        <a:srgbClr val="FFC000"/>
+      </a:accent4>
+      <a:accent5>
+        <a:srgbClr val="5B9BD5"/>
+      </a:accent5>
+      <a:accent6>
+        <a:srgbClr val="70AD47"/>
+      </a:accent6>
+      <a:hlink>
+        <a:srgbClr val="0563C1"/>
+      </a:hlink>
+      <a:folHlink>
+        <a:srgbClr val="954F72"/>
+      </a:folHlink>
+    </a:clrScheme>
+    <a:fontScheme name="Office">
+      <a:majorFont>
+        <a:latin typeface="Calibri Light"/>
+        <a:ea typeface=""/>
+        <a:cs typeface=""/>
+        <a:font script="Jpan" typeface="游ゴシック Light"/>
+        <a:font script="Hang" typeface="맑은 고딕"/>
+        <a:font script="Hans" typeface="等线 Light"/>
+        <a:font script="Hant" typeface="新細明體"/>
+        <a:font script="Arab" typeface="Times New Roman"/>
+        <a:font script="Hebr" typeface="Times New Roman"/>
+        <a:font script="Thai" typeface="Angsana New"/>
+        <a:font script="Ethi" typeface="Nyala"/>
+        <a:font script="Beng" typeface="Vrinda"/>
+        <a:font script="Gujr" typeface="Shruti"/>
+        <a:font script="Khmr" typeface="MoolBoran"/>
+        <a:font script="Knda" typeface="Tunga"/>
+        <a:font script="Guru" typeface="Raavi"/>
+        <a:font script="Cans" typeface="Euphemia"/>
+        <a:font script="Cher" typeface="Plantagenet Cherokee"/>
+        <a:font script="Yiii" typeface="Microsoft Yi Baiti"/>
+        <a:font script="Tibt" typeface="Microsoft Himalaya"/>
+        <a:font script="Thaa" typeface="MV Boli"/>
+        <a:font script="Deva" typeface="Mangal"/>
+        <a:font script="Telu" typeface="Gautami"/>
+        <a:font script="Taml" typeface="Latha"/>
+        <a:font script="Syrc" typeface="Estrangelo Edessa"/>
+        <a:font script="Orya" typeface="Kalinga"/>
+        <a:font script="Mlym" typeface="Kartika"/>
+        <a:font script="Laoo" typeface="DokChampa"/>
+        <a:font script="Sinh" typeface="Iskoola Pota"/>
+        <a:font script="Mong" typeface="Mongolian Baiti"/>
+        <a:font script="Viet" typeface="Times New Roman"/>
+        <a:font script="Uigh" typeface="Microsoft Uighur"/>
+        <a:font script="Geor" typeface="Sylfaen"/>
+      </a:majorFont>
+      <a:minorFont>
+        <a:latin typeface="Calibri"/>
+        <a:ea typeface=""/>
+        <a:cs typeface=""/>
+        <a:font script="Jpan" typeface="游ゴシック"/>
+        <a:font script="Hang" typeface="맑은 고딕"/>
+        <a:font script="Hans" typeface="等线"/>
+        <a:font script="Hant" typeface="新細明體"/>
+        <a:font script="Arab" typeface="Arial"/>
+        <a:font script="Hebr" typeface="Arial"/>
+        <a:font script="Thai" typeface="Cordia New"/>
+        <a:font script="Ethi" typeface="Nyala"/>
+        <a:font script="Beng" typeface="Vrinda"/>
+        <a:font script="Gujr" typeface="Shruti"/>
+        <a:font script="Khmr" typeface="DaunPenh"/>
+        <a:font script="Knda" typeface="Tunga"/>
+        <a:font script="Guru" typeface="Raavi"/>
+        <a:font script="Cans" typeface="Euphemia"/>
+        <a:font script="Cher" typeface="Plantagenet Cherokee"/>
+        <a:font script="Yiii" typeface="Microsoft Yi Baiti"/>
+        <a:font script="Tibt" typeface="Microsoft Himalaya"/>
+        <a:font script="Thaa" typeface="MV Boli"/>
+        <a:font script="Deva" typeface="Mangal"/>
+        <a:font script="Telu" typeface="Gautami"/>
+        <a:font script="Taml" typeface="Latha"/>
+        <a:font script="Syrc" typeface="Estrangelo Edessa"/>
+        <a:font script="Orya" typeface="Kalinga"/>
+        <a:font script="Mlym" typeface="Kartika"/>
+        <a:font script="Laoo" typeface="DokChampa"/>
+        <a:font script="Sinh" typeface="Iskoola Pota"/>
+        <a:font script="Mong" typeface="Mongolian Baiti"/>
+        <a:font script="Viet" typeface="Arial"/>
+        <a:font script="Uigh" typeface="Microsoft Uighur"/>
+        <a:font script="Geor" typeface="Sylfaen"/>
+      </a:minorFont>
+    </a:fontScheme>
+    <a:fmtScheme name="Office">
+      <a:fillStyleLst>
+        <a:solidFill>
+          <a:schemeClr val="phClr"/>
+        </a:solidFill>
+        <a:gradFill rotWithShape="1">
+          <a:gsLst>
+            <a:gs pos="0">
+              <a:schemeClr val="phClr">
+                <a:lumMod val="110000"/>
+                <a:satMod val="105000"/>
+                <a:tint val="67000"/>
+              </a:schemeClr>
+            </a:gs>
+            <a:gs pos="50000">
+              <a:schemeClr val="phClr">
+                <a:lumMod val="105000"/>
+                <a:satMod val="103000"/>
+                <a:tint val="73000"/>
+              </a:schemeClr>
+            </a:gs>
+            <a:gs pos="100000">
+              <a:schemeClr val="phClr">
+                <a:lumMod val="105000"/>
+                <a:satMod val="109000"/>
+                <a:tint val="81000"/>
+              </a:schemeClr>
+            </a:gs>
+          </a:gsLst>
+          <a:lin ang="5400000" scaled="0"/>
+        </a:gradFill>
+        <a:gradFill rotWithShape="1">
+          <a:gsLst>
+            <a:gs pos="0">
+              <a:schemeClr val="phClr">
+                <a:satMod val="103000"/>
+                <a:lumMod val="102000"/>
+                <a:tint val="94000"/>
+              </a:schemeClr>
+            </a:gs>
+            <a:gs pos="50000">
+              <a:schemeClr val="phClr">
+                <a:satMod val="110000"/>
+                <a:lumMod val="100000"/>
+                <a:shade val="100000"/>
+              </a:schemeClr>
+            </a:gs>
+            <a:gs pos="100000">
+              <a:schemeClr val="phClr">
+                <a:lumMod val="99000"/>
+                <a:satMod val="120000"/>
+                <a:shade val="78000"/>
+              </a:schemeClr>
+            </a:gs>
+          </a:gsLst>
+          <a:lin ang="5400000" scaled="0"/>
+        </a:gradFill>
+      </a:fillStyleLst>
+      <a:lnStyleLst>
+        <a:ln w="6350" cap="flat" cmpd="sng" algn="ctr">
+          <a:solidFill>
+            <a:schemeClr val="phClr"/>
+          </a:solidFill>
+          <a:prstDash val="solid"/>
+          <a:miter lim="800000"/>
+        </a:ln>
+        <a:ln w="12700" cap="flat" cmpd="sng" algn="ctr">
+          <a:solidFill>
+            <a:schemeClr val="phClr"/>
+          </a:solidFill>
+          <a:prstDash val="solid"/>
+          <a:miter lim="800000"/>
+        </a:ln>
+        <a:ln w="19050" cap="flat" cmpd="sng" algn="ctr">
+          <a:solidFill>
+            <a:schemeClr val="phClr"/>
+          </a:solidFill>
+          <a:prstDash val="solid"/>
+          <a:miter lim="800000"/>
+        </a:ln>
+      </a:lnStyleLst>
+      <a:effectStyleLst>
+        <a:effectStyle>
+          <a:effectLst/>
+        </a:effectStyle>
+        <a:effectStyle>
+          <a:effectLst/>
+        </a:effectStyle>
+        <a:effectStyle>
+          <a:effectLst>
+            <a:outerShdw blurRad="57150" dist="19050" dir="5400000" algn="ctr" rotWithShape="0">
+              <a:srgbClr val="000000">
+                <a:alpha val="63000"/>
+              </a:srgbClr>
+            </a:outerShdw>
+          </a:effectLst>
+        </a:effectStyle>
+      </a:effectStyleLst>
+      <a:bgFillStyleLst>
+        <a:solidFill>
+          <a:schemeClr val="phClr"/>
+        </a:solidFill>
+        <a:solidFill>
+          <a:schemeClr val="phClr">
+            <a:tint val="95000"/>
+            <a:satMod val="170000"/>
+          </a:schemeClr>
+        </a:solidFill>
+        <a:gradFill rotWithShape="1">
+          <a:gsLst>
+            <a:gs pos="0">
+              <a:schemeClr val="phClr">
+                <a:tint val="93000"/>
+                <a:satMod val="150000"/>
+                <a:shade val="98000"/>
+                <a:lumMod val="102000"/>
+              </a:schemeClr>
+            </a:gs>
+            <a:gs pos="50000">
+              <a:schemeClr val="phClr">
+                <a:tint val="98000"/>
+                <a:satMod val="130000"/>
+                <a:shade val="90000"/>
+                <a:lumMod val="103000"/>
+              </a:schemeClr>
+            </a:gs>
+            <a:gs pos="100000">
+              <a:schemeClr val="phClr">
+                <a:shade val="63000"/>
+                <a:satMod val="120000"/>
+              </a:schemeClr>
+            </a:gs>
+          </a:gsLst>
+          <a:lin ang="5400000" scaled="0"/>
+        </a:gradFill>
+      </a:bgFillStyleLst>
+    </a:fmtScheme>
+  </a:themeElements>
   <a:extLst>
     <a:ext uri="{05A4C25C-085E-4340-85A3-A5531E510DB2}">
       <thm15:themeFamily xmlns:thm15="http://schemas.microsoft.com/office/thememl/2012/main" name="Office Theme" id="{62F939B6-93AF-4DB8-9C6B-D6C7DFDC589F}" vid="{4A3C46E8-61CC-4603-A589-7422A47A8E4A}"/>
